--- a/Geschichte_8/Absolutismus_Wiederholung/Praesentation_Absolutismus_Wiederholung.pptx
+++ b/Geschichte_8/Absolutismus_Wiederholung/Praesentation_Absolutismus_Wiederholung.pptx
@@ -1216,7 +1216,7 @@
           <a:p>
             <a:r>
               <a:rPr lang="en-US" dirty="0"/>
-              <a:t>Ansage: „Hefte zu. Ihr schreibt noch nichts auf. Meldet euch.“ Tabelle (Stand | Anteil | Rechte | Pflichten | Mitbestimmung) bereits leer an der Tafel. Nach dem gemeinsamen Ausfüllen: „Jetzt schreibt ihr ab: die Tabelle. Mit Lineal.“ Lösungen siehe Tafelskript. Hinweis zur Mitbestimmung: Die Generalstände (je 1 Stimme pro Stand) wurden von 1614 bis 1789 nicht einberufen – unter Ludwig XIV. gab es praktisch keine Mitbestimmung.</a:t>
+              <a:t>Ansage: „Hefte zu. Ihr schreibt noch nichts auf. Meldet euch.“ Raster aus dem Gruppenpuzzle (Stand | Anzahl | Bildung | Vorrechte | Pflichten) plus Spalte Mitbestimmung bereits leer an der Tafel. Nach dem gemeinsamen Ausfüllen: „Jetzt schreibt ihr ab: die Tabelle. Mit Lineal.“ Lösungen siehe Tafelskript. Hinweis zur Mitbestimmung: Die Generalstände (je 1 Stimme pro Stand) wurden von 1614 bis 1789 nicht einberufen – unter Ludwig XIV. gab es praktisch keine Mitbestimmung.</a:t>
             </a:r>
             <a:endParaRPr lang="en-US" dirty="0"/>
           </a:p>
@@ -3521,7 +3521,7 @@
                 <a:ea typeface="Calibri" pitchFamily="34" charset="-122"/>
                 <a:cs typeface="Calibri" pitchFamily="34" charset="-120"/>
               </a:rPr>
-              <a:t>Rechte · Pflichten · Anzahl (Anteil der Stände) · Mitbestimmung</a:t>
+              <a:t>Vorrechte · Pflichten · Anzahl · Mitbestimmung (dazu: Bildung)</a:t>
             </a:r>
             <a:endParaRPr lang="en-US" sz="1900" dirty="0"/>
           </a:p>
@@ -8036,7 +8036,7 @@
         <p:spPr>
           <a:xfrm>
             <a:off x="548640" y="3209544"/>
-            <a:ext cx="2011680" cy="411480"/>
+            <a:ext cx="1554480" cy="411480"/>
           </a:xfrm>
           <a:prstGeom prst="roundRect">
             <a:avLst>
@@ -8058,7 +8058,7 @@
         <p:spPr>
           <a:xfrm>
             <a:off x="548640" y="3209544"/>
-            <a:ext cx="2011680" cy="411480"/>
+            <a:ext cx="1554480" cy="411480"/>
           </a:xfrm>
           <a:prstGeom prst="rect">
             <a:avLst/>
@@ -8096,8 +8096,8 @@
         </p:nvSpPr>
         <p:spPr>
           <a:xfrm>
-            <a:off x="2651760" y="3209544"/>
-            <a:ext cx="1371600" cy="411480"/>
+            <a:off x="2194560" y="3209544"/>
+            <a:ext cx="1097280" cy="411480"/>
           </a:xfrm>
           <a:prstGeom prst="roundRect">
             <a:avLst>
@@ -8118,8 +8118,8 @@
         </p:nvSpPr>
         <p:spPr>
           <a:xfrm>
-            <a:off x="2651760" y="3209544"/>
-            <a:ext cx="1371600" cy="411480"/>
+            <a:off x="2194560" y="3209544"/>
+            <a:ext cx="1097280" cy="411480"/>
           </a:xfrm>
           <a:prstGeom prst="rect">
             <a:avLst/>
@@ -8143,7 +8143,7 @@
                 <a:ea typeface="Calibri" pitchFamily="34" charset="-122"/>
                 <a:cs typeface="Calibri" pitchFamily="34" charset="-120"/>
               </a:rPr>
-              <a:t>Anteil</a:t>
+              <a:t>Anzahl</a:t>
             </a:r>
             <a:endParaRPr lang="en-US" sz="1700" dirty="0"/>
           </a:p>
@@ -8157,8 +8157,8 @@
         </p:nvSpPr>
         <p:spPr>
           <a:xfrm>
-            <a:off x="4114800" y="3209544"/>
-            <a:ext cx="2560320" cy="411480"/>
+            <a:off x="3383280" y="3209544"/>
+            <a:ext cx="1645920" cy="411480"/>
           </a:xfrm>
           <a:prstGeom prst="roundRect">
             <a:avLst>
@@ -8179,8 +8179,8 @@
         </p:nvSpPr>
         <p:spPr>
           <a:xfrm>
-            <a:off x="4114800" y="3209544"/>
-            <a:ext cx="2560320" cy="411480"/>
+            <a:off x="3383280" y="3209544"/>
+            <a:ext cx="1645920" cy="411480"/>
           </a:xfrm>
           <a:prstGeom prst="rect">
             <a:avLst/>
@@ -8204,7 +8204,7 @@
                 <a:ea typeface="Calibri" pitchFamily="34" charset="-122"/>
                 <a:cs typeface="Calibri" pitchFamily="34" charset="-120"/>
               </a:rPr>
-              <a:t>Rechte</a:t>
+              <a:t>Bildung</a:t>
             </a:r>
             <a:endParaRPr lang="en-US" sz="1700" dirty="0"/>
           </a:p>
@@ -8218,8 +8218,8 @@
         </p:nvSpPr>
         <p:spPr>
           <a:xfrm>
-            <a:off x="6766560" y="3209544"/>
-            <a:ext cx="2560320" cy="411480"/>
+            <a:off x="5120640" y="3209544"/>
+            <a:ext cx="2103120" cy="411480"/>
           </a:xfrm>
           <a:prstGeom prst="roundRect">
             <a:avLst>
@@ -8240,8 +8240,8 @@
         </p:nvSpPr>
         <p:spPr>
           <a:xfrm>
-            <a:off x="6766560" y="3209544"/>
-            <a:ext cx="2560320" cy="411480"/>
+            <a:off x="5120640" y="3209544"/>
+            <a:ext cx="2103120" cy="411480"/>
           </a:xfrm>
           <a:prstGeom prst="rect">
             <a:avLst/>
@@ -8265,7 +8265,7 @@
                 <a:ea typeface="Calibri" pitchFamily="34" charset="-122"/>
                 <a:cs typeface="Calibri" pitchFamily="34" charset="-120"/>
               </a:rPr>
-              <a:t>Pflichten</a:t>
+              <a:t>Vorrechte</a:t>
             </a:r>
             <a:endParaRPr lang="en-US" sz="1700" dirty="0"/>
           </a:p>
@@ -8279,8 +8279,8 @@
         </p:nvSpPr>
         <p:spPr>
           <a:xfrm>
-            <a:off x="9418320" y="3209544"/>
-            <a:ext cx="2148840" cy="411480"/>
+            <a:off x="7315200" y="3209544"/>
+            <a:ext cx="2103120" cy="411480"/>
           </a:xfrm>
           <a:prstGeom prst="roundRect">
             <a:avLst>
@@ -8301,8 +8301,8 @@
         </p:nvSpPr>
         <p:spPr>
           <a:xfrm>
-            <a:off x="9418320" y="3209544"/>
-            <a:ext cx="2148840" cy="411480"/>
+            <a:off x="7315200" y="3209544"/>
+            <a:ext cx="2103120" cy="411480"/>
           </a:xfrm>
           <a:prstGeom prst="rect">
             <a:avLst/>
@@ -8326,7 +8326,7 @@
                 <a:ea typeface="Calibri" pitchFamily="34" charset="-122"/>
                 <a:cs typeface="Calibri" pitchFamily="34" charset="-120"/>
               </a:rPr>
-              <a:t>Mitbestimmung</a:t>
+              <a:t>Pflichten</a:t>
             </a:r>
             <a:endParaRPr lang="en-US" sz="1700" dirty="0"/>
           </a:p>
@@ -8340,8 +8340,69 @@
         </p:nvSpPr>
         <p:spPr>
           <a:xfrm>
+            <a:off x="9509760" y="3209544"/>
+            <a:ext cx="2057400" cy="411480"/>
+          </a:xfrm>
+          <a:prstGeom prst="roundRect">
+            <a:avLst>
+              <a:gd name="adj" fmla="val 11111"/>
+            </a:avLst>
+          </a:prstGeom>
+          <a:solidFill>
+            <a:srgbClr val="1E2761"/>
+          </a:solidFill>
+          <a:ln/>
+        </p:spPr>
+      </p:sp>
+      <p:sp>
+        <p:nvSpPr>
+          <p:cNvPr id="30" name="Text 27"/>
+          <p:cNvSpPr txBox="1"/>
+          <p:nvPr/>
+        </p:nvSpPr>
+        <p:spPr>
+          <a:xfrm>
+            <a:off x="9509760" y="3209544"/>
+            <a:ext cx="2057400" cy="411480"/>
+          </a:xfrm>
+          <a:prstGeom prst="rect">
+            <a:avLst/>
+          </a:prstGeom>
+          <a:noFill/>
+          <a:ln/>
+        </p:spPr>
+        <p:txBody>
+          <a:bodyPr wrap="square" lIns="0" tIns="0" rIns="0" bIns="0" rtlCol="0" anchor="ctr"/>
+          <a:lstStyle/>
+          <a:p>
+            <a:pPr algn="ctr" indent="0" marL="0">
+              <a:buNone/>
+            </a:pPr>
+            <a:r>
+              <a:rPr lang="en-US" sz="1700" b="1" dirty="0">
+                <a:solidFill>
+                  <a:srgbClr val="FFFFFF"/>
+                </a:solidFill>
+                <a:latin typeface="Calibri" pitchFamily="34" charset="0"/>
+                <a:ea typeface="Calibri" pitchFamily="34" charset="-122"/>
+                <a:cs typeface="Calibri" pitchFamily="34" charset="-120"/>
+              </a:rPr>
+              <a:t>Mitbestimmung</a:t>
+            </a:r>
+            <a:endParaRPr lang="en-US" sz="1700" dirty="0"/>
+          </a:p>
+        </p:txBody>
+      </p:sp>
+      <p:sp>
+        <p:nvSpPr>
+          <p:cNvPr id="31" name="Shape 28"/>
+          <p:cNvSpPr/>
+          <p:nvPr/>
+        </p:nvSpPr>
+        <p:spPr>
+          <a:xfrm>
             <a:off x="548640" y="3694176"/>
-            <a:ext cx="2011680" cy="585216"/>
+            <a:ext cx="1554480" cy="585216"/>
           </a:xfrm>
           <a:prstGeom prst="roundRect">
             <a:avLst>
@@ -8356,14 +8417,14 @@
       </p:sp>
       <p:sp>
         <p:nvSpPr>
-          <p:cNvPr id="30" name="Text 27"/>
+          <p:cNvPr id="32" name="Text 29"/>
           <p:cNvSpPr txBox="1"/>
           <p:nvPr/>
         </p:nvSpPr>
         <p:spPr>
           <a:xfrm>
             <a:off x="548640" y="3694176"/>
-            <a:ext cx="2011680" cy="585216"/>
+            <a:ext cx="1554480" cy="585216"/>
           </a:xfrm>
           <a:prstGeom prst="rect">
             <a:avLst/>
@@ -8395,14 +8456,14 @@
       </p:sp>
       <p:sp>
         <p:nvSpPr>
-          <p:cNvPr id="31" name="Shape 28"/>
+          <p:cNvPr id="33" name="Shape 30"/>
           <p:cNvSpPr/>
           <p:nvPr/>
         </p:nvSpPr>
         <p:spPr>
           <a:xfrm>
-            <a:off x="2651760" y="3694176"/>
-            <a:ext cx="1371600" cy="585216"/>
+            <a:off x="2194560" y="3694176"/>
+            <a:ext cx="1097280" cy="585216"/>
           </a:xfrm>
           <a:prstGeom prst="roundRect">
             <a:avLst>
@@ -8417,14 +8478,14 @@
       </p:sp>
       <p:sp>
         <p:nvSpPr>
-          <p:cNvPr id="32" name="Shape 29"/>
+          <p:cNvPr id="34" name="Shape 31"/>
           <p:cNvSpPr/>
           <p:nvPr/>
         </p:nvSpPr>
         <p:spPr>
           <a:xfrm>
-            <a:off x="4114800" y="3694176"/>
-            <a:ext cx="2560320" cy="585216"/>
+            <a:off x="3383280" y="3694176"/>
+            <a:ext cx="1645920" cy="585216"/>
           </a:xfrm>
           <a:prstGeom prst="roundRect">
             <a:avLst>
@@ -8439,14 +8500,14 @@
       </p:sp>
       <p:sp>
         <p:nvSpPr>
-          <p:cNvPr id="33" name="Shape 30"/>
+          <p:cNvPr id="35" name="Shape 32"/>
           <p:cNvSpPr/>
           <p:nvPr/>
         </p:nvSpPr>
         <p:spPr>
           <a:xfrm>
-            <a:off x="6766560" y="3694176"/>
-            <a:ext cx="2560320" cy="585216"/>
+            <a:off x="5120640" y="3694176"/>
+            <a:ext cx="2103120" cy="585216"/>
           </a:xfrm>
           <a:prstGeom prst="roundRect">
             <a:avLst>
@@ -8461,14 +8522,14 @@
       </p:sp>
       <p:sp>
         <p:nvSpPr>
-          <p:cNvPr id="34" name="Shape 31"/>
+          <p:cNvPr id="36" name="Shape 33"/>
           <p:cNvSpPr/>
           <p:nvPr/>
         </p:nvSpPr>
         <p:spPr>
           <a:xfrm>
-            <a:off x="9418320" y="3694176"/>
-            <a:ext cx="2148840" cy="585216"/>
+            <a:off x="7315200" y="3694176"/>
+            <a:ext cx="2103120" cy="585216"/>
           </a:xfrm>
           <a:prstGeom prst="roundRect">
             <a:avLst>
@@ -8483,14 +8544,14 @@
       </p:sp>
       <p:sp>
         <p:nvSpPr>
-          <p:cNvPr id="35" name="Shape 32"/>
+          <p:cNvPr id="37" name="Shape 34"/>
           <p:cNvSpPr/>
           <p:nvPr/>
         </p:nvSpPr>
         <p:spPr>
           <a:xfrm>
-            <a:off x="548640" y="4352544"/>
-            <a:ext cx="2011680" cy="585216"/>
+            <a:off x="9509760" y="3694176"/>
+            <a:ext cx="2057400" cy="585216"/>
           </a:xfrm>
           <a:prstGeom prst="roundRect">
             <a:avLst>
@@ -8498,60 +8559,21 @@
             </a:avLst>
           </a:prstGeom>
           <a:solidFill>
-            <a:srgbClr val="EAF0FA"/>
-          </a:solidFill>
-          <a:ln/>
-        </p:spPr>
-      </p:sp>
-      <p:sp>
-        <p:nvSpPr>
-          <p:cNvPr id="36" name="Text 33"/>
-          <p:cNvSpPr txBox="1"/>
+            <a:srgbClr val="F4F7FD"/>
+          </a:solidFill>
+          <a:ln/>
+        </p:spPr>
+      </p:sp>
+      <p:sp>
+        <p:nvSpPr>
+          <p:cNvPr id="38" name="Shape 35"/>
+          <p:cNvSpPr/>
           <p:nvPr/>
         </p:nvSpPr>
         <p:spPr>
           <a:xfrm>
             <a:off x="548640" y="4352544"/>
-            <a:ext cx="2011680" cy="585216"/>
-          </a:xfrm>
-          <a:prstGeom prst="rect">
-            <a:avLst/>
-          </a:prstGeom>
-          <a:noFill/>
-          <a:ln/>
-        </p:spPr>
-        <p:txBody>
-          <a:bodyPr wrap="square" lIns="0" tIns="0" rIns="0" bIns="0" rtlCol="0" anchor="ctr"/>
-          <a:lstStyle/>
-          <a:p>
-            <a:pPr algn="ctr" indent="0" marL="0">
-              <a:buNone/>
-            </a:pPr>
-            <a:r>
-              <a:rPr lang="en-US" sz="1900" b="1" dirty="0">
-                <a:solidFill>
-                  <a:srgbClr val="1E2761"/>
-                </a:solidFill>
-                <a:latin typeface="Cambria" pitchFamily="34" charset="0"/>
-                <a:ea typeface="Cambria" pitchFamily="34" charset="-122"/>
-                <a:cs typeface="Cambria" pitchFamily="34" charset="-120"/>
-              </a:rPr>
-              <a:t>2. Stand</a:t>
-            </a:r>
-            <a:endParaRPr lang="en-US" sz="1900" dirty="0"/>
-          </a:p>
-        </p:txBody>
-      </p:sp>
-      <p:sp>
-        <p:nvSpPr>
-          <p:cNvPr id="37" name="Shape 34"/>
-          <p:cNvSpPr/>
-          <p:nvPr/>
-        </p:nvSpPr>
-        <p:spPr>
-          <a:xfrm>
-            <a:off x="2651760" y="4352544"/>
-            <a:ext cx="1371600" cy="585216"/>
+            <a:ext cx="1554480" cy="585216"/>
           </a:xfrm>
           <a:prstGeom prst="roundRect">
             <a:avLst>
@@ -8559,21 +8581,60 @@
             </a:avLst>
           </a:prstGeom>
           <a:solidFill>
-            <a:srgbClr val="F4F7FD"/>
-          </a:solidFill>
-          <a:ln/>
-        </p:spPr>
-      </p:sp>
-      <p:sp>
-        <p:nvSpPr>
-          <p:cNvPr id="38" name="Shape 35"/>
+            <a:srgbClr val="EAF0FA"/>
+          </a:solidFill>
+          <a:ln/>
+        </p:spPr>
+      </p:sp>
+      <p:sp>
+        <p:nvSpPr>
+          <p:cNvPr id="39" name="Text 36"/>
+          <p:cNvSpPr txBox="1"/>
+          <p:nvPr/>
+        </p:nvSpPr>
+        <p:spPr>
+          <a:xfrm>
+            <a:off x="548640" y="4352544"/>
+            <a:ext cx="1554480" cy="585216"/>
+          </a:xfrm>
+          <a:prstGeom prst="rect">
+            <a:avLst/>
+          </a:prstGeom>
+          <a:noFill/>
+          <a:ln/>
+        </p:spPr>
+        <p:txBody>
+          <a:bodyPr wrap="square" lIns="0" tIns="0" rIns="0" bIns="0" rtlCol="0" anchor="ctr"/>
+          <a:lstStyle/>
+          <a:p>
+            <a:pPr algn="ctr" indent="0" marL="0">
+              <a:buNone/>
+            </a:pPr>
+            <a:r>
+              <a:rPr lang="en-US" sz="1900" b="1" dirty="0">
+                <a:solidFill>
+                  <a:srgbClr val="1E2761"/>
+                </a:solidFill>
+                <a:latin typeface="Cambria" pitchFamily="34" charset="0"/>
+                <a:ea typeface="Cambria" pitchFamily="34" charset="-122"/>
+                <a:cs typeface="Cambria" pitchFamily="34" charset="-120"/>
+              </a:rPr>
+              <a:t>2. Stand</a:t>
+            </a:r>
+            <a:endParaRPr lang="en-US" sz="1900" dirty="0"/>
+          </a:p>
+        </p:txBody>
+      </p:sp>
+      <p:sp>
+        <p:nvSpPr>
+          <p:cNvPr id="40" name="Shape 37"/>
           <p:cNvSpPr/>
           <p:nvPr/>
         </p:nvSpPr>
         <p:spPr>
           <a:xfrm>
-            <a:off x="4114800" y="4352544"/>
-            <a:ext cx="2560320" cy="585216"/>
+            <a:off x="2194560" y="4352544"/>
+            <a:ext cx="1097280" cy="585216"/>
           </a:xfrm>
           <a:prstGeom prst="roundRect">
             <a:avLst>
@@ -8588,14 +8649,14 @@
       </p:sp>
       <p:sp>
         <p:nvSpPr>
-          <p:cNvPr id="39" name="Shape 36"/>
+          <p:cNvPr id="41" name="Shape 38"/>
           <p:cNvSpPr/>
           <p:nvPr/>
         </p:nvSpPr>
         <p:spPr>
           <a:xfrm>
-            <a:off x="6766560" y="4352544"/>
-            <a:ext cx="2560320" cy="585216"/>
+            <a:off x="3383280" y="4352544"/>
+            <a:ext cx="1645920" cy="585216"/>
           </a:xfrm>
           <a:prstGeom prst="roundRect">
             <a:avLst>
@@ -8610,14 +8671,14 @@
       </p:sp>
       <p:sp>
         <p:nvSpPr>
-          <p:cNvPr id="40" name="Shape 37"/>
+          <p:cNvPr id="42" name="Shape 39"/>
           <p:cNvSpPr/>
           <p:nvPr/>
         </p:nvSpPr>
         <p:spPr>
           <a:xfrm>
-            <a:off x="9418320" y="4352544"/>
-            <a:ext cx="2148840" cy="585216"/>
+            <a:off x="5120640" y="4352544"/>
+            <a:ext cx="2103120" cy="585216"/>
           </a:xfrm>
           <a:prstGeom prst="roundRect">
             <a:avLst>
@@ -8632,14 +8693,14 @@
       </p:sp>
       <p:sp>
         <p:nvSpPr>
-          <p:cNvPr id="41" name="Shape 38"/>
+          <p:cNvPr id="43" name="Shape 40"/>
           <p:cNvSpPr/>
           <p:nvPr/>
         </p:nvSpPr>
         <p:spPr>
           <a:xfrm>
-            <a:off x="548640" y="5010912"/>
-            <a:ext cx="2011680" cy="585216"/>
+            <a:off x="7315200" y="4352544"/>
+            <a:ext cx="2103120" cy="585216"/>
           </a:xfrm>
           <a:prstGeom prst="roundRect">
             <a:avLst>
@@ -8647,60 +8708,21 @@
             </a:avLst>
           </a:prstGeom>
           <a:solidFill>
-            <a:srgbClr val="EAF0FA"/>
-          </a:solidFill>
-          <a:ln/>
-        </p:spPr>
-      </p:sp>
-      <p:sp>
-        <p:nvSpPr>
-          <p:cNvPr id="42" name="Text 39"/>
-          <p:cNvSpPr txBox="1"/>
-          <p:nvPr/>
-        </p:nvSpPr>
-        <p:spPr>
-          <a:xfrm>
-            <a:off x="548640" y="5010912"/>
-            <a:ext cx="2011680" cy="585216"/>
-          </a:xfrm>
-          <a:prstGeom prst="rect">
-            <a:avLst/>
-          </a:prstGeom>
-          <a:noFill/>
-          <a:ln/>
-        </p:spPr>
-        <p:txBody>
-          <a:bodyPr wrap="square" lIns="0" tIns="0" rIns="0" bIns="0" rtlCol="0" anchor="ctr"/>
-          <a:lstStyle/>
-          <a:p>
-            <a:pPr algn="ctr" indent="0" marL="0">
-              <a:buNone/>
-            </a:pPr>
-            <a:r>
-              <a:rPr lang="en-US" sz="1900" b="1" dirty="0">
-                <a:solidFill>
-                  <a:srgbClr val="1E2761"/>
-                </a:solidFill>
-                <a:latin typeface="Cambria" pitchFamily="34" charset="0"/>
-                <a:ea typeface="Cambria" pitchFamily="34" charset="-122"/>
-                <a:cs typeface="Cambria" pitchFamily="34" charset="-120"/>
-              </a:rPr>
-              <a:t>3. Stand</a:t>
-            </a:r>
-            <a:endParaRPr lang="en-US" sz="1900" dirty="0"/>
-          </a:p>
-        </p:txBody>
-      </p:sp>
-      <p:sp>
-        <p:nvSpPr>
-          <p:cNvPr id="43" name="Shape 40"/>
+            <a:srgbClr val="F4F7FD"/>
+          </a:solidFill>
+          <a:ln/>
+        </p:spPr>
+      </p:sp>
+      <p:sp>
+        <p:nvSpPr>
+          <p:cNvPr id="44" name="Shape 41"/>
           <p:cNvSpPr/>
           <p:nvPr/>
         </p:nvSpPr>
         <p:spPr>
           <a:xfrm>
-            <a:off x="2651760" y="5010912"/>
-            <a:ext cx="1371600" cy="585216"/>
+            <a:off x="9509760" y="4352544"/>
+            <a:ext cx="2057400" cy="585216"/>
           </a:xfrm>
           <a:prstGeom prst="roundRect">
             <a:avLst>
@@ -8715,14 +8737,14 @@
       </p:sp>
       <p:sp>
         <p:nvSpPr>
-          <p:cNvPr id="44" name="Shape 41"/>
+          <p:cNvPr id="45" name="Shape 42"/>
           <p:cNvSpPr/>
           <p:nvPr/>
         </p:nvSpPr>
         <p:spPr>
           <a:xfrm>
-            <a:off x="4114800" y="5010912"/>
-            <a:ext cx="2560320" cy="585216"/>
+            <a:off x="548640" y="5010912"/>
+            <a:ext cx="1554480" cy="585216"/>
           </a:xfrm>
           <a:prstGeom prst="roundRect">
             <a:avLst>
@@ -8730,21 +8752,60 @@
             </a:avLst>
           </a:prstGeom>
           <a:solidFill>
-            <a:srgbClr val="F4F7FD"/>
-          </a:solidFill>
-          <a:ln/>
-        </p:spPr>
-      </p:sp>
-      <p:sp>
-        <p:nvSpPr>
-          <p:cNvPr id="45" name="Shape 42"/>
+            <a:srgbClr val="EAF0FA"/>
+          </a:solidFill>
+          <a:ln/>
+        </p:spPr>
+      </p:sp>
+      <p:sp>
+        <p:nvSpPr>
+          <p:cNvPr id="46" name="Text 43"/>
+          <p:cNvSpPr txBox="1"/>
+          <p:nvPr/>
+        </p:nvSpPr>
+        <p:spPr>
+          <a:xfrm>
+            <a:off x="548640" y="5010912"/>
+            <a:ext cx="1554480" cy="585216"/>
+          </a:xfrm>
+          <a:prstGeom prst="rect">
+            <a:avLst/>
+          </a:prstGeom>
+          <a:noFill/>
+          <a:ln/>
+        </p:spPr>
+        <p:txBody>
+          <a:bodyPr wrap="square" lIns="0" tIns="0" rIns="0" bIns="0" rtlCol="0" anchor="ctr"/>
+          <a:lstStyle/>
+          <a:p>
+            <a:pPr algn="ctr" indent="0" marL="0">
+              <a:buNone/>
+            </a:pPr>
+            <a:r>
+              <a:rPr lang="en-US" sz="1900" b="1" dirty="0">
+                <a:solidFill>
+                  <a:srgbClr val="1E2761"/>
+                </a:solidFill>
+                <a:latin typeface="Cambria" pitchFamily="34" charset="0"/>
+                <a:ea typeface="Cambria" pitchFamily="34" charset="-122"/>
+                <a:cs typeface="Cambria" pitchFamily="34" charset="-120"/>
+              </a:rPr>
+              <a:t>3. Stand</a:t>
+            </a:r>
+            <a:endParaRPr lang="en-US" sz="1900" dirty="0"/>
+          </a:p>
+        </p:txBody>
+      </p:sp>
+      <p:sp>
+        <p:nvSpPr>
+          <p:cNvPr id="47" name="Shape 44"/>
           <p:cNvSpPr/>
           <p:nvPr/>
         </p:nvSpPr>
         <p:spPr>
           <a:xfrm>
-            <a:off x="6766560" y="5010912"/>
-            <a:ext cx="2560320" cy="585216"/>
+            <a:off x="2194560" y="5010912"/>
+            <a:ext cx="1097280" cy="585216"/>
           </a:xfrm>
           <a:prstGeom prst="roundRect">
             <a:avLst>
@@ -8759,14 +8820,80 @@
       </p:sp>
       <p:sp>
         <p:nvSpPr>
-          <p:cNvPr id="46" name="Shape 43"/>
+          <p:cNvPr id="48" name="Shape 45"/>
           <p:cNvSpPr/>
           <p:nvPr/>
         </p:nvSpPr>
         <p:spPr>
           <a:xfrm>
-            <a:off x="9418320" y="5010912"/>
-            <a:ext cx="2148840" cy="585216"/>
+            <a:off x="3383280" y="5010912"/>
+            <a:ext cx="1645920" cy="585216"/>
+          </a:xfrm>
+          <a:prstGeom prst="roundRect">
+            <a:avLst>
+              <a:gd name="adj" fmla="val 12500"/>
+            </a:avLst>
+          </a:prstGeom>
+          <a:solidFill>
+            <a:srgbClr val="F4F7FD"/>
+          </a:solidFill>
+          <a:ln/>
+        </p:spPr>
+      </p:sp>
+      <p:sp>
+        <p:nvSpPr>
+          <p:cNvPr id="49" name="Shape 46"/>
+          <p:cNvSpPr/>
+          <p:nvPr/>
+        </p:nvSpPr>
+        <p:spPr>
+          <a:xfrm>
+            <a:off x="5120640" y="5010912"/>
+            <a:ext cx="2103120" cy="585216"/>
+          </a:xfrm>
+          <a:prstGeom prst="roundRect">
+            <a:avLst>
+              <a:gd name="adj" fmla="val 12500"/>
+            </a:avLst>
+          </a:prstGeom>
+          <a:solidFill>
+            <a:srgbClr val="F4F7FD"/>
+          </a:solidFill>
+          <a:ln/>
+        </p:spPr>
+      </p:sp>
+      <p:sp>
+        <p:nvSpPr>
+          <p:cNvPr id="50" name="Shape 47"/>
+          <p:cNvSpPr/>
+          <p:nvPr/>
+        </p:nvSpPr>
+        <p:spPr>
+          <a:xfrm>
+            <a:off x="7315200" y="5010912"/>
+            <a:ext cx="2103120" cy="585216"/>
+          </a:xfrm>
+          <a:prstGeom prst="roundRect">
+            <a:avLst>
+              <a:gd name="adj" fmla="val 12500"/>
+            </a:avLst>
+          </a:prstGeom>
+          <a:solidFill>
+            <a:srgbClr val="F4F7FD"/>
+          </a:solidFill>
+          <a:ln/>
+        </p:spPr>
+      </p:sp>
+      <p:sp>
+        <p:nvSpPr>
+          <p:cNvPr id="51" name="Shape 48"/>
+          <p:cNvSpPr/>
+          <p:nvPr/>
+        </p:nvSpPr>
+        <p:spPr>
+          <a:xfrm>
+            <a:off x="9509760" y="5010912"/>
+            <a:ext cx="2057400" cy="585216"/>
           </a:xfrm>
           <a:prstGeom prst="roundRect">
             <a:avLst>

--- a/Geschichte_8/Absolutismus_Wiederholung/Praesentation_Absolutismus_Wiederholung.pptx
+++ b/Geschichte_8/Absolutismus_Wiederholung/Praesentation_Absolutismus_Wiederholung.pptx
@@ -600,7 +600,7 @@
           <a:p>
             <a:r>
               <a:rPr lang="en-US" dirty="0"/>
-              <a:t>Ansage: „Wer drankommt, liest vor. Alle prüfen mit.“ Typische Fehler: Adel als Steuerzahler, Klerus mit Kriegsdienst, Dritter Stand mit Privilegien. Dann: „Verbessert mit Grün.“</a:t>
+              <a:t>Ansage: „Wer drankommt, liest vor. Alle prüfen mit.“ Typische Fehler: Adel als Steuerzahler, Klerus mit Wehrdienst (befreit), Dritter Stand mit Vorrechten. Dann: „Verbessert mit Grün.“</a:t>
             </a:r>
             <a:endParaRPr lang="en-US" dirty="0"/>
           </a:p>
@@ -1128,7 +1128,7 @@
           <a:p>
             <a:r>
               <a:rPr lang="en-US" dirty="0"/>
-              <a:t>Lösung: 1 absoluter · 2 Beamte · 3 Intendanten · 4 Steuerfreiheit · 5 Versailles · 6 Merkantilismus · 7 Zölle · 8 Gottesgnadentum · 9 Glaube · 10 stehendes · 11 400.000 · 12 Drittel. Nicht passend: Söldner, Generalstände. Kontrolle: „Wer drankommt, liest einen Absatz vor. Alle prüfen mit.“ Dann „Vergleicht und verbessert mit Grün.“ Schnelle machen die ★-Aufgabe (wichtigste Säule begründen).</a:t>
+              <a:t>Lösung: 1 absoluter · 2 Beamte · 3 Intendanten · 4 Steuerfreiheit · 5 Versailles · 6 Merkantilismus · 7 Zölle · 8 Gottesgnadentum · 9 Glaube · 10 stehendes · 11 400.000 · 12 Drittel. Nicht passend: Söldner, Parlament. Kontrolle: „Wer drankommt, liest einen Absatz vor. Alle prüfen mit.“ Dann „Vergleicht und verbessert mit Grün.“ Schnelle machen die ★-Aufgabe (wichtigste Säule begründen).</a:t>
             </a:r>
             <a:endParaRPr lang="en-US" dirty="0"/>
           </a:p>
@@ -1216,7 +1216,7 @@
           <a:p>
             <a:r>
               <a:rPr lang="en-US" dirty="0"/>
-              <a:t>Ansage: „Hefte zu. Ihr schreibt noch nichts auf. Meldet euch.“ Raster aus dem Gruppenpuzzle (Stand | Anzahl | Bildung | Vorrechte | Pflichten) plus Spalte Mitbestimmung bereits leer an der Tafel. Nach dem gemeinsamen Ausfüllen: „Jetzt schreibt ihr ab: die Tabelle. Mit Lineal.“ Lösungen siehe Tafelskript. Hinweis zur Mitbestimmung: Die Generalstände (je 1 Stimme pro Stand) wurden von 1614 bis 1789 nicht einberufen – unter Ludwig XIV. gab es praktisch keine Mitbestimmung.</a:t>
+              <a:t>Ansage: „Hefte zu. Ihr schreibt noch nichts auf. Meldet euch.“ Raster aus dem Gruppenpuzzle (Stand | Anzahl | Bildung | Vorrechte | Pflichten) plus Spalte Mitbestimmung bereits leer an der Tafel. Inhalte siehe Tafelskript (aus den Gruppenpuzzle-Texten). Nach dem gemeinsamen Ausfüllen: „Jetzt schreibt ihr ab: die Tabelle. Mit Lineal.“ Lösungen siehe Tafelskript. Hinweis: Der Text nennt zur Mitbestimmung des Klerus nichts.  Der Dritte Stand ist ausgeschlossen, der Adel bestimmt das politische Geschehen.</a:t>
             </a:r>
             <a:endParaRPr lang="en-US" dirty="0"/>
           </a:p>
@@ -1304,7 +1304,7 @@
           <a:p>
             <a:r>
               <a:rPr lang="en-US" dirty="0"/>
-              <a:t>Ansage: „Jetzt schreibt ihr von der Folie ab: Merksatz 3. Rahmt ihn rot ein.“ Zahlen beziehen sich auf Frankreich vor 1789. Falls im Unterricht andere Werte genannt wurden, Folie anpassen.</a:t>
+              <a:t>Ansage: „Jetzt schreibt ihr von der Folie ab: Merksatz 3. Rahmt ihn rot ein.“ Alle Zahlen stammen aus den Gruppenpuzzle-Texten. Der Text nennt zur Mitbestimmung des Klerus nichts.</a:t>
             </a:r>
             <a:endParaRPr lang="en-US" dirty="0"/>
           </a:p>
@@ -1392,7 +1392,7 @@
           <a:p>
             <a:r>
               <a:rPr lang="en-US" dirty="0"/>
-              <a:t>Ansage: „Jetzt arbeitet ihr allein. Die Aufgabe steht rechts.“ Danach 3 Schüler vorlesen lassen (verschiedene Stände): „Wer drankommt, liest vor. Alle prüfen mit.“ Kriterien stehen auf der nächsten Folie. Mögliche Antwort: „Im Absolutismus fühle ich mich als Adeliger privilegiert, weil ich keine Steuern zahlen muss und jagen darf. Dafür muss ich dem König im Krieg dienen und am Hof erscheinen.“ / „… als Bauer ausgenutzt, weil ich Steuern und Abgaben zahlen muss, aber keine Privilegien und keine Mitbestimmung habe.“</a:t>
+              <a:t>Ansage: „Jetzt arbeitet ihr allein. Die Aufgabe steht rechts.“ Danach 3 Schüler vorlesen lassen (verschiedene Stände): „Wer drankommt, liest vor. Alle prüfen mit.“ Kriterien stehen auf der nächsten Folie. Mögliche Antwort: „Im Absolutismus fühle ich mich als Adeliger privilegiert, weil ich keine Steuern zahlen muss und allein jagen darf. Dafür muss ich mich ehrenhaft verhalten und Verwaltungsaufgaben übernehmen.“ / „… als Bauer ausgenutzt, weil ich Steuern, hohe Abgaben und Pachtgebühren zahlen muss und von der Mitbestimmung ausgeschlossen bin.“</a:t>
             </a:r>
             <a:endParaRPr lang="en-US" dirty="0"/>
           </a:p>
@@ -7428,7 +7428,7 @@
                 <a:ea typeface="Cambria" pitchFamily="34" charset="-122"/>
                 <a:cs typeface="Cambria" pitchFamily="34" charset="-120"/>
               </a:rPr>
-              <a:t>Beamte · Glaube · Söldner · Merkantilismus · Gottesgnadentum · Versailles · Steuerfreiheit · Zölle · stehendes · 400.000 · Drittel · absoluter · Intendanten · Generalstände</a:t>
+              <a:t>Beamte · Glaube · Söldner · Merkantilismus · Gottesgnadentum · Versailles · Steuerfreiheit · Zölle · stehendes · 400.000 · Drittel · absoluter · Intendanten · Parlament</a:t>
             </a:r>
             <a:endParaRPr lang="en-US" sz="2000" dirty="0"/>
           </a:p>
@@ -9146,7 +9146,7 @@
                 <a:ea typeface="Cambria" pitchFamily="34" charset="-122"/>
                 <a:cs typeface="Cambria" pitchFamily="34" charset="-120"/>
               </a:rPr>
-              <a:t>Klerus (ca. 1 %)</a:t>
+              <a:t>Klerus (ca. 150 000)</a:t>
             </a:r>
             <a:pPr indent="0" marL="0">
               <a:buNone/>
@@ -9174,7 +9174,7 @@
                 <a:ea typeface="Cambria" pitchFamily="34" charset="-122"/>
                 <a:cs typeface="Cambria" pitchFamily="34" charset="-120"/>
               </a:rPr>
-              <a:t>Adel (ca. 2 %)</a:t>
+              <a:t>Adel (ca. 500 000)</a:t>
             </a:r>
             <a:pPr indent="0" marL="0">
               <a:buNone/>
@@ -9202,7 +9202,7 @@
                 <a:ea typeface="Cambria" pitchFamily="34" charset="-122"/>
                 <a:cs typeface="Cambria" pitchFamily="34" charset="-120"/>
               </a:rPr>
-              <a:t>Dritter Stand (ca. 97 %)</a:t>
+              <a:t>Dritter Stand (ca. 20 000 000)</a:t>
             </a:r>
             <a:pPr indent="0" marL="0">
               <a:buNone/>
@@ -9216,7 +9216,7 @@
                 <a:ea typeface="Cambria" pitchFamily="34" charset="-122"/>
                 <a:cs typeface="Cambria" pitchFamily="34" charset="-120"/>
               </a:rPr>
-              <a:t>. Rechte und Pflichten sind </a:t>
+              <a:t>. Klerus und Adel haben </a:t>
             </a:r>
             <a:pPr indent="0" marL="0">
               <a:buNone/>
@@ -9230,7 +9230,7 @@
                 <a:ea typeface="Cambria" pitchFamily="34" charset="-122"/>
                 <a:cs typeface="Cambria" pitchFamily="34" charset="-120"/>
               </a:rPr>
-              <a:t>ungleich</a:t>
+              <a:t>Vorrechte</a:t>
             </a:r>
             <a:pPr indent="0" marL="0">
               <a:buNone/>
@@ -9244,7 +9244,7 @@
                 <a:ea typeface="Cambria" pitchFamily="34" charset="-122"/>
                 <a:cs typeface="Cambria" pitchFamily="34" charset="-120"/>
               </a:rPr>
-              <a:t> verteilt. Im Absolutismus hatten die Stände </a:t>
+              <a:t>. Der Dritte Stand zahlt </a:t>
             </a:r>
             <a:pPr indent="0" marL="0">
               <a:buNone/>
@@ -9258,7 +9258,35 @@
                 <a:ea typeface="Cambria" pitchFamily="34" charset="-122"/>
                 <a:cs typeface="Cambria" pitchFamily="34" charset="-120"/>
               </a:rPr>
-              <a:t>keine Mitbestimmung</a:t>
+              <a:t>Steuern und Abgaben</a:t>
+            </a:r>
+            <a:pPr indent="0" marL="0">
+              <a:buNone/>
+            </a:pPr>
+            <a:r>
+              <a:rPr lang="en-US" sz="2000" dirty="0">
+                <a:solidFill>
+                  <a:srgbClr val="1E2761"/>
+                </a:solidFill>
+                <a:latin typeface="Cambria" pitchFamily="34" charset="0"/>
+                <a:ea typeface="Cambria" pitchFamily="34" charset="-122"/>
+                <a:cs typeface="Cambria" pitchFamily="34" charset="-120"/>
+              </a:rPr>
+              <a:t> und ist von der </a:t>
+            </a:r>
+            <a:pPr indent="0" marL="0">
+              <a:buNone/>
+            </a:pPr>
+            <a:r>
+              <a:rPr lang="en-US" sz="2000" b="1" dirty="0">
+                <a:solidFill>
+                  <a:srgbClr val="1E2761"/>
+                </a:solidFill>
+                <a:latin typeface="Cambria" pitchFamily="34" charset="0"/>
+                <a:ea typeface="Cambria" pitchFamily="34" charset="-122"/>
+                <a:cs typeface="Cambria" pitchFamily="34" charset="-120"/>
+              </a:rPr>
+              <a:t>politischen Mitbestimmung ausgeschlossen</a:t>
             </a:r>
             <a:pPr indent="0" marL="0">
               <a:buNone/>
@@ -9347,7 +9375,7 @@
                 <a:ea typeface="Cambria" pitchFamily="34" charset="-122"/>
                 <a:cs typeface="Cambria" pitchFamily="34" charset="-120"/>
               </a:rPr>
-              <a:t>Klerus, Adel: </a:t>
+              <a:t>Adel: </a:t>
             </a:r>
             <a:pPr indent="0" marL="0">
               <a:buNone/>
@@ -9361,7 +9389,7 @@
                 <a:ea typeface="Cambria" pitchFamily="34" charset="-122"/>
                 <a:cs typeface="Cambria" pitchFamily="34" charset="-120"/>
               </a:rPr>
-              <a:t>Privilegien</a:t>
+              <a:t>Jagdrecht</a:t>
             </a:r>
             <a:pPr indent="0" marL="0">
               <a:buNone/>
@@ -9375,7 +9403,7 @@
                 <a:ea typeface="Cambria" pitchFamily="34" charset="-122"/>
                 <a:cs typeface="Cambria" pitchFamily="34" charset="-120"/>
               </a:rPr>
-              <a:t> · Dritter Stand: </a:t>
+              <a:t> · Klerus: </a:t>
             </a:r>
             <a:pPr indent="0" marL="0">
               <a:buNone/>
@@ -9389,7 +9417,35 @@
                 <a:ea typeface="Cambria" pitchFamily="34" charset="-122"/>
                 <a:cs typeface="Cambria" pitchFamily="34" charset="-120"/>
               </a:rPr>
-              <a:t>Steuern, Abgaben</a:t>
+              <a:t>Kirchenzehnt</a:t>
+            </a:r>
+            <a:pPr indent="0" marL="0">
+              <a:buNone/>
+            </a:pPr>
+            <a:r>
+              <a:rPr lang="en-US" sz="1900" dirty="0">
+                <a:solidFill>
+                  <a:srgbClr val="1E2761"/>
+                </a:solidFill>
+                <a:latin typeface="Cambria" pitchFamily="34" charset="0"/>
+                <a:ea typeface="Cambria" pitchFamily="34" charset="-122"/>
+                <a:cs typeface="Cambria" pitchFamily="34" charset="-120"/>
+              </a:rPr>
+              <a:t> · 3. Stand: </a:t>
+            </a:r>
+            <a:pPr indent="0" marL="0">
+              <a:buNone/>
+            </a:pPr>
+            <a:r>
+              <a:rPr lang="en-US" sz="1900" b="1" dirty="0">
+                <a:solidFill>
+                  <a:srgbClr val="1E2761"/>
+                </a:solidFill>
+                <a:latin typeface="Cambria" pitchFamily="34" charset="0"/>
+                <a:ea typeface="Cambria" pitchFamily="34" charset="-122"/>
+                <a:cs typeface="Cambria" pitchFamily="34" charset="-120"/>
+              </a:rPr>
+              <a:t>Abgaben</a:t>
             </a:r>
             <a:endParaRPr lang="en-US" sz="1900" dirty="0"/>
           </a:p>
@@ -9589,7 +9645,7 @@
                 <a:ea typeface="Calibri" pitchFamily="34" charset="-122"/>
                 <a:cs typeface="Calibri" pitchFamily="34" charset="-120"/>
               </a:rPr>
-              <a:t>Wer zahlt Steuern, wer hat Privilegien? </a:t>
+              <a:t>Wer zahlt, wer ist ausgeschlossen? </a:t>
             </a:r>
             <a:pPr indent="0" marL="0">
               <a:buNone/>
@@ -9603,7 +9659,7 @@
                 <a:ea typeface="Calibri" pitchFamily="34" charset="-122"/>
                 <a:cs typeface="Calibri" pitchFamily="34" charset="-120"/>
               </a:rPr>
-              <a:t>Anzahl und Lasten passen nicht zusammen.</a:t>
+              <a:t>Wenige Menschen haben die Vorrechte, viele tragen die Last.</a:t>
             </a:r>
             <a:endParaRPr lang="en-US" sz="1900" dirty="0"/>
           </a:p>
@@ -10563,7 +10619,7 @@
                 <a:ea typeface="Cambria" pitchFamily="34" charset="-122"/>
                 <a:cs typeface="Cambria" pitchFamily="34" charset="-120"/>
               </a:rPr>
-              <a:t>Privilegien · Steuerfreiheit · Jagdrecht · Abgaben · Frondienst · Kriegsdienst · Mitbestimmung</a:t>
+              <a:t>Vorrechte · Steuerfreiheit · Jagdrecht · Kirchenzehnt · Pachtgebühren · Mitbestimmung</a:t>
             </a:r>
             <a:endParaRPr lang="en-US" sz="1800" dirty="0"/>
           </a:p>

--- a/Geschichte_8/Absolutismus_Wiederholung/Praesentation_Absolutismus_Wiederholung.pptx
+++ b/Geschichte_8/Absolutismus_Wiederholung/Praesentation_Absolutismus_Wiederholung.pptx
@@ -953,7 +953,7 @@
           <a:p>
             <a:r>
               <a:rPr lang="en-US" dirty="0"/>
-              <a:t>Ansage: „Stifte liegen. Ihr schreibt noch nichts auf. Entscheidet still und meldet euch.“ Lösung: 1 wahr (ca. 20 Mio. von gut 20,6 Mio.) · 2 falsch: Der Adel zahlte keine Steuern · 3 wahr (Säule Heer) · 4 falsch: 1685 beendete Ludwig die religiöse Toleranz (Säule Religion). Nicht lange erklären, sondern notieren, was unsicher ist. Es kommt in den folgenden Phasen.</a:t>
+              <a:t>Ansage: „Jetzt schreibt ihr von der Folie ab: Merksatz 1. Rahmt ihn rot ein.“ Danach Arbeitsblatt Lückentext verteilen. Tipp: Die Säulen sind aus dem Gruppenpuzzle bekannt – kurz fragen, wer welche Säule bearbeitet hat.</a:t>
             </a:r>
             <a:endParaRPr lang="en-US" dirty="0"/>
           </a:p>
@@ -1041,7 +1041,7 @@
           <a:p>
             <a:r>
               <a:rPr lang="en-US" dirty="0"/>
-              <a:t>Vorher: Wort „Absolutismus“ an die Tafel, gemeinsam klären: absolut = uneingeschränkt. Dann Ansage: „Jetzt schreibt ihr von der Folie ab: Merksatz 1. Rahmt ihn rot ein.“</a:t>
+              <a:t>Lösung: 1 absoluter · 2 Beamte · 3 Intendanten · 4 Steuerfreiheit · 5 Versailles · 6 Merkantilismus · 7 Zölle · 8 Gottesgnadentum · 9 Glaube · 10 stehendes · 11 400.000 · 12 Drittel. Nicht passend: Söldner, Parlament. Kontrolle: „Wer drankommt, liest einen Absatz vor. Alle prüfen mit.“ Dann „Vergleicht und verbessert mit Grün.“ Schnelle machen die ★-Aufgabe (wichtigste Säule begründen).</a:t>
             </a:r>
             <a:endParaRPr lang="en-US" dirty="0"/>
           </a:p>
@@ -1129,7 +1129,7 @@
           <a:p>
             <a:r>
               <a:rPr lang="en-US" dirty="0"/>
-              <a:t>Lösung: 1 Absolutismus (keine Kontrolle) · 2 kein Absolutismus (Parlament kann den König stoppen) · 3 Absolutismus (Beamte sind dem König zum Gehorsam verpflichtet, er kontrolliert sie) · 4 kein Absolutismus (Wahl = Demokratie, Macht ist begrenzt). Nach der Einzelarbeit: „Wer drankommt, schreibt an die Tafel. Alle prüfen mit.“ Dann: „Vergleicht und verbessert mit Grün.“</a:t>
+              <a:t>Ansage: „Stifte liegen. Ihr schreibt noch nichts auf. Entscheidet still und meldet euch.“ Lösung: 1 wahr (ca. 20 Mio. von gut 20,6 Mio.) · 2 falsch: Der Adel zahlte keine Steuern · 3 wahr (Säule Heer) · 4 falsch: 1685 beendete Ludwig die religiöse Toleranz (Säule Religion). Nicht lange erklären, sondern notieren, was unsicher ist. Es kommt in den folgenden Phasen.</a:t>
             </a:r>
             <a:endParaRPr lang="en-US" dirty="0"/>
           </a:p>
@@ -1217,7 +1217,7 @@
           <a:p>
             <a:r>
               <a:rPr lang="en-US" dirty="0"/>
-              <a:t>Ansage: „Jetzt schreibt ihr von der Folie ab: Merksatz 2. Rahmt ihn rot ein.“ Danach Arbeitsblatt Lückentext verteilen. Tipp: Die Säulen sind aus dem Gruppenpuzzle bekannt – kurz fragen, wer welche Säule bearbeitet hat.</a:t>
+              <a:t>Vorher: Wort „Absolutismus“ an die Tafel, gemeinsam klären: absolut = uneingeschränkt. Dann Ansage: „Jetzt schreibt ihr von der Folie ab: Merksatz 2. Rahmt ihn rot ein.“</a:t>
             </a:r>
             <a:endParaRPr lang="en-US" dirty="0"/>
           </a:p>
@@ -1305,7 +1305,7 @@
           <a:p>
             <a:r>
               <a:rPr lang="en-US" dirty="0"/>
-              <a:t>Lösung: 1 absoluter · 2 Beamte · 3 Intendanten · 4 Steuerfreiheit · 5 Versailles · 6 Merkantilismus · 7 Zölle · 8 Gottesgnadentum · 9 Glaube · 10 stehendes · 11 400.000 · 12 Drittel. Nicht passend: Söldner, Parlament. Kontrolle: „Wer drankommt, liest einen Absatz vor. Alle prüfen mit.“ Dann „Vergleicht und verbessert mit Grün.“ Schnelle machen die ★-Aufgabe (wichtigste Säule begründen).</a:t>
+              <a:t>Lösung: 1 Absolutismus (keine Kontrolle) · 2 kein Absolutismus (Parlament kann den König stoppen) · 3 Absolutismus (Beamte sind dem König zum Gehorsam verpflichtet, er kontrolliert sie) · 4 kein Absolutismus (Wahl = Demokratie, Macht ist begrenzt). Nach der Einzelarbeit: „Wer drankommt, schreibt an die Tafel. Alle prüfen mit.“ Dann: „Vergleicht und verbessert mit Grün.“</a:t>
             </a:r>
             <a:endParaRPr lang="en-US" dirty="0"/>
           </a:p>
@@ -3621,7 +3621,7 @@
                 <a:ea typeface="Cambria" pitchFamily="34" charset="-122"/>
                 <a:cs typeface="Cambria" pitchFamily="34" charset="-120"/>
               </a:rPr>
-              <a:t>Merksatz 1 auswendig: Was bedeutet Absolutismus?</a:t>
+              <a:t>Merksatz 2 auswendig: Was bedeutet Absolutismus?</a:t>
             </a:r>
             <a:endParaRPr lang="en-US" sz="2200" dirty="0"/>
           </a:p>
@@ -4921,7 +4921,7 @@
         <p:spPr>
           <a:xfrm>
             <a:off x="548640" y="320040"/>
-            <a:ext cx="7315200" cy="274320"/>
+            <a:ext cx="9144000" cy="274320"/>
           </a:xfrm>
           <a:prstGeom prst="rect">
             <a:avLst/>
@@ -4939,13 +4939,13 @@
             <a:r>
               <a:rPr lang="en-US" sz="1300" b="1" spc="200" kern="0" dirty="0">
                 <a:solidFill>
-                  <a:srgbClr val="5B6B8C"/>
-                </a:solidFill>
-                <a:latin typeface="Calibri" pitchFamily="34" charset="0"/>
-                <a:ea typeface="Calibri" pitchFamily="34" charset="-122"/>
-                <a:cs typeface="Calibri" pitchFamily="34" charset="-120"/>
-              </a:rPr>
-              <a:t>EINSTIEG · OHNE HEFT</a:t>
+                  <a:srgbClr val="D9534F"/>
+                </a:solidFill>
+                <a:latin typeface="Calibri" pitchFamily="34" charset="0"/>
+                <a:ea typeface="Calibri" pitchFamily="34" charset="-122"/>
+                <a:cs typeface="Calibri" pitchFamily="34" charset="-120"/>
+              </a:rPr>
+              <a:t>MERKSATZ 1 · ABSCHREIBEN UND ROT UMRAHMEN</a:t>
             </a:r>
             <a:endParaRPr lang="en-US" sz="1300" dirty="0"/>
           </a:p>
@@ -4984,7 +4984,7 @@
                 <a:ea typeface="Cambria" pitchFamily="34" charset="-122"/>
                 <a:cs typeface="Cambria" pitchFamily="34" charset="-120"/>
               </a:rPr>
-              <a:t>Wahr oder falsch?</a:t>
+              <a:t>Die fünf Säulen des Absolutismus</a:t>
             </a:r>
             <a:endParaRPr lang="en-US" sz="3400" dirty="0"/>
           </a:p>
@@ -4999,322 +4999,240 @@
         <p:spPr>
           <a:xfrm>
             <a:off x="548640" y="1417320"/>
-            <a:ext cx="11109960" cy="1655064"/>
+            <a:ext cx="11109960" cy="1828800"/>
           </a:xfrm>
           <a:prstGeom prst="roundRect">
             <a:avLst>
-              <a:gd name="adj" fmla="val 4420"/>
+              <a:gd name="adj" fmla="val 4000"/>
             </a:avLst>
           </a:prstGeom>
           <a:solidFill>
-            <a:srgbClr val="EAF0FA"/>
-          </a:solidFill>
-          <a:ln/>
-        </p:spPr>
-      </p:sp>
-      <p:sp>
-        <p:nvSpPr>
-          <p:cNvPr id="5" name="Shape 3"/>
+            <a:srgbClr val="FFFFFF"/>
+          </a:solidFill>
+          <a:ln w="38100">
+            <a:solidFill>
+              <a:srgbClr val="D9534F"/>
+            </a:solidFill>
+            <a:prstDash val="solid"/>
+          </a:ln>
+        </p:spPr>
+      </p:sp>
+      <p:sp>
+        <p:nvSpPr>
+          <p:cNvPr id="5" name="Text 3"/>
+          <p:cNvSpPr txBox="1"/>
+          <p:nvPr/>
+        </p:nvSpPr>
+        <p:spPr>
+          <a:xfrm>
+            <a:off x="868680" y="1508760"/>
+            <a:ext cx="10469880" cy="1645920"/>
+          </a:xfrm>
+          <a:prstGeom prst="rect">
+            <a:avLst/>
+          </a:prstGeom>
+          <a:noFill/>
+          <a:ln/>
+        </p:spPr>
+        <p:txBody>
+          <a:bodyPr wrap="square" lIns="0" tIns="0" rIns="0" bIns="0" rtlCol="0" anchor="ctr"/>
+          <a:lstStyle/>
+          <a:p>
+            <a:pPr indent="0" marL="0">
+              <a:buNone/>
+            </a:pPr>
+            <a:r>
+              <a:rPr lang="en-US" sz="2000" dirty="0">
+                <a:solidFill>
+                  <a:srgbClr val="1E2761"/>
+                </a:solidFill>
+                <a:latin typeface="Cambria" pitchFamily="34" charset="0"/>
+                <a:ea typeface="Cambria" pitchFamily="34" charset="-122"/>
+                <a:cs typeface="Cambria" pitchFamily="34" charset="-120"/>
+              </a:rPr>
+              <a:t>Ludwig XIV. sicherte seine Macht auf </a:t>
+            </a:r>
+            <a:pPr indent="0" marL="0">
+              <a:buNone/>
+            </a:pPr>
+            <a:r>
+              <a:rPr lang="en-US" sz="2000" b="1" dirty="0">
+                <a:solidFill>
+                  <a:srgbClr val="1E2761"/>
+                </a:solidFill>
+                <a:latin typeface="Cambria" pitchFamily="34" charset="0"/>
+                <a:ea typeface="Cambria" pitchFamily="34" charset="-122"/>
+                <a:cs typeface="Cambria" pitchFamily="34" charset="-120"/>
+              </a:rPr>
+              <a:t>fünf Säulen</a:t>
+            </a:r>
+            <a:pPr indent="0" marL="0">
+              <a:buNone/>
+            </a:pPr>
+            <a:r>
+              <a:rPr lang="en-US" sz="2000" dirty="0">
+                <a:solidFill>
+                  <a:srgbClr val="1E2761"/>
+                </a:solidFill>
+                <a:latin typeface="Cambria" pitchFamily="34" charset="0"/>
+                <a:ea typeface="Cambria" pitchFamily="34" charset="-122"/>
+                <a:cs typeface="Cambria" pitchFamily="34" charset="-120"/>
+              </a:rPr>
+              <a:t>: </a:t>
+            </a:r>
+            <a:pPr indent="0" marL="0">
+              <a:buNone/>
+            </a:pPr>
+            <a:r>
+              <a:rPr lang="en-US" sz="2000" b="1" dirty="0">
+                <a:solidFill>
+                  <a:srgbClr val="1E2761"/>
+                </a:solidFill>
+                <a:latin typeface="Cambria" pitchFamily="34" charset="0"/>
+                <a:ea typeface="Cambria" pitchFamily="34" charset="-122"/>
+                <a:cs typeface="Cambria" pitchFamily="34" charset="-120"/>
+              </a:rPr>
+              <a:t>1</a:t>
+            </a:r>
+            <a:pPr indent="0" marL="0">
+              <a:buNone/>
+            </a:pPr>
+            <a:r>
+              <a:rPr lang="en-US" sz="2000" dirty="0">
+                <a:solidFill>
+                  <a:srgbClr val="1E2761"/>
+                </a:solidFill>
+                <a:latin typeface="Cambria" pitchFamily="34" charset="0"/>
+                <a:ea typeface="Cambria" pitchFamily="34" charset="-122"/>
+                <a:cs typeface="Cambria" pitchFamily="34" charset="-120"/>
+              </a:rPr>
+              <a:t> Verwaltung und Justiz · </a:t>
+            </a:r>
+            <a:pPr indent="0" marL="0">
+              <a:buNone/>
+            </a:pPr>
+            <a:r>
+              <a:rPr lang="en-US" sz="2000" b="1" dirty="0">
+                <a:solidFill>
+                  <a:srgbClr val="1E2761"/>
+                </a:solidFill>
+                <a:latin typeface="Cambria" pitchFamily="34" charset="0"/>
+                <a:ea typeface="Cambria" pitchFamily="34" charset="-122"/>
+                <a:cs typeface="Cambria" pitchFamily="34" charset="-120"/>
+              </a:rPr>
+              <a:t>2</a:t>
+            </a:r>
+            <a:pPr indent="0" marL="0">
+              <a:buNone/>
+            </a:pPr>
+            <a:r>
+              <a:rPr lang="en-US" sz="2000" dirty="0">
+                <a:solidFill>
+                  <a:srgbClr val="1E2761"/>
+                </a:solidFill>
+                <a:latin typeface="Cambria" pitchFamily="34" charset="0"/>
+                <a:ea typeface="Cambria" pitchFamily="34" charset="-122"/>
+                <a:cs typeface="Cambria" pitchFamily="34" charset="-120"/>
+              </a:rPr>
+              <a:t> Adel und Hof von Versailles · </a:t>
+            </a:r>
+            <a:pPr indent="0" marL="0">
+              <a:buNone/>
+            </a:pPr>
+            <a:r>
+              <a:rPr lang="en-US" sz="2000" b="1" dirty="0">
+                <a:solidFill>
+                  <a:srgbClr val="1E2761"/>
+                </a:solidFill>
+                <a:latin typeface="Cambria" pitchFamily="34" charset="0"/>
+                <a:ea typeface="Cambria" pitchFamily="34" charset="-122"/>
+                <a:cs typeface="Cambria" pitchFamily="34" charset="-120"/>
+              </a:rPr>
+              <a:t>3</a:t>
+            </a:r>
+            <a:pPr indent="0" marL="0">
+              <a:buNone/>
+            </a:pPr>
+            <a:r>
+              <a:rPr lang="en-US" sz="2000" dirty="0">
+                <a:solidFill>
+                  <a:srgbClr val="1E2761"/>
+                </a:solidFill>
+                <a:latin typeface="Cambria" pitchFamily="34" charset="0"/>
+                <a:ea typeface="Cambria" pitchFamily="34" charset="-122"/>
+                <a:cs typeface="Cambria" pitchFamily="34" charset="-120"/>
+              </a:rPr>
+              <a:t> Wirtschaft (Merkantilismus) · </a:t>
+            </a:r>
+            <a:pPr indent="0" marL="0">
+              <a:buNone/>
+            </a:pPr>
+            <a:r>
+              <a:rPr lang="en-US" sz="2000" b="1" dirty="0">
+                <a:solidFill>
+                  <a:srgbClr val="1E2761"/>
+                </a:solidFill>
+                <a:latin typeface="Cambria" pitchFamily="34" charset="0"/>
+                <a:ea typeface="Cambria" pitchFamily="34" charset="-122"/>
+                <a:cs typeface="Cambria" pitchFamily="34" charset="-120"/>
+              </a:rPr>
+              <a:t>4</a:t>
+            </a:r>
+            <a:pPr indent="0" marL="0">
+              <a:buNone/>
+            </a:pPr>
+            <a:r>
+              <a:rPr lang="en-US" sz="2000" dirty="0">
+                <a:solidFill>
+                  <a:srgbClr val="1E2761"/>
+                </a:solidFill>
+                <a:latin typeface="Cambria" pitchFamily="34" charset="0"/>
+                <a:ea typeface="Cambria" pitchFamily="34" charset="-122"/>
+                <a:cs typeface="Cambria" pitchFamily="34" charset="-120"/>
+              </a:rPr>
+              <a:t> Religion (Gottesgnadentum) · </a:t>
+            </a:r>
+            <a:pPr indent="0" marL="0">
+              <a:buNone/>
+            </a:pPr>
+            <a:r>
+              <a:rPr lang="en-US" sz="2000" b="1" dirty="0">
+                <a:solidFill>
+                  <a:srgbClr val="1E2761"/>
+                </a:solidFill>
+                <a:latin typeface="Cambria" pitchFamily="34" charset="0"/>
+                <a:ea typeface="Cambria" pitchFamily="34" charset="-122"/>
+                <a:cs typeface="Cambria" pitchFamily="34" charset="-120"/>
+              </a:rPr>
+              <a:t>5</a:t>
+            </a:r>
+            <a:pPr indent="0" marL="0">
+              <a:buNone/>
+            </a:pPr>
+            <a:r>
+              <a:rPr lang="en-US" sz="2000" dirty="0">
+                <a:solidFill>
+                  <a:srgbClr val="1E2761"/>
+                </a:solidFill>
+                <a:latin typeface="Cambria" pitchFamily="34" charset="0"/>
+                <a:ea typeface="Cambria" pitchFamily="34" charset="-122"/>
+                <a:cs typeface="Cambria" pitchFamily="34" charset="-120"/>
+              </a:rPr>
+              <a:t> Heer (stehendes Heer).</a:t>
+            </a:r>
+            <a:endParaRPr lang="en-US" sz="2000" dirty="0"/>
+          </a:p>
+        </p:txBody>
+      </p:sp>
+      <p:sp>
+        <p:nvSpPr>
+          <p:cNvPr id="6" name="Shape 4"/>
           <p:cNvSpPr/>
           <p:nvPr/>
         </p:nvSpPr>
         <p:spPr>
           <a:xfrm>
-            <a:off x="731520" y="1568196"/>
-            <a:ext cx="384048" cy="384048"/>
-          </a:xfrm>
-          <a:prstGeom prst="ellipse">
-            <a:avLst/>
-          </a:prstGeom>
-          <a:solidFill>
-            <a:srgbClr val="1E2761"/>
-          </a:solidFill>
-          <a:ln/>
-        </p:spPr>
-      </p:sp>
-      <p:sp>
-        <p:nvSpPr>
-          <p:cNvPr id="6" name="Text 4"/>
-          <p:cNvSpPr txBox="1"/>
-          <p:nvPr/>
-        </p:nvSpPr>
-        <p:spPr>
-          <a:xfrm>
-            <a:off x="731520" y="1568196"/>
-            <a:ext cx="384048" cy="384048"/>
-          </a:xfrm>
-          <a:prstGeom prst="rect">
-            <a:avLst/>
-          </a:prstGeom>
-          <a:noFill/>
-          <a:ln/>
-        </p:spPr>
-        <p:txBody>
-          <a:bodyPr wrap="square" lIns="0" tIns="0" rIns="0" bIns="0" rtlCol="0" anchor="ctr"/>
-          <a:lstStyle/>
-          <a:p>
-            <a:pPr algn="ctr" indent="0" marL="0">
-              <a:buNone/>
-            </a:pPr>
-            <a:r>
-              <a:rPr lang="en-US" sz="1800" b="1" dirty="0">
-                <a:solidFill>
-                  <a:srgbClr val="FFFFFF"/>
-                </a:solidFill>
-                <a:latin typeface="Calibri" pitchFamily="34" charset="0"/>
-                <a:ea typeface="Calibri" pitchFamily="34" charset="-122"/>
-                <a:cs typeface="Calibri" pitchFamily="34" charset="-120"/>
-              </a:rPr>
-              <a:t>1</a:t>
-            </a:r>
-            <a:endParaRPr lang="en-US" sz="1800" dirty="0"/>
-          </a:p>
-        </p:txBody>
-      </p:sp>
-      <p:sp>
-        <p:nvSpPr>
-          <p:cNvPr id="7" name="Text 5"/>
-          <p:cNvSpPr txBox="1"/>
-          <p:nvPr/>
-        </p:nvSpPr>
-        <p:spPr>
-          <a:xfrm>
-            <a:off x="1280160" y="1554480"/>
-            <a:ext cx="10241280" cy="411480"/>
-          </a:xfrm>
-          <a:prstGeom prst="rect">
-            <a:avLst/>
-          </a:prstGeom>
-          <a:noFill/>
-          <a:ln/>
-        </p:spPr>
-        <p:txBody>
-          <a:bodyPr wrap="square" lIns="0" tIns="0" rIns="0" bIns="0" rtlCol="0" anchor="t"/>
-          <a:lstStyle/>
-          <a:p>
-            <a:pPr indent="0" marL="0">
-              <a:buNone/>
-            </a:pPr>
-            <a:r>
-              <a:rPr lang="en-US" sz="2100" b="1" dirty="0">
-                <a:solidFill>
-                  <a:srgbClr val="1E2761"/>
-                </a:solidFill>
-                <a:latin typeface="Calibri" pitchFamily="34" charset="0"/>
-                <a:ea typeface="Calibri" pitchFamily="34" charset="-122"/>
-                <a:cs typeface="Calibri" pitchFamily="34" charset="-120"/>
-              </a:rPr>
-              <a:t>Lies die vier Behauptungen. Entscheide still: wahr oder falsch?</a:t>
-            </a:r>
-            <a:endParaRPr lang="en-US" sz="2100" dirty="0"/>
-          </a:p>
-        </p:txBody>
-      </p:sp>
-      <p:sp>
-        <p:nvSpPr>
-          <p:cNvPr id="8" name="Shape 6"/>
-          <p:cNvSpPr/>
-          <p:nvPr/>
-        </p:nvSpPr>
-        <p:spPr>
-          <a:xfrm>
-            <a:off x="731520" y="2052828"/>
-            <a:ext cx="384048" cy="384048"/>
-          </a:xfrm>
-          <a:prstGeom prst="ellipse">
-            <a:avLst/>
-          </a:prstGeom>
-          <a:solidFill>
-            <a:srgbClr val="1E2761"/>
-          </a:solidFill>
-          <a:ln/>
-        </p:spPr>
-      </p:sp>
-      <p:sp>
-        <p:nvSpPr>
-          <p:cNvPr id="9" name="Text 7"/>
-          <p:cNvSpPr txBox="1"/>
-          <p:nvPr/>
-        </p:nvSpPr>
-        <p:spPr>
-          <a:xfrm>
-            <a:off x="731520" y="2052828"/>
-            <a:ext cx="384048" cy="384048"/>
-          </a:xfrm>
-          <a:prstGeom prst="rect">
-            <a:avLst/>
-          </a:prstGeom>
-          <a:noFill/>
-          <a:ln/>
-        </p:spPr>
-        <p:txBody>
-          <a:bodyPr wrap="square" lIns="0" tIns="0" rIns="0" bIns="0" rtlCol="0" anchor="ctr"/>
-          <a:lstStyle/>
-          <a:p>
-            <a:pPr algn="ctr" indent="0" marL="0">
-              <a:buNone/>
-            </a:pPr>
-            <a:r>
-              <a:rPr lang="en-US" sz="1800" b="1" dirty="0">
-                <a:solidFill>
-                  <a:srgbClr val="FFFFFF"/>
-                </a:solidFill>
-                <a:latin typeface="Calibri" pitchFamily="34" charset="0"/>
-                <a:ea typeface="Calibri" pitchFamily="34" charset="-122"/>
-                <a:cs typeface="Calibri" pitchFamily="34" charset="-120"/>
-              </a:rPr>
-              <a:t>2</a:t>
-            </a:r>
-            <a:endParaRPr lang="en-US" sz="1800" dirty="0"/>
-          </a:p>
-        </p:txBody>
-      </p:sp>
-      <p:sp>
-        <p:nvSpPr>
-          <p:cNvPr id="10" name="Text 8"/>
-          <p:cNvSpPr txBox="1"/>
-          <p:nvPr/>
-        </p:nvSpPr>
-        <p:spPr>
-          <a:xfrm>
-            <a:off x="1280160" y="2039112"/>
-            <a:ext cx="10241280" cy="411480"/>
-          </a:xfrm>
-          <a:prstGeom prst="rect">
-            <a:avLst/>
-          </a:prstGeom>
-          <a:noFill/>
-          <a:ln/>
-        </p:spPr>
-        <p:txBody>
-          <a:bodyPr wrap="square" lIns="0" tIns="0" rIns="0" bIns="0" rtlCol="0" anchor="t"/>
-          <a:lstStyle/>
-          <a:p>
-            <a:pPr indent="0" marL="0">
-              <a:buNone/>
-            </a:pPr>
-            <a:r>
-              <a:rPr lang="en-US" sz="2100" b="1" dirty="0">
-                <a:solidFill>
-                  <a:srgbClr val="1E2761"/>
-                </a:solidFill>
-                <a:latin typeface="Calibri" pitchFamily="34" charset="0"/>
-                <a:ea typeface="Calibri" pitchFamily="34" charset="-122"/>
-                <a:cs typeface="Calibri" pitchFamily="34" charset="-120"/>
-              </a:rPr>
-              <a:t>Melde dich: Nenne deine Entscheidung und begründe sie.</a:t>
-            </a:r>
-            <a:endParaRPr lang="en-US" sz="2100" dirty="0"/>
-          </a:p>
-        </p:txBody>
-      </p:sp>
-      <p:sp>
-        <p:nvSpPr>
-          <p:cNvPr id="11" name="Shape 9"/>
-          <p:cNvSpPr/>
-          <p:nvPr/>
-        </p:nvSpPr>
-        <p:spPr>
-          <a:xfrm>
-            <a:off x="731520" y="2537460"/>
-            <a:ext cx="384048" cy="384048"/>
-          </a:xfrm>
-          <a:prstGeom prst="ellipse">
-            <a:avLst/>
-          </a:prstGeom>
-          <a:solidFill>
-            <a:srgbClr val="1E2761"/>
-          </a:solidFill>
-          <a:ln/>
-        </p:spPr>
-      </p:sp>
-      <p:sp>
-        <p:nvSpPr>
-          <p:cNvPr id="12" name="Text 10"/>
-          <p:cNvSpPr txBox="1"/>
-          <p:nvPr/>
-        </p:nvSpPr>
-        <p:spPr>
-          <a:xfrm>
-            <a:off x="731520" y="2537460"/>
-            <a:ext cx="384048" cy="384048"/>
-          </a:xfrm>
-          <a:prstGeom prst="rect">
-            <a:avLst/>
-          </a:prstGeom>
-          <a:noFill/>
-          <a:ln/>
-        </p:spPr>
-        <p:txBody>
-          <a:bodyPr wrap="square" lIns="0" tIns="0" rIns="0" bIns="0" rtlCol="0" anchor="ctr"/>
-          <a:lstStyle/>
-          <a:p>
-            <a:pPr algn="ctr" indent="0" marL="0">
-              <a:buNone/>
-            </a:pPr>
-            <a:r>
-              <a:rPr lang="en-US" sz="1800" b="1" dirty="0">
-                <a:solidFill>
-                  <a:srgbClr val="FFFFFF"/>
-                </a:solidFill>
-                <a:latin typeface="Calibri" pitchFamily="34" charset="0"/>
-                <a:ea typeface="Calibri" pitchFamily="34" charset="-122"/>
-                <a:cs typeface="Calibri" pitchFamily="34" charset="-120"/>
-              </a:rPr>
-              <a:t>3</a:t>
-            </a:r>
-            <a:endParaRPr lang="en-US" sz="1800" dirty="0"/>
-          </a:p>
-        </p:txBody>
-      </p:sp>
-      <p:sp>
-        <p:nvSpPr>
-          <p:cNvPr id="13" name="Text 11"/>
-          <p:cNvSpPr txBox="1"/>
-          <p:nvPr/>
-        </p:nvSpPr>
-        <p:spPr>
-          <a:xfrm>
-            <a:off x="1280160" y="2523744"/>
-            <a:ext cx="10241280" cy="411480"/>
-          </a:xfrm>
-          <a:prstGeom prst="rect">
-            <a:avLst/>
-          </a:prstGeom>
-          <a:noFill/>
-          <a:ln/>
-        </p:spPr>
-        <p:txBody>
-          <a:bodyPr wrap="square" lIns="0" tIns="0" rIns="0" bIns="0" rtlCol="0" anchor="t"/>
-          <a:lstStyle/>
-          <a:p>
-            <a:pPr indent="0" marL="0">
-              <a:buNone/>
-            </a:pPr>
-            <a:r>
-              <a:rPr lang="en-US" sz="2100" b="1" dirty="0">
-                <a:solidFill>
-                  <a:srgbClr val="1E2761"/>
-                </a:solidFill>
-                <a:latin typeface="Calibri" pitchFamily="34" charset="0"/>
-                <a:ea typeface="Calibri" pitchFamily="34" charset="-122"/>
-                <a:cs typeface="Calibri" pitchFamily="34" charset="-120"/>
-              </a:rPr>
-              <a:t>Bei „falsch“: Verbessere die Aussage.</a:t>
-            </a:r>
-            <a:endParaRPr lang="en-US" sz="2100" dirty="0"/>
-          </a:p>
-        </p:txBody>
-      </p:sp>
-      <p:sp>
-        <p:nvSpPr>
-          <p:cNvPr id="14" name="Shape 12"/>
-          <p:cNvSpPr/>
-          <p:nvPr/>
-        </p:nvSpPr>
-        <p:spPr>
-          <a:xfrm>
-            <a:off x="548640" y="5897880"/>
+            <a:off x="548640" y="3383280"/>
             <a:ext cx="11109960" cy="548640"/>
           </a:xfrm>
           <a:prstGeom prst="roundRect">
@@ -5323,20 +5241,20 @@
             </a:avLst>
           </a:prstGeom>
           <a:solidFill>
-            <a:srgbClr val="1E2761"/>
-          </a:solidFill>
-          <a:ln/>
-        </p:spPr>
-      </p:sp>
-      <p:sp>
-        <p:nvSpPr>
-          <p:cNvPr id="15" name="Text 13"/>
-          <p:cNvSpPr txBox="1"/>
-          <p:nvPr/>
-        </p:nvSpPr>
-        <p:spPr>
-          <a:xfrm>
-            <a:off x="822960" y="5897880"/>
+            <a:srgbClr val="EAF0FA"/>
+          </a:solidFill>
+          <a:ln/>
+        </p:spPr>
+      </p:sp>
+      <p:sp>
+        <p:nvSpPr>
+          <p:cNvPr id="7" name="Text 5"/>
+          <p:cNvSpPr txBox="1"/>
+          <p:nvPr/>
+        </p:nvSpPr>
+        <p:spPr>
+          <a:xfrm>
+            <a:off x="822960" y="3383280"/>
             <a:ext cx="10607040" cy="548640"/>
           </a:xfrm>
           <a:prstGeom prst="rect">
@@ -5355,351 +5273,33 @@
             <a:r>
               <a:rPr lang="en-US" sz="1700" b="1" dirty="0">
                 <a:solidFill>
-                  <a:srgbClr val="FFFFFF"/>
-                </a:solidFill>
-                <a:latin typeface="Calibri" pitchFamily="34" charset="0"/>
-                <a:ea typeface="Calibri" pitchFamily="34" charset="-122"/>
-                <a:cs typeface="Calibri" pitchFamily="34" charset="-120"/>
-              </a:rPr>
-              <a:t>Zeit: </a:t>
-            </a:r>
-            <a:pPr indent="0" marL="0">
-              <a:buNone/>
-            </a:pPr>
-            <a:r>
-              <a:rPr lang="en-US" sz="1700" dirty="0">
-                <a:solidFill>
-                  <a:srgbClr val="FFFFFF"/>
-                </a:solidFill>
-                <a:latin typeface="Calibri" pitchFamily="34" charset="0"/>
-                <a:ea typeface="Calibri" pitchFamily="34" charset="-122"/>
-                <a:cs typeface="Calibri" pitchFamily="34" charset="-120"/>
-              </a:rPr>
-              <a:t>4 Minuten · gemeinsam · mündlich      </a:t>
-            </a:r>
-            <a:pPr indent="0" marL="0">
-              <a:buNone/>
-            </a:pPr>
-            <a:r>
-              <a:rPr lang="en-US" sz="1700" i="1" dirty="0">
-                <a:solidFill>
-                  <a:srgbClr val="CADCFC"/>
-                </a:solidFill>
-                <a:latin typeface="Calibri" pitchFamily="34" charset="0"/>
-                <a:ea typeface="Calibri" pitchFamily="34" charset="-122"/>
-                <a:cs typeface="Calibri" pitchFamily="34" charset="-120"/>
-              </a:rPr>
-              <a:t>Wer begründet, bekommt das Wort.</a:t>
-            </a:r>
-            <a:endParaRPr lang="en-US" sz="1700" dirty="0"/>
-          </a:p>
-        </p:txBody>
-      </p:sp>
-      <p:sp>
-        <p:nvSpPr>
-          <p:cNvPr id="16" name="Text 14"/>
-          <p:cNvSpPr txBox="1"/>
-          <p:nvPr/>
-        </p:nvSpPr>
-        <p:spPr>
-          <a:xfrm>
-            <a:off x="548640" y="6510528"/>
-            <a:ext cx="5486400" cy="228600"/>
-          </a:xfrm>
-          <a:prstGeom prst="rect">
-            <a:avLst/>
-          </a:prstGeom>
-          <a:noFill/>
-          <a:ln/>
-        </p:spPr>
-        <p:txBody>
-          <a:bodyPr wrap="square" lIns="0" tIns="0" rIns="0" bIns="0" rtlCol="0" anchor="t"/>
-          <a:lstStyle/>
-          <a:p>
-            <a:pPr indent="0" marL="0">
-              <a:buNone/>
-            </a:pPr>
-            <a:r>
-              <a:rPr lang="en-US" sz="1000" dirty="0">
-                <a:solidFill>
                   <a:srgbClr val="5B6B8C"/>
                 </a:solidFill>
                 <a:latin typeface="Calibri" pitchFamily="34" charset="0"/>
                 <a:ea typeface="Calibri" pitchFamily="34" charset="-122"/>
                 <a:cs typeface="Calibri" pitchFamily="34" charset="-120"/>
               </a:rPr>
-              <a:t>Absolutismus · Wiederholung · Geschichte 8</a:t>
-            </a:r>
-            <a:endParaRPr lang="en-US" sz="1000" dirty="0"/>
-          </a:p>
-        </p:txBody>
-      </p:sp>
-      <p:sp>
-        <p:nvSpPr>
-          <p:cNvPr id="17" name="Text 15"/>
-          <p:cNvSpPr txBox="1"/>
-          <p:nvPr/>
-        </p:nvSpPr>
-        <p:spPr>
-          <a:xfrm>
-            <a:off x="11155680" y="6510528"/>
-            <a:ext cx="457200" cy="228600"/>
-          </a:xfrm>
-          <a:prstGeom prst="rect">
-            <a:avLst/>
-          </a:prstGeom>
-          <a:noFill/>
-          <a:ln/>
-        </p:spPr>
-        <p:txBody>
-          <a:bodyPr wrap="square" lIns="0" tIns="0" rIns="0" bIns="0" rtlCol="0" anchor="t"/>
-          <a:lstStyle/>
-          <a:p>
-            <a:pPr algn="r" indent="0" marL="0">
-              <a:buNone/>
-            </a:pPr>
-            <a:r>
-              <a:rPr lang="en-US" sz="1000" dirty="0">
-                <a:solidFill>
-                  <a:srgbClr val="5B6B8C"/>
-                </a:solidFill>
-                <a:latin typeface="Calibri" pitchFamily="34" charset="0"/>
-                <a:ea typeface="Calibri" pitchFamily="34" charset="-122"/>
-                <a:cs typeface="Calibri" pitchFamily="34" charset="-120"/>
-              </a:rPr>
-              <a:t>3</a:t>
-            </a:r>
-            <a:endParaRPr lang="en-US" sz="1000" dirty="0"/>
-          </a:p>
-        </p:txBody>
-      </p:sp>
-      <p:sp>
-        <p:nvSpPr>
-          <p:cNvPr id="19" name="Shape 16"/>
-          <p:cNvSpPr/>
-          <p:nvPr/>
-        </p:nvSpPr>
-        <p:spPr>
-          <a:xfrm>
-            <a:off x="548640" y="3346704"/>
-            <a:ext cx="11109960" cy="530352"/>
-          </a:xfrm>
-          <a:prstGeom prst="roundRect">
-            <a:avLst>
-              <a:gd name="adj" fmla="val 13793"/>
-            </a:avLst>
-          </a:prstGeom>
-          <a:solidFill>
-            <a:srgbClr val="F4F7FD"/>
-          </a:solidFill>
-          <a:ln/>
-        </p:spPr>
-      </p:sp>
-      <p:sp>
-        <p:nvSpPr>
-          <p:cNvPr id="20" name="Shape 17"/>
-          <p:cNvSpPr/>
-          <p:nvPr/>
-        </p:nvSpPr>
-        <p:spPr>
-          <a:xfrm>
-            <a:off x="685800" y="3429000"/>
-            <a:ext cx="365760" cy="365760"/>
-          </a:xfrm>
-          <a:prstGeom prst="ellipse">
-            <a:avLst/>
-          </a:prstGeom>
-          <a:solidFill>
-            <a:srgbClr val="D9534F"/>
-          </a:solidFill>
-          <a:ln/>
-        </p:spPr>
-      </p:sp>
-      <p:sp>
-        <p:nvSpPr>
-          <p:cNvPr id="21" name="Text 18"/>
-          <p:cNvSpPr txBox="1"/>
-          <p:nvPr/>
-        </p:nvSpPr>
-        <p:spPr>
-          <a:xfrm>
-            <a:off x="685800" y="3429000"/>
-            <a:ext cx="365760" cy="365760"/>
-          </a:xfrm>
-          <a:prstGeom prst="rect">
-            <a:avLst/>
-          </a:prstGeom>
-          <a:noFill/>
-          <a:ln/>
-        </p:spPr>
-        <p:txBody>
-          <a:bodyPr wrap="square" lIns="0" tIns="0" rIns="0" bIns="0" rtlCol="0" anchor="ctr"/>
-          <a:lstStyle/>
-          <a:p>
-            <a:pPr algn="ctr" indent="0" marL="0">
-              <a:buNone/>
-            </a:pPr>
-            <a:r>
-              <a:rPr lang="en-US" sz="1800" b="1" dirty="0">
-                <a:solidFill>
-                  <a:srgbClr val="FFFFFF"/>
-                </a:solidFill>
-                <a:latin typeface="Calibri" pitchFamily="34" charset="0"/>
-                <a:ea typeface="Calibri" pitchFamily="34" charset="-122"/>
-                <a:cs typeface="Calibri" pitchFamily="34" charset="-120"/>
-              </a:rPr>
-              <a:t>1</a:t>
-            </a:r>
-            <a:endParaRPr lang="en-US" sz="1800" dirty="0"/>
-          </a:p>
-        </p:txBody>
-      </p:sp>
-      <p:sp>
-        <p:nvSpPr>
-          <p:cNvPr id="22" name="Text 19"/>
-          <p:cNvSpPr txBox="1"/>
-          <p:nvPr/>
-        </p:nvSpPr>
-        <p:spPr>
-          <a:xfrm>
-            <a:off x="1280160" y="3346704"/>
-            <a:ext cx="10241280" cy="530352"/>
-          </a:xfrm>
-          <a:prstGeom prst="rect">
-            <a:avLst/>
-          </a:prstGeom>
-          <a:noFill/>
-          <a:ln/>
-        </p:spPr>
-        <p:txBody>
-          <a:bodyPr wrap="square" lIns="0" tIns="0" rIns="0" bIns="0" rtlCol="0" anchor="ctr"/>
-          <a:lstStyle/>
-          <a:p>
-            <a:pPr indent="0" marL="0">
-              <a:buNone/>
-            </a:pPr>
-            <a:r>
-              <a:rPr lang="en-US" sz="2200" dirty="0">
-                <a:solidFill>
-                  <a:srgbClr val="1E2761"/>
+              <a:t>Beispiel:   </a:t>
+            </a:r>
+            <a:pPr indent="0" marL="0">
+              <a:buNone/>
+            </a:pPr>
+            <a:r>
+              <a:rPr lang="en-US" sz="1900" b="1" dirty="0">
+                <a:solidFill>
+                  <a:srgbClr val="D9534F"/>
                 </a:solidFill>
                 <a:latin typeface="Cambria" pitchFamily="34" charset="0"/>
                 <a:ea typeface="Cambria" pitchFamily="34" charset="-122"/>
                 <a:cs typeface="Cambria" pitchFamily="34" charset="-120"/>
               </a:rPr>
-              <a:t>Der Dritte Stand war mit Abstand der größte Stand.</a:t>
-            </a:r>
-            <a:endParaRPr lang="en-US" sz="2200" dirty="0"/>
-          </a:p>
-        </p:txBody>
-      </p:sp>
-      <p:sp>
-        <p:nvSpPr>
-          <p:cNvPr id="23" name="Shape 20"/>
-          <p:cNvSpPr/>
-          <p:nvPr/>
-        </p:nvSpPr>
-        <p:spPr>
-          <a:xfrm>
-            <a:off x="548640" y="3950208"/>
-            <a:ext cx="11109960" cy="530352"/>
-          </a:xfrm>
-          <a:prstGeom prst="roundRect">
-            <a:avLst>
-              <a:gd name="adj" fmla="val 13793"/>
-            </a:avLst>
-          </a:prstGeom>
-          <a:solidFill>
-            <a:srgbClr val="F4F7FD"/>
-          </a:solidFill>
-          <a:ln/>
-        </p:spPr>
-      </p:sp>
-      <p:sp>
-        <p:nvSpPr>
-          <p:cNvPr id="24" name="Shape 21"/>
-          <p:cNvSpPr/>
-          <p:nvPr/>
-        </p:nvSpPr>
-        <p:spPr>
-          <a:xfrm>
-            <a:off x="685800" y="4032504"/>
-            <a:ext cx="365760" cy="365760"/>
-          </a:xfrm>
-          <a:prstGeom prst="ellipse">
-            <a:avLst/>
-          </a:prstGeom>
-          <a:solidFill>
-            <a:srgbClr val="D9534F"/>
-          </a:solidFill>
-          <a:ln/>
-        </p:spPr>
-      </p:sp>
-      <p:sp>
-        <p:nvSpPr>
-          <p:cNvPr id="25" name="Text 22"/>
-          <p:cNvSpPr txBox="1"/>
-          <p:nvPr/>
-        </p:nvSpPr>
-        <p:spPr>
-          <a:xfrm>
-            <a:off x="685800" y="4032504"/>
-            <a:ext cx="365760" cy="365760"/>
-          </a:xfrm>
-          <a:prstGeom prst="rect">
-            <a:avLst/>
-          </a:prstGeom>
-          <a:noFill/>
-          <a:ln/>
-        </p:spPr>
-        <p:txBody>
-          <a:bodyPr wrap="square" lIns="0" tIns="0" rIns="0" bIns="0" rtlCol="0" anchor="ctr"/>
-          <a:lstStyle/>
-          <a:p>
-            <a:pPr algn="ctr" indent="0" marL="0">
-              <a:buNone/>
-            </a:pPr>
-            <a:r>
-              <a:rPr lang="en-US" sz="1800" b="1" dirty="0">
-                <a:solidFill>
-                  <a:srgbClr val="FFFFFF"/>
-                </a:solidFill>
-                <a:latin typeface="Calibri" pitchFamily="34" charset="0"/>
-                <a:ea typeface="Calibri" pitchFamily="34" charset="-122"/>
-                <a:cs typeface="Calibri" pitchFamily="34" charset="-120"/>
-              </a:rPr>
-              <a:t>2</a:t>
-            </a:r>
-            <a:endParaRPr lang="en-US" sz="1800" dirty="0"/>
-          </a:p>
-        </p:txBody>
-      </p:sp>
-      <p:sp>
-        <p:nvSpPr>
-          <p:cNvPr id="26" name="Text 23"/>
-          <p:cNvSpPr txBox="1"/>
-          <p:nvPr/>
-        </p:nvSpPr>
-        <p:spPr>
-          <a:xfrm>
-            <a:off x="1280160" y="3950208"/>
-            <a:ext cx="10241280" cy="530352"/>
-          </a:xfrm>
-          <a:prstGeom prst="rect">
-            <a:avLst/>
-          </a:prstGeom>
-          <a:noFill/>
-          <a:ln/>
-        </p:spPr>
-        <p:txBody>
-          <a:bodyPr wrap="square" lIns="0" tIns="0" rIns="0" bIns="0" rtlCol="0" anchor="ctr"/>
-          <a:lstStyle/>
-          <a:p>
-            <a:pPr indent="0" marL="0">
-              <a:buNone/>
-            </a:pPr>
-            <a:r>
-              <a:rPr lang="en-US" sz="2200" dirty="0">
+              <a:t>Verwaltung</a:t>
+            </a:r>
+            <a:pPr indent="0" marL="0">
+              <a:buNone/>
+            </a:pPr>
+            <a:r>
+              <a:rPr lang="en-US" sz="1900" dirty="0">
                 <a:solidFill>
                   <a:srgbClr val="1E2761"/>
                 </a:solidFill>
@@ -5707,239 +5307,27 @@
                 <a:ea typeface="Cambria" pitchFamily="34" charset="-122"/>
                 <a:cs typeface="Cambria" pitchFamily="34" charset="-120"/>
               </a:rPr>
-              <a:t>Der Adel musste hohe Steuern an den König zahlen.</a:t>
-            </a:r>
-            <a:endParaRPr lang="en-US" sz="2200" dirty="0"/>
-          </a:p>
-        </p:txBody>
-      </p:sp>
-      <p:sp>
-        <p:nvSpPr>
-          <p:cNvPr id="27" name="Shape 24"/>
-          <p:cNvSpPr/>
-          <p:nvPr/>
-        </p:nvSpPr>
-        <p:spPr>
-          <a:xfrm>
-            <a:off x="548640" y="4553712"/>
-            <a:ext cx="11109960" cy="530352"/>
-          </a:xfrm>
-          <a:prstGeom prst="roundRect">
-            <a:avLst>
-              <a:gd name="adj" fmla="val 13793"/>
-            </a:avLst>
-          </a:prstGeom>
-          <a:solidFill>
-            <a:srgbClr val="F4F7FD"/>
-          </a:solidFill>
-          <a:ln/>
-        </p:spPr>
-      </p:sp>
-      <p:sp>
-        <p:nvSpPr>
-          <p:cNvPr id="28" name="Shape 25"/>
-          <p:cNvSpPr/>
-          <p:nvPr/>
-        </p:nvSpPr>
-        <p:spPr>
-          <a:xfrm>
-            <a:off x="685800" y="4636008"/>
-            <a:ext cx="365760" cy="365760"/>
-          </a:xfrm>
-          <a:prstGeom prst="ellipse">
-            <a:avLst/>
-          </a:prstGeom>
-          <a:solidFill>
-            <a:srgbClr val="D9534F"/>
-          </a:solidFill>
-          <a:ln/>
-        </p:spPr>
-      </p:sp>
-      <p:sp>
-        <p:nvSpPr>
-          <p:cNvPr id="29" name="Text 26"/>
-          <p:cNvSpPr txBox="1"/>
-          <p:nvPr/>
-        </p:nvSpPr>
-        <p:spPr>
-          <a:xfrm>
-            <a:off x="685800" y="4636008"/>
-            <a:ext cx="365760" cy="365760"/>
-          </a:xfrm>
-          <a:prstGeom prst="rect">
-            <a:avLst/>
-          </a:prstGeom>
-          <a:noFill/>
-          <a:ln/>
-        </p:spPr>
-        <p:txBody>
-          <a:bodyPr wrap="square" lIns="0" tIns="0" rIns="0" bIns="0" rtlCol="0" anchor="ctr"/>
-          <a:lstStyle/>
-          <a:p>
-            <a:pPr algn="ctr" indent="0" marL="0">
-              <a:buNone/>
-            </a:pPr>
-            <a:r>
-              <a:rPr lang="en-US" sz="1800" b="1" dirty="0">
-                <a:solidFill>
-                  <a:srgbClr val="FFFFFF"/>
-                </a:solidFill>
-                <a:latin typeface="Calibri" pitchFamily="34" charset="0"/>
-                <a:ea typeface="Calibri" pitchFamily="34" charset="-122"/>
-                <a:cs typeface="Calibri" pitchFamily="34" charset="-120"/>
-              </a:rPr>
-              <a:t>3</a:t>
-            </a:r>
-            <a:endParaRPr lang="en-US" sz="1800" dirty="0"/>
-          </a:p>
-        </p:txBody>
-      </p:sp>
-      <p:sp>
-        <p:nvSpPr>
-          <p:cNvPr id="30" name="Text 27"/>
-          <p:cNvSpPr txBox="1"/>
-          <p:nvPr/>
-        </p:nvSpPr>
-        <p:spPr>
-          <a:xfrm>
-            <a:off x="1280160" y="4553712"/>
-            <a:ext cx="10241280" cy="530352"/>
-          </a:xfrm>
-          <a:prstGeom prst="rect">
-            <a:avLst/>
-          </a:prstGeom>
-          <a:noFill/>
-          <a:ln/>
-        </p:spPr>
-        <p:txBody>
-          <a:bodyPr wrap="square" lIns="0" tIns="0" rIns="0" bIns="0" rtlCol="0" anchor="ctr"/>
-          <a:lstStyle/>
-          <a:p>
-            <a:pPr indent="0" marL="0">
-              <a:buNone/>
-            </a:pPr>
-            <a:r>
-              <a:rPr lang="en-US" sz="2200" dirty="0">
-                <a:solidFill>
-                  <a:srgbClr val="1E2761"/>
+              <a:t> kontrolliert das Land · </a:t>
+            </a:r>
+            <a:pPr indent="0" marL="0">
+              <a:buNone/>
+            </a:pPr>
+            <a:r>
+              <a:rPr lang="en-US" sz="1900" b="1" dirty="0">
+                <a:solidFill>
+                  <a:srgbClr val="D9534F"/>
                 </a:solidFill>
                 <a:latin typeface="Cambria" pitchFamily="34" charset="0"/>
                 <a:ea typeface="Cambria" pitchFamily="34" charset="-122"/>
                 <a:cs typeface="Cambria" pitchFamily="34" charset="-120"/>
               </a:rPr>
-              <a:t>Ludwig XIV. verzichtete auf Söldner und baute ein stehendes Heer auf.</a:t>
-            </a:r>
-            <a:endParaRPr lang="en-US" sz="2200" dirty="0"/>
-          </a:p>
-        </p:txBody>
-      </p:sp>
-      <p:sp>
-        <p:nvSpPr>
-          <p:cNvPr id="31" name="Shape 28"/>
-          <p:cNvSpPr/>
-          <p:nvPr/>
-        </p:nvSpPr>
-        <p:spPr>
-          <a:xfrm>
-            <a:off x="548640" y="5157216"/>
-            <a:ext cx="11109960" cy="530352"/>
-          </a:xfrm>
-          <a:prstGeom prst="roundRect">
-            <a:avLst>
-              <a:gd name="adj" fmla="val 13793"/>
-            </a:avLst>
-          </a:prstGeom>
-          <a:solidFill>
-            <a:srgbClr val="F4F7FD"/>
-          </a:solidFill>
-          <a:ln/>
-        </p:spPr>
-      </p:sp>
-      <p:sp>
-        <p:nvSpPr>
-          <p:cNvPr id="32" name="Shape 29"/>
-          <p:cNvSpPr/>
-          <p:nvPr/>
-        </p:nvSpPr>
-        <p:spPr>
-          <a:xfrm>
-            <a:off x="685800" y="5239512"/>
-            <a:ext cx="365760" cy="365760"/>
-          </a:xfrm>
-          <a:prstGeom prst="ellipse">
-            <a:avLst/>
-          </a:prstGeom>
-          <a:solidFill>
-            <a:srgbClr val="D9534F"/>
-          </a:solidFill>
-          <a:ln/>
-        </p:spPr>
-      </p:sp>
-      <p:sp>
-        <p:nvSpPr>
-          <p:cNvPr id="33" name="Text 30"/>
-          <p:cNvSpPr txBox="1"/>
-          <p:nvPr/>
-        </p:nvSpPr>
-        <p:spPr>
-          <a:xfrm>
-            <a:off x="685800" y="5239512"/>
-            <a:ext cx="365760" cy="365760"/>
-          </a:xfrm>
-          <a:prstGeom prst="rect">
-            <a:avLst/>
-          </a:prstGeom>
-          <a:noFill/>
-          <a:ln/>
-        </p:spPr>
-        <p:txBody>
-          <a:bodyPr wrap="square" lIns="0" tIns="0" rIns="0" bIns="0" rtlCol="0" anchor="ctr"/>
-          <a:lstStyle/>
-          <a:p>
-            <a:pPr algn="ctr" indent="0" marL="0">
-              <a:buNone/>
-            </a:pPr>
-            <a:r>
-              <a:rPr lang="en-US" sz="1800" b="1" dirty="0">
-                <a:solidFill>
-                  <a:srgbClr val="FFFFFF"/>
-                </a:solidFill>
-                <a:latin typeface="Calibri" pitchFamily="34" charset="0"/>
-                <a:ea typeface="Calibri" pitchFamily="34" charset="-122"/>
-                <a:cs typeface="Calibri" pitchFamily="34" charset="-120"/>
-              </a:rPr>
-              <a:t>4</a:t>
-            </a:r>
-            <a:endParaRPr lang="en-US" sz="1800" dirty="0"/>
-          </a:p>
-        </p:txBody>
-      </p:sp>
-      <p:sp>
-        <p:nvSpPr>
-          <p:cNvPr id="34" name="Text 31"/>
-          <p:cNvSpPr txBox="1"/>
-          <p:nvPr/>
-        </p:nvSpPr>
-        <p:spPr>
-          <a:xfrm>
-            <a:off x="1280160" y="5157216"/>
-            <a:ext cx="10241280" cy="530352"/>
-          </a:xfrm>
-          <a:prstGeom prst="rect">
-            <a:avLst/>
-          </a:prstGeom>
-          <a:noFill/>
-          <a:ln/>
-        </p:spPr>
-        <p:txBody>
-          <a:bodyPr wrap="square" lIns="0" tIns="0" rIns="0" bIns="0" rtlCol="0" anchor="ctr"/>
-          <a:lstStyle/>
-          <a:p>
-            <a:pPr indent="0" marL="0">
-              <a:buNone/>
-            </a:pPr>
-            <a:r>
-              <a:rPr lang="en-US" sz="2200" dirty="0">
+              <a:t>Hof</a:t>
+            </a:r>
+            <a:pPr indent="0" marL="0">
+              <a:buNone/>
+            </a:pPr>
+            <a:r>
+              <a:rPr lang="en-US" sz="1900" dirty="0">
                 <a:solidFill>
                   <a:srgbClr val="1E2761"/>
                 </a:solidFill>
@@ -5947,9 +5335,502 @@
                 <a:ea typeface="Cambria" pitchFamily="34" charset="-122"/>
                 <a:cs typeface="Cambria" pitchFamily="34" charset="-120"/>
               </a:rPr>
-              <a:t>Ludwig XIV. erlaubte den Protestanten die freie Religionsausübung.</a:t>
-            </a:r>
-            <a:endParaRPr lang="en-US" sz="2200" dirty="0"/>
+              <a:t> bindet den Adel · </a:t>
+            </a:r>
+            <a:pPr indent="0" marL="0">
+              <a:buNone/>
+            </a:pPr>
+            <a:r>
+              <a:rPr lang="en-US" sz="1900" b="1" dirty="0">
+                <a:solidFill>
+                  <a:srgbClr val="D9534F"/>
+                </a:solidFill>
+                <a:latin typeface="Cambria" pitchFamily="34" charset="0"/>
+                <a:ea typeface="Cambria" pitchFamily="34" charset="-122"/>
+                <a:cs typeface="Cambria" pitchFamily="34" charset="-120"/>
+              </a:rPr>
+              <a:t>Wirtschaft</a:t>
+            </a:r>
+            <a:pPr indent="0" marL="0">
+              <a:buNone/>
+            </a:pPr>
+            <a:r>
+              <a:rPr lang="en-US" sz="1900" dirty="0">
+                <a:solidFill>
+                  <a:srgbClr val="1E2761"/>
+                </a:solidFill>
+                <a:latin typeface="Cambria" pitchFamily="34" charset="0"/>
+                <a:ea typeface="Cambria" pitchFamily="34" charset="-122"/>
+                <a:cs typeface="Cambria" pitchFamily="34" charset="-120"/>
+              </a:rPr>
+              <a:t> liefert Geld · </a:t>
+            </a:r>
+            <a:pPr indent="0" marL="0">
+              <a:buNone/>
+            </a:pPr>
+            <a:r>
+              <a:rPr lang="en-US" sz="1900" b="1" dirty="0">
+                <a:solidFill>
+                  <a:srgbClr val="D9534F"/>
+                </a:solidFill>
+                <a:latin typeface="Cambria" pitchFamily="34" charset="0"/>
+                <a:ea typeface="Cambria" pitchFamily="34" charset="-122"/>
+                <a:cs typeface="Cambria" pitchFamily="34" charset="-120"/>
+              </a:rPr>
+              <a:t>Religion</a:t>
+            </a:r>
+            <a:pPr indent="0" marL="0">
+              <a:buNone/>
+            </a:pPr>
+            <a:r>
+              <a:rPr lang="en-US" sz="1900" dirty="0">
+                <a:solidFill>
+                  <a:srgbClr val="1E2761"/>
+                </a:solidFill>
+                <a:latin typeface="Cambria" pitchFamily="34" charset="0"/>
+                <a:ea typeface="Cambria" pitchFamily="34" charset="-122"/>
+                <a:cs typeface="Cambria" pitchFamily="34" charset="-120"/>
+              </a:rPr>
+              <a:t> begründet die Macht · </a:t>
+            </a:r>
+            <a:pPr indent="0" marL="0">
+              <a:buNone/>
+            </a:pPr>
+            <a:r>
+              <a:rPr lang="en-US" sz="1900" b="1" dirty="0">
+                <a:solidFill>
+                  <a:srgbClr val="D9534F"/>
+                </a:solidFill>
+                <a:latin typeface="Cambria" pitchFamily="34" charset="0"/>
+                <a:ea typeface="Cambria" pitchFamily="34" charset="-122"/>
+                <a:cs typeface="Cambria" pitchFamily="34" charset="-120"/>
+              </a:rPr>
+              <a:t>Heer</a:t>
+            </a:r>
+            <a:pPr indent="0" marL="0">
+              <a:buNone/>
+            </a:pPr>
+            <a:r>
+              <a:rPr lang="en-US" sz="1900" dirty="0">
+                <a:solidFill>
+                  <a:srgbClr val="1E2761"/>
+                </a:solidFill>
+                <a:latin typeface="Cambria" pitchFamily="34" charset="0"/>
+                <a:ea typeface="Cambria" pitchFamily="34" charset="-122"/>
+                <a:cs typeface="Cambria" pitchFamily="34" charset="-120"/>
+              </a:rPr>
+              <a:t> setzt sie durch</a:t>
+            </a:r>
+            <a:endParaRPr lang="en-US" sz="1900" dirty="0"/>
+          </a:p>
+        </p:txBody>
+      </p:sp>
+      <p:sp>
+        <p:nvSpPr>
+          <p:cNvPr id="8" name="Shape 6"/>
+          <p:cNvSpPr/>
+          <p:nvPr/>
+        </p:nvSpPr>
+        <p:spPr>
+          <a:xfrm>
+            <a:off x="548640" y="4069080"/>
+            <a:ext cx="5440680" cy="1645920"/>
+          </a:xfrm>
+          <a:prstGeom prst="roundRect">
+            <a:avLst>
+              <a:gd name="adj" fmla="val 4444"/>
+            </a:avLst>
+          </a:prstGeom>
+          <a:solidFill>
+            <a:srgbClr val="F4F7FD"/>
+          </a:solidFill>
+          <a:ln/>
+        </p:spPr>
+      </p:sp>
+      <p:sp>
+        <p:nvSpPr>
+          <p:cNvPr id="9" name="Text 7"/>
+          <p:cNvSpPr txBox="1"/>
+          <p:nvPr/>
+        </p:nvSpPr>
+        <p:spPr>
+          <a:xfrm>
+            <a:off x="777240" y="4187952"/>
+            <a:ext cx="4983480" cy="365760"/>
+          </a:xfrm>
+          <a:prstGeom prst="rect">
+            <a:avLst/>
+          </a:prstGeom>
+          <a:noFill/>
+          <a:ln/>
+        </p:spPr>
+        <p:txBody>
+          <a:bodyPr wrap="square" lIns="0" tIns="0" rIns="0" bIns="0" rtlCol="0" anchor="t"/>
+          <a:lstStyle/>
+          <a:p>
+            <a:pPr indent="0" marL="0">
+              <a:buNone/>
+            </a:pPr>
+            <a:r>
+              <a:rPr lang="en-US" sz="1900" b="1" dirty="0">
+                <a:solidFill>
+                  <a:srgbClr val="D9534F"/>
+                </a:solidFill>
+                <a:latin typeface="Cambria" pitchFamily="34" charset="0"/>
+                <a:ea typeface="Cambria" pitchFamily="34" charset="-122"/>
+                <a:cs typeface="Cambria" pitchFamily="34" charset="-120"/>
+              </a:rPr>
+              <a:t>Wofür brauche ich das?</a:t>
+            </a:r>
+            <a:endParaRPr lang="en-US" sz="1900" dirty="0"/>
+          </a:p>
+        </p:txBody>
+      </p:sp>
+      <p:sp>
+        <p:nvSpPr>
+          <p:cNvPr id="10" name="Text 8"/>
+          <p:cNvSpPr txBox="1"/>
+          <p:nvPr/>
+        </p:nvSpPr>
+        <p:spPr>
+          <a:xfrm>
+            <a:off x="777240" y="4572000"/>
+            <a:ext cx="4983480" cy="1051560"/>
+          </a:xfrm>
+          <a:prstGeom prst="rect">
+            <a:avLst/>
+          </a:prstGeom>
+          <a:noFill/>
+          <a:ln/>
+        </p:spPr>
+        <p:txBody>
+          <a:bodyPr wrap="square" lIns="0" tIns="0" rIns="0" bIns="0" rtlCol="0" anchor="t"/>
+          <a:lstStyle/>
+          <a:p>
+            <a:pPr indent="0" marL="0">
+              <a:buNone/>
+            </a:pPr>
+            <a:r>
+              <a:rPr lang="en-US" sz="1900" dirty="0">
+                <a:solidFill>
+                  <a:srgbClr val="1E2761"/>
+                </a:solidFill>
+                <a:latin typeface="Calibri" pitchFamily="34" charset="0"/>
+                <a:ea typeface="Calibri" pitchFamily="34" charset="-122"/>
+                <a:cs typeface="Calibri" pitchFamily="34" charset="-120"/>
+              </a:rPr>
+              <a:t>Im Test sollst du die Säulen nennen </a:t>
+            </a:r>
+            <a:pPr indent="0" marL="0">
+              <a:buNone/>
+            </a:pPr>
+            <a:r>
+              <a:rPr lang="en-US" sz="1900" b="1" dirty="0">
+                <a:solidFill>
+                  <a:srgbClr val="1E2761"/>
+                </a:solidFill>
+                <a:latin typeface="Calibri" pitchFamily="34" charset="0"/>
+                <a:ea typeface="Calibri" pitchFamily="34" charset="-122"/>
+                <a:cs typeface="Calibri" pitchFamily="34" charset="-120"/>
+              </a:rPr>
+              <a:t>und</a:t>
+            </a:r>
+            <a:pPr indent="0" marL="0">
+              <a:buNone/>
+            </a:pPr>
+            <a:r>
+              <a:rPr lang="en-US" sz="1900" dirty="0">
+                <a:solidFill>
+                  <a:srgbClr val="1E2761"/>
+                </a:solidFill>
+                <a:latin typeface="Calibri" pitchFamily="34" charset="0"/>
+                <a:ea typeface="Calibri" pitchFamily="34" charset="-122"/>
+                <a:cs typeface="Calibri" pitchFamily="34" charset="-120"/>
+              </a:rPr>
+              <a:t> erklären, wie der König damit seine Macht sichert.</a:t>
+            </a:r>
+            <a:endParaRPr lang="en-US" sz="1900" dirty="0"/>
+          </a:p>
+        </p:txBody>
+      </p:sp>
+      <p:sp>
+        <p:nvSpPr>
+          <p:cNvPr id="11" name="Shape 9"/>
+          <p:cNvSpPr/>
+          <p:nvPr/>
+        </p:nvSpPr>
+        <p:spPr>
+          <a:xfrm>
+            <a:off x="6217920" y="4069080"/>
+            <a:ext cx="5440680" cy="1645920"/>
+          </a:xfrm>
+          <a:prstGeom prst="roundRect">
+            <a:avLst>
+              <a:gd name="adj" fmla="val 4444"/>
+            </a:avLst>
+          </a:prstGeom>
+          <a:solidFill>
+            <a:srgbClr val="F4F7FD"/>
+          </a:solidFill>
+          <a:ln/>
+        </p:spPr>
+      </p:sp>
+      <p:sp>
+        <p:nvSpPr>
+          <p:cNvPr id="12" name="Text 10"/>
+          <p:cNvSpPr txBox="1"/>
+          <p:nvPr/>
+        </p:nvSpPr>
+        <p:spPr>
+          <a:xfrm>
+            <a:off x="6446520" y="4187952"/>
+            <a:ext cx="4983480" cy="365760"/>
+          </a:xfrm>
+          <a:prstGeom prst="rect">
+            <a:avLst/>
+          </a:prstGeom>
+          <a:noFill/>
+          <a:ln/>
+        </p:spPr>
+        <p:txBody>
+          <a:bodyPr wrap="square" lIns="0" tIns="0" rIns="0" bIns="0" rtlCol="0" anchor="t"/>
+          <a:lstStyle/>
+          <a:p>
+            <a:pPr indent="0" marL="0">
+              <a:buNone/>
+            </a:pPr>
+            <a:r>
+              <a:rPr lang="en-US" sz="1900" b="1" dirty="0">
+                <a:solidFill>
+                  <a:srgbClr val="D9534F"/>
+                </a:solidFill>
+                <a:latin typeface="Cambria" pitchFamily="34" charset="0"/>
+                <a:ea typeface="Cambria" pitchFamily="34" charset="-122"/>
+                <a:cs typeface="Cambria" pitchFamily="34" charset="-120"/>
+              </a:rPr>
+              <a:t>Test</a:t>
+            </a:r>
+            <a:endParaRPr lang="en-US" sz="1900" dirty="0"/>
+          </a:p>
+        </p:txBody>
+      </p:sp>
+      <p:sp>
+        <p:nvSpPr>
+          <p:cNvPr id="13" name="Text 11"/>
+          <p:cNvSpPr txBox="1"/>
+          <p:nvPr/>
+        </p:nvSpPr>
+        <p:spPr>
+          <a:xfrm>
+            <a:off x="6446520" y="4572000"/>
+            <a:ext cx="4983480" cy="1051560"/>
+          </a:xfrm>
+          <a:prstGeom prst="rect">
+            <a:avLst/>
+          </a:prstGeom>
+          <a:noFill/>
+          <a:ln/>
+        </p:spPr>
+        <p:txBody>
+          <a:bodyPr wrap="square" lIns="0" tIns="0" rIns="0" bIns="0" rtlCol="0" anchor="t"/>
+          <a:lstStyle/>
+          <a:p>
+            <a:pPr indent="0" marL="0">
+              <a:buNone/>
+            </a:pPr>
+            <a:r>
+              <a:rPr lang="en-US" sz="1900" dirty="0">
+                <a:solidFill>
+                  <a:srgbClr val="1E2761"/>
+                </a:solidFill>
+                <a:latin typeface="Calibri" pitchFamily="34" charset="0"/>
+                <a:ea typeface="Calibri" pitchFamily="34" charset="-122"/>
+                <a:cs typeface="Calibri" pitchFamily="34" charset="-120"/>
+              </a:rPr>
+              <a:t>Bei jeder Säule fragen: </a:t>
+            </a:r>
+            <a:pPr indent="0" marL="0">
+              <a:buNone/>
+            </a:pPr>
+            <a:r>
+              <a:rPr lang="en-US" sz="1900" b="1" dirty="0">
+                <a:solidFill>
+                  <a:srgbClr val="1E2761"/>
+                </a:solidFill>
+                <a:latin typeface="Calibri" pitchFamily="34" charset="0"/>
+                <a:ea typeface="Calibri" pitchFamily="34" charset="-122"/>
+                <a:cs typeface="Calibri" pitchFamily="34" charset="-120"/>
+              </a:rPr>
+              <a:t>Was sichert der König damit?</a:t>
+            </a:r>
+            <a:endParaRPr lang="en-US" sz="1900" dirty="0"/>
+          </a:p>
+        </p:txBody>
+      </p:sp>
+      <p:sp>
+        <p:nvSpPr>
+          <p:cNvPr id="14" name="Shape 12"/>
+          <p:cNvSpPr/>
+          <p:nvPr/>
+        </p:nvSpPr>
+        <p:spPr>
+          <a:xfrm>
+            <a:off x="548640" y="5897880"/>
+            <a:ext cx="11109960" cy="548640"/>
+          </a:xfrm>
+          <a:prstGeom prst="roundRect">
+            <a:avLst>
+              <a:gd name="adj" fmla="val 13333"/>
+            </a:avLst>
+          </a:prstGeom>
+          <a:solidFill>
+            <a:srgbClr val="1E2761"/>
+          </a:solidFill>
+          <a:ln/>
+        </p:spPr>
+      </p:sp>
+      <p:sp>
+        <p:nvSpPr>
+          <p:cNvPr id="15" name="Text 13"/>
+          <p:cNvSpPr txBox="1"/>
+          <p:nvPr/>
+        </p:nvSpPr>
+        <p:spPr>
+          <a:xfrm>
+            <a:off x="822960" y="5897880"/>
+            <a:ext cx="10607040" cy="548640"/>
+          </a:xfrm>
+          <a:prstGeom prst="rect">
+            <a:avLst/>
+          </a:prstGeom>
+          <a:noFill/>
+          <a:ln/>
+        </p:spPr>
+        <p:txBody>
+          <a:bodyPr wrap="square" lIns="0" tIns="0" rIns="0" bIns="0" rtlCol="0" anchor="ctr"/>
+          <a:lstStyle/>
+          <a:p>
+            <a:pPr indent="0" marL="0">
+              <a:buNone/>
+            </a:pPr>
+            <a:r>
+              <a:rPr lang="en-US" sz="1700" b="1" dirty="0">
+                <a:solidFill>
+                  <a:srgbClr val="FFFFFF"/>
+                </a:solidFill>
+                <a:latin typeface="Calibri" pitchFamily="34" charset="0"/>
+                <a:ea typeface="Calibri" pitchFamily="34" charset="-122"/>
+                <a:cs typeface="Calibri" pitchFamily="34" charset="-120"/>
+              </a:rPr>
+              <a:t>Jetzt: </a:t>
+            </a:r>
+            <a:pPr indent="0" marL="0">
+              <a:buNone/>
+            </a:pPr>
+            <a:r>
+              <a:rPr lang="en-US" sz="1700" dirty="0">
+                <a:solidFill>
+                  <a:srgbClr val="FFFFFF"/>
+                </a:solidFill>
+                <a:latin typeface="Calibri" pitchFamily="34" charset="0"/>
+                <a:ea typeface="Calibri" pitchFamily="34" charset="-122"/>
+                <a:cs typeface="Calibri" pitchFamily="34" charset="-120"/>
+              </a:rPr>
+              <a:t>Schreibe den Merksatz mit Beispiel ab und rahme ihn rot ein.      </a:t>
+            </a:r>
+            <a:pPr indent="0" marL="0">
+              <a:buNone/>
+            </a:pPr>
+            <a:r>
+              <a:rPr lang="en-US" sz="1700" i="1" dirty="0">
+                <a:solidFill>
+                  <a:srgbClr val="CADCFC"/>
+                </a:solidFill>
+                <a:latin typeface="Calibri" pitchFamily="34" charset="0"/>
+                <a:ea typeface="Calibri" pitchFamily="34" charset="-122"/>
+                <a:cs typeface="Calibri" pitchFamily="34" charset="-120"/>
+              </a:rPr>
+              <a:t>Fertig? Stift hinlegen.</a:t>
+            </a:r>
+            <a:endParaRPr lang="en-US" sz="1700" dirty="0"/>
+          </a:p>
+        </p:txBody>
+      </p:sp>
+      <p:sp>
+        <p:nvSpPr>
+          <p:cNvPr id="16" name="Text 14"/>
+          <p:cNvSpPr txBox="1"/>
+          <p:nvPr/>
+        </p:nvSpPr>
+        <p:spPr>
+          <a:xfrm>
+            <a:off x="548640" y="6510528"/>
+            <a:ext cx="5486400" cy="228600"/>
+          </a:xfrm>
+          <a:prstGeom prst="rect">
+            <a:avLst/>
+          </a:prstGeom>
+          <a:noFill/>
+          <a:ln/>
+        </p:spPr>
+        <p:txBody>
+          <a:bodyPr wrap="square" lIns="0" tIns="0" rIns="0" bIns="0" rtlCol="0" anchor="t"/>
+          <a:lstStyle/>
+          <a:p>
+            <a:pPr indent="0" marL="0">
+              <a:buNone/>
+            </a:pPr>
+            <a:r>
+              <a:rPr lang="en-US" sz="1000" dirty="0">
+                <a:solidFill>
+                  <a:srgbClr val="5B6B8C"/>
+                </a:solidFill>
+                <a:latin typeface="Calibri" pitchFamily="34" charset="0"/>
+                <a:ea typeface="Calibri" pitchFamily="34" charset="-122"/>
+                <a:cs typeface="Calibri" pitchFamily="34" charset="-120"/>
+              </a:rPr>
+              <a:t>Absolutismus · Wiederholung · Geschichte 8</a:t>
+            </a:r>
+            <a:endParaRPr lang="en-US" sz="1000" dirty="0"/>
+          </a:p>
+        </p:txBody>
+      </p:sp>
+      <p:sp>
+        <p:nvSpPr>
+          <p:cNvPr id="17" name="Text 15"/>
+          <p:cNvSpPr txBox="1"/>
+          <p:nvPr/>
+        </p:nvSpPr>
+        <p:spPr>
+          <a:xfrm>
+            <a:off x="11155680" y="6510528"/>
+            <a:ext cx="457200" cy="228600"/>
+          </a:xfrm>
+          <a:prstGeom prst="rect">
+            <a:avLst/>
+          </a:prstGeom>
+          <a:noFill/>
+          <a:ln/>
+        </p:spPr>
+        <p:txBody>
+          <a:bodyPr wrap="square" lIns="0" tIns="0" rIns="0" bIns="0" rtlCol="0" anchor="t"/>
+          <a:lstStyle/>
+          <a:p>
+            <a:pPr algn="r" indent="0" marL="0">
+              <a:buNone/>
+            </a:pPr>
+            <a:r>
+              <a:rPr lang="en-US" sz="1000" dirty="0">
+                <a:solidFill>
+                  <a:srgbClr val="5B6B8C"/>
+                </a:solidFill>
+                <a:latin typeface="Calibri" pitchFamily="34" charset="0"/>
+                <a:ea typeface="Calibri" pitchFamily="34" charset="-122"/>
+                <a:cs typeface="Calibri" pitchFamily="34" charset="-120"/>
+              </a:rPr>
+              <a:t>3</a:t>
+            </a:r>
+            <a:endParaRPr lang="en-US" sz="1000" dirty="0"/>
           </a:p>
         </p:txBody>
       </p:sp>
@@ -5994,7 +5875,7 @@
         <p:spPr>
           <a:xfrm>
             <a:off x="548640" y="320040"/>
-            <a:ext cx="9144000" cy="274320"/>
+            <a:ext cx="7315200" cy="274320"/>
           </a:xfrm>
           <a:prstGeom prst="rect">
             <a:avLst/>
@@ -6012,13 +5893,13 @@
             <a:r>
               <a:rPr lang="en-US" sz="1300" b="1" spc="200" kern="0" dirty="0">
                 <a:solidFill>
-                  <a:srgbClr val="D9534F"/>
-                </a:solidFill>
-                <a:latin typeface="Calibri" pitchFamily="34" charset="0"/>
-                <a:ea typeface="Calibri" pitchFamily="34" charset="-122"/>
-                <a:cs typeface="Calibri" pitchFamily="34" charset="-120"/>
-              </a:rPr>
-              <a:t>MERKSATZ 1 · ABSCHREIBEN UND ROT UMRAHMEN</a:t>
+                  <a:srgbClr val="5B6B8C"/>
+                </a:solidFill>
+                <a:latin typeface="Calibri" pitchFamily="34" charset="0"/>
+                <a:ea typeface="Calibri" pitchFamily="34" charset="-122"/>
+                <a:cs typeface="Calibri" pitchFamily="34" charset="-120"/>
+              </a:rPr>
+              <a:t>ÜBUNG 1 · ARBEITSBLATT</a:t>
             </a:r>
             <a:endParaRPr lang="en-US" sz="1300" dirty="0"/>
           </a:p>
@@ -6057,7 +5938,7 @@
                 <a:ea typeface="Cambria" pitchFamily="34" charset="-122"/>
                 <a:cs typeface="Cambria" pitchFamily="34" charset="-120"/>
               </a:rPr>
-              <a:t>Absolutismus</a:t>
+              <a:t>Lückentext: Die fünf Säulen</a:t>
             </a:r>
             <a:endParaRPr lang="en-US" sz="3400" dirty="0"/>
           </a:p>
@@ -6072,34 +5953,49 @@
         <p:spPr>
           <a:xfrm>
             <a:off x="548640" y="1417320"/>
-            <a:ext cx="11109960" cy="1828800"/>
+            <a:ext cx="11109960" cy="1975104"/>
           </a:xfrm>
           <a:prstGeom prst="roundRect">
             <a:avLst>
-              <a:gd name="adj" fmla="val 4000"/>
+              <a:gd name="adj" fmla="val 3704"/>
             </a:avLst>
           </a:prstGeom>
           <a:solidFill>
-            <a:srgbClr val="FFFFFF"/>
-          </a:solidFill>
-          <a:ln w="38100">
-            <a:solidFill>
-              <a:srgbClr val="D9534F"/>
-            </a:solidFill>
-            <a:prstDash val="solid"/>
-          </a:ln>
-        </p:spPr>
-      </p:sp>
-      <p:sp>
-        <p:nvSpPr>
-          <p:cNvPr id="5" name="Text 3"/>
-          <p:cNvSpPr txBox="1"/>
-          <p:nvPr/>
-        </p:nvSpPr>
-        <p:spPr>
-          <a:xfrm>
-            <a:off x="868680" y="1508760"/>
-            <a:ext cx="10469880" cy="1645920"/>
+            <a:srgbClr val="EAF0FA"/>
+          </a:solidFill>
+          <a:ln/>
+        </p:spPr>
+      </p:sp>
+      <p:sp>
+        <p:nvSpPr>
+          <p:cNvPr id="5" name="Shape 3"/>
+          <p:cNvSpPr/>
+          <p:nvPr/>
+        </p:nvSpPr>
+        <p:spPr>
+          <a:xfrm>
+            <a:off x="731520" y="1568196"/>
+            <a:ext cx="384048" cy="384048"/>
+          </a:xfrm>
+          <a:prstGeom prst="ellipse">
+            <a:avLst/>
+          </a:prstGeom>
+          <a:solidFill>
+            <a:srgbClr val="1E2761"/>
+          </a:solidFill>
+          <a:ln/>
+        </p:spPr>
+      </p:sp>
+      <p:sp>
+        <p:nvSpPr>
+          <p:cNvPr id="6" name="Text 4"/>
+          <p:cNvSpPr txBox="1"/>
+          <p:nvPr/>
+        </p:nvSpPr>
+        <p:spPr>
+          <a:xfrm>
+            <a:off x="731520" y="1568196"/>
+            <a:ext cx="384048" cy="384048"/>
           </a:xfrm>
           <a:prstGeom prst="rect">
             <a:avLst/>
@@ -6111,6 +6007,45 @@
           <a:bodyPr wrap="square" lIns="0" tIns="0" rIns="0" bIns="0" rtlCol="0" anchor="ctr"/>
           <a:lstStyle/>
           <a:p>
+            <a:pPr algn="ctr" indent="0" marL="0">
+              <a:buNone/>
+            </a:pPr>
+            <a:r>
+              <a:rPr lang="en-US" sz="1800" b="1" dirty="0">
+                <a:solidFill>
+                  <a:srgbClr val="FFFFFF"/>
+                </a:solidFill>
+                <a:latin typeface="Calibri" pitchFamily="34" charset="0"/>
+                <a:ea typeface="Calibri" pitchFamily="34" charset="-122"/>
+                <a:cs typeface="Calibri" pitchFamily="34" charset="-120"/>
+              </a:rPr>
+              <a:t>1</a:t>
+            </a:r>
+            <a:endParaRPr lang="en-US" sz="1800" dirty="0"/>
+          </a:p>
+        </p:txBody>
+      </p:sp>
+      <p:sp>
+        <p:nvSpPr>
+          <p:cNvPr id="7" name="Text 5"/>
+          <p:cNvSpPr txBox="1"/>
+          <p:nvPr/>
+        </p:nvSpPr>
+        <p:spPr>
+          <a:xfrm>
+            <a:off x="1280160" y="1554480"/>
+            <a:ext cx="10241280" cy="411480"/>
+          </a:xfrm>
+          <a:prstGeom prst="rect">
+            <a:avLst/>
+          </a:prstGeom>
+          <a:noFill/>
+          <a:ln/>
+        </p:spPr>
+        <p:txBody>
+          <a:bodyPr wrap="square" lIns="0" tIns="0" rIns="0" bIns="0" rtlCol="0" anchor="t"/>
+          <a:lstStyle/>
+          <a:p>
             <a:pPr indent="0" marL="0">
               <a:buNone/>
             </a:pPr>
@@ -6119,26 +6054,194 @@
                 <a:solidFill>
                   <a:srgbClr val="1E2761"/>
                 </a:solidFill>
-                <a:latin typeface="Cambria" pitchFamily="34" charset="0"/>
-                <a:ea typeface="Cambria" pitchFamily="34" charset="-122"/>
-                <a:cs typeface="Cambria" pitchFamily="34" charset="-120"/>
-              </a:rPr>
-              <a:t>Absolutismus</a:t>
-            </a:r>
-            <a:pPr indent="0" marL="0">
-              <a:buNone/>
-            </a:pPr>
-            <a:r>
-              <a:rPr lang="en-US" sz="2100" dirty="0">
+                <a:latin typeface="Calibri" pitchFamily="34" charset="0"/>
+                <a:ea typeface="Calibri" pitchFamily="34" charset="-122"/>
+                <a:cs typeface="Calibri" pitchFamily="34" charset="-120"/>
+              </a:rPr>
+              <a:t>Schreibe Ü1 oben auf das Arbeitsblatt.</a:t>
+            </a:r>
+            <a:endParaRPr lang="en-US" sz="2100" dirty="0"/>
+          </a:p>
+        </p:txBody>
+      </p:sp>
+      <p:sp>
+        <p:nvSpPr>
+          <p:cNvPr id="8" name="Shape 6"/>
+          <p:cNvSpPr/>
+          <p:nvPr/>
+        </p:nvSpPr>
+        <p:spPr>
+          <a:xfrm>
+            <a:off x="731520" y="2052828"/>
+            <a:ext cx="384048" cy="384048"/>
+          </a:xfrm>
+          <a:prstGeom prst="ellipse">
+            <a:avLst/>
+          </a:prstGeom>
+          <a:solidFill>
+            <a:srgbClr val="1E2761"/>
+          </a:solidFill>
+          <a:ln/>
+        </p:spPr>
+      </p:sp>
+      <p:sp>
+        <p:nvSpPr>
+          <p:cNvPr id="9" name="Text 7"/>
+          <p:cNvSpPr txBox="1"/>
+          <p:nvPr/>
+        </p:nvSpPr>
+        <p:spPr>
+          <a:xfrm>
+            <a:off x="731520" y="2052828"/>
+            <a:ext cx="384048" cy="384048"/>
+          </a:xfrm>
+          <a:prstGeom prst="rect">
+            <a:avLst/>
+          </a:prstGeom>
+          <a:noFill/>
+          <a:ln/>
+        </p:spPr>
+        <p:txBody>
+          <a:bodyPr wrap="square" lIns="0" tIns="0" rIns="0" bIns="0" rtlCol="0" anchor="ctr"/>
+          <a:lstStyle/>
+          <a:p>
+            <a:pPr algn="ctr" indent="0" marL="0">
+              <a:buNone/>
+            </a:pPr>
+            <a:r>
+              <a:rPr lang="en-US" sz="1800" b="1" dirty="0">
+                <a:solidFill>
+                  <a:srgbClr val="FFFFFF"/>
+                </a:solidFill>
+                <a:latin typeface="Calibri" pitchFamily="34" charset="0"/>
+                <a:ea typeface="Calibri" pitchFamily="34" charset="-122"/>
+                <a:cs typeface="Calibri" pitchFamily="34" charset="-120"/>
+              </a:rPr>
+              <a:t>2</a:t>
+            </a:r>
+            <a:endParaRPr lang="en-US" sz="1800" dirty="0"/>
+          </a:p>
+        </p:txBody>
+      </p:sp>
+      <p:sp>
+        <p:nvSpPr>
+          <p:cNvPr id="10" name="Text 8"/>
+          <p:cNvSpPr txBox="1"/>
+          <p:nvPr/>
+        </p:nvSpPr>
+        <p:spPr>
+          <a:xfrm>
+            <a:off x="1280160" y="2039112"/>
+            <a:ext cx="10241280" cy="731520"/>
+          </a:xfrm>
+          <a:prstGeom prst="rect">
+            <a:avLst/>
+          </a:prstGeom>
+          <a:noFill/>
+          <a:ln/>
+        </p:spPr>
+        <p:txBody>
+          <a:bodyPr wrap="square" lIns="0" tIns="0" rIns="0" bIns="0" rtlCol="0" anchor="t"/>
+          <a:lstStyle/>
+          <a:p>
+            <a:pPr indent="0" marL="0">
+              <a:buNone/>
+            </a:pPr>
+            <a:r>
+              <a:rPr lang="en-US" sz="2100" b="1" dirty="0">
                 <a:solidFill>
                   <a:srgbClr val="1E2761"/>
                 </a:solidFill>
-                <a:latin typeface="Cambria" pitchFamily="34" charset="0"/>
-                <a:ea typeface="Cambria" pitchFamily="34" charset="-122"/>
-                <a:cs typeface="Cambria" pitchFamily="34" charset="-120"/>
-              </a:rPr>
-              <a:t> war eine Herrschaftsform in Europa im </a:t>
-            </a:r>
+                <a:latin typeface="Calibri" pitchFamily="34" charset="0"/>
+                <a:ea typeface="Calibri" pitchFamily="34" charset="-122"/>
+                <a:cs typeface="Calibri" pitchFamily="34" charset="-120"/>
+              </a:rPr>
+              <a:t>Lies den Text einmal ganz. Ergänze dann die 12 Lücken mit dem Wortspeicher.</a:t>
+            </a:r>
+            <a:endParaRPr lang="en-US" sz="2100" dirty="0"/>
+          </a:p>
+        </p:txBody>
+      </p:sp>
+      <p:sp>
+        <p:nvSpPr>
+          <p:cNvPr id="11" name="Shape 9"/>
+          <p:cNvSpPr/>
+          <p:nvPr/>
+        </p:nvSpPr>
+        <p:spPr>
+          <a:xfrm>
+            <a:off x="731520" y="2857500"/>
+            <a:ext cx="384048" cy="384048"/>
+          </a:xfrm>
+          <a:prstGeom prst="ellipse">
+            <a:avLst/>
+          </a:prstGeom>
+          <a:solidFill>
+            <a:srgbClr val="1E2761"/>
+          </a:solidFill>
+          <a:ln/>
+        </p:spPr>
+      </p:sp>
+      <p:sp>
+        <p:nvSpPr>
+          <p:cNvPr id="12" name="Text 10"/>
+          <p:cNvSpPr txBox="1"/>
+          <p:nvPr/>
+        </p:nvSpPr>
+        <p:spPr>
+          <a:xfrm>
+            <a:off x="731520" y="2857500"/>
+            <a:ext cx="384048" cy="384048"/>
+          </a:xfrm>
+          <a:prstGeom prst="rect">
+            <a:avLst/>
+          </a:prstGeom>
+          <a:noFill/>
+          <a:ln/>
+        </p:spPr>
+        <p:txBody>
+          <a:bodyPr wrap="square" lIns="0" tIns="0" rIns="0" bIns="0" rtlCol="0" anchor="ctr"/>
+          <a:lstStyle/>
+          <a:p>
+            <a:pPr algn="ctr" indent="0" marL="0">
+              <a:buNone/>
+            </a:pPr>
+            <a:r>
+              <a:rPr lang="en-US" sz="1800" b="1" dirty="0">
+                <a:solidFill>
+                  <a:srgbClr val="FFFFFF"/>
+                </a:solidFill>
+                <a:latin typeface="Calibri" pitchFamily="34" charset="0"/>
+                <a:ea typeface="Calibri" pitchFamily="34" charset="-122"/>
+                <a:cs typeface="Calibri" pitchFamily="34" charset="-120"/>
+              </a:rPr>
+              <a:t>3</a:t>
+            </a:r>
+            <a:endParaRPr lang="en-US" sz="1800" dirty="0"/>
+          </a:p>
+        </p:txBody>
+      </p:sp>
+      <p:sp>
+        <p:nvSpPr>
+          <p:cNvPr id="13" name="Text 11"/>
+          <p:cNvSpPr txBox="1"/>
+          <p:nvPr/>
+        </p:nvSpPr>
+        <p:spPr>
+          <a:xfrm>
+            <a:off x="1280160" y="2843784"/>
+            <a:ext cx="10241280" cy="411480"/>
+          </a:xfrm>
+          <a:prstGeom prst="rect">
+            <a:avLst/>
+          </a:prstGeom>
+          <a:noFill/>
+          <a:ln/>
+        </p:spPr>
+        <p:txBody>
+          <a:bodyPr wrap="square" lIns="0" tIns="0" rIns="0" bIns="0" rtlCol="0" anchor="t"/>
+          <a:lstStyle/>
+          <a:p>
             <a:pPr indent="0" marL="0">
               <a:buNone/>
             </a:pPr>
@@ -6147,53 +6250,11 @@
                 <a:solidFill>
                   <a:srgbClr val="1E2761"/>
                 </a:solidFill>
-                <a:latin typeface="Cambria" pitchFamily="34" charset="0"/>
-                <a:ea typeface="Cambria" pitchFamily="34" charset="-122"/>
-                <a:cs typeface="Cambria" pitchFamily="34" charset="-120"/>
-              </a:rPr>
-              <a:t>17. und 18. Jahrhundert</a:t>
-            </a:r>
-            <a:pPr indent="0" marL="0">
-              <a:buNone/>
-            </a:pPr>
-            <a:r>
-              <a:rPr lang="en-US" sz="2100" dirty="0">
-                <a:solidFill>
-                  <a:srgbClr val="1E2761"/>
-                </a:solidFill>
-                <a:latin typeface="Cambria" pitchFamily="34" charset="0"/>
-                <a:ea typeface="Cambria" pitchFamily="34" charset="-122"/>
-                <a:cs typeface="Cambria" pitchFamily="34" charset="-120"/>
-              </a:rPr>
-              <a:t>, in der ein einzelner Monarch (König oder Fürst) </a:t>
-            </a:r>
-            <a:pPr indent="0" marL="0">
-              <a:buNone/>
-            </a:pPr>
-            <a:r>
-              <a:rPr lang="en-US" sz="2100" b="1" dirty="0">
-                <a:solidFill>
-                  <a:srgbClr val="1E2761"/>
-                </a:solidFill>
-                <a:latin typeface="Cambria" pitchFamily="34" charset="0"/>
-                <a:ea typeface="Cambria" pitchFamily="34" charset="-122"/>
-                <a:cs typeface="Cambria" pitchFamily="34" charset="-120"/>
-              </a:rPr>
-              <a:t>uneingeschränkt (absolut)</a:t>
-            </a:r>
-            <a:pPr indent="0" marL="0">
-              <a:buNone/>
-            </a:pPr>
-            <a:r>
-              <a:rPr lang="en-US" sz="2100" dirty="0">
-                <a:solidFill>
-                  <a:srgbClr val="1E2761"/>
-                </a:solidFill>
-                <a:latin typeface="Cambria" pitchFamily="34" charset="0"/>
-                <a:ea typeface="Cambria" pitchFamily="34" charset="-122"/>
-                <a:cs typeface="Cambria" pitchFamily="34" charset="-120"/>
-              </a:rPr>
-              <a:t> herrschte.</a:t>
+                <a:latin typeface="Calibri" pitchFamily="34" charset="0"/>
+                <a:ea typeface="Calibri" pitchFamily="34" charset="-122"/>
+                <a:cs typeface="Calibri" pitchFamily="34" charset="-120"/>
+              </a:rPr>
+              <a:t>Streiche jedes benutzte Wort durch. Zwei Wörter passen nicht.</a:t>
             </a:r>
             <a:endParaRPr lang="en-US" sz="2100" dirty="0"/>
           </a:p>
@@ -6201,13 +6262,13 @@
       </p:sp>
       <p:sp>
         <p:nvSpPr>
-          <p:cNvPr id="6" name="Shape 4"/>
+          <p:cNvPr id="14" name="Shape 12"/>
           <p:cNvSpPr/>
           <p:nvPr/>
         </p:nvSpPr>
         <p:spPr>
           <a:xfrm>
-            <a:off x="548640" y="3383280"/>
+            <a:off x="548640" y="5897880"/>
             <a:ext cx="11109960" cy="548640"/>
           </a:xfrm>
           <a:prstGeom prst="roundRect">
@@ -6216,20 +6277,20 @@
             </a:avLst>
           </a:prstGeom>
           <a:solidFill>
-            <a:srgbClr val="EAF0FA"/>
-          </a:solidFill>
-          <a:ln/>
-        </p:spPr>
-      </p:sp>
-      <p:sp>
-        <p:nvSpPr>
-          <p:cNvPr id="7" name="Text 5"/>
-          <p:cNvSpPr txBox="1"/>
-          <p:nvPr/>
-        </p:nvSpPr>
-        <p:spPr>
-          <a:xfrm>
-            <a:off x="822960" y="3383280"/>
+            <a:srgbClr val="1E2761"/>
+          </a:solidFill>
+          <a:ln/>
+        </p:spPr>
+      </p:sp>
+      <p:sp>
+        <p:nvSpPr>
+          <p:cNvPr id="15" name="Text 13"/>
+          <p:cNvSpPr txBox="1"/>
+          <p:nvPr/>
+        </p:nvSpPr>
+        <p:spPr>
+          <a:xfrm>
+            <a:off x="822960" y="5897880"/>
             <a:ext cx="10607040" cy="548640"/>
           </a:xfrm>
           <a:prstGeom prst="rect">
@@ -6248,64 +6309,195 @@
             <a:r>
               <a:rPr lang="en-US" sz="1700" b="1" dirty="0">
                 <a:solidFill>
+                  <a:srgbClr val="FFFFFF"/>
+                </a:solidFill>
+                <a:latin typeface="Calibri" pitchFamily="34" charset="0"/>
+                <a:ea typeface="Calibri" pitchFamily="34" charset="-122"/>
+                <a:cs typeface="Calibri" pitchFamily="34" charset="-120"/>
+              </a:rPr>
+              <a:t>Zeit: </a:t>
+            </a:r>
+            <a:pPr indent="0" marL="0">
+              <a:buNone/>
+            </a:pPr>
+            <a:r>
+              <a:rPr lang="en-US" sz="1700" dirty="0">
+                <a:solidFill>
+                  <a:srgbClr val="FFFFFF"/>
+                </a:solidFill>
+                <a:latin typeface="Calibri" pitchFamily="34" charset="0"/>
+                <a:ea typeface="Calibri" pitchFamily="34" charset="-122"/>
+                <a:cs typeface="Calibri" pitchFamily="34" charset="-120"/>
+              </a:rPr>
+              <a:t>6 Minuten · allein · leise      </a:t>
+            </a:r>
+            <a:pPr indent="0" marL="0">
+              <a:buNone/>
+            </a:pPr>
+            <a:r>
+              <a:rPr lang="en-US" sz="1700" i="1" dirty="0">
+                <a:solidFill>
+                  <a:srgbClr val="CADCFC"/>
+                </a:solidFill>
+                <a:latin typeface="Calibri" pitchFamily="34" charset="0"/>
+                <a:ea typeface="Calibri" pitchFamily="34" charset="-122"/>
+                <a:cs typeface="Calibri" pitchFamily="34" charset="-120"/>
+              </a:rPr>
+              <a:t>Fertig? Stift hinlegen. Schnelle: ★-Aufgabe.</a:t>
+            </a:r>
+            <a:endParaRPr lang="en-US" sz="1700" dirty="0"/>
+          </a:p>
+        </p:txBody>
+      </p:sp>
+      <p:sp>
+        <p:nvSpPr>
+          <p:cNvPr id="16" name="Text 14"/>
+          <p:cNvSpPr txBox="1"/>
+          <p:nvPr/>
+        </p:nvSpPr>
+        <p:spPr>
+          <a:xfrm>
+            <a:off x="548640" y="6510528"/>
+            <a:ext cx="5486400" cy="228600"/>
+          </a:xfrm>
+          <a:prstGeom prst="rect">
+            <a:avLst/>
+          </a:prstGeom>
+          <a:noFill/>
+          <a:ln/>
+        </p:spPr>
+        <p:txBody>
+          <a:bodyPr wrap="square" lIns="0" tIns="0" rIns="0" bIns="0" rtlCol="0" anchor="t"/>
+          <a:lstStyle/>
+          <a:p>
+            <a:pPr indent="0" marL="0">
+              <a:buNone/>
+            </a:pPr>
+            <a:r>
+              <a:rPr lang="en-US" sz="1000" dirty="0">
+                <a:solidFill>
                   <a:srgbClr val="5B6B8C"/>
                 </a:solidFill>
                 <a:latin typeface="Calibri" pitchFamily="34" charset="0"/>
                 <a:ea typeface="Calibri" pitchFamily="34" charset="-122"/>
                 <a:cs typeface="Calibri" pitchFamily="34" charset="-120"/>
               </a:rPr>
-              <a:t>Beispiel:   </a:t>
-            </a:r>
-            <a:pPr indent="0" marL="0">
-              <a:buNone/>
-            </a:pPr>
-            <a:r>
-              <a:rPr lang="en-US" sz="1900" dirty="0">
-                <a:solidFill>
-                  <a:srgbClr val="1E2761"/>
+              <a:t>Absolutismus · Wiederholung · Geschichte 8</a:t>
+            </a:r>
+            <a:endParaRPr lang="en-US" sz="1000" dirty="0"/>
+          </a:p>
+        </p:txBody>
+      </p:sp>
+      <p:sp>
+        <p:nvSpPr>
+          <p:cNvPr id="17" name="Text 15"/>
+          <p:cNvSpPr txBox="1"/>
+          <p:nvPr/>
+        </p:nvSpPr>
+        <p:spPr>
+          <a:xfrm>
+            <a:off x="11155680" y="6510528"/>
+            <a:ext cx="457200" cy="228600"/>
+          </a:xfrm>
+          <a:prstGeom prst="rect">
+            <a:avLst/>
+          </a:prstGeom>
+          <a:noFill/>
+          <a:ln/>
+        </p:spPr>
+        <p:txBody>
+          <a:bodyPr wrap="square" lIns="0" tIns="0" rIns="0" bIns="0" rtlCol="0" anchor="t"/>
+          <a:lstStyle/>
+          <a:p>
+            <a:pPr algn="r" indent="0" marL="0">
+              <a:buNone/>
+            </a:pPr>
+            <a:r>
+              <a:rPr lang="en-US" sz="1000" dirty="0">
+                <a:solidFill>
+                  <a:srgbClr val="5B6B8C"/>
+                </a:solidFill>
+                <a:latin typeface="Calibri" pitchFamily="34" charset="0"/>
+                <a:ea typeface="Calibri" pitchFamily="34" charset="-122"/>
+                <a:cs typeface="Calibri" pitchFamily="34" charset="-120"/>
+              </a:rPr>
+              <a:t>4</a:t>
+            </a:r>
+            <a:endParaRPr lang="en-US" sz="1000" dirty="0"/>
+          </a:p>
+        </p:txBody>
+      </p:sp>
+      <p:sp>
+        <p:nvSpPr>
+          <p:cNvPr id="19" name="Shape 16"/>
+          <p:cNvSpPr/>
+          <p:nvPr/>
+        </p:nvSpPr>
+        <p:spPr>
+          <a:xfrm>
+            <a:off x="548640" y="3758184"/>
+            <a:ext cx="11109960" cy="1463040"/>
+          </a:xfrm>
+          <a:prstGeom prst="roundRect">
+            <a:avLst>
+              <a:gd name="adj" fmla="val 5000"/>
+            </a:avLst>
+          </a:prstGeom>
+          <a:solidFill>
+            <a:srgbClr val="F4F7FD"/>
+          </a:solidFill>
+          <a:ln/>
+        </p:spPr>
+      </p:sp>
+      <p:sp>
+        <p:nvSpPr>
+          <p:cNvPr id="20" name="Text 17"/>
+          <p:cNvSpPr txBox="1"/>
+          <p:nvPr/>
+        </p:nvSpPr>
+        <p:spPr>
+          <a:xfrm>
+            <a:off x="822960" y="3867912"/>
+            <a:ext cx="3657600" cy="320040"/>
+          </a:xfrm>
+          <a:prstGeom prst="rect">
+            <a:avLst/>
+          </a:prstGeom>
+          <a:noFill/>
+          <a:ln/>
+        </p:spPr>
+        <p:txBody>
+          <a:bodyPr wrap="square" lIns="0" tIns="0" rIns="0" bIns="0" rtlCol="0" anchor="t"/>
+          <a:lstStyle/>
+          <a:p>
+            <a:pPr indent="0" marL="0">
+              <a:buNone/>
+            </a:pPr>
+            <a:r>
+              <a:rPr lang="en-US" sz="1700" b="1" dirty="0">
+                <a:solidFill>
+                  <a:srgbClr val="D9534F"/>
                 </a:solidFill>
                 <a:latin typeface="Cambria" pitchFamily="34" charset="0"/>
                 <a:ea typeface="Cambria" pitchFamily="34" charset="-122"/>
                 <a:cs typeface="Cambria" pitchFamily="34" charset="-120"/>
               </a:rPr>
-              <a:t>Ludwig XIV. verkündet 1661: „Ich regiere jetzt selbst.“</a:t>
-            </a:r>
-            <a:endParaRPr lang="en-US" sz="1900" dirty="0"/>
-          </a:p>
-        </p:txBody>
-      </p:sp>
-      <p:sp>
-        <p:nvSpPr>
-          <p:cNvPr id="8" name="Shape 6"/>
-          <p:cNvSpPr/>
-          <p:nvPr/>
-        </p:nvSpPr>
-        <p:spPr>
-          <a:xfrm>
-            <a:off x="548640" y="4069080"/>
-            <a:ext cx="5440680" cy="1645920"/>
-          </a:xfrm>
-          <a:prstGeom prst="roundRect">
-            <a:avLst>
-              <a:gd name="adj" fmla="val 4444"/>
-            </a:avLst>
-          </a:prstGeom>
-          <a:solidFill>
-            <a:srgbClr val="F4F7FD"/>
-          </a:solidFill>
-          <a:ln/>
-        </p:spPr>
-      </p:sp>
-      <p:sp>
-        <p:nvSpPr>
-          <p:cNvPr id="9" name="Text 7"/>
-          <p:cNvSpPr txBox="1"/>
-          <p:nvPr/>
-        </p:nvSpPr>
-        <p:spPr>
-          <a:xfrm>
-            <a:off x="777240" y="4187952"/>
-            <a:ext cx="4983480" cy="365760"/>
+              <a:t>Wortspeicher</a:t>
+            </a:r>
+            <a:endParaRPr lang="en-US" sz="1700" dirty="0"/>
+          </a:p>
+        </p:txBody>
+      </p:sp>
+      <p:sp>
+        <p:nvSpPr>
+          <p:cNvPr id="21" name="Text 18"/>
+          <p:cNvSpPr txBox="1"/>
+          <p:nvPr/>
+        </p:nvSpPr>
+        <p:spPr>
+          <a:xfrm>
+            <a:off x="822960" y="4233672"/>
+            <a:ext cx="10607040" cy="914400"/>
           </a:xfrm>
           <a:prstGeom prst="rect">
             <a:avLst/>
@@ -6321,351 +6513,17 @@
               <a:buNone/>
             </a:pPr>
             <a:r>
-              <a:rPr lang="en-US" sz="1900" b="1" dirty="0">
-                <a:solidFill>
-                  <a:srgbClr val="D9534F"/>
+              <a:rPr lang="en-US" sz="2000" dirty="0">
+                <a:solidFill>
+                  <a:srgbClr val="1E2761"/>
                 </a:solidFill>
                 <a:latin typeface="Cambria" pitchFamily="34" charset="0"/>
                 <a:ea typeface="Cambria" pitchFamily="34" charset="-122"/>
                 <a:cs typeface="Cambria" pitchFamily="34" charset="-120"/>
               </a:rPr>
-              <a:t>Wofür brauche ich das?</a:t>
-            </a:r>
-            <a:endParaRPr lang="en-US" sz="1900" dirty="0"/>
-          </a:p>
-        </p:txBody>
-      </p:sp>
-      <p:sp>
-        <p:nvSpPr>
-          <p:cNvPr id="10" name="Text 8"/>
-          <p:cNvSpPr txBox="1"/>
-          <p:nvPr/>
-        </p:nvSpPr>
-        <p:spPr>
-          <a:xfrm>
-            <a:off x="777240" y="4572000"/>
-            <a:ext cx="4983480" cy="1051560"/>
-          </a:xfrm>
-          <a:prstGeom prst="rect">
-            <a:avLst/>
-          </a:prstGeom>
-          <a:noFill/>
-          <a:ln/>
-        </p:spPr>
-        <p:txBody>
-          <a:bodyPr wrap="square" lIns="0" tIns="0" rIns="0" bIns="0" rtlCol="0" anchor="t"/>
-          <a:lstStyle/>
-          <a:p>
-            <a:pPr indent="0" marL="0">
-              <a:buNone/>
-            </a:pPr>
-            <a:r>
-              <a:rPr lang="en-US" sz="1900" dirty="0">
-                <a:solidFill>
-                  <a:srgbClr val="1E2761"/>
-                </a:solidFill>
-                <a:latin typeface="Calibri" pitchFamily="34" charset="0"/>
-                <a:ea typeface="Calibri" pitchFamily="34" charset="-122"/>
-                <a:cs typeface="Calibri" pitchFamily="34" charset="-120"/>
-              </a:rPr>
-              <a:t>Der Begriff ordnet eine ganze Epoche ein und ist im Test die Grundlage für alle weiteren Fragen.</a:t>
-            </a:r>
-            <a:endParaRPr lang="en-US" sz="1900" dirty="0"/>
-          </a:p>
-        </p:txBody>
-      </p:sp>
-      <p:sp>
-        <p:nvSpPr>
-          <p:cNvPr id="11" name="Shape 9"/>
-          <p:cNvSpPr/>
-          <p:nvPr/>
-        </p:nvSpPr>
-        <p:spPr>
-          <a:xfrm>
-            <a:off x="6217920" y="4069080"/>
-            <a:ext cx="5440680" cy="1645920"/>
-          </a:xfrm>
-          <a:prstGeom prst="roundRect">
-            <a:avLst>
-              <a:gd name="adj" fmla="val 4444"/>
-            </a:avLst>
-          </a:prstGeom>
-          <a:solidFill>
-            <a:srgbClr val="F4F7FD"/>
-          </a:solidFill>
-          <a:ln/>
-        </p:spPr>
-      </p:sp>
-      <p:sp>
-        <p:nvSpPr>
-          <p:cNvPr id="12" name="Text 10"/>
-          <p:cNvSpPr txBox="1"/>
-          <p:nvPr/>
-        </p:nvSpPr>
-        <p:spPr>
-          <a:xfrm>
-            <a:off x="6446520" y="4187952"/>
-            <a:ext cx="4983480" cy="365760"/>
-          </a:xfrm>
-          <a:prstGeom prst="rect">
-            <a:avLst/>
-          </a:prstGeom>
-          <a:noFill/>
-          <a:ln/>
-        </p:spPr>
-        <p:txBody>
-          <a:bodyPr wrap="square" lIns="0" tIns="0" rIns="0" bIns="0" rtlCol="0" anchor="t"/>
-          <a:lstStyle/>
-          <a:p>
-            <a:pPr indent="0" marL="0">
-              <a:buNone/>
-            </a:pPr>
-            <a:r>
-              <a:rPr lang="en-US" sz="1900" b="1" dirty="0">
-                <a:solidFill>
-                  <a:srgbClr val="D9534F"/>
-                </a:solidFill>
-                <a:latin typeface="Cambria" pitchFamily="34" charset="0"/>
-                <a:ea typeface="Cambria" pitchFamily="34" charset="-122"/>
-                <a:cs typeface="Cambria" pitchFamily="34" charset="-120"/>
-              </a:rPr>
-              <a:t>Test</a:t>
-            </a:r>
-            <a:endParaRPr lang="en-US" sz="1900" dirty="0"/>
-          </a:p>
-        </p:txBody>
-      </p:sp>
-      <p:sp>
-        <p:nvSpPr>
-          <p:cNvPr id="13" name="Text 11"/>
-          <p:cNvSpPr txBox="1"/>
-          <p:nvPr/>
-        </p:nvSpPr>
-        <p:spPr>
-          <a:xfrm>
-            <a:off x="6446520" y="4572000"/>
-            <a:ext cx="4983480" cy="1051560"/>
-          </a:xfrm>
-          <a:prstGeom prst="rect">
-            <a:avLst/>
-          </a:prstGeom>
-          <a:noFill/>
-          <a:ln/>
-        </p:spPr>
-        <p:txBody>
-          <a:bodyPr wrap="square" lIns="0" tIns="0" rIns="0" bIns="0" rtlCol="0" anchor="t"/>
-          <a:lstStyle/>
-          <a:p>
-            <a:pPr indent="0" marL="0">
-              <a:buNone/>
-            </a:pPr>
-            <a:r>
-              <a:rPr lang="en-US" sz="1900" dirty="0">
-                <a:solidFill>
-                  <a:srgbClr val="1E2761"/>
-                </a:solidFill>
-                <a:latin typeface="Calibri" pitchFamily="34" charset="0"/>
-                <a:ea typeface="Calibri" pitchFamily="34" charset="-122"/>
-                <a:cs typeface="Calibri" pitchFamily="34" charset="-120"/>
-              </a:rPr>
-              <a:t>Kann jemand den König stoppen (Parlament, Verfassung, Stände)? </a:t>
-            </a:r>
-            <a:pPr indent="0" marL="0">
-              <a:buNone/>
-            </a:pPr>
-            <a:r>
-              <a:rPr lang="en-US" sz="1900" b="1" dirty="0">
-                <a:solidFill>
-                  <a:srgbClr val="1E2761"/>
-                </a:solidFill>
-                <a:latin typeface="Calibri" pitchFamily="34" charset="0"/>
-                <a:ea typeface="Calibri" pitchFamily="34" charset="-122"/>
-                <a:cs typeface="Calibri" pitchFamily="34" charset="-120"/>
-              </a:rPr>
-              <a:t>Nein</a:t>
-            </a:r>
-            <a:pPr indent="0" marL="0">
-              <a:buNone/>
-            </a:pPr>
-            <a:r>
-              <a:rPr lang="en-US" sz="1900" dirty="0">
-                <a:solidFill>
-                  <a:srgbClr val="1E2761"/>
-                </a:solidFill>
-                <a:latin typeface="Calibri" pitchFamily="34" charset="0"/>
-                <a:ea typeface="Calibri" pitchFamily="34" charset="-122"/>
-                <a:cs typeface="Calibri" pitchFamily="34" charset="-120"/>
-              </a:rPr>
-              <a:t> → Absolutismus.</a:t>
-            </a:r>
-            <a:endParaRPr lang="en-US" sz="1900" dirty="0"/>
-          </a:p>
-        </p:txBody>
-      </p:sp>
-      <p:sp>
-        <p:nvSpPr>
-          <p:cNvPr id="14" name="Shape 12"/>
-          <p:cNvSpPr/>
-          <p:nvPr/>
-        </p:nvSpPr>
-        <p:spPr>
-          <a:xfrm>
-            <a:off x="548640" y="5897880"/>
-            <a:ext cx="11109960" cy="548640"/>
-          </a:xfrm>
-          <a:prstGeom prst="roundRect">
-            <a:avLst>
-              <a:gd name="adj" fmla="val 13333"/>
-            </a:avLst>
-          </a:prstGeom>
-          <a:solidFill>
-            <a:srgbClr val="1E2761"/>
-          </a:solidFill>
-          <a:ln/>
-        </p:spPr>
-      </p:sp>
-      <p:sp>
-        <p:nvSpPr>
-          <p:cNvPr id="15" name="Text 13"/>
-          <p:cNvSpPr txBox="1"/>
-          <p:nvPr/>
-        </p:nvSpPr>
-        <p:spPr>
-          <a:xfrm>
-            <a:off x="822960" y="5897880"/>
-            <a:ext cx="10607040" cy="548640"/>
-          </a:xfrm>
-          <a:prstGeom prst="rect">
-            <a:avLst/>
-          </a:prstGeom>
-          <a:noFill/>
-          <a:ln/>
-        </p:spPr>
-        <p:txBody>
-          <a:bodyPr wrap="square" lIns="0" tIns="0" rIns="0" bIns="0" rtlCol="0" anchor="ctr"/>
-          <a:lstStyle/>
-          <a:p>
-            <a:pPr indent="0" marL="0">
-              <a:buNone/>
-            </a:pPr>
-            <a:r>
-              <a:rPr lang="en-US" sz="1700" b="1" dirty="0">
-                <a:solidFill>
-                  <a:srgbClr val="FFFFFF"/>
-                </a:solidFill>
-                <a:latin typeface="Calibri" pitchFamily="34" charset="0"/>
-                <a:ea typeface="Calibri" pitchFamily="34" charset="-122"/>
-                <a:cs typeface="Calibri" pitchFamily="34" charset="-120"/>
-              </a:rPr>
-              <a:t>Jetzt: </a:t>
-            </a:r>
-            <a:pPr indent="0" marL="0">
-              <a:buNone/>
-            </a:pPr>
-            <a:r>
-              <a:rPr lang="en-US" sz="1700" dirty="0">
-                <a:solidFill>
-                  <a:srgbClr val="FFFFFF"/>
-                </a:solidFill>
-                <a:latin typeface="Calibri" pitchFamily="34" charset="0"/>
-                <a:ea typeface="Calibri" pitchFamily="34" charset="-122"/>
-                <a:cs typeface="Calibri" pitchFamily="34" charset="-120"/>
-              </a:rPr>
-              <a:t>Schreibe den Merksatz mit Beispiel ab und rahme ihn rot ein.      </a:t>
-            </a:r>
-            <a:pPr indent="0" marL="0">
-              <a:buNone/>
-            </a:pPr>
-            <a:r>
-              <a:rPr lang="en-US" sz="1700" i="1" dirty="0">
-                <a:solidFill>
-                  <a:srgbClr val="CADCFC"/>
-                </a:solidFill>
-                <a:latin typeface="Calibri" pitchFamily="34" charset="0"/>
-                <a:ea typeface="Calibri" pitchFamily="34" charset="-122"/>
-                <a:cs typeface="Calibri" pitchFamily="34" charset="-120"/>
-              </a:rPr>
-              <a:t>Fertig? Stift hinlegen.</a:t>
-            </a:r>
-            <a:endParaRPr lang="en-US" sz="1700" dirty="0"/>
-          </a:p>
-        </p:txBody>
-      </p:sp>
-      <p:sp>
-        <p:nvSpPr>
-          <p:cNvPr id="16" name="Text 14"/>
-          <p:cNvSpPr txBox="1"/>
-          <p:nvPr/>
-        </p:nvSpPr>
-        <p:spPr>
-          <a:xfrm>
-            <a:off x="548640" y="6510528"/>
-            <a:ext cx="5486400" cy="228600"/>
-          </a:xfrm>
-          <a:prstGeom prst="rect">
-            <a:avLst/>
-          </a:prstGeom>
-          <a:noFill/>
-          <a:ln/>
-        </p:spPr>
-        <p:txBody>
-          <a:bodyPr wrap="square" lIns="0" tIns="0" rIns="0" bIns="0" rtlCol="0" anchor="t"/>
-          <a:lstStyle/>
-          <a:p>
-            <a:pPr indent="0" marL="0">
-              <a:buNone/>
-            </a:pPr>
-            <a:r>
-              <a:rPr lang="en-US" sz="1000" dirty="0">
-                <a:solidFill>
-                  <a:srgbClr val="5B6B8C"/>
-                </a:solidFill>
-                <a:latin typeface="Calibri" pitchFamily="34" charset="0"/>
-                <a:ea typeface="Calibri" pitchFamily="34" charset="-122"/>
-                <a:cs typeface="Calibri" pitchFamily="34" charset="-120"/>
-              </a:rPr>
-              <a:t>Absolutismus · Wiederholung · Geschichte 8</a:t>
-            </a:r>
-            <a:endParaRPr lang="en-US" sz="1000" dirty="0"/>
-          </a:p>
-        </p:txBody>
-      </p:sp>
-      <p:sp>
-        <p:nvSpPr>
-          <p:cNvPr id="17" name="Text 15"/>
-          <p:cNvSpPr txBox="1"/>
-          <p:nvPr/>
-        </p:nvSpPr>
-        <p:spPr>
-          <a:xfrm>
-            <a:off x="11155680" y="6510528"/>
-            <a:ext cx="457200" cy="228600"/>
-          </a:xfrm>
-          <a:prstGeom prst="rect">
-            <a:avLst/>
-          </a:prstGeom>
-          <a:noFill/>
-          <a:ln/>
-        </p:spPr>
-        <p:txBody>
-          <a:bodyPr wrap="square" lIns="0" tIns="0" rIns="0" bIns="0" rtlCol="0" anchor="t"/>
-          <a:lstStyle/>
-          <a:p>
-            <a:pPr algn="r" indent="0" marL="0">
-              <a:buNone/>
-            </a:pPr>
-            <a:r>
-              <a:rPr lang="en-US" sz="1000" dirty="0">
-                <a:solidFill>
-                  <a:srgbClr val="5B6B8C"/>
-                </a:solidFill>
-                <a:latin typeface="Calibri" pitchFamily="34" charset="0"/>
-                <a:ea typeface="Calibri" pitchFamily="34" charset="-122"/>
-                <a:cs typeface="Calibri" pitchFamily="34" charset="-120"/>
-              </a:rPr>
-              <a:t>4</a:t>
-            </a:r>
-            <a:endParaRPr lang="en-US" sz="1000" dirty="0"/>
+              <a:t>Beamte · Glaube · Söldner · Merkantilismus · Gottesgnadentum · Versailles · Steuerfreiheit · Zölle · stehendes · 400.000 · Drittel · absoluter · Intendanten · Parlament</a:t>
+            </a:r>
+            <a:endParaRPr lang="en-US" sz="2000" dirty="0"/>
           </a:p>
         </p:txBody>
       </p:sp>
@@ -6734,7 +6592,7 @@
                 <a:ea typeface="Calibri" pitchFamily="34" charset="-122"/>
                 <a:cs typeface="Calibri" pitchFamily="34" charset="-120"/>
               </a:rPr>
-              <a:t>ÜBUNG 1</a:t>
+              <a:t>EINSTIEG · OHNE HEFT</a:t>
             </a:r>
             <a:endParaRPr lang="en-US" sz="1300" dirty="0"/>
           </a:p>
@@ -6773,7 +6631,7 @@
                 <a:ea typeface="Cambria" pitchFamily="34" charset="-122"/>
                 <a:cs typeface="Cambria" pitchFamily="34" charset="-120"/>
               </a:rPr>
-              <a:t>Absolutismus – ja oder nein?</a:t>
+              <a:t>Wahr oder falsch?</a:t>
             </a:r>
             <a:endParaRPr lang="en-US" sz="3400" dirty="0"/>
           </a:p>
@@ -6893,7 +6751,7 @@
                 <a:ea typeface="Calibri" pitchFamily="34" charset="-122"/>
                 <a:cs typeface="Calibri" pitchFamily="34" charset="-120"/>
               </a:rPr>
-              <a:t>Schreibe Ü1 an den Rand.</a:t>
+              <a:t>Lies die vier Behauptungen. Entscheide still: wahr oder falsch?</a:t>
             </a:r>
             <a:endParaRPr lang="en-US" sz="2100" dirty="0"/>
           </a:p>
@@ -6991,7 +6849,7 @@
                 <a:ea typeface="Calibri" pitchFamily="34" charset="-122"/>
                 <a:cs typeface="Calibri" pitchFamily="34" charset="-120"/>
               </a:rPr>
-              <a:t>Schreibe Nummer + „Absolutismus“ oder „kein Absolutismus“.</a:t>
+              <a:t>Melde dich: Nenne deine Entscheidung und begründe sie.</a:t>
             </a:r>
             <a:endParaRPr lang="en-US" sz="2100" dirty="0"/>
           </a:p>
@@ -7089,7 +6947,7 @@
                 <a:ea typeface="Calibri" pitchFamily="34" charset="-122"/>
                 <a:cs typeface="Calibri" pitchFamily="34" charset="-120"/>
               </a:rPr>
-              <a:t>Begründe mit dem Test: Kann jemand den König stoppen?</a:t>
+              <a:t>Bei „falsch“: Verbessere die Aussage.</a:t>
             </a:r>
             <a:endParaRPr lang="en-US" sz="2100" dirty="0"/>
           </a:p>
@@ -7164,7 +7022,7 @@
                 <a:ea typeface="Calibri" pitchFamily="34" charset="-122"/>
                 <a:cs typeface="Calibri" pitchFamily="34" charset="-120"/>
               </a:rPr>
-              <a:t>4 Minuten · allein · leise      </a:t>
+              <a:t>4 Minuten · gemeinsam · mündlich      </a:t>
             </a:r>
             <a:pPr indent="0" marL="0">
               <a:buNone/>
@@ -7178,7 +7036,7 @@
                 <a:ea typeface="Calibri" pitchFamily="34" charset="-122"/>
                 <a:cs typeface="Calibri" pitchFamily="34" charset="-120"/>
               </a:rPr>
-              <a:t>Fertig? Stift hinlegen und noch einmal durchlesen.</a:t>
+              <a:t>Wer begründet, bekommt das Wort.</a:t>
             </a:r>
             <a:endParaRPr lang="en-US" sz="1700" dirty="0"/>
           </a:p>
@@ -7376,7 +7234,7 @@
                 <a:ea typeface="Cambria" pitchFamily="34" charset="-122"/>
                 <a:cs typeface="Cambria" pitchFamily="34" charset="-120"/>
               </a:rPr>
-              <a:t>Der König entscheidet allein über Gesetze, Krieg und Steuern.</a:t>
+              <a:t>Der Dritte Stand war mit Abstand der größte Stand.</a:t>
             </a:r>
             <a:endParaRPr lang="en-US" sz="2200" dirty="0"/>
           </a:p>
@@ -7496,7 +7354,7 @@
                 <a:ea typeface="Cambria" pitchFamily="34" charset="-122"/>
                 <a:cs typeface="Cambria" pitchFamily="34" charset="-120"/>
               </a:rPr>
-              <a:t>Ein Parlament kann Steuererhöhungen des Königs verbieten.</a:t>
+              <a:t>Der Adel musste hohe Steuern an den König zahlen.</a:t>
             </a:r>
             <a:endParaRPr lang="en-US" sz="2200" dirty="0"/>
           </a:p>
@@ -7616,7 +7474,7 @@
                 <a:ea typeface="Cambria" pitchFamily="34" charset="-122"/>
                 <a:cs typeface="Cambria" pitchFamily="34" charset="-120"/>
               </a:rPr>
-              <a:t>Beamte handeln im Namen des Königs und müssen ihm gehorchen.</a:t>
+              <a:t>Ludwig XIV. verzichtete auf Söldner und baute ein stehendes Heer auf.</a:t>
             </a:r>
             <a:endParaRPr lang="en-US" sz="2200" dirty="0"/>
           </a:p>
@@ -7736,7 +7594,7 @@
                 <a:ea typeface="Cambria" pitchFamily="34" charset="-122"/>
                 <a:cs typeface="Cambria" pitchFamily="34" charset="-120"/>
               </a:rPr>
-              <a:t>Die Bürger wählen alle vier Jahre ihre Regierung.</a:t>
+              <a:t>Ludwig XIV. erlaubte den Protestanten die freie Religionsausübung.</a:t>
             </a:r>
             <a:endParaRPr lang="en-US" sz="2200" dirty="0"/>
           </a:p>
@@ -7846,7 +7704,7 @@
                 <a:ea typeface="Cambria" pitchFamily="34" charset="-122"/>
                 <a:cs typeface="Cambria" pitchFamily="34" charset="-120"/>
               </a:rPr>
-              <a:t>Die fünf Säulen des Absolutismus</a:t>
+              <a:t>Absolutismus</a:t>
             </a:r>
             <a:endParaRPr lang="en-US" sz="3400" dirty="0"/>
           </a:p>
@@ -7904,7 +7762,7 @@
               <a:buNone/>
             </a:pPr>
             <a:r>
-              <a:rPr lang="en-US" sz="2000" dirty="0">
+              <a:rPr lang="en-US" sz="2100" b="1" dirty="0">
                 <a:solidFill>
                   <a:srgbClr val="1E2761"/>
                 </a:solidFill>
@@ -7912,13 +7770,13 @@
                 <a:ea typeface="Cambria" pitchFamily="34" charset="-122"/>
                 <a:cs typeface="Cambria" pitchFamily="34" charset="-120"/>
               </a:rPr>
-              <a:t>Ludwig XIV. sicherte seine Macht auf </a:t>
-            </a:r>
-            <a:pPr indent="0" marL="0">
-              <a:buNone/>
-            </a:pPr>
-            <a:r>
-              <a:rPr lang="en-US" sz="2000" b="1" dirty="0">
+              <a:t>Absolutismus</a:t>
+            </a:r>
+            <a:pPr indent="0" marL="0">
+              <a:buNone/>
+            </a:pPr>
+            <a:r>
+              <a:rPr lang="en-US" sz="2100" dirty="0">
                 <a:solidFill>
                   <a:srgbClr val="1E2761"/>
                 </a:solidFill>
@@ -7926,13 +7784,13 @@
                 <a:ea typeface="Cambria" pitchFamily="34" charset="-122"/>
                 <a:cs typeface="Cambria" pitchFamily="34" charset="-120"/>
               </a:rPr>
-              <a:t>fünf Säulen</a:t>
-            </a:r>
-            <a:pPr indent="0" marL="0">
-              <a:buNone/>
-            </a:pPr>
-            <a:r>
-              <a:rPr lang="en-US" sz="2000" dirty="0">
+              <a:t> war eine Herrschaftsform in Europa im </a:t>
+            </a:r>
+            <a:pPr indent="0" marL="0">
+              <a:buNone/>
+            </a:pPr>
+            <a:r>
+              <a:rPr lang="en-US" sz="2100" b="1" dirty="0">
                 <a:solidFill>
                   <a:srgbClr val="1E2761"/>
                 </a:solidFill>
@@ -7940,13 +7798,13 @@
                 <a:ea typeface="Cambria" pitchFamily="34" charset="-122"/>
                 <a:cs typeface="Cambria" pitchFamily="34" charset="-120"/>
               </a:rPr>
-              <a:t>: </a:t>
-            </a:r>
-            <a:pPr indent="0" marL="0">
-              <a:buNone/>
-            </a:pPr>
-            <a:r>
-              <a:rPr lang="en-US" sz="2000" b="1" dirty="0">
+              <a:t>17. und 18. Jahrhundert</a:t>
+            </a:r>
+            <a:pPr indent="0" marL="0">
+              <a:buNone/>
+            </a:pPr>
+            <a:r>
+              <a:rPr lang="en-US" sz="2100" dirty="0">
                 <a:solidFill>
                   <a:srgbClr val="1E2761"/>
                 </a:solidFill>
@@ -7954,13 +7812,13 @@
                 <a:ea typeface="Cambria" pitchFamily="34" charset="-122"/>
                 <a:cs typeface="Cambria" pitchFamily="34" charset="-120"/>
               </a:rPr>
-              <a:t>1</a:t>
-            </a:r>
-            <a:pPr indent="0" marL="0">
-              <a:buNone/>
-            </a:pPr>
-            <a:r>
-              <a:rPr lang="en-US" sz="2000" dirty="0">
+              <a:t>, in der ein einzelner Monarch (König oder Fürst) </a:t>
+            </a:r>
+            <a:pPr indent="0" marL="0">
+              <a:buNone/>
+            </a:pPr>
+            <a:r>
+              <a:rPr lang="en-US" sz="2100" b="1" dirty="0">
                 <a:solidFill>
                   <a:srgbClr val="1E2761"/>
                 </a:solidFill>
@@ -7968,13 +7826,13 @@
                 <a:ea typeface="Cambria" pitchFamily="34" charset="-122"/>
                 <a:cs typeface="Cambria" pitchFamily="34" charset="-120"/>
               </a:rPr>
-              <a:t> Verwaltung und Justiz · </a:t>
-            </a:r>
-            <a:pPr indent="0" marL="0">
-              <a:buNone/>
-            </a:pPr>
-            <a:r>
-              <a:rPr lang="en-US" sz="2000" b="1" dirty="0">
+              <a:t>uneingeschränkt (absolut)</a:t>
+            </a:r>
+            <a:pPr indent="0" marL="0">
+              <a:buNone/>
+            </a:pPr>
+            <a:r>
+              <a:rPr lang="en-US" sz="2100" dirty="0">
                 <a:solidFill>
                   <a:srgbClr val="1E2761"/>
                 </a:solidFill>
@@ -7982,107 +7840,9 @@
                 <a:ea typeface="Cambria" pitchFamily="34" charset="-122"/>
                 <a:cs typeface="Cambria" pitchFamily="34" charset="-120"/>
               </a:rPr>
-              <a:t>2</a:t>
-            </a:r>
-            <a:pPr indent="0" marL="0">
-              <a:buNone/>
-            </a:pPr>
-            <a:r>
-              <a:rPr lang="en-US" sz="2000" dirty="0">
-                <a:solidFill>
-                  <a:srgbClr val="1E2761"/>
-                </a:solidFill>
-                <a:latin typeface="Cambria" pitchFamily="34" charset="0"/>
-                <a:ea typeface="Cambria" pitchFamily="34" charset="-122"/>
-                <a:cs typeface="Cambria" pitchFamily="34" charset="-120"/>
-              </a:rPr>
-              <a:t> Adel und Hof von Versailles · </a:t>
-            </a:r>
-            <a:pPr indent="0" marL="0">
-              <a:buNone/>
-            </a:pPr>
-            <a:r>
-              <a:rPr lang="en-US" sz="2000" b="1" dirty="0">
-                <a:solidFill>
-                  <a:srgbClr val="1E2761"/>
-                </a:solidFill>
-                <a:latin typeface="Cambria" pitchFamily="34" charset="0"/>
-                <a:ea typeface="Cambria" pitchFamily="34" charset="-122"/>
-                <a:cs typeface="Cambria" pitchFamily="34" charset="-120"/>
-              </a:rPr>
-              <a:t>3</a:t>
-            </a:r>
-            <a:pPr indent="0" marL="0">
-              <a:buNone/>
-            </a:pPr>
-            <a:r>
-              <a:rPr lang="en-US" sz="2000" dirty="0">
-                <a:solidFill>
-                  <a:srgbClr val="1E2761"/>
-                </a:solidFill>
-                <a:latin typeface="Cambria" pitchFamily="34" charset="0"/>
-                <a:ea typeface="Cambria" pitchFamily="34" charset="-122"/>
-                <a:cs typeface="Cambria" pitchFamily="34" charset="-120"/>
-              </a:rPr>
-              <a:t> Wirtschaft (Merkantilismus) · </a:t>
-            </a:r>
-            <a:pPr indent="0" marL="0">
-              <a:buNone/>
-            </a:pPr>
-            <a:r>
-              <a:rPr lang="en-US" sz="2000" b="1" dirty="0">
-                <a:solidFill>
-                  <a:srgbClr val="1E2761"/>
-                </a:solidFill>
-                <a:latin typeface="Cambria" pitchFamily="34" charset="0"/>
-                <a:ea typeface="Cambria" pitchFamily="34" charset="-122"/>
-                <a:cs typeface="Cambria" pitchFamily="34" charset="-120"/>
-              </a:rPr>
-              <a:t>4</a:t>
-            </a:r>
-            <a:pPr indent="0" marL="0">
-              <a:buNone/>
-            </a:pPr>
-            <a:r>
-              <a:rPr lang="en-US" sz="2000" dirty="0">
-                <a:solidFill>
-                  <a:srgbClr val="1E2761"/>
-                </a:solidFill>
-                <a:latin typeface="Cambria" pitchFamily="34" charset="0"/>
-                <a:ea typeface="Cambria" pitchFamily="34" charset="-122"/>
-                <a:cs typeface="Cambria" pitchFamily="34" charset="-120"/>
-              </a:rPr>
-              <a:t> Religion (Gottesgnadentum) · </a:t>
-            </a:r>
-            <a:pPr indent="0" marL="0">
-              <a:buNone/>
-            </a:pPr>
-            <a:r>
-              <a:rPr lang="en-US" sz="2000" b="1" dirty="0">
-                <a:solidFill>
-                  <a:srgbClr val="1E2761"/>
-                </a:solidFill>
-                <a:latin typeface="Cambria" pitchFamily="34" charset="0"/>
-                <a:ea typeface="Cambria" pitchFamily="34" charset="-122"/>
-                <a:cs typeface="Cambria" pitchFamily="34" charset="-120"/>
-              </a:rPr>
-              <a:t>5</a:t>
-            </a:r>
-            <a:pPr indent="0" marL="0">
-              <a:buNone/>
-            </a:pPr>
-            <a:r>
-              <a:rPr lang="en-US" sz="2000" dirty="0">
-                <a:solidFill>
-                  <a:srgbClr val="1E2761"/>
-                </a:solidFill>
-                <a:latin typeface="Cambria" pitchFamily="34" charset="0"/>
-                <a:ea typeface="Cambria" pitchFamily="34" charset="-122"/>
-                <a:cs typeface="Cambria" pitchFamily="34" charset="-120"/>
-              </a:rPr>
-              <a:t> Heer (stehendes Heer).</a:t>
-            </a:r>
-            <a:endParaRPr lang="en-US" sz="2000" dirty="0"/>
+              <a:t> herrschte.</a:t>
+            </a:r>
+            <a:endParaRPr lang="en-US" sz="2100" dirty="0"/>
           </a:p>
         </p:txBody>
       </p:sp>
@@ -8147,141 +7907,15 @@
               <a:buNone/>
             </a:pPr>
             <a:r>
-              <a:rPr lang="en-US" sz="1900" b="1" dirty="0">
-                <a:solidFill>
-                  <a:srgbClr val="D9534F"/>
+              <a:rPr lang="en-US" sz="1900" dirty="0">
+                <a:solidFill>
+                  <a:srgbClr val="1E2761"/>
                 </a:solidFill>
                 <a:latin typeface="Cambria" pitchFamily="34" charset="0"/>
                 <a:ea typeface="Cambria" pitchFamily="34" charset="-122"/>
                 <a:cs typeface="Cambria" pitchFamily="34" charset="-120"/>
               </a:rPr>
-              <a:t>Verwaltung</a:t>
-            </a:r>
-            <a:pPr indent="0" marL="0">
-              <a:buNone/>
-            </a:pPr>
-            <a:r>
-              <a:rPr lang="en-US" sz="1900" dirty="0">
-                <a:solidFill>
-                  <a:srgbClr val="1E2761"/>
-                </a:solidFill>
-                <a:latin typeface="Cambria" pitchFamily="34" charset="0"/>
-                <a:ea typeface="Cambria" pitchFamily="34" charset="-122"/>
-                <a:cs typeface="Cambria" pitchFamily="34" charset="-120"/>
-              </a:rPr>
-              <a:t> kontrolliert das Land · </a:t>
-            </a:r>
-            <a:pPr indent="0" marL="0">
-              <a:buNone/>
-            </a:pPr>
-            <a:r>
-              <a:rPr lang="en-US" sz="1900" b="1" dirty="0">
-                <a:solidFill>
-                  <a:srgbClr val="D9534F"/>
-                </a:solidFill>
-                <a:latin typeface="Cambria" pitchFamily="34" charset="0"/>
-                <a:ea typeface="Cambria" pitchFamily="34" charset="-122"/>
-                <a:cs typeface="Cambria" pitchFamily="34" charset="-120"/>
-              </a:rPr>
-              <a:t>Hof</a:t>
-            </a:r>
-            <a:pPr indent="0" marL="0">
-              <a:buNone/>
-            </a:pPr>
-            <a:r>
-              <a:rPr lang="en-US" sz="1900" dirty="0">
-                <a:solidFill>
-                  <a:srgbClr val="1E2761"/>
-                </a:solidFill>
-                <a:latin typeface="Cambria" pitchFamily="34" charset="0"/>
-                <a:ea typeface="Cambria" pitchFamily="34" charset="-122"/>
-                <a:cs typeface="Cambria" pitchFamily="34" charset="-120"/>
-              </a:rPr>
-              <a:t> bindet den Adel · </a:t>
-            </a:r>
-            <a:pPr indent="0" marL="0">
-              <a:buNone/>
-            </a:pPr>
-            <a:r>
-              <a:rPr lang="en-US" sz="1900" b="1" dirty="0">
-                <a:solidFill>
-                  <a:srgbClr val="D9534F"/>
-                </a:solidFill>
-                <a:latin typeface="Cambria" pitchFamily="34" charset="0"/>
-                <a:ea typeface="Cambria" pitchFamily="34" charset="-122"/>
-                <a:cs typeface="Cambria" pitchFamily="34" charset="-120"/>
-              </a:rPr>
-              <a:t>Wirtschaft</a:t>
-            </a:r>
-            <a:pPr indent="0" marL="0">
-              <a:buNone/>
-            </a:pPr>
-            <a:r>
-              <a:rPr lang="en-US" sz="1900" dirty="0">
-                <a:solidFill>
-                  <a:srgbClr val="1E2761"/>
-                </a:solidFill>
-                <a:latin typeface="Cambria" pitchFamily="34" charset="0"/>
-                <a:ea typeface="Cambria" pitchFamily="34" charset="-122"/>
-                <a:cs typeface="Cambria" pitchFamily="34" charset="-120"/>
-              </a:rPr>
-              <a:t> liefert Geld · </a:t>
-            </a:r>
-            <a:pPr indent="0" marL="0">
-              <a:buNone/>
-            </a:pPr>
-            <a:r>
-              <a:rPr lang="en-US" sz="1900" b="1" dirty="0">
-                <a:solidFill>
-                  <a:srgbClr val="D9534F"/>
-                </a:solidFill>
-                <a:latin typeface="Cambria" pitchFamily="34" charset="0"/>
-                <a:ea typeface="Cambria" pitchFamily="34" charset="-122"/>
-                <a:cs typeface="Cambria" pitchFamily="34" charset="-120"/>
-              </a:rPr>
-              <a:t>Religion</a:t>
-            </a:r>
-            <a:pPr indent="0" marL="0">
-              <a:buNone/>
-            </a:pPr>
-            <a:r>
-              <a:rPr lang="en-US" sz="1900" dirty="0">
-                <a:solidFill>
-                  <a:srgbClr val="1E2761"/>
-                </a:solidFill>
-                <a:latin typeface="Cambria" pitchFamily="34" charset="0"/>
-                <a:ea typeface="Cambria" pitchFamily="34" charset="-122"/>
-                <a:cs typeface="Cambria" pitchFamily="34" charset="-120"/>
-              </a:rPr>
-              <a:t> begründet die Macht · </a:t>
-            </a:r>
-            <a:pPr indent="0" marL="0">
-              <a:buNone/>
-            </a:pPr>
-            <a:r>
-              <a:rPr lang="en-US" sz="1900" b="1" dirty="0">
-                <a:solidFill>
-                  <a:srgbClr val="D9534F"/>
-                </a:solidFill>
-                <a:latin typeface="Cambria" pitchFamily="34" charset="0"/>
-                <a:ea typeface="Cambria" pitchFamily="34" charset="-122"/>
-                <a:cs typeface="Cambria" pitchFamily="34" charset="-120"/>
-              </a:rPr>
-              <a:t>Heer</a:t>
-            </a:r>
-            <a:pPr indent="0" marL="0">
-              <a:buNone/>
-            </a:pPr>
-            <a:r>
-              <a:rPr lang="en-US" sz="1900" dirty="0">
-                <a:solidFill>
-                  <a:srgbClr val="1E2761"/>
-                </a:solidFill>
-                <a:latin typeface="Cambria" pitchFamily="34" charset="0"/>
-                <a:ea typeface="Cambria" pitchFamily="34" charset="-122"/>
-                <a:cs typeface="Cambria" pitchFamily="34" charset="-120"/>
-              </a:rPr>
-              <a:t> setzt sie durch</a:t>
+              <a:t>Ludwig XIV. verkündet 1661: „Ich regiere jetzt selbst.“</a:t>
             </a:r>
             <a:endParaRPr lang="en-US" sz="1900" dirty="0"/>
           </a:p>
@@ -8381,35 +8015,7 @@
                 <a:ea typeface="Calibri" pitchFamily="34" charset="-122"/>
                 <a:cs typeface="Calibri" pitchFamily="34" charset="-120"/>
               </a:rPr>
-              <a:t>Im Test sollst du die Säulen nennen </a:t>
-            </a:r>
-            <a:pPr indent="0" marL="0">
-              <a:buNone/>
-            </a:pPr>
-            <a:r>
-              <a:rPr lang="en-US" sz="1900" b="1" dirty="0">
-                <a:solidFill>
-                  <a:srgbClr val="1E2761"/>
-                </a:solidFill>
-                <a:latin typeface="Calibri" pitchFamily="34" charset="0"/>
-                <a:ea typeface="Calibri" pitchFamily="34" charset="-122"/>
-                <a:cs typeface="Calibri" pitchFamily="34" charset="-120"/>
-              </a:rPr>
-              <a:t>und</a:t>
-            </a:r>
-            <a:pPr indent="0" marL="0">
-              <a:buNone/>
-            </a:pPr>
-            <a:r>
-              <a:rPr lang="en-US" sz="1900" dirty="0">
-                <a:solidFill>
-                  <a:srgbClr val="1E2761"/>
-                </a:solidFill>
-                <a:latin typeface="Calibri" pitchFamily="34" charset="0"/>
-                <a:ea typeface="Calibri" pitchFamily="34" charset="-122"/>
-                <a:cs typeface="Calibri" pitchFamily="34" charset="-120"/>
-              </a:rPr>
-              <a:t> erklären, wie der König damit seine Macht sichert.</a:t>
+              <a:t>Der Begriff ordnet eine ganze Epoche ein und ist im Test die Grundlage für alle weiteren Fragen.</a:t>
             </a:r>
             <a:endParaRPr lang="en-US" sz="1900" dirty="0"/>
           </a:p>
@@ -8509,7 +8115,7 @@
                 <a:ea typeface="Calibri" pitchFamily="34" charset="-122"/>
                 <a:cs typeface="Calibri" pitchFamily="34" charset="-120"/>
               </a:rPr>
-              <a:t>Bei jeder Säule fragen: </a:t>
+              <a:t>Kann jemand den König stoppen (Parlament, Verfassung, Stände)? </a:t>
             </a:r>
             <a:pPr indent="0" marL="0">
               <a:buNone/>
@@ -8523,7 +8129,21 @@
                 <a:ea typeface="Calibri" pitchFamily="34" charset="-122"/>
                 <a:cs typeface="Calibri" pitchFamily="34" charset="-120"/>
               </a:rPr>
-              <a:t>Was sichert der König damit?</a:t>
+              <a:t>Nein</a:t>
+            </a:r>
+            <a:pPr indent="0" marL="0">
+              <a:buNone/>
+            </a:pPr>
+            <a:r>
+              <a:rPr lang="en-US" sz="1900" dirty="0">
+                <a:solidFill>
+                  <a:srgbClr val="1E2761"/>
+                </a:solidFill>
+                <a:latin typeface="Calibri" pitchFamily="34" charset="0"/>
+                <a:ea typeface="Calibri" pitchFamily="34" charset="-122"/>
+                <a:cs typeface="Calibri" pitchFamily="34" charset="-120"/>
+              </a:rPr>
+              <a:t> → Absolutismus.</a:t>
             </a:r>
             <a:endParaRPr lang="en-US" sz="1900" dirty="0"/>
           </a:p>
@@ -8761,7 +8381,7 @@
                 <a:ea typeface="Calibri" pitchFamily="34" charset="-122"/>
                 <a:cs typeface="Calibri" pitchFamily="34" charset="-120"/>
               </a:rPr>
-              <a:t>ÜBUNG 2 · ARBEITSBLATT</a:t>
+              <a:t>ÜBUNG 2</a:t>
             </a:r>
             <a:endParaRPr lang="en-US" sz="1300" dirty="0"/>
           </a:p>
@@ -8800,7 +8420,7 @@
                 <a:ea typeface="Cambria" pitchFamily="34" charset="-122"/>
                 <a:cs typeface="Cambria" pitchFamily="34" charset="-120"/>
               </a:rPr>
-              <a:t>Lückentext: Die fünf Säulen</a:t>
+              <a:t>Absolutismus – ja oder nein?</a:t>
             </a:r>
             <a:endParaRPr lang="en-US" sz="3400" dirty="0"/>
           </a:p>
@@ -8815,11 +8435,11 @@
         <p:spPr>
           <a:xfrm>
             <a:off x="548640" y="1417320"/>
-            <a:ext cx="11109960" cy="1975104"/>
+            <a:ext cx="11109960" cy="1655064"/>
           </a:xfrm>
           <a:prstGeom prst="roundRect">
             <a:avLst>
-              <a:gd name="adj" fmla="val 3704"/>
+              <a:gd name="adj" fmla="val 4420"/>
             </a:avLst>
           </a:prstGeom>
           <a:solidFill>
@@ -8920,7 +8540,7 @@
                 <a:ea typeface="Calibri" pitchFamily="34" charset="-122"/>
                 <a:cs typeface="Calibri" pitchFamily="34" charset="-120"/>
               </a:rPr>
-              <a:t>Schreibe Ü2 oben auf das Arbeitsblatt.</a:t>
+              <a:t>Schreibe Ü2 an den Rand.</a:t>
             </a:r>
             <a:endParaRPr lang="en-US" sz="2100" dirty="0"/>
           </a:p>
@@ -8994,7 +8614,7 @@
         <p:spPr>
           <a:xfrm>
             <a:off x="1280160" y="2039112"/>
-            <a:ext cx="10241280" cy="731520"/>
+            <a:ext cx="10241280" cy="411480"/>
           </a:xfrm>
           <a:prstGeom prst="rect">
             <a:avLst/>
@@ -9018,7 +8638,7 @@
                 <a:ea typeface="Calibri" pitchFamily="34" charset="-122"/>
                 <a:cs typeface="Calibri" pitchFamily="34" charset="-120"/>
               </a:rPr>
-              <a:t>Lies den Text einmal ganz. Ergänze dann die 12 Lücken mit dem Wortspeicher.</a:t>
+              <a:t>Schreibe Nummer + „Absolutismus“ oder „kein Absolutismus“.</a:t>
             </a:r>
             <a:endParaRPr lang="en-US" sz="2100" dirty="0"/>
           </a:p>
@@ -9032,7 +8652,7 @@
         </p:nvSpPr>
         <p:spPr>
           <a:xfrm>
-            <a:off x="731520" y="2857500"/>
+            <a:off x="731520" y="2537460"/>
             <a:ext cx="384048" cy="384048"/>
           </a:xfrm>
           <a:prstGeom prst="ellipse">
@@ -9052,7 +8672,7 @@
         </p:nvSpPr>
         <p:spPr>
           <a:xfrm>
-            <a:off x="731520" y="2857500"/>
+            <a:off x="731520" y="2537460"/>
             <a:ext cx="384048" cy="384048"/>
           </a:xfrm>
           <a:prstGeom prst="rect">
@@ -9091,7 +8711,7 @@
         </p:nvSpPr>
         <p:spPr>
           <a:xfrm>
-            <a:off x="1280160" y="2843784"/>
+            <a:off x="1280160" y="2523744"/>
             <a:ext cx="10241280" cy="411480"/>
           </a:xfrm>
           <a:prstGeom prst="rect">
@@ -9116,7 +8736,7 @@
                 <a:ea typeface="Calibri" pitchFamily="34" charset="-122"/>
                 <a:cs typeface="Calibri" pitchFamily="34" charset="-120"/>
               </a:rPr>
-              <a:t>Streiche jedes benutzte Wort durch. Zwei Wörter passen nicht.</a:t>
+              <a:t>Begründe mit dem Test: Kann jemand den König stoppen?</a:t>
             </a:r>
             <a:endParaRPr lang="en-US" sz="2100" dirty="0"/>
           </a:p>
@@ -9191,7 +8811,7 @@
                 <a:ea typeface="Calibri" pitchFamily="34" charset="-122"/>
                 <a:cs typeface="Calibri" pitchFamily="34" charset="-120"/>
               </a:rPr>
-              <a:t>6 Minuten · allein · leise      </a:t>
+              <a:t>4 Minuten · allein · leise      </a:t>
             </a:r>
             <a:pPr indent="0" marL="0">
               <a:buNone/>
@@ -9205,7 +8825,7 @@
                 <a:ea typeface="Calibri" pitchFamily="34" charset="-122"/>
                 <a:cs typeface="Calibri" pitchFamily="34" charset="-120"/>
               </a:rPr>
-              <a:t>Fertig? Stift hinlegen. Schnelle: ★-Aufgabe.</a:t>
+              <a:t>Fertig? Stift hinlegen und noch einmal durchlesen.</a:t>
             </a:r>
             <a:endParaRPr lang="en-US" sz="1700" dirty="0"/>
           </a:p>
@@ -9297,12 +8917,12 @@
         </p:nvSpPr>
         <p:spPr>
           <a:xfrm>
-            <a:off x="548640" y="3758184"/>
-            <a:ext cx="11109960" cy="1463040"/>
+            <a:off x="548640" y="3346704"/>
+            <a:ext cx="11109960" cy="530352"/>
           </a:xfrm>
           <a:prstGeom prst="roundRect">
             <a:avLst>
-              <a:gd name="adj" fmla="val 5000"/>
+              <a:gd name="adj" fmla="val 13793"/>
             </a:avLst>
           </a:prstGeom>
           <a:solidFill>
@@ -9313,69 +8933,209 @@
       </p:sp>
       <p:sp>
         <p:nvSpPr>
-          <p:cNvPr id="20" name="Text 17"/>
-          <p:cNvSpPr txBox="1"/>
-          <p:nvPr/>
-        </p:nvSpPr>
-        <p:spPr>
-          <a:xfrm>
-            <a:off x="822960" y="3867912"/>
-            <a:ext cx="3657600" cy="320040"/>
-          </a:xfrm>
-          <a:prstGeom prst="rect">
-            <a:avLst/>
-          </a:prstGeom>
-          <a:noFill/>
-          <a:ln/>
-        </p:spPr>
-        <p:txBody>
-          <a:bodyPr wrap="square" lIns="0" tIns="0" rIns="0" bIns="0" rtlCol="0" anchor="t"/>
-          <a:lstStyle/>
-          <a:p>
-            <a:pPr indent="0" marL="0">
-              <a:buNone/>
-            </a:pPr>
-            <a:r>
-              <a:rPr lang="en-US" sz="1700" b="1" dirty="0">
-                <a:solidFill>
-                  <a:srgbClr val="D9534F"/>
+          <p:cNvPr id="20" name="Shape 17"/>
+          <p:cNvSpPr/>
+          <p:nvPr/>
+        </p:nvSpPr>
+        <p:spPr>
+          <a:xfrm>
+            <a:off x="685800" y="3429000"/>
+            <a:ext cx="365760" cy="365760"/>
+          </a:xfrm>
+          <a:prstGeom prst="ellipse">
+            <a:avLst/>
+          </a:prstGeom>
+          <a:solidFill>
+            <a:srgbClr val="D9534F"/>
+          </a:solidFill>
+          <a:ln/>
+        </p:spPr>
+      </p:sp>
+      <p:sp>
+        <p:nvSpPr>
+          <p:cNvPr id="21" name="Text 18"/>
+          <p:cNvSpPr txBox="1"/>
+          <p:nvPr/>
+        </p:nvSpPr>
+        <p:spPr>
+          <a:xfrm>
+            <a:off x="685800" y="3429000"/>
+            <a:ext cx="365760" cy="365760"/>
+          </a:xfrm>
+          <a:prstGeom prst="rect">
+            <a:avLst/>
+          </a:prstGeom>
+          <a:noFill/>
+          <a:ln/>
+        </p:spPr>
+        <p:txBody>
+          <a:bodyPr wrap="square" lIns="0" tIns="0" rIns="0" bIns="0" rtlCol="0" anchor="ctr"/>
+          <a:lstStyle/>
+          <a:p>
+            <a:pPr algn="ctr" indent="0" marL="0">
+              <a:buNone/>
+            </a:pPr>
+            <a:r>
+              <a:rPr lang="en-US" sz="1800" b="1" dirty="0">
+                <a:solidFill>
+                  <a:srgbClr val="FFFFFF"/>
+                </a:solidFill>
+                <a:latin typeface="Calibri" pitchFamily="34" charset="0"/>
+                <a:ea typeface="Calibri" pitchFamily="34" charset="-122"/>
+                <a:cs typeface="Calibri" pitchFamily="34" charset="-120"/>
+              </a:rPr>
+              <a:t>1</a:t>
+            </a:r>
+            <a:endParaRPr lang="en-US" sz="1800" dirty="0"/>
+          </a:p>
+        </p:txBody>
+      </p:sp>
+      <p:sp>
+        <p:nvSpPr>
+          <p:cNvPr id="22" name="Text 19"/>
+          <p:cNvSpPr txBox="1"/>
+          <p:nvPr/>
+        </p:nvSpPr>
+        <p:spPr>
+          <a:xfrm>
+            <a:off x="1280160" y="3346704"/>
+            <a:ext cx="10241280" cy="530352"/>
+          </a:xfrm>
+          <a:prstGeom prst="rect">
+            <a:avLst/>
+          </a:prstGeom>
+          <a:noFill/>
+          <a:ln/>
+        </p:spPr>
+        <p:txBody>
+          <a:bodyPr wrap="square" lIns="0" tIns="0" rIns="0" bIns="0" rtlCol="0" anchor="ctr"/>
+          <a:lstStyle/>
+          <a:p>
+            <a:pPr indent="0" marL="0">
+              <a:buNone/>
+            </a:pPr>
+            <a:r>
+              <a:rPr lang="en-US" sz="2200" dirty="0">
+                <a:solidFill>
+                  <a:srgbClr val="1E2761"/>
                 </a:solidFill>
                 <a:latin typeface="Cambria" pitchFamily="34" charset="0"/>
                 <a:ea typeface="Cambria" pitchFamily="34" charset="-122"/>
                 <a:cs typeface="Cambria" pitchFamily="34" charset="-120"/>
               </a:rPr>
-              <a:t>Wortspeicher</a:t>
-            </a:r>
-            <a:endParaRPr lang="en-US" sz="1700" dirty="0"/>
-          </a:p>
-        </p:txBody>
-      </p:sp>
-      <p:sp>
-        <p:nvSpPr>
-          <p:cNvPr id="21" name="Text 18"/>
-          <p:cNvSpPr txBox="1"/>
-          <p:nvPr/>
-        </p:nvSpPr>
-        <p:spPr>
-          <a:xfrm>
-            <a:off x="822960" y="4233672"/>
-            <a:ext cx="10607040" cy="914400"/>
-          </a:xfrm>
-          <a:prstGeom prst="rect">
-            <a:avLst/>
-          </a:prstGeom>
-          <a:noFill/>
-          <a:ln/>
-        </p:spPr>
-        <p:txBody>
-          <a:bodyPr wrap="square" lIns="0" tIns="0" rIns="0" bIns="0" rtlCol="0" anchor="t"/>
-          <a:lstStyle/>
-          <a:p>
-            <a:pPr indent="0" marL="0">
-              <a:buNone/>
-            </a:pPr>
-            <a:r>
-              <a:rPr lang="en-US" sz="2000" dirty="0">
+              <a:t>Der König entscheidet allein über Gesetze, Krieg und Steuern.</a:t>
+            </a:r>
+            <a:endParaRPr lang="en-US" sz="2200" dirty="0"/>
+          </a:p>
+        </p:txBody>
+      </p:sp>
+      <p:sp>
+        <p:nvSpPr>
+          <p:cNvPr id="23" name="Shape 20"/>
+          <p:cNvSpPr/>
+          <p:nvPr/>
+        </p:nvSpPr>
+        <p:spPr>
+          <a:xfrm>
+            <a:off x="548640" y="3950208"/>
+            <a:ext cx="11109960" cy="530352"/>
+          </a:xfrm>
+          <a:prstGeom prst="roundRect">
+            <a:avLst>
+              <a:gd name="adj" fmla="val 13793"/>
+            </a:avLst>
+          </a:prstGeom>
+          <a:solidFill>
+            <a:srgbClr val="F4F7FD"/>
+          </a:solidFill>
+          <a:ln/>
+        </p:spPr>
+      </p:sp>
+      <p:sp>
+        <p:nvSpPr>
+          <p:cNvPr id="24" name="Shape 21"/>
+          <p:cNvSpPr/>
+          <p:nvPr/>
+        </p:nvSpPr>
+        <p:spPr>
+          <a:xfrm>
+            <a:off x="685800" y="4032504"/>
+            <a:ext cx="365760" cy="365760"/>
+          </a:xfrm>
+          <a:prstGeom prst="ellipse">
+            <a:avLst/>
+          </a:prstGeom>
+          <a:solidFill>
+            <a:srgbClr val="D9534F"/>
+          </a:solidFill>
+          <a:ln/>
+        </p:spPr>
+      </p:sp>
+      <p:sp>
+        <p:nvSpPr>
+          <p:cNvPr id="25" name="Text 22"/>
+          <p:cNvSpPr txBox="1"/>
+          <p:nvPr/>
+        </p:nvSpPr>
+        <p:spPr>
+          <a:xfrm>
+            <a:off x="685800" y="4032504"/>
+            <a:ext cx="365760" cy="365760"/>
+          </a:xfrm>
+          <a:prstGeom prst="rect">
+            <a:avLst/>
+          </a:prstGeom>
+          <a:noFill/>
+          <a:ln/>
+        </p:spPr>
+        <p:txBody>
+          <a:bodyPr wrap="square" lIns="0" tIns="0" rIns="0" bIns="0" rtlCol="0" anchor="ctr"/>
+          <a:lstStyle/>
+          <a:p>
+            <a:pPr algn="ctr" indent="0" marL="0">
+              <a:buNone/>
+            </a:pPr>
+            <a:r>
+              <a:rPr lang="en-US" sz="1800" b="1" dirty="0">
+                <a:solidFill>
+                  <a:srgbClr val="FFFFFF"/>
+                </a:solidFill>
+                <a:latin typeface="Calibri" pitchFamily="34" charset="0"/>
+                <a:ea typeface="Calibri" pitchFamily="34" charset="-122"/>
+                <a:cs typeface="Calibri" pitchFamily="34" charset="-120"/>
+              </a:rPr>
+              <a:t>2</a:t>
+            </a:r>
+            <a:endParaRPr lang="en-US" sz="1800" dirty="0"/>
+          </a:p>
+        </p:txBody>
+      </p:sp>
+      <p:sp>
+        <p:nvSpPr>
+          <p:cNvPr id="26" name="Text 23"/>
+          <p:cNvSpPr txBox="1"/>
+          <p:nvPr/>
+        </p:nvSpPr>
+        <p:spPr>
+          <a:xfrm>
+            <a:off x="1280160" y="3950208"/>
+            <a:ext cx="10241280" cy="530352"/>
+          </a:xfrm>
+          <a:prstGeom prst="rect">
+            <a:avLst/>
+          </a:prstGeom>
+          <a:noFill/>
+          <a:ln/>
+        </p:spPr>
+        <p:txBody>
+          <a:bodyPr wrap="square" lIns="0" tIns="0" rIns="0" bIns="0" rtlCol="0" anchor="ctr"/>
+          <a:lstStyle/>
+          <a:p>
+            <a:pPr indent="0" marL="0">
+              <a:buNone/>
+            </a:pPr>
+            <a:r>
+              <a:rPr lang="en-US" sz="2200" dirty="0">
                 <a:solidFill>
                   <a:srgbClr val="1E2761"/>
                 </a:solidFill>
@@ -9383,9 +9143,249 @@
                 <a:ea typeface="Cambria" pitchFamily="34" charset="-122"/>
                 <a:cs typeface="Cambria" pitchFamily="34" charset="-120"/>
               </a:rPr>
-              <a:t>Beamte · Glaube · Söldner · Merkantilismus · Gottesgnadentum · Versailles · Steuerfreiheit · Zölle · stehendes · 400.000 · Drittel · absoluter · Intendanten · Parlament</a:t>
-            </a:r>
-            <a:endParaRPr lang="en-US" sz="2000" dirty="0"/>
+              <a:t>Ein Parlament kann Steuererhöhungen des Königs verbieten.</a:t>
+            </a:r>
+            <a:endParaRPr lang="en-US" sz="2200" dirty="0"/>
+          </a:p>
+        </p:txBody>
+      </p:sp>
+      <p:sp>
+        <p:nvSpPr>
+          <p:cNvPr id="27" name="Shape 24"/>
+          <p:cNvSpPr/>
+          <p:nvPr/>
+        </p:nvSpPr>
+        <p:spPr>
+          <a:xfrm>
+            <a:off x="548640" y="4553712"/>
+            <a:ext cx="11109960" cy="530352"/>
+          </a:xfrm>
+          <a:prstGeom prst="roundRect">
+            <a:avLst>
+              <a:gd name="adj" fmla="val 13793"/>
+            </a:avLst>
+          </a:prstGeom>
+          <a:solidFill>
+            <a:srgbClr val="F4F7FD"/>
+          </a:solidFill>
+          <a:ln/>
+        </p:spPr>
+      </p:sp>
+      <p:sp>
+        <p:nvSpPr>
+          <p:cNvPr id="28" name="Shape 25"/>
+          <p:cNvSpPr/>
+          <p:nvPr/>
+        </p:nvSpPr>
+        <p:spPr>
+          <a:xfrm>
+            <a:off x="685800" y="4636008"/>
+            <a:ext cx="365760" cy="365760"/>
+          </a:xfrm>
+          <a:prstGeom prst="ellipse">
+            <a:avLst/>
+          </a:prstGeom>
+          <a:solidFill>
+            <a:srgbClr val="D9534F"/>
+          </a:solidFill>
+          <a:ln/>
+        </p:spPr>
+      </p:sp>
+      <p:sp>
+        <p:nvSpPr>
+          <p:cNvPr id="29" name="Text 26"/>
+          <p:cNvSpPr txBox="1"/>
+          <p:nvPr/>
+        </p:nvSpPr>
+        <p:spPr>
+          <a:xfrm>
+            <a:off x="685800" y="4636008"/>
+            <a:ext cx="365760" cy="365760"/>
+          </a:xfrm>
+          <a:prstGeom prst="rect">
+            <a:avLst/>
+          </a:prstGeom>
+          <a:noFill/>
+          <a:ln/>
+        </p:spPr>
+        <p:txBody>
+          <a:bodyPr wrap="square" lIns="0" tIns="0" rIns="0" bIns="0" rtlCol="0" anchor="ctr"/>
+          <a:lstStyle/>
+          <a:p>
+            <a:pPr algn="ctr" indent="0" marL="0">
+              <a:buNone/>
+            </a:pPr>
+            <a:r>
+              <a:rPr lang="en-US" sz="1800" b="1" dirty="0">
+                <a:solidFill>
+                  <a:srgbClr val="FFFFFF"/>
+                </a:solidFill>
+                <a:latin typeface="Calibri" pitchFamily="34" charset="0"/>
+                <a:ea typeface="Calibri" pitchFamily="34" charset="-122"/>
+                <a:cs typeface="Calibri" pitchFamily="34" charset="-120"/>
+              </a:rPr>
+              <a:t>3</a:t>
+            </a:r>
+            <a:endParaRPr lang="en-US" sz="1800" dirty="0"/>
+          </a:p>
+        </p:txBody>
+      </p:sp>
+      <p:sp>
+        <p:nvSpPr>
+          <p:cNvPr id="30" name="Text 27"/>
+          <p:cNvSpPr txBox="1"/>
+          <p:nvPr/>
+        </p:nvSpPr>
+        <p:spPr>
+          <a:xfrm>
+            <a:off x="1280160" y="4553712"/>
+            <a:ext cx="10241280" cy="530352"/>
+          </a:xfrm>
+          <a:prstGeom prst="rect">
+            <a:avLst/>
+          </a:prstGeom>
+          <a:noFill/>
+          <a:ln/>
+        </p:spPr>
+        <p:txBody>
+          <a:bodyPr wrap="square" lIns="0" tIns="0" rIns="0" bIns="0" rtlCol="0" anchor="ctr"/>
+          <a:lstStyle/>
+          <a:p>
+            <a:pPr indent="0" marL="0">
+              <a:buNone/>
+            </a:pPr>
+            <a:r>
+              <a:rPr lang="en-US" sz="2200" dirty="0">
+                <a:solidFill>
+                  <a:srgbClr val="1E2761"/>
+                </a:solidFill>
+                <a:latin typeface="Cambria" pitchFamily="34" charset="0"/>
+                <a:ea typeface="Cambria" pitchFamily="34" charset="-122"/>
+                <a:cs typeface="Cambria" pitchFamily="34" charset="-120"/>
+              </a:rPr>
+              <a:t>Beamte handeln im Namen des Königs und müssen ihm gehorchen.</a:t>
+            </a:r>
+            <a:endParaRPr lang="en-US" sz="2200" dirty="0"/>
+          </a:p>
+        </p:txBody>
+      </p:sp>
+      <p:sp>
+        <p:nvSpPr>
+          <p:cNvPr id="31" name="Shape 28"/>
+          <p:cNvSpPr/>
+          <p:nvPr/>
+        </p:nvSpPr>
+        <p:spPr>
+          <a:xfrm>
+            <a:off x="548640" y="5157216"/>
+            <a:ext cx="11109960" cy="530352"/>
+          </a:xfrm>
+          <a:prstGeom prst="roundRect">
+            <a:avLst>
+              <a:gd name="adj" fmla="val 13793"/>
+            </a:avLst>
+          </a:prstGeom>
+          <a:solidFill>
+            <a:srgbClr val="F4F7FD"/>
+          </a:solidFill>
+          <a:ln/>
+        </p:spPr>
+      </p:sp>
+      <p:sp>
+        <p:nvSpPr>
+          <p:cNvPr id="32" name="Shape 29"/>
+          <p:cNvSpPr/>
+          <p:nvPr/>
+        </p:nvSpPr>
+        <p:spPr>
+          <a:xfrm>
+            <a:off x="685800" y="5239512"/>
+            <a:ext cx="365760" cy="365760"/>
+          </a:xfrm>
+          <a:prstGeom prst="ellipse">
+            <a:avLst/>
+          </a:prstGeom>
+          <a:solidFill>
+            <a:srgbClr val="D9534F"/>
+          </a:solidFill>
+          <a:ln/>
+        </p:spPr>
+      </p:sp>
+      <p:sp>
+        <p:nvSpPr>
+          <p:cNvPr id="33" name="Text 30"/>
+          <p:cNvSpPr txBox="1"/>
+          <p:nvPr/>
+        </p:nvSpPr>
+        <p:spPr>
+          <a:xfrm>
+            <a:off x="685800" y="5239512"/>
+            <a:ext cx="365760" cy="365760"/>
+          </a:xfrm>
+          <a:prstGeom prst="rect">
+            <a:avLst/>
+          </a:prstGeom>
+          <a:noFill/>
+          <a:ln/>
+        </p:spPr>
+        <p:txBody>
+          <a:bodyPr wrap="square" lIns="0" tIns="0" rIns="0" bIns="0" rtlCol="0" anchor="ctr"/>
+          <a:lstStyle/>
+          <a:p>
+            <a:pPr algn="ctr" indent="0" marL="0">
+              <a:buNone/>
+            </a:pPr>
+            <a:r>
+              <a:rPr lang="en-US" sz="1800" b="1" dirty="0">
+                <a:solidFill>
+                  <a:srgbClr val="FFFFFF"/>
+                </a:solidFill>
+                <a:latin typeface="Calibri" pitchFamily="34" charset="0"/>
+                <a:ea typeface="Calibri" pitchFamily="34" charset="-122"/>
+                <a:cs typeface="Calibri" pitchFamily="34" charset="-120"/>
+              </a:rPr>
+              <a:t>4</a:t>
+            </a:r>
+            <a:endParaRPr lang="en-US" sz="1800" dirty="0"/>
+          </a:p>
+        </p:txBody>
+      </p:sp>
+      <p:sp>
+        <p:nvSpPr>
+          <p:cNvPr id="34" name="Text 31"/>
+          <p:cNvSpPr txBox="1"/>
+          <p:nvPr/>
+        </p:nvSpPr>
+        <p:spPr>
+          <a:xfrm>
+            <a:off x="1280160" y="5157216"/>
+            <a:ext cx="10241280" cy="530352"/>
+          </a:xfrm>
+          <a:prstGeom prst="rect">
+            <a:avLst/>
+          </a:prstGeom>
+          <a:noFill/>
+          <a:ln/>
+        </p:spPr>
+        <p:txBody>
+          <a:bodyPr wrap="square" lIns="0" tIns="0" rIns="0" bIns="0" rtlCol="0" anchor="ctr"/>
+          <a:lstStyle/>
+          <a:p>
+            <a:pPr indent="0" marL="0">
+              <a:buNone/>
+            </a:pPr>
+            <a:r>
+              <a:rPr lang="en-US" sz="2200" dirty="0">
+                <a:solidFill>
+                  <a:srgbClr val="1E2761"/>
+                </a:solidFill>
+                <a:latin typeface="Cambria" pitchFamily="34" charset="0"/>
+                <a:ea typeface="Cambria" pitchFamily="34" charset="-122"/>
+                <a:cs typeface="Cambria" pitchFamily="34" charset="-120"/>
+              </a:rPr>
+              <a:t>Die Bürger wählen alle vier Jahre ihre Regierung.</a:t>
+            </a:r>
+            <a:endParaRPr lang="en-US" sz="2200" dirty="0"/>
           </a:p>
         </p:txBody>
       </p:sp>

--- a/Geschichte_8/Absolutismus_Wiederholung/Praesentation_Absolutismus_Wiederholung.pptx
+++ b/Geschichte_8/Absolutismus_Wiederholung/Praesentation_Absolutismus_Wiederholung.pptx
@@ -2018,7 +2018,7 @@
           <a:p>
             <a:r>
               <a:rPr lang="en-US" dirty="0"/>
-              <a:t>Lösung: 1 absoluter · 2 Beamte · 3 Intendanten · 4 Steuerfreiheit · 5 Versailles · 6 Merkantilismus · 7 Zölle · 8 Gottesgnadentum · 9 Glaube · 10 stehendes · 11 400.000 · 12 Drittel. Nicht passend: Söldner, Parlament. Kontrolle: „Wer drankommt, liest einen Absatz vor. Alle prüfen mit.“ Dann „Vergleicht und verbessert mit Grün.“ Schnelle machen die ★-Aufgabe (wichtigste Säule begründen).</a:t>
+              <a:t>Lösung: 1 absoluter · 2 Beamte · 3 Intendanten · 4 Steuerfreiheit · 5 Versailles · 6 Merkantilismus · 7 Zölle · 8 Gottesgnadentum · 9 Glaube · 10 stehendes · 11 400.000 · 12 Drittel. Kontrolle: „Wer drankommt, liest einen Absatz vor. Alle prüfen mit.“ Dann „Vergleicht und verbessert mit Grün.“ Schnelle machen die ★-Aufgabe (wichtigste Säule begründen).</a:t>
             </a:r>
             <a:endParaRPr lang="en-US" dirty="0"/>
           </a:p>
@@ -14347,7 +14347,7 @@
                 <a:ea typeface="Calibri" pitchFamily="34" charset="-122"/>
                 <a:cs typeface="Calibri" pitchFamily="34" charset="-120"/>
               </a:rPr>
-              <a:t>Streiche jedes benutzte Wort durch. Zwei Wörter passen nicht.</a:t>
+              <a:t>Streiche jedes benutzte Wort durch.</a:t>
             </a:r>
             <a:endParaRPr lang="en-US" sz="2100" dirty="0"/>
           </a:p>
@@ -14614,7 +14614,7 @@
                 <a:ea typeface="Cambria" pitchFamily="34" charset="-122"/>
                 <a:cs typeface="Cambria" pitchFamily="34" charset="-120"/>
               </a:rPr>
-              <a:t>Beamte · Glaube · Söldner · Merkantilismus · Gottesgnadentum · Versailles · Steuerfreiheit · Zölle · stehendes · 400.000 · Drittel · absoluter · Intendanten · Parlament</a:t>
+              <a:t>Beamte · Glaube · Merkantilismus · Gottesgnadentum · Versailles · Steuerfreiheit · Zölle · stehendes · 400.000 · Drittel · absoluter · Intendanten</a:t>
             </a:r>
             <a:endParaRPr lang="en-US" sz="2000" dirty="0"/>
           </a:p>

--- a/Geschichte_8/Absolutismus_Wiederholung/Praesentation_Absolutismus_Wiederholung.pptx
+++ b/Geschichte_8/Absolutismus_Wiederholung/Praesentation_Absolutismus_Wiederholung.pptx
@@ -23,12 +23,9 @@
     <p:sldId id="271" r:id="rId17"/>
     <p:sldId id="272" r:id="rId18"/>
     <p:sldId id="273" r:id="rId19"/>
-    <p:sldId id="274" r:id="rId20"/>
-    <p:sldId id="275" r:id="rId21"/>
-    <p:sldId id="276" r:id="rId22"/>
   </p:sldIdLst>
   <p:notesMasterIdLst>
-    <p:notesMasterId r:id="rId23"/>
+    <p:notesMasterId r:id="rId20"/>
   </p:notesMasterIdLst>
   <p:sldSz cx="12192000" cy="6858000"/>
   <p:notesSz cx="6858000" cy="12192000"/>
@@ -1226,7 +1223,7 @@
           <a:p>
             <a:r>
               <a:rPr lang="en-US" dirty="0"/>
-              <a:t>Ansage: „Hefte zu. Ihr schreibt noch nichts auf. Meldet euch.“ Raster aus dem Gruppenpuzzle (Stand | Anzahl | Bildung | Vorrechte | Pflichten) plus Spalte Mitbestimmung bereits leer an der Tafel. Inhalte siehe Tafelskript (aus den Gruppenpuzzle-Texten). Nach dem gemeinsamen Ausfüllen: „Jetzt schreibt ihr ab: die Tabelle. Mit Lineal.“ Lösungen siehe Tafelskript. Hinweis: Der Text nennt zur Mitbestimmung des Klerus nichts.  Der Dritte Stand ist ausgeschlossen, der Adel bestimmt das politische Geschehen.</a:t>
+              <a:t>Ansage: „Jetzt arbeitet ihr allein. Die Aufgabe steht rechts.“ Die Karikatur gibt Hinweise auf Vorrechte und Lasten der Stände (hier: Karikatur Drei Stände, 1789; die Karikatur mit Sprechblasen kann die Bilddatei in quellcode/praesentation.js ersetzen). Danach 3 Schüler vorlesen lassen (verschiedene Stände): „Wer drankommt, liest vor. Alle prüfen mit.“ Mögliche Antwort: „Im Absolutismus fühle ich mich als Adeliger privilegiert, weil ich keine Steuern zahlen muss und allein jagen darf. Dafür muss ich mich ehrenhaft verhalten und Verwaltungsaufgaben übernehmen.“ / „… als Bauer ausgenutzt, weil ich Steuern, hohe Abgaben und Pachtgebühren zahlen muss und von der Mitbestimmung ausgeschlossen bin.“ Prüfen: Wird ein Vorrecht und eine Pflicht genannt? Passen sie zum Stand? Typische Fehler: Adel als Steuerzahler, Klerus mit Wehrdienst (befreit), Dritter Stand (Bauern und Bürger) mit Vorrechten. Dann: „Verbessert mit Grün.“</a:t>
             </a:r>
             <a:endParaRPr lang="en-US" dirty="0"/>
           </a:p>
@@ -1314,7 +1311,7 @@
           <a:p>
             <a:r>
               <a:rPr lang="en-US" dirty="0"/>
-              <a:t>Ansage: „Jetzt schreibt ihr von der Folie ab: Merksatz 3. Rahmt ihn rot ein.“ Alle Zahlen stammen aus den Gruppenpuzzle-Texten. Der Text nennt zur Mitbestimmung des Klerus nichts.</a:t>
+              <a:t>Ansage: „Stifte liegen. Das ist eure Lernliste für den Test. Fragen zum Test?“ Die Liste bewusst kurz halten; Testtermin noch einmal nennen.</a:t>
             </a:r>
             <a:endParaRPr lang="en-US" dirty="0"/>
           </a:p>
@@ -1338,94 +1335,6 @@
             <a:fld id="{F7021451-1387-4CA6-816F-3879F97B5CBC}" type="slidenum">
               <a:rPr lang="en-US"/>
               <a:t>18</a:t>
-            </a:fld>
-            <a:endParaRPr lang="en-US"/>
-          </a:p>
-        </p:txBody>
-      </p:sp>
-    </p:spTree>
-    <p:extLst>
-      <p:ext uri="{BB962C8B-B14F-4D97-AF65-F5344CB8AC3E}">
-        <p14:creationId xmlns:p14="http://schemas.microsoft.com/office/powerpoint/2010/main" val="1024086991"/>
-      </p:ext>
-    </p:extLst>
-  </p:cSld>
-  <p:clrMapOvr>
-    <a:masterClrMapping/>
-  </p:clrMapOvr>
-</p:notes>
-</file>
-
-<file path=ppt/notesSlides/notesSlide19.xml><?xml version="1.0" encoding="utf-8"?>
-<p:notes xmlns:a="http://schemas.openxmlformats.org/drawingml/2006/main" xmlns:r="http://schemas.openxmlformats.org/officeDocument/2006/relationships" xmlns:p="http://schemas.openxmlformats.org/presentationml/2006/main">
-  <p:cSld>
-    <p:spTree>
-      <p:nvGrpSpPr>
-        <p:cNvPr id="1" name=""/>
-        <p:cNvGrpSpPr/>
-        <p:nvPr/>
-      </p:nvGrpSpPr>
-      <p:grpSpPr>
-        <a:xfrm>
-          <a:off x="0" y="0"/>
-          <a:ext cx="0" cy="0"/>
-          <a:chOff x="0" y="0"/>
-          <a:chExt cx="0" cy="0"/>
-        </a:xfrm>
-      </p:grpSpPr>
-      <p:sp>
-        <p:nvSpPr>
-          <p:cNvPr id="2" name="Slide Image Placeholder 1"/>
-          <p:cNvSpPr>
-            <a:spLocks noGrp="1" noRot="1" noChangeAspect="1"/>
-          </p:cNvSpPr>
-          <p:nvPr>
-            <p:ph type="sldImg"/>
-          </p:nvPr>
-        </p:nvSpPr>
-        <p:spPr/>
-      </p:sp>
-      <p:sp>
-        <p:nvSpPr>
-          <p:cNvPr id="3" name="Notes Placeholder 2"/>
-          <p:cNvSpPr>
-            <a:spLocks noGrp="1"/>
-          </p:cNvSpPr>
-          <p:nvPr>
-            <p:ph type="body" idx="1"/>
-          </p:nvPr>
-        </p:nvSpPr>
-        <p:spPr/>
-        <p:txBody>
-          <a:bodyPr/>
-          <a:lstStyle/>
-          <a:p>
-            <a:r>
-              <a:rPr lang="en-US" dirty="0"/>
-              <a:t>Ansage: „Jetzt arbeitet ihr allein. Die Aufgabe steht rechts.“ Die Karikatur gibt Hinweise auf Vorrechte und Lasten der Stände (hier: Karikatur Drei Stände, 1789; wenn vorhanden, stattdessen die Karikatur mit Sprechblasen einsetzen: Bilddatei in quellcode/praesentation.js austauschen). Danach 3 Schüler vorlesen lassen (verschiedene Stände): „Wer drankommt, liest vor. Alle prüfen mit.“ Kriterien stehen auf der nächsten Folie. Mögliche Antwort: „Im Absolutismus fühle ich mich als Adeliger privilegiert, weil ich keine Steuern zahlen muss und allein jagen darf. Dafür muss ich mich ehrenhaft verhalten und Verwaltungsaufgaben übernehmen.“ / „… als Bauer ausgenutzt, weil ich Steuern, hohe Abgaben und Pachtgebühren zahlen muss und von der Mitbestimmung ausgeschlossen bin.“</a:t>
-            </a:r>
-            <a:endParaRPr lang="en-US" dirty="0"/>
-          </a:p>
-        </p:txBody>
-      </p:sp>
-      <p:sp>
-        <p:nvSpPr>
-          <p:cNvPr id="4" name="Slide Number Placeholder 3"/>
-          <p:cNvSpPr>
-            <a:spLocks noGrp="1"/>
-          </p:cNvSpPr>
-          <p:nvPr>
-            <p:ph type="sldNum" sz="quarter" idx="10"/>
-          </p:nvPr>
-        </p:nvSpPr>
-        <p:spPr/>
-        <p:txBody>
-          <a:bodyPr/>
-          <a:lstStyle/>
-          <a:p>
-            <a:fld id="{F7021451-1387-4CA6-816F-3879F97B5CBC}" type="slidenum">
-              <a:rPr lang="en-US"/>
-              <a:t>19</a:t>
             </a:fld>
             <a:endParaRPr lang="en-US"/>
           </a:p>
@@ -1514,182 +1423,6 @@
             <a:fld id="{F7021451-1387-4CA6-816F-3879F97B5CBC}" type="slidenum">
               <a:rPr lang="en-US"/>
               <a:t>2</a:t>
-            </a:fld>
-            <a:endParaRPr lang="en-US"/>
-          </a:p>
-        </p:txBody>
-      </p:sp>
-    </p:spTree>
-    <p:extLst>
-      <p:ext uri="{BB962C8B-B14F-4D97-AF65-F5344CB8AC3E}">
-        <p14:creationId xmlns:p14="http://schemas.microsoft.com/office/powerpoint/2010/main" val="1024086991"/>
-      </p:ext>
-    </p:extLst>
-  </p:cSld>
-  <p:clrMapOvr>
-    <a:masterClrMapping/>
-  </p:clrMapOvr>
-</p:notes>
-</file>
-
-<file path=ppt/notesSlides/notesSlide20.xml><?xml version="1.0" encoding="utf-8"?>
-<p:notes xmlns:a="http://schemas.openxmlformats.org/drawingml/2006/main" xmlns:r="http://schemas.openxmlformats.org/officeDocument/2006/relationships" xmlns:p="http://schemas.openxmlformats.org/presentationml/2006/main">
-  <p:cSld>
-    <p:spTree>
-      <p:nvGrpSpPr>
-        <p:cNvPr id="1" name=""/>
-        <p:cNvGrpSpPr/>
-        <p:nvPr/>
-      </p:nvGrpSpPr>
-      <p:grpSpPr>
-        <a:xfrm>
-          <a:off x="0" y="0"/>
-          <a:ext cx="0" cy="0"/>
-          <a:chOff x="0" y="0"/>
-          <a:chExt cx="0" cy="0"/>
-        </a:xfrm>
-      </p:grpSpPr>
-      <p:sp>
-        <p:nvSpPr>
-          <p:cNvPr id="2" name="Slide Image Placeholder 1"/>
-          <p:cNvSpPr>
-            <a:spLocks noGrp="1" noRot="1" noChangeAspect="1"/>
-          </p:cNvSpPr>
-          <p:nvPr>
-            <p:ph type="sldImg"/>
-          </p:nvPr>
-        </p:nvSpPr>
-        <p:spPr/>
-      </p:sp>
-      <p:sp>
-        <p:nvSpPr>
-          <p:cNvPr id="3" name="Notes Placeholder 2"/>
-          <p:cNvSpPr>
-            <a:spLocks noGrp="1"/>
-          </p:cNvSpPr>
-          <p:nvPr>
-            <p:ph type="body" idx="1"/>
-          </p:nvPr>
-        </p:nvSpPr>
-        <p:spPr/>
-        <p:txBody>
-          <a:bodyPr/>
-          <a:lstStyle/>
-          <a:p>
-            <a:r>
-              <a:rPr lang="en-US" dirty="0"/>
-              <a:t>Ansage: „Wer drankommt, liest vor. Alle prüfen mit.“ Typische Fehler: Adel als Steuerzahler, Klerus mit Wehrdienst (befreit), Dritter Stand (Bauern und Bürger) mit Vorrechten. Dann: „Verbessert mit Grün.“</a:t>
-            </a:r>
-            <a:endParaRPr lang="en-US" dirty="0"/>
-          </a:p>
-        </p:txBody>
-      </p:sp>
-      <p:sp>
-        <p:nvSpPr>
-          <p:cNvPr id="4" name="Slide Number Placeholder 3"/>
-          <p:cNvSpPr>
-            <a:spLocks noGrp="1"/>
-          </p:cNvSpPr>
-          <p:nvPr>
-            <p:ph type="sldNum" sz="quarter" idx="10"/>
-          </p:nvPr>
-        </p:nvSpPr>
-        <p:spPr/>
-        <p:txBody>
-          <a:bodyPr/>
-          <a:lstStyle/>
-          <a:p>
-            <a:fld id="{F7021451-1387-4CA6-816F-3879F97B5CBC}" type="slidenum">
-              <a:rPr lang="en-US"/>
-              <a:t>20</a:t>
-            </a:fld>
-            <a:endParaRPr lang="en-US"/>
-          </a:p>
-        </p:txBody>
-      </p:sp>
-    </p:spTree>
-    <p:extLst>
-      <p:ext uri="{BB962C8B-B14F-4D97-AF65-F5344CB8AC3E}">
-        <p14:creationId xmlns:p14="http://schemas.microsoft.com/office/powerpoint/2010/main" val="1024086991"/>
-      </p:ext>
-    </p:extLst>
-  </p:cSld>
-  <p:clrMapOvr>
-    <a:masterClrMapping/>
-  </p:clrMapOvr>
-</p:notes>
-</file>
-
-<file path=ppt/notesSlides/notesSlide21.xml><?xml version="1.0" encoding="utf-8"?>
-<p:notes xmlns:a="http://schemas.openxmlformats.org/drawingml/2006/main" xmlns:r="http://schemas.openxmlformats.org/officeDocument/2006/relationships" xmlns:p="http://schemas.openxmlformats.org/presentationml/2006/main">
-  <p:cSld>
-    <p:spTree>
-      <p:nvGrpSpPr>
-        <p:cNvPr id="1" name=""/>
-        <p:cNvGrpSpPr/>
-        <p:nvPr/>
-      </p:nvGrpSpPr>
-      <p:grpSpPr>
-        <a:xfrm>
-          <a:off x="0" y="0"/>
-          <a:ext cx="0" cy="0"/>
-          <a:chOff x="0" y="0"/>
-          <a:chExt cx="0" cy="0"/>
-        </a:xfrm>
-      </p:grpSpPr>
-      <p:sp>
-        <p:nvSpPr>
-          <p:cNvPr id="2" name="Slide Image Placeholder 1"/>
-          <p:cNvSpPr>
-            <a:spLocks noGrp="1" noRot="1" noChangeAspect="1"/>
-          </p:cNvSpPr>
-          <p:nvPr>
-            <p:ph type="sldImg"/>
-          </p:nvPr>
-        </p:nvSpPr>
-        <p:spPr/>
-      </p:sp>
-      <p:sp>
-        <p:nvSpPr>
-          <p:cNvPr id="3" name="Notes Placeholder 2"/>
-          <p:cNvSpPr>
-            <a:spLocks noGrp="1"/>
-          </p:cNvSpPr>
-          <p:nvPr>
-            <p:ph type="body" idx="1"/>
-          </p:nvPr>
-        </p:nvSpPr>
-        <p:spPr/>
-        <p:txBody>
-          <a:bodyPr/>
-          <a:lstStyle/>
-          <a:p>
-            <a:r>
-              <a:rPr lang="en-US" dirty="0"/>
-              <a:t>Ansage: „Stifte liegen. Das ist eure Lernliste für den Test. Fragen zum Test?“ Die Liste bewusst kurz halten; Testtermin noch einmal nennen.</a:t>
-            </a:r>
-            <a:endParaRPr lang="en-US" dirty="0"/>
-          </a:p>
-        </p:txBody>
-      </p:sp>
-      <p:sp>
-        <p:nvSpPr>
-          <p:cNvPr id="4" name="Slide Number Placeholder 3"/>
-          <p:cNvSpPr>
-            <a:spLocks noGrp="1"/>
-          </p:cNvSpPr>
-          <p:nvPr>
-            <p:ph type="sldNum" sz="quarter" idx="10"/>
-          </p:nvPr>
-        </p:nvSpPr>
-        <p:spPr/>
-        <p:txBody>
-          <a:bodyPr/>
-          <a:lstStyle/>
-          <a:p>
-            <a:fld id="{F7021451-1387-4CA6-816F-3879F97B5CBC}" type="slidenum">
-              <a:rPr lang="en-US"/>
-              <a:t>21</a:t>
             </a:fld>
             <a:endParaRPr lang="en-US"/>
           </a:p>
@@ -2992,11 +2725,11 @@
         <p:spPr>
           <a:xfrm>
             <a:off x="548640" y="3154680"/>
-            <a:ext cx="11109960" cy="2514600"/>
+            <a:ext cx="11109960" cy="2377440"/>
           </a:xfrm>
           <a:prstGeom prst="roundRect">
             <a:avLst>
-              <a:gd name="adj" fmla="val 2909"/>
+              <a:gd name="adj" fmla="val 3077"/>
             </a:avLst>
           </a:prstGeom>
           <a:solidFill>
@@ -3035,7 +2768,7 @@
               <a:buNone/>
             </a:pPr>
             <a:r>
-              <a:rPr lang="en-US" sz="1900" b="1" dirty="0">
+              <a:rPr lang="en-US" sz="2400" b="1" dirty="0">
                 <a:solidFill>
                   <a:srgbClr val="D9534F"/>
                 </a:solidFill>
@@ -3045,7 +2778,7 @@
               </a:rPr>
               <a:t>Begründung</a:t>
             </a:r>
-            <a:endParaRPr lang="en-US" sz="1900" dirty="0"/>
+            <a:endParaRPr lang="en-US" sz="2400" dirty="0"/>
           </a:p>
         </p:txBody>
       </p:sp>
@@ -3096,12 +2829,12 @@
         </p:nvSpPr>
         <p:spPr>
           <a:xfrm>
-            <a:off x="548640" y="5897880"/>
-            <a:ext cx="11109960" cy="548640"/>
+            <a:off x="548640" y="5669280"/>
+            <a:ext cx="11109960" cy="777240"/>
           </a:xfrm>
           <a:prstGeom prst="roundRect">
             <a:avLst>
-              <a:gd name="adj" fmla="val 13333"/>
+              <a:gd name="adj" fmla="val 9412"/>
             </a:avLst>
           </a:prstGeom>
           <a:solidFill>
@@ -3118,8 +2851,8 @@
         </p:nvSpPr>
         <p:spPr>
           <a:xfrm>
-            <a:off x="822960" y="5897880"/>
-            <a:ext cx="10607040" cy="548640"/>
+            <a:off x="822960" y="5669280"/>
+            <a:ext cx="10607040" cy="777240"/>
           </a:xfrm>
           <a:prstGeom prst="rect">
             <a:avLst/>
@@ -3135,7 +2868,7 @@
               <a:buNone/>
             </a:pPr>
             <a:r>
-              <a:rPr lang="en-US" sz="1700" b="1" dirty="0">
+              <a:rPr lang="en-US" sz="2400" b="1" dirty="0">
                 <a:solidFill>
                   <a:srgbClr val="FFFFFF"/>
                 </a:solidFill>
@@ -3149,7 +2882,7 @@
               <a:buNone/>
             </a:pPr>
             <a:r>
-              <a:rPr lang="en-US" sz="1700" dirty="0">
+              <a:rPr lang="en-US" sz="2400" dirty="0">
                 <a:solidFill>
                   <a:srgbClr val="FFFFFF"/>
                 </a:solidFill>
@@ -3159,7 +2892,7 @@
               </a:rPr>
               <a:t>Stimmt deine Begründung mit der Folie überein?</a:t>
             </a:r>
-            <a:endParaRPr lang="en-US" sz="1700" dirty="0"/>
+            <a:endParaRPr lang="en-US" sz="2400" dirty="0"/>
           </a:p>
         </p:txBody>
       </p:sp>
@@ -3479,12 +3212,12 @@
         </p:nvSpPr>
         <p:spPr>
           <a:xfrm>
-            <a:off x="548640" y="5897880"/>
-            <a:ext cx="11109960" cy="548640"/>
+            <a:off x="548640" y="5669280"/>
+            <a:ext cx="11109960" cy="777240"/>
           </a:xfrm>
           <a:prstGeom prst="roundRect">
             <a:avLst>
-              <a:gd name="adj" fmla="val 13333"/>
+              <a:gd name="adj" fmla="val 9412"/>
             </a:avLst>
           </a:prstGeom>
           <a:solidFill>
@@ -3501,8 +3234,8 @@
         </p:nvSpPr>
         <p:spPr>
           <a:xfrm>
-            <a:off x="822960" y="5897880"/>
-            <a:ext cx="10607040" cy="548640"/>
+            <a:off x="822960" y="5669280"/>
+            <a:ext cx="10607040" cy="777240"/>
           </a:xfrm>
           <a:prstGeom prst="rect">
             <a:avLst/>
@@ -3518,7 +3251,7 @@
               <a:buNone/>
             </a:pPr>
             <a:r>
-              <a:rPr lang="en-US" sz="1700" b="1" dirty="0">
+              <a:rPr lang="en-US" sz="2400" b="1" dirty="0">
                 <a:solidFill>
                   <a:srgbClr val="FFFFFF"/>
                 </a:solidFill>
@@ -3532,7 +3265,7 @@
               <a:buNone/>
             </a:pPr>
             <a:r>
-              <a:rPr lang="en-US" sz="1700" dirty="0">
+              <a:rPr lang="en-US" sz="2400" dirty="0">
                 <a:solidFill>
                   <a:srgbClr val="FFFFFF"/>
                 </a:solidFill>
@@ -3546,7 +3279,7 @@
               <a:buNone/>
             </a:pPr>
             <a:r>
-              <a:rPr lang="en-US" sz="1700" i="1" dirty="0">
+              <a:rPr lang="en-US" sz="2400" i="1" dirty="0">
                 <a:solidFill>
                   <a:srgbClr val="CADCFC"/>
                 </a:solidFill>
@@ -3556,7 +3289,7 @@
               </a:rPr>
               <a:t>Bei „falsch“: Aussage verbessern.</a:t>
             </a:r>
-            <a:endParaRPr lang="en-US" sz="1700" dirty="0"/>
+            <a:endParaRPr lang="en-US" sz="2400" dirty="0"/>
           </a:p>
         </p:txBody>
       </p:sp>
@@ -3818,11 +3551,11 @@
         <p:spPr>
           <a:xfrm>
             <a:off x="548640" y="3154680"/>
-            <a:ext cx="11109960" cy="2514600"/>
+            <a:ext cx="11109960" cy="2377440"/>
           </a:xfrm>
           <a:prstGeom prst="roundRect">
             <a:avLst>
-              <a:gd name="adj" fmla="val 2909"/>
+              <a:gd name="adj" fmla="val 3077"/>
             </a:avLst>
           </a:prstGeom>
           <a:solidFill>
@@ -3861,7 +3594,7 @@
               <a:buNone/>
             </a:pPr>
             <a:r>
-              <a:rPr lang="en-US" sz="1900" b="1" dirty="0">
+              <a:rPr lang="en-US" sz="2400" b="1" dirty="0">
                 <a:solidFill>
                   <a:srgbClr val="2E9E6B"/>
                 </a:solidFill>
@@ -3871,7 +3604,7 @@
               </a:rPr>
               <a:t>Begründung</a:t>
             </a:r>
-            <a:endParaRPr lang="en-US" sz="1900" dirty="0"/>
+            <a:endParaRPr lang="en-US" sz="2400" dirty="0"/>
           </a:p>
         </p:txBody>
       </p:sp>
@@ -3922,12 +3655,12 @@
         </p:nvSpPr>
         <p:spPr>
           <a:xfrm>
-            <a:off x="548640" y="5897880"/>
-            <a:ext cx="11109960" cy="548640"/>
+            <a:off x="548640" y="5669280"/>
+            <a:ext cx="11109960" cy="777240"/>
           </a:xfrm>
           <a:prstGeom prst="roundRect">
             <a:avLst>
-              <a:gd name="adj" fmla="val 13333"/>
+              <a:gd name="adj" fmla="val 9412"/>
             </a:avLst>
           </a:prstGeom>
           <a:solidFill>
@@ -3944,8 +3677,8 @@
         </p:nvSpPr>
         <p:spPr>
           <a:xfrm>
-            <a:off x="822960" y="5897880"/>
-            <a:ext cx="10607040" cy="548640"/>
+            <a:off x="822960" y="5669280"/>
+            <a:ext cx="10607040" cy="777240"/>
           </a:xfrm>
           <a:prstGeom prst="rect">
             <a:avLst/>
@@ -3961,7 +3694,7 @@
               <a:buNone/>
             </a:pPr>
             <a:r>
-              <a:rPr lang="en-US" sz="1700" b="1" dirty="0">
+              <a:rPr lang="en-US" sz="2400" b="1" dirty="0">
                 <a:solidFill>
                   <a:srgbClr val="FFFFFF"/>
                 </a:solidFill>
@@ -3975,7 +3708,7 @@
               <a:buNone/>
             </a:pPr>
             <a:r>
-              <a:rPr lang="en-US" sz="1700" dirty="0">
+              <a:rPr lang="en-US" sz="2400" dirty="0">
                 <a:solidFill>
                   <a:srgbClr val="FFFFFF"/>
                 </a:solidFill>
@@ -3985,7 +3718,7 @@
               </a:rPr>
               <a:t>Stimmt deine Begründung mit der Folie überein?</a:t>
             </a:r>
-            <a:endParaRPr lang="en-US" sz="1700" dirty="0"/>
+            <a:endParaRPr lang="en-US" sz="2400" dirty="0"/>
           </a:p>
         </p:txBody>
       </p:sp>
@@ -4305,12 +4038,12 @@
         </p:nvSpPr>
         <p:spPr>
           <a:xfrm>
-            <a:off x="548640" y="5897880"/>
-            <a:ext cx="11109960" cy="548640"/>
+            <a:off x="548640" y="5669280"/>
+            <a:ext cx="11109960" cy="777240"/>
           </a:xfrm>
           <a:prstGeom prst="roundRect">
             <a:avLst>
-              <a:gd name="adj" fmla="val 13333"/>
+              <a:gd name="adj" fmla="val 9412"/>
             </a:avLst>
           </a:prstGeom>
           <a:solidFill>
@@ -4327,8 +4060,8 @@
         </p:nvSpPr>
         <p:spPr>
           <a:xfrm>
-            <a:off x="822960" y="5897880"/>
-            <a:ext cx="10607040" cy="548640"/>
+            <a:off x="822960" y="5669280"/>
+            <a:ext cx="10607040" cy="777240"/>
           </a:xfrm>
           <a:prstGeom prst="rect">
             <a:avLst/>
@@ -4344,7 +4077,7 @@
               <a:buNone/>
             </a:pPr>
             <a:r>
-              <a:rPr lang="en-US" sz="1700" b="1" dirty="0">
+              <a:rPr lang="en-US" sz="2400" b="1" dirty="0">
                 <a:solidFill>
                   <a:srgbClr val="FFFFFF"/>
                 </a:solidFill>
@@ -4358,7 +4091,7 @@
               <a:buNone/>
             </a:pPr>
             <a:r>
-              <a:rPr lang="en-US" sz="1700" dirty="0">
+              <a:rPr lang="en-US" sz="2400" dirty="0">
                 <a:solidFill>
                   <a:srgbClr val="FFFFFF"/>
                 </a:solidFill>
@@ -4372,7 +4105,7 @@
               <a:buNone/>
             </a:pPr>
             <a:r>
-              <a:rPr lang="en-US" sz="1700" i="1" dirty="0">
+              <a:rPr lang="en-US" sz="2400" i="1" dirty="0">
                 <a:solidFill>
                   <a:srgbClr val="CADCFC"/>
                 </a:solidFill>
@@ -4382,7 +4115,7 @@
               </a:rPr>
               <a:t>Bei „falsch“: Aussage verbessern.</a:t>
             </a:r>
-            <a:endParaRPr lang="en-US" sz="1700" dirty="0"/>
+            <a:endParaRPr lang="en-US" sz="2400" dirty="0"/>
           </a:p>
         </p:txBody>
       </p:sp>
@@ -4644,11 +4377,11 @@
         <p:spPr>
           <a:xfrm>
             <a:off x="548640" y="3154680"/>
-            <a:ext cx="11109960" cy="2514600"/>
+            <a:ext cx="11109960" cy="2377440"/>
           </a:xfrm>
           <a:prstGeom prst="roundRect">
             <a:avLst>
-              <a:gd name="adj" fmla="val 2909"/>
+              <a:gd name="adj" fmla="val 3077"/>
             </a:avLst>
           </a:prstGeom>
           <a:solidFill>
@@ -4687,7 +4420,7 @@
               <a:buNone/>
             </a:pPr>
             <a:r>
-              <a:rPr lang="en-US" sz="1900" b="1" dirty="0">
+              <a:rPr lang="en-US" sz="2400" b="1" dirty="0">
                 <a:solidFill>
                   <a:srgbClr val="D9534F"/>
                 </a:solidFill>
@@ -4697,7 +4430,7 @@
               </a:rPr>
               <a:t>Begründung</a:t>
             </a:r>
-            <a:endParaRPr lang="en-US" sz="1900" dirty="0"/>
+            <a:endParaRPr lang="en-US" sz="2400" dirty="0"/>
           </a:p>
         </p:txBody>
       </p:sp>
@@ -4748,12 +4481,12 @@
         </p:nvSpPr>
         <p:spPr>
           <a:xfrm>
-            <a:off x="548640" y="5897880"/>
-            <a:ext cx="11109960" cy="548640"/>
+            <a:off x="548640" y="5669280"/>
+            <a:ext cx="11109960" cy="777240"/>
           </a:xfrm>
           <a:prstGeom prst="roundRect">
             <a:avLst>
-              <a:gd name="adj" fmla="val 13333"/>
+              <a:gd name="adj" fmla="val 9412"/>
             </a:avLst>
           </a:prstGeom>
           <a:solidFill>
@@ -4770,8 +4503,8 @@
         </p:nvSpPr>
         <p:spPr>
           <a:xfrm>
-            <a:off x="822960" y="5897880"/>
-            <a:ext cx="10607040" cy="548640"/>
+            <a:off x="822960" y="5669280"/>
+            <a:ext cx="10607040" cy="777240"/>
           </a:xfrm>
           <a:prstGeom prst="rect">
             <a:avLst/>
@@ -4787,7 +4520,7 @@
               <a:buNone/>
             </a:pPr>
             <a:r>
-              <a:rPr lang="en-US" sz="1700" b="1" dirty="0">
+              <a:rPr lang="en-US" sz="2400" b="1" dirty="0">
                 <a:solidFill>
                   <a:srgbClr val="FFFFFF"/>
                 </a:solidFill>
@@ -4801,7 +4534,7 @@
               <a:buNone/>
             </a:pPr>
             <a:r>
-              <a:rPr lang="en-US" sz="1700" dirty="0">
+              <a:rPr lang="en-US" sz="2400" dirty="0">
                 <a:solidFill>
                   <a:srgbClr val="FFFFFF"/>
                 </a:solidFill>
@@ -4811,7 +4544,7 @@
               </a:rPr>
               <a:t>Stimmt deine Begründung mit der Folie überein?</a:t>
             </a:r>
-            <a:endParaRPr lang="en-US" sz="1700" dirty="0"/>
+            <a:endParaRPr lang="en-US" sz="2400" dirty="0"/>
           </a:p>
         </p:txBody>
       </p:sp>
@@ -5011,12 +4744,12 @@
         </p:nvSpPr>
         <p:spPr>
           <a:xfrm>
-            <a:off x="548640" y="1417320"/>
-            <a:ext cx="11109960" cy="1828800"/>
+            <a:off x="548640" y="1371600"/>
+            <a:ext cx="11109960" cy="1920240"/>
           </a:xfrm>
           <a:prstGeom prst="roundRect">
             <a:avLst>
-              <a:gd name="adj" fmla="val 4000"/>
+              <a:gd name="adj" fmla="val 3810"/>
             </a:avLst>
           </a:prstGeom>
           <a:solidFill>
@@ -5038,8 +4771,8 @@
         </p:nvSpPr>
         <p:spPr>
           <a:xfrm>
-            <a:off x="868680" y="1508760"/>
-            <a:ext cx="10469880" cy="1645920"/>
+            <a:off x="868680" y="1417320"/>
+            <a:ext cx="10469880" cy="1828800"/>
           </a:xfrm>
           <a:prstGeom prst="rect">
             <a:avLst/>
@@ -5055,7 +4788,7 @@
               <a:buNone/>
             </a:pPr>
             <a:r>
-              <a:rPr lang="en-US" sz="2100" b="1" dirty="0">
+              <a:rPr lang="en-US" sz="2400" b="1" dirty="0">
                 <a:solidFill>
                   <a:srgbClr val="1E2761"/>
                 </a:solidFill>
@@ -5069,7 +4802,7 @@
               <a:buNone/>
             </a:pPr>
             <a:r>
-              <a:rPr lang="en-US" sz="2100" dirty="0">
+              <a:rPr lang="en-US" sz="2400" dirty="0">
                 <a:solidFill>
                   <a:srgbClr val="1E2761"/>
                 </a:solidFill>
@@ -5083,7 +4816,7 @@
               <a:buNone/>
             </a:pPr>
             <a:r>
-              <a:rPr lang="en-US" sz="2100" b="1" dirty="0">
+              <a:rPr lang="en-US" sz="2400" b="1" dirty="0">
                 <a:solidFill>
                   <a:srgbClr val="1E2761"/>
                 </a:solidFill>
@@ -5097,7 +4830,7 @@
               <a:buNone/>
             </a:pPr>
             <a:r>
-              <a:rPr lang="en-US" sz="2100" dirty="0">
+              <a:rPr lang="en-US" sz="2400" dirty="0">
                 <a:solidFill>
                   <a:srgbClr val="1E2761"/>
                 </a:solidFill>
@@ -5111,7 +4844,7 @@
               <a:buNone/>
             </a:pPr>
             <a:r>
-              <a:rPr lang="en-US" sz="2100" b="1" dirty="0">
+              <a:rPr lang="en-US" sz="2400" b="1" dirty="0">
                 <a:solidFill>
                   <a:srgbClr val="1E2761"/>
                 </a:solidFill>
@@ -5125,7 +4858,7 @@
               <a:buNone/>
             </a:pPr>
             <a:r>
-              <a:rPr lang="en-US" sz="2100" dirty="0">
+              <a:rPr lang="en-US" sz="2400" dirty="0">
                 <a:solidFill>
                   <a:srgbClr val="1E2761"/>
                 </a:solidFill>
@@ -5135,7 +4868,7 @@
               </a:rPr>
               <a:t> herrschte.</a:t>
             </a:r>
-            <a:endParaRPr lang="en-US" sz="2100" dirty="0"/>
+            <a:endParaRPr lang="en-US" sz="2400" dirty="0"/>
           </a:p>
         </p:txBody>
       </p:sp>
@@ -5147,12 +4880,12 @@
         </p:nvSpPr>
         <p:spPr>
           <a:xfrm>
-            <a:off x="548640" y="3383280"/>
-            <a:ext cx="11109960" cy="548640"/>
+            <a:off x="548640" y="3401568"/>
+            <a:ext cx="11109960" cy="1143000"/>
           </a:xfrm>
           <a:prstGeom prst="roundRect">
             <a:avLst>
-              <a:gd name="adj" fmla="val 13333"/>
+              <a:gd name="adj" fmla="val 6400"/>
             </a:avLst>
           </a:prstGeom>
           <a:solidFill>
@@ -5169,8 +4902,8 @@
         </p:nvSpPr>
         <p:spPr>
           <a:xfrm>
-            <a:off x="822960" y="3383280"/>
-            <a:ext cx="10607040" cy="548640"/>
+            <a:off x="822960" y="3401568"/>
+            <a:ext cx="10607040" cy="1143000"/>
           </a:xfrm>
           <a:prstGeom prst="rect">
             <a:avLst/>
@@ -5186,7 +4919,7 @@
               <a:buNone/>
             </a:pPr>
             <a:r>
-              <a:rPr lang="en-US" sz="1700" b="1" dirty="0">
+              <a:rPr lang="en-US" sz="2400" b="1" dirty="0">
                 <a:solidFill>
                   <a:srgbClr val="5B6B8C"/>
                 </a:solidFill>
@@ -5200,7 +4933,7 @@
               <a:buNone/>
             </a:pPr>
             <a:r>
-              <a:rPr lang="en-US" sz="1900" dirty="0">
+              <a:rPr lang="en-US" sz="2400" dirty="0">
                 <a:solidFill>
                   <a:srgbClr val="1E2761"/>
                 </a:solidFill>
@@ -5210,7 +4943,7 @@
               </a:rPr>
               <a:t>Ludwig XIV. verkündet 1661: „Ich regiere jetzt selbst.“</a:t>
             </a:r>
-            <a:endParaRPr lang="en-US" sz="1900" dirty="0"/>
+            <a:endParaRPr lang="en-US" sz="2400" dirty="0"/>
           </a:p>
         </p:txBody>
       </p:sp>
@@ -5222,12 +4955,12 @@
         </p:nvSpPr>
         <p:spPr>
           <a:xfrm>
-            <a:off x="548640" y="4069080"/>
-            <a:ext cx="11109960" cy="1645920"/>
+            <a:off x="548640" y="4645152"/>
+            <a:ext cx="11109960" cy="886968"/>
           </a:xfrm>
           <a:prstGeom prst="roundRect">
             <a:avLst>
-              <a:gd name="adj" fmla="val 4444"/>
+              <a:gd name="adj" fmla="val 8247"/>
             </a:avLst>
           </a:prstGeom>
           <a:solidFill>
@@ -5244,24 +4977,24 @@
         </p:nvSpPr>
         <p:spPr>
           <a:xfrm>
-            <a:off x="777240" y="4187952"/>
-            <a:ext cx="10607040" cy="365760"/>
-          </a:xfrm>
-          <a:prstGeom prst="rect">
-            <a:avLst/>
-          </a:prstGeom>
-          <a:noFill/>
-          <a:ln/>
-        </p:spPr>
-        <p:txBody>
-          <a:bodyPr wrap="square" lIns="0" tIns="0" rIns="0" bIns="0" rtlCol="0" anchor="t"/>
-          <a:lstStyle/>
-          <a:p>
-            <a:pPr indent="0" marL="0">
-              <a:buNone/>
-            </a:pPr>
-            <a:r>
-              <a:rPr lang="en-US" sz="1900" b="1" dirty="0">
+            <a:off x="822960" y="4645152"/>
+            <a:ext cx="10607040" cy="886968"/>
+          </a:xfrm>
+          <a:prstGeom prst="rect">
+            <a:avLst/>
+          </a:prstGeom>
+          <a:noFill/>
+          <a:ln/>
+        </p:spPr>
+        <p:txBody>
+          <a:bodyPr wrap="square" lIns="0" tIns="0" rIns="0" bIns="0" rtlCol="0" anchor="ctr"/>
+          <a:lstStyle/>
+          <a:p>
+            <a:pPr indent="0" marL="0">
+              <a:buNone/>
+            </a:pPr>
+            <a:r>
+              <a:rPr lang="en-US" sz="2400" b="1" dirty="0">
                 <a:solidFill>
                   <a:srgbClr val="D9534F"/>
                 </a:solidFill>
@@ -5269,38 +5002,13 @@
                 <a:ea typeface="Cambria" pitchFamily="34" charset="-122"/>
                 <a:cs typeface="Cambria" pitchFamily="34" charset="-120"/>
               </a:rPr>
-              <a:t>Test</a:t>
-            </a:r>
-            <a:endParaRPr lang="en-US" sz="1900" dirty="0"/>
-          </a:p>
-        </p:txBody>
-      </p:sp>
-      <p:sp>
-        <p:nvSpPr>
-          <p:cNvPr id="10" name="Text 8"/>
-          <p:cNvSpPr txBox="1"/>
-          <p:nvPr/>
-        </p:nvSpPr>
-        <p:spPr>
-          <a:xfrm>
-            <a:off x="777240" y="4572000"/>
-            <a:ext cx="10607040" cy="1051560"/>
-          </a:xfrm>
-          <a:prstGeom prst="rect">
-            <a:avLst/>
-          </a:prstGeom>
-          <a:noFill/>
-          <a:ln/>
-        </p:spPr>
-        <p:txBody>
-          <a:bodyPr wrap="square" lIns="0" tIns="0" rIns="0" bIns="0" rtlCol="0" anchor="t"/>
-          <a:lstStyle/>
-          <a:p>
-            <a:pPr indent="0" marL="0">
-              <a:buNone/>
-            </a:pPr>
-            <a:r>
-              <a:rPr lang="en-US" sz="2200" dirty="0">
+              <a:t>Test:   </a:t>
+            </a:r>
+            <a:pPr indent="0" marL="0">
+              <a:buNone/>
+            </a:pPr>
+            <a:r>
+              <a:rPr lang="en-US" sz="2400" dirty="0">
                 <a:solidFill>
                   <a:srgbClr val="1E2761"/>
                 </a:solidFill>
@@ -5314,7 +5022,7 @@
               <a:buNone/>
             </a:pPr>
             <a:r>
-              <a:rPr lang="en-US" sz="2200" b="1" dirty="0">
+              <a:rPr lang="en-US" sz="2400" b="1" dirty="0">
                 <a:solidFill>
                   <a:srgbClr val="1E2761"/>
                 </a:solidFill>
@@ -5328,7 +5036,7 @@
               <a:buNone/>
             </a:pPr>
             <a:r>
-              <a:rPr lang="en-US" sz="2200" dirty="0">
+              <a:rPr lang="en-US" sz="2400" dirty="0">
                 <a:solidFill>
                   <a:srgbClr val="1E2761"/>
                 </a:solidFill>
@@ -5338,24 +5046,24 @@
               </a:rPr>
               <a:t> → Absolutismus.</a:t>
             </a:r>
-            <a:endParaRPr lang="en-US" sz="2200" dirty="0"/>
-          </a:p>
-        </p:txBody>
-      </p:sp>
-      <p:sp>
-        <p:nvSpPr>
-          <p:cNvPr id="11" name="Shape 9"/>
+            <a:endParaRPr lang="en-US" sz="2400" dirty="0"/>
+          </a:p>
+        </p:txBody>
+      </p:sp>
+      <p:sp>
+        <p:nvSpPr>
+          <p:cNvPr id="10" name="Shape 8"/>
           <p:cNvSpPr/>
           <p:nvPr/>
         </p:nvSpPr>
         <p:spPr>
           <a:xfrm>
-            <a:off x="548640" y="5897880"/>
-            <a:ext cx="11109960" cy="548640"/>
+            <a:off x="548640" y="5669280"/>
+            <a:ext cx="11109960" cy="777240"/>
           </a:xfrm>
           <a:prstGeom prst="roundRect">
             <a:avLst>
-              <a:gd name="adj" fmla="val 13333"/>
+              <a:gd name="adj" fmla="val 9412"/>
             </a:avLst>
           </a:prstGeom>
           <a:solidFill>
@@ -5366,74 +5074,74 @@
       </p:sp>
       <p:sp>
         <p:nvSpPr>
+          <p:cNvPr id="11" name="Text 9"/>
+          <p:cNvSpPr txBox="1"/>
+          <p:nvPr/>
+        </p:nvSpPr>
+        <p:spPr>
+          <a:xfrm>
+            <a:off x="822960" y="5669280"/>
+            <a:ext cx="10607040" cy="777240"/>
+          </a:xfrm>
+          <a:prstGeom prst="rect">
+            <a:avLst/>
+          </a:prstGeom>
+          <a:noFill/>
+          <a:ln/>
+        </p:spPr>
+        <p:txBody>
+          <a:bodyPr wrap="square" lIns="0" tIns="0" rIns="0" bIns="0" rtlCol="0" anchor="ctr"/>
+          <a:lstStyle/>
+          <a:p>
+            <a:pPr indent="0" marL="0">
+              <a:buNone/>
+            </a:pPr>
+            <a:r>
+              <a:rPr lang="en-US" sz="2400" b="1" dirty="0">
+                <a:solidFill>
+                  <a:srgbClr val="FFFFFF"/>
+                </a:solidFill>
+                <a:latin typeface="Calibri" pitchFamily="34" charset="0"/>
+                <a:ea typeface="Calibri" pitchFamily="34" charset="-122"/>
+                <a:cs typeface="Calibri" pitchFamily="34" charset="-120"/>
+              </a:rPr>
+              <a:t>Jetzt: </a:t>
+            </a:r>
+            <a:pPr indent="0" marL="0">
+              <a:buNone/>
+            </a:pPr>
+            <a:r>
+              <a:rPr lang="en-US" sz="2400" dirty="0">
+                <a:solidFill>
+                  <a:srgbClr val="FFFFFF"/>
+                </a:solidFill>
+                <a:latin typeface="Calibri" pitchFamily="34" charset="0"/>
+                <a:ea typeface="Calibri" pitchFamily="34" charset="-122"/>
+                <a:cs typeface="Calibri" pitchFamily="34" charset="-120"/>
+              </a:rPr>
+              <a:t>Schreibe den Merksatz mit Beispiel ab und rahme ihn rot ein.      </a:t>
+            </a:r>
+            <a:pPr indent="0" marL="0">
+              <a:buNone/>
+            </a:pPr>
+            <a:r>
+              <a:rPr lang="en-US" sz="2400" i="1" dirty="0">
+                <a:solidFill>
+                  <a:srgbClr val="CADCFC"/>
+                </a:solidFill>
+                <a:latin typeface="Calibri" pitchFamily="34" charset="0"/>
+                <a:ea typeface="Calibri" pitchFamily="34" charset="-122"/>
+                <a:cs typeface="Calibri" pitchFamily="34" charset="-120"/>
+              </a:rPr>
+              <a:t>Fertig? Stift hinlegen.</a:t>
+            </a:r>
+            <a:endParaRPr lang="en-US" sz="2400" dirty="0"/>
+          </a:p>
+        </p:txBody>
+      </p:sp>
+      <p:sp>
+        <p:nvSpPr>
           <p:cNvPr id="12" name="Text 10"/>
-          <p:cNvSpPr txBox="1"/>
-          <p:nvPr/>
-        </p:nvSpPr>
-        <p:spPr>
-          <a:xfrm>
-            <a:off x="822960" y="5897880"/>
-            <a:ext cx="10607040" cy="548640"/>
-          </a:xfrm>
-          <a:prstGeom prst="rect">
-            <a:avLst/>
-          </a:prstGeom>
-          <a:noFill/>
-          <a:ln/>
-        </p:spPr>
-        <p:txBody>
-          <a:bodyPr wrap="square" lIns="0" tIns="0" rIns="0" bIns="0" rtlCol="0" anchor="ctr"/>
-          <a:lstStyle/>
-          <a:p>
-            <a:pPr indent="0" marL="0">
-              <a:buNone/>
-            </a:pPr>
-            <a:r>
-              <a:rPr lang="en-US" sz="1700" b="1" dirty="0">
-                <a:solidFill>
-                  <a:srgbClr val="FFFFFF"/>
-                </a:solidFill>
-                <a:latin typeface="Calibri" pitchFamily="34" charset="0"/>
-                <a:ea typeface="Calibri" pitchFamily="34" charset="-122"/>
-                <a:cs typeface="Calibri" pitchFamily="34" charset="-120"/>
-              </a:rPr>
-              <a:t>Jetzt: </a:t>
-            </a:r>
-            <a:pPr indent="0" marL="0">
-              <a:buNone/>
-            </a:pPr>
-            <a:r>
-              <a:rPr lang="en-US" sz="1700" dirty="0">
-                <a:solidFill>
-                  <a:srgbClr val="FFFFFF"/>
-                </a:solidFill>
-                <a:latin typeface="Calibri" pitchFamily="34" charset="0"/>
-                <a:ea typeface="Calibri" pitchFamily="34" charset="-122"/>
-                <a:cs typeface="Calibri" pitchFamily="34" charset="-120"/>
-              </a:rPr>
-              <a:t>Schreibe den Merksatz mit Beispiel ab und rahme ihn rot ein.      </a:t>
-            </a:r>
-            <a:pPr indent="0" marL="0">
-              <a:buNone/>
-            </a:pPr>
-            <a:r>
-              <a:rPr lang="en-US" sz="1700" i="1" dirty="0">
-                <a:solidFill>
-                  <a:srgbClr val="CADCFC"/>
-                </a:solidFill>
-                <a:latin typeface="Calibri" pitchFamily="34" charset="0"/>
-                <a:ea typeface="Calibri" pitchFamily="34" charset="-122"/>
-                <a:cs typeface="Calibri" pitchFamily="34" charset="-120"/>
-              </a:rPr>
-              <a:t>Fertig? Stift hinlegen.</a:t>
-            </a:r>
-            <a:endParaRPr lang="en-US" sz="1700" dirty="0"/>
-          </a:p>
-        </p:txBody>
-      </p:sp>
-      <p:sp>
-        <p:nvSpPr>
-          <p:cNvPr id="13" name="Text 11"/>
           <p:cNvSpPr txBox="1"/>
           <p:nvPr/>
         </p:nvSpPr>
@@ -5472,7 +5180,7 @@
       </p:sp>
       <p:sp>
         <p:nvSpPr>
-          <p:cNvPr id="14" name="Text 12"/>
+          <p:cNvPr id="13" name="Text 11"/>
           <p:cNvSpPr txBox="1"/>
           <p:nvPr/>
         </p:nvSpPr>
@@ -5627,12 +5335,12 @@
         </p:nvSpPr>
         <p:spPr>
           <a:xfrm>
-            <a:off x="548640" y="1417320"/>
-            <a:ext cx="11109960" cy="1655064"/>
+            <a:off x="548640" y="1371600"/>
+            <a:ext cx="11109960" cy="2148840"/>
           </a:xfrm>
           <a:prstGeom prst="roundRect">
             <a:avLst>
-              <a:gd name="adj" fmla="val 4420"/>
+              <a:gd name="adj" fmla="val 3404"/>
             </a:avLst>
           </a:prstGeom>
           <a:solidFill>
@@ -5649,7 +5357,7 @@
         </p:nvSpPr>
         <p:spPr>
           <a:xfrm>
-            <a:off x="731520" y="1568196"/>
+            <a:off x="731520" y="1517904"/>
             <a:ext cx="384048" cy="384048"/>
           </a:xfrm>
           <a:prstGeom prst="ellipse">
@@ -5669,7 +5377,7 @@
         </p:nvSpPr>
         <p:spPr>
           <a:xfrm>
-            <a:off x="731520" y="1568196"/>
+            <a:off x="731520" y="1517904"/>
             <a:ext cx="384048" cy="384048"/>
           </a:xfrm>
           <a:prstGeom prst="rect">
@@ -5708,8 +5416,8 @@
         </p:nvSpPr>
         <p:spPr>
           <a:xfrm>
-            <a:off x="1280160" y="1554480"/>
-            <a:ext cx="10241280" cy="411480"/>
+            <a:off x="1280160" y="1481328"/>
+            <a:ext cx="10241280" cy="457200"/>
           </a:xfrm>
           <a:prstGeom prst="rect">
             <a:avLst/>
@@ -5725,7 +5433,7 @@
               <a:buNone/>
             </a:pPr>
             <a:r>
-              <a:rPr lang="en-US" sz="2100" b="1" dirty="0">
+              <a:rPr lang="en-US" sz="2400" b="1" dirty="0">
                 <a:solidFill>
                   <a:srgbClr val="1E2761"/>
                 </a:solidFill>
@@ -5735,7 +5443,7 @@
               </a:rPr>
               <a:t>Schreibe Ü2 an den Rand.</a:t>
             </a:r>
-            <a:endParaRPr lang="en-US" sz="2100" dirty="0"/>
+            <a:endParaRPr lang="en-US" sz="2400" dirty="0"/>
           </a:p>
         </p:txBody>
       </p:sp>
@@ -5747,7 +5455,7 @@
         </p:nvSpPr>
         <p:spPr>
           <a:xfrm>
-            <a:off x="731520" y="2052828"/>
+            <a:off x="731520" y="2048256"/>
             <a:ext cx="384048" cy="384048"/>
           </a:xfrm>
           <a:prstGeom prst="ellipse">
@@ -5767,7 +5475,7 @@
         </p:nvSpPr>
         <p:spPr>
           <a:xfrm>
-            <a:off x="731520" y="2052828"/>
+            <a:off x="731520" y="2048256"/>
             <a:ext cx="384048" cy="384048"/>
           </a:xfrm>
           <a:prstGeom prst="rect">
@@ -5806,8 +5514,8 @@
         </p:nvSpPr>
         <p:spPr>
           <a:xfrm>
-            <a:off x="1280160" y="2039112"/>
-            <a:ext cx="10241280" cy="411480"/>
+            <a:off x="1280160" y="2011680"/>
+            <a:ext cx="10241280" cy="868680"/>
           </a:xfrm>
           <a:prstGeom prst="rect">
             <a:avLst/>
@@ -5823,7 +5531,7 @@
               <a:buNone/>
             </a:pPr>
             <a:r>
-              <a:rPr lang="en-US" sz="2100" b="1" dirty="0">
+              <a:rPr lang="en-US" sz="2400" b="1" dirty="0">
                 <a:solidFill>
                   <a:srgbClr val="1E2761"/>
                 </a:solidFill>
@@ -5833,7 +5541,7 @@
               </a:rPr>
               <a:t>Schreibe Nummer + „Absolutismus“ oder „kein Absolutismus“.</a:t>
             </a:r>
-            <a:endParaRPr lang="en-US" sz="2100" dirty="0"/>
+            <a:endParaRPr lang="en-US" sz="2400" dirty="0"/>
           </a:p>
         </p:txBody>
       </p:sp>
@@ -5845,7 +5553,7 @@
         </p:nvSpPr>
         <p:spPr>
           <a:xfrm>
-            <a:off x="731520" y="2537460"/>
+            <a:off x="731520" y="2990088"/>
             <a:ext cx="384048" cy="384048"/>
           </a:xfrm>
           <a:prstGeom prst="ellipse">
@@ -5865,7 +5573,7 @@
         </p:nvSpPr>
         <p:spPr>
           <a:xfrm>
-            <a:off x="731520" y="2537460"/>
+            <a:off x="731520" y="2990088"/>
             <a:ext cx="384048" cy="384048"/>
           </a:xfrm>
           <a:prstGeom prst="rect">
@@ -5904,8 +5612,8 @@
         </p:nvSpPr>
         <p:spPr>
           <a:xfrm>
-            <a:off x="1280160" y="2523744"/>
-            <a:ext cx="10241280" cy="411480"/>
+            <a:off x="1280160" y="2953512"/>
+            <a:ext cx="10241280" cy="457200"/>
           </a:xfrm>
           <a:prstGeom prst="rect">
             <a:avLst/>
@@ -5921,7 +5629,7 @@
               <a:buNone/>
             </a:pPr>
             <a:r>
-              <a:rPr lang="en-US" sz="2100" b="1" dirty="0">
+              <a:rPr lang="en-US" sz="2400" b="1" dirty="0">
                 <a:solidFill>
                   <a:srgbClr val="1E2761"/>
                 </a:solidFill>
@@ -5931,7 +5639,7 @@
               </a:rPr>
               <a:t>Begründe mit dem Test: Kann jemand den König stoppen?</a:t>
             </a:r>
-            <a:endParaRPr lang="en-US" sz="2100" dirty="0"/>
+            <a:endParaRPr lang="en-US" sz="2400" dirty="0"/>
           </a:p>
         </p:txBody>
       </p:sp>
@@ -5943,12 +5651,12 @@
         </p:nvSpPr>
         <p:spPr>
           <a:xfrm>
-            <a:off x="548640" y="5897880"/>
-            <a:ext cx="11109960" cy="548640"/>
+            <a:off x="548640" y="5669280"/>
+            <a:ext cx="11109960" cy="777240"/>
           </a:xfrm>
           <a:prstGeom prst="roundRect">
             <a:avLst>
-              <a:gd name="adj" fmla="val 13333"/>
+              <a:gd name="adj" fmla="val 9412"/>
             </a:avLst>
           </a:prstGeom>
           <a:solidFill>
@@ -5965,8 +5673,8 @@
         </p:nvSpPr>
         <p:spPr>
           <a:xfrm>
-            <a:off x="822960" y="5897880"/>
-            <a:ext cx="10607040" cy="548640"/>
+            <a:off x="822960" y="5669280"/>
+            <a:ext cx="10607040" cy="777240"/>
           </a:xfrm>
           <a:prstGeom prst="rect">
             <a:avLst/>
@@ -5982,7 +5690,7 @@
               <a:buNone/>
             </a:pPr>
             <a:r>
-              <a:rPr lang="en-US" sz="1700" b="1" dirty="0">
+              <a:rPr lang="en-US" sz="2400" b="1" dirty="0">
                 <a:solidFill>
                   <a:srgbClr val="FFFFFF"/>
                 </a:solidFill>
@@ -5996,7 +5704,7 @@
               <a:buNone/>
             </a:pPr>
             <a:r>
-              <a:rPr lang="en-US" sz="1700" dirty="0">
+              <a:rPr lang="en-US" sz="2400" dirty="0">
                 <a:solidFill>
                   <a:srgbClr val="FFFFFF"/>
                 </a:solidFill>
@@ -6010,7 +5718,7 @@
               <a:buNone/>
             </a:pPr>
             <a:r>
-              <a:rPr lang="en-US" sz="1700" i="1" dirty="0">
+              <a:rPr lang="en-US" sz="2400" i="1" dirty="0">
                 <a:solidFill>
                   <a:srgbClr val="CADCFC"/>
                 </a:solidFill>
@@ -6020,7 +5728,7 @@
               </a:rPr>
               <a:t>Fertig? Stift hinlegen und noch einmal durchlesen.</a:t>
             </a:r>
-            <a:endParaRPr lang="en-US" sz="1700" dirty="0"/>
+            <a:endParaRPr lang="en-US" sz="2400" dirty="0"/>
           </a:p>
         </p:txBody>
       </p:sp>
@@ -6110,12 +5818,12 @@
         </p:nvSpPr>
         <p:spPr>
           <a:xfrm>
-            <a:off x="548640" y="3346704"/>
-            <a:ext cx="11109960" cy="530352"/>
+            <a:off x="548640" y="3703320"/>
+            <a:ext cx="11109960" cy="395478"/>
           </a:xfrm>
           <a:prstGeom prst="roundRect">
             <a:avLst>
-              <a:gd name="adj" fmla="val 13793"/>
+              <a:gd name="adj" fmla="val 18497"/>
             </a:avLst>
           </a:prstGeom>
           <a:solidFill>
@@ -6132,7 +5840,7 @@
         </p:nvSpPr>
         <p:spPr>
           <a:xfrm>
-            <a:off x="685800" y="3429000"/>
+            <a:off x="685800" y="3718179"/>
             <a:ext cx="365760" cy="365760"/>
           </a:xfrm>
           <a:prstGeom prst="ellipse">
@@ -6152,7 +5860,7 @@
         </p:nvSpPr>
         <p:spPr>
           <a:xfrm>
-            <a:off x="685800" y="3429000"/>
+            <a:off x="685800" y="3718179"/>
             <a:ext cx="365760" cy="365760"/>
           </a:xfrm>
           <a:prstGeom prst="rect">
@@ -6191,8 +5899,8 @@
         </p:nvSpPr>
         <p:spPr>
           <a:xfrm>
-            <a:off x="1280160" y="3346704"/>
-            <a:ext cx="10241280" cy="530352"/>
+            <a:off x="1280160" y="3703320"/>
+            <a:ext cx="10241280" cy="395478"/>
           </a:xfrm>
           <a:prstGeom prst="rect">
             <a:avLst/>
@@ -6230,12 +5938,12 @@
         </p:nvSpPr>
         <p:spPr>
           <a:xfrm>
-            <a:off x="548640" y="3950208"/>
-            <a:ext cx="11109960" cy="530352"/>
+            <a:off x="548640" y="4171950"/>
+            <a:ext cx="11109960" cy="395478"/>
           </a:xfrm>
           <a:prstGeom prst="roundRect">
             <a:avLst>
-              <a:gd name="adj" fmla="val 13793"/>
+              <a:gd name="adj" fmla="val 18497"/>
             </a:avLst>
           </a:prstGeom>
           <a:solidFill>
@@ -6252,7 +5960,7 @@
         </p:nvSpPr>
         <p:spPr>
           <a:xfrm>
-            <a:off x="685800" y="4032504"/>
+            <a:off x="685800" y="4186809"/>
             <a:ext cx="365760" cy="365760"/>
           </a:xfrm>
           <a:prstGeom prst="ellipse">
@@ -6272,7 +5980,7 @@
         </p:nvSpPr>
         <p:spPr>
           <a:xfrm>
-            <a:off x="685800" y="4032504"/>
+            <a:off x="685800" y="4186809"/>
             <a:ext cx="365760" cy="365760"/>
           </a:xfrm>
           <a:prstGeom prst="rect">
@@ -6311,8 +6019,8 @@
         </p:nvSpPr>
         <p:spPr>
           <a:xfrm>
-            <a:off x="1280160" y="3950208"/>
-            <a:ext cx="10241280" cy="530352"/>
+            <a:off x="1280160" y="4171950"/>
+            <a:ext cx="10241280" cy="395478"/>
           </a:xfrm>
           <a:prstGeom prst="rect">
             <a:avLst/>
@@ -6350,12 +6058,12 @@
         </p:nvSpPr>
         <p:spPr>
           <a:xfrm>
-            <a:off x="548640" y="4553712"/>
-            <a:ext cx="11109960" cy="530352"/>
+            <a:off x="548640" y="4640580"/>
+            <a:ext cx="11109960" cy="395478"/>
           </a:xfrm>
           <a:prstGeom prst="roundRect">
             <a:avLst>
-              <a:gd name="adj" fmla="val 13793"/>
+              <a:gd name="adj" fmla="val 18497"/>
             </a:avLst>
           </a:prstGeom>
           <a:solidFill>
@@ -6372,7 +6080,7 @@
         </p:nvSpPr>
         <p:spPr>
           <a:xfrm>
-            <a:off x="685800" y="4636008"/>
+            <a:off x="685800" y="4655439"/>
             <a:ext cx="365760" cy="365760"/>
           </a:xfrm>
           <a:prstGeom prst="ellipse">
@@ -6392,7 +6100,7 @@
         </p:nvSpPr>
         <p:spPr>
           <a:xfrm>
-            <a:off x="685800" y="4636008"/>
+            <a:off x="685800" y="4655439"/>
             <a:ext cx="365760" cy="365760"/>
           </a:xfrm>
           <a:prstGeom prst="rect">
@@ -6431,8 +6139,8 @@
         </p:nvSpPr>
         <p:spPr>
           <a:xfrm>
-            <a:off x="1280160" y="4553712"/>
-            <a:ext cx="10241280" cy="530352"/>
+            <a:off x="1280160" y="4640580"/>
+            <a:ext cx="10241280" cy="395478"/>
           </a:xfrm>
           <a:prstGeom prst="rect">
             <a:avLst/>
@@ -6470,12 +6178,12 @@
         </p:nvSpPr>
         <p:spPr>
           <a:xfrm>
-            <a:off x="548640" y="5157216"/>
-            <a:ext cx="11109960" cy="530352"/>
+            <a:off x="548640" y="5109210"/>
+            <a:ext cx="11109960" cy="395478"/>
           </a:xfrm>
           <a:prstGeom prst="roundRect">
             <a:avLst>
-              <a:gd name="adj" fmla="val 13793"/>
+              <a:gd name="adj" fmla="val 18497"/>
             </a:avLst>
           </a:prstGeom>
           <a:solidFill>
@@ -6492,7 +6200,7 @@
         </p:nvSpPr>
         <p:spPr>
           <a:xfrm>
-            <a:off x="685800" y="5239512"/>
+            <a:off x="685800" y="5124069"/>
             <a:ext cx="365760" cy="365760"/>
           </a:xfrm>
           <a:prstGeom prst="ellipse">
@@ -6512,7 +6220,7 @@
         </p:nvSpPr>
         <p:spPr>
           <a:xfrm>
-            <a:off x="685800" y="5239512"/>
+            <a:off x="685800" y="5124069"/>
             <a:ext cx="365760" cy="365760"/>
           </a:xfrm>
           <a:prstGeom prst="rect">
@@ -6551,8 +6259,8 @@
         </p:nvSpPr>
         <p:spPr>
           <a:xfrm>
-            <a:off x="1280160" y="5157216"/>
-            <a:ext cx="10241280" cy="530352"/>
+            <a:off x="1280160" y="5109210"/>
+            <a:ext cx="10241280" cy="395478"/>
           </a:xfrm>
           <a:prstGeom prst="rect">
             <a:avLst/>
@@ -6647,7 +6355,7 @@
                 <a:ea typeface="Calibri" pitchFamily="34" charset="-122"/>
                 <a:cs typeface="Calibri" pitchFamily="34" charset="-120"/>
               </a:rPr>
-              <a:t>ÜBUNG 3 · TAFEL</a:t>
+              <a:t>ÜBUNG 3</a:t>
             </a:r>
             <a:endParaRPr lang="en-US" sz="1300" dirty="0"/>
           </a:p>
@@ -6686,7 +6394,7 @@
                 <a:ea typeface="Cambria" pitchFamily="34" charset="-122"/>
                 <a:cs typeface="Cambria" pitchFamily="34" charset="-120"/>
               </a:rPr>
-              <a:t>Die Ständegesellschaft aus dem Kopf</a:t>
+              <a:t>Im Absolutismus fühle ich mich …</a:t>
             </a:r>
             <a:endParaRPr lang="en-US" sz="3400" dirty="0"/>
           </a:p>
@@ -6700,12 +6408,12 @@
         </p:nvSpPr>
         <p:spPr>
           <a:xfrm>
-            <a:off x="548640" y="1417320"/>
-            <a:ext cx="11109960" cy="1655064"/>
+            <a:off x="548640" y="1371600"/>
+            <a:ext cx="8138160" cy="3383280"/>
           </a:xfrm>
           <a:prstGeom prst="roundRect">
             <a:avLst>
-              <a:gd name="adj" fmla="val 4420"/>
+              <a:gd name="adj" fmla="val 2162"/>
             </a:avLst>
           </a:prstGeom>
           <a:solidFill>
@@ -6722,7 +6430,7 @@
         </p:nvSpPr>
         <p:spPr>
           <a:xfrm>
-            <a:off x="731520" y="1568196"/>
+            <a:off x="731520" y="1517904"/>
             <a:ext cx="384048" cy="384048"/>
           </a:xfrm>
           <a:prstGeom prst="ellipse">
@@ -6742,7 +6450,7 @@
         </p:nvSpPr>
         <p:spPr>
           <a:xfrm>
-            <a:off x="731520" y="1568196"/>
+            <a:off x="731520" y="1517904"/>
             <a:ext cx="384048" cy="384048"/>
           </a:xfrm>
           <a:prstGeom prst="rect">
@@ -6781,8 +6489,8 @@
         </p:nvSpPr>
         <p:spPr>
           <a:xfrm>
-            <a:off x="1280160" y="1554480"/>
-            <a:ext cx="10241280" cy="411480"/>
+            <a:off x="1280160" y="1481328"/>
+            <a:ext cx="7269480" cy="868680"/>
           </a:xfrm>
           <a:prstGeom prst="rect">
             <a:avLst/>
@@ -6798,7 +6506,7 @@
               <a:buNone/>
             </a:pPr>
             <a:r>
-              <a:rPr lang="en-US" sz="2100" b="1" dirty="0">
+              <a:rPr lang="en-US" sz="2400" b="1" dirty="0">
                 <a:solidFill>
                   <a:srgbClr val="1E2761"/>
                 </a:solidFill>
@@ -6806,9 +6514,9 @@
                 <a:ea typeface="Calibri" pitchFamily="34" charset="-122"/>
                 <a:cs typeface="Calibri" pitchFamily="34" charset="-120"/>
               </a:rPr>
-              <a:t>Klappe das Heft zu. Ihr meldet euch und nennt, was ihr wisst.</a:t>
-            </a:r>
-            <a:endParaRPr lang="en-US" sz="2100" dirty="0"/>
+              <a:t>Schreibe Ü3 an den Rand. Betrachte die Karikatur.</a:t>
+            </a:r>
+            <a:endParaRPr lang="en-US" sz="2400" dirty="0"/>
           </a:p>
         </p:txBody>
       </p:sp>
@@ -6820,7 +6528,7 @@
         </p:nvSpPr>
         <p:spPr>
           <a:xfrm>
-            <a:off x="731520" y="2052828"/>
+            <a:off x="731520" y="2459736"/>
             <a:ext cx="384048" cy="384048"/>
           </a:xfrm>
           <a:prstGeom prst="ellipse">
@@ -6840,7 +6548,7 @@
         </p:nvSpPr>
         <p:spPr>
           <a:xfrm>
-            <a:off x="731520" y="2052828"/>
+            <a:off x="731520" y="2459736"/>
             <a:ext cx="384048" cy="384048"/>
           </a:xfrm>
           <a:prstGeom prst="rect">
@@ -6879,8 +6587,8 @@
         </p:nvSpPr>
         <p:spPr>
           <a:xfrm>
-            <a:off x="1280160" y="2039112"/>
-            <a:ext cx="10241280" cy="411480"/>
+            <a:off x="1280160" y="2423160"/>
+            <a:ext cx="7269480" cy="1280160"/>
           </a:xfrm>
           <a:prstGeom prst="rect">
             <a:avLst/>
@@ -6896,7 +6604,7 @@
               <a:buNone/>
             </a:pPr>
             <a:r>
-              <a:rPr lang="en-US" sz="2100" b="1" dirty="0">
+              <a:rPr lang="en-US" sz="2400" b="1" dirty="0">
                 <a:solidFill>
                   <a:srgbClr val="1E2761"/>
                 </a:solidFill>
@@ -6904,9 +6612,9 @@
                 <a:ea typeface="Calibri" pitchFamily="34" charset="-122"/>
                 <a:cs typeface="Calibri" pitchFamily="34" charset="-120"/>
               </a:rPr>
-              <a:t>Wir füllen die Tabelle an der Tafel gemeinsam aus.</a:t>
-            </a:r>
-            <a:endParaRPr lang="en-US" sz="2100" dirty="0"/>
+              <a:t>Wähle einen Stand und beende den Satz: „Im Absolutismus fühle ich mich …, weil …“</a:t>
+            </a:r>
+            <a:endParaRPr lang="en-US" sz="2400" dirty="0"/>
           </a:p>
         </p:txBody>
       </p:sp>
@@ -6918,7 +6626,7 @@
         </p:nvSpPr>
         <p:spPr>
           <a:xfrm>
-            <a:off x="731520" y="2537460"/>
+            <a:off x="731520" y="3813048"/>
             <a:ext cx="384048" cy="384048"/>
           </a:xfrm>
           <a:prstGeom prst="ellipse">
@@ -6938,7 +6646,7 @@
         </p:nvSpPr>
         <p:spPr>
           <a:xfrm>
-            <a:off x="731520" y="2537460"/>
+            <a:off x="731520" y="3813048"/>
             <a:ext cx="384048" cy="384048"/>
           </a:xfrm>
           <a:prstGeom prst="rect">
@@ -6977,8 +6685,8 @@
         </p:nvSpPr>
         <p:spPr>
           <a:xfrm>
-            <a:off x="1280160" y="2523744"/>
-            <a:ext cx="10241280" cy="411480"/>
+            <a:off x="1280160" y="3776472"/>
+            <a:ext cx="7269480" cy="868680"/>
           </a:xfrm>
           <a:prstGeom prst="rect">
             <a:avLst/>
@@ -6994,7 +6702,7 @@
               <a:buNone/>
             </a:pPr>
             <a:r>
-              <a:rPr lang="en-US" sz="2100" b="1" dirty="0">
+              <a:rPr lang="en-US" sz="2400" b="1" dirty="0">
                 <a:solidFill>
                   <a:srgbClr val="1E2761"/>
                 </a:solidFill>
@@ -7002,9 +6710,9 @@
                 <a:ea typeface="Calibri" pitchFamily="34" charset="-122"/>
                 <a:cs typeface="Calibri" pitchFamily="34" charset="-120"/>
               </a:rPr>
-              <a:t>Jetzt schreibst du die fertige Tabelle mit Lineal ab.</a:t>
-            </a:r>
-            <a:endParaRPr lang="en-US" sz="2100" dirty="0"/>
+              <a:t>Nenne ein Recht und eine Pflicht deines Standes.</a:t>
+            </a:r>
+            <a:endParaRPr lang="en-US" sz="2400" dirty="0"/>
           </a:p>
         </p:txBody>
       </p:sp>
@@ -7016,12 +6724,12 @@
         </p:nvSpPr>
         <p:spPr>
           <a:xfrm>
-            <a:off x="548640" y="5897880"/>
-            <a:ext cx="11109960" cy="548640"/>
+            <a:off x="548640" y="5669280"/>
+            <a:ext cx="11109960" cy="777240"/>
           </a:xfrm>
           <a:prstGeom prst="roundRect">
             <a:avLst>
-              <a:gd name="adj" fmla="val 13333"/>
+              <a:gd name="adj" fmla="val 9412"/>
             </a:avLst>
           </a:prstGeom>
           <a:solidFill>
@@ -7038,8 +6746,8 @@
         </p:nvSpPr>
         <p:spPr>
           <a:xfrm>
-            <a:off x="822960" y="5897880"/>
-            <a:ext cx="10607040" cy="548640"/>
+            <a:off x="822960" y="5669280"/>
+            <a:ext cx="10607040" cy="777240"/>
           </a:xfrm>
           <a:prstGeom prst="rect">
             <a:avLst/>
@@ -7055,7 +6763,7 @@
               <a:buNone/>
             </a:pPr>
             <a:r>
-              <a:rPr lang="en-US" sz="1700" b="1" dirty="0">
+              <a:rPr lang="en-US" sz="2400" b="1" dirty="0">
                 <a:solidFill>
                   <a:srgbClr val="FFFFFF"/>
                 </a:solidFill>
@@ -7069,7 +6777,7 @@
               <a:buNone/>
             </a:pPr>
             <a:r>
-              <a:rPr lang="en-US" sz="1700" dirty="0">
+              <a:rPr lang="en-US" sz="2400" dirty="0">
                 <a:solidFill>
                   <a:srgbClr val="FFFFFF"/>
                 </a:solidFill>
@@ -7077,13 +6785,13 @@
                 <a:ea typeface="Calibri" pitchFamily="34" charset="-122"/>
                 <a:cs typeface="Calibri" pitchFamily="34" charset="-120"/>
               </a:rPr>
-              <a:t>8 Minuten · gemeinsam, dann abschreiben      </a:t>
-            </a:r>
-            <a:pPr indent="0" marL="0">
-              <a:buNone/>
-            </a:pPr>
-            <a:r>
-              <a:rPr lang="en-US" sz="1700" i="1" dirty="0">
+              <a:t>5 Minuten · allein · leise      </a:t>
+            </a:r>
+            <a:pPr indent="0" marL="0">
+              <a:buNone/>
+            </a:pPr>
+            <a:r>
+              <a:rPr lang="en-US" sz="2400" i="1" dirty="0">
                 <a:solidFill>
                   <a:srgbClr val="CADCFC"/>
                 </a:solidFill>
@@ -7093,7 +6801,7 @@
               </a:rPr>
               <a:t>Fertig? Stift hinlegen.</a:t>
             </a:r>
-            <a:endParaRPr lang="en-US" sz="1700" dirty="0"/>
+            <a:endParaRPr lang="en-US" sz="2400" dirty="0"/>
           </a:p>
         </p:txBody>
       </p:sp>
@@ -7175,38 +6883,62 @@
           </a:p>
         </p:txBody>
       </p:sp>
-      <p:sp>
-        <p:nvSpPr>
-          <p:cNvPr id="19" name="Shape 16"/>
+      <p:pic>
+        <p:nvPicPr>
+          <p:cNvPr id="19" name="Image 0" descr="../material/karikatur_drei_staende.jpg">    </p:cNvPr>
+          <p:cNvPicPr>
+            <a:picLocks noChangeAspect="1"/>
+          </p:cNvPicPr>
+          <p:nvPr/>
+        </p:nvPicPr>
+        <p:blipFill>
+          <a:blip r:embed="rId1"/>
+          <a:stretch>
+            <a:fillRect/>
+          </a:stretch>
+        </p:blipFill>
+        <p:spPr>
+          <a:xfrm>
+            <a:off x="8869680" y="1371600"/>
+            <a:ext cx="2788920" cy="3456432"/>
+          </a:xfrm>
+          <a:prstGeom prst="rect">
+            <a:avLst/>
+          </a:prstGeom>
+        </p:spPr>
+      </p:pic>
+      <p:sp>
+        <p:nvSpPr>
+          <p:cNvPr id="20" name="Shape 16"/>
           <p:cNvSpPr/>
           <p:nvPr/>
         </p:nvSpPr>
         <p:spPr>
           <a:xfrm>
-            <a:off x="548640" y="3209544"/>
-            <a:ext cx="1554480" cy="411480"/>
+            <a:off x="548640" y="5029200"/>
+            <a:ext cx="11109960" cy="731520"/>
           </a:xfrm>
           <a:prstGeom prst="roundRect">
             <a:avLst>
-              <a:gd name="adj" fmla="val 11111"/>
+              <a:gd name="adj" fmla="val 10000"/>
             </a:avLst>
           </a:prstGeom>
           <a:solidFill>
-            <a:srgbClr val="1E2761"/>
+            <a:srgbClr val="F4F7FD"/>
           </a:solidFill>
           <a:ln/>
         </p:spPr>
       </p:sp>
       <p:sp>
         <p:nvSpPr>
-          <p:cNvPr id="20" name="Text 17"/>
-          <p:cNvSpPr txBox="1"/>
-          <p:nvPr/>
-        </p:nvSpPr>
-        <p:spPr>
-          <a:xfrm>
-            <a:off x="548640" y="3209544"/>
-            <a:ext cx="1554480" cy="411480"/>
+          <p:cNvPr id="21" name="Text 17"/>
+          <p:cNvSpPr txBox="1"/>
+          <p:nvPr/>
+        </p:nvSpPr>
+        <p:spPr>
+          <a:xfrm>
+            <a:off x="822960" y="5029200"/>
+            <a:ext cx="10607040" cy="731520"/>
           </a:xfrm>
           <a:prstGeom prst="rect">
             <a:avLst/>
@@ -7218,377 +6950,11 @@
           <a:bodyPr wrap="square" lIns="0" tIns="0" rIns="0" bIns="0" rtlCol="0" anchor="ctr"/>
           <a:lstStyle/>
           <a:p>
-            <a:pPr algn="ctr" indent="0" marL="0">
-              <a:buNone/>
-            </a:pPr>
-            <a:r>
-              <a:rPr lang="en-US" sz="1700" b="1" dirty="0">
-                <a:solidFill>
-                  <a:srgbClr val="FFFFFF"/>
-                </a:solidFill>
-                <a:latin typeface="Calibri" pitchFamily="34" charset="0"/>
-                <a:ea typeface="Calibri" pitchFamily="34" charset="-122"/>
-                <a:cs typeface="Calibri" pitchFamily="34" charset="-120"/>
-              </a:rPr>
-              <a:t>Stand</a:t>
-            </a:r>
-            <a:endParaRPr lang="en-US" sz="1700" dirty="0"/>
-          </a:p>
-        </p:txBody>
-      </p:sp>
-      <p:sp>
-        <p:nvSpPr>
-          <p:cNvPr id="21" name="Shape 18"/>
-          <p:cNvSpPr/>
-          <p:nvPr/>
-        </p:nvSpPr>
-        <p:spPr>
-          <a:xfrm>
-            <a:off x="2194560" y="3209544"/>
-            <a:ext cx="1097280" cy="411480"/>
-          </a:xfrm>
-          <a:prstGeom prst="roundRect">
-            <a:avLst>
-              <a:gd name="adj" fmla="val 11111"/>
-            </a:avLst>
-          </a:prstGeom>
-          <a:solidFill>
-            <a:srgbClr val="1E2761"/>
-          </a:solidFill>
-          <a:ln/>
-        </p:spPr>
-      </p:sp>
-      <p:sp>
-        <p:nvSpPr>
-          <p:cNvPr id="22" name="Text 19"/>
-          <p:cNvSpPr txBox="1"/>
-          <p:nvPr/>
-        </p:nvSpPr>
-        <p:spPr>
-          <a:xfrm>
-            <a:off x="2194560" y="3209544"/>
-            <a:ext cx="1097280" cy="411480"/>
-          </a:xfrm>
-          <a:prstGeom prst="rect">
-            <a:avLst/>
-          </a:prstGeom>
-          <a:noFill/>
-          <a:ln/>
-        </p:spPr>
-        <p:txBody>
-          <a:bodyPr wrap="square" lIns="0" tIns="0" rIns="0" bIns="0" rtlCol="0" anchor="ctr"/>
-          <a:lstStyle/>
-          <a:p>
-            <a:pPr algn="ctr" indent="0" marL="0">
-              <a:buNone/>
-            </a:pPr>
-            <a:r>
-              <a:rPr lang="en-US" sz="1700" b="1" dirty="0">
-                <a:solidFill>
-                  <a:srgbClr val="FFFFFF"/>
-                </a:solidFill>
-                <a:latin typeface="Calibri" pitchFamily="34" charset="0"/>
-                <a:ea typeface="Calibri" pitchFamily="34" charset="-122"/>
-                <a:cs typeface="Calibri" pitchFamily="34" charset="-120"/>
-              </a:rPr>
-              <a:t>Anzahl</a:t>
-            </a:r>
-            <a:endParaRPr lang="en-US" sz="1700" dirty="0"/>
-          </a:p>
-        </p:txBody>
-      </p:sp>
-      <p:sp>
-        <p:nvSpPr>
-          <p:cNvPr id="23" name="Shape 20"/>
-          <p:cNvSpPr/>
-          <p:nvPr/>
-        </p:nvSpPr>
-        <p:spPr>
-          <a:xfrm>
-            <a:off x="3383280" y="3209544"/>
-            <a:ext cx="1645920" cy="411480"/>
-          </a:xfrm>
-          <a:prstGeom prst="roundRect">
-            <a:avLst>
-              <a:gd name="adj" fmla="val 11111"/>
-            </a:avLst>
-          </a:prstGeom>
-          <a:solidFill>
-            <a:srgbClr val="1E2761"/>
-          </a:solidFill>
-          <a:ln/>
-        </p:spPr>
-      </p:sp>
-      <p:sp>
-        <p:nvSpPr>
-          <p:cNvPr id="24" name="Text 21"/>
-          <p:cNvSpPr txBox="1"/>
-          <p:nvPr/>
-        </p:nvSpPr>
-        <p:spPr>
-          <a:xfrm>
-            <a:off x="3383280" y="3209544"/>
-            <a:ext cx="1645920" cy="411480"/>
-          </a:xfrm>
-          <a:prstGeom prst="rect">
-            <a:avLst/>
-          </a:prstGeom>
-          <a:noFill/>
-          <a:ln/>
-        </p:spPr>
-        <p:txBody>
-          <a:bodyPr wrap="square" lIns="0" tIns="0" rIns="0" bIns="0" rtlCol="0" anchor="ctr"/>
-          <a:lstStyle/>
-          <a:p>
-            <a:pPr algn="ctr" indent="0" marL="0">
-              <a:buNone/>
-            </a:pPr>
-            <a:r>
-              <a:rPr lang="en-US" sz="1700" b="1" dirty="0">
-                <a:solidFill>
-                  <a:srgbClr val="FFFFFF"/>
-                </a:solidFill>
-                <a:latin typeface="Calibri" pitchFamily="34" charset="0"/>
-                <a:ea typeface="Calibri" pitchFamily="34" charset="-122"/>
-                <a:cs typeface="Calibri" pitchFamily="34" charset="-120"/>
-              </a:rPr>
-              <a:t>Bildung</a:t>
-            </a:r>
-            <a:endParaRPr lang="en-US" sz="1700" dirty="0"/>
-          </a:p>
-        </p:txBody>
-      </p:sp>
-      <p:sp>
-        <p:nvSpPr>
-          <p:cNvPr id="25" name="Shape 22"/>
-          <p:cNvSpPr/>
-          <p:nvPr/>
-        </p:nvSpPr>
-        <p:spPr>
-          <a:xfrm>
-            <a:off x="5120640" y="3209544"/>
-            <a:ext cx="2103120" cy="411480"/>
-          </a:xfrm>
-          <a:prstGeom prst="roundRect">
-            <a:avLst>
-              <a:gd name="adj" fmla="val 11111"/>
-            </a:avLst>
-          </a:prstGeom>
-          <a:solidFill>
-            <a:srgbClr val="1E2761"/>
-          </a:solidFill>
-          <a:ln/>
-        </p:spPr>
-      </p:sp>
-      <p:sp>
-        <p:nvSpPr>
-          <p:cNvPr id="26" name="Text 23"/>
-          <p:cNvSpPr txBox="1"/>
-          <p:nvPr/>
-        </p:nvSpPr>
-        <p:spPr>
-          <a:xfrm>
-            <a:off x="5120640" y="3209544"/>
-            <a:ext cx="2103120" cy="411480"/>
-          </a:xfrm>
-          <a:prstGeom prst="rect">
-            <a:avLst/>
-          </a:prstGeom>
-          <a:noFill/>
-          <a:ln/>
-        </p:spPr>
-        <p:txBody>
-          <a:bodyPr wrap="square" lIns="0" tIns="0" rIns="0" bIns="0" rtlCol="0" anchor="ctr"/>
-          <a:lstStyle/>
-          <a:p>
-            <a:pPr algn="ctr" indent="0" marL="0">
-              <a:buNone/>
-            </a:pPr>
-            <a:r>
-              <a:rPr lang="en-US" sz="1700" b="1" dirty="0">
-                <a:solidFill>
-                  <a:srgbClr val="FFFFFF"/>
-                </a:solidFill>
-                <a:latin typeface="Calibri" pitchFamily="34" charset="0"/>
-                <a:ea typeface="Calibri" pitchFamily="34" charset="-122"/>
-                <a:cs typeface="Calibri" pitchFamily="34" charset="-120"/>
-              </a:rPr>
-              <a:t>Vorrechte</a:t>
-            </a:r>
-            <a:endParaRPr lang="en-US" sz="1700" dirty="0"/>
-          </a:p>
-        </p:txBody>
-      </p:sp>
-      <p:sp>
-        <p:nvSpPr>
-          <p:cNvPr id="27" name="Shape 24"/>
-          <p:cNvSpPr/>
-          <p:nvPr/>
-        </p:nvSpPr>
-        <p:spPr>
-          <a:xfrm>
-            <a:off x="7315200" y="3209544"/>
-            <a:ext cx="2103120" cy="411480"/>
-          </a:xfrm>
-          <a:prstGeom prst="roundRect">
-            <a:avLst>
-              <a:gd name="adj" fmla="val 11111"/>
-            </a:avLst>
-          </a:prstGeom>
-          <a:solidFill>
-            <a:srgbClr val="1E2761"/>
-          </a:solidFill>
-          <a:ln/>
-        </p:spPr>
-      </p:sp>
-      <p:sp>
-        <p:nvSpPr>
-          <p:cNvPr id="28" name="Text 25"/>
-          <p:cNvSpPr txBox="1"/>
-          <p:nvPr/>
-        </p:nvSpPr>
-        <p:spPr>
-          <a:xfrm>
-            <a:off x="7315200" y="3209544"/>
-            <a:ext cx="2103120" cy="411480"/>
-          </a:xfrm>
-          <a:prstGeom prst="rect">
-            <a:avLst/>
-          </a:prstGeom>
-          <a:noFill/>
-          <a:ln/>
-        </p:spPr>
-        <p:txBody>
-          <a:bodyPr wrap="square" lIns="0" tIns="0" rIns="0" bIns="0" rtlCol="0" anchor="ctr"/>
-          <a:lstStyle/>
-          <a:p>
-            <a:pPr algn="ctr" indent="0" marL="0">
-              <a:buNone/>
-            </a:pPr>
-            <a:r>
-              <a:rPr lang="en-US" sz="1700" b="1" dirty="0">
-                <a:solidFill>
-                  <a:srgbClr val="FFFFFF"/>
-                </a:solidFill>
-                <a:latin typeface="Calibri" pitchFamily="34" charset="0"/>
-                <a:ea typeface="Calibri" pitchFamily="34" charset="-122"/>
-                <a:cs typeface="Calibri" pitchFamily="34" charset="-120"/>
-              </a:rPr>
-              <a:t>Pflichten</a:t>
-            </a:r>
-            <a:endParaRPr lang="en-US" sz="1700" dirty="0"/>
-          </a:p>
-        </p:txBody>
-      </p:sp>
-      <p:sp>
-        <p:nvSpPr>
-          <p:cNvPr id="29" name="Shape 26"/>
-          <p:cNvSpPr/>
-          <p:nvPr/>
-        </p:nvSpPr>
-        <p:spPr>
-          <a:xfrm>
-            <a:off x="9509760" y="3209544"/>
-            <a:ext cx="2057400" cy="411480"/>
-          </a:xfrm>
-          <a:prstGeom prst="roundRect">
-            <a:avLst>
-              <a:gd name="adj" fmla="val 11111"/>
-            </a:avLst>
-          </a:prstGeom>
-          <a:solidFill>
-            <a:srgbClr val="1E2761"/>
-          </a:solidFill>
-          <a:ln/>
-        </p:spPr>
-      </p:sp>
-      <p:sp>
-        <p:nvSpPr>
-          <p:cNvPr id="30" name="Text 27"/>
-          <p:cNvSpPr txBox="1"/>
-          <p:nvPr/>
-        </p:nvSpPr>
-        <p:spPr>
-          <a:xfrm>
-            <a:off x="9509760" y="3209544"/>
-            <a:ext cx="2057400" cy="411480"/>
-          </a:xfrm>
-          <a:prstGeom prst="rect">
-            <a:avLst/>
-          </a:prstGeom>
-          <a:noFill/>
-          <a:ln/>
-        </p:spPr>
-        <p:txBody>
-          <a:bodyPr wrap="square" lIns="0" tIns="0" rIns="0" bIns="0" rtlCol="0" anchor="ctr"/>
-          <a:lstStyle/>
-          <a:p>
-            <a:pPr algn="ctr" indent="0" marL="0">
-              <a:buNone/>
-            </a:pPr>
-            <a:r>
-              <a:rPr lang="en-US" sz="1700" b="1" dirty="0">
-                <a:solidFill>
-                  <a:srgbClr val="FFFFFF"/>
-                </a:solidFill>
-                <a:latin typeface="Calibri" pitchFamily="34" charset="0"/>
-                <a:ea typeface="Calibri" pitchFamily="34" charset="-122"/>
-                <a:cs typeface="Calibri" pitchFamily="34" charset="-120"/>
-              </a:rPr>
-              <a:t>Mitbestimmung</a:t>
-            </a:r>
-            <a:endParaRPr lang="en-US" sz="1700" dirty="0"/>
-          </a:p>
-        </p:txBody>
-      </p:sp>
-      <p:sp>
-        <p:nvSpPr>
-          <p:cNvPr id="31" name="Shape 28"/>
-          <p:cNvSpPr/>
-          <p:nvPr/>
-        </p:nvSpPr>
-        <p:spPr>
-          <a:xfrm>
-            <a:off x="548640" y="3694176"/>
-            <a:ext cx="1554480" cy="585216"/>
-          </a:xfrm>
-          <a:prstGeom prst="roundRect">
-            <a:avLst>
-              <a:gd name="adj" fmla="val 12500"/>
-            </a:avLst>
-          </a:prstGeom>
-          <a:solidFill>
-            <a:srgbClr val="EAF0FA"/>
-          </a:solidFill>
-          <a:ln/>
-        </p:spPr>
-      </p:sp>
-      <p:sp>
-        <p:nvSpPr>
-          <p:cNvPr id="32" name="Text 29"/>
-          <p:cNvSpPr txBox="1"/>
-          <p:nvPr/>
-        </p:nvSpPr>
-        <p:spPr>
-          <a:xfrm>
-            <a:off x="548640" y="3694176"/>
-            <a:ext cx="1554480" cy="585216"/>
-          </a:xfrm>
-          <a:prstGeom prst="rect">
-            <a:avLst/>
-          </a:prstGeom>
-          <a:noFill/>
-          <a:ln/>
-        </p:spPr>
-        <p:txBody>
-          <a:bodyPr wrap="square" lIns="0" tIns="0" rIns="0" bIns="0" rtlCol="0" anchor="ctr"/>
-          <a:lstStyle/>
-          <a:p>
-            <a:pPr algn="ctr" indent="0" marL="0">
-              <a:buNone/>
-            </a:pPr>
-            <a:r>
-              <a:rPr lang="en-US" sz="1400" b="1" dirty="0">
+            <a:pPr indent="0" marL="0">
+              <a:buNone/>
+            </a:pPr>
+            <a:r>
+              <a:rPr lang="en-US" sz="2400" dirty="0">
                 <a:solidFill>
                   <a:srgbClr val="1E2761"/>
                 </a:solidFill>
@@ -7596,514 +6962,11 @@
                 <a:ea typeface="Cambria" pitchFamily="34" charset="-122"/>
                 <a:cs typeface="Cambria" pitchFamily="34" charset="-120"/>
               </a:rPr>
-              <a:t>1. Stand</a:t>
-            </a:r>
-            <a:endParaRPr lang="en-US" sz="1400" dirty="0"/>
-          </a:p>
-          <a:p>
-            <a:pPr algn="ctr" indent="0" marL="0">
-              <a:buNone/>
-            </a:pPr>
-            <a:r>
-              <a:rPr lang="en-US" sz="1400" b="1" dirty="0">
-                <a:solidFill>
-                  <a:srgbClr val="1E2761"/>
-                </a:solidFill>
-                <a:latin typeface="Cambria" pitchFamily="34" charset="0"/>
-                <a:ea typeface="Cambria" pitchFamily="34" charset="-122"/>
-                <a:cs typeface="Cambria" pitchFamily="34" charset="-120"/>
-              </a:rPr>
-              <a:t>Klerus</a:t>
-            </a:r>
-            <a:endParaRPr lang="en-US" sz="1400" dirty="0"/>
-          </a:p>
-        </p:txBody>
-      </p:sp>
-      <p:sp>
-        <p:nvSpPr>
-          <p:cNvPr id="33" name="Shape 30"/>
-          <p:cNvSpPr/>
-          <p:nvPr/>
-        </p:nvSpPr>
-        <p:spPr>
-          <a:xfrm>
-            <a:off x="2194560" y="3694176"/>
-            <a:ext cx="1097280" cy="585216"/>
-          </a:xfrm>
-          <a:prstGeom prst="roundRect">
-            <a:avLst>
-              <a:gd name="adj" fmla="val 12500"/>
-            </a:avLst>
-          </a:prstGeom>
-          <a:solidFill>
-            <a:srgbClr val="F4F7FD"/>
-          </a:solidFill>
-          <a:ln/>
-        </p:spPr>
-      </p:sp>
-      <p:sp>
-        <p:nvSpPr>
-          <p:cNvPr id="34" name="Shape 31"/>
-          <p:cNvSpPr/>
-          <p:nvPr/>
-        </p:nvSpPr>
-        <p:spPr>
-          <a:xfrm>
-            <a:off x="3383280" y="3694176"/>
-            <a:ext cx="1645920" cy="585216"/>
-          </a:xfrm>
-          <a:prstGeom prst="roundRect">
-            <a:avLst>
-              <a:gd name="adj" fmla="val 12500"/>
-            </a:avLst>
-          </a:prstGeom>
-          <a:solidFill>
-            <a:srgbClr val="F4F7FD"/>
-          </a:solidFill>
-          <a:ln/>
-        </p:spPr>
-      </p:sp>
-      <p:sp>
-        <p:nvSpPr>
-          <p:cNvPr id="35" name="Shape 32"/>
-          <p:cNvSpPr/>
-          <p:nvPr/>
-        </p:nvSpPr>
-        <p:spPr>
-          <a:xfrm>
-            <a:off x="5120640" y="3694176"/>
-            <a:ext cx="2103120" cy="585216"/>
-          </a:xfrm>
-          <a:prstGeom prst="roundRect">
-            <a:avLst>
-              <a:gd name="adj" fmla="val 12500"/>
-            </a:avLst>
-          </a:prstGeom>
-          <a:solidFill>
-            <a:srgbClr val="F4F7FD"/>
-          </a:solidFill>
-          <a:ln/>
-        </p:spPr>
-      </p:sp>
-      <p:sp>
-        <p:nvSpPr>
-          <p:cNvPr id="36" name="Shape 33"/>
-          <p:cNvSpPr/>
-          <p:nvPr/>
-        </p:nvSpPr>
-        <p:spPr>
-          <a:xfrm>
-            <a:off x="7315200" y="3694176"/>
-            <a:ext cx="2103120" cy="585216"/>
-          </a:xfrm>
-          <a:prstGeom prst="roundRect">
-            <a:avLst>
-              <a:gd name="adj" fmla="val 12500"/>
-            </a:avLst>
-          </a:prstGeom>
-          <a:solidFill>
-            <a:srgbClr val="F4F7FD"/>
-          </a:solidFill>
-          <a:ln/>
-        </p:spPr>
-      </p:sp>
-      <p:sp>
-        <p:nvSpPr>
-          <p:cNvPr id="37" name="Shape 34"/>
-          <p:cNvSpPr/>
-          <p:nvPr/>
-        </p:nvSpPr>
-        <p:spPr>
-          <a:xfrm>
-            <a:off x="9509760" y="3694176"/>
-            <a:ext cx="2057400" cy="585216"/>
-          </a:xfrm>
-          <a:prstGeom prst="roundRect">
-            <a:avLst>
-              <a:gd name="adj" fmla="val 12500"/>
-            </a:avLst>
-          </a:prstGeom>
-          <a:solidFill>
-            <a:srgbClr val="F4F7FD"/>
-          </a:solidFill>
-          <a:ln/>
-        </p:spPr>
-      </p:sp>
-      <p:sp>
-        <p:nvSpPr>
-          <p:cNvPr id="38" name="Shape 35"/>
-          <p:cNvSpPr/>
-          <p:nvPr/>
-        </p:nvSpPr>
-        <p:spPr>
-          <a:xfrm>
-            <a:off x="548640" y="4352544"/>
-            <a:ext cx="1554480" cy="585216"/>
-          </a:xfrm>
-          <a:prstGeom prst="roundRect">
-            <a:avLst>
-              <a:gd name="adj" fmla="val 12500"/>
-            </a:avLst>
-          </a:prstGeom>
-          <a:solidFill>
-            <a:srgbClr val="EAF0FA"/>
-          </a:solidFill>
-          <a:ln/>
-        </p:spPr>
-      </p:sp>
-      <p:sp>
-        <p:nvSpPr>
-          <p:cNvPr id="39" name="Text 36"/>
-          <p:cNvSpPr txBox="1"/>
-          <p:nvPr/>
-        </p:nvSpPr>
-        <p:spPr>
-          <a:xfrm>
-            <a:off x="548640" y="4352544"/>
-            <a:ext cx="1554480" cy="585216"/>
-          </a:xfrm>
-          <a:prstGeom prst="rect">
-            <a:avLst/>
-          </a:prstGeom>
-          <a:noFill/>
-          <a:ln/>
-        </p:spPr>
-        <p:txBody>
-          <a:bodyPr wrap="square" lIns="0" tIns="0" rIns="0" bIns="0" rtlCol="0" anchor="ctr"/>
-          <a:lstStyle/>
-          <a:p>
-            <a:pPr algn="ctr" indent="0" marL="0">
-              <a:buNone/>
-            </a:pPr>
-            <a:r>
-              <a:rPr lang="en-US" sz="1400" b="1" dirty="0">
-                <a:solidFill>
-                  <a:srgbClr val="1E2761"/>
-                </a:solidFill>
-                <a:latin typeface="Cambria" pitchFamily="34" charset="0"/>
-                <a:ea typeface="Cambria" pitchFamily="34" charset="-122"/>
-                <a:cs typeface="Cambria" pitchFamily="34" charset="-120"/>
-              </a:rPr>
-              <a:t>2. Stand</a:t>
-            </a:r>
-            <a:endParaRPr lang="en-US" sz="1400" dirty="0"/>
-          </a:p>
-          <a:p>
-            <a:pPr algn="ctr" indent="0" marL="0">
-              <a:buNone/>
-            </a:pPr>
-            <a:r>
-              <a:rPr lang="en-US" sz="1400" b="1" dirty="0">
-                <a:solidFill>
-                  <a:srgbClr val="1E2761"/>
-                </a:solidFill>
-                <a:latin typeface="Cambria" pitchFamily="34" charset="0"/>
-                <a:ea typeface="Cambria" pitchFamily="34" charset="-122"/>
-                <a:cs typeface="Cambria" pitchFamily="34" charset="-120"/>
-              </a:rPr>
-              <a:t>Adel</a:t>
-            </a:r>
-            <a:endParaRPr lang="en-US" sz="1400" dirty="0"/>
-          </a:p>
-        </p:txBody>
-      </p:sp>
-      <p:sp>
-        <p:nvSpPr>
-          <p:cNvPr id="40" name="Shape 37"/>
-          <p:cNvSpPr/>
-          <p:nvPr/>
-        </p:nvSpPr>
-        <p:spPr>
-          <a:xfrm>
-            <a:off x="2194560" y="4352544"/>
-            <a:ext cx="1097280" cy="585216"/>
-          </a:xfrm>
-          <a:prstGeom prst="roundRect">
-            <a:avLst>
-              <a:gd name="adj" fmla="val 12500"/>
-            </a:avLst>
-          </a:prstGeom>
-          <a:solidFill>
-            <a:srgbClr val="F4F7FD"/>
-          </a:solidFill>
-          <a:ln/>
-        </p:spPr>
-      </p:sp>
-      <p:sp>
-        <p:nvSpPr>
-          <p:cNvPr id="41" name="Shape 38"/>
-          <p:cNvSpPr/>
-          <p:nvPr/>
-        </p:nvSpPr>
-        <p:spPr>
-          <a:xfrm>
-            <a:off x="3383280" y="4352544"/>
-            <a:ext cx="1645920" cy="585216"/>
-          </a:xfrm>
-          <a:prstGeom prst="roundRect">
-            <a:avLst>
-              <a:gd name="adj" fmla="val 12500"/>
-            </a:avLst>
-          </a:prstGeom>
-          <a:solidFill>
-            <a:srgbClr val="F4F7FD"/>
-          </a:solidFill>
-          <a:ln/>
-        </p:spPr>
-      </p:sp>
-      <p:sp>
-        <p:nvSpPr>
-          <p:cNvPr id="42" name="Shape 39"/>
-          <p:cNvSpPr/>
-          <p:nvPr/>
-        </p:nvSpPr>
-        <p:spPr>
-          <a:xfrm>
-            <a:off x="5120640" y="4352544"/>
-            <a:ext cx="2103120" cy="585216"/>
-          </a:xfrm>
-          <a:prstGeom prst="roundRect">
-            <a:avLst>
-              <a:gd name="adj" fmla="val 12500"/>
-            </a:avLst>
-          </a:prstGeom>
-          <a:solidFill>
-            <a:srgbClr val="F4F7FD"/>
-          </a:solidFill>
-          <a:ln/>
-        </p:spPr>
-      </p:sp>
-      <p:sp>
-        <p:nvSpPr>
-          <p:cNvPr id="43" name="Shape 40"/>
-          <p:cNvSpPr/>
-          <p:nvPr/>
-        </p:nvSpPr>
-        <p:spPr>
-          <a:xfrm>
-            <a:off x="7315200" y="4352544"/>
-            <a:ext cx="2103120" cy="585216"/>
-          </a:xfrm>
-          <a:prstGeom prst="roundRect">
-            <a:avLst>
-              <a:gd name="adj" fmla="val 12500"/>
-            </a:avLst>
-          </a:prstGeom>
-          <a:solidFill>
-            <a:srgbClr val="F4F7FD"/>
-          </a:solidFill>
-          <a:ln/>
-        </p:spPr>
-      </p:sp>
-      <p:sp>
-        <p:nvSpPr>
-          <p:cNvPr id="44" name="Shape 41"/>
-          <p:cNvSpPr/>
-          <p:nvPr/>
-        </p:nvSpPr>
-        <p:spPr>
-          <a:xfrm>
-            <a:off x="9509760" y="4352544"/>
-            <a:ext cx="2057400" cy="585216"/>
-          </a:xfrm>
-          <a:prstGeom prst="roundRect">
-            <a:avLst>
-              <a:gd name="adj" fmla="val 12500"/>
-            </a:avLst>
-          </a:prstGeom>
-          <a:solidFill>
-            <a:srgbClr val="F4F7FD"/>
-          </a:solidFill>
-          <a:ln/>
-        </p:spPr>
-      </p:sp>
-      <p:sp>
-        <p:nvSpPr>
-          <p:cNvPr id="45" name="Shape 42"/>
-          <p:cNvSpPr/>
-          <p:nvPr/>
-        </p:nvSpPr>
-        <p:spPr>
-          <a:xfrm>
-            <a:off x="548640" y="5010912"/>
-            <a:ext cx="1554480" cy="585216"/>
-          </a:xfrm>
-          <a:prstGeom prst="roundRect">
-            <a:avLst>
-              <a:gd name="adj" fmla="val 12500"/>
-            </a:avLst>
-          </a:prstGeom>
-          <a:solidFill>
-            <a:srgbClr val="EAF0FA"/>
-          </a:solidFill>
-          <a:ln/>
-        </p:spPr>
-      </p:sp>
-      <p:sp>
-        <p:nvSpPr>
-          <p:cNvPr id="46" name="Text 43"/>
-          <p:cNvSpPr txBox="1"/>
-          <p:nvPr/>
-        </p:nvSpPr>
-        <p:spPr>
-          <a:xfrm>
-            <a:off x="548640" y="5010912"/>
-            <a:ext cx="1554480" cy="585216"/>
-          </a:xfrm>
-          <a:prstGeom prst="rect">
-            <a:avLst/>
-          </a:prstGeom>
-          <a:noFill/>
-          <a:ln/>
-        </p:spPr>
-        <p:txBody>
-          <a:bodyPr wrap="square" lIns="0" tIns="0" rIns="0" bIns="0" rtlCol="0" anchor="ctr"/>
-          <a:lstStyle/>
-          <a:p>
-            <a:pPr algn="ctr" indent="0" marL="0">
-              <a:buNone/>
-            </a:pPr>
-            <a:r>
-              <a:rPr lang="en-US" sz="1400" b="1" dirty="0">
-                <a:solidFill>
-                  <a:srgbClr val="1E2761"/>
-                </a:solidFill>
-                <a:latin typeface="Cambria" pitchFamily="34" charset="0"/>
-                <a:ea typeface="Cambria" pitchFamily="34" charset="-122"/>
-                <a:cs typeface="Cambria" pitchFamily="34" charset="-120"/>
-              </a:rPr>
-              <a:t>3. Stand</a:t>
-            </a:r>
-            <a:endParaRPr lang="en-US" sz="1400" dirty="0"/>
-          </a:p>
-          <a:p>
-            <a:pPr algn="ctr" indent="0" marL="0">
-              <a:buNone/>
-            </a:pPr>
-            <a:r>
-              <a:rPr lang="en-US" sz="1400" b="1" dirty="0">
-                <a:solidFill>
-                  <a:srgbClr val="1E2761"/>
-                </a:solidFill>
-                <a:latin typeface="Cambria" pitchFamily="34" charset="0"/>
-                <a:ea typeface="Cambria" pitchFamily="34" charset="-122"/>
-                <a:cs typeface="Cambria" pitchFamily="34" charset="-120"/>
-              </a:rPr>
-              <a:t>Bauern, Bürger</a:t>
-            </a:r>
-            <a:endParaRPr lang="en-US" sz="1400" dirty="0"/>
-          </a:p>
-        </p:txBody>
-      </p:sp>
-      <p:sp>
-        <p:nvSpPr>
-          <p:cNvPr id="47" name="Shape 44"/>
-          <p:cNvSpPr/>
-          <p:nvPr/>
-        </p:nvSpPr>
-        <p:spPr>
-          <a:xfrm>
-            <a:off x="2194560" y="5010912"/>
-            <a:ext cx="1097280" cy="585216"/>
-          </a:xfrm>
-          <a:prstGeom prst="roundRect">
-            <a:avLst>
-              <a:gd name="adj" fmla="val 12500"/>
-            </a:avLst>
-          </a:prstGeom>
-          <a:solidFill>
-            <a:srgbClr val="F4F7FD"/>
-          </a:solidFill>
-          <a:ln/>
-        </p:spPr>
-      </p:sp>
-      <p:sp>
-        <p:nvSpPr>
-          <p:cNvPr id="48" name="Shape 45"/>
-          <p:cNvSpPr/>
-          <p:nvPr/>
-        </p:nvSpPr>
-        <p:spPr>
-          <a:xfrm>
-            <a:off x="3383280" y="5010912"/>
-            <a:ext cx="1645920" cy="585216"/>
-          </a:xfrm>
-          <a:prstGeom prst="roundRect">
-            <a:avLst>
-              <a:gd name="adj" fmla="val 12500"/>
-            </a:avLst>
-          </a:prstGeom>
-          <a:solidFill>
-            <a:srgbClr val="F4F7FD"/>
-          </a:solidFill>
-          <a:ln/>
-        </p:spPr>
-      </p:sp>
-      <p:sp>
-        <p:nvSpPr>
-          <p:cNvPr id="49" name="Shape 46"/>
-          <p:cNvSpPr/>
-          <p:nvPr/>
-        </p:nvSpPr>
-        <p:spPr>
-          <a:xfrm>
-            <a:off x="5120640" y="5010912"/>
-            <a:ext cx="2103120" cy="585216"/>
-          </a:xfrm>
-          <a:prstGeom prst="roundRect">
-            <a:avLst>
-              <a:gd name="adj" fmla="val 12500"/>
-            </a:avLst>
-          </a:prstGeom>
-          <a:solidFill>
-            <a:srgbClr val="F4F7FD"/>
-          </a:solidFill>
-          <a:ln/>
-        </p:spPr>
-      </p:sp>
-      <p:sp>
-        <p:nvSpPr>
-          <p:cNvPr id="50" name="Shape 47"/>
-          <p:cNvSpPr/>
-          <p:nvPr/>
-        </p:nvSpPr>
-        <p:spPr>
-          <a:xfrm>
-            <a:off x="7315200" y="5010912"/>
-            <a:ext cx="2103120" cy="585216"/>
-          </a:xfrm>
-          <a:prstGeom prst="roundRect">
-            <a:avLst>
-              <a:gd name="adj" fmla="val 12500"/>
-            </a:avLst>
-          </a:prstGeom>
-          <a:solidFill>
-            <a:srgbClr val="F4F7FD"/>
-          </a:solidFill>
-          <a:ln/>
-        </p:spPr>
-      </p:sp>
-      <p:sp>
-        <p:nvSpPr>
-          <p:cNvPr id="51" name="Shape 48"/>
-          <p:cNvSpPr/>
-          <p:nvPr/>
-        </p:nvSpPr>
-        <p:spPr>
-          <a:xfrm>
-            <a:off x="9509760" y="5010912"/>
-            <a:ext cx="2057400" cy="585216"/>
-          </a:xfrm>
-          <a:prstGeom prst="roundRect">
-            <a:avLst>
-              <a:gd name="adj" fmla="val 12500"/>
-            </a:avLst>
-          </a:prstGeom>
-          <a:solidFill>
-            <a:srgbClr val="F4F7FD"/>
-          </a:solidFill>
-          <a:ln/>
-        </p:spPr>
+              <a:t>Klerus (Geistliche) · Adel · Dritter Stand (Bauern und Bürger)</a:t>
+            </a:r>
+            <a:endParaRPr lang="en-US" sz="2400" dirty="0"/>
+          </a:p>
+        </p:txBody>
       </p:sp>
     </p:spTree>
   </p:cSld>
@@ -8164,13 +7027,13 @@
             <a:r>
               <a:rPr lang="en-US" sz="1300" b="1" spc="200" kern="0" dirty="0">
                 <a:solidFill>
-                  <a:srgbClr val="D9534F"/>
-                </a:solidFill>
-                <a:latin typeface="Calibri" pitchFamily="34" charset="0"/>
-                <a:ea typeface="Calibri" pitchFamily="34" charset="-122"/>
-                <a:cs typeface="Calibri" pitchFamily="34" charset="-120"/>
-              </a:rPr>
-              <a:t>MERKSATZ 3 · ABSCHREIBEN UND ROT UMRAHMEN</a:t>
+                  <a:srgbClr val="5B6B8C"/>
+                </a:solidFill>
+                <a:latin typeface="Calibri" pitchFamily="34" charset="0"/>
+                <a:ea typeface="Calibri" pitchFamily="34" charset="-122"/>
+                <a:cs typeface="Calibri" pitchFamily="34" charset="-120"/>
+              </a:rPr>
+              <a:t>ZUM SCHLUSS · STIFTE LIEGEN</a:t>
             </a:r>
             <a:endParaRPr lang="en-US" sz="1300" dirty="0"/>
           </a:p>
@@ -8209,7 +7072,7 @@
                 <a:ea typeface="Cambria" pitchFamily="34" charset="-122"/>
                 <a:cs typeface="Cambria" pitchFamily="34" charset="-120"/>
               </a:rPr>
-              <a:t>Die Ständegesellschaft</a:t>
+              <a:t>So lernst du bis zum Test</a:t>
             </a:r>
             <a:endParaRPr lang="en-US" sz="3400" dirty="0"/>
           </a:p>
@@ -8223,35 +7086,50 @@
         </p:nvSpPr>
         <p:spPr>
           <a:xfrm>
-            <a:off x="548640" y="1417320"/>
-            <a:ext cx="11109960" cy="1828800"/>
+            <a:off x="548640" y="1554480"/>
+            <a:ext cx="11109960" cy="822960"/>
           </a:xfrm>
           <a:prstGeom prst="roundRect">
             <a:avLst>
-              <a:gd name="adj" fmla="val 4000"/>
+              <a:gd name="adj" fmla="val 8889"/>
             </a:avLst>
           </a:prstGeom>
           <a:solidFill>
-            <a:srgbClr val="FFFFFF"/>
+            <a:srgbClr val="EAF0FA"/>
           </a:solidFill>
-          <a:ln w="38100">
-            <a:solidFill>
-              <a:srgbClr val="D9534F"/>
-            </a:solidFill>
-            <a:prstDash val="solid"/>
-          </a:ln>
-        </p:spPr>
-      </p:sp>
-      <p:sp>
-        <p:nvSpPr>
-          <p:cNvPr id="5" name="Text 3"/>
-          <p:cNvSpPr txBox="1"/>
-          <p:nvPr/>
-        </p:nvSpPr>
-        <p:spPr>
-          <a:xfrm>
-            <a:off x="868680" y="1508760"/>
-            <a:ext cx="10469880" cy="1645920"/>
+          <a:ln/>
+        </p:spPr>
+      </p:sp>
+      <p:sp>
+        <p:nvSpPr>
+          <p:cNvPr id="5" name="Shape 3"/>
+          <p:cNvSpPr/>
+          <p:nvPr/>
+        </p:nvSpPr>
+        <p:spPr>
+          <a:xfrm>
+            <a:off x="777240" y="1737360"/>
+            <a:ext cx="457200" cy="457200"/>
+          </a:xfrm>
+          <a:prstGeom prst="ellipse">
+            <a:avLst/>
+          </a:prstGeom>
+          <a:solidFill>
+            <a:srgbClr val="D9534F"/>
+          </a:solidFill>
+          <a:ln/>
+        </p:spPr>
+      </p:sp>
+      <p:sp>
+        <p:nvSpPr>
+          <p:cNvPr id="6" name="Text 4"/>
+          <p:cNvSpPr txBox="1"/>
+          <p:nvPr/>
+        </p:nvSpPr>
+        <p:spPr>
+          <a:xfrm>
+            <a:off x="777240" y="1737360"/>
+            <a:ext cx="457200" cy="457200"/>
           </a:xfrm>
           <a:prstGeom prst="rect">
             <a:avLst/>
@@ -8263,11 +7141,50 @@
           <a:bodyPr wrap="square" lIns="0" tIns="0" rIns="0" bIns="0" rtlCol="0" anchor="ctr"/>
           <a:lstStyle/>
           <a:p>
-            <a:pPr indent="0" marL="0">
-              <a:buNone/>
-            </a:pPr>
-            <a:r>
-              <a:rPr lang="en-US" sz="2000" dirty="0">
+            <a:pPr algn="ctr" indent="0" marL="0">
+              <a:buNone/>
+            </a:pPr>
+            <a:r>
+              <a:rPr lang="en-US" sz="1800" b="1" dirty="0">
+                <a:solidFill>
+                  <a:srgbClr val="FFFFFF"/>
+                </a:solidFill>
+                <a:latin typeface="Calibri" pitchFamily="34" charset="0"/>
+                <a:ea typeface="Calibri" pitchFamily="34" charset="-122"/>
+                <a:cs typeface="Calibri" pitchFamily="34" charset="-120"/>
+              </a:rPr>
+              <a:t>1</a:t>
+            </a:r>
+            <a:endParaRPr lang="en-US" sz="1800" dirty="0"/>
+          </a:p>
+        </p:txBody>
+      </p:sp>
+      <p:sp>
+        <p:nvSpPr>
+          <p:cNvPr id="7" name="Text 5"/>
+          <p:cNvSpPr txBox="1"/>
+          <p:nvPr/>
+        </p:nvSpPr>
+        <p:spPr>
+          <a:xfrm>
+            <a:off x="1463040" y="1554480"/>
+            <a:ext cx="9966960" cy="822960"/>
+          </a:xfrm>
+          <a:prstGeom prst="rect">
+            <a:avLst/>
+          </a:prstGeom>
+          <a:noFill/>
+          <a:ln/>
+        </p:spPr>
+        <p:txBody>
+          <a:bodyPr wrap="square" lIns="0" tIns="0" rIns="0" bIns="0" rtlCol="0" anchor="ctr"/>
+          <a:lstStyle/>
+          <a:p>
+            <a:pPr indent="0" marL="0">
+              <a:buNone/>
+            </a:pPr>
+            <a:r>
+              <a:rPr lang="en-US" sz="2400" dirty="0">
                 <a:solidFill>
                   <a:srgbClr val="1E2761"/>
                 </a:solidFill>
@@ -8275,13 +7192,119 @@
                 <a:ea typeface="Cambria" pitchFamily="34" charset="-122"/>
                 <a:cs typeface="Cambria" pitchFamily="34" charset="-120"/>
               </a:rPr>
-              <a:t>In der Ständegesellschaft gehört jeder Mensch </a:t>
-            </a:r>
-            <a:pPr indent="0" marL="0">
-              <a:buNone/>
-            </a:pPr>
-            <a:r>
-              <a:rPr lang="en-US" sz="2000" b="1" dirty="0">
+              <a:t>Merksatz 2 auswendig: Was bedeutet Absolutismus?</a:t>
+            </a:r>
+            <a:endParaRPr lang="en-US" sz="2400" dirty="0"/>
+          </a:p>
+        </p:txBody>
+      </p:sp>
+      <p:sp>
+        <p:nvSpPr>
+          <p:cNvPr id="8" name="Shape 6"/>
+          <p:cNvSpPr/>
+          <p:nvPr/>
+        </p:nvSpPr>
+        <p:spPr>
+          <a:xfrm>
+            <a:off x="548640" y="2514600"/>
+            <a:ext cx="11109960" cy="822960"/>
+          </a:xfrm>
+          <a:prstGeom prst="roundRect">
+            <a:avLst>
+              <a:gd name="adj" fmla="val 8889"/>
+            </a:avLst>
+          </a:prstGeom>
+          <a:solidFill>
+            <a:srgbClr val="F4F7FD"/>
+          </a:solidFill>
+          <a:ln/>
+        </p:spPr>
+      </p:sp>
+      <p:sp>
+        <p:nvSpPr>
+          <p:cNvPr id="9" name="Shape 7"/>
+          <p:cNvSpPr/>
+          <p:nvPr/>
+        </p:nvSpPr>
+        <p:spPr>
+          <a:xfrm>
+            <a:off x="777240" y="2697480"/>
+            <a:ext cx="457200" cy="457200"/>
+          </a:xfrm>
+          <a:prstGeom prst="ellipse">
+            <a:avLst/>
+          </a:prstGeom>
+          <a:solidFill>
+            <a:srgbClr val="D9534F"/>
+          </a:solidFill>
+          <a:ln/>
+        </p:spPr>
+      </p:sp>
+      <p:sp>
+        <p:nvSpPr>
+          <p:cNvPr id="10" name="Text 8"/>
+          <p:cNvSpPr txBox="1"/>
+          <p:nvPr/>
+        </p:nvSpPr>
+        <p:spPr>
+          <a:xfrm>
+            <a:off x="777240" y="2697480"/>
+            <a:ext cx="457200" cy="457200"/>
+          </a:xfrm>
+          <a:prstGeom prst="rect">
+            <a:avLst/>
+          </a:prstGeom>
+          <a:noFill/>
+          <a:ln/>
+        </p:spPr>
+        <p:txBody>
+          <a:bodyPr wrap="square" lIns="0" tIns="0" rIns="0" bIns="0" rtlCol="0" anchor="ctr"/>
+          <a:lstStyle/>
+          <a:p>
+            <a:pPr algn="ctr" indent="0" marL="0">
+              <a:buNone/>
+            </a:pPr>
+            <a:r>
+              <a:rPr lang="en-US" sz="1800" b="1" dirty="0">
+                <a:solidFill>
+                  <a:srgbClr val="FFFFFF"/>
+                </a:solidFill>
+                <a:latin typeface="Calibri" pitchFamily="34" charset="0"/>
+                <a:ea typeface="Calibri" pitchFamily="34" charset="-122"/>
+                <a:cs typeface="Calibri" pitchFamily="34" charset="-120"/>
+              </a:rPr>
+              <a:t>2</a:t>
+            </a:r>
+            <a:endParaRPr lang="en-US" sz="1800" dirty="0"/>
+          </a:p>
+        </p:txBody>
+      </p:sp>
+      <p:sp>
+        <p:nvSpPr>
+          <p:cNvPr id="11" name="Text 9"/>
+          <p:cNvSpPr txBox="1"/>
+          <p:nvPr/>
+        </p:nvSpPr>
+        <p:spPr>
+          <a:xfrm>
+            <a:off x="1463040" y="2514600"/>
+            <a:ext cx="9966960" cy="822960"/>
+          </a:xfrm>
+          <a:prstGeom prst="rect">
+            <a:avLst/>
+          </a:prstGeom>
+          <a:noFill/>
+          <a:ln/>
+        </p:spPr>
+        <p:txBody>
+          <a:bodyPr wrap="square" lIns="0" tIns="0" rIns="0" bIns="0" rtlCol="0" anchor="ctr"/>
+          <a:lstStyle/>
+          <a:p>
+            <a:pPr indent="0" marL="0">
+              <a:buNone/>
+            </a:pPr>
+            <a:r>
+              <a:rPr lang="en-US" sz="2400" dirty="0">
                 <a:solidFill>
                   <a:srgbClr val="1E2761"/>
                 </a:solidFill>
@@ -8289,13 +7312,119 @@
                 <a:ea typeface="Cambria" pitchFamily="34" charset="-122"/>
                 <a:cs typeface="Cambria" pitchFamily="34" charset="-120"/>
               </a:rPr>
-              <a:t>durch Geburt</a:t>
-            </a:r>
-            <a:pPr indent="0" marL="0">
-              <a:buNone/>
-            </a:pPr>
-            <a:r>
-              <a:rPr lang="en-US" sz="2000" dirty="0">
+              <a:t>Lückentext noch einmal ohne Wortspeicher ausfüllen</a:t>
+            </a:r>
+            <a:endParaRPr lang="en-US" sz="2400" dirty="0"/>
+          </a:p>
+        </p:txBody>
+      </p:sp>
+      <p:sp>
+        <p:nvSpPr>
+          <p:cNvPr id="12" name="Shape 10"/>
+          <p:cNvSpPr/>
+          <p:nvPr/>
+        </p:nvSpPr>
+        <p:spPr>
+          <a:xfrm>
+            <a:off x="548640" y="3474720"/>
+            <a:ext cx="11109960" cy="822960"/>
+          </a:xfrm>
+          <a:prstGeom prst="roundRect">
+            <a:avLst>
+              <a:gd name="adj" fmla="val 8889"/>
+            </a:avLst>
+          </a:prstGeom>
+          <a:solidFill>
+            <a:srgbClr val="EAF0FA"/>
+          </a:solidFill>
+          <a:ln/>
+        </p:spPr>
+      </p:sp>
+      <p:sp>
+        <p:nvSpPr>
+          <p:cNvPr id="13" name="Shape 11"/>
+          <p:cNvSpPr/>
+          <p:nvPr/>
+        </p:nvSpPr>
+        <p:spPr>
+          <a:xfrm>
+            <a:off x="777240" y="3657600"/>
+            <a:ext cx="457200" cy="457200"/>
+          </a:xfrm>
+          <a:prstGeom prst="ellipse">
+            <a:avLst/>
+          </a:prstGeom>
+          <a:solidFill>
+            <a:srgbClr val="D9534F"/>
+          </a:solidFill>
+          <a:ln/>
+        </p:spPr>
+      </p:sp>
+      <p:sp>
+        <p:nvSpPr>
+          <p:cNvPr id="14" name="Text 12"/>
+          <p:cNvSpPr txBox="1"/>
+          <p:nvPr/>
+        </p:nvSpPr>
+        <p:spPr>
+          <a:xfrm>
+            <a:off x="777240" y="3657600"/>
+            <a:ext cx="457200" cy="457200"/>
+          </a:xfrm>
+          <a:prstGeom prst="rect">
+            <a:avLst/>
+          </a:prstGeom>
+          <a:noFill/>
+          <a:ln/>
+        </p:spPr>
+        <p:txBody>
+          <a:bodyPr wrap="square" lIns="0" tIns="0" rIns="0" bIns="0" rtlCol="0" anchor="ctr"/>
+          <a:lstStyle/>
+          <a:p>
+            <a:pPr algn="ctr" indent="0" marL="0">
+              <a:buNone/>
+            </a:pPr>
+            <a:r>
+              <a:rPr lang="en-US" sz="1800" b="1" dirty="0">
+                <a:solidFill>
+                  <a:srgbClr val="FFFFFF"/>
+                </a:solidFill>
+                <a:latin typeface="Calibri" pitchFamily="34" charset="0"/>
+                <a:ea typeface="Calibri" pitchFamily="34" charset="-122"/>
+                <a:cs typeface="Calibri" pitchFamily="34" charset="-120"/>
+              </a:rPr>
+              <a:t>3</a:t>
+            </a:r>
+            <a:endParaRPr lang="en-US" sz="1800" dirty="0"/>
+          </a:p>
+        </p:txBody>
+      </p:sp>
+      <p:sp>
+        <p:nvSpPr>
+          <p:cNvPr id="15" name="Text 13"/>
+          <p:cNvSpPr txBox="1"/>
+          <p:nvPr/>
+        </p:nvSpPr>
+        <p:spPr>
+          <a:xfrm>
+            <a:off x="1463040" y="3474720"/>
+            <a:ext cx="9966960" cy="822960"/>
+          </a:xfrm>
+          <a:prstGeom prst="rect">
+            <a:avLst/>
+          </a:prstGeom>
+          <a:noFill/>
+          <a:ln/>
+        </p:spPr>
+        <p:txBody>
+          <a:bodyPr wrap="square" lIns="0" tIns="0" rIns="0" bIns="0" rtlCol="0" anchor="ctr"/>
+          <a:lstStyle/>
+          <a:p>
+            <a:pPr indent="0" marL="0">
+              <a:buNone/>
+            </a:pPr>
+            <a:r>
+              <a:rPr lang="en-US" sz="2400" dirty="0">
                 <a:solidFill>
                   <a:srgbClr val="1E2761"/>
                 </a:solidFill>
@@ -8303,13 +7432,119 @@
                 <a:ea typeface="Cambria" pitchFamily="34" charset="-122"/>
                 <a:cs typeface="Cambria" pitchFamily="34" charset="-120"/>
               </a:rPr>
-              <a:t> zu einem von </a:t>
-            </a:r>
-            <a:pPr indent="0" marL="0">
-              <a:buNone/>
-            </a:pPr>
-            <a:r>
-              <a:rPr lang="en-US" sz="2000" b="1" dirty="0">
+              <a:t>Tabelle Ständegesellschaft aus dem Kopf aufschreiben</a:t>
+            </a:r>
+            <a:endParaRPr lang="en-US" sz="2400" dirty="0"/>
+          </a:p>
+        </p:txBody>
+      </p:sp>
+      <p:sp>
+        <p:nvSpPr>
+          <p:cNvPr id="16" name="Shape 14"/>
+          <p:cNvSpPr/>
+          <p:nvPr/>
+        </p:nvSpPr>
+        <p:spPr>
+          <a:xfrm>
+            <a:off x="548640" y="4434840"/>
+            <a:ext cx="11109960" cy="822960"/>
+          </a:xfrm>
+          <a:prstGeom prst="roundRect">
+            <a:avLst>
+              <a:gd name="adj" fmla="val 8889"/>
+            </a:avLst>
+          </a:prstGeom>
+          <a:solidFill>
+            <a:srgbClr val="F4F7FD"/>
+          </a:solidFill>
+          <a:ln/>
+        </p:spPr>
+      </p:sp>
+      <p:sp>
+        <p:nvSpPr>
+          <p:cNvPr id="17" name="Shape 15"/>
+          <p:cNvSpPr/>
+          <p:nvPr/>
+        </p:nvSpPr>
+        <p:spPr>
+          <a:xfrm>
+            <a:off x="777240" y="4617720"/>
+            <a:ext cx="457200" cy="457200"/>
+          </a:xfrm>
+          <a:prstGeom prst="ellipse">
+            <a:avLst/>
+          </a:prstGeom>
+          <a:solidFill>
+            <a:srgbClr val="D9534F"/>
+          </a:solidFill>
+          <a:ln/>
+        </p:spPr>
+      </p:sp>
+      <p:sp>
+        <p:nvSpPr>
+          <p:cNvPr id="18" name="Text 16"/>
+          <p:cNvSpPr txBox="1"/>
+          <p:nvPr/>
+        </p:nvSpPr>
+        <p:spPr>
+          <a:xfrm>
+            <a:off x="777240" y="4617720"/>
+            <a:ext cx="457200" cy="457200"/>
+          </a:xfrm>
+          <a:prstGeom prst="rect">
+            <a:avLst/>
+          </a:prstGeom>
+          <a:noFill/>
+          <a:ln/>
+        </p:spPr>
+        <p:txBody>
+          <a:bodyPr wrap="square" lIns="0" tIns="0" rIns="0" bIns="0" rtlCol="0" anchor="ctr"/>
+          <a:lstStyle/>
+          <a:p>
+            <a:pPr algn="ctr" indent="0" marL="0">
+              <a:buNone/>
+            </a:pPr>
+            <a:r>
+              <a:rPr lang="en-US" sz="1800" b="1" dirty="0">
+                <a:solidFill>
+                  <a:srgbClr val="FFFFFF"/>
+                </a:solidFill>
+                <a:latin typeface="Calibri" pitchFamily="34" charset="0"/>
+                <a:ea typeface="Calibri" pitchFamily="34" charset="-122"/>
+                <a:cs typeface="Calibri" pitchFamily="34" charset="-120"/>
+              </a:rPr>
+              <a:t>4</a:t>
+            </a:r>
+            <a:endParaRPr lang="en-US" sz="1800" dirty="0"/>
+          </a:p>
+        </p:txBody>
+      </p:sp>
+      <p:sp>
+        <p:nvSpPr>
+          <p:cNvPr id="19" name="Text 17"/>
+          <p:cNvSpPr txBox="1"/>
+          <p:nvPr/>
+        </p:nvSpPr>
+        <p:spPr>
+          <a:xfrm>
+            <a:off x="1463040" y="4434840"/>
+            <a:ext cx="9966960" cy="822960"/>
+          </a:xfrm>
+          <a:prstGeom prst="rect">
+            <a:avLst/>
+          </a:prstGeom>
+          <a:noFill/>
+          <a:ln/>
+        </p:spPr>
+        <p:txBody>
+          <a:bodyPr wrap="square" lIns="0" tIns="0" rIns="0" bIns="0" rtlCol="0" anchor="ctr"/>
+          <a:lstStyle/>
+          <a:p>
+            <a:pPr indent="0" marL="0">
+              <a:buNone/>
+            </a:pPr>
+            <a:r>
+              <a:rPr lang="en-US" sz="2400" dirty="0">
                 <a:solidFill>
                   <a:srgbClr val="1E2761"/>
                 </a:solidFill>
@@ -8317,467 +7552,26 @@
                 <a:ea typeface="Cambria" pitchFamily="34" charset="-122"/>
                 <a:cs typeface="Cambria" pitchFamily="34" charset="-120"/>
               </a:rPr>
-              <a:t>drei Ständen</a:t>
-            </a:r>
-            <a:pPr indent="0" marL="0">
-              <a:buNone/>
-            </a:pPr>
-            <a:r>
-              <a:rPr lang="en-US" sz="2000" dirty="0">
-                <a:solidFill>
-                  <a:srgbClr val="1E2761"/>
-                </a:solidFill>
-                <a:latin typeface="Cambria" pitchFamily="34" charset="0"/>
-                <a:ea typeface="Cambria" pitchFamily="34" charset="-122"/>
-                <a:cs typeface="Cambria" pitchFamily="34" charset="-120"/>
-              </a:rPr>
-              <a:t>: </a:t>
-            </a:r>
-            <a:pPr indent="0" marL="0">
-              <a:buNone/>
-            </a:pPr>
-            <a:r>
-              <a:rPr lang="en-US" sz="2000" b="1" dirty="0">
-                <a:solidFill>
-                  <a:srgbClr val="1E2761"/>
-                </a:solidFill>
-                <a:latin typeface="Cambria" pitchFamily="34" charset="0"/>
-                <a:ea typeface="Cambria" pitchFamily="34" charset="-122"/>
-                <a:cs typeface="Cambria" pitchFamily="34" charset="-120"/>
-              </a:rPr>
-              <a:t>Klerus (ca. 150 000)</a:t>
-            </a:r>
-            <a:pPr indent="0" marL="0">
-              <a:buNone/>
-            </a:pPr>
-            <a:r>
-              <a:rPr lang="en-US" sz="2000" dirty="0">
-                <a:solidFill>
-                  <a:srgbClr val="1E2761"/>
-                </a:solidFill>
-                <a:latin typeface="Cambria" pitchFamily="34" charset="0"/>
-                <a:ea typeface="Cambria" pitchFamily="34" charset="-122"/>
-                <a:cs typeface="Cambria" pitchFamily="34" charset="-120"/>
-              </a:rPr>
-              <a:t>, </a:t>
-            </a:r>
-            <a:pPr indent="0" marL="0">
-              <a:buNone/>
-            </a:pPr>
-            <a:r>
-              <a:rPr lang="en-US" sz="2000" b="1" dirty="0">
-                <a:solidFill>
-                  <a:srgbClr val="1E2761"/>
-                </a:solidFill>
-                <a:latin typeface="Cambria" pitchFamily="34" charset="0"/>
-                <a:ea typeface="Cambria" pitchFamily="34" charset="-122"/>
-                <a:cs typeface="Cambria" pitchFamily="34" charset="-120"/>
-              </a:rPr>
-              <a:t>Adel (ca. 500 000)</a:t>
-            </a:r>
-            <a:pPr indent="0" marL="0">
-              <a:buNone/>
-            </a:pPr>
-            <a:r>
-              <a:rPr lang="en-US" sz="2000" dirty="0">
-                <a:solidFill>
-                  <a:srgbClr val="1E2761"/>
-                </a:solidFill>
-                <a:latin typeface="Cambria" pitchFamily="34" charset="0"/>
-                <a:ea typeface="Cambria" pitchFamily="34" charset="-122"/>
-                <a:cs typeface="Cambria" pitchFamily="34" charset="-120"/>
-              </a:rPr>
-              <a:t> und </a:t>
-            </a:r>
-            <a:pPr indent="0" marL="0">
-              <a:buNone/>
-            </a:pPr>
-            <a:r>
-              <a:rPr lang="en-US" sz="2000" b="1" dirty="0">
-                <a:solidFill>
-                  <a:srgbClr val="1E2761"/>
-                </a:solidFill>
-                <a:latin typeface="Cambria" pitchFamily="34" charset="0"/>
-                <a:ea typeface="Cambria" pitchFamily="34" charset="-122"/>
-                <a:cs typeface="Cambria" pitchFamily="34" charset="-120"/>
-              </a:rPr>
-              <a:t>Dritter Stand (Bauern und Bürger, ca. 20 000 000)</a:t>
-            </a:r>
-            <a:pPr indent="0" marL="0">
-              <a:buNone/>
-            </a:pPr>
-            <a:r>
-              <a:rPr lang="en-US" sz="2000" dirty="0">
-                <a:solidFill>
-                  <a:srgbClr val="1E2761"/>
-                </a:solidFill>
-                <a:latin typeface="Cambria" pitchFamily="34" charset="0"/>
-                <a:ea typeface="Cambria" pitchFamily="34" charset="-122"/>
-                <a:cs typeface="Cambria" pitchFamily="34" charset="-120"/>
-              </a:rPr>
-              <a:t>. Klerus und Adel haben </a:t>
-            </a:r>
-            <a:pPr indent="0" marL="0">
-              <a:buNone/>
-            </a:pPr>
-            <a:r>
-              <a:rPr lang="en-US" sz="2000" b="1" dirty="0">
-                <a:solidFill>
-                  <a:srgbClr val="1E2761"/>
-                </a:solidFill>
-                <a:latin typeface="Cambria" pitchFamily="34" charset="0"/>
-                <a:ea typeface="Cambria" pitchFamily="34" charset="-122"/>
-                <a:cs typeface="Cambria" pitchFamily="34" charset="-120"/>
-              </a:rPr>
-              <a:t>Vorrechte</a:t>
-            </a:r>
-            <a:pPr indent="0" marL="0">
-              <a:buNone/>
-            </a:pPr>
-            <a:r>
-              <a:rPr lang="en-US" sz="2000" dirty="0">
-                <a:solidFill>
-                  <a:srgbClr val="1E2761"/>
-                </a:solidFill>
-                <a:latin typeface="Cambria" pitchFamily="34" charset="0"/>
-                <a:ea typeface="Cambria" pitchFamily="34" charset="-122"/>
-                <a:cs typeface="Cambria" pitchFamily="34" charset="-120"/>
-              </a:rPr>
-              <a:t>. Der Dritte Stand zahlt </a:t>
-            </a:r>
-            <a:pPr indent="0" marL="0">
-              <a:buNone/>
-            </a:pPr>
-            <a:r>
-              <a:rPr lang="en-US" sz="2000" b="1" dirty="0">
-                <a:solidFill>
-                  <a:srgbClr val="1E2761"/>
-                </a:solidFill>
-                <a:latin typeface="Cambria" pitchFamily="34" charset="0"/>
-                <a:ea typeface="Cambria" pitchFamily="34" charset="-122"/>
-                <a:cs typeface="Cambria" pitchFamily="34" charset="-120"/>
-              </a:rPr>
-              <a:t>Steuern und Abgaben</a:t>
-            </a:r>
-            <a:pPr indent="0" marL="0">
-              <a:buNone/>
-            </a:pPr>
-            <a:r>
-              <a:rPr lang="en-US" sz="2000" dirty="0">
-                <a:solidFill>
-                  <a:srgbClr val="1E2761"/>
-                </a:solidFill>
-                <a:latin typeface="Cambria" pitchFamily="34" charset="0"/>
-                <a:ea typeface="Cambria" pitchFamily="34" charset="-122"/>
-                <a:cs typeface="Cambria" pitchFamily="34" charset="-120"/>
-              </a:rPr>
-              <a:t> und ist von der </a:t>
-            </a:r>
-            <a:pPr indent="0" marL="0">
-              <a:buNone/>
-            </a:pPr>
-            <a:r>
-              <a:rPr lang="en-US" sz="2000" b="1" dirty="0">
-                <a:solidFill>
-                  <a:srgbClr val="1E2761"/>
-                </a:solidFill>
-                <a:latin typeface="Cambria" pitchFamily="34" charset="0"/>
-                <a:ea typeface="Cambria" pitchFamily="34" charset="-122"/>
-                <a:cs typeface="Cambria" pitchFamily="34" charset="-120"/>
-              </a:rPr>
-              <a:t>politischen Mitbestimmung ausgeschlossen</a:t>
-            </a:r>
-            <a:pPr indent="0" marL="0">
-              <a:buNone/>
-            </a:pPr>
-            <a:r>
-              <a:rPr lang="en-US" sz="2000" dirty="0">
-                <a:solidFill>
-                  <a:srgbClr val="1E2761"/>
-                </a:solidFill>
-                <a:latin typeface="Cambria" pitchFamily="34" charset="0"/>
-                <a:ea typeface="Cambria" pitchFamily="34" charset="-122"/>
-                <a:cs typeface="Cambria" pitchFamily="34" charset="-120"/>
-              </a:rPr>
-              <a:t>.</a:t>
-            </a:r>
-            <a:endParaRPr lang="en-US" sz="2000" dirty="0"/>
-          </a:p>
-        </p:txBody>
-      </p:sp>
-      <p:sp>
-        <p:nvSpPr>
-          <p:cNvPr id="6" name="Shape 4"/>
+              <a:t>Deinen Ü3-Satz zu einem zweiten Stand noch einmal schreiben</a:t>
+            </a:r>
+            <a:endParaRPr lang="en-US" sz="2400" dirty="0"/>
+          </a:p>
+        </p:txBody>
+      </p:sp>
+      <p:sp>
+        <p:nvSpPr>
+          <p:cNvPr id="20" name="Shape 18"/>
           <p:cNvSpPr/>
           <p:nvPr/>
         </p:nvSpPr>
         <p:spPr>
           <a:xfrm>
-            <a:off x="548640" y="3383280"/>
-            <a:ext cx="11109960" cy="548640"/>
+            <a:off x="548640" y="5669280"/>
+            <a:ext cx="11109960" cy="777240"/>
           </a:xfrm>
           <a:prstGeom prst="roundRect">
             <a:avLst>
-              <a:gd name="adj" fmla="val 13333"/>
-            </a:avLst>
-          </a:prstGeom>
-          <a:solidFill>
-            <a:srgbClr val="EAF0FA"/>
-          </a:solidFill>
-          <a:ln/>
-        </p:spPr>
-      </p:sp>
-      <p:sp>
-        <p:nvSpPr>
-          <p:cNvPr id="7" name="Text 5"/>
-          <p:cNvSpPr txBox="1"/>
-          <p:nvPr/>
-        </p:nvSpPr>
-        <p:spPr>
-          <a:xfrm>
-            <a:off x="822960" y="3383280"/>
-            <a:ext cx="10607040" cy="548640"/>
-          </a:xfrm>
-          <a:prstGeom prst="rect">
-            <a:avLst/>
-          </a:prstGeom>
-          <a:noFill/>
-          <a:ln/>
-        </p:spPr>
-        <p:txBody>
-          <a:bodyPr wrap="square" lIns="0" tIns="0" rIns="0" bIns="0" rtlCol="0" anchor="ctr"/>
-          <a:lstStyle/>
-          <a:p>
-            <a:pPr indent="0" marL="0">
-              <a:buNone/>
-            </a:pPr>
-            <a:r>
-              <a:rPr lang="en-US" sz="1700" b="1" dirty="0">
-                <a:solidFill>
-                  <a:srgbClr val="5B6B8C"/>
-                </a:solidFill>
-                <a:latin typeface="Calibri" pitchFamily="34" charset="0"/>
-                <a:ea typeface="Calibri" pitchFamily="34" charset="-122"/>
-                <a:cs typeface="Calibri" pitchFamily="34" charset="-120"/>
-              </a:rPr>
-              <a:t>Beispiel:   </a:t>
-            </a:r>
-            <a:pPr indent="0" marL="0">
-              <a:buNone/>
-            </a:pPr>
-            <a:r>
-              <a:rPr lang="en-US" sz="1900" dirty="0">
-                <a:solidFill>
-                  <a:srgbClr val="1E2761"/>
-                </a:solidFill>
-                <a:latin typeface="Cambria" pitchFamily="34" charset="0"/>
-                <a:ea typeface="Cambria" pitchFamily="34" charset="-122"/>
-                <a:cs typeface="Cambria" pitchFamily="34" charset="-120"/>
-              </a:rPr>
-              <a:t>Adel: </a:t>
-            </a:r>
-            <a:pPr indent="0" marL="0">
-              <a:buNone/>
-            </a:pPr>
-            <a:r>
-              <a:rPr lang="en-US" sz="1900" b="1" dirty="0">
-                <a:solidFill>
-                  <a:srgbClr val="1E2761"/>
-                </a:solidFill>
-                <a:latin typeface="Cambria" pitchFamily="34" charset="0"/>
-                <a:ea typeface="Cambria" pitchFamily="34" charset="-122"/>
-                <a:cs typeface="Cambria" pitchFamily="34" charset="-120"/>
-              </a:rPr>
-              <a:t>Jagdrecht</a:t>
-            </a:r>
-            <a:pPr indent="0" marL="0">
-              <a:buNone/>
-            </a:pPr>
-            <a:r>
-              <a:rPr lang="en-US" sz="1900" dirty="0">
-                <a:solidFill>
-                  <a:srgbClr val="1E2761"/>
-                </a:solidFill>
-                <a:latin typeface="Cambria" pitchFamily="34" charset="0"/>
-                <a:ea typeface="Cambria" pitchFamily="34" charset="-122"/>
-                <a:cs typeface="Cambria" pitchFamily="34" charset="-120"/>
-              </a:rPr>
-              <a:t> · Klerus: </a:t>
-            </a:r>
-            <a:pPr indent="0" marL="0">
-              <a:buNone/>
-            </a:pPr>
-            <a:r>
-              <a:rPr lang="en-US" sz="1900" b="1" dirty="0">
-                <a:solidFill>
-                  <a:srgbClr val="1E2761"/>
-                </a:solidFill>
-                <a:latin typeface="Cambria" pitchFamily="34" charset="0"/>
-                <a:ea typeface="Cambria" pitchFamily="34" charset="-122"/>
-                <a:cs typeface="Cambria" pitchFamily="34" charset="-120"/>
-              </a:rPr>
-              <a:t>Kirchenzehnt</a:t>
-            </a:r>
-            <a:pPr indent="0" marL="0">
-              <a:buNone/>
-            </a:pPr>
-            <a:r>
-              <a:rPr lang="en-US" sz="1900" dirty="0">
-                <a:solidFill>
-                  <a:srgbClr val="1E2761"/>
-                </a:solidFill>
-                <a:latin typeface="Cambria" pitchFamily="34" charset="0"/>
-                <a:ea typeface="Cambria" pitchFamily="34" charset="-122"/>
-                <a:cs typeface="Cambria" pitchFamily="34" charset="-120"/>
-              </a:rPr>
-              <a:t> · Dritter Stand: </a:t>
-            </a:r>
-            <a:pPr indent="0" marL="0">
-              <a:buNone/>
-            </a:pPr>
-            <a:r>
-              <a:rPr lang="en-US" sz="1900" b="1" dirty="0">
-                <a:solidFill>
-                  <a:srgbClr val="1E2761"/>
-                </a:solidFill>
-                <a:latin typeface="Cambria" pitchFamily="34" charset="0"/>
-                <a:ea typeface="Cambria" pitchFamily="34" charset="-122"/>
-                <a:cs typeface="Cambria" pitchFamily="34" charset="-120"/>
-              </a:rPr>
-              <a:t>Abgaben</a:t>
-            </a:r>
-            <a:endParaRPr lang="en-US" sz="1900" dirty="0"/>
-          </a:p>
-        </p:txBody>
-      </p:sp>
-      <p:sp>
-        <p:nvSpPr>
-          <p:cNvPr id="8" name="Shape 6"/>
-          <p:cNvSpPr/>
-          <p:nvPr/>
-        </p:nvSpPr>
-        <p:spPr>
-          <a:xfrm>
-            <a:off x="548640" y="4069080"/>
-            <a:ext cx="11109960" cy="1645920"/>
-          </a:xfrm>
-          <a:prstGeom prst="roundRect">
-            <a:avLst>
-              <a:gd name="adj" fmla="val 4444"/>
-            </a:avLst>
-          </a:prstGeom>
-          <a:solidFill>
-            <a:srgbClr val="F4F7FD"/>
-          </a:solidFill>
-          <a:ln/>
-        </p:spPr>
-      </p:sp>
-      <p:sp>
-        <p:nvSpPr>
-          <p:cNvPr id="9" name="Text 7"/>
-          <p:cNvSpPr txBox="1"/>
-          <p:nvPr/>
-        </p:nvSpPr>
-        <p:spPr>
-          <a:xfrm>
-            <a:off x="777240" y="4187952"/>
-            <a:ext cx="10607040" cy="365760"/>
-          </a:xfrm>
-          <a:prstGeom prst="rect">
-            <a:avLst/>
-          </a:prstGeom>
-          <a:noFill/>
-          <a:ln/>
-        </p:spPr>
-        <p:txBody>
-          <a:bodyPr wrap="square" lIns="0" tIns="0" rIns="0" bIns="0" rtlCol="0" anchor="t"/>
-          <a:lstStyle/>
-          <a:p>
-            <a:pPr indent="0" marL="0">
-              <a:buNone/>
-            </a:pPr>
-            <a:r>
-              <a:rPr lang="en-US" sz="1900" b="1" dirty="0">
-                <a:solidFill>
-                  <a:srgbClr val="D9534F"/>
-                </a:solidFill>
-                <a:latin typeface="Cambria" pitchFamily="34" charset="0"/>
-                <a:ea typeface="Cambria" pitchFamily="34" charset="-122"/>
-                <a:cs typeface="Cambria" pitchFamily="34" charset="-120"/>
-              </a:rPr>
-              <a:t>Test</a:t>
-            </a:r>
-            <a:endParaRPr lang="en-US" sz="1900" dirty="0"/>
-          </a:p>
-        </p:txBody>
-      </p:sp>
-      <p:sp>
-        <p:nvSpPr>
-          <p:cNvPr id="10" name="Text 8"/>
-          <p:cNvSpPr txBox="1"/>
-          <p:nvPr/>
-        </p:nvSpPr>
-        <p:spPr>
-          <a:xfrm>
-            <a:off x="777240" y="4572000"/>
-            <a:ext cx="10607040" cy="1051560"/>
-          </a:xfrm>
-          <a:prstGeom prst="rect">
-            <a:avLst/>
-          </a:prstGeom>
-          <a:noFill/>
-          <a:ln/>
-        </p:spPr>
-        <p:txBody>
-          <a:bodyPr wrap="square" lIns="0" tIns="0" rIns="0" bIns="0" rtlCol="0" anchor="t"/>
-          <a:lstStyle/>
-          <a:p>
-            <a:pPr indent="0" marL="0">
-              <a:buNone/>
-            </a:pPr>
-            <a:r>
-              <a:rPr lang="en-US" sz="2200" dirty="0">
-                <a:solidFill>
-                  <a:srgbClr val="1E2761"/>
-                </a:solidFill>
-                <a:latin typeface="Calibri" pitchFamily="34" charset="0"/>
-                <a:ea typeface="Calibri" pitchFamily="34" charset="-122"/>
-                <a:cs typeface="Calibri" pitchFamily="34" charset="-120"/>
-              </a:rPr>
-              <a:t>Wer zahlt, wer ist ausgeschlossen? </a:t>
-            </a:r>
-            <a:pPr indent="0" marL="0">
-              <a:buNone/>
-            </a:pPr>
-            <a:r>
-              <a:rPr lang="en-US" sz="2200" b="1" dirty="0">
-                <a:solidFill>
-                  <a:srgbClr val="1E2761"/>
-                </a:solidFill>
-                <a:latin typeface="Calibri" pitchFamily="34" charset="0"/>
-                <a:ea typeface="Calibri" pitchFamily="34" charset="-122"/>
-                <a:cs typeface="Calibri" pitchFamily="34" charset="-120"/>
-              </a:rPr>
-              <a:t>Wenige Menschen haben die Vorrechte, viele tragen die Last.</a:t>
-            </a:r>
-            <a:endParaRPr lang="en-US" sz="2200" dirty="0"/>
-          </a:p>
-        </p:txBody>
-      </p:sp>
-      <p:sp>
-        <p:nvSpPr>
-          <p:cNvPr id="11" name="Shape 9"/>
-          <p:cNvSpPr/>
-          <p:nvPr/>
-        </p:nvSpPr>
-        <p:spPr>
-          <a:xfrm>
-            <a:off x="548640" y="5897880"/>
-            <a:ext cx="11109960" cy="548640"/>
-          </a:xfrm>
-          <a:prstGeom prst="roundRect">
-            <a:avLst>
-              <a:gd name="adj" fmla="val 13333"/>
+              <a:gd name="adj" fmla="val 9412"/>
             </a:avLst>
           </a:prstGeom>
           <a:solidFill>
@@ -8788,14 +7582,14 @@
       </p:sp>
       <p:sp>
         <p:nvSpPr>
-          <p:cNvPr id="12" name="Text 10"/>
-          <p:cNvSpPr txBox="1"/>
-          <p:nvPr/>
-        </p:nvSpPr>
-        <p:spPr>
-          <a:xfrm>
-            <a:off x="822960" y="5897880"/>
-            <a:ext cx="10607040" cy="548640"/>
+          <p:cNvPr id="21" name="Text 19"/>
+          <p:cNvSpPr txBox="1"/>
+          <p:nvPr/>
+        </p:nvSpPr>
+        <p:spPr>
+          <a:xfrm>
+            <a:off x="822960" y="5669280"/>
+            <a:ext cx="10607040" cy="777240"/>
           </a:xfrm>
           <a:prstGeom prst="rect">
             <a:avLst/>
@@ -8811,7 +7605,7 @@
               <a:buNone/>
             </a:pPr>
             <a:r>
-              <a:rPr lang="en-US" sz="1700" b="1" dirty="0">
+              <a:rPr lang="en-US" sz="2400" b="1" dirty="0">
                 <a:solidFill>
                   <a:srgbClr val="FFFFFF"/>
                 </a:solidFill>
@@ -8819,13 +7613,13 @@
                 <a:ea typeface="Calibri" pitchFamily="34" charset="-122"/>
                 <a:cs typeface="Calibri" pitchFamily="34" charset="-120"/>
               </a:rPr>
-              <a:t>Jetzt: </a:t>
-            </a:r>
-            <a:pPr indent="0" marL="0">
-              <a:buNone/>
-            </a:pPr>
-            <a:r>
-              <a:rPr lang="en-US" sz="1700" dirty="0">
+              <a:t>Test: </a:t>
+            </a:r>
+            <a:pPr indent="0" marL="0">
+              <a:buNone/>
+            </a:pPr>
+            <a:r>
+              <a:rPr lang="en-US" sz="2400" dirty="0">
                 <a:solidFill>
                   <a:srgbClr val="FFFFFF"/>
                 </a:solidFill>
@@ -8833,29 +7627,15 @@
                 <a:ea typeface="Calibri" pitchFamily="34" charset="-122"/>
                 <a:cs typeface="Calibri" pitchFamily="34" charset="-120"/>
               </a:rPr>
-              <a:t>Schreibe den Merksatz mit Beispiel ab und rahme ihn rot ein.      </a:t>
-            </a:r>
-            <a:pPr indent="0" marL="0">
-              <a:buNone/>
-            </a:pPr>
-            <a:r>
-              <a:rPr lang="en-US" sz="1700" i="1" dirty="0">
-                <a:solidFill>
-                  <a:srgbClr val="CADCFC"/>
-                </a:solidFill>
-                <a:latin typeface="Calibri" pitchFamily="34" charset="0"/>
-                <a:ea typeface="Calibri" pitchFamily="34" charset="-122"/>
-                <a:cs typeface="Calibri" pitchFamily="34" charset="-120"/>
-              </a:rPr>
-              <a:t>Fertig? Stift hinlegen.</a:t>
-            </a:r>
-            <a:endParaRPr lang="en-US" sz="1700" dirty="0"/>
-          </a:p>
-        </p:txBody>
-      </p:sp>
-      <p:sp>
-        <p:nvSpPr>
-          <p:cNvPr id="13" name="Text 11"/>
+              <a:t>nächste Woche · Ständegesellschaft · Absolutismus · fünf Säulen</a:t>
+            </a:r>
+            <a:endParaRPr lang="en-US" sz="2400" dirty="0"/>
+          </a:p>
+        </p:txBody>
+      </p:sp>
+      <p:sp>
+        <p:nvSpPr>
+          <p:cNvPr id="22" name="Text 20"/>
           <p:cNvSpPr txBox="1"/>
           <p:nvPr/>
         </p:nvSpPr>
@@ -8894,7 +7674,7 @@
       </p:sp>
       <p:sp>
         <p:nvSpPr>
-          <p:cNvPr id="14" name="Text 12"/>
+          <p:cNvPr id="23" name="Text 21"/>
           <p:cNvSpPr txBox="1"/>
           <p:nvPr/>
         </p:nvSpPr>
@@ -8928,762 +7708,6 @@
               <a:t>18</a:t>
             </a:r>
             <a:endParaRPr lang="en-US" sz="1000" dirty="0"/>
-          </a:p>
-        </p:txBody>
-      </p:sp>
-    </p:spTree>
-  </p:cSld>
-  <p:clrMapOvr>
-    <a:masterClrMapping/>
-  </p:clrMapOvr>
-</p:sld>
-</file>
-
-<file path=ppt/slides/slide19.xml><?xml version="1.0" encoding="utf-8"?>
-<p:sld xmlns:a="http://schemas.openxmlformats.org/drawingml/2006/main" xmlns:r="http://schemas.openxmlformats.org/officeDocument/2006/relationships" xmlns:p="http://schemas.openxmlformats.org/presentationml/2006/main">
-  <p:cSld name="Slide 19">
-    <p:bg>
-      <p:bgPr>
-        <a:solidFill>
-          <a:srgbClr val="FFFFFF"/>
-        </a:solidFill>
-      </p:bgPr>
-    </p:bg>
-    <p:spTree>
-      <p:nvGrpSpPr>
-        <p:cNvPr id="1" name=""/>
-        <p:cNvGrpSpPr/>
-        <p:nvPr/>
-      </p:nvGrpSpPr>
-      <p:grpSpPr>
-        <a:xfrm>
-          <a:off x="0" y="0"/>
-          <a:ext cx="0" cy="0"/>
-          <a:chOff x="0" y="0"/>
-          <a:chExt cx="0" cy="0"/>
-        </a:xfrm>
-      </p:grpSpPr>
-      <p:sp>
-        <p:nvSpPr>
-          <p:cNvPr id="2" name="Text 0"/>
-          <p:cNvSpPr txBox="1"/>
-          <p:nvPr/>
-        </p:nvSpPr>
-        <p:spPr>
-          <a:xfrm>
-            <a:off x="548640" y="320040"/>
-            <a:ext cx="7315200" cy="274320"/>
-          </a:xfrm>
-          <a:prstGeom prst="rect">
-            <a:avLst/>
-          </a:prstGeom>
-          <a:noFill/>
-          <a:ln/>
-        </p:spPr>
-        <p:txBody>
-          <a:bodyPr wrap="square" lIns="0" tIns="0" rIns="0" bIns="0" rtlCol="0" anchor="t"/>
-          <a:lstStyle/>
-          <a:p>
-            <a:pPr indent="0" marL="0">
-              <a:buNone/>
-            </a:pPr>
-            <a:r>
-              <a:rPr lang="en-US" sz="1300" b="1" spc="200" kern="0" dirty="0">
-                <a:solidFill>
-                  <a:srgbClr val="5B6B8C"/>
-                </a:solidFill>
-                <a:latin typeface="Calibri" pitchFamily="34" charset="0"/>
-                <a:ea typeface="Calibri" pitchFamily="34" charset="-122"/>
-                <a:cs typeface="Calibri" pitchFamily="34" charset="-120"/>
-              </a:rPr>
-              <a:t>ÜBUNG 4</a:t>
-            </a:r>
-            <a:endParaRPr lang="en-US" sz="1300" dirty="0"/>
-          </a:p>
-        </p:txBody>
-      </p:sp>
-      <p:sp>
-        <p:nvSpPr>
-          <p:cNvPr id="3" name="Text 1"/>
-          <p:cNvSpPr txBox="1"/>
-          <p:nvPr/>
-        </p:nvSpPr>
-        <p:spPr>
-          <a:xfrm>
-            <a:off x="548640" y="594360"/>
-            <a:ext cx="11064240" cy="685800"/>
-          </a:xfrm>
-          <a:prstGeom prst="rect">
-            <a:avLst/>
-          </a:prstGeom>
-          <a:noFill/>
-          <a:ln/>
-        </p:spPr>
-        <p:txBody>
-          <a:bodyPr wrap="square" lIns="0" tIns="0" rIns="0" bIns="0" rtlCol="0" anchor="t"/>
-          <a:lstStyle/>
-          <a:p>
-            <a:pPr indent="0" marL="0">
-              <a:buNone/>
-            </a:pPr>
-            <a:r>
-              <a:rPr lang="en-US" sz="3400" b="1" dirty="0">
-                <a:solidFill>
-                  <a:srgbClr val="1E2761"/>
-                </a:solidFill>
-                <a:latin typeface="Cambria" pitchFamily="34" charset="0"/>
-                <a:ea typeface="Cambria" pitchFamily="34" charset="-122"/>
-                <a:cs typeface="Cambria" pitchFamily="34" charset="-120"/>
-              </a:rPr>
-              <a:t>Im Absolutismus fühle ich mich …</a:t>
-            </a:r>
-            <a:endParaRPr lang="en-US" sz="3400" dirty="0"/>
-          </a:p>
-        </p:txBody>
-      </p:sp>
-      <p:sp>
-        <p:nvSpPr>
-          <p:cNvPr id="4" name="Shape 2"/>
-          <p:cNvSpPr/>
-          <p:nvPr/>
-        </p:nvSpPr>
-        <p:spPr>
-          <a:xfrm>
-            <a:off x="548640" y="1417320"/>
-            <a:ext cx="7406640" cy="2935224"/>
-          </a:xfrm>
-          <a:prstGeom prst="roundRect">
-            <a:avLst>
-              <a:gd name="adj" fmla="val 2492"/>
-            </a:avLst>
-          </a:prstGeom>
-          <a:solidFill>
-            <a:srgbClr val="EAF0FA"/>
-          </a:solidFill>
-          <a:ln/>
-        </p:spPr>
-      </p:sp>
-      <p:sp>
-        <p:nvSpPr>
-          <p:cNvPr id="5" name="Shape 3"/>
-          <p:cNvSpPr/>
-          <p:nvPr/>
-        </p:nvSpPr>
-        <p:spPr>
-          <a:xfrm>
-            <a:off x="731520" y="1568196"/>
-            <a:ext cx="384048" cy="384048"/>
-          </a:xfrm>
-          <a:prstGeom prst="ellipse">
-            <a:avLst/>
-          </a:prstGeom>
-          <a:solidFill>
-            <a:srgbClr val="1E2761"/>
-          </a:solidFill>
-          <a:ln/>
-        </p:spPr>
-      </p:sp>
-      <p:sp>
-        <p:nvSpPr>
-          <p:cNvPr id="6" name="Text 4"/>
-          <p:cNvSpPr txBox="1"/>
-          <p:nvPr/>
-        </p:nvSpPr>
-        <p:spPr>
-          <a:xfrm>
-            <a:off x="731520" y="1568196"/>
-            <a:ext cx="384048" cy="384048"/>
-          </a:xfrm>
-          <a:prstGeom prst="rect">
-            <a:avLst/>
-          </a:prstGeom>
-          <a:noFill/>
-          <a:ln/>
-        </p:spPr>
-        <p:txBody>
-          <a:bodyPr wrap="square" lIns="0" tIns="0" rIns="0" bIns="0" rtlCol="0" anchor="ctr"/>
-          <a:lstStyle/>
-          <a:p>
-            <a:pPr algn="ctr" indent="0" marL="0">
-              <a:buNone/>
-            </a:pPr>
-            <a:r>
-              <a:rPr lang="en-US" sz="1800" b="1" dirty="0">
-                <a:solidFill>
-                  <a:srgbClr val="FFFFFF"/>
-                </a:solidFill>
-                <a:latin typeface="Calibri" pitchFamily="34" charset="0"/>
-                <a:ea typeface="Calibri" pitchFamily="34" charset="-122"/>
-                <a:cs typeface="Calibri" pitchFamily="34" charset="-120"/>
-              </a:rPr>
-              <a:t>1</a:t>
-            </a:r>
-            <a:endParaRPr lang="en-US" sz="1800" dirty="0"/>
-          </a:p>
-        </p:txBody>
-      </p:sp>
-      <p:sp>
-        <p:nvSpPr>
-          <p:cNvPr id="7" name="Text 5"/>
-          <p:cNvSpPr txBox="1"/>
-          <p:nvPr/>
-        </p:nvSpPr>
-        <p:spPr>
-          <a:xfrm>
-            <a:off x="1280160" y="1554480"/>
-            <a:ext cx="6537960" cy="731520"/>
-          </a:xfrm>
-          <a:prstGeom prst="rect">
-            <a:avLst/>
-          </a:prstGeom>
-          <a:noFill/>
-          <a:ln/>
-        </p:spPr>
-        <p:txBody>
-          <a:bodyPr wrap="square" lIns="0" tIns="0" rIns="0" bIns="0" rtlCol="0" anchor="t"/>
-          <a:lstStyle/>
-          <a:p>
-            <a:pPr indent="0" marL="0">
-              <a:buNone/>
-            </a:pPr>
-            <a:r>
-              <a:rPr lang="en-US" sz="1800" b="1" dirty="0">
-                <a:solidFill>
-                  <a:srgbClr val="1E2761"/>
-                </a:solidFill>
-                <a:latin typeface="Calibri" pitchFamily="34" charset="0"/>
-                <a:ea typeface="Calibri" pitchFamily="34" charset="-122"/>
-                <a:cs typeface="Calibri" pitchFamily="34" charset="-120"/>
-              </a:rPr>
-              <a:t>Schreibe Ü4 an den Rand. Betrachte die Karikatur.</a:t>
-            </a:r>
-            <a:endParaRPr lang="en-US" sz="1800" dirty="0"/>
-          </a:p>
-        </p:txBody>
-      </p:sp>
-      <p:sp>
-        <p:nvSpPr>
-          <p:cNvPr id="8" name="Shape 6"/>
-          <p:cNvSpPr/>
-          <p:nvPr/>
-        </p:nvSpPr>
-        <p:spPr>
-          <a:xfrm>
-            <a:off x="731520" y="2372868"/>
-            <a:ext cx="384048" cy="384048"/>
-          </a:xfrm>
-          <a:prstGeom prst="ellipse">
-            <a:avLst/>
-          </a:prstGeom>
-          <a:solidFill>
-            <a:srgbClr val="1E2761"/>
-          </a:solidFill>
-          <a:ln/>
-        </p:spPr>
-      </p:sp>
-      <p:sp>
-        <p:nvSpPr>
-          <p:cNvPr id="9" name="Text 7"/>
-          <p:cNvSpPr txBox="1"/>
-          <p:nvPr/>
-        </p:nvSpPr>
-        <p:spPr>
-          <a:xfrm>
-            <a:off x="731520" y="2372868"/>
-            <a:ext cx="384048" cy="384048"/>
-          </a:xfrm>
-          <a:prstGeom prst="rect">
-            <a:avLst/>
-          </a:prstGeom>
-          <a:noFill/>
-          <a:ln/>
-        </p:spPr>
-        <p:txBody>
-          <a:bodyPr wrap="square" lIns="0" tIns="0" rIns="0" bIns="0" rtlCol="0" anchor="ctr"/>
-          <a:lstStyle/>
-          <a:p>
-            <a:pPr algn="ctr" indent="0" marL="0">
-              <a:buNone/>
-            </a:pPr>
-            <a:r>
-              <a:rPr lang="en-US" sz="1800" b="1" dirty="0">
-                <a:solidFill>
-                  <a:srgbClr val="FFFFFF"/>
-                </a:solidFill>
-                <a:latin typeface="Calibri" pitchFamily="34" charset="0"/>
-                <a:ea typeface="Calibri" pitchFamily="34" charset="-122"/>
-                <a:cs typeface="Calibri" pitchFamily="34" charset="-120"/>
-              </a:rPr>
-              <a:t>2</a:t>
-            </a:r>
-            <a:endParaRPr lang="en-US" sz="1800" dirty="0"/>
-          </a:p>
-        </p:txBody>
-      </p:sp>
-      <p:sp>
-        <p:nvSpPr>
-          <p:cNvPr id="10" name="Text 8"/>
-          <p:cNvSpPr txBox="1"/>
-          <p:nvPr/>
-        </p:nvSpPr>
-        <p:spPr>
-          <a:xfrm>
-            <a:off x="1280160" y="2359152"/>
-            <a:ext cx="6537960" cy="1051560"/>
-          </a:xfrm>
-          <a:prstGeom prst="rect">
-            <a:avLst/>
-          </a:prstGeom>
-          <a:noFill/>
-          <a:ln/>
-        </p:spPr>
-        <p:txBody>
-          <a:bodyPr wrap="square" lIns="0" tIns="0" rIns="0" bIns="0" rtlCol="0" anchor="t"/>
-          <a:lstStyle/>
-          <a:p>
-            <a:pPr indent="0" marL="0">
-              <a:buNone/>
-            </a:pPr>
-            <a:r>
-              <a:rPr lang="en-US" sz="1800" b="1" dirty="0">
-                <a:solidFill>
-                  <a:srgbClr val="1E2761"/>
-                </a:solidFill>
-                <a:latin typeface="Calibri" pitchFamily="34" charset="0"/>
-                <a:ea typeface="Calibri" pitchFamily="34" charset="-122"/>
-                <a:cs typeface="Calibri" pitchFamily="34" charset="-120"/>
-              </a:rPr>
-              <a:t>Wähle einen Stand und beende den Satz: „Im Absolutismus fühle ich mich …, weil …“</a:t>
-            </a:r>
-            <a:endParaRPr lang="en-US" sz="1800" dirty="0"/>
-          </a:p>
-        </p:txBody>
-      </p:sp>
-      <p:sp>
-        <p:nvSpPr>
-          <p:cNvPr id="11" name="Shape 9"/>
-          <p:cNvSpPr/>
-          <p:nvPr/>
-        </p:nvSpPr>
-        <p:spPr>
-          <a:xfrm>
-            <a:off x="731520" y="3497580"/>
-            <a:ext cx="384048" cy="384048"/>
-          </a:xfrm>
-          <a:prstGeom prst="ellipse">
-            <a:avLst/>
-          </a:prstGeom>
-          <a:solidFill>
-            <a:srgbClr val="1E2761"/>
-          </a:solidFill>
-          <a:ln/>
-        </p:spPr>
-      </p:sp>
-      <p:sp>
-        <p:nvSpPr>
-          <p:cNvPr id="12" name="Text 10"/>
-          <p:cNvSpPr txBox="1"/>
-          <p:nvPr/>
-        </p:nvSpPr>
-        <p:spPr>
-          <a:xfrm>
-            <a:off x="731520" y="3497580"/>
-            <a:ext cx="384048" cy="384048"/>
-          </a:xfrm>
-          <a:prstGeom prst="rect">
-            <a:avLst/>
-          </a:prstGeom>
-          <a:noFill/>
-          <a:ln/>
-        </p:spPr>
-        <p:txBody>
-          <a:bodyPr wrap="square" lIns="0" tIns="0" rIns="0" bIns="0" rtlCol="0" anchor="ctr"/>
-          <a:lstStyle/>
-          <a:p>
-            <a:pPr algn="ctr" indent="0" marL="0">
-              <a:buNone/>
-            </a:pPr>
-            <a:r>
-              <a:rPr lang="en-US" sz="1800" b="1" dirty="0">
-                <a:solidFill>
-                  <a:srgbClr val="FFFFFF"/>
-                </a:solidFill>
-                <a:latin typeface="Calibri" pitchFamily="34" charset="0"/>
-                <a:ea typeface="Calibri" pitchFamily="34" charset="-122"/>
-                <a:cs typeface="Calibri" pitchFamily="34" charset="-120"/>
-              </a:rPr>
-              <a:t>3</a:t>
-            </a:r>
-            <a:endParaRPr lang="en-US" sz="1800" dirty="0"/>
-          </a:p>
-        </p:txBody>
-      </p:sp>
-      <p:sp>
-        <p:nvSpPr>
-          <p:cNvPr id="13" name="Text 11"/>
-          <p:cNvSpPr txBox="1"/>
-          <p:nvPr/>
-        </p:nvSpPr>
-        <p:spPr>
-          <a:xfrm>
-            <a:off x="1280160" y="3483864"/>
-            <a:ext cx="6537960" cy="731520"/>
-          </a:xfrm>
-          <a:prstGeom prst="rect">
-            <a:avLst/>
-          </a:prstGeom>
-          <a:noFill/>
-          <a:ln/>
-        </p:spPr>
-        <p:txBody>
-          <a:bodyPr wrap="square" lIns="0" tIns="0" rIns="0" bIns="0" rtlCol="0" anchor="t"/>
-          <a:lstStyle/>
-          <a:p>
-            <a:pPr indent="0" marL="0">
-              <a:buNone/>
-            </a:pPr>
-            <a:r>
-              <a:rPr lang="en-US" sz="1800" b="1" dirty="0">
-                <a:solidFill>
-                  <a:srgbClr val="1E2761"/>
-                </a:solidFill>
-                <a:latin typeface="Calibri" pitchFamily="34" charset="0"/>
-                <a:ea typeface="Calibri" pitchFamily="34" charset="-122"/>
-                <a:cs typeface="Calibri" pitchFamily="34" charset="-120"/>
-              </a:rPr>
-              <a:t>Nenne ein Recht und eine Pflicht deines Standes.</a:t>
-            </a:r>
-            <a:endParaRPr lang="en-US" sz="1800" dirty="0"/>
-          </a:p>
-        </p:txBody>
-      </p:sp>
-      <p:sp>
-        <p:nvSpPr>
-          <p:cNvPr id="14" name="Shape 12"/>
-          <p:cNvSpPr/>
-          <p:nvPr/>
-        </p:nvSpPr>
-        <p:spPr>
-          <a:xfrm>
-            <a:off x="548640" y="5897880"/>
-            <a:ext cx="11109960" cy="548640"/>
-          </a:xfrm>
-          <a:prstGeom prst="roundRect">
-            <a:avLst>
-              <a:gd name="adj" fmla="val 13333"/>
-            </a:avLst>
-          </a:prstGeom>
-          <a:solidFill>
-            <a:srgbClr val="1E2761"/>
-          </a:solidFill>
-          <a:ln/>
-        </p:spPr>
-      </p:sp>
-      <p:sp>
-        <p:nvSpPr>
-          <p:cNvPr id="15" name="Text 13"/>
-          <p:cNvSpPr txBox="1"/>
-          <p:nvPr/>
-        </p:nvSpPr>
-        <p:spPr>
-          <a:xfrm>
-            <a:off x="822960" y="5897880"/>
-            <a:ext cx="10607040" cy="548640"/>
-          </a:xfrm>
-          <a:prstGeom prst="rect">
-            <a:avLst/>
-          </a:prstGeom>
-          <a:noFill/>
-          <a:ln/>
-        </p:spPr>
-        <p:txBody>
-          <a:bodyPr wrap="square" lIns="0" tIns="0" rIns="0" bIns="0" rtlCol="0" anchor="ctr"/>
-          <a:lstStyle/>
-          <a:p>
-            <a:pPr indent="0" marL="0">
-              <a:buNone/>
-            </a:pPr>
-            <a:r>
-              <a:rPr lang="en-US" sz="1700" b="1" dirty="0">
-                <a:solidFill>
-                  <a:srgbClr val="FFFFFF"/>
-                </a:solidFill>
-                <a:latin typeface="Calibri" pitchFamily="34" charset="0"/>
-                <a:ea typeface="Calibri" pitchFamily="34" charset="-122"/>
-                <a:cs typeface="Calibri" pitchFamily="34" charset="-120"/>
-              </a:rPr>
-              <a:t>Zeit: </a:t>
-            </a:r>
-            <a:pPr indent="0" marL="0">
-              <a:buNone/>
-            </a:pPr>
-            <a:r>
-              <a:rPr lang="en-US" sz="1700" dirty="0">
-                <a:solidFill>
-                  <a:srgbClr val="FFFFFF"/>
-                </a:solidFill>
-                <a:latin typeface="Calibri" pitchFamily="34" charset="0"/>
-                <a:ea typeface="Calibri" pitchFamily="34" charset="-122"/>
-                <a:cs typeface="Calibri" pitchFamily="34" charset="-120"/>
-              </a:rPr>
-              <a:t>5 Minuten · allein · leise      </a:t>
-            </a:r>
-            <a:pPr indent="0" marL="0">
-              <a:buNone/>
-            </a:pPr>
-            <a:r>
-              <a:rPr lang="en-US" sz="1700" i="1" dirty="0">
-                <a:solidFill>
-                  <a:srgbClr val="CADCFC"/>
-                </a:solidFill>
-                <a:latin typeface="Calibri" pitchFamily="34" charset="0"/>
-                <a:ea typeface="Calibri" pitchFamily="34" charset="-122"/>
-                <a:cs typeface="Calibri" pitchFamily="34" charset="-120"/>
-              </a:rPr>
-              <a:t>Fertig? Stift hinlegen.</a:t>
-            </a:r>
-            <a:endParaRPr lang="en-US" sz="1700" dirty="0"/>
-          </a:p>
-        </p:txBody>
-      </p:sp>
-      <p:sp>
-        <p:nvSpPr>
-          <p:cNvPr id="16" name="Text 14"/>
-          <p:cNvSpPr txBox="1"/>
-          <p:nvPr/>
-        </p:nvSpPr>
-        <p:spPr>
-          <a:xfrm>
-            <a:off x="548640" y="6510528"/>
-            <a:ext cx="5486400" cy="228600"/>
-          </a:xfrm>
-          <a:prstGeom prst="rect">
-            <a:avLst/>
-          </a:prstGeom>
-          <a:noFill/>
-          <a:ln/>
-        </p:spPr>
-        <p:txBody>
-          <a:bodyPr wrap="square" lIns="0" tIns="0" rIns="0" bIns="0" rtlCol="0" anchor="t"/>
-          <a:lstStyle/>
-          <a:p>
-            <a:pPr indent="0" marL="0">
-              <a:buNone/>
-            </a:pPr>
-            <a:r>
-              <a:rPr lang="en-US" sz="1000" dirty="0">
-                <a:solidFill>
-                  <a:srgbClr val="5B6B8C"/>
-                </a:solidFill>
-                <a:latin typeface="Calibri" pitchFamily="34" charset="0"/>
-                <a:ea typeface="Calibri" pitchFamily="34" charset="-122"/>
-                <a:cs typeface="Calibri" pitchFamily="34" charset="-120"/>
-              </a:rPr>
-              <a:t>Absolutismus · Wiederholung · Geschichte 8</a:t>
-            </a:r>
-            <a:endParaRPr lang="en-US" sz="1000" dirty="0"/>
-          </a:p>
-        </p:txBody>
-      </p:sp>
-      <p:sp>
-        <p:nvSpPr>
-          <p:cNvPr id="17" name="Text 15"/>
-          <p:cNvSpPr txBox="1"/>
-          <p:nvPr/>
-        </p:nvSpPr>
-        <p:spPr>
-          <a:xfrm>
-            <a:off x="11155680" y="6510528"/>
-            <a:ext cx="457200" cy="228600"/>
-          </a:xfrm>
-          <a:prstGeom prst="rect">
-            <a:avLst/>
-          </a:prstGeom>
-          <a:noFill/>
-          <a:ln/>
-        </p:spPr>
-        <p:txBody>
-          <a:bodyPr wrap="square" lIns="0" tIns="0" rIns="0" bIns="0" rtlCol="0" anchor="t"/>
-          <a:lstStyle/>
-          <a:p>
-            <a:pPr algn="r" indent="0" marL="0">
-              <a:buNone/>
-            </a:pPr>
-            <a:r>
-              <a:rPr lang="en-US" sz="1000" dirty="0">
-                <a:solidFill>
-                  <a:srgbClr val="5B6B8C"/>
-                </a:solidFill>
-                <a:latin typeface="Calibri" pitchFamily="34" charset="0"/>
-                <a:ea typeface="Calibri" pitchFamily="34" charset="-122"/>
-                <a:cs typeface="Calibri" pitchFamily="34" charset="-120"/>
-              </a:rPr>
-              <a:t>19</a:t>
-            </a:r>
-            <a:endParaRPr lang="en-US" sz="1000" dirty="0"/>
-          </a:p>
-        </p:txBody>
-      </p:sp>
-      <p:pic>
-        <p:nvPicPr>
-          <p:cNvPr id="19" name="Image 0" descr="../material/karikatur_drei_staende.jpg">    </p:cNvPr>
-          <p:cNvPicPr>
-            <a:picLocks noChangeAspect="1"/>
-          </p:cNvPicPr>
-          <p:nvPr/>
-        </p:nvPicPr>
-        <p:blipFill>
-          <a:blip r:embed="rId1"/>
-          <a:stretch>
-            <a:fillRect/>
-          </a:stretch>
-        </p:blipFill>
-        <p:spPr>
-          <a:xfrm>
-            <a:off x="8147304" y="1417320"/>
-            <a:ext cx="3511296" cy="4343400"/>
-          </a:xfrm>
-          <a:prstGeom prst="rect">
-            <a:avLst/>
-          </a:prstGeom>
-        </p:spPr>
-      </p:pic>
-      <p:sp>
-        <p:nvSpPr>
-          <p:cNvPr id="20" name="Shape 16"/>
-          <p:cNvSpPr/>
-          <p:nvPr/>
-        </p:nvSpPr>
-        <p:spPr>
-          <a:xfrm>
-            <a:off x="548640" y="4489704"/>
-            <a:ext cx="7406640" cy="1325880"/>
-          </a:xfrm>
-          <a:prstGeom prst="roundRect">
-            <a:avLst>
-              <a:gd name="adj" fmla="val 5517"/>
-            </a:avLst>
-          </a:prstGeom>
-          <a:solidFill>
-            <a:srgbClr val="F4F7FD"/>
-          </a:solidFill>
-          <a:ln/>
-        </p:spPr>
-      </p:sp>
-      <p:sp>
-        <p:nvSpPr>
-          <p:cNvPr id="21" name="Text 17"/>
-          <p:cNvSpPr txBox="1"/>
-          <p:nvPr/>
-        </p:nvSpPr>
-        <p:spPr>
-          <a:xfrm>
-            <a:off x="777240" y="4581144"/>
-            <a:ext cx="6949440" cy="320040"/>
-          </a:xfrm>
-          <a:prstGeom prst="rect">
-            <a:avLst/>
-          </a:prstGeom>
-          <a:noFill/>
-          <a:ln/>
-        </p:spPr>
-        <p:txBody>
-          <a:bodyPr wrap="square" lIns="0" tIns="0" rIns="0" bIns="0" rtlCol="0" anchor="t"/>
-          <a:lstStyle/>
-          <a:p>
-            <a:pPr indent="0" marL="0">
-              <a:buNone/>
-            </a:pPr>
-            <a:r>
-              <a:rPr lang="en-US" sz="1700" b="1" dirty="0">
-                <a:solidFill>
-                  <a:srgbClr val="D9534F"/>
-                </a:solidFill>
-                <a:latin typeface="Cambria" pitchFamily="34" charset="0"/>
-                <a:ea typeface="Cambria" pitchFamily="34" charset="-122"/>
-                <a:cs typeface="Cambria" pitchFamily="34" charset="-120"/>
-              </a:rPr>
-              <a:t>Stände</a:t>
-            </a:r>
-            <a:endParaRPr lang="en-US" sz="1700" dirty="0"/>
-          </a:p>
-        </p:txBody>
-      </p:sp>
-      <p:sp>
-        <p:nvSpPr>
-          <p:cNvPr id="22" name="Text 18"/>
-          <p:cNvSpPr txBox="1"/>
-          <p:nvPr/>
-        </p:nvSpPr>
-        <p:spPr>
-          <a:xfrm>
-            <a:off x="777240" y="4855464"/>
-            <a:ext cx="6949440" cy="320040"/>
-          </a:xfrm>
-          <a:prstGeom prst="rect">
-            <a:avLst/>
-          </a:prstGeom>
-          <a:noFill/>
-          <a:ln/>
-        </p:spPr>
-        <p:txBody>
-          <a:bodyPr wrap="square" lIns="0" tIns="0" rIns="0" bIns="0" rtlCol="0" anchor="t"/>
-          <a:lstStyle/>
-          <a:p>
-            <a:pPr indent="0" marL="0">
-              <a:buNone/>
-            </a:pPr>
-            <a:r>
-              <a:rPr lang="en-US" sz="1500" dirty="0">
-                <a:solidFill>
-                  <a:srgbClr val="1E2761"/>
-                </a:solidFill>
-                <a:latin typeface="Cambria" pitchFamily="34" charset="0"/>
-                <a:ea typeface="Cambria" pitchFamily="34" charset="-122"/>
-                <a:cs typeface="Cambria" pitchFamily="34" charset="-120"/>
-              </a:rPr>
-              <a:t>Klerus (Geistliche) · Adel · Dritter Stand (Bauern und Bürger)</a:t>
-            </a:r>
-            <a:endParaRPr lang="en-US" sz="1500" dirty="0"/>
-          </a:p>
-        </p:txBody>
-      </p:sp>
-      <p:sp>
-        <p:nvSpPr>
-          <p:cNvPr id="23" name="Text 19"/>
-          <p:cNvSpPr txBox="1"/>
-          <p:nvPr/>
-        </p:nvSpPr>
-        <p:spPr>
-          <a:xfrm>
-            <a:off x="777240" y="5266944"/>
-            <a:ext cx="6949440" cy="457200"/>
-          </a:xfrm>
-          <a:prstGeom prst="rect">
-            <a:avLst/>
-          </a:prstGeom>
-          <a:noFill/>
-          <a:ln/>
-        </p:spPr>
-        <p:txBody>
-          <a:bodyPr wrap="square" lIns="0" tIns="0" rIns="0" bIns="0" rtlCol="0" anchor="t"/>
-          <a:lstStyle/>
-          <a:p>
-            <a:pPr indent="0" marL="0">
-              <a:buNone/>
-            </a:pPr>
-            <a:r>
-              <a:rPr lang="en-US" sz="1400" dirty="0">
-                <a:solidFill>
-                  <a:srgbClr val="5B6B8C"/>
-                </a:solidFill>
-                <a:latin typeface="Cambria" pitchFamily="34" charset="0"/>
-                <a:ea typeface="Cambria" pitchFamily="34" charset="-122"/>
-                <a:cs typeface="Cambria" pitchFamily="34" charset="-120"/>
-              </a:rPr>
-              <a:t>Begriffe: Vorrechte · Steuerfreiheit · Jagdrecht · Kirchenzehnt · Pachtgebühren · Mitbestimmung</a:t>
-            </a:r>
-            <a:endParaRPr lang="en-US" sz="1400" dirty="0"/>
           </a:p>
         </p:txBody>
       </p:sp>
@@ -9925,8 +7949,8 @@
         </p:nvSpPr>
         <p:spPr>
           <a:xfrm>
-            <a:off x="1554480" y="2221992"/>
-            <a:ext cx="9875520" cy="411480"/>
+            <a:off x="1554480" y="2203704"/>
+            <a:ext cx="9875520" cy="457200"/>
           </a:xfrm>
           <a:prstGeom prst="rect">
             <a:avLst/>
@@ -9942,7 +7966,7 @@
               <a:buNone/>
             </a:pPr>
             <a:r>
-              <a:rPr lang="en-US" sz="1900" dirty="0">
+              <a:rPr lang="en-US" sz="2400" dirty="0">
                 <a:solidFill>
                   <a:srgbClr val="5B6B8C"/>
                 </a:solidFill>
@@ -9952,7 +7976,7 @@
               </a:rPr>
               <a:t>Vorrechte · Pflichten · Anzahl · Mitbestimmung (dazu: Bildung)</a:t>
             </a:r>
-            <a:endParaRPr lang="en-US" sz="1900" dirty="0"/>
+            <a:endParaRPr lang="en-US" sz="2400" dirty="0"/>
           </a:p>
         </p:txBody>
       </p:sp>
@@ -10084,8 +8108,8 @@
         </p:nvSpPr>
         <p:spPr>
           <a:xfrm>
-            <a:off x="1554480" y="3547872"/>
-            <a:ext cx="9875520" cy="411480"/>
+            <a:off x="1554480" y="3529584"/>
+            <a:ext cx="9875520" cy="457200"/>
           </a:xfrm>
           <a:prstGeom prst="rect">
             <a:avLst/>
@@ -10101,7 +8125,7 @@
               <a:buNone/>
             </a:pPr>
             <a:r>
-              <a:rPr lang="en-US" sz="1900" dirty="0">
+              <a:rPr lang="en-US" sz="2400" dirty="0">
                 <a:solidFill>
                   <a:srgbClr val="5B6B8C"/>
                 </a:solidFill>
@@ -10111,7 +8135,7 @@
               </a:rPr>
               <a:t>Was bedeutet er? Woran erkenne ich ihn?</a:t>
             </a:r>
-            <a:endParaRPr lang="en-US" sz="1900" dirty="0"/>
+            <a:endParaRPr lang="en-US" sz="2400" dirty="0"/>
           </a:p>
         </p:txBody>
       </p:sp>
@@ -10243,8 +8267,8 @@
         </p:nvSpPr>
         <p:spPr>
           <a:xfrm>
-            <a:off x="1554480" y="4873752"/>
-            <a:ext cx="9875520" cy="411480"/>
+            <a:off x="1554480" y="4855464"/>
+            <a:ext cx="9875520" cy="457200"/>
           </a:xfrm>
           <a:prstGeom prst="rect">
             <a:avLst/>
@@ -10260,7 +8284,7 @@
               <a:buNone/>
             </a:pPr>
             <a:r>
-              <a:rPr lang="en-US" sz="1900" dirty="0">
+              <a:rPr lang="en-US" sz="2400" dirty="0">
                 <a:solidFill>
                   <a:srgbClr val="5B6B8C"/>
                 </a:solidFill>
@@ -10270,7 +8294,7 @@
               </a:rPr>
               <a:t>Nennen und erklären, wie der König damit seine Macht sichert</a:t>
             </a:r>
-            <a:endParaRPr lang="en-US" sz="1900" dirty="0"/>
+            <a:endParaRPr lang="en-US" sz="2400" dirty="0"/>
           </a:p>
         </p:txBody>
       </p:sp>
@@ -10282,12 +8306,12 @@
         </p:nvSpPr>
         <p:spPr>
           <a:xfrm>
-            <a:off x="548640" y="5897880"/>
-            <a:ext cx="11109960" cy="548640"/>
+            <a:off x="548640" y="5669280"/>
+            <a:ext cx="11109960" cy="777240"/>
           </a:xfrm>
           <a:prstGeom prst="roundRect">
             <a:avLst>
-              <a:gd name="adj" fmla="val 13333"/>
+              <a:gd name="adj" fmla="val 9412"/>
             </a:avLst>
           </a:prstGeom>
           <a:solidFill>
@@ -10304,8 +8328,8 @@
         </p:nvSpPr>
         <p:spPr>
           <a:xfrm>
-            <a:off x="822960" y="5897880"/>
-            <a:ext cx="10607040" cy="548640"/>
+            <a:off x="822960" y="5669280"/>
+            <a:ext cx="10607040" cy="777240"/>
           </a:xfrm>
           <a:prstGeom prst="rect">
             <a:avLst/>
@@ -10321,7 +8345,7 @@
               <a:buNone/>
             </a:pPr>
             <a:r>
-              <a:rPr lang="en-US" sz="1700" b="1" dirty="0">
+              <a:rPr lang="en-US" sz="2400" b="1" dirty="0">
                 <a:solidFill>
                   <a:srgbClr val="FFFFFF"/>
                 </a:solidFill>
@@ -10335,7 +8359,7 @@
               <a:buNone/>
             </a:pPr>
             <a:r>
-              <a:rPr lang="en-US" sz="1700" dirty="0">
+              <a:rPr lang="en-US" sz="2400" dirty="0">
                 <a:solidFill>
                   <a:srgbClr val="FFFFFF"/>
                 </a:solidFill>
@@ -10345,7 +8369,7 @@
               </a:rPr>
               <a:t>Wir wiederholen genau das und ergänzen, was in euren Unterlagen noch fehlt.</a:t>
             </a:r>
-            <a:endParaRPr lang="en-US" sz="1700" dirty="0"/>
+            <a:endParaRPr lang="en-US" sz="2400" dirty="0"/>
           </a:p>
         </p:txBody>
       </p:sp>
@@ -10422,1342 +8446,6 @@
                 <a:cs typeface="Calibri" pitchFamily="34" charset="-120"/>
               </a:rPr>
               <a:t>2</a:t>
-            </a:r>
-            <a:endParaRPr lang="en-US" sz="1000" dirty="0"/>
-          </a:p>
-        </p:txBody>
-      </p:sp>
-    </p:spTree>
-  </p:cSld>
-  <p:clrMapOvr>
-    <a:masterClrMapping/>
-  </p:clrMapOvr>
-</p:sld>
-</file>
-
-<file path=ppt/slides/slide20.xml><?xml version="1.0" encoding="utf-8"?>
-<p:sld xmlns:a="http://schemas.openxmlformats.org/drawingml/2006/main" xmlns:r="http://schemas.openxmlformats.org/officeDocument/2006/relationships" xmlns:p="http://schemas.openxmlformats.org/presentationml/2006/main">
-  <p:cSld name="Slide 20">
-    <p:bg>
-      <p:bgPr>
-        <a:solidFill>
-          <a:srgbClr val="FFFFFF"/>
-        </a:solidFill>
-      </p:bgPr>
-    </p:bg>
-    <p:spTree>
-      <p:nvGrpSpPr>
-        <p:cNvPr id="1" name=""/>
-        <p:cNvGrpSpPr/>
-        <p:nvPr/>
-      </p:nvGrpSpPr>
-      <p:grpSpPr>
-        <a:xfrm>
-          <a:off x="0" y="0"/>
-          <a:ext cx="0" cy="0"/>
-          <a:chOff x="0" y="0"/>
-          <a:chExt cx="0" cy="0"/>
-        </a:xfrm>
-      </p:grpSpPr>
-      <p:sp>
-        <p:nvSpPr>
-          <p:cNvPr id="2" name="Text 0"/>
-          <p:cNvSpPr txBox="1"/>
-          <p:nvPr/>
-        </p:nvSpPr>
-        <p:spPr>
-          <a:xfrm>
-            <a:off x="548640" y="320040"/>
-            <a:ext cx="7315200" cy="274320"/>
-          </a:xfrm>
-          <a:prstGeom prst="rect">
-            <a:avLst/>
-          </a:prstGeom>
-          <a:noFill/>
-          <a:ln/>
-        </p:spPr>
-        <p:txBody>
-          <a:bodyPr wrap="square" lIns="0" tIns="0" rIns="0" bIns="0" rtlCol="0" anchor="t"/>
-          <a:lstStyle/>
-          <a:p>
-            <a:pPr indent="0" marL="0">
-              <a:buNone/>
-            </a:pPr>
-            <a:r>
-              <a:rPr lang="en-US" sz="1300" b="1" spc="200" kern="0" dirty="0">
-                <a:solidFill>
-                  <a:srgbClr val="5B6B8C"/>
-                </a:solidFill>
-                <a:latin typeface="Calibri" pitchFamily="34" charset="0"/>
-                <a:ea typeface="Calibri" pitchFamily="34" charset="-122"/>
-                <a:cs typeface="Calibri" pitchFamily="34" charset="-120"/>
-              </a:rPr>
-              <a:t>KONTROLLE ZU Ü4</a:t>
-            </a:r>
-            <a:endParaRPr lang="en-US" sz="1300" dirty="0"/>
-          </a:p>
-        </p:txBody>
-      </p:sp>
-      <p:sp>
-        <p:nvSpPr>
-          <p:cNvPr id="3" name="Text 1"/>
-          <p:cNvSpPr txBox="1"/>
-          <p:nvPr/>
-        </p:nvSpPr>
-        <p:spPr>
-          <a:xfrm>
-            <a:off x="548640" y="594360"/>
-            <a:ext cx="11064240" cy="685800"/>
-          </a:xfrm>
-          <a:prstGeom prst="rect">
-            <a:avLst/>
-          </a:prstGeom>
-          <a:noFill/>
-          <a:ln/>
-        </p:spPr>
-        <p:txBody>
-          <a:bodyPr wrap="square" lIns="0" tIns="0" rIns="0" bIns="0" rtlCol="0" anchor="t"/>
-          <a:lstStyle/>
-          <a:p>
-            <a:pPr indent="0" marL="0">
-              <a:buNone/>
-            </a:pPr>
-            <a:r>
-              <a:rPr lang="en-US" sz="3400" b="1" dirty="0">
-                <a:solidFill>
-                  <a:srgbClr val="1E2761"/>
-                </a:solidFill>
-                <a:latin typeface="Cambria" pitchFamily="34" charset="0"/>
-                <a:ea typeface="Cambria" pitchFamily="34" charset="-122"/>
-                <a:cs typeface="Cambria" pitchFamily="34" charset="-120"/>
-              </a:rPr>
-              <a:t>Prüft die Sätze der anderen</a:t>
-            </a:r>
-            <a:endParaRPr lang="en-US" sz="3400" dirty="0"/>
-          </a:p>
-        </p:txBody>
-      </p:sp>
-      <p:sp>
-        <p:nvSpPr>
-          <p:cNvPr id="4" name="Shape 2"/>
-          <p:cNvSpPr/>
-          <p:nvPr/>
-        </p:nvSpPr>
-        <p:spPr>
-          <a:xfrm>
-            <a:off x="548640" y="1417320"/>
-            <a:ext cx="11109960" cy="1975104"/>
-          </a:xfrm>
-          <a:prstGeom prst="roundRect">
-            <a:avLst>
-              <a:gd name="adj" fmla="val 3704"/>
-            </a:avLst>
-          </a:prstGeom>
-          <a:solidFill>
-            <a:srgbClr val="EAF0FA"/>
-          </a:solidFill>
-          <a:ln/>
-        </p:spPr>
-      </p:sp>
-      <p:sp>
-        <p:nvSpPr>
-          <p:cNvPr id="5" name="Shape 3"/>
-          <p:cNvSpPr/>
-          <p:nvPr/>
-        </p:nvSpPr>
-        <p:spPr>
-          <a:xfrm>
-            <a:off x="731520" y="1568196"/>
-            <a:ext cx="384048" cy="384048"/>
-          </a:xfrm>
-          <a:prstGeom prst="ellipse">
-            <a:avLst/>
-          </a:prstGeom>
-          <a:solidFill>
-            <a:srgbClr val="1E2761"/>
-          </a:solidFill>
-          <a:ln/>
-        </p:spPr>
-      </p:sp>
-      <p:sp>
-        <p:nvSpPr>
-          <p:cNvPr id="6" name="Text 4"/>
-          <p:cNvSpPr txBox="1"/>
-          <p:nvPr/>
-        </p:nvSpPr>
-        <p:spPr>
-          <a:xfrm>
-            <a:off x="731520" y="1568196"/>
-            <a:ext cx="384048" cy="384048"/>
-          </a:xfrm>
-          <a:prstGeom prst="rect">
-            <a:avLst/>
-          </a:prstGeom>
-          <a:noFill/>
-          <a:ln/>
-        </p:spPr>
-        <p:txBody>
-          <a:bodyPr wrap="square" lIns="0" tIns="0" rIns="0" bIns="0" rtlCol="0" anchor="ctr"/>
-          <a:lstStyle/>
-          <a:p>
-            <a:pPr algn="ctr" indent="0" marL="0">
-              <a:buNone/>
-            </a:pPr>
-            <a:r>
-              <a:rPr lang="en-US" sz="1800" b="1" dirty="0">
-                <a:solidFill>
-                  <a:srgbClr val="FFFFFF"/>
-                </a:solidFill>
-                <a:latin typeface="Calibri" pitchFamily="34" charset="0"/>
-                <a:ea typeface="Calibri" pitchFamily="34" charset="-122"/>
-                <a:cs typeface="Calibri" pitchFamily="34" charset="-120"/>
-              </a:rPr>
-              <a:t>1</a:t>
-            </a:r>
-            <a:endParaRPr lang="en-US" sz="1800" dirty="0"/>
-          </a:p>
-        </p:txBody>
-      </p:sp>
-      <p:sp>
-        <p:nvSpPr>
-          <p:cNvPr id="7" name="Text 5"/>
-          <p:cNvSpPr txBox="1"/>
-          <p:nvPr/>
-        </p:nvSpPr>
-        <p:spPr>
-          <a:xfrm>
-            <a:off x="1280160" y="1554480"/>
-            <a:ext cx="10241280" cy="411480"/>
-          </a:xfrm>
-          <a:prstGeom prst="rect">
-            <a:avLst/>
-          </a:prstGeom>
-          <a:noFill/>
-          <a:ln/>
-        </p:spPr>
-        <p:txBody>
-          <a:bodyPr wrap="square" lIns="0" tIns="0" rIns="0" bIns="0" rtlCol="0" anchor="t"/>
-          <a:lstStyle/>
-          <a:p>
-            <a:pPr indent="0" marL="0">
-              <a:buNone/>
-            </a:pPr>
-            <a:r>
-              <a:rPr lang="en-US" sz="2100" b="1" dirty="0">
-                <a:solidFill>
-                  <a:srgbClr val="1E2761"/>
-                </a:solidFill>
-                <a:latin typeface="Calibri" pitchFamily="34" charset="0"/>
-                <a:ea typeface="Calibri" pitchFamily="34" charset="-122"/>
-                <a:cs typeface="Calibri" pitchFamily="34" charset="-120"/>
-              </a:rPr>
-              <a:t>Hört zu: Welcher Stand wurde gewählt?</a:t>
-            </a:r>
-            <a:endParaRPr lang="en-US" sz="2100" dirty="0"/>
-          </a:p>
-        </p:txBody>
-      </p:sp>
-      <p:sp>
-        <p:nvSpPr>
-          <p:cNvPr id="8" name="Shape 6"/>
-          <p:cNvSpPr/>
-          <p:nvPr/>
-        </p:nvSpPr>
-        <p:spPr>
-          <a:xfrm>
-            <a:off x="731520" y="2052828"/>
-            <a:ext cx="384048" cy="384048"/>
-          </a:xfrm>
-          <a:prstGeom prst="ellipse">
-            <a:avLst/>
-          </a:prstGeom>
-          <a:solidFill>
-            <a:srgbClr val="1E2761"/>
-          </a:solidFill>
-          <a:ln/>
-        </p:spPr>
-      </p:sp>
-      <p:sp>
-        <p:nvSpPr>
-          <p:cNvPr id="9" name="Text 7"/>
-          <p:cNvSpPr txBox="1"/>
-          <p:nvPr/>
-        </p:nvSpPr>
-        <p:spPr>
-          <a:xfrm>
-            <a:off x="731520" y="2052828"/>
-            <a:ext cx="384048" cy="384048"/>
-          </a:xfrm>
-          <a:prstGeom prst="rect">
-            <a:avLst/>
-          </a:prstGeom>
-          <a:noFill/>
-          <a:ln/>
-        </p:spPr>
-        <p:txBody>
-          <a:bodyPr wrap="square" lIns="0" tIns="0" rIns="0" bIns="0" rtlCol="0" anchor="ctr"/>
-          <a:lstStyle/>
-          <a:p>
-            <a:pPr algn="ctr" indent="0" marL="0">
-              <a:buNone/>
-            </a:pPr>
-            <a:r>
-              <a:rPr lang="en-US" sz="1800" b="1" dirty="0">
-                <a:solidFill>
-                  <a:srgbClr val="FFFFFF"/>
-                </a:solidFill>
-                <a:latin typeface="Calibri" pitchFamily="34" charset="0"/>
-                <a:ea typeface="Calibri" pitchFamily="34" charset="-122"/>
-                <a:cs typeface="Calibri" pitchFamily="34" charset="-120"/>
-              </a:rPr>
-              <a:t>2</a:t>
-            </a:r>
-            <a:endParaRPr lang="en-US" sz="1800" dirty="0"/>
-          </a:p>
-        </p:txBody>
-      </p:sp>
-      <p:sp>
-        <p:nvSpPr>
-          <p:cNvPr id="10" name="Text 8"/>
-          <p:cNvSpPr txBox="1"/>
-          <p:nvPr/>
-        </p:nvSpPr>
-        <p:spPr>
-          <a:xfrm>
-            <a:off x="1280160" y="2039112"/>
-            <a:ext cx="10241280" cy="731520"/>
-          </a:xfrm>
-          <a:prstGeom prst="rect">
-            <a:avLst/>
-          </a:prstGeom>
-          <a:noFill/>
-          <a:ln/>
-        </p:spPr>
-        <p:txBody>
-          <a:bodyPr wrap="square" lIns="0" tIns="0" rIns="0" bIns="0" rtlCol="0" anchor="t"/>
-          <a:lstStyle/>
-          <a:p>
-            <a:pPr indent="0" marL="0">
-              <a:buNone/>
-            </a:pPr>
-            <a:r>
-              <a:rPr lang="en-US" sz="2100" b="1" dirty="0">
-                <a:solidFill>
-                  <a:srgbClr val="1E2761"/>
-                </a:solidFill>
-                <a:latin typeface="Calibri" pitchFamily="34" charset="0"/>
-                <a:ea typeface="Calibri" pitchFamily="34" charset="-122"/>
-                <a:cs typeface="Calibri" pitchFamily="34" charset="-120"/>
-              </a:rPr>
-              <a:t>Prüft: Wird ein Recht und eine Pflicht genannt? Passen sie zum Stand?</a:t>
-            </a:r>
-            <a:endParaRPr lang="en-US" sz="2100" dirty="0"/>
-          </a:p>
-        </p:txBody>
-      </p:sp>
-      <p:sp>
-        <p:nvSpPr>
-          <p:cNvPr id="11" name="Shape 9"/>
-          <p:cNvSpPr/>
-          <p:nvPr/>
-        </p:nvSpPr>
-        <p:spPr>
-          <a:xfrm>
-            <a:off x="731520" y="2857500"/>
-            <a:ext cx="384048" cy="384048"/>
-          </a:xfrm>
-          <a:prstGeom prst="ellipse">
-            <a:avLst/>
-          </a:prstGeom>
-          <a:solidFill>
-            <a:srgbClr val="1E2761"/>
-          </a:solidFill>
-          <a:ln/>
-        </p:spPr>
-      </p:sp>
-      <p:sp>
-        <p:nvSpPr>
-          <p:cNvPr id="12" name="Text 10"/>
-          <p:cNvSpPr txBox="1"/>
-          <p:nvPr/>
-        </p:nvSpPr>
-        <p:spPr>
-          <a:xfrm>
-            <a:off x="731520" y="2857500"/>
-            <a:ext cx="384048" cy="384048"/>
-          </a:xfrm>
-          <a:prstGeom prst="rect">
-            <a:avLst/>
-          </a:prstGeom>
-          <a:noFill/>
-          <a:ln/>
-        </p:spPr>
-        <p:txBody>
-          <a:bodyPr wrap="square" lIns="0" tIns="0" rIns="0" bIns="0" rtlCol="0" anchor="ctr"/>
-          <a:lstStyle/>
-          <a:p>
-            <a:pPr algn="ctr" indent="0" marL="0">
-              <a:buNone/>
-            </a:pPr>
-            <a:r>
-              <a:rPr lang="en-US" sz="1800" b="1" dirty="0">
-                <a:solidFill>
-                  <a:srgbClr val="FFFFFF"/>
-                </a:solidFill>
-                <a:latin typeface="Calibri" pitchFamily="34" charset="0"/>
-                <a:ea typeface="Calibri" pitchFamily="34" charset="-122"/>
-                <a:cs typeface="Calibri" pitchFamily="34" charset="-120"/>
-              </a:rPr>
-              <a:t>3</a:t>
-            </a:r>
-            <a:endParaRPr lang="en-US" sz="1800" dirty="0"/>
-          </a:p>
-        </p:txBody>
-      </p:sp>
-      <p:sp>
-        <p:nvSpPr>
-          <p:cNvPr id="13" name="Text 11"/>
-          <p:cNvSpPr txBox="1"/>
-          <p:nvPr/>
-        </p:nvSpPr>
-        <p:spPr>
-          <a:xfrm>
-            <a:off x="1280160" y="2843784"/>
-            <a:ext cx="10241280" cy="411480"/>
-          </a:xfrm>
-          <a:prstGeom prst="rect">
-            <a:avLst/>
-          </a:prstGeom>
-          <a:noFill/>
-          <a:ln/>
-        </p:spPr>
-        <p:txBody>
-          <a:bodyPr wrap="square" lIns="0" tIns="0" rIns="0" bIns="0" rtlCol="0" anchor="t"/>
-          <a:lstStyle/>
-          <a:p>
-            <a:pPr indent="0" marL="0">
-              <a:buNone/>
-            </a:pPr>
-            <a:r>
-              <a:rPr lang="en-US" sz="2100" b="1" dirty="0">
-                <a:solidFill>
-                  <a:srgbClr val="1E2761"/>
-                </a:solidFill>
-                <a:latin typeface="Calibri" pitchFamily="34" charset="0"/>
-                <a:ea typeface="Calibri" pitchFamily="34" charset="-122"/>
-                <a:cs typeface="Calibri" pitchFamily="34" charset="-120"/>
-              </a:rPr>
-              <a:t>Prüft: Passt das Gefühl zur Begründung?</a:t>
-            </a:r>
-            <a:endParaRPr lang="en-US" sz="2100" dirty="0"/>
-          </a:p>
-        </p:txBody>
-      </p:sp>
-      <p:sp>
-        <p:nvSpPr>
-          <p:cNvPr id="14" name="Shape 12"/>
-          <p:cNvSpPr/>
-          <p:nvPr/>
-        </p:nvSpPr>
-        <p:spPr>
-          <a:xfrm>
-            <a:off x="548640" y="5897880"/>
-            <a:ext cx="11109960" cy="548640"/>
-          </a:xfrm>
-          <a:prstGeom prst="roundRect">
-            <a:avLst>
-              <a:gd name="adj" fmla="val 13333"/>
-            </a:avLst>
-          </a:prstGeom>
-          <a:solidFill>
-            <a:srgbClr val="1E2761"/>
-          </a:solidFill>
-          <a:ln/>
-        </p:spPr>
-      </p:sp>
-      <p:sp>
-        <p:nvSpPr>
-          <p:cNvPr id="15" name="Text 13"/>
-          <p:cNvSpPr txBox="1"/>
-          <p:nvPr/>
-        </p:nvSpPr>
-        <p:spPr>
-          <a:xfrm>
-            <a:off x="822960" y="5897880"/>
-            <a:ext cx="10607040" cy="548640"/>
-          </a:xfrm>
-          <a:prstGeom prst="rect">
-            <a:avLst/>
-          </a:prstGeom>
-          <a:noFill/>
-          <a:ln/>
-        </p:spPr>
-        <p:txBody>
-          <a:bodyPr wrap="square" lIns="0" tIns="0" rIns="0" bIns="0" rtlCol="0" anchor="ctr"/>
-          <a:lstStyle/>
-          <a:p>
-            <a:pPr indent="0" marL="0">
-              <a:buNone/>
-            </a:pPr>
-            <a:r>
-              <a:rPr lang="en-US" sz="1700" b="1" dirty="0">
-                <a:solidFill>
-                  <a:srgbClr val="FFFFFF"/>
-                </a:solidFill>
-                <a:latin typeface="Calibri" pitchFamily="34" charset="0"/>
-                <a:ea typeface="Calibri" pitchFamily="34" charset="-122"/>
-                <a:cs typeface="Calibri" pitchFamily="34" charset="-120"/>
-              </a:rPr>
-              <a:t>Zeit: </a:t>
-            </a:r>
-            <a:pPr indent="0" marL="0">
-              <a:buNone/>
-            </a:pPr>
-            <a:r>
-              <a:rPr lang="en-US" sz="1700" dirty="0">
-                <a:solidFill>
-                  <a:srgbClr val="FFFFFF"/>
-                </a:solidFill>
-                <a:latin typeface="Calibri" pitchFamily="34" charset="0"/>
-                <a:ea typeface="Calibri" pitchFamily="34" charset="-122"/>
-                <a:cs typeface="Calibri" pitchFamily="34" charset="-120"/>
-              </a:rPr>
-              <a:t>3 Minuten · gemeinsam · mündlich      </a:t>
-            </a:r>
-            <a:pPr indent="0" marL="0">
-              <a:buNone/>
-            </a:pPr>
-            <a:r>
-              <a:rPr lang="en-US" sz="1700" i="1" dirty="0">
-                <a:solidFill>
-                  <a:srgbClr val="CADCFC"/>
-                </a:solidFill>
-                <a:latin typeface="Calibri" pitchFamily="34" charset="0"/>
-                <a:ea typeface="Calibri" pitchFamily="34" charset="-122"/>
-                <a:cs typeface="Calibri" pitchFamily="34" charset="-120"/>
-              </a:rPr>
-              <a:t>Wer korrigiert, nennt die Begründung mit Fachbegriff.</a:t>
-            </a:r>
-            <a:endParaRPr lang="en-US" sz="1700" dirty="0"/>
-          </a:p>
-        </p:txBody>
-      </p:sp>
-      <p:sp>
-        <p:nvSpPr>
-          <p:cNvPr id="16" name="Text 14"/>
-          <p:cNvSpPr txBox="1"/>
-          <p:nvPr/>
-        </p:nvSpPr>
-        <p:spPr>
-          <a:xfrm>
-            <a:off x="548640" y="6510528"/>
-            <a:ext cx="5486400" cy="228600"/>
-          </a:xfrm>
-          <a:prstGeom prst="rect">
-            <a:avLst/>
-          </a:prstGeom>
-          <a:noFill/>
-          <a:ln/>
-        </p:spPr>
-        <p:txBody>
-          <a:bodyPr wrap="square" lIns="0" tIns="0" rIns="0" bIns="0" rtlCol="0" anchor="t"/>
-          <a:lstStyle/>
-          <a:p>
-            <a:pPr indent="0" marL="0">
-              <a:buNone/>
-            </a:pPr>
-            <a:r>
-              <a:rPr lang="en-US" sz="1000" dirty="0">
-                <a:solidFill>
-                  <a:srgbClr val="5B6B8C"/>
-                </a:solidFill>
-                <a:latin typeface="Calibri" pitchFamily="34" charset="0"/>
-                <a:ea typeface="Calibri" pitchFamily="34" charset="-122"/>
-                <a:cs typeface="Calibri" pitchFamily="34" charset="-120"/>
-              </a:rPr>
-              <a:t>Absolutismus · Wiederholung · Geschichte 8</a:t>
-            </a:r>
-            <a:endParaRPr lang="en-US" sz="1000" dirty="0"/>
-          </a:p>
-        </p:txBody>
-      </p:sp>
-      <p:sp>
-        <p:nvSpPr>
-          <p:cNvPr id="17" name="Text 15"/>
-          <p:cNvSpPr txBox="1"/>
-          <p:nvPr/>
-        </p:nvSpPr>
-        <p:spPr>
-          <a:xfrm>
-            <a:off x="11155680" y="6510528"/>
-            <a:ext cx="457200" cy="228600"/>
-          </a:xfrm>
-          <a:prstGeom prst="rect">
-            <a:avLst/>
-          </a:prstGeom>
-          <a:noFill/>
-          <a:ln/>
-        </p:spPr>
-        <p:txBody>
-          <a:bodyPr wrap="square" lIns="0" tIns="0" rIns="0" bIns="0" rtlCol="0" anchor="t"/>
-          <a:lstStyle/>
-          <a:p>
-            <a:pPr algn="r" indent="0" marL="0">
-              <a:buNone/>
-            </a:pPr>
-            <a:r>
-              <a:rPr lang="en-US" sz="1000" dirty="0">
-                <a:solidFill>
-                  <a:srgbClr val="5B6B8C"/>
-                </a:solidFill>
-                <a:latin typeface="Calibri" pitchFamily="34" charset="0"/>
-                <a:ea typeface="Calibri" pitchFamily="34" charset="-122"/>
-                <a:cs typeface="Calibri" pitchFamily="34" charset="-120"/>
-              </a:rPr>
-              <a:t>20</a:t>
-            </a:r>
-            <a:endParaRPr lang="en-US" sz="1000" dirty="0"/>
-          </a:p>
-        </p:txBody>
-      </p:sp>
-    </p:spTree>
-  </p:cSld>
-  <p:clrMapOvr>
-    <a:masterClrMapping/>
-  </p:clrMapOvr>
-</p:sld>
-</file>
-
-<file path=ppt/slides/slide21.xml><?xml version="1.0" encoding="utf-8"?>
-<p:sld xmlns:a="http://schemas.openxmlformats.org/drawingml/2006/main" xmlns:r="http://schemas.openxmlformats.org/officeDocument/2006/relationships" xmlns:p="http://schemas.openxmlformats.org/presentationml/2006/main">
-  <p:cSld name="Slide 21">
-    <p:bg>
-      <p:bgPr>
-        <a:solidFill>
-          <a:srgbClr val="FFFFFF"/>
-        </a:solidFill>
-      </p:bgPr>
-    </p:bg>
-    <p:spTree>
-      <p:nvGrpSpPr>
-        <p:cNvPr id="1" name=""/>
-        <p:cNvGrpSpPr/>
-        <p:nvPr/>
-      </p:nvGrpSpPr>
-      <p:grpSpPr>
-        <a:xfrm>
-          <a:off x="0" y="0"/>
-          <a:ext cx="0" cy="0"/>
-          <a:chOff x="0" y="0"/>
-          <a:chExt cx="0" cy="0"/>
-        </a:xfrm>
-      </p:grpSpPr>
-      <p:sp>
-        <p:nvSpPr>
-          <p:cNvPr id="2" name="Text 0"/>
-          <p:cNvSpPr txBox="1"/>
-          <p:nvPr/>
-        </p:nvSpPr>
-        <p:spPr>
-          <a:xfrm>
-            <a:off x="548640" y="320040"/>
-            <a:ext cx="9144000" cy="274320"/>
-          </a:xfrm>
-          <a:prstGeom prst="rect">
-            <a:avLst/>
-          </a:prstGeom>
-          <a:noFill/>
-          <a:ln/>
-        </p:spPr>
-        <p:txBody>
-          <a:bodyPr wrap="square" lIns="0" tIns="0" rIns="0" bIns="0" rtlCol="0" anchor="t"/>
-          <a:lstStyle/>
-          <a:p>
-            <a:pPr indent="0" marL="0">
-              <a:buNone/>
-            </a:pPr>
-            <a:r>
-              <a:rPr lang="en-US" sz="1300" b="1" spc="200" kern="0" dirty="0">
-                <a:solidFill>
-                  <a:srgbClr val="5B6B8C"/>
-                </a:solidFill>
-                <a:latin typeface="Calibri" pitchFamily="34" charset="0"/>
-                <a:ea typeface="Calibri" pitchFamily="34" charset="-122"/>
-                <a:cs typeface="Calibri" pitchFamily="34" charset="-120"/>
-              </a:rPr>
-              <a:t>ZUM SCHLUSS · STIFTE LIEGEN</a:t>
-            </a:r>
-            <a:endParaRPr lang="en-US" sz="1300" dirty="0"/>
-          </a:p>
-        </p:txBody>
-      </p:sp>
-      <p:sp>
-        <p:nvSpPr>
-          <p:cNvPr id="3" name="Text 1"/>
-          <p:cNvSpPr txBox="1"/>
-          <p:nvPr/>
-        </p:nvSpPr>
-        <p:spPr>
-          <a:xfrm>
-            <a:off x="548640" y="594360"/>
-            <a:ext cx="11064240" cy="685800"/>
-          </a:xfrm>
-          <a:prstGeom prst="rect">
-            <a:avLst/>
-          </a:prstGeom>
-          <a:noFill/>
-          <a:ln/>
-        </p:spPr>
-        <p:txBody>
-          <a:bodyPr wrap="square" lIns="0" tIns="0" rIns="0" bIns="0" rtlCol="0" anchor="t"/>
-          <a:lstStyle/>
-          <a:p>
-            <a:pPr indent="0" marL="0">
-              <a:buNone/>
-            </a:pPr>
-            <a:r>
-              <a:rPr lang="en-US" sz="3400" b="1" dirty="0">
-                <a:solidFill>
-                  <a:srgbClr val="1E2761"/>
-                </a:solidFill>
-                <a:latin typeface="Cambria" pitchFamily="34" charset="0"/>
-                <a:ea typeface="Cambria" pitchFamily="34" charset="-122"/>
-                <a:cs typeface="Cambria" pitchFamily="34" charset="-120"/>
-              </a:rPr>
-              <a:t>So lernst du bis zum Test</a:t>
-            </a:r>
-            <a:endParaRPr lang="en-US" sz="3400" dirty="0"/>
-          </a:p>
-        </p:txBody>
-      </p:sp>
-      <p:sp>
-        <p:nvSpPr>
-          <p:cNvPr id="4" name="Shape 2"/>
-          <p:cNvSpPr/>
-          <p:nvPr/>
-        </p:nvSpPr>
-        <p:spPr>
-          <a:xfrm>
-            <a:off x="548640" y="1554480"/>
-            <a:ext cx="11109960" cy="822960"/>
-          </a:xfrm>
-          <a:prstGeom prst="roundRect">
-            <a:avLst>
-              <a:gd name="adj" fmla="val 8889"/>
-            </a:avLst>
-          </a:prstGeom>
-          <a:solidFill>
-            <a:srgbClr val="EAF0FA"/>
-          </a:solidFill>
-          <a:ln/>
-        </p:spPr>
-      </p:sp>
-      <p:sp>
-        <p:nvSpPr>
-          <p:cNvPr id="5" name="Shape 3"/>
-          <p:cNvSpPr/>
-          <p:nvPr/>
-        </p:nvSpPr>
-        <p:spPr>
-          <a:xfrm>
-            <a:off x="777240" y="1737360"/>
-            <a:ext cx="457200" cy="457200"/>
-          </a:xfrm>
-          <a:prstGeom prst="ellipse">
-            <a:avLst/>
-          </a:prstGeom>
-          <a:solidFill>
-            <a:srgbClr val="D9534F"/>
-          </a:solidFill>
-          <a:ln/>
-        </p:spPr>
-      </p:sp>
-      <p:sp>
-        <p:nvSpPr>
-          <p:cNvPr id="6" name="Text 4"/>
-          <p:cNvSpPr txBox="1"/>
-          <p:nvPr/>
-        </p:nvSpPr>
-        <p:spPr>
-          <a:xfrm>
-            <a:off x="777240" y="1737360"/>
-            <a:ext cx="457200" cy="457200"/>
-          </a:xfrm>
-          <a:prstGeom prst="rect">
-            <a:avLst/>
-          </a:prstGeom>
-          <a:noFill/>
-          <a:ln/>
-        </p:spPr>
-        <p:txBody>
-          <a:bodyPr wrap="square" lIns="0" tIns="0" rIns="0" bIns="0" rtlCol="0" anchor="ctr"/>
-          <a:lstStyle/>
-          <a:p>
-            <a:pPr algn="ctr" indent="0" marL="0">
-              <a:buNone/>
-            </a:pPr>
-            <a:r>
-              <a:rPr lang="en-US" sz="1800" b="1" dirty="0">
-                <a:solidFill>
-                  <a:srgbClr val="FFFFFF"/>
-                </a:solidFill>
-                <a:latin typeface="Calibri" pitchFamily="34" charset="0"/>
-                <a:ea typeface="Calibri" pitchFamily="34" charset="-122"/>
-                <a:cs typeface="Calibri" pitchFamily="34" charset="-120"/>
-              </a:rPr>
-              <a:t>1</a:t>
-            </a:r>
-            <a:endParaRPr lang="en-US" sz="1800" dirty="0"/>
-          </a:p>
-        </p:txBody>
-      </p:sp>
-      <p:sp>
-        <p:nvSpPr>
-          <p:cNvPr id="7" name="Text 5"/>
-          <p:cNvSpPr txBox="1"/>
-          <p:nvPr/>
-        </p:nvSpPr>
-        <p:spPr>
-          <a:xfrm>
-            <a:off x="1463040" y="1554480"/>
-            <a:ext cx="9966960" cy="822960"/>
-          </a:xfrm>
-          <a:prstGeom prst="rect">
-            <a:avLst/>
-          </a:prstGeom>
-          <a:noFill/>
-          <a:ln/>
-        </p:spPr>
-        <p:txBody>
-          <a:bodyPr wrap="square" lIns="0" tIns="0" rIns="0" bIns="0" rtlCol="0" anchor="ctr"/>
-          <a:lstStyle/>
-          <a:p>
-            <a:pPr indent="0" marL="0">
-              <a:buNone/>
-            </a:pPr>
-            <a:r>
-              <a:rPr lang="en-US" sz="2200" dirty="0">
-                <a:solidFill>
-                  <a:srgbClr val="1E2761"/>
-                </a:solidFill>
-                <a:latin typeface="Cambria" pitchFamily="34" charset="0"/>
-                <a:ea typeface="Cambria" pitchFamily="34" charset="-122"/>
-                <a:cs typeface="Cambria" pitchFamily="34" charset="-120"/>
-              </a:rPr>
-              <a:t>Merksatz 2 auswendig: Was bedeutet Absolutismus?</a:t>
-            </a:r>
-            <a:endParaRPr lang="en-US" sz="2200" dirty="0"/>
-          </a:p>
-        </p:txBody>
-      </p:sp>
-      <p:sp>
-        <p:nvSpPr>
-          <p:cNvPr id="8" name="Shape 6"/>
-          <p:cNvSpPr/>
-          <p:nvPr/>
-        </p:nvSpPr>
-        <p:spPr>
-          <a:xfrm>
-            <a:off x="548640" y="2514600"/>
-            <a:ext cx="11109960" cy="822960"/>
-          </a:xfrm>
-          <a:prstGeom prst="roundRect">
-            <a:avLst>
-              <a:gd name="adj" fmla="val 8889"/>
-            </a:avLst>
-          </a:prstGeom>
-          <a:solidFill>
-            <a:srgbClr val="F4F7FD"/>
-          </a:solidFill>
-          <a:ln/>
-        </p:spPr>
-      </p:sp>
-      <p:sp>
-        <p:nvSpPr>
-          <p:cNvPr id="9" name="Shape 7"/>
-          <p:cNvSpPr/>
-          <p:nvPr/>
-        </p:nvSpPr>
-        <p:spPr>
-          <a:xfrm>
-            <a:off x="777240" y="2697480"/>
-            <a:ext cx="457200" cy="457200"/>
-          </a:xfrm>
-          <a:prstGeom prst="ellipse">
-            <a:avLst/>
-          </a:prstGeom>
-          <a:solidFill>
-            <a:srgbClr val="D9534F"/>
-          </a:solidFill>
-          <a:ln/>
-        </p:spPr>
-      </p:sp>
-      <p:sp>
-        <p:nvSpPr>
-          <p:cNvPr id="10" name="Text 8"/>
-          <p:cNvSpPr txBox="1"/>
-          <p:nvPr/>
-        </p:nvSpPr>
-        <p:spPr>
-          <a:xfrm>
-            <a:off x="777240" y="2697480"/>
-            <a:ext cx="457200" cy="457200"/>
-          </a:xfrm>
-          <a:prstGeom prst="rect">
-            <a:avLst/>
-          </a:prstGeom>
-          <a:noFill/>
-          <a:ln/>
-        </p:spPr>
-        <p:txBody>
-          <a:bodyPr wrap="square" lIns="0" tIns="0" rIns="0" bIns="0" rtlCol="0" anchor="ctr"/>
-          <a:lstStyle/>
-          <a:p>
-            <a:pPr algn="ctr" indent="0" marL="0">
-              <a:buNone/>
-            </a:pPr>
-            <a:r>
-              <a:rPr lang="en-US" sz="1800" b="1" dirty="0">
-                <a:solidFill>
-                  <a:srgbClr val="FFFFFF"/>
-                </a:solidFill>
-                <a:latin typeface="Calibri" pitchFamily="34" charset="0"/>
-                <a:ea typeface="Calibri" pitchFamily="34" charset="-122"/>
-                <a:cs typeface="Calibri" pitchFamily="34" charset="-120"/>
-              </a:rPr>
-              <a:t>2</a:t>
-            </a:r>
-            <a:endParaRPr lang="en-US" sz="1800" dirty="0"/>
-          </a:p>
-        </p:txBody>
-      </p:sp>
-      <p:sp>
-        <p:nvSpPr>
-          <p:cNvPr id="11" name="Text 9"/>
-          <p:cNvSpPr txBox="1"/>
-          <p:nvPr/>
-        </p:nvSpPr>
-        <p:spPr>
-          <a:xfrm>
-            <a:off x="1463040" y="2514600"/>
-            <a:ext cx="9966960" cy="822960"/>
-          </a:xfrm>
-          <a:prstGeom prst="rect">
-            <a:avLst/>
-          </a:prstGeom>
-          <a:noFill/>
-          <a:ln/>
-        </p:spPr>
-        <p:txBody>
-          <a:bodyPr wrap="square" lIns="0" tIns="0" rIns="0" bIns="0" rtlCol="0" anchor="ctr"/>
-          <a:lstStyle/>
-          <a:p>
-            <a:pPr indent="0" marL="0">
-              <a:buNone/>
-            </a:pPr>
-            <a:r>
-              <a:rPr lang="en-US" sz="2200" dirty="0">
-                <a:solidFill>
-                  <a:srgbClr val="1E2761"/>
-                </a:solidFill>
-                <a:latin typeface="Cambria" pitchFamily="34" charset="0"/>
-                <a:ea typeface="Cambria" pitchFamily="34" charset="-122"/>
-                <a:cs typeface="Cambria" pitchFamily="34" charset="-120"/>
-              </a:rPr>
-              <a:t>Lückentext noch einmal ohne Wortspeicher ausfüllen</a:t>
-            </a:r>
-            <a:endParaRPr lang="en-US" sz="2200" dirty="0"/>
-          </a:p>
-        </p:txBody>
-      </p:sp>
-      <p:sp>
-        <p:nvSpPr>
-          <p:cNvPr id="12" name="Shape 10"/>
-          <p:cNvSpPr/>
-          <p:nvPr/>
-        </p:nvSpPr>
-        <p:spPr>
-          <a:xfrm>
-            <a:off x="548640" y="3474720"/>
-            <a:ext cx="11109960" cy="822960"/>
-          </a:xfrm>
-          <a:prstGeom prst="roundRect">
-            <a:avLst>
-              <a:gd name="adj" fmla="val 8889"/>
-            </a:avLst>
-          </a:prstGeom>
-          <a:solidFill>
-            <a:srgbClr val="EAF0FA"/>
-          </a:solidFill>
-          <a:ln/>
-        </p:spPr>
-      </p:sp>
-      <p:sp>
-        <p:nvSpPr>
-          <p:cNvPr id="13" name="Shape 11"/>
-          <p:cNvSpPr/>
-          <p:nvPr/>
-        </p:nvSpPr>
-        <p:spPr>
-          <a:xfrm>
-            <a:off x="777240" y="3657600"/>
-            <a:ext cx="457200" cy="457200"/>
-          </a:xfrm>
-          <a:prstGeom prst="ellipse">
-            <a:avLst/>
-          </a:prstGeom>
-          <a:solidFill>
-            <a:srgbClr val="D9534F"/>
-          </a:solidFill>
-          <a:ln/>
-        </p:spPr>
-      </p:sp>
-      <p:sp>
-        <p:nvSpPr>
-          <p:cNvPr id="14" name="Text 12"/>
-          <p:cNvSpPr txBox="1"/>
-          <p:nvPr/>
-        </p:nvSpPr>
-        <p:spPr>
-          <a:xfrm>
-            <a:off x="777240" y="3657600"/>
-            <a:ext cx="457200" cy="457200"/>
-          </a:xfrm>
-          <a:prstGeom prst="rect">
-            <a:avLst/>
-          </a:prstGeom>
-          <a:noFill/>
-          <a:ln/>
-        </p:spPr>
-        <p:txBody>
-          <a:bodyPr wrap="square" lIns="0" tIns="0" rIns="0" bIns="0" rtlCol="0" anchor="ctr"/>
-          <a:lstStyle/>
-          <a:p>
-            <a:pPr algn="ctr" indent="0" marL="0">
-              <a:buNone/>
-            </a:pPr>
-            <a:r>
-              <a:rPr lang="en-US" sz="1800" b="1" dirty="0">
-                <a:solidFill>
-                  <a:srgbClr val="FFFFFF"/>
-                </a:solidFill>
-                <a:latin typeface="Calibri" pitchFamily="34" charset="0"/>
-                <a:ea typeface="Calibri" pitchFamily="34" charset="-122"/>
-                <a:cs typeface="Calibri" pitchFamily="34" charset="-120"/>
-              </a:rPr>
-              <a:t>3</a:t>
-            </a:r>
-            <a:endParaRPr lang="en-US" sz="1800" dirty="0"/>
-          </a:p>
-        </p:txBody>
-      </p:sp>
-      <p:sp>
-        <p:nvSpPr>
-          <p:cNvPr id="15" name="Text 13"/>
-          <p:cNvSpPr txBox="1"/>
-          <p:nvPr/>
-        </p:nvSpPr>
-        <p:spPr>
-          <a:xfrm>
-            <a:off x="1463040" y="3474720"/>
-            <a:ext cx="9966960" cy="822960"/>
-          </a:xfrm>
-          <a:prstGeom prst="rect">
-            <a:avLst/>
-          </a:prstGeom>
-          <a:noFill/>
-          <a:ln/>
-        </p:spPr>
-        <p:txBody>
-          <a:bodyPr wrap="square" lIns="0" tIns="0" rIns="0" bIns="0" rtlCol="0" anchor="ctr"/>
-          <a:lstStyle/>
-          <a:p>
-            <a:pPr indent="0" marL="0">
-              <a:buNone/>
-            </a:pPr>
-            <a:r>
-              <a:rPr lang="en-US" sz="2200" dirty="0">
-                <a:solidFill>
-                  <a:srgbClr val="1E2761"/>
-                </a:solidFill>
-                <a:latin typeface="Cambria" pitchFamily="34" charset="0"/>
-                <a:ea typeface="Cambria" pitchFamily="34" charset="-122"/>
-                <a:cs typeface="Cambria" pitchFamily="34" charset="-120"/>
-              </a:rPr>
-              <a:t>Tabelle Ständegesellschaft aus dem Kopf aufschreiben</a:t>
-            </a:r>
-            <a:endParaRPr lang="en-US" sz="2200" dirty="0"/>
-          </a:p>
-        </p:txBody>
-      </p:sp>
-      <p:sp>
-        <p:nvSpPr>
-          <p:cNvPr id="16" name="Shape 14"/>
-          <p:cNvSpPr/>
-          <p:nvPr/>
-        </p:nvSpPr>
-        <p:spPr>
-          <a:xfrm>
-            <a:off x="548640" y="4434840"/>
-            <a:ext cx="11109960" cy="822960"/>
-          </a:xfrm>
-          <a:prstGeom prst="roundRect">
-            <a:avLst>
-              <a:gd name="adj" fmla="val 8889"/>
-            </a:avLst>
-          </a:prstGeom>
-          <a:solidFill>
-            <a:srgbClr val="F4F7FD"/>
-          </a:solidFill>
-          <a:ln/>
-        </p:spPr>
-      </p:sp>
-      <p:sp>
-        <p:nvSpPr>
-          <p:cNvPr id="17" name="Shape 15"/>
-          <p:cNvSpPr/>
-          <p:nvPr/>
-        </p:nvSpPr>
-        <p:spPr>
-          <a:xfrm>
-            <a:off x="777240" y="4617720"/>
-            <a:ext cx="457200" cy="457200"/>
-          </a:xfrm>
-          <a:prstGeom prst="ellipse">
-            <a:avLst/>
-          </a:prstGeom>
-          <a:solidFill>
-            <a:srgbClr val="D9534F"/>
-          </a:solidFill>
-          <a:ln/>
-        </p:spPr>
-      </p:sp>
-      <p:sp>
-        <p:nvSpPr>
-          <p:cNvPr id="18" name="Text 16"/>
-          <p:cNvSpPr txBox="1"/>
-          <p:nvPr/>
-        </p:nvSpPr>
-        <p:spPr>
-          <a:xfrm>
-            <a:off x="777240" y="4617720"/>
-            <a:ext cx="457200" cy="457200"/>
-          </a:xfrm>
-          <a:prstGeom prst="rect">
-            <a:avLst/>
-          </a:prstGeom>
-          <a:noFill/>
-          <a:ln/>
-        </p:spPr>
-        <p:txBody>
-          <a:bodyPr wrap="square" lIns="0" tIns="0" rIns="0" bIns="0" rtlCol="0" anchor="ctr"/>
-          <a:lstStyle/>
-          <a:p>
-            <a:pPr algn="ctr" indent="0" marL="0">
-              <a:buNone/>
-            </a:pPr>
-            <a:r>
-              <a:rPr lang="en-US" sz="1800" b="1" dirty="0">
-                <a:solidFill>
-                  <a:srgbClr val="FFFFFF"/>
-                </a:solidFill>
-                <a:latin typeface="Calibri" pitchFamily="34" charset="0"/>
-                <a:ea typeface="Calibri" pitchFamily="34" charset="-122"/>
-                <a:cs typeface="Calibri" pitchFamily="34" charset="-120"/>
-              </a:rPr>
-              <a:t>4</a:t>
-            </a:r>
-            <a:endParaRPr lang="en-US" sz="1800" dirty="0"/>
-          </a:p>
-        </p:txBody>
-      </p:sp>
-      <p:sp>
-        <p:nvSpPr>
-          <p:cNvPr id="19" name="Text 17"/>
-          <p:cNvSpPr txBox="1"/>
-          <p:nvPr/>
-        </p:nvSpPr>
-        <p:spPr>
-          <a:xfrm>
-            <a:off x="1463040" y="4434840"/>
-            <a:ext cx="9966960" cy="822960"/>
-          </a:xfrm>
-          <a:prstGeom prst="rect">
-            <a:avLst/>
-          </a:prstGeom>
-          <a:noFill/>
-          <a:ln/>
-        </p:spPr>
-        <p:txBody>
-          <a:bodyPr wrap="square" lIns="0" tIns="0" rIns="0" bIns="0" rtlCol="0" anchor="ctr"/>
-          <a:lstStyle/>
-          <a:p>
-            <a:pPr indent="0" marL="0">
-              <a:buNone/>
-            </a:pPr>
-            <a:r>
-              <a:rPr lang="en-US" sz="2200" dirty="0">
-                <a:solidFill>
-                  <a:srgbClr val="1E2761"/>
-                </a:solidFill>
-                <a:latin typeface="Cambria" pitchFamily="34" charset="0"/>
-                <a:ea typeface="Cambria" pitchFamily="34" charset="-122"/>
-                <a:cs typeface="Cambria" pitchFamily="34" charset="-120"/>
-              </a:rPr>
-              <a:t>Deinen Ü4-Satz zu einem zweiten Stand noch einmal schreiben</a:t>
-            </a:r>
-            <a:endParaRPr lang="en-US" sz="2200" dirty="0"/>
-          </a:p>
-        </p:txBody>
-      </p:sp>
-      <p:sp>
-        <p:nvSpPr>
-          <p:cNvPr id="20" name="Shape 18"/>
-          <p:cNvSpPr/>
-          <p:nvPr/>
-        </p:nvSpPr>
-        <p:spPr>
-          <a:xfrm>
-            <a:off x="548640" y="5897880"/>
-            <a:ext cx="11109960" cy="548640"/>
-          </a:xfrm>
-          <a:prstGeom prst="roundRect">
-            <a:avLst>
-              <a:gd name="adj" fmla="val 13333"/>
-            </a:avLst>
-          </a:prstGeom>
-          <a:solidFill>
-            <a:srgbClr val="1E2761"/>
-          </a:solidFill>
-          <a:ln/>
-        </p:spPr>
-      </p:sp>
-      <p:sp>
-        <p:nvSpPr>
-          <p:cNvPr id="21" name="Text 19"/>
-          <p:cNvSpPr txBox="1"/>
-          <p:nvPr/>
-        </p:nvSpPr>
-        <p:spPr>
-          <a:xfrm>
-            <a:off x="822960" y="5897880"/>
-            <a:ext cx="10607040" cy="548640"/>
-          </a:xfrm>
-          <a:prstGeom prst="rect">
-            <a:avLst/>
-          </a:prstGeom>
-          <a:noFill/>
-          <a:ln/>
-        </p:spPr>
-        <p:txBody>
-          <a:bodyPr wrap="square" lIns="0" tIns="0" rIns="0" bIns="0" rtlCol="0" anchor="ctr"/>
-          <a:lstStyle/>
-          <a:p>
-            <a:pPr indent="0" marL="0">
-              <a:buNone/>
-            </a:pPr>
-            <a:r>
-              <a:rPr lang="en-US" sz="1700" b="1" dirty="0">
-                <a:solidFill>
-                  <a:srgbClr val="FFFFFF"/>
-                </a:solidFill>
-                <a:latin typeface="Calibri" pitchFamily="34" charset="0"/>
-                <a:ea typeface="Calibri" pitchFamily="34" charset="-122"/>
-                <a:cs typeface="Calibri" pitchFamily="34" charset="-120"/>
-              </a:rPr>
-              <a:t>Test: </a:t>
-            </a:r>
-            <a:pPr indent="0" marL="0">
-              <a:buNone/>
-            </a:pPr>
-            <a:r>
-              <a:rPr lang="en-US" sz="1700" dirty="0">
-                <a:solidFill>
-                  <a:srgbClr val="FFFFFF"/>
-                </a:solidFill>
-                <a:latin typeface="Calibri" pitchFamily="34" charset="0"/>
-                <a:ea typeface="Calibri" pitchFamily="34" charset="-122"/>
-                <a:cs typeface="Calibri" pitchFamily="34" charset="-120"/>
-              </a:rPr>
-              <a:t>nächste Woche · Ständegesellschaft · Absolutismus · fünf Säulen</a:t>
-            </a:r>
-            <a:endParaRPr lang="en-US" sz="1700" dirty="0"/>
-          </a:p>
-        </p:txBody>
-      </p:sp>
-      <p:sp>
-        <p:nvSpPr>
-          <p:cNvPr id="22" name="Text 20"/>
-          <p:cNvSpPr txBox="1"/>
-          <p:nvPr/>
-        </p:nvSpPr>
-        <p:spPr>
-          <a:xfrm>
-            <a:off x="548640" y="6510528"/>
-            <a:ext cx="5486400" cy="228600"/>
-          </a:xfrm>
-          <a:prstGeom prst="rect">
-            <a:avLst/>
-          </a:prstGeom>
-          <a:noFill/>
-          <a:ln/>
-        </p:spPr>
-        <p:txBody>
-          <a:bodyPr wrap="square" lIns="0" tIns="0" rIns="0" bIns="0" rtlCol="0" anchor="t"/>
-          <a:lstStyle/>
-          <a:p>
-            <a:pPr indent="0" marL="0">
-              <a:buNone/>
-            </a:pPr>
-            <a:r>
-              <a:rPr lang="en-US" sz="1000" dirty="0">
-                <a:solidFill>
-                  <a:srgbClr val="5B6B8C"/>
-                </a:solidFill>
-                <a:latin typeface="Calibri" pitchFamily="34" charset="0"/>
-                <a:ea typeface="Calibri" pitchFamily="34" charset="-122"/>
-                <a:cs typeface="Calibri" pitchFamily="34" charset="-120"/>
-              </a:rPr>
-              <a:t>Absolutismus · Wiederholung · Geschichte 8</a:t>
-            </a:r>
-            <a:endParaRPr lang="en-US" sz="1000" dirty="0"/>
-          </a:p>
-        </p:txBody>
-      </p:sp>
-      <p:sp>
-        <p:nvSpPr>
-          <p:cNvPr id="23" name="Text 21"/>
-          <p:cNvSpPr txBox="1"/>
-          <p:nvPr/>
-        </p:nvSpPr>
-        <p:spPr>
-          <a:xfrm>
-            <a:off x="11155680" y="6510528"/>
-            <a:ext cx="457200" cy="228600"/>
-          </a:xfrm>
-          <a:prstGeom prst="rect">
-            <a:avLst/>
-          </a:prstGeom>
-          <a:noFill/>
-          <a:ln/>
-        </p:spPr>
-        <p:txBody>
-          <a:bodyPr wrap="square" lIns="0" tIns="0" rIns="0" bIns="0" rtlCol="0" anchor="t"/>
-          <a:lstStyle/>
-          <a:p>
-            <a:pPr algn="r" indent="0" marL="0">
-              <a:buNone/>
-            </a:pPr>
-            <a:r>
-              <a:rPr lang="en-US" sz="1000" dirty="0">
-                <a:solidFill>
-                  <a:srgbClr val="5B6B8C"/>
-                </a:solidFill>
-                <a:latin typeface="Calibri" pitchFamily="34" charset="0"/>
-                <a:ea typeface="Calibri" pitchFamily="34" charset="-122"/>
-                <a:cs typeface="Calibri" pitchFamily="34" charset="-120"/>
-              </a:rPr>
-              <a:t>21</a:t>
             </a:r>
             <a:endParaRPr lang="en-US" sz="1000" dirty="0"/>
           </a:p>
@@ -11981,12 +8669,12 @@
         </p:nvSpPr>
         <p:spPr>
           <a:xfrm>
-            <a:off x="548640" y="5897880"/>
-            <a:ext cx="11109960" cy="548640"/>
+            <a:off x="548640" y="5669280"/>
+            <a:ext cx="11109960" cy="777240"/>
           </a:xfrm>
           <a:prstGeom prst="roundRect">
             <a:avLst>
-              <a:gd name="adj" fmla="val 13333"/>
+              <a:gd name="adj" fmla="val 9412"/>
             </a:avLst>
           </a:prstGeom>
           <a:solidFill>
@@ -12003,8 +8691,8 @@
         </p:nvSpPr>
         <p:spPr>
           <a:xfrm>
-            <a:off x="822960" y="5897880"/>
-            <a:ext cx="10607040" cy="548640"/>
+            <a:off x="822960" y="5669280"/>
+            <a:ext cx="10607040" cy="777240"/>
           </a:xfrm>
           <a:prstGeom prst="rect">
             <a:avLst/>
@@ -12020,7 +8708,7 @@
               <a:buNone/>
             </a:pPr>
             <a:r>
-              <a:rPr lang="en-US" sz="1700" b="1" dirty="0">
+              <a:rPr lang="en-US" sz="2400" b="1" dirty="0">
                 <a:solidFill>
                   <a:srgbClr val="FFFFFF"/>
                 </a:solidFill>
@@ -12034,7 +8722,7 @@
               <a:buNone/>
             </a:pPr>
             <a:r>
-              <a:rPr lang="en-US" sz="1700" dirty="0">
+              <a:rPr lang="en-US" sz="2400" dirty="0">
                 <a:solidFill>
                   <a:srgbClr val="FFFFFF"/>
                 </a:solidFill>
@@ -12048,7 +8736,7 @@
               <a:buNone/>
             </a:pPr>
             <a:r>
-              <a:rPr lang="en-US" sz="1700" i="1" dirty="0">
+              <a:rPr lang="en-US" sz="2400" i="1" dirty="0">
                 <a:solidFill>
                   <a:srgbClr val="CADCFC"/>
                 </a:solidFill>
@@ -12058,7 +8746,7 @@
               </a:rPr>
               <a:t>Sammelt Ideen im Gespräch.</a:t>
             </a:r>
-            <a:endParaRPr lang="en-US" sz="1700" dirty="0"/>
+            <a:endParaRPr lang="en-US" sz="2400" dirty="0"/>
           </a:p>
         </p:txBody>
       </p:sp>
@@ -12942,12 +9630,12 @@
         </p:nvSpPr>
         <p:spPr>
           <a:xfrm>
-            <a:off x="548640" y="5897880"/>
-            <a:ext cx="11109960" cy="548640"/>
+            <a:off x="548640" y="5669280"/>
+            <a:ext cx="11109960" cy="777240"/>
           </a:xfrm>
           <a:prstGeom prst="roundRect">
             <a:avLst>
-              <a:gd name="adj" fmla="val 13333"/>
+              <a:gd name="adj" fmla="val 9412"/>
             </a:avLst>
           </a:prstGeom>
           <a:solidFill>
@@ -12964,8 +9652,8 @@
         </p:nvSpPr>
         <p:spPr>
           <a:xfrm>
-            <a:off x="822960" y="5897880"/>
-            <a:ext cx="10607040" cy="548640"/>
+            <a:off x="822960" y="5669280"/>
+            <a:ext cx="10607040" cy="777240"/>
           </a:xfrm>
           <a:prstGeom prst="rect">
             <a:avLst/>
@@ -12981,7 +9669,7 @@
               <a:buNone/>
             </a:pPr>
             <a:r>
-              <a:rPr lang="en-US" sz="1700" b="1" dirty="0">
+              <a:rPr lang="en-US" sz="2400" b="1" dirty="0">
                 <a:solidFill>
                   <a:srgbClr val="FFFFFF"/>
                 </a:solidFill>
@@ -12995,7 +9683,7 @@
               <a:buNone/>
             </a:pPr>
             <a:r>
-              <a:rPr lang="en-US" sz="1700" dirty="0">
+              <a:rPr lang="en-US" sz="2400" dirty="0">
                 <a:solidFill>
                   <a:srgbClr val="FFFFFF"/>
                 </a:solidFill>
@@ -13009,7 +9697,7 @@
               <a:buNone/>
             </a:pPr>
             <a:r>
-              <a:rPr lang="en-US" sz="1700" i="1" dirty="0">
+              <a:rPr lang="en-US" sz="2400" i="1" dirty="0">
                 <a:solidFill>
                   <a:srgbClr val="CADCFC"/>
                 </a:solidFill>
@@ -13019,7 +9707,7 @@
               </a:rPr>
               <a:t>Noch nichts aufschreiben.</a:t>
             </a:r>
-            <a:endParaRPr lang="en-US" sz="1700" dirty="0"/>
+            <a:endParaRPr lang="en-US" sz="2400" dirty="0"/>
           </a:p>
         </p:txBody>
       </p:sp>
@@ -13219,12 +9907,12 @@
         </p:nvSpPr>
         <p:spPr>
           <a:xfrm>
-            <a:off x="548640" y="1417320"/>
-            <a:ext cx="11109960" cy="1828800"/>
+            <a:off x="548640" y="1371600"/>
+            <a:ext cx="11109960" cy="1920240"/>
           </a:xfrm>
           <a:prstGeom prst="roundRect">
             <a:avLst>
-              <a:gd name="adj" fmla="val 4000"/>
+              <a:gd name="adj" fmla="val 3810"/>
             </a:avLst>
           </a:prstGeom>
           <a:solidFill>
@@ -13246,8 +9934,8 @@
         </p:nvSpPr>
         <p:spPr>
           <a:xfrm>
-            <a:off x="868680" y="1508760"/>
-            <a:ext cx="10469880" cy="1645920"/>
+            <a:off x="868680" y="1417320"/>
+            <a:ext cx="10469880" cy="1828800"/>
           </a:xfrm>
           <a:prstGeom prst="rect">
             <a:avLst/>
@@ -13263,7 +9951,7 @@
               <a:buNone/>
             </a:pPr>
             <a:r>
-              <a:rPr lang="en-US" sz="2000" dirty="0">
+              <a:rPr lang="en-US" sz="2400" dirty="0">
                 <a:solidFill>
                   <a:srgbClr val="1E2761"/>
                 </a:solidFill>
@@ -13277,7 +9965,7 @@
               <a:buNone/>
             </a:pPr>
             <a:r>
-              <a:rPr lang="en-US" sz="2000" b="1" dirty="0">
+              <a:rPr lang="en-US" sz="2400" b="1" dirty="0">
                 <a:solidFill>
                   <a:srgbClr val="1E2761"/>
                 </a:solidFill>
@@ -13291,7 +9979,7 @@
               <a:buNone/>
             </a:pPr>
             <a:r>
-              <a:rPr lang="en-US" sz="2000" dirty="0">
+              <a:rPr lang="en-US" sz="2400" dirty="0">
                 <a:solidFill>
                   <a:srgbClr val="1E2761"/>
                 </a:solidFill>
@@ -13305,7 +9993,7 @@
               <a:buNone/>
             </a:pPr>
             <a:r>
-              <a:rPr lang="en-US" sz="2000" b="1" dirty="0">
+              <a:rPr lang="en-US" sz="2400" b="1" dirty="0">
                 <a:solidFill>
                   <a:srgbClr val="1E2761"/>
                 </a:solidFill>
@@ -13319,7 +10007,7 @@
               <a:buNone/>
             </a:pPr>
             <a:r>
-              <a:rPr lang="en-US" sz="2000" dirty="0">
+              <a:rPr lang="en-US" sz="2400" dirty="0">
                 <a:solidFill>
                   <a:srgbClr val="1E2761"/>
                 </a:solidFill>
@@ -13333,7 +10021,7 @@
               <a:buNone/>
             </a:pPr>
             <a:r>
-              <a:rPr lang="en-US" sz="2000" b="1" dirty="0">
+              <a:rPr lang="en-US" sz="2400" b="1" dirty="0">
                 <a:solidFill>
                   <a:srgbClr val="1E2761"/>
                 </a:solidFill>
@@ -13347,7 +10035,7 @@
               <a:buNone/>
             </a:pPr>
             <a:r>
-              <a:rPr lang="en-US" sz="2000" dirty="0">
+              <a:rPr lang="en-US" sz="2400" dirty="0">
                 <a:solidFill>
                   <a:srgbClr val="1E2761"/>
                 </a:solidFill>
@@ -13361,7 +10049,7 @@
               <a:buNone/>
             </a:pPr>
             <a:r>
-              <a:rPr lang="en-US" sz="2000" b="1" dirty="0">
+              <a:rPr lang="en-US" sz="2400" b="1" dirty="0">
                 <a:solidFill>
                   <a:srgbClr val="1E2761"/>
                 </a:solidFill>
@@ -13375,7 +10063,7 @@
               <a:buNone/>
             </a:pPr>
             <a:r>
-              <a:rPr lang="en-US" sz="2000" dirty="0">
+              <a:rPr lang="en-US" sz="2400" dirty="0">
                 <a:solidFill>
                   <a:srgbClr val="1E2761"/>
                 </a:solidFill>
@@ -13389,7 +10077,7 @@
               <a:buNone/>
             </a:pPr>
             <a:r>
-              <a:rPr lang="en-US" sz="2000" b="1" dirty="0">
+              <a:rPr lang="en-US" sz="2400" b="1" dirty="0">
                 <a:solidFill>
                   <a:srgbClr val="1E2761"/>
                 </a:solidFill>
@@ -13403,7 +10091,7 @@
               <a:buNone/>
             </a:pPr>
             <a:r>
-              <a:rPr lang="en-US" sz="2000" dirty="0">
+              <a:rPr lang="en-US" sz="2400" dirty="0">
                 <a:solidFill>
                   <a:srgbClr val="1E2761"/>
                 </a:solidFill>
@@ -13417,7 +10105,7 @@
               <a:buNone/>
             </a:pPr>
             <a:r>
-              <a:rPr lang="en-US" sz="2000" b="1" dirty="0">
+              <a:rPr lang="en-US" sz="2400" b="1" dirty="0">
                 <a:solidFill>
                   <a:srgbClr val="1E2761"/>
                 </a:solidFill>
@@ -13431,7 +10119,7 @@
               <a:buNone/>
             </a:pPr>
             <a:r>
-              <a:rPr lang="en-US" sz="2000" dirty="0">
+              <a:rPr lang="en-US" sz="2400" dirty="0">
                 <a:solidFill>
                   <a:srgbClr val="1E2761"/>
                 </a:solidFill>
@@ -13441,7 +10129,7 @@
               </a:rPr>
               <a:t> Heer (stehendes Heer).</a:t>
             </a:r>
-            <a:endParaRPr lang="en-US" sz="2000" dirty="0"/>
+            <a:endParaRPr lang="en-US" sz="2400" dirty="0"/>
           </a:p>
         </p:txBody>
       </p:sp>
@@ -13453,12 +10141,12 @@
         </p:nvSpPr>
         <p:spPr>
           <a:xfrm>
-            <a:off x="548640" y="3383280"/>
-            <a:ext cx="11109960" cy="548640"/>
+            <a:off x="548640" y="3401568"/>
+            <a:ext cx="11109960" cy="1143000"/>
           </a:xfrm>
           <a:prstGeom prst="roundRect">
             <a:avLst>
-              <a:gd name="adj" fmla="val 13333"/>
+              <a:gd name="adj" fmla="val 6400"/>
             </a:avLst>
           </a:prstGeom>
           <a:solidFill>
@@ -13475,8 +10163,8 @@
         </p:nvSpPr>
         <p:spPr>
           <a:xfrm>
-            <a:off x="822960" y="3383280"/>
-            <a:ext cx="10607040" cy="548640"/>
+            <a:off x="822960" y="3401568"/>
+            <a:ext cx="10607040" cy="1143000"/>
           </a:xfrm>
           <a:prstGeom prst="rect">
             <a:avLst/>
@@ -13492,7 +10180,7 @@
               <a:buNone/>
             </a:pPr>
             <a:r>
-              <a:rPr lang="en-US" sz="1700" b="1" dirty="0">
+              <a:rPr lang="en-US" sz="2400" b="1" dirty="0">
                 <a:solidFill>
                   <a:srgbClr val="5B6B8C"/>
                 </a:solidFill>
@@ -13506,7 +10194,7 @@
               <a:buNone/>
             </a:pPr>
             <a:r>
-              <a:rPr lang="en-US" sz="1900" b="1" dirty="0">
+              <a:rPr lang="en-US" sz="2400" b="1" dirty="0">
                 <a:solidFill>
                   <a:srgbClr val="D9534F"/>
                 </a:solidFill>
@@ -13520,7 +10208,7 @@
               <a:buNone/>
             </a:pPr>
             <a:r>
-              <a:rPr lang="en-US" sz="1900" dirty="0">
+              <a:rPr lang="en-US" sz="2400" dirty="0">
                 <a:solidFill>
                   <a:srgbClr val="1E2761"/>
                 </a:solidFill>
@@ -13534,7 +10222,7 @@
               <a:buNone/>
             </a:pPr>
             <a:r>
-              <a:rPr lang="en-US" sz="1900" b="1" dirty="0">
+              <a:rPr lang="en-US" sz="2400" b="1" dirty="0">
                 <a:solidFill>
                   <a:srgbClr val="D9534F"/>
                 </a:solidFill>
@@ -13548,7 +10236,7 @@
               <a:buNone/>
             </a:pPr>
             <a:r>
-              <a:rPr lang="en-US" sz="1900" dirty="0">
+              <a:rPr lang="en-US" sz="2400" dirty="0">
                 <a:solidFill>
                   <a:srgbClr val="1E2761"/>
                 </a:solidFill>
@@ -13562,7 +10250,7 @@
               <a:buNone/>
             </a:pPr>
             <a:r>
-              <a:rPr lang="en-US" sz="1900" b="1" dirty="0">
+              <a:rPr lang="en-US" sz="2400" b="1" dirty="0">
                 <a:solidFill>
                   <a:srgbClr val="D9534F"/>
                 </a:solidFill>
@@ -13576,7 +10264,7 @@
               <a:buNone/>
             </a:pPr>
             <a:r>
-              <a:rPr lang="en-US" sz="1900" dirty="0">
+              <a:rPr lang="en-US" sz="2400" dirty="0">
                 <a:solidFill>
                   <a:srgbClr val="1E2761"/>
                 </a:solidFill>
@@ -13590,7 +10278,7 @@
               <a:buNone/>
             </a:pPr>
             <a:r>
-              <a:rPr lang="en-US" sz="1900" b="1" dirty="0">
+              <a:rPr lang="en-US" sz="2400" b="1" dirty="0">
                 <a:solidFill>
                   <a:srgbClr val="D9534F"/>
                 </a:solidFill>
@@ -13604,7 +10292,7 @@
               <a:buNone/>
             </a:pPr>
             <a:r>
-              <a:rPr lang="en-US" sz="1900" dirty="0">
+              <a:rPr lang="en-US" sz="2400" dirty="0">
                 <a:solidFill>
                   <a:srgbClr val="1E2761"/>
                 </a:solidFill>
@@ -13618,7 +10306,7 @@
               <a:buNone/>
             </a:pPr>
             <a:r>
-              <a:rPr lang="en-US" sz="1900" b="1" dirty="0">
+              <a:rPr lang="en-US" sz="2400" b="1" dirty="0">
                 <a:solidFill>
                   <a:srgbClr val="D9534F"/>
                 </a:solidFill>
@@ -13632,7 +10320,7 @@
               <a:buNone/>
             </a:pPr>
             <a:r>
-              <a:rPr lang="en-US" sz="1900" dirty="0">
+              <a:rPr lang="en-US" sz="2400" dirty="0">
                 <a:solidFill>
                   <a:srgbClr val="1E2761"/>
                 </a:solidFill>
@@ -13642,7 +10330,7 @@
               </a:rPr>
               <a:t> setzt sie durch</a:t>
             </a:r>
-            <a:endParaRPr lang="en-US" sz="1900" dirty="0"/>
+            <a:endParaRPr lang="en-US" sz="2400" dirty="0"/>
           </a:p>
         </p:txBody>
       </p:sp>
@@ -13654,12 +10342,12 @@
         </p:nvSpPr>
         <p:spPr>
           <a:xfrm>
-            <a:off x="548640" y="4069080"/>
-            <a:ext cx="11109960" cy="1645920"/>
+            <a:off x="548640" y="4645152"/>
+            <a:ext cx="11109960" cy="886968"/>
           </a:xfrm>
           <a:prstGeom prst="roundRect">
             <a:avLst>
-              <a:gd name="adj" fmla="val 4444"/>
+              <a:gd name="adj" fmla="val 8247"/>
             </a:avLst>
           </a:prstGeom>
           <a:solidFill>
@@ -13676,24 +10364,24 @@
         </p:nvSpPr>
         <p:spPr>
           <a:xfrm>
-            <a:off x="777240" y="4187952"/>
-            <a:ext cx="10607040" cy="365760"/>
-          </a:xfrm>
-          <a:prstGeom prst="rect">
-            <a:avLst/>
-          </a:prstGeom>
-          <a:noFill/>
-          <a:ln/>
-        </p:spPr>
-        <p:txBody>
-          <a:bodyPr wrap="square" lIns="0" tIns="0" rIns="0" bIns="0" rtlCol="0" anchor="t"/>
-          <a:lstStyle/>
-          <a:p>
-            <a:pPr indent="0" marL="0">
-              <a:buNone/>
-            </a:pPr>
-            <a:r>
-              <a:rPr lang="en-US" sz="1900" b="1" dirty="0">
+            <a:off x="822960" y="4645152"/>
+            <a:ext cx="10607040" cy="886968"/>
+          </a:xfrm>
+          <a:prstGeom prst="rect">
+            <a:avLst/>
+          </a:prstGeom>
+          <a:noFill/>
+          <a:ln/>
+        </p:spPr>
+        <p:txBody>
+          <a:bodyPr wrap="square" lIns="0" tIns="0" rIns="0" bIns="0" rtlCol="0" anchor="ctr"/>
+          <a:lstStyle/>
+          <a:p>
+            <a:pPr indent="0" marL="0">
+              <a:buNone/>
+            </a:pPr>
+            <a:r>
+              <a:rPr lang="en-US" sz="2400" b="1" dirty="0">
                 <a:solidFill>
                   <a:srgbClr val="D9534F"/>
                 </a:solidFill>
@@ -13701,38 +10389,13 @@
                 <a:ea typeface="Cambria" pitchFamily="34" charset="-122"/>
                 <a:cs typeface="Cambria" pitchFamily="34" charset="-120"/>
               </a:rPr>
-              <a:t>Test</a:t>
-            </a:r>
-            <a:endParaRPr lang="en-US" sz="1900" dirty="0"/>
-          </a:p>
-        </p:txBody>
-      </p:sp>
-      <p:sp>
-        <p:nvSpPr>
-          <p:cNvPr id="10" name="Text 8"/>
-          <p:cNvSpPr txBox="1"/>
-          <p:nvPr/>
-        </p:nvSpPr>
-        <p:spPr>
-          <a:xfrm>
-            <a:off x="777240" y="4572000"/>
-            <a:ext cx="10607040" cy="1051560"/>
-          </a:xfrm>
-          <a:prstGeom prst="rect">
-            <a:avLst/>
-          </a:prstGeom>
-          <a:noFill/>
-          <a:ln/>
-        </p:spPr>
-        <p:txBody>
-          <a:bodyPr wrap="square" lIns="0" tIns="0" rIns="0" bIns="0" rtlCol="0" anchor="t"/>
-          <a:lstStyle/>
-          <a:p>
-            <a:pPr indent="0" marL="0">
-              <a:buNone/>
-            </a:pPr>
-            <a:r>
-              <a:rPr lang="en-US" sz="2200" dirty="0">
+              <a:t>Test:   </a:t>
+            </a:r>
+            <a:pPr indent="0" marL="0">
+              <a:buNone/>
+            </a:pPr>
+            <a:r>
+              <a:rPr lang="en-US" sz="2400" dirty="0">
                 <a:solidFill>
                   <a:srgbClr val="1E2761"/>
                 </a:solidFill>
@@ -13746,7 +10409,7 @@
               <a:buNone/>
             </a:pPr>
             <a:r>
-              <a:rPr lang="en-US" sz="2200" b="1" dirty="0">
+              <a:rPr lang="en-US" sz="2400" b="1" dirty="0">
                 <a:solidFill>
                   <a:srgbClr val="1E2761"/>
                 </a:solidFill>
@@ -13756,24 +10419,24 @@
               </a:rPr>
               <a:t>Was sichert der König damit?</a:t>
             </a:r>
-            <a:endParaRPr lang="en-US" sz="2200" dirty="0"/>
-          </a:p>
-        </p:txBody>
-      </p:sp>
-      <p:sp>
-        <p:nvSpPr>
-          <p:cNvPr id="11" name="Shape 9"/>
+            <a:endParaRPr lang="en-US" sz="2400" dirty="0"/>
+          </a:p>
+        </p:txBody>
+      </p:sp>
+      <p:sp>
+        <p:nvSpPr>
+          <p:cNvPr id="10" name="Shape 8"/>
           <p:cNvSpPr/>
           <p:nvPr/>
         </p:nvSpPr>
         <p:spPr>
           <a:xfrm>
-            <a:off x="548640" y="5897880"/>
-            <a:ext cx="11109960" cy="548640"/>
+            <a:off x="548640" y="5669280"/>
+            <a:ext cx="11109960" cy="777240"/>
           </a:xfrm>
           <a:prstGeom prst="roundRect">
             <a:avLst>
-              <a:gd name="adj" fmla="val 13333"/>
+              <a:gd name="adj" fmla="val 9412"/>
             </a:avLst>
           </a:prstGeom>
           <a:solidFill>
@@ -13784,74 +10447,74 @@
       </p:sp>
       <p:sp>
         <p:nvSpPr>
+          <p:cNvPr id="11" name="Text 9"/>
+          <p:cNvSpPr txBox="1"/>
+          <p:nvPr/>
+        </p:nvSpPr>
+        <p:spPr>
+          <a:xfrm>
+            <a:off x="822960" y="5669280"/>
+            <a:ext cx="10607040" cy="777240"/>
+          </a:xfrm>
+          <a:prstGeom prst="rect">
+            <a:avLst/>
+          </a:prstGeom>
+          <a:noFill/>
+          <a:ln/>
+        </p:spPr>
+        <p:txBody>
+          <a:bodyPr wrap="square" lIns="0" tIns="0" rIns="0" bIns="0" rtlCol="0" anchor="ctr"/>
+          <a:lstStyle/>
+          <a:p>
+            <a:pPr indent="0" marL="0">
+              <a:buNone/>
+            </a:pPr>
+            <a:r>
+              <a:rPr lang="en-US" sz="2400" b="1" dirty="0">
+                <a:solidFill>
+                  <a:srgbClr val="FFFFFF"/>
+                </a:solidFill>
+                <a:latin typeface="Calibri" pitchFamily="34" charset="0"/>
+                <a:ea typeface="Calibri" pitchFamily="34" charset="-122"/>
+                <a:cs typeface="Calibri" pitchFamily="34" charset="-120"/>
+              </a:rPr>
+              <a:t>Jetzt: </a:t>
+            </a:r>
+            <a:pPr indent="0" marL="0">
+              <a:buNone/>
+            </a:pPr>
+            <a:r>
+              <a:rPr lang="en-US" sz="2400" dirty="0">
+                <a:solidFill>
+                  <a:srgbClr val="FFFFFF"/>
+                </a:solidFill>
+                <a:latin typeface="Calibri" pitchFamily="34" charset="0"/>
+                <a:ea typeface="Calibri" pitchFamily="34" charset="-122"/>
+                <a:cs typeface="Calibri" pitchFamily="34" charset="-120"/>
+              </a:rPr>
+              <a:t>Schreibe den Merksatz mit Beispiel ab und rahme ihn rot ein.      </a:t>
+            </a:r>
+            <a:pPr indent="0" marL="0">
+              <a:buNone/>
+            </a:pPr>
+            <a:r>
+              <a:rPr lang="en-US" sz="2400" i="1" dirty="0">
+                <a:solidFill>
+                  <a:srgbClr val="CADCFC"/>
+                </a:solidFill>
+                <a:latin typeface="Calibri" pitchFamily="34" charset="0"/>
+                <a:ea typeface="Calibri" pitchFamily="34" charset="-122"/>
+                <a:cs typeface="Calibri" pitchFamily="34" charset="-120"/>
+              </a:rPr>
+              <a:t>Fertig? Stift hinlegen.</a:t>
+            </a:r>
+            <a:endParaRPr lang="en-US" sz="2400" dirty="0"/>
+          </a:p>
+        </p:txBody>
+      </p:sp>
+      <p:sp>
+        <p:nvSpPr>
           <p:cNvPr id="12" name="Text 10"/>
-          <p:cNvSpPr txBox="1"/>
-          <p:nvPr/>
-        </p:nvSpPr>
-        <p:spPr>
-          <a:xfrm>
-            <a:off x="822960" y="5897880"/>
-            <a:ext cx="10607040" cy="548640"/>
-          </a:xfrm>
-          <a:prstGeom prst="rect">
-            <a:avLst/>
-          </a:prstGeom>
-          <a:noFill/>
-          <a:ln/>
-        </p:spPr>
-        <p:txBody>
-          <a:bodyPr wrap="square" lIns="0" tIns="0" rIns="0" bIns="0" rtlCol="0" anchor="ctr"/>
-          <a:lstStyle/>
-          <a:p>
-            <a:pPr indent="0" marL="0">
-              <a:buNone/>
-            </a:pPr>
-            <a:r>
-              <a:rPr lang="en-US" sz="1700" b="1" dirty="0">
-                <a:solidFill>
-                  <a:srgbClr val="FFFFFF"/>
-                </a:solidFill>
-                <a:latin typeface="Calibri" pitchFamily="34" charset="0"/>
-                <a:ea typeface="Calibri" pitchFamily="34" charset="-122"/>
-                <a:cs typeface="Calibri" pitchFamily="34" charset="-120"/>
-              </a:rPr>
-              <a:t>Jetzt: </a:t>
-            </a:r>
-            <a:pPr indent="0" marL="0">
-              <a:buNone/>
-            </a:pPr>
-            <a:r>
-              <a:rPr lang="en-US" sz="1700" dirty="0">
-                <a:solidFill>
-                  <a:srgbClr val="FFFFFF"/>
-                </a:solidFill>
-                <a:latin typeface="Calibri" pitchFamily="34" charset="0"/>
-                <a:ea typeface="Calibri" pitchFamily="34" charset="-122"/>
-                <a:cs typeface="Calibri" pitchFamily="34" charset="-120"/>
-              </a:rPr>
-              <a:t>Schreibe den Merksatz mit Beispiel ab und rahme ihn rot ein.      </a:t>
-            </a:r>
-            <a:pPr indent="0" marL="0">
-              <a:buNone/>
-            </a:pPr>
-            <a:r>
-              <a:rPr lang="en-US" sz="1700" i="1" dirty="0">
-                <a:solidFill>
-                  <a:srgbClr val="CADCFC"/>
-                </a:solidFill>
-                <a:latin typeface="Calibri" pitchFamily="34" charset="0"/>
-                <a:ea typeface="Calibri" pitchFamily="34" charset="-122"/>
-                <a:cs typeface="Calibri" pitchFamily="34" charset="-120"/>
-              </a:rPr>
-              <a:t>Fertig? Stift hinlegen.</a:t>
-            </a:r>
-            <a:endParaRPr lang="en-US" sz="1700" dirty="0"/>
-          </a:p>
-        </p:txBody>
-      </p:sp>
-      <p:sp>
-        <p:nvSpPr>
-          <p:cNvPr id="13" name="Text 11"/>
           <p:cNvSpPr txBox="1"/>
           <p:nvPr/>
         </p:nvSpPr>
@@ -13890,7 +10553,7 @@
       </p:sp>
       <p:sp>
         <p:nvSpPr>
-          <p:cNvPr id="14" name="Text 12"/>
+          <p:cNvPr id="13" name="Text 11"/>
           <p:cNvSpPr txBox="1"/>
           <p:nvPr/>
         </p:nvSpPr>
@@ -14045,12 +10708,12 @@
         </p:nvSpPr>
         <p:spPr>
           <a:xfrm>
-            <a:off x="548640" y="1417320"/>
-            <a:ext cx="11109960" cy="1975104"/>
+            <a:off x="548640" y="1371600"/>
+            <a:ext cx="11109960" cy="2148840"/>
           </a:xfrm>
           <a:prstGeom prst="roundRect">
             <a:avLst>
-              <a:gd name="adj" fmla="val 3704"/>
+              <a:gd name="adj" fmla="val 3404"/>
             </a:avLst>
           </a:prstGeom>
           <a:solidFill>
@@ -14067,7 +10730,7 @@
         </p:nvSpPr>
         <p:spPr>
           <a:xfrm>
-            <a:off x="731520" y="1568196"/>
+            <a:off x="731520" y="1517904"/>
             <a:ext cx="384048" cy="384048"/>
           </a:xfrm>
           <a:prstGeom prst="ellipse">
@@ -14087,7 +10750,7 @@
         </p:nvSpPr>
         <p:spPr>
           <a:xfrm>
-            <a:off x="731520" y="1568196"/>
+            <a:off x="731520" y="1517904"/>
             <a:ext cx="384048" cy="384048"/>
           </a:xfrm>
           <a:prstGeom prst="rect">
@@ -14126,8 +10789,8 @@
         </p:nvSpPr>
         <p:spPr>
           <a:xfrm>
-            <a:off x="1280160" y="1554480"/>
-            <a:ext cx="10241280" cy="411480"/>
+            <a:off x="1280160" y="1481328"/>
+            <a:ext cx="10241280" cy="457200"/>
           </a:xfrm>
           <a:prstGeom prst="rect">
             <a:avLst/>
@@ -14143,7 +10806,7 @@
               <a:buNone/>
             </a:pPr>
             <a:r>
-              <a:rPr lang="en-US" sz="2100" b="1" dirty="0">
+              <a:rPr lang="en-US" sz="2400" b="1" dirty="0">
                 <a:solidFill>
                   <a:srgbClr val="1E2761"/>
                 </a:solidFill>
@@ -14153,7 +10816,7 @@
               </a:rPr>
               <a:t>Schreibe Ü1 oben auf das Arbeitsblatt.</a:t>
             </a:r>
-            <a:endParaRPr lang="en-US" sz="2100" dirty="0"/>
+            <a:endParaRPr lang="en-US" sz="2400" dirty="0"/>
           </a:p>
         </p:txBody>
       </p:sp>
@@ -14165,7 +10828,7 @@
         </p:nvSpPr>
         <p:spPr>
           <a:xfrm>
-            <a:off x="731520" y="2052828"/>
+            <a:off x="731520" y="2048256"/>
             <a:ext cx="384048" cy="384048"/>
           </a:xfrm>
           <a:prstGeom prst="ellipse">
@@ -14185,7 +10848,7 @@
         </p:nvSpPr>
         <p:spPr>
           <a:xfrm>
-            <a:off x="731520" y="2052828"/>
+            <a:off x="731520" y="2048256"/>
             <a:ext cx="384048" cy="384048"/>
           </a:xfrm>
           <a:prstGeom prst="rect">
@@ -14224,8 +10887,8 @@
         </p:nvSpPr>
         <p:spPr>
           <a:xfrm>
-            <a:off x="1280160" y="2039112"/>
-            <a:ext cx="10241280" cy="731520"/>
+            <a:off x="1280160" y="2011680"/>
+            <a:ext cx="10241280" cy="868680"/>
           </a:xfrm>
           <a:prstGeom prst="rect">
             <a:avLst/>
@@ -14241,7 +10904,7 @@
               <a:buNone/>
             </a:pPr>
             <a:r>
-              <a:rPr lang="en-US" sz="2100" b="1" dirty="0">
+              <a:rPr lang="en-US" sz="2400" b="1" dirty="0">
                 <a:solidFill>
                   <a:srgbClr val="1E2761"/>
                 </a:solidFill>
@@ -14251,7 +10914,7 @@
               </a:rPr>
               <a:t>Lies den Text einmal ganz. Ergänze dann die 12 Lücken mit dem Wortspeicher.</a:t>
             </a:r>
-            <a:endParaRPr lang="en-US" sz="2100" dirty="0"/>
+            <a:endParaRPr lang="en-US" sz="2400" dirty="0"/>
           </a:p>
         </p:txBody>
       </p:sp>
@@ -14263,7 +10926,7 @@
         </p:nvSpPr>
         <p:spPr>
           <a:xfrm>
-            <a:off x="731520" y="2857500"/>
+            <a:off x="731520" y="2990088"/>
             <a:ext cx="384048" cy="384048"/>
           </a:xfrm>
           <a:prstGeom prst="ellipse">
@@ -14283,7 +10946,7 @@
         </p:nvSpPr>
         <p:spPr>
           <a:xfrm>
-            <a:off x="731520" y="2857500"/>
+            <a:off x="731520" y="2990088"/>
             <a:ext cx="384048" cy="384048"/>
           </a:xfrm>
           <a:prstGeom prst="rect">
@@ -14322,8 +10985,8 @@
         </p:nvSpPr>
         <p:spPr>
           <a:xfrm>
-            <a:off x="1280160" y="2843784"/>
-            <a:ext cx="10241280" cy="411480"/>
+            <a:off x="1280160" y="2953512"/>
+            <a:ext cx="10241280" cy="457200"/>
           </a:xfrm>
           <a:prstGeom prst="rect">
             <a:avLst/>
@@ -14339,7 +11002,7 @@
               <a:buNone/>
             </a:pPr>
             <a:r>
-              <a:rPr lang="en-US" sz="2100" b="1" dirty="0">
+              <a:rPr lang="en-US" sz="2400" b="1" dirty="0">
                 <a:solidFill>
                   <a:srgbClr val="1E2761"/>
                 </a:solidFill>
@@ -14349,7 +11012,7 @@
               </a:rPr>
               <a:t>Streiche jedes benutzte Wort durch.</a:t>
             </a:r>
-            <a:endParaRPr lang="en-US" sz="2100" dirty="0"/>
+            <a:endParaRPr lang="en-US" sz="2400" dirty="0"/>
           </a:p>
         </p:txBody>
       </p:sp>
@@ -14361,12 +11024,12 @@
         </p:nvSpPr>
         <p:spPr>
           <a:xfrm>
-            <a:off x="548640" y="5897880"/>
-            <a:ext cx="11109960" cy="548640"/>
+            <a:off x="548640" y="5669280"/>
+            <a:ext cx="11109960" cy="777240"/>
           </a:xfrm>
           <a:prstGeom prst="roundRect">
             <a:avLst>
-              <a:gd name="adj" fmla="val 13333"/>
+              <a:gd name="adj" fmla="val 9412"/>
             </a:avLst>
           </a:prstGeom>
           <a:solidFill>
@@ -14383,8 +11046,8 @@
         </p:nvSpPr>
         <p:spPr>
           <a:xfrm>
-            <a:off x="822960" y="5897880"/>
-            <a:ext cx="10607040" cy="548640"/>
+            <a:off x="822960" y="5669280"/>
+            <a:ext cx="10607040" cy="777240"/>
           </a:xfrm>
           <a:prstGeom prst="rect">
             <a:avLst/>
@@ -14400,7 +11063,7 @@
               <a:buNone/>
             </a:pPr>
             <a:r>
-              <a:rPr lang="en-US" sz="1700" b="1" dirty="0">
+              <a:rPr lang="en-US" sz="2400" b="1" dirty="0">
                 <a:solidFill>
                   <a:srgbClr val="FFFFFF"/>
                 </a:solidFill>
@@ -14414,7 +11077,7 @@
               <a:buNone/>
             </a:pPr>
             <a:r>
-              <a:rPr lang="en-US" sz="1700" dirty="0">
+              <a:rPr lang="en-US" sz="2400" dirty="0">
                 <a:solidFill>
                   <a:srgbClr val="FFFFFF"/>
                 </a:solidFill>
@@ -14428,7 +11091,7 @@
               <a:buNone/>
             </a:pPr>
             <a:r>
-              <a:rPr lang="en-US" sz="1700" i="1" dirty="0">
+              <a:rPr lang="en-US" sz="2400" i="1" dirty="0">
                 <a:solidFill>
                   <a:srgbClr val="CADCFC"/>
                 </a:solidFill>
@@ -14438,7 +11101,7 @@
               </a:rPr>
               <a:t>Fertig? Stift hinlegen. Schnelle: ★-Aufgabe.</a:t>
             </a:r>
-            <a:endParaRPr lang="en-US" sz="1700" dirty="0"/>
+            <a:endParaRPr lang="en-US" sz="2400" dirty="0"/>
           </a:p>
         </p:txBody>
       </p:sp>
@@ -14528,12 +11191,12 @@
         </p:nvSpPr>
         <p:spPr>
           <a:xfrm>
-            <a:off x="548640" y="3758184"/>
-            <a:ext cx="11109960" cy="1463040"/>
+            <a:off x="548640" y="3611880"/>
+            <a:ext cx="11109960" cy="1965960"/>
           </a:xfrm>
           <a:prstGeom prst="roundRect">
             <a:avLst>
-              <a:gd name="adj" fmla="val 5000"/>
+              <a:gd name="adj" fmla="val 3721"/>
             </a:avLst>
           </a:prstGeom>
           <a:solidFill>
@@ -14550,8 +11213,8 @@
         </p:nvSpPr>
         <p:spPr>
           <a:xfrm>
-            <a:off x="822960" y="3867912"/>
-            <a:ext cx="3657600" cy="320040"/>
+            <a:off x="822960" y="3685032"/>
+            <a:ext cx="3657600" cy="365760"/>
           </a:xfrm>
           <a:prstGeom prst="rect">
             <a:avLst/>
@@ -14567,7 +11230,7 @@
               <a:buNone/>
             </a:pPr>
             <a:r>
-              <a:rPr lang="en-US" sz="1700" b="1" dirty="0">
+              <a:rPr lang="en-US" sz="2400" b="1" dirty="0">
                 <a:solidFill>
                   <a:srgbClr val="D9534F"/>
                 </a:solidFill>
@@ -14577,7 +11240,7 @@
               </a:rPr>
               <a:t>Wortspeicher</a:t>
             </a:r>
-            <a:endParaRPr lang="en-US" sz="1700" dirty="0"/>
+            <a:endParaRPr lang="en-US" sz="2400" dirty="0"/>
           </a:p>
         </p:txBody>
       </p:sp>
@@ -14589,8 +11252,8 @@
         </p:nvSpPr>
         <p:spPr>
           <a:xfrm>
-            <a:off x="822960" y="4233672"/>
-            <a:ext cx="10607040" cy="914400"/>
+            <a:off x="822960" y="4114800"/>
+            <a:ext cx="10607040" cy="1417320"/>
           </a:xfrm>
           <a:prstGeom prst="rect">
             <a:avLst/>
@@ -14606,7 +11269,7 @@
               <a:buNone/>
             </a:pPr>
             <a:r>
-              <a:rPr lang="en-US" sz="2000" dirty="0">
+              <a:rPr lang="en-US" sz="2400" dirty="0">
                 <a:solidFill>
                   <a:srgbClr val="1E2761"/>
                 </a:solidFill>
@@ -14616,7 +11279,7 @@
               </a:rPr>
               <a:t>Beamte · Glaube · Merkantilismus · Gottesgnadentum · Versailles · Steuerfreiheit · Zölle · stehendes · 400.000 · Drittel · absoluter · Intendanten</a:t>
             </a:r>
-            <a:endParaRPr lang="en-US" sz="2000" dirty="0"/>
+            <a:endParaRPr lang="en-US" sz="2400" dirty="0"/>
           </a:p>
         </p:txBody>
       </p:sp>
@@ -14858,12 +11521,12 @@
         </p:nvSpPr>
         <p:spPr>
           <a:xfrm>
-            <a:off x="548640" y="5897880"/>
-            <a:ext cx="11109960" cy="548640"/>
+            <a:off x="548640" y="5669280"/>
+            <a:ext cx="11109960" cy="777240"/>
           </a:xfrm>
           <a:prstGeom prst="roundRect">
             <a:avLst>
-              <a:gd name="adj" fmla="val 13333"/>
+              <a:gd name="adj" fmla="val 9412"/>
             </a:avLst>
           </a:prstGeom>
           <a:solidFill>
@@ -14880,8 +11543,8 @@
         </p:nvSpPr>
         <p:spPr>
           <a:xfrm>
-            <a:off x="822960" y="5897880"/>
-            <a:ext cx="10607040" cy="548640"/>
+            <a:off x="822960" y="5669280"/>
+            <a:ext cx="10607040" cy="777240"/>
           </a:xfrm>
           <a:prstGeom prst="rect">
             <a:avLst/>
@@ -14897,7 +11560,7 @@
               <a:buNone/>
             </a:pPr>
             <a:r>
-              <a:rPr lang="en-US" sz="1700" b="1" dirty="0">
+              <a:rPr lang="en-US" sz="2400" b="1" dirty="0">
                 <a:solidFill>
                   <a:srgbClr val="FFFFFF"/>
                 </a:solidFill>
@@ -14911,7 +11574,7 @@
               <a:buNone/>
             </a:pPr>
             <a:r>
-              <a:rPr lang="en-US" sz="1700" dirty="0">
+              <a:rPr lang="en-US" sz="2400" dirty="0">
                 <a:solidFill>
                   <a:srgbClr val="FFFFFF"/>
                 </a:solidFill>
@@ -14925,7 +11588,7 @@
               <a:buNone/>
             </a:pPr>
             <a:r>
-              <a:rPr lang="en-US" sz="1700" i="1" dirty="0">
+              <a:rPr lang="en-US" sz="2400" i="1" dirty="0">
                 <a:solidFill>
                   <a:srgbClr val="CADCFC"/>
                 </a:solidFill>
@@ -14935,7 +11598,7 @@
               </a:rPr>
               <a:t>Bei „falsch“: Aussage verbessern.</a:t>
             </a:r>
-            <a:endParaRPr lang="en-US" sz="1700" dirty="0"/>
+            <a:endParaRPr lang="en-US" sz="2400" dirty="0"/>
           </a:p>
         </p:txBody>
       </p:sp>
@@ -15197,11 +11860,11 @@
         <p:spPr>
           <a:xfrm>
             <a:off x="548640" y="3154680"/>
-            <a:ext cx="11109960" cy="2514600"/>
+            <a:ext cx="11109960" cy="2377440"/>
           </a:xfrm>
           <a:prstGeom prst="roundRect">
             <a:avLst>
-              <a:gd name="adj" fmla="val 2909"/>
+              <a:gd name="adj" fmla="val 3077"/>
             </a:avLst>
           </a:prstGeom>
           <a:solidFill>
@@ -15240,7 +11903,7 @@
               <a:buNone/>
             </a:pPr>
             <a:r>
-              <a:rPr lang="en-US" sz="1900" b="1" dirty="0">
+              <a:rPr lang="en-US" sz="2400" b="1" dirty="0">
                 <a:solidFill>
                   <a:srgbClr val="2E9E6B"/>
                 </a:solidFill>
@@ -15250,7 +11913,7 @@
               </a:rPr>
               <a:t>Begründung</a:t>
             </a:r>
-            <a:endParaRPr lang="en-US" sz="1900" dirty="0"/>
+            <a:endParaRPr lang="en-US" sz="2400" dirty="0"/>
           </a:p>
         </p:txBody>
       </p:sp>
@@ -15301,12 +11964,12 @@
         </p:nvSpPr>
         <p:spPr>
           <a:xfrm>
-            <a:off x="548640" y="5897880"/>
-            <a:ext cx="11109960" cy="548640"/>
+            <a:off x="548640" y="5669280"/>
+            <a:ext cx="11109960" cy="777240"/>
           </a:xfrm>
           <a:prstGeom prst="roundRect">
             <a:avLst>
-              <a:gd name="adj" fmla="val 13333"/>
+              <a:gd name="adj" fmla="val 9412"/>
             </a:avLst>
           </a:prstGeom>
           <a:solidFill>
@@ -15323,8 +11986,8 @@
         </p:nvSpPr>
         <p:spPr>
           <a:xfrm>
-            <a:off x="822960" y="5897880"/>
-            <a:ext cx="10607040" cy="548640"/>
+            <a:off x="822960" y="5669280"/>
+            <a:ext cx="10607040" cy="777240"/>
           </a:xfrm>
           <a:prstGeom prst="rect">
             <a:avLst/>
@@ -15340,7 +12003,7 @@
               <a:buNone/>
             </a:pPr>
             <a:r>
-              <a:rPr lang="en-US" sz="1700" b="1" dirty="0">
+              <a:rPr lang="en-US" sz="2400" b="1" dirty="0">
                 <a:solidFill>
                   <a:srgbClr val="FFFFFF"/>
                 </a:solidFill>
@@ -15354,7 +12017,7 @@
               <a:buNone/>
             </a:pPr>
             <a:r>
-              <a:rPr lang="en-US" sz="1700" dirty="0">
+              <a:rPr lang="en-US" sz="2400" dirty="0">
                 <a:solidFill>
                   <a:srgbClr val="FFFFFF"/>
                 </a:solidFill>
@@ -15364,7 +12027,7 @@
               </a:rPr>
               <a:t>Stimmt deine Begründung mit der Folie überein?</a:t>
             </a:r>
-            <a:endParaRPr lang="en-US" sz="1700" dirty="0"/>
+            <a:endParaRPr lang="en-US" sz="2400" dirty="0"/>
           </a:p>
         </p:txBody>
       </p:sp>
@@ -15684,12 +12347,12 @@
         </p:nvSpPr>
         <p:spPr>
           <a:xfrm>
-            <a:off x="548640" y="5897880"/>
-            <a:ext cx="11109960" cy="548640"/>
+            <a:off x="548640" y="5669280"/>
+            <a:ext cx="11109960" cy="777240"/>
           </a:xfrm>
           <a:prstGeom prst="roundRect">
             <a:avLst>
-              <a:gd name="adj" fmla="val 13333"/>
+              <a:gd name="adj" fmla="val 9412"/>
             </a:avLst>
           </a:prstGeom>
           <a:solidFill>
@@ -15706,8 +12369,8 @@
         </p:nvSpPr>
         <p:spPr>
           <a:xfrm>
-            <a:off x="822960" y="5897880"/>
-            <a:ext cx="10607040" cy="548640"/>
+            <a:off x="822960" y="5669280"/>
+            <a:ext cx="10607040" cy="777240"/>
           </a:xfrm>
           <a:prstGeom prst="rect">
             <a:avLst/>
@@ -15723,7 +12386,7 @@
               <a:buNone/>
             </a:pPr>
             <a:r>
-              <a:rPr lang="en-US" sz="1700" b="1" dirty="0">
+              <a:rPr lang="en-US" sz="2400" b="1" dirty="0">
                 <a:solidFill>
                   <a:srgbClr val="FFFFFF"/>
                 </a:solidFill>
@@ -15737,7 +12400,7 @@
               <a:buNone/>
             </a:pPr>
             <a:r>
-              <a:rPr lang="en-US" sz="1700" dirty="0">
+              <a:rPr lang="en-US" sz="2400" dirty="0">
                 <a:solidFill>
                   <a:srgbClr val="FFFFFF"/>
                 </a:solidFill>
@@ -15751,7 +12414,7 @@
               <a:buNone/>
             </a:pPr>
             <a:r>
-              <a:rPr lang="en-US" sz="1700" i="1" dirty="0">
+              <a:rPr lang="en-US" sz="2400" i="1" dirty="0">
                 <a:solidFill>
                   <a:srgbClr val="CADCFC"/>
                 </a:solidFill>
@@ -15761,7 +12424,7 @@
               </a:rPr>
               <a:t>Bei „falsch“: Aussage verbessern.</a:t>
             </a:r>
-            <a:endParaRPr lang="en-US" sz="1700" dirty="0"/>
+            <a:endParaRPr lang="en-US" sz="2400" dirty="0"/>
           </a:p>
         </p:txBody>
       </p:sp>

--- a/Geschichte_8/Absolutismus_Wiederholung/Praesentation_Absolutismus_Wiederholung.pptx
+++ b/Geschichte_8/Absolutismus_Wiederholung/Praesentation_Absolutismus_Wiederholung.pptx
@@ -23,9 +23,13 @@
     <p:sldId id="271" r:id="rId17"/>
     <p:sldId id="272" r:id="rId18"/>
     <p:sldId id="273" r:id="rId19"/>
+    <p:sldId id="274" r:id="rId20"/>
+    <p:sldId id="275" r:id="rId21"/>
+    <p:sldId id="276" r:id="rId22"/>
+    <p:sldId id="277" r:id="rId23"/>
   </p:sldIdLst>
   <p:notesMasterIdLst>
-    <p:notesMasterId r:id="rId20"/>
+    <p:notesMasterId r:id="rId24"/>
   </p:notesMasterIdLst>
   <p:sldSz cx="12192000" cy="6858000"/>
   <p:notesSz cx="6858000" cy="12192000"/>
@@ -695,7 +699,7 @@
           <a:p>
             <a:r>
               <a:rPr lang="en-US" dirty="0"/>
-              <a:t>Ansage: „Stifte liegen. Ihr schreibt noch nichts auf. Entscheidet still und meldet euch.“ Unterrichtsgespräch: Entscheidung und Begründung sammeln, erst dann die nächste Folie (Antwort) zeigen. Lösung: 3 wahr (Säule Heer). Im Gespräch: Was kostet ein solches Heer? (ein Drittel des Staatshaushalts in Friedenszeiten)</a:t>
+              <a:t>Kurzer Exkurs zur Verdeutlichung (ca. 5 Minuten, bei Zeitnot weglassen). Ansage: „Stifte liegen. Ihr schreibt noch nichts auf. Meldet euch.“ Brutto und Netto von der Klasse erklären lassen, dann die Zahl nennen. Hinweis: 50 000 € ist ein runder Wert. Der Durchschnitt für Vollzeitbeschäftigte liegt nach meinem Kenntnisstand eher höher (etwa 55 000 bis 60 000 € im Jahr). Aktuellen Wert beim Statistischen Bundesamt prüfen und ggf. anpassen.</a:t>
             </a:r>
             <a:endParaRPr lang="en-US" dirty="0"/>
           </a:p>
@@ -783,7 +787,7 @@
           <a:p>
             <a:r>
               <a:rPr lang="en-US" dirty="0"/>
-              <a:t>Erst zeigen, wenn die Klasse begründet hat. Nicht ausführlich erklären: Was unsicher bleibt, kommt in den folgenden Phasen.</a:t>
+              <a:t>Gerundete Beispielrechnung: ledig, ohne Kinder, Lohnsteuerklasse I, Stand etwa 2025. Mit einem Brutto-Netto-Rechner (z. B. des Bundesfinanzministeriums) gegenprüfen und die Zahlen ggf. anpassen. Impuls: Wofür braucht der Staat Steuern? (Schulen, Straßen, Polizei, Bundeswehr, Beamte). Das ist die Brücke zu Versailles, Heer und Beamten im Absolutismus.</a:t>
             </a:r>
             <a:endParaRPr lang="en-US" dirty="0"/>
           </a:p>
@@ -871,7 +875,7 @@
           <a:p>
             <a:r>
               <a:rPr lang="en-US" dirty="0"/>
-              <a:t>Ansage: „Stifte liegen. Ihr schreibt noch nichts auf. Entscheidet still und meldet euch.“ Unterrichtsgespräch: Entscheidung und Begründung sammeln, erst dann die nächste Folie (Antwort) zeigen. Lösung: 4 falsch: 1685 Ende der Toleranz. Im Gespräch: Wie passt das zum Gottesgnadentum?</a:t>
+              <a:t>Ansage: „Jetzt arbeitet ihr zu zweit. Die Aufgabe steht rechts.“ Lösung: 7 000 € : 12 ≈ 580 € mehr pro Monat. Begründung offen, erwartbar: ungerecht, weil beide gleich viel verdienen und die Straßen, Schulen und die Polizei gleich nutzen. Danach 2 bis 3 Antworten sammeln. Leitfrage zur Überleitung: „Und jetzt stellt euch vor, das hängt nur davon ab, in welche Familie ihr geboren seid.“</a:t>
             </a:r>
             <a:endParaRPr lang="en-US" dirty="0"/>
           </a:p>
@@ -959,7 +963,7 @@
           <a:p>
             <a:r>
               <a:rPr lang="en-US" dirty="0"/>
-              <a:t>Erst zeigen, wenn die Klasse begründet hat. Nicht ausführlich erklären: Was unsicher bleibt, kommt in den folgenden Phasen.</a:t>
+              <a:t>Ansage: „Meldet euch. Ihr schreibt noch nichts auf.“ Antwort: der Dritte Stand (Bauern und Bürger). Überleitung zurück zu Wahr oder falsch, Aussage 3 (stehendes Heer) und 4: Was kostet das alles? (Heer in Friedenszeiten ein Drittel des Staatshaushalts.) Der Adel zahlte keine Steuern, hatte aber ranghohe Posten in der Armee und alleiniges Jagdrecht.</a:t>
             </a:r>
             <a:endParaRPr lang="en-US" dirty="0"/>
           </a:p>
@@ -1047,7 +1051,7 @@
           <a:p>
             <a:r>
               <a:rPr lang="en-US" dirty="0"/>
-              <a:t>Vorher: Wort „Absolutismus“ an die Tafel, gemeinsam klären: absolut = uneingeschränkt. Dann Ansage: „Jetzt schreibt ihr von der Folie ab: Merksatz 2. Rahmt ihn rot ein.“</a:t>
+              <a:t>Ansage: „Stifte liegen. Ihr schreibt noch nichts auf. Entscheidet still und meldet euch.“ Unterrichtsgespräch: Entscheidung und Begründung sammeln, erst dann die nächste Folie (Antwort) zeigen. Lösung: 3 wahr (Säule Heer). Im Gespräch: Was kostet ein solches Heer? (ein Drittel des Staatshaushalts in Friedenszeiten)</a:t>
             </a:r>
             <a:endParaRPr lang="en-US" dirty="0"/>
           </a:p>
@@ -1135,7 +1139,7 @@
           <a:p>
             <a:r>
               <a:rPr lang="en-US" dirty="0"/>
-              <a:t>Lösung: 1 Absolutismus (keine Kontrolle) · 2 kein Absolutismus (Parlament kann den König stoppen) · 3 Absolutismus (Beamte sind dem König zum Gehorsam verpflichtet, er kontrolliert sie) · 4 kein Absolutismus (Wahl = Demokratie, Macht ist begrenzt). Kontrolle kurz: „Wer drankommt, schreibt an die Tafel. Alle prüfen mit.“ Dann: „Vergleicht und verbessert mit Grün.“</a:t>
+              <a:t>Erst zeigen, wenn die Klasse begründet hat. Nicht ausführlich erklären: Was unsicher bleibt, kommt in den folgenden Phasen.</a:t>
             </a:r>
             <a:endParaRPr lang="en-US" dirty="0"/>
           </a:p>
@@ -1223,7 +1227,7 @@
           <a:p>
             <a:r>
               <a:rPr lang="en-US" dirty="0"/>
-              <a:t>Ansage: „Jetzt arbeitet ihr allein. Die Aufgabe steht rechts.“ Die Karikatur gibt Hinweise auf Vorrechte und Lasten der Stände (hier: Karikatur Drei Stände, 1789; die Karikatur mit Sprechblasen kann die Bilddatei in quellcode/praesentation.js ersetzen). Danach 3 Schüler vorlesen lassen (verschiedene Stände): „Wer drankommt, liest vor. Alle prüfen mit.“ Mögliche Antwort: „Im Absolutismus fühle ich mich als Adeliger privilegiert, weil ich keine Steuern zahlen muss und allein jagen darf. Dafür muss ich mich ehrenhaft verhalten und Verwaltungsaufgaben übernehmen.“ / „… als Bauer ausgenutzt, weil ich Steuern, hohe Abgaben und Pachtgebühren zahlen muss und von der Mitbestimmung ausgeschlossen bin.“ Prüfen: Wird ein Vorrecht und eine Pflicht genannt? Passen sie zum Stand? Typische Fehler: Adel als Steuerzahler, Klerus mit Wehrdienst (befreit), Dritter Stand (Bauern und Bürger) mit Vorrechten. Dann: „Verbessert mit Grün.“</a:t>
+              <a:t>Ansage: „Stifte liegen. Ihr schreibt noch nichts auf. Entscheidet still und meldet euch.“ Unterrichtsgespräch: Entscheidung und Begründung sammeln, erst dann die nächste Folie (Antwort) zeigen. Lösung: 4 falsch: 1685 Ende der Toleranz. Im Gespräch: Wie passt das zum Gottesgnadentum?</a:t>
             </a:r>
             <a:endParaRPr lang="en-US" dirty="0"/>
           </a:p>
@@ -1311,7 +1315,7 @@
           <a:p>
             <a:r>
               <a:rPr lang="en-US" dirty="0"/>
-              <a:t>Ansage: „Stifte liegen. Das ist eure Lernliste für den Test. Fragen zum Test?“ Die Liste bewusst kurz halten; Testtermin noch einmal nennen.</a:t>
+              <a:t>Erst zeigen, wenn die Klasse begründet hat. Nicht ausführlich erklären: Was unsicher bleibt, kommt in den folgenden Phasen.</a:t>
             </a:r>
             <a:endParaRPr lang="en-US" dirty="0"/>
           </a:p>
@@ -1335,6 +1339,94 @@
             <a:fld id="{F7021451-1387-4CA6-816F-3879F97B5CBC}" type="slidenum">
               <a:rPr lang="en-US"/>
               <a:t>18</a:t>
+            </a:fld>
+            <a:endParaRPr lang="en-US"/>
+          </a:p>
+        </p:txBody>
+      </p:sp>
+    </p:spTree>
+    <p:extLst>
+      <p:ext uri="{BB962C8B-B14F-4D97-AF65-F5344CB8AC3E}">
+        <p14:creationId xmlns:p14="http://schemas.microsoft.com/office/powerpoint/2010/main" val="1024086991"/>
+      </p:ext>
+    </p:extLst>
+  </p:cSld>
+  <p:clrMapOvr>
+    <a:masterClrMapping/>
+  </p:clrMapOvr>
+</p:notes>
+</file>
+
+<file path=ppt/notesSlides/notesSlide19.xml><?xml version="1.0" encoding="utf-8"?>
+<p:notes xmlns:a="http://schemas.openxmlformats.org/drawingml/2006/main" xmlns:r="http://schemas.openxmlformats.org/officeDocument/2006/relationships" xmlns:p="http://schemas.openxmlformats.org/presentationml/2006/main">
+  <p:cSld>
+    <p:spTree>
+      <p:nvGrpSpPr>
+        <p:cNvPr id="1" name=""/>
+        <p:cNvGrpSpPr/>
+        <p:nvPr/>
+      </p:nvGrpSpPr>
+      <p:grpSpPr>
+        <a:xfrm>
+          <a:off x="0" y="0"/>
+          <a:ext cx="0" cy="0"/>
+          <a:chOff x="0" y="0"/>
+          <a:chExt cx="0" cy="0"/>
+        </a:xfrm>
+      </p:grpSpPr>
+      <p:sp>
+        <p:nvSpPr>
+          <p:cNvPr id="2" name="Slide Image Placeholder 1"/>
+          <p:cNvSpPr>
+            <a:spLocks noGrp="1" noRot="1" noChangeAspect="1"/>
+          </p:cNvSpPr>
+          <p:nvPr>
+            <p:ph type="sldImg"/>
+          </p:nvPr>
+        </p:nvSpPr>
+        <p:spPr/>
+      </p:sp>
+      <p:sp>
+        <p:nvSpPr>
+          <p:cNvPr id="3" name="Notes Placeholder 2"/>
+          <p:cNvSpPr>
+            <a:spLocks noGrp="1"/>
+          </p:cNvSpPr>
+          <p:nvPr>
+            <p:ph type="body" idx="1"/>
+          </p:nvPr>
+        </p:nvSpPr>
+        <p:spPr/>
+        <p:txBody>
+          <a:bodyPr/>
+          <a:lstStyle/>
+          <a:p>
+            <a:r>
+              <a:rPr lang="en-US" dirty="0"/>
+              <a:t>Vorher: Wort „Absolutismus“ an die Tafel, gemeinsam klären: absolut = uneingeschränkt. Dann Ansage: „Jetzt schreibt ihr von der Folie ab: Merksatz 2. Rahmt ihn rot ein.“</a:t>
+            </a:r>
+            <a:endParaRPr lang="en-US" dirty="0"/>
+          </a:p>
+        </p:txBody>
+      </p:sp>
+      <p:sp>
+        <p:nvSpPr>
+          <p:cNvPr id="4" name="Slide Number Placeholder 3"/>
+          <p:cNvSpPr>
+            <a:spLocks noGrp="1"/>
+          </p:cNvSpPr>
+          <p:nvPr>
+            <p:ph type="sldNum" sz="quarter" idx="10"/>
+          </p:nvPr>
+        </p:nvSpPr>
+        <p:spPr/>
+        <p:txBody>
+          <a:bodyPr/>
+          <a:lstStyle/>
+          <a:p>
+            <a:fld id="{F7021451-1387-4CA6-816F-3879F97B5CBC}" type="slidenum">
+              <a:rPr lang="en-US"/>
+              <a:t>19</a:t>
             </a:fld>
             <a:endParaRPr lang="en-US"/>
           </a:p>
@@ -1423,6 +1515,270 @@
             <a:fld id="{F7021451-1387-4CA6-816F-3879F97B5CBC}" type="slidenum">
               <a:rPr lang="en-US"/>
               <a:t>2</a:t>
+            </a:fld>
+            <a:endParaRPr lang="en-US"/>
+          </a:p>
+        </p:txBody>
+      </p:sp>
+    </p:spTree>
+    <p:extLst>
+      <p:ext uri="{BB962C8B-B14F-4D97-AF65-F5344CB8AC3E}">
+        <p14:creationId xmlns:p14="http://schemas.microsoft.com/office/powerpoint/2010/main" val="1024086991"/>
+      </p:ext>
+    </p:extLst>
+  </p:cSld>
+  <p:clrMapOvr>
+    <a:masterClrMapping/>
+  </p:clrMapOvr>
+</p:notes>
+</file>
+
+<file path=ppt/notesSlides/notesSlide20.xml><?xml version="1.0" encoding="utf-8"?>
+<p:notes xmlns:a="http://schemas.openxmlformats.org/drawingml/2006/main" xmlns:r="http://schemas.openxmlformats.org/officeDocument/2006/relationships" xmlns:p="http://schemas.openxmlformats.org/presentationml/2006/main">
+  <p:cSld>
+    <p:spTree>
+      <p:nvGrpSpPr>
+        <p:cNvPr id="1" name=""/>
+        <p:cNvGrpSpPr/>
+        <p:nvPr/>
+      </p:nvGrpSpPr>
+      <p:grpSpPr>
+        <a:xfrm>
+          <a:off x="0" y="0"/>
+          <a:ext cx="0" cy="0"/>
+          <a:chOff x="0" y="0"/>
+          <a:chExt cx="0" cy="0"/>
+        </a:xfrm>
+      </p:grpSpPr>
+      <p:sp>
+        <p:nvSpPr>
+          <p:cNvPr id="2" name="Slide Image Placeholder 1"/>
+          <p:cNvSpPr>
+            <a:spLocks noGrp="1" noRot="1" noChangeAspect="1"/>
+          </p:cNvSpPr>
+          <p:nvPr>
+            <p:ph type="sldImg"/>
+          </p:nvPr>
+        </p:nvSpPr>
+        <p:spPr/>
+      </p:sp>
+      <p:sp>
+        <p:nvSpPr>
+          <p:cNvPr id="3" name="Notes Placeholder 2"/>
+          <p:cNvSpPr>
+            <a:spLocks noGrp="1"/>
+          </p:cNvSpPr>
+          <p:nvPr>
+            <p:ph type="body" idx="1"/>
+          </p:nvPr>
+        </p:nvSpPr>
+        <p:spPr/>
+        <p:txBody>
+          <a:bodyPr/>
+          <a:lstStyle/>
+          <a:p>
+            <a:r>
+              <a:rPr lang="en-US" dirty="0"/>
+              <a:t>Lösung: 1 Absolutismus (keine Kontrolle) · 2 kein Absolutismus (Parlament kann den König stoppen) · 3 Absolutismus (Beamte sind dem König zum Gehorsam verpflichtet, er kontrolliert sie) · 4 kein Absolutismus (Wahl = Demokratie, Macht ist begrenzt). Kontrolle kurz: „Wer drankommt, schreibt an die Tafel. Alle prüfen mit.“ Dann: „Vergleicht und verbessert mit Grün.“</a:t>
+            </a:r>
+            <a:endParaRPr lang="en-US" dirty="0"/>
+          </a:p>
+        </p:txBody>
+      </p:sp>
+      <p:sp>
+        <p:nvSpPr>
+          <p:cNvPr id="4" name="Slide Number Placeholder 3"/>
+          <p:cNvSpPr>
+            <a:spLocks noGrp="1"/>
+          </p:cNvSpPr>
+          <p:nvPr>
+            <p:ph type="sldNum" sz="quarter" idx="10"/>
+          </p:nvPr>
+        </p:nvSpPr>
+        <p:spPr/>
+        <p:txBody>
+          <a:bodyPr/>
+          <a:lstStyle/>
+          <a:p>
+            <a:fld id="{F7021451-1387-4CA6-816F-3879F97B5CBC}" type="slidenum">
+              <a:rPr lang="en-US"/>
+              <a:t>20</a:t>
+            </a:fld>
+            <a:endParaRPr lang="en-US"/>
+          </a:p>
+        </p:txBody>
+      </p:sp>
+    </p:spTree>
+    <p:extLst>
+      <p:ext uri="{BB962C8B-B14F-4D97-AF65-F5344CB8AC3E}">
+        <p14:creationId xmlns:p14="http://schemas.microsoft.com/office/powerpoint/2010/main" val="1024086991"/>
+      </p:ext>
+    </p:extLst>
+  </p:cSld>
+  <p:clrMapOvr>
+    <a:masterClrMapping/>
+  </p:clrMapOvr>
+</p:notes>
+</file>
+
+<file path=ppt/notesSlides/notesSlide21.xml><?xml version="1.0" encoding="utf-8"?>
+<p:notes xmlns:a="http://schemas.openxmlformats.org/drawingml/2006/main" xmlns:r="http://schemas.openxmlformats.org/officeDocument/2006/relationships" xmlns:p="http://schemas.openxmlformats.org/presentationml/2006/main">
+  <p:cSld>
+    <p:spTree>
+      <p:nvGrpSpPr>
+        <p:cNvPr id="1" name=""/>
+        <p:cNvGrpSpPr/>
+        <p:nvPr/>
+      </p:nvGrpSpPr>
+      <p:grpSpPr>
+        <a:xfrm>
+          <a:off x="0" y="0"/>
+          <a:ext cx="0" cy="0"/>
+          <a:chOff x="0" y="0"/>
+          <a:chExt cx="0" cy="0"/>
+        </a:xfrm>
+      </p:grpSpPr>
+      <p:sp>
+        <p:nvSpPr>
+          <p:cNvPr id="2" name="Slide Image Placeholder 1"/>
+          <p:cNvSpPr>
+            <a:spLocks noGrp="1" noRot="1" noChangeAspect="1"/>
+          </p:cNvSpPr>
+          <p:nvPr>
+            <p:ph type="sldImg"/>
+          </p:nvPr>
+        </p:nvSpPr>
+        <p:spPr/>
+      </p:sp>
+      <p:sp>
+        <p:nvSpPr>
+          <p:cNvPr id="3" name="Notes Placeholder 2"/>
+          <p:cNvSpPr>
+            <a:spLocks noGrp="1"/>
+          </p:cNvSpPr>
+          <p:nvPr>
+            <p:ph type="body" idx="1"/>
+          </p:nvPr>
+        </p:nvSpPr>
+        <p:spPr/>
+        <p:txBody>
+          <a:bodyPr/>
+          <a:lstStyle/>
+          <a:p>
+            <a:r>
+              <a:rPr lang="en-US" dirty="0"/>
+              <a:t>Ansage: „Jetzt arbeitet ihr allein. Die Aufgabe steht rechts.“ Die Karikatur gibt Hinweise auf Vorrechte und Lasten der Stände (hier: Karikatur Drei Stände, 1789; die Karikatur mit Sprechblasen kann die Bilddatei in quellcode/praesentation.js ersetzen). Danach 3 Schüler vorlesen lassen (verschiedene Stände): „Wer drankommt, liest vor. Alle prüfen mit.“ Mögliche Antwort: „Im Absolutismus fühle ich mich als Adeliger privilegiert, weil ich keine Steuern zahlen muss und allein jagen darf. Dafür muss ich mich ehrenhaft verhalten und Verwaltungsaufgaben übernehmen.“ / „… als Bauer ausgenutzt, weil ich Steuern, hohe Abgaben und Pachtgebühren zahlen muss und von der Mitbestimmung ausgeschlossen bin.“ Prüfen: Wird ein Vorrecht und eine Pflicht genannt? Passen sie zum Stand? Typische Fehler: Adel als Steuerzahler, Klerus mit Wehrdienst (befreit), Dritter Stand (Bauern und Bürger) mit Vorrechten. Dann: „Verbessert mit Grün.“</a:t>
+            </a:r>
+            <a:endParaRPr lang="en-US" dirty="0"/>
+          </a:p>
+        </p:txBody>
+      </p:sp>
+      <p:sp>
+        <p:nvSpPr>
+          <p:cNvPr id="4" name="Slide Number Placeholder 3"/>
+          <p:cNvSpPr>
+            <a:spLocks noGrp="1"/>
+          </p:cNvSpPr>
+          <p:nvPr>
+            <p:ph type="sldNum" sz="quarter" idx="10"/>
+          </p:nvPr>
+        </p:nvSpPr>
+        <p:spPr/>
+        <p:txBody>
+          <a:bodyPr/>
+          <a:lstStyle/>
+          <a:p>
+            <a:fld id="{F7021451-1387-4CA6-816F-3879F97B5CBC}" type="slidenum">
+              <a:rPr lang="en-US"/>
+              <a:t>21</a:t>
+            </a:fld>
+            <a:endParaRPr lang="en-US"/>
+          </a:p>
+        </p:txBody>
+      </p:sp>
+    </p:spTree>
+    <p:extLst>
+      <p:ext uri="{BB962C8B-B14F-4D97-AF65-F5344CB8AC3E}">
+        <p14:creationId xmlns:p14="http://schemas.microsoft.com/office/powerpoint/2010/main" val="1024086991"/>
+      </p:ext>
+    </p:extLst>
+  </p:cSld>
+  <p:clrMapOvr>
+    <a:masterClrMapping/>
+  </p:clrMapOvr>
+</p:notes>
+</file>
+
+<file path=ppt/notesSlides/notesSlide22.xml><?xml version="1.0" encoding="utf-8"?>
+<p:notes xmlns:a="http://schemas.openxmlformats.org/drawingml/2006/main" xmlns:r="http://schemas.openxmlformats.org/officeDocument/2006/relationships" xmlns:p="http://schemas.openxmlformats.org/presentationml/2006/main">
+  <p:cSld>
+    <p:spTree>
+      <p:nvGrpSpPr>
+        <p:cNvPr id="1" name=""/>
+        <p:cNvGrpSpPr/>
+        <p:nvPr/>
+      </p:nvGrpSpPr>
+      <p:grpSpPr>
+        <a:xfrm>
+          <a:off x="0" y="0"/>
+          <a:ext cx="0" cy="0"/>
+          <a:chOff x="0" y="0"/>
+          <a:chExt cx="0" cy="0"/>
+        </a:xfrm>
+      </p:grpSpPr>
+      <p:sp>
+        <p:nvSpPr>
+          <p:cNvPr id="2" name="Slide Image Placeholder 1"/>
+          <p:cNvSpPr>
+            <a:spLocks noGrp="1" noRot="1" noChangeAspect="1"/>
+          </p:cNvSpPr>
+          <p:nvPr>
+            <p:ph type="sldImg"/>
+          </p:nvPr>
+        </p:nvSpPr>
+        <p:spPr/>
+      </p:sp>
+      <p:sp>
+        <p:nvSpPr>
+          <p:cNvPr id="3" name="Notes Placeholder 2"/>
+          <p:cNvSpPr>
+            <a:spLocks noGrp="1"/>
+          </p:cNvSpPr>
+          <p:nvPr>
+            <p:ph type="body" idx="1"/>
+          </p:nvPr>
+        </p:nvSpPr>
+        <p:spPr/>
+        <p:txBody>
+          <a:bodyPr/>
+          <a:lstStyle/>
+          <a:p>
+            <a:r>
+              <a:rPr lang="en-US" dirty="0"/>
+              <a:t>Ansage: „Stifte liegen. Das ist eure Lernliste für den Test. Fragen zum Test?“ Die Liste bewusst kurz halten; Testtermin noch einmal nennen.</a:t>
+            </a:r>
+            <a:endParaRPr lang="en-US" dirty="0"/>
+          </a:p>
+        </p:txBody>
+      </p:sp>
+      <p:sp>
+        <p:nvSpPr>
+          <p:cNvPr id="4" name="Slide Number Placeholder 3"/>
+          <p:cNvSpPr>
+            <a:spLocks noGrp="1"/>
+          </p:cNvSpPr>
+          <p:nvPr>
+            <p:ph type="sldNum" sz="quarter" idx="10"/>
+          </p:nvPr>
+        </p:nvSpPr>
+        <p:spPr/>
+        <p:txBody>
+          <a:bodyPr/>
+          <a:lstStyle/>
+          <a:p>
+            <a:fld id="{F7021451-1387-4CA6-816F-3879F97B5CBC}" type="slidenum">
+              <a:rPr lang="en-US"/>
+              <a:t>22</a:t>
             </a:fld>
             <a:endParaRPr lang="en-US"/>
           </a:p>
@@ -3039,7 +3395,7 @@
                 <a:ea typeface="Calibri" pitchFamily="34" charset="-122"/>
                 <a:cs typeface="Calibri" pitchFamily="34" charset="-120"/>
               </a:rPr>
-              <a:t>WAHR ODER FALSCH? · AUSSAGE 3 VON 4 · OHNE HEFT</a:t>
+              <a:t>EXKURS · GEMEINSAM · OHNE HEFT</a:t>
             </a:r>
             <a:endParaRPr lang="en-US" sz="1300" dirty="0"/>
           </a:p>
@@ -3078,7 +3434,7 @@
                 <a:ea typeface="Cambria" pitchFamily="34" charset="-122"/>
                 <a:cs typeface="Cambria" pitchFamily="34" charset="-120"/>
               </a:rPr>
-              <a:t>Wahr oder falsch?</a:t>
+              <a:t>Exkurs: Steuern in Deutschland</a:t>
             </a:r>
             <a:endParaRPr lang="en-US" sz="3400" dirty="0"/>
           </a:p>
@@ -3092,12 +3448,12 @@
         </p:nvSpPr>
         <p:spPr>
           <a:xfrm>
-            <a:off x="548640" y="1600200"/>
-            <a:ext cx="11109960" cy="2743200"/>
+            <a:off x="548640" y="1463040"/>
+            <a:ext cx="5440680" cy="1920240"/>
           </a:xfrm>
           <a:prstGeom prst="roundRect">
             <a:avLst>
-              <a:gd name="adj" fmla="val 2667"/>
+              <a:gd name="adj" fmla="val 3810"/>
             </a:avLst>
           </a:prstGeom>
           <a:solidFill>
@@ -3108,105 +3464,285 @@
       </p:sp>
       <p:sp>
         <p:nvSpPr>
-          <p:cNvPr id="5" name="Shape 3"/>
-          <p:cNvSpPr/>
-          <p:nvPr/>
-        </p:nvSpPr>
-        <p:spPr>
-          <a:xfrm>
-            <a:off x="868680" y="1920240"/>
-            <a:ext cx="548640" cy="548640"/>
-          </a:xfrm>
-          <a:prstGeom prst="ellipse">
-            <a:avLst/>
-          </a:prstGeom>
-          <a:solidFill>
-            <a:srgbClr val="D9534F"/>
-          </a:solidFill>
-          <a:ln/>
-        </p:spPr>
-      </p:sp>
-      <p:sp>
-        <p:nvSpPr>
-          <p:cNvPr id="6" name="Text 4"/>
-          <p:cNvSpPr txBox="1"/>
-          <p:nvPr/>
-        </p:nvSpPr>
-        <p:spPr>
-          <a:xfrm>
-            <a:off x="868680" y="1920240"/>
-            <a:ext cx="548640" cy="548640"/>
-          </a:xfrm>
-          <a:prstGeom prst="rect">
-            <a:avLst/>
-          </a:prstGeom>
-          <a:noFill/>
-          <a:ln/>
-        </p:spPr>
-        <p:txBody>
-          <a:bodyPr wrap="square" lIns="0" tIns="0" rIns="0" bIns="0" rtlCol="0" anchor="ctr"/>
-          <a:lstStyle/>
-          <a:p>
-            <a:pPr algn="ctr" indent="0" marL="0">
-              <a:buNone/>
-            </a:pPr>
-            <a:r>
-              <a:rPr lang="en-US" sz="1800" b="1" dirty="0">
-                <a:solidFill>
-                  <a:srgbClr val="FFFFFF"/>
-                </a:solidFill>
-                <a:latin typeface="Calibri" pitchFamily="34" charset="0"/>
-                <a:ea typeface="Calibri" pitchFamily="34" charset="-122"/>
-                <a:cs typeface="Calibri" pitchFamily="34" charset="-120"/>
-              </a:rPr>
-              <a:t>3</a:t>
-            </a:r>
-            <a:endParaRPr lang="en-US" sz="1800" dirty="0"/>
-          </a:p>
-        </p:txBody>
-      </p:sp>
-      <p:sp>
-        <p:nvSpPr>
-          <p:cNvPr id="7" name="Text 5"/>
-          <p:cNvSpPr txBox="1"/>
-          <p:nvPr/>
-        </p:nvSpPr>
-        <p:spPr>
-          <a:xfrm>
-            <a:off x="1737360" y="1783080"/>
-            <a:ext cx="9601200" cy="2377440"/>
-          </a:xfrm>
-          <a:prstGeom prst="rect">
-            <a:avLst/>
-          </a:prstGeom>
-          <a:noFill/>
-          <a:ln/>
-        </p:spPr>
-        <p:txBody>
-          <a:bodyPr wrap="square" lIns="0" tIns="0" rIns="0" bIns="0" rtlCol="0" anchor="ctr"/>
-          <a:lstStyle/>
-          <a:p>
-            <a:pPr indent="0" marL="0">
-              <a:buNone/>
-            </a:pPr>
-            <a:r>
-              <a:rPr lang="en-US" sz="3000" dirty="0">
-                <a:solidFill>
-                  <a:srgbClr val="1E2761"/>
+          <p:cNvPr id="5" name="Text 3"/>
+          <p:cNvSpPr txBox="1"/>
+          <p:nvPr/>
+        </p:nvSpPr>
+        <p:spPr>
+          <a:xfrm>
+            <a:off x="822960" y="1600200"/>
+            <a:ext cx="4937760" cy="548640"/>
+          </a:xfrm>
+          <a:prstGeom prst="rect">
+            <a:avLst/>
+          </a:prstGeom>
+          <a:noFill/>
+          <a:ln/>
+        </p:spPr>
+        <p:txBody>
+          <a:bodyPr wrap="square" lIns="0" tIns="0" rIns="0" bIns="0" rtlCol="0" anchor="t"/>
+          <a:lstStyle/>
+          <a:p>
+            <a:pPr indent="0" marL="0">
+              <a:buNone/>
+            </a:pPr>
+            <a:r>
+              <a:rPr lang="en-US" sz="3400" b="1" dirty="0">
+                <a:solidFill>
+                  <a:srgbClr val="D9534F"/>
                 </a:solidFill>
                 <a:latin typeface="Cambria" pitchFamily="34" charset="0"/>
                 <a:ea typeface="Cambria" pitchFamily="34" charset="-122"/>
                 <a:cs typeface="Cambria" pitchFamily="34" charset="-120"/>
               </a:rPr>
-              <a:t>Ludwig XIV. verzichtete auf Söldner und baute ein stehendes Heer auf.</a:t>
-            </a:r>
-            <a:endParaRPr lang="en-US" sz="3000" dirty="0"/>
-          </a:p>
-        </p:txBody>
-      </p:sp>
-      <p:sp>
-        <p:nvSpPr>
-          <p:cNvPr id="8" name="Shape 6"/>
+              <a:t>Brutto</a:t>
+            </a:r>
+            <a:endParaRPr lang="en-US" sz="3400" dirty="0"/>
+          </a:p>
+        </p:txBody>
+      </p:sp>
+      <p:sp>
+        <p:nvSpPr>
+          <p:cNvPr id="6" name="Text 4"/>
+          <p:cNvSpPr txBox="1"/>
+          <p:nvPr/>
+        </p:nvSpPr>
+        <p:spPr>
+          <a:xfrm>
+            <a:off x="822960" y="2331720"/>
+            <a:ext cx="4937760" cy="914400"/>
+          </a:xfrm>
+          <a:prstGeom prst="rect">
+            <a:avLst/>
+          </a:prstGeom>
+          <a:noFill/>
+          <a:ln/>
+        </p:spPr>
+        <p:txBody>
+          <a:bodyPr wrap="square" lIns="0" tIns="0" rIns="0" bIns="0" rtlCol="0" anchor="t"/>
+          <a:lstStyle/>
+          <a:p>
+            <a:pPr indent="0" marL="0">
+              <a:buNone/>
+            </a:pPr>
+            <a:r>
+              <a:rPr lang="en-US" sz="2400" dirty="0">
+                <a:solidFill>
+                  <a:srgbClr val="1E2761"/>
+                </a:solidFill>
+                <a:latin typeface="Cambria" pitchFamily="34" charset="0"/>
+                <a:ea typeface="Cambria" pitchFamily="34" charset="-122"/>
+                <a:cs typeface="Cambria" pitchFamily="34" charset="-120"/>
+              </a:rPr>
+              <a:t>Lohn vor allen Abzügen</a:t>
+            </a:r>
+            <a:endParaRPr lang="en-US" sz="2400" dirty="0"/>
+          </a:p>
+        </p:txBody>
+      </p:sp>
+      <p:sp>
+        <p:nvSpPr>
+          <p:cNvPr id="7" name="Shape 5"/>
+          <p:cNvSpPr/>
+          <p:nvPr/>
+        </p:nvSpPr>
+        <p:spPr>
+          <a:xfrm>
+            <a:off x="6217920" y="1463040"/>
+            <a:ext cx="5440680" cy="1920240"/>
+          </a:xfrm>
+          <a:prstGeom prst="roundRect">
+            <a:avLst>
+              <a:gd name="adj" fmla="val 3810"/>
+            </a:avLst>
+          </a:prstGeom>
+          <a:solidFill>
+            <a:srgbClr val="EAF0FA"/>
+          </a:solidFill>
+          <a:ln/>
+        </p:spPr>
+      </p:sp>
+      <p:sp>
+        <p:nvSpPr>
+          <p:cNvPr id="8" name="Text 6"/>
+          <p:cNvSpPr txBox="1"/>
+          <p:nvPr/>
+        </p:nvSpPr>
+        <p:spPr>
+          <a:xfrm>
+            <a:off x="6492240" y="1600200"/>
+            <a:ext cx="4937760" cy="548640"/>
+          </a:xfrm>
+          <a:prstGeom prst="rect">
+            <a:avLst/>
+          </a:prstGeom>
+          <a:noFill/>
+          <a:ln/>
+        </p:spPr>
+        <p:txBody>
+          <a:bodyPr wrap="square" lIns="0" tIns="0" rIns="0" bIns="0" rtlCol="0" anchor="t"/>
+          <a:lstStyle/>
+          <a:p>
+            <a:pPr indent="0" marL="0">
+              <a:buNone/>
+            </a:pPr>
+            <a:r>
+              <a:rPr lang="en-US" sz="3400" b="1" dirty="0">
+                <a:solidFill>
+                  <a:srgbClr val="D9534F"/>
+                </a:solidFill>
+                <a:latin typeface="Cambria" pitchFamily="34" charset="0"/>
+                <a:ea typeface="Cambria" pitchFamily="34" charset="-122"/>
+                <a:cs typeface="Cambria" pitchFamily="34" charset="-120"/>
+              </a:rPr>
+              <a:t>Netto</a:t>
+            </a:r>
+            <a:endParaRPr lang="en-US" sz="3400" dirty="0"/>
+          </a:p>
+        </p:txBody>
+      </p:sp>
+      <p:sp>
+        <p:nvSpPr>
+          <p:cNvPr id="9" name="Text 7"/>
+          <p:cNvSpPr txBox="1"/>
+          <p:nvPr/>
+        </p:nvSpPr>
+        <p:spPr>
+          <a:xfrm>
+            <a:off x="6492240" y="2331720"/>
+            <a:ext cx="4937760" cy="914400"/>
+          </a:xfrm>
+          <a:prstGeom prst="rect">
+            <a:avLst/>
+          </a:prstGeom>
+          <a:noFill/>
+          <a:ln/>
+        </p:spPr>
+        <p:txBody>
+          <a:bodyPr wrap="square" lIns="0" tIns="0" rIns="0" bIns="0" rtlCol="0" anchor="t"/>
+          <a:lstStyle/>
+          <a:p>
+            <a:pPr indent="0" marL="0">
+              <a:buNone/>
+            </a:pPr>
+            <a:r>
+              <a:rPr lang="en-US" sz="2400" dirty="0">
+                <a:solidFill>
+                  <a:srgbClr val="1E2761"/>
+                </a:solidFill>
+                <a:latin typeface="Cambria" pitchFamily="34" charset="0"/>
+                <a:ea typeface="Cambria" pitchFamily="34" charset="-122"/>
+                <a:cs typeface="Cambria" pitchFamily="34" charset="-120"/>
+              </a:rPr>
+              <a:t>Das, was auf dem Konto ankommt</a:t>
+            </a:r>
+            <a:endParaRPr lang="en-US" sz="2400" dirty="0"/>
+          </a:p>
+        </p:txBody>
+      </p:sp>
+      <p:sp>
+        <p:nvSpPr>
+          <p:cNvPr id="10" name="Shape 8"/>
+          <p:cNvSpPr/>
+          <p:nvPr/>
+        </p:nvSpPr>
+        <p:spPr>
+          <a:xfrm>
+            <a:off x="548640" y="3611880"/>
+            <a:ext cx="11109960" cy="1737360"/>
+          </a:xfrm>
+          <a:prstGeom prst="roundRect">
+            <a:avLst>
+              <a:gd name="adj" fmla="val 4211"/>
+            </a:avLst>
+          </a:prstGeom>
+          <a:solidFill>
+            <a:srgbClr val="F4F7FD"/>
+          </a:solidFill>
+          <a:ln/>
+        </p:spPr>
+      </p:sp>
+      <p:sp>
+        <p:nvSpPr>
+          <p:cNvPr id="11" name="Text 9"/>
+          <p:cNvSpPr txBox="1"/>
+          <p:nvPr/>
+        </p:nvSpPr>
+        <p:spPr>
+          <a:xfrm>
+            <a:off x="822960" y="3749040"/>
+            <a:ext cx="10607040" cy="457200"/>
+          </a:xfrm>
+          <a:prstGeom prst="rect">
+            <a:avLst/>
+          </a:prstGeom>
+          <a:noFill/>
+          <a:ln/>
+        </p:spPr>
+        <p:txBody>
+          <a:bodyPr wrap="square" lIns="0" tIns="0" rIns="0" bIns="0" rtlCol="0" anchor="t"/>
+          <a:lstStyle/>
+          <a:p>
+            <a:pPr indent="0" marL="0">
+              <a:buNone/>
+            </a:pPr>
+            <a:r>
+              <a:rPr lang="en-US" sz="2400" dirty="0">
+                <a:solidFill>
+                  <a:srgbClr val="5B6B8C"/>
+                </a:solidFill>
+                <a:latin typeface="Cambria" pitchFamily="34" charset="0"/>
+                <a:ea typeface="Cambria" pitchFamily="34" charset="-122"/>
+                <a:cs typeface="Cambria" pitchFamily="34" charset="-120"/>
+              </a:rPr>
+              <a:t>Durchschnittsgehalt in Deutschland (gerundet):</a:t>
+            </a:r>
+            <a:endParaRPr lang="en-US" sz="2400" dirty="0"/>
+          </a:p>
+        </p:txBody>
+      </p:sp>
+      <p:sp>
+        <p:nvSpPr>
+          <p:cNvPr id="12" name="Text 10"/>
+          <p:cNvSpPr txBox="1"/>
+          <p:nvPr/>
+        </p:nvSpPr>
+        <p:spPr>
+          <a:xfrm>
+            <a:off x="822960" y="4343400"/>
+            <a:ext cx="10607040" cy="731520"/>
+          </a:xfrm>
+          <a:prstGeom prst="rect">
+            <a:avLst/>
+          </a:prstGeom>
+          <a:noFill/>
+          <a:ln/>
+        </p:spPr>
+        <p:txBody>
+          <a:bodyPr wrap="square" lIns="0" tIns="0" rIns="0" bIns="0" rtlCol="0" anchor="t"/>
+          <a:lstStyle/>
+          <a:p>
+            <a:pPr indent="0" marL="0">
+              <a:buNone/>
+            </a:pPr>
+            <a:r>
+              <a:rPr lang="en-US" sz="3400" b="1" dirty="0">
+                <a:solidFill>
+                  <a:srgbClr val="1E2761"/>
+                </a:solidFill>
+                <a:latin typeface="Cambria" pitchFamily="34" charset="0"/>
+                <a:ea typeface="Cambria" pitchFamily="34" charset="-122"/>
+                <a:cs typeface="Cambria" pitchFamily="34" charset="-120"/>
+              </a:rPr>
+              <a:t>ca. 50 000 € brutto im Jahr</a:t>
+            </a:r>
+            <a:endParaRPr lang="en-US" sz="3400" dirty="0"/>
+          </a:p>
+        </p:txBody>
+      </p:sp>
+      <p:sp>
+        <p:nvSpPr>
+          <p:cNvPr id="13" name="Shape 11"/>
           <p:cNvSpPr/>
           <p:nvPr/>
         </p:nvSpPr>
@@ -3228,7 +3764,7 @@
       </p:sp>
       <p:sp>
         <p:nvSpPr>
-          <p:cNvPr id="9" name="Text 7"/>
+          <p:cNvPr id="14" name="Text 12"/>
           <p:cNvSpPr txBox="1"/>
           <p:nvPr/>
         </p:nvSpPr>
@@ -3273,7 +3809,7 @@
                 <a:ea typeface="Calibri" pitchFamily="34" charset="-122"/>
                 <a:cs typeface="Calibri" pitchFamily="34" charset="-120"/>
               </a:rPr>
-              <a:t>Entscheide still, melde dich, begründe.      </a:t>
+              <a:t>Meldet euch. Wer erklärt brutto und netto?      </a:t>
             </a:r>
             <a:pPr indent="0" marL="0">
               <a:buNone/>
@@ -3287,7 +3823,7 @@
                 <a:ea typeface="Calibri" pitchFamily="34" charset="-122"/>
                 <a:cs typeface="Calibri" pitchFamily="34" charset="-120"/>
               </a:rPr>
-              <a:t>Bei „falsch“: Aussage verbessern.</a:t>
+              <a:t>Noch nichts aufschreiben.</a:t>
             </a:r>
             <a:endParaRPr lang="en-US" sz="2400" dirty="0"/>
           </a:p>
@@ -3295,7 +3831,7 @@
       </p:sp>
       <p:sp>
         <p:nvSpPr>
-          <p:cNvPr id="10" name="Text 8"/>
+          <p:cNvPr id="15" name="Text 13"/>
           <p:cNvSpPr txBox="1"/>
           <p:nvPr/>
         </p:nvSpPr>
@@ -3334,7 +3870,7 @@
       </p:sp>
       <p:sp>
         <p:nvSpPr>
-          <p:cNvPr id="11" name="Text 9"/>
+          <p:cNvPr id="16" name="Text 14"/>
           <p:cNvSpPr txBox="1"/>
           <p:nvPr/>
         </p:nvSpPr>
@@ -3436,7 +3972,7 @@
                 <a:ea typeface="Calibri" pitchFamily="34" charset="-122"/>
                 <a:cs typeface="Calibri" pitchFamily="34" charset="-120"/>
               </a:rPr>
-              <a:t>WAHR ODER FALSCH? · ANTWORT 3 VON 4</a:t>
+              <a:t>EXKURS · GEMEINSAM · OHNE HEFT</a:t>
             </a:r>
             <a:endParaRPr lang="en-US" sz="1300" dirty="0"/>
           </a:p>
@@ -3469,13 +4005,13 @@
             <a:r>
               <a:rPr lang="en-US" sz="3400" b="1" dirty="0">
                 <a:solidFill>
-                  <a:srgbClr val="2E9E6B"/>
+                  <a:srgbClr val="1E2761"/>
                 </a:solidFill>
                 <a:latin typeface="Cambria" pitchFamily="34" charset="0"/>
                 <a:ea typeface="Cambria" pitchFamily="34" charset="-122"/>
                 <a:cs typeface="Cambria" pitchFamily="34" charset="-120"/>
               </a:rPr>
-              <a:t>Wahr</a:t>
+              <a:t>Was bleibt von 50 000 € brutto?</a:t>
             </a:r>
             <a:endParaRPr lang="en-US" sz="3400" dirty="0"/>
           </a:p>
@@ -3489,16 +4025,16 @@
         </p:nvSpPr>
         <p:spPr>
           <a:xfrm>
-            <a:off x="548640" y="1600200"/>
-            <a:ext cx="11109960" cy="1371600"/>
+            <a:off x="548640" y="1463040"/>
+            <a:ext cx="11109960" cy="914400"/>
           </a:xfrm>
           <a:prstGeom prst="roundRect">
             <a:avLst>
-              <a:gd name="adj" fmla="val 5333"/>
+              <a:gd name="adj" fmla="val 8000"/>
             </a:avLst>
           </a:prstGeom>
           <a:solidFill>
-            <a:srgbClr val="F4F7FD"/>
+            <a:srgbClr val="1E2761"/>
           </a:solidFill>
           <a:ln/>
         </p:spPr>
@@ -3511,8 +4047,8 @@
         </p:nvSpPr>
         <p:spPr>
           <a:xfrm>
-            <a:off x="914400" y="1600200"/>
-            <a:ext cx="10424160" cy="1371600"/>
+            <a:off x="822960" y="1463040"/>
+            <a:ext cx="7680960" cy="914400"/>
           </a:xfrm>
           <a:prstGeom prst="rect">
             <a:avLst/>
@@ -3528,15 +4064,15 @@
               <a:buNone/>
             </a:pPr>
             <a:r>
-              <a:rPr lang="en-US" sz="2400" dirty="0">
-                <a:solidFill>
-                  <a:srgbClr val="5B6B8C"/>
+              <a:rPr lang="en-US" sz="2400" b="1" dirty="0">
+                <a:solidFill>
+                  <a:srgbClr val="FFFFFF"/>
                 </a:solidFill>
                 <a:latin typeface="Cambria" pitchFamily="34" charset="0"/>
                 <a:ea typeface="Cambria" pitchFamily="34" charset="-122"/>
                 <a:cs typeface="Cambria" pitchFamily="34" charset="-120"/>
               </a:rPr>
-              <a:t>Ludwig XIV. verzichtete auf Söldner und baute ein stehendes Heer auf.</a:t>
+              <a:t>Brutto</a:t>
             </a:r>
             <a:endParaRPr lang="en-US" sz="2400" dirty="0"/>
           </a:p>
@@ -3544,69 +4080,64 @@
       </p:sp>
       <p:sp>
         <p:nvSpPr>
-          <p:cNvPr id="6" name="Shape 4"/>
-          <p:cNvSpPr/>
-          <p:nvPr/>
-        </p:nvSpPr>
-        <p:spPr>
-          <a:xfrm>
-            <a:off x="548640" y="3154680"/>
-            <a:ext cx="11109960" cy="2377440"/>
-          </a:xfrm>
-          <a:prstGeom prst="roundRect">
-            <a:avLst>
-              <a:gd name="adj" fmla="val 3077"/>
-            </a:avLst>
-          </a:prstGeom>
-          <a:solidFill>
-            <a:srgbClr val="FFFFFF"/>
-          </a:solidFill>
-          <a:ln w="38100">
-            <a:solidFill>
-              <a:srgbClr val="2E9E6B"/>
-            </a:solidFill>
-            <a:prstDash val="solid"/>
-          </a:ln>
-        </p:spPr>
-      </p:sp>
-      <p:sp>
-        <p:nvSpPr>
-          <p:cNvPr id="7" name="Text 5"/>
-          <p:cNvSpPr txBox="1"/>
-          <p:nvPr/>
-        </p:nvSpPr>
-        <p:spPr>
-          <a:xfrm>
-            <a:off x="914400" y="3291840"/>
-            <a:ext cx="5486400" cy="365760"/>
-          </a:xfrm>
-          <a:prstGeom prst="rect">
-            <a:avLst/>
-          </a:prstGeom>
-          <a:noFill/>
-          <a:ln/>
-        </p:spPr>
-        <p:txBody>
-          <a:bodyPr wrap="square" lIns="0" tIns="0" rIns="0" bIns="0" rtlCol="0" anchor="t"/>
-          <a:lstStyle/>
-          <a:p>
-            <a:pPr indent="0" marL="0">
-              <a:buNone/>
-            </a:pPr>
-            <a:r>
-              <a:rPr lang="en-US" sz="2400" b="1" dirty="0">
-                <a:solidFill>
-                  <a:srgbClr val="2E9E6B"/>
+          <p:cNvPr id="6" name="Text 4"/>
+          <p:cNvSpPr txBox="1"/>
+          <p:nvPr/>
+        </p:nvSpPr>
+        <p:spPr>
+          <a:xfrm>
+            <a:off x="8503920" y="1463040"/>
+            <a:ext cx="2926080" cy="914400"/>
+          </a:xfrm>
+          <a:prstGeom prst="rect">
+            <a:avLst/>
+          </a:prstGeom>
+          <a:noFill/>
+          <a:ln/>
+        </p:spPr>
+        <p:txBody>
+          <a:bodyPr wrap="square" lIns="0" tIns="0" rIns="0" bIns="0" rtlCol="0" anchor="ctr"/>
+          <a:lstStyle/>
+          <a:p>
+            <a:pPr algn="r" indent="0" marL="0">
+              <a:buNone/>
+            </a:pPr>
+            <a:r>
+              <a:rPr lang="en-US" sz="2800" b="1" dirty="0">
+                <a:solidFill>
+                  <a:srgbClr val="FFFFFF"/>
                 </a:solidFill>
                 <a:latin typeface="Cambria" pitchFamily="34" charset="0"/>
                 <a:ea typeface="Cambria" pitchFamily="34" charset="-122"/>
                 <a:cs typeface="Cambria" pitchFamily="34" charset="-120"/>
               </a:rPr>
-              <a:t>Begründung</a:t>
-            </a:r>
-            <a:endParaRPr lang="en-US" sz="2400" dirty="0"/>
-          </a:p>
-        </p:txBody>
+              <a:t>50 000 €</a:t>
+            </a:r>
+            <a:endParaRPr lang="en-US" sz="2800" dirty="0"/>
+          </a:p>
+        </p:txBody>
+      </p:sp>
+      <p:sp>
+        <p:nvSpPr>
+          <p:cNvPr id="7" name="Shape 5"/>
+          <p:cNvSpPr/>
+          <p:nvPr/>
+        </p:nvSpPr>
+        <p:spPr>
+          <a:xfrm>
+            <a:off x="548640" y="2487168"/>
+            <a:ext cx="11109960" cy="914400"/>
+          </a:xfrm>
+          <a:prstGeom prst="roundRect">
+            <a:avLst>
+              <a:gd name="adj" fmla="val 8000"/>
+            </a:avLst>
+          </a:prstGeom>
+          <a:solidFill>
+            <a:srgbClr val="EAF0FA"/>
+          </a:solidFill>
+          <a:ln/>
+        </p:spPr>
       </p:sp>
       <p:sp>
         <p:nvSpPr>
@@ -3616,24 +4147,24 @@
         </p:nvSpPr>
         <p:spPr>
           <a:xfrm>
-            <a:off x="914400" y="3749040"/>
-            <a:ext cx="10424160" cy="1737360"/>
-          </a:xfrm>
-          <a:prstGeom prst="rect">
-            <a:avLst/>
-          </a:prstGeom>
-          <a:noFill/>
-          <a:ln/>
-        </p:spPr>
-        <p:txBody>
-          <a:bodyPr wrap="square" lIns="0" tIns="0" rIns="0" bIns="0" rtlCol="0" anchor="t"/>
-          <a:lstStyle/>
-          <a:p>
-            <a:pPr indent="0" marL="0">
-              <a:buNone/>
-            </a:pPr>
-            <a:r>
-              <a:rPr lang="en-US" sz="2600" dirty="0">
+            <a:off x="822960" y="2487168"/>
+            <a:ext cx="7680960" cy="914400"/>
+          </a:xfrm>
+          <a:prstGeom prst="rect">
+            <a:avLst/>
+          </a:prstGeom>
+          <a:noFill/>
+          <a:ln/>
+        </p:spPr>
+        <p:txBody>
+          <a:bodyPr wrap="square" lIns="0" tIns="0" rIns="0" bIns="0" rtlCol="0" anchor="ctr"/>
+          <a:lstStyle/>
+          <a:p>
+            <a:pPr indent="0" marL="0">
+              <a:buNone/>
+            </a:pPr>
+            <a:r>
+              <a:rPr lang="en-US" sz="2400" dirty="0">
                 <a:solidFill>
                   <a:srgbClr val="1E2761"/>
                 </a:solidFill>
@@ -3641,15 +4172,254 @@
                 <a:ea typeface="Cambria" pitchFamily="34" charset="-122"/>
                 <a:cs typeface="Cambria" pitchFamily="34" charset="-120"/>
               </a:rPr>
-              <a:t>Säule Heer: einheitlich bewaffnet und uniformiert, in Kasernen, direkt dem König unterstellt – bis zu 400 000 Mann.</a:t>
-            </a:r>
-            <a:endParaRPr lang="en-US" sz="2600" dirty="0"/>
-          </a:p>
-        </p:txBody>
-      </p:sp>
-      <p:sp>
-        <p:nvSpPr>
-          <p:cNvPr id="9" name="Shape 7"/>
+              <a:t>− Lohnsteuer</a:t>
+            </a:r>
+            <a:endParaRPr lang="en-US" sz="2400" dirty="0"/>
+          </a:p>
+        </p:txBody>
+      </p:sp>
+      <p:sp>
+        <p:nvSpPr>
+          <p:cNvPr id="9" name="Text 7"/>
+          <p:cNvSpPr txBox="1"/>
+          <p:nvPr/>
+        </p:nvSpPr>
+        <p:spPr>
+          <a:xfrm>
+            <a:off x="8503920" y="2487168"/>
+            <a:ext cx="2926080" cy="914400"/>
+          </a:xfrm>
+          <a:prstGeom prst="rect">
+            <a:avLst/>
+          </a:prstGeom>
+          <a:noFill/>
+          <a:ln/>
+        </p:spPr>
+        <p:txBody>
+          <a:bodyPr wrap="square" lIns="0" tIns="0" rIns="0" bIns="0" rtlCol="0" anchor="ctr"/>
+          <a:lstStyle/>
+          <a:p>
+            <a:pPr algn="r" indent="0" marL="0">
+              <a:buNone/>
+            </a:pPr>
+            <a:r>
+              <a:rPr lang="en-US" sz="2800" b="1" dirty="0">
+                <a:solidFill>
+                  <a:srgbClr val="1E2761"/>
+                </a:solidFill>
+                <a:latin typeface="Cambria" pitchFamily="34" charset="0"/>
+                <a:ea typeface="Cambria" pitchFamily="34" charset="-122"/>
+                <a:cs typeface="Cambria" pitchFamily="34" charset="-120"/>
+              </a:rPr>
+              <a:t>ca. 7 000 €</a:t>
+            </a:r>
+            <a:endParaRPr lang="en-US" sz="2800" dirty="0"/>
+          </a:p>
+        </p:txBody>
+      </p:sp>
+      <p:sp>
+        <p:nvSpPr>
+          <p:cNvPr id="10" name="Shape 8"/>
+          <p:cNvSpPr/>
+          <p:nvPr/>
+        </p:nvSpPr>
+        <p:spPr>
+          <a:xfrm>
+            <a:off x="548640" y="3511296"/>
+            <a:ext cx="11109960" cy="914400"/>
+          </a:xfrm>
+          <a:prstGeom prst="roundRect">
+            <a:avLst>
+              <a:gd name="adj" fmla="val 8000"/>
+            </a:avLst>
+          </a:prstGeom>
+          <a:solidFill>
+            <a:srgbClr val="EAF0FA"/>
+          </a:solidFill>
+          <a:ln/>
+        </p:spPr>
+      </p:sp>
+      <p:sp>
+        <p:nvSpPr>
+          <p:cNvPr id="11" name="Text 9"/>
+          <p:cNvSpPr txBox="1"/>
+          <p:nvPr/>
+        </p:nvSpPr>
+        <p:spPr>
+          <a:xfrm>
+            <a:off x="822960" y="3511296"/>
+            <a:ext cx="7680960" cy="914400"/>
+          </a:xfrm>
+          <a:prstGeom prst="rect">
+            <a:avLst/>
+          </a:prstGeom>
+          <a:noFill/>
+          <a:ln/>
+        </p:spPr>
+        <p:txBody>
+          <a:bodyPr wrap="square" lIns="0" tIns="0" rIns="0" bIns="0" rtlCol="0" anchor="ctr"/>
+          <a:lstStyle/>
+          <a:p>
+            <a:pPr indent="0" marL="0">
+              <a:buNone/>
+            </a:pPr>
+            <a:r>
+              <a:rPr lang="en-US" sz="2400" dirty="0">
+                <a:solidFill>
+                  <a:srgbClr val="1E2761"/>
+                </a:solidFill>
+                <a:latin typeface="Cambria" pitchFamily="34" charset="0"/>
+                <a:ea typeface="Cambria" pitchFamily="34" charset="-122"/>
+                <a:cs typeface="Cambria" pitchFamily="34" charset="-120"/>
+              </a:rPr>
+              <a:t>− Sozialabgaben (Rente, Kranken-, Pflege-, Arbeitslosenversicherung)</a:t>
+            </a:r>
+            <a:endParaRPr lang="en-US" sz="2400" dirty="0"/>
+          </a:p>
+        </p:txBody>
+      </p:sp>
+      <p:sp>
+        <p:nvSpPr>
+          <p:cNvPr id="12" name="Text 10"/>
+          <p:cNvSpPr txBox="1"/>
+          <p:nvPr/>
+        </p:nvSpPr>
+        <p:spPr>
+          <a:xfrm>
+            <a:off x="8503920" y="3511296"/>
+            <a:ext cx="2926080" cy="914400"/>
+          </a:xfrm>
+          <a:prstGeom prst="rect">
+            <a:avLst/>
+          </a:prstGeom>
+          <a:noFill/>
+          <a:ln/>
+        </p:spPr>
+        <p:txBody>
+          <a:bodyPr wrap="square" lIns="0" tIns="0" rIns="0" bIns="0" rtlCol="0" anchor="ctr"/>
+          <a:lstStyle/>
+          <a:p>
+            <a:pPr algn="r" indent="0" marL="0">
+              <a:buNone/>
+            </a:pPr>
+            <a:r>
+              <a:rPr lang="en-US" sz="2800" b="1" dirty="0">
+                <a:solidFill>
+                  <a:srgbClr val="1E2761"/>
+                </a:solidFill>
+                <a:latin typeface="Cambria" pitchFamily="34" charset="0"/>
+                <a:ea typeface="Cambria" pitchFamily="34" charset="-122"/>
+                <a:cs typeface="Cambria" pitchFamily="34" charset="-120"/>
+              </a:rPr>
+              <a:t>ca. 10 500 €</a:t>
+            </a:r>
+            <a:endParaRPr lang="en-US" sz="2800" dirty="0"/>
+          </a:p>
+        </p:txBody>
+      </p:sp>
+      <p:sp>
+        <p:nvSpPr>
+          <p:cNvPr id="13" name="Shape 11"/>
+          <p:cNvSpPr/>
+          <p:nvPr/>
+        </p:nvSpPr>
+        <p:spPr>
+          <a:xfrm>
+            <a:off x="548640" y="4535424"/>
+            <a:ext cx="11109960" cy="914400"/>
+          </a:xfrm>
+          <a:prstGeom prst="roundRect">
+            <a:avLst>
+              <a:gd name="adj" fmla="val 8000"/>
+            </a:avLst>
+          </a:prstGeom>
+          <a:solidFill>
+            <a:srgbClr val="D9534F"/>
+          </a:solidFill>
+          <a:ln/>
+        </p:spPr>
+      </p:sp>
+      <p:sp>
+        <p:nvSpPr>
+          <p:cNvPr id="14" name="Text 12"/>
+          <p:cNvSpPr txBox="1"/>
+          <p:nvPr/>
+        </p:nvSpPr>
+        <p:spPr>
+          <a:xfrm>
+            <a:off x="822960" y="4535424"/>
+            <a:ext cx="7680960" cy="914400"/>
+          </a:xfrm>
+          <a:prstGeom prst="rect">
+            <a:avLst/>
+          </a:prstGeom>
+          <a:noFill/>
+          <a:ln/>
+        </p:spPr>
+        <p:txBody>
+          <a:bodyPr wrap="square" lIns="0" tIns="0" rIns="0" bIns="0" rtlCol="0" anchor="ctr"/>
+          <a:lstStyle/>
+          <a:p>
+            <a:pPr indent="0" marL="0">
+              <a:buNone/>
+            </a:pPr>
+            <a:r>
+              <a:rPr lang="en-US" sz="2400" b="1" dirty="0">
+                <a:solidFill>
+                  <a:srgbClr val="FFFFFF"/>
+                </a:solidFill>
+                <a:latin typeface="Cambria" pitchFamily="34" charset="0"/>
+                <a:ea typeface="Cambria" pitchFamily="34" charset="-122"/>
+                <a:cs typeface="Cambria" pitchFamily="34" charset="-120"/>
+              </a:rPr>
+              <a:t>= Netto</a:t>
+            </a:r>
+            <a:endParaRPr lang="en-US" sz="2400" dirty="0"/>
+          </a:p>
+        </p:txBody>
+      </p:sp>
+      <p:sp>
+        <p:nvSpPr>
+          <p:cNvPr id="15" name="Text 13"/>
+          <p:cNvSpPr txBox="1"/>
+          <p:nvPr/>
+        </p:nvSpPr>
+        <p:spPr>
+          <a:xfrm>
+            <a:off x="8503920" y="4535424"/>
+            <a:ext cx="2926080" cy="914400"/>
+          </a:xfrm>
+          <a:prstGeom prst="rect">
+            <a:avLst/>
+          </a:prstGeom>
+          <a:noFill/>
+          <a:ln/>
+        </p:spPr>
+        <p:txBody>
+          <a:bodyPr wrap="square" lIns="0" tIns="0" rIns="0" bIns="0" rtlCol="0" anchor="ctr"/>
+          <a:lstStyle/>
+          <a:p>
+            <a:pPr algn="r" indent="0" marL="0">
+              <a:buNone/>
+            </a:pPr>
+            <a:r>
+              <a:rPr lang="en-US" sz="2800" b="1" dirty="0">
+                <a:solidFill>
+                  <a:srgbClr val="FFFFFF"/>
+                </a:solidFill>
+                <a:latin typeface="Cambria" pitchFamily="34" charset="0"/>
+                <a:ea typeface="Cambria" pitchFamily="34" charset="-122"/>
+                <a:cs typeface="Cambria" pitchFamily="34" charset="-120"/>
+              </a:rPr>
+              <a:t>ca. 32 500 €</a:t>
+            </a:r>
+            <a:endParaRPr lang="en-US" sz="2800" dirty="0"/>
+          </a:p>
+        </p:txBody>
+      </p:sp>
+      <p:sp>
+        <p:nvSpPr>
+          <p:cNvPr id="16" name="Shape 14"/>
           <p:cNvSpPr/>
           <p:nvPr/>
         </p:nvSpPr>
@@ -3671,7 +4441,7 @@
       </p:sp>
       <p:sp>
         <p:nvSpPr>
-          <p:cNvPr id="10" name="Text 8"/>
+          <p:cNvPr id="17" name="Text 15"/>
           <p:cNvSpPr txBox="1"/>
           <p:nvPr/>
         </p:nvSpPr>
@@ -3702,7 +4472,7 @@
                 <a:ea typeface="Calibri" pitchFamily="34" charset="-122"/>
                 <a:cs typeface="Calibri" pitchFamily="34" charset="-120"/>
               </a:rPr>
-              <a:t>Vergleiche: </a:t>
+              <a:t>Jetzt: </a:t>
             </a:r>
             <a:pPr indent="0" marL="0">
               <a:buNone/>
@@ -3716,7 +4486,21 @@
                 <a:ea typeface="Calibri" pitchFamily="34" charset="-122"/>
                 <a:cs typeface="Calibri" pitchFamily="34" charset="-120"/>
               </a:rPr>
-              <a:t>Stimmt deine Begründung mit der Folie überein?</a:t>
+              <a:t>Meldet euch. Wofür braucht der Staat die Steuern?      </a:t>
+            </a:r>
+            <a:pPr indent="0" marL="0">
+              <a:buNone/>
+            </a:pPr>
+            <a:r>
+              <a:rPr lang="en-US" sz="2400" i="1" dirty="0">
+                <a:solidFill>
+                  <a:srgbClr val="CADCFC"/>
+                </a:solidFill>
+                <a:latin typeface="Calibri" pitchFamily="34" charset="0"/>
+                <a:ea typeface="Calibri" pitchFamily="34" charset="-122"/>
+                <a:cs typeface="Calibri" pitchFamily="34" charset="-120"/>
+              </a:rPr>
+              <a:t>Noch nichts aufschreiben.</a:t>
             </a:r>
             <a:endParaRPr lang="en-US" sz="2400" dirty="0"/>
           </a:p>
@@ -3724,7 +4508,7 @@
       </p:sp>
       <p:sp>
         <p:nvSpPr>
-          <p:cNvPr id="11" name="Text 9"/>
+          <p:cNvPr id="18" name="Text 16"/>
           <p:cNvSpPr txBox="1"/>
           <p:nvPr/>
         </p:nvSpPr>
@@ -3763,7 +4547,7 @@
       </p:sp>
       <p:sp>
         <p:nvSpPr>
-          <p:cNvPr id="12" name="Text 10"/>
+          <p:cNvPr id="19" name="Text 17"/>
           <p:cNvSpPr txBox="1"/>
           <p:nvPr/>
         </p:nvSpPr>
@@ -3841,7 +4625,7 @@
         <p:spPr>
           <a:xfrm>
             <a:off x="548640" y="320040"/>
-            <a:ext cx="9144000" cy="274320"/>
+            <a:ext cx="7315200" cy="274320"/>
           </a:xfrm>
           <a:prstGeom prst="rect">
             <a:avLst/>
@@ -3865,7 +4649,7 @@
                 <a:ea typeface="Calibri" pitchFamily="34" charset="-122"/>
                 <a:cs typeface="Calibri" pitchFamily="34" charset="-120"/>
               </a:rPr>
-              <a:t>WAHR ODER FALSCH? · AUSSAGE 4 VON 4 · OHNE HEFT</a:t>
+              <a:t>EXKURS · ÜBUNG</a:t>
             </a:r>
             <a:endParaRPr lang="en-US" sz="1300" dirty="0"/>
           </a:p>
@@ -3904,7 +4688,7 @@
                 <a:ea typeface="Cambria" pitchFamily="34" charset="-122"/>
                 <a:cs typeface="Cambria" pitchFamily="34" charset="-120"/>
               </a:rPr>
-              <a:t>Wahr oder falsch?</a:t>
+              <a:t>Stellt euch vor: keine Steuern</a:t>
             </a:r>
             <a:endParaRPr lang="en-US" sz="3400" dirty="0"/>
           </a:p>
@@ -3918,12 +4702,12 @@
         </p:nvSpPr>
         <p:spPr>
           <a:xfrm>
-            <a:off x="548640" y="1600200"/>
-            <a:ext cx="11109960" cy="2743200"/>
+            <a:off x="548640" y="1371600"/>
+            <a:ext cx="11109960" cy="2560320"/>
           </a:xfrm>
           <a:prstGeom prst="roundRect">
             <a:avLst>
-              <a:gd name="adj" fmla="val 2667"/>
+              <a:gd name="adj" fmla="val 2857"/>
             </a:avLst>
           </a:prstGeom>
           <a:solidFill>
@@ -3940,14 +4724,14 @@
         </p:nvSpPr>
         <p:spPr>
           <a:xfrm>
-            <a:off x="868680" y="1920240"/>
-            <a:ext cx="548640" cy="548640"/>
+            <a:off x="731520" y="1517904"/>
+            <a:ext cx="384048" cy="384048"/>
           </a:xfrm>
           <a:prstGeom prst="ellipse">
             <a:avLst/>
           </a:prstGeom>
           <a:solidFill>
-            <a:srgbClr val="D9534F"/>
+            <a:srgbClr val="1E2761"/>
           </a:solidFill>
           <a:ln/>
         </p:spPr>
@@ -3960,8 +4744,8 @@
         </p:nvSpPr>
         <p:spPr>
           <a:xfrm>
-            <a:off x="868680" y="1920240"/>
-            <a:ext cx="548640" cy="548640"/>
+            <a:off x="731520" y="1517904"/>
+            <a:ext cx="384048" cy="384048"/>
           </a:xfrm>
           <a:prstGeom prst="rect">
             <a:avLst/>
@@ -3985,7 +4769,7 @@
                 <a:ea typeface="Calibri" pitchFamily="34" charset="-122"/>
                 <a:cs typeface="Calibri" pitchFamily="34" charset="-120"/>
               </a:rPr>
-              <a:t>4</a:t>
+              <a:t>1</a:t>
             </a:r>
             <a:endParaRPr lang="en-US" sz="1800" dirty="0"/>
           </a:p>
@@ -3999,8 +4783,67 @@
         </p:nvSpPr>
         <p:spPr>
           <a:xfrm>
-            <a:off x="1737360" y="1783080"/>
-            <a:ext cx="9601200" cy="2377440"/>
+            <a:off x="1280160" y="1481328"/>
+            <a:ext cx="10241280" cy="457200"/>
+          </a:xfrm>
+          <a:prstGeom prst="rect">
+            <a:avLst/>
+          </a:prstGeom>
+          <a:noFill/>
+          <a:ln/>
+        </p:spPr>
+        <p:txBody>
+          <a:bodyPr wrap="square" lIns="0" tIns="0" rIns="0" bIns="0" rtlCol="0" anchor="t"/>
+          <a:lstStyle/>
+          <a:p>
+            <a:pPr indent="0" marL="0">
+              <a:buNone/>
+            </a:pPr>
+            <a:r>
+              <a:rPr lang="en-US" sz="2400" b="1" dirty="0">
+                <a:solidFill>
+                  <a:srgbClr val="1E2761"/>
+                </a:solidFill>
+                <a:latin typeface="Calibri" pitchFamily="34" charset="0"/>
+                <a:ea typeface="Calibri" pitchFamily="34" charset="-122"/>
+                <a:cs typeface="Calibri" pitchFamily="34" charset="-120"/>
+              </a:rPr>
+              <a:t>Du verdienst 50 000 € brutto und zahlst keine Steuern.</a:t>
+            </a:r>
+            <a:endParaRPr lang="en-US" sz="2400" dirty="0"/>
+          </a:p>
+        </p:txBody>
+      </p:sp>
+      <p:sp>
+        <p:nvSpPr>
+          <p:cNvPr id="8" name="Shape 6"/>
+          <p:cNvSpPr/>
+          <p:nvPr/>
+        </p:nvSpPr>
+        <p:spPr>
+          <a:xfrm>
+            <a:off x="731520" y="2048256"/>
+            <a:ext cx="384048" cy="384048"/>
+          </a:xfrm>
+          <a:prstGeom prst="ellipse">
+            <a:avLst/>
+          </a:prstGeom>
+          <a:solidFill>
+            <a:srgbClr val="1E2761"/>
+          </a:solidFill>
+          <a:ln/>
+        </p:spPr>
+      </p:sp>
+      <p:sp>
+        <p:nvSpPr>
+          <p:cNvPr id="9" name="Text 7"/>
+          <p:cNvSpPr txBox="1"/>
+          <p:nvPr/>
+        </p:nvSpPr>
+        <p:spPr>
+          <a:xfrm>
+            <a:off x="731520" y="2048256"/>
+            <a:ext cx="384048" cy="384048"/>
           </a:xfrm>
           <a:prstGeom prst="rect">
             <a:avLst/>
@@ -4012,27 +4855,164 @@
           <a:bodyPr wrap="square" lIns="0" tIns="0" rIns="0" bIns="0" rtlCol="0" anchor="ctr"/>
           <a:lstStyle/>
           <a:p>
-            <a:pPr indent="0" marL="0">
-              <a:buNone/>
-            </a:pPr>
-            <a:r>
-              <a:rPr lang="en-US" sz="3000" dirty="0">
+            <a:pPr algn="ctr" indent="0" marL="0">
+              <a:buNone/>
+            </a:pPr>
+            <a:r>
+              <a:rPr lang="en-US" sz="1800" b="1" dirty="0">
+                <a:solidFill>
+                  <a:srgbClr val="FFFFFF"/>
+                </a:solidFill>
+                <a:latin typeface="Calibri" pitchFamily="34" charset="0"/>
+                <a:ea typeface="Calibri" pitchFamily="34" charset="-122"/>
+                <a:cs typeface="Calibri" pitchFamily="34" charset="-120"/>
+              </a:rPr>
+              <a:t>2</a:t>
+            </a:r>
+            <a:endParaRPr lang="en-US" sz="1800" dirty="0"/>
+          </a:p>
+        </p:txBody>
+      </p:sp>
+      <p:sp>
+        <p:nvSpPr>
+          <p:cNvPr id="10" name="Text 8"/>
+          <p:cNvSpPr txBox="1"/>
+          <p:nvPr/>
+        </p:nvSpPr>
+        <p:spPr>
+          <a:xfrm>
+            <a:off x="1280160" y="2011680"/>
+            <a:ext cx="10241280" cy="868680"/>
+          </a:xfrm>
+          <a:prstGeom prst="rect">
+            <a:avLst/>
+          </a:prstGeom>
+          <a:noFill/>
+          <a:ln/>
+        </p:spPr>
+        <p:txBody>
+          <a:bodyPr wrap="square" lIns="0" tIns="0" rIns="0" bIns="0" rtlCol="0" anchor="t"/>
+          <a:lstStyle/>
+          <a:p>
+            <a:pPr indent="0" marL="0">
+              <a:buNone/>
+            </a:pPr>
+            <a:r>
+              <a:rPr lang="en-US" sz="2400" b="1" dirty="0">
                 <a:solidFill>
                   <a:srgbClr val="1E2761"/>
                 </a:solidFill>
-                <a:latin typeface="Cambria" pitchFamily="34" charset="0"/>
-                <a:ea typeface="Cambria" pitchFamily="34" charset="-122"/>
-                <a:cs typeface="Cambria" pitchFamily="34" charset="-120"/>
-              </a:rPr>
-              <a:t>Ludwig XIV. erlaubte den Protestanten die freie Religionsausübung.</a:t>
-            </a:r>
-            <a:endParaRPr lang="en-US" sz="3000" dirty="0"/>
-          </a:p>
-        </p:txBody>
-      </p:sp>
-      <p:sp>
-        <p:nvSpPr>
-          <p:cNvPr id="8" name="Shape 6"/>
+                <a:latin typeface="Calibri" pitchFamily="34" charset="0"/>
+                <a:ea typeface="Calibri" pitchFamily="34" charset="-122"/>
+                <a:cs typeface="Calibri" pitchFamily="34" charset="-120"/>
+              </a:rPr>
+              <a:t>Rechne: Wie viel mehr hast du im Monat? (Lohnsteuer: ca. 7 000 € im Jahr)</a:t>
+            </a:r>
+            <a:endParaRPr lang="en-US" sz="2400" dirty="0"/>
+          </a:p>
+        </p:txBody>
+      </p:sp>
+      <p:sp>
+        <p:nvSpPr>
+          <p:cNvPr id="11" name="Shape 9"/>
+          <p:cNvSpPr/>
+          <p:nvPr/>
+        </p:nvSpPr>
+        <p:spPr>
+          <a:xfrm>
+            <a:off x="731520" y="2990088"/>
+            <a:ext cx="384048" cy="384048"/>
+          </a:xfrm>
+          <a:prstGeom prst="ellipse">
+            <a:avLst/>
+          </a:prstGeom>
+          <a:solidFill>
+            <a:srgbClr val="1E2761"/>
+          </a:solidFill>
+          <a:ln/>
+        </p:spPr>
+      </p:sp>
+      <p:sp>
+        <p:nvSpPr>
+          <p:cNvPr id="12" name="Text 10"/>
+          <p:cNvSpPr txBox="1"/>
+          <p:nvPr/>
+        </p:nvSpPr>
+        <p:spPr>
+          <a:xfrm>
+            <a:off x="731520" y="2990088"/>
+            <a:ext cx="384048" cy="384048"/>
+          </a:xfrm>
+          <a:prstGeom prst="rect">
+            <a:avLst/>
+          </a:prstGeom>
+          <a:noFill/>
+          <a:ln/>
+        </p:spPr>
+        <p:txBody>
+          <a:bodyPr wrap="square" lIns="0" tIns="0" rIns="0" bIns="0" rtlCol="0" anchor="ctr"/>
+          <a:lstStyle/>
+          <a:p>
+            <a:pPr algn="ctr" indent="0" marL="0">
+              <a:buNone/>
+            </a:pPr>
+            <a:r>
+              <a:rPr lang="en-US" sz="1800" b="1" dirty="0">
+                <a:solidFill>
+                  <a:srgbClr val="FFFFFF"/>
+                </a:solidFill>
+                <a:latin typeface="Calibri" pitchFamily="34" charset="0"/>
+                <a:ea typeface="Calibri" pitchFamily="34" charset="-122"/>
+                <a:cs typeface="Calibri" pitchFamily="34" charset="-120"/>
+              </a:rPr>
+              <a:t>3</a:t>
+            </a:r>
+            <a:endParaRPr lang="en-US" sz="1800" dirty="0"/>
+          </a:p>
+        </p:txBody>
+      </p:sp>
+      <p:sp>
+        <p:nvSpPr>
+          <p:cNvPr id="13" name="Text 11"/>
+          <p:cNvSpPr txBox="1"/>
+          <p:nvPr/>
+        </p:nvSpPr>
+        <p:spPr>
+          <a:xfrm>
+            <a:off x="1280160" y="2953512"/>
+            <a:ext cx="10241280" cy="868680"/>
+          </a:xfrm>
+          <a:prstGeom prst="rect">
+            <a:avLst/>
+          </a:prstGeom>
+          <a:noFill/>
+          <a:ln/>
+        </p:spPr>
+        <p:txBody>
+          <a:bodyPr wrap="square" lIns="0" tIns="0" rIns="0" bIns="0" rtlCol="0" anchor="t"/>
+          <a:lstStyle/>
+          <a:p>
+            <a:pPr indent="0" marL="0">
+              <a:buNone/>
+            </a:pPr>
+            <a:r>
+              <a:rPr lang="en-US" sz="2400" b="1" dirty="0">
+                <a:solidFill>
+                  <a:srgbClr val="1E2761"/>
+                </a:solidFill>
+                <a:latin typeface="Calibri" pitchFamily="34" charset="0"/>
+                <a:ea typeface="Calibri" pitchFamily="34" charset="-122"/>
+                <a:cs typeface="Calibri" pitchFamily="34" charset="-120"/>
+              </a:rPr>
+              <a:t>Antworte: Wäre das gerecht, wenn dein Nachbar mit demselben Gehalt Steuern zahlt? Begründe.</a:t>
+            </a:r>
+            <a:endParaRPr lang="en-US" sz="2400" dirty="0"/>
+          </a:p>
+        </p:txBody>
+      </p:sp>
+      <p:sp>
+        <p:nvSpPr>
+          <p:cNvPr id="14" name="Shape 12"/>
           <p:cNvSpPr/>
           <p:nvPr/>
         </p:nvSpPr>
@@ -4054,7 +5034,7 @@
       </p:sp>
       <p:sp>
         <p:nvSpPr>
-          <p:cNvPr id="9" name="Text 7"/>
+          <p:cNvPr id="15" name="Text 13"/>
           <p:cNvSpPr txBox="1"/>
           <p:nvPr/>
         </p:nvSpPr>
@@ -4085,7 +5065,7 @@
                 <a:ea typeface="Calibri" pitchFamily="34" charset="-122"/>
                 <a:cs typeface="Calibri" pitchFamily="34" charset="-120"/>
               </a:rPr>
-              <a:t>Jetzt: </a:t>
+              <a:t>Zeit: </a:t>
             </a:r>
             <a:pPr indent="0" marL="0">
               <a:buNone/>
@@ -4099,7 +5079,7 @@
                 <a:ea typeface="Calibri" pitchFamily="34" charset="-122"/>
                 <a:cs typeface="Calibri" pitchFamily="34" charset="-120"/>
               </a:rPr>
-              <a:t>Entscheide still, melde dich, begründe.      </a:t>
+              <a:t>3 Minuten · zu zweit · Flüsterstimme      </a:t>
             </a:r>
             <a:pPr indent="0" marL="0">
               <a:buNone/>
@@ -4113,7 +5093,7 @@
                 <a:ea typeface="Calibri" pitchFamily="34" charset="-122"/>
                 <a:cs typeface="Calibri" pitchFamily="34" charset="-120"/>
               </a:rPr>
-              <a:t>Bei „falsch“: Aussage verbessern.</a:t>
+              <a:t>Fertig? Stift hinlegen.</a:t>
             </a:r>
             <a:endParaRPr lang="en-US" sz="2400" dirty="0"/>
           </a:p>
@@ -4121,7 +5101,7 @@
       </p:sp>
       <p:sp>
         <p:nvSpPr>
-          <p:cNvPr id="10" name="Text 8"/>
+          <p:cNvPr id="16" name="Text 14"/>
           <p:cNvSpPr txBox="1"/>
           <p:nvPr/>
         </p:nvSpPr>
@@ -4160,7 +5140,7 @@
       </p:sp>
       <p:sp>
         <p:nvSpPr>
-          <p:cNvPr id="11" name="Text 9"/>
+          <p:cNvPr id="17" name="Text 15"/>
           <p:cNvSpPr txBox="1"/>
           <p:nvPr/>
         </p:nvSpPr>
@@ -4262,7 +5242,7 @@
                 <a:ea typeface="Calibri" pitchFamily="34" charset="-122"/>
                 <a:cs typeface="Calibri" pitchFamily="34" charset="-120"/>
               </a:rPr>
-              <a:t>WAHR ODER FALSCH? · ANTWORT 4 VON 4</a:t>
+              <a:t>EXKURS · ZURÜCK ZUM ABSOLUTISMUS</a:t>
             </a:r>
             <a:endParaRPr lang="en-US" sz="1300" dirty="0"/>
           </a:p>
@@ -4295,13 +5275,13 @@
             <a:r>
               <a:rPr lang="en-US" sz="3400" b="1" dirty="0">
                 <a:solidFill>
-                  <a:srgbClr val="D9534F"/>
+                  <a:srgbClr val="1E2761"/>
                 </a:solidFill>
                 <a:latin typeface="Cambria" pitchFamily="34" charset="0"/>
                 <a:ea typeface="Cambria" pitchFamily="34" charset="-122"/>
                 <a:cs typeface="Cambria" pitchFamily="34" charset="-120"/>
               </a:rPr>
-              <a:t>Falsch</a:t>
+              <a:t>Genau das war im Absolutismus Realität</a:t>
             </a:r>
             <a:endParaRPr lang="en-US" sz="3400" dirty="0"/>
           </a:p>
@@ -4315,12 +5295,87 @@
         </p:nvSpPr>
         <p:spPr>
           <a:xfrm>
-            <a:off x="548640" y="1600200"/>
-            <a:ext cx="11109960" cy="1371600"/>
+            <a:off x="548640" y="1463040"/>
+            <a:ext cx="11109960" cy="1554480"/>
           </a:xfrm>
           <a:prstGeom prst="roundRect">
             <a:avLst>
-              <a:gd name="adj" fmla="val 5333"/>
+              <a:gd name="adj" fmla="val 4706"/>
+            </a:avLst>
+          </a:prstGeom>
+          <a:solidFill>
+            <a:srgbClr val="EAF0FA"/>
+          </a:solidFill>
+          <a:ln/>
+        </p:spPr>
+      </p:sp>
+      <p:sp>
+        <p:nvSpPr>
+          <p:cNvPr id="5" name="Text 3"/>
+          <p:cNvSpPr txBox="1"/>
+          <p:nvPr/>
+        </p:nvSpPr>
+        <p:spPr>
+          <a:xfrm>
+            <a:off x="822960" y="1463040"/>
+            <a:ext cx="10607040" cy="1554480"/>
+          </a:xfrm>
+          <a:prstGeom prst="rect">
+            <a:avLst/>
+          </a:prstGeom>
+          <a:noFill/>
+          <a:ln/>
+        </p:spPr>
+        <p:txBody>
+          <a:bodyPr wrap="square" lIns="0" tIns="0" rIns="0" bIns="0" rtlCol="0" anchor="ctr"/>
+          <a:lstStyle/>
+          <a:p>
+            <a:pPr indent="0" marL="0">
+              <a:buNone/>
+            </a:pPr>
+            <a:r>
+              <a:rPr lang="en-US" sz="2400" b="1" dirty="0">
+                <a:solidFill>
+                  <a:srgbClr val="D9534F"/>
+                </a:solidFill>
+                <a:latin typeface="Cambria" pitchFamily="34" charset="0"/>
+                <a:ea typeface="Cambria" pitchFamily="34" charset="-122"/>
+                <a:cs typeface="Cambria" pitchFamily="34" charset="-120"/>
+              </a:rPr>
+              <a:t>Der Adel</a:t>
+            </a:r>
+            <a:pPr indent="0" marL="0">
+              <a:buNone/>
+            </a:pPr>
+            <a:r>
+              <a:rPr lang="en-US" sz="2400" dirty="0">
+                <a:solidFill>
+                  <a:srgbClr val="1E2761"/>
+                </a:solidFill>
+                <a:latin typeface="Cambria" pitchFamily="34" charset="0"/>
+                <a:ea typeface="Cambria" pitchFamily="34" charset="-122"/>
+                <a:cs typeface="Cambria" pitchFamily="34" charset="-120"/>
+              </a:rPr>
+              <a:t> (ca. 500 000 Menschen) zahlte keine Steuern – nur wegen seiner Geburt.</a:t>
+            </a:r>
+            <a:endParaRPr lang="en-US" sz="2400" dirty="0"/>
+          </a:p>
+        </p:txBody>
+      </p:sp>
+      <p:sp>
+        <p:nvSpPr>
+          <p:cNvPr id="6" name="Shape 4"/>
+          <p:cNvSpPr/>
+          <p:nvPr/>
+        </p:nvSpPr>
+        <p:spPr>
+          <a:xfrm>
+            <a:off x="548640" y="3154680"/>
+            <a:ext cx="11109960" cy="1554480"/>
+          </a:xfrm>
+          <a:prstGeom prst="roundRect">
+            <a:avLst>
+              <a:gd name="adj" fmla="val 4706"/>
             </a:avLst>
           </a:prstGeom>
           <a:solidFill>
@@ -4331,14 +5386,14 @@
       </p:sp>
       <p:sp>
         <p:nvSpPr>
-          <p:cNvPr id="5" name="Text 3"/>
-          <p:cNvSpPr txBox="1"/>
-          <p:nvPr/>
-        </p:nvSpPr>
-        <p:spPr>
-          <a:xfrm>
-            <a:off x="914400" y="1600200"/>
-            <a:ext cx="10424160" cy="1371600"/>
+          <p:cNvPr id="7" name="Text 5"/>
+          <p:cNvSpPr txBox="1"/>
+          <p:nvPr/>
+        </p:nvSpPr>
+        <p:spPr>
+          <a:xfrm>
+            <a:off x="822960" y="3154680"/>
+            <a:ext cx="10607040" cy="1554480"/>
           </a:xfrm>
           <a:prstGeom prst="rect">
             <a:avLst/>
@@ -4354,81 +5409,29 @@
               <a:buNone/>
             </a:pPr>
             <a:r>
-              <a:rPr lang="en-US" sz="2400" dirty="0">
-                <a:solidFill>
-                  <a:srgbClr val="5B6B8C"/>
+              <a:rPr lang="en-US" sz="2400" b="1" dirty="0">
+                <a:solidFill>
+                  <a:srgbClr val="D9534F"/>
                 </a:solidFill>
                 <a:latin typeface="Cambria" pitchFamily="34" charset="0"/>
                 <a:ea typeface="Cambria" pitchFamily="34" charset="-122"/>
                 <a:cs typeface="Cambria" pitchFamily="34" charset="-120"/>
               </a:rPr>
-              <a:t>Ludwig XIV. erlaubte den Protestanten die freie Religionsausübung.</a:t>
-            </a:r>
-            <a:endParaRPr lang="en-US" sz="2400" dirty="0"/>
-          </a:p>
-        </p:txBody>
-      </p:sp>
-      <p:sp>
-        <p:nvSpPr>
-          <p:cNvPr id="6" name="Shape 4"/>
-          <p:cNvSpPr/>
-          <p:nvPr/>
-        </p:nvSpPr>
-        <p:spPr>
-          <a:xfrm>
-            <a:off x="548640" y="3154680"/>
-            <a:ext cx="11109960" cy="2377440"/>
-          </a:xfrm>
-          <a:prstGeom prst="roundRect">
-            <a:avLst>
-              <a:gd name="adj" fmla="val 3077"/>
-            </a:avLst>
-          </a:prstGeom>
-          <a:solidFill>
-            <a:srgbClr val="FFFFFF"/>
-          </a:solidFill>
-          <a:ln w="38100">
-            <a:solidFill>
-              <a:srgbClr val="D9534F"/>
-            </a:solidFill>
-            <a:prstDash val="solid"/>
-          </a:ln>
-        </p:spPr>
-      </p:sp>
-      <p:sp>
-        <p:nvSpPr>
-          <p:cNvPr id="7" name="Text 5"/>
-          <p:cNvSpPr txBox="1"/>
-          <p:nvPr/>
-        </p:nvSpPr>
-        <p:spPr>
-          <a:xfrm>
-            <a:off x="914400" y="3291840"/>
-            <a:ext cx="5486400" cy="365760"/>
-          </a:xfrm>
-          <a:prstGeom prst="rect">
-            <a:avLst/>
-          </a:prstGeom>
-          <a:noFill/>
-          <a:ln/>
-        </p:spPr>
-        <p:txBody>
-          <a:bodyPr wrap="square" lIns="0" tIns="0" rIns="0" bIns="0" rtlCol="0" anchor="t"/>
-          <a:lstStyle/>
-          <a:p>
-            <a:pPr indent="0" marL="0">
-              <a:buNone/>
-            </a:pPr>
-            <a:r>
-              <a:rPr lang="en-US" sz="2400" b="1" dirty="0">
-                <a:solidFill>
-                  <a:srgbClr val="D9534F"/>
+              <a:t>Der Dritte Stand (Bauern und Bürger)</a:t>
+            </a:r>
+            <a:pPr indent="0" marL="0">
+              <a:buNone/>
+            </a:pPr>
+            <a:r>
+              <a:rPr lang="en-US" sz="2400" dirty="0">
+                <a:solidFill>
+                  <a:srgbClr val="1E2761"/>
                 </a:solidFill>
                 <a:latin typeface="Cambria" pitchFamily="34" charset="0"/>
                 <a:ea typeface="Cambria" pitchFamily="34" charset="-122"/>
                 <a:cs typeface="Cambria" pitchFamily="34" charset="-120"/>
               </a:rPr>
-              <a:t>Begründung</a:t>
+              <a:t> (ca. 20 000 000 Menschen) zahlte Steuern und Abgaben für fast alles.</a:t>
             </a:r>
             <a:endParaRPr lang="en-US" sz="2400" dirty="0"/>
           </a:p>
@@ -4436,46 +5439,7 @@
       </p:sp>
       <p:sp>
         <p:nvSpPr>
-          <p:cNvPr id="8" name="Text 6"/>
-          <p:cNvSpPr txBox="1"/>
-          <p:nvPr/>
-        </p:nvSpPr>
-        <p:spPr>
-          <a:xfrm>
-            <a:off x="914400" y="3749040"/>
-            <a:ext cx="10424160" cy="1737360"/>
-          </a:xfrm>
-          <a:prstGeom prst="rect">
-            <a:avLst/>
-          </a:prstGeom>
-          <a:noFill/>
-          <a:ln/>
-        </p:spPr>
-        <p:txBody>
-          <a:bodyPr wrap="square" lIns="0" tIns="0" rIns="0" bIns="0" rtlCol="0" anchor="t"/>
-          <a:lstStyle/>
-          <a:p>
-            <a:pPr indent="0" marL="0">
-              <a:buNone/>
-            </a:pPr>
-            <a:r>
-              <a:rPr lang="en-US" sz="2600" dirty="0">
-                <a:solidFill>
-                  <a:srgbClr val="1E2761"/>
-                </a:solidFill>
-                <a:latin typeface="Cambria" pitchFamily="34" charset="0"/>
-                <a:ea typeface="Cambria" pitchFamily="34" charset="-122"/>
-                <a:cs typeface="Cambria" pitchFamily="34" charset="-120"/>
-              </a:rPr>
-              <a:t>1685 beendete er die religiöse Toleranz: Wie nur einen König sollte es auch nur einen Glauben geben (Säule Religion, Gottesgnadentum).</a:t>
-            </a:r>
-            <a:endParaRPr lang="en-US" sz="2600" dirty="0"/>
-          </a:p>
-        </p:txBody>
-      </p:sp>
-      <p:sp>
-        <p:nvSpPr>
-          <p:cNvPr id="9" name="Shape 7"/>
+          <p:cNvPr id="8" name="Shape 6"/>
           <p:cNvSpPr/>
           <p:nvPr/>
         </p:nvSpPr>
@@ -4497,7 +5461,7 @@
       </p:sp>
       <p:sp>
         <p:nvSpPr>
-          <p:cNvPr id="10" name="Text 8"/>
+          <p:cNvPr id="9" name="Text 7"/>
           <p:cNvSpPr txBox="1"/>
           <p:nvPr/>
         </p:nvSpPr>
@@ -4528,7 +5492,7 @@
                 <a:ea typeface="Calibri" pitchFamily="34" charset="-122"/>
                 <a:cs typeface="Calibri" pitchFamily="34" charset="-120"/>
               </a:rPr>
-              <a:t>Vergleiche: </a:t>
+              <a:t>Frage: </a:t>
             </a:r>
             <a:pPr indent="0" marL="0">
               <a:buNone/>
@@ -4542,7 +5506,7 @@
                 <a:ea typeface="Calibri" pitchFamily="34" charset="-122"/>
                 <a:cs typeface="Calibri" pitchFamily="34" charset="-120"/>
               </a:rPr>
-              <a:t>Stimmt deine Begründung mit der Folie überein?</a:t>
+              <a:t>Wer bezahlte dann Versailles, Heer und Beamte?</a:t>
             </a:r>
             <a:endParaRPr lang="en-US" sz="2400" dirty="0"/>
           </a:p>
@@ -4550,7 +5514,7 @@
       </p:sp>
       <p:sp>
         <p:nvSpPr>
-          <p:cNvPr id="11" name="Text 9"/>
+          <p:cNvPr id="10" name="Text 8"/>
           <p:cNvSpPr txBox="1"/>
           <p:nvPr/>
         </p:nvSpPr>
@@ -4589,7 +5553,7 @@
       </p:sp>
       <p:sp>
         <p:nvSpPr>
-          <p:cNvPr id="12" name="Text 10"/>
+          <p:cNvPr id="11" name="Text 9"/>
           <p:cNvSpPr txBox="1"/>
           <p:nvPr/>
         </p:nvSpPr>
@@ -4685,13 +5649,13 @@
             <a:r>
               <a:rPr lang="en-US" sz="1300" b="1" spc="200" kern="0" dirty="0">
                 <a:solidFill>
-                  <a:srgbClr val="D9534F"/>
-                </a:solidFill>
-                <a:latin typeface="Calibri" pitchFamily="34" charset="0"/>
-                <a:ea typeface="Calibri" pitchFamily="34" charset="-122"/>
-                <a:cs typeface="Calibri" pitchFamily="34" charset="-120"/>
-              </a:rPr>
-              <a:t>MERKSATZ 2 · ABSCHREIBEN UND ROT UMRAHMEN</a:t>
+                  <a:srgbClr val="5B6B8C"/>
+                </a:solidFill>
+                <a:latin typeface="Calibri" pitchFamily="34" charset="0"/>
+                <a:ea typeface="Calibri" pitchFamily="34" charset="-122"/>
+                <a:cs typeface="Calibri" pitchFamily="34" charset="-120"/>
+              </a:rPr>
+              <a:t>WAHR ODER FALSCH? · AUSSAGE 3 VON 4 · OHNE HEFT</a:t>
             </a:r>
             <a:endParaRPr lang="en-US" sz="1300" dirty="0"/>
           </a:p>
@@ -4730,7 +5694,7 @@
                 <a:ea typeface="Cambria" pitchFamily="34" charset="-122"/>
                 <a:cs typeface="Cambria" pitchFamily="34" charset="-120"/>
               </a:rPr>
-              <a:t>Absolutismus</a:t>
+              <a:t>Wahr oder falsch?</a:t>
             </a:r>
             <a:endParaRPr lang="en-US" sz="3400" dirty="0"/>
           </a:p>
@@ -4744,35 +5708,50 @@
         </p:nvSpPr>
         <p:spPr>
           <a:xfrm>
-            <a:off x="548640" y="1371600"/>
-            <a:ext cx="11109960" cy="1920240"/>
+            <a:off x="548640" y="1600200"/>
+            <a:ext cx="11109960" cy="2743200"/>
           </a:xfrm>
           <a:prstGeom prst="roundRect">
             <a:avLst>
-              <a:gd name="adj" fmla="val 3810"/>
+              <a:gd name="adj" fmla="val 2667"/>
             </a:avLst>
           </a:prstGeom>
           <a:solidFill>
-            <a:srgbClr val="FFFFFF"/>
+            <a:srgbClr val="EAF0FA"/>
           </a:solidFill>
-          <a:ln w="38100">
-            <a:solidFill>
-              <a:srgbClr val="D9534F"/>
-            </a:solidFill>
-            <a:prstDash val="solid"/>
-          </a:ln>
-        </p:spPr>
-      </p:sp>
-      <p:sp>
-        <p:nvSpPr>
-          <p:cNvPr id="5" name="Text 3"/>
-          <p:cNvSpPr txBox="1"/>
-          <p:nvPr/>
-        </p:nvSpPr>
-        <p:spPr>
-          <a:xfrm>
-            <a:off x="868680" y="1417320"/>
-            <a:ext cx="10469880" cy="1828800"/>
+          <a:ln/>
+        </p:spPr>
+      </p:sp>
+      <p:sp>
+        <p:nvSpPr>
+          <p:cNvPr id="5" name="Shape 3"/>
+          <p:cNvSpPr/>
+          <p:nvPr/>
+        </p:nvSpPr>
+        <p:spPr>
+          <a:xfrm>
+            <a:off x="868680" y="1920240"/>
+            <a:ext cx="548640" cy="548640"/>
+          </a:xfrm>
+          <a:prstGeom prst="ellipse">
+            <a:avLst/>
+          </a:prstGeom>
+          <a:solidFill>
+            <a:srgbClr val="D9534F"/>
+          </a:solidFill>
+          <a:ln/>
+        </p:spPr>
+      </p:sp>
+      <p:sp>
+        <p:nvSpPr>
+          <p:cNvPr id="6" name="Text 4"/>
+          <p:cNvSpPr txBox="1"/>
+          <p:nvPr/>
+        </p:nvSpPr>
+        <p:spPr>
+          <a:xfrm>
+            <a:off x="868680" y="1920240"/>
+            <a:ext cx="548640" cy="548640"/>
           </a:xfrm>
           <a:prstGeom prst="rect">
             <a:avLst/>
@@ -4784,11 +5763,50 @@
           <a:bodyPr wrap="square" lIns="0" tIns="0" rIns="0" bIns="0" rtlCol="0" anchor="ctr"/>
           <a:lstStyle/>
           <a:p>
-            <a:pPr indent="0" marL="0">
-              <a:buNone/>
-            </a:pPr>
-            <a:r>
-              <a:rPr lang="en-US" sz="2400" b="1" dirty="0">
+            <a:pPr algn="ctr" indent="0" marL="0">
+              <a:buNone/>
+            </a:pPr>
+            <a:r>
+              <a:rPr lang="en-US" sz="1800" b="1" dirty="0">
+                <a:solidFill>
+                  <a:srgbClr val="FFFFFF"/>
+                </a:solidFill>
+                <a:latin typeface="Calibri" pitchFamily="34" charset="0"/>
+                <a:ea typeface="Calibri" pitchFamily="34" charset="-122"/>
+                <a:cs typeface="Calibri" pitchFamily="34" charset="-120"/>
+              </a:rPr>
+              <a:t>3</a:t>
+            </a:r>
+            <a:endParaRPr lang="en-US" sz="1800" dirty="0"/>
+          </a:p>
+        </p:txBody>
+      </p:sp>
+      <p:sp>
+        <p:nvSpPr>
+          <p:cNvPr id="7" name="Text 5"/>
+          <p:cNvSpPr txBox="1"/>
+          <p:nvPr/>
+        </p:nvSpPr>
+        <p:spPr>
+          <a:xfrm>
+            <a:off x="1737360" y="1783080"/>
+            <a:ext cx="9601200" cy="2377440"/>
+          </a:xfrm>
+          <a:prstGeom prst="rect">
+            <a:avLst/>
+          </a:prstGeom>
+          <a:noFill/>
+          <a:ln/>
+        </p:spPr>
+        <p:txBody>
+          <a:bodyPr wrap="square" lIns="0" tIns="0" rIns="0" bIns="0" rtlCol="0" anchor="ctr"/>
+          <a:lstStyle/>
+          <a:p>
+            <a:pPr indent="0" marL="0">
+              <a:buNone/>
+            </a:pPr>
+            <a:r>
+              <a:rPr lang="en-US" sz="3000" dirty="0">
                 <a:solidFill>
                   <a:srgbClr val="1E2761"/>
                 </a:solidFill>
@@ -4796,263 +5814,15 @@
                 <a:ea typeface="Cambria" pitchFamily="34" charset="-122"/>
                 <a:cs typeface="Cambria" pitchFamily="34" charset="-120"/>
               </a:rPr>
-              <a:t>Absolutismus</a:t>
-            </a:r>
-            <a:pPr indent="0" marL="0">
-              <a:buNone/>
-            </a:pPr>
-            <a:r>
-              <a:rPr lang="en-US" sz="2400" dirty="0">
-                <a:solidFill>
-                  <a:srgbClr val="1E2761"/>
-                </a:solidFill>
-                <a:latin typeface="Cambria" pitchFamily="34" charset="0"/>
-                <a:ea typeface="Cambria" pitchFamily="34" charset="-122"/>
-                <a:cs typeface="Cambria" pitchFamily="34" charset="-120"/>
-              </a:rPr>
-              <a:t> war eine Herrschaftsform in Europa im </a:t>
-            </a:r>
-            <a:pPr indent="0" marL="0">
-              <a:buNone/>
-            </a:pPr>
-            <a:r>
-              <a:rPr lang="en-US" sz="2400" b="1" dirty="0">
-                <a:solidFill>
-                  <a:srgbClr val="1E2761"/>
-                </a:solidFill>
-                <a:latin typeface="Cambria" pitchFamily="34" charset="0"/>
-                <a:ea typeface="Cambria" pitchFamily="34" charset="-122"/>
-                <a:cs typeface="Cambria" pitchFamily="34" charset="-120"/>
-              </a:rPr>
-              <a:t>17. und 18. Jahrhundert</a:t>
-            </a:r>
-            <a:pPr indent="0" marL="0">
-              <a:buNone/>
-            </a:pPr>
-            <a:r>
-              <a:rPr lang="en-US" sz="2400" dirty="0">
-                <a:solidFill>
-                  <a:srgbClr val="1E2761"/>
-                </a:solidFill>
-                <a:latin typeface="Cambria" pitchFamily="34" charset="0"/>
-                <a:ea typeface="Cambria" pitchFamily="34" charset="-122"/>
-                <a:cs typeface="Cambria" pitchFamily="34" charset="-120"/>
-              </a:rPr>
-              <a:t>, in der ein einzelner Monarch (König oder Fürst) </a:t>
-            </a:r>
-            <a:pPr indent="0" marL="0">
-              <a:buNone/>
-            </a:pPr>
-            <a:r>
-              <a:rPr lang="en-US" sz="2400" b="1" dirty="0">
-                <a:solidFill>
-                  <a:srgbClr val="1E2761"/>
-                </a:solidFill>
-                <a:latin typeface="Cambria" pitchFamily="34" charset="0"/>
-                <a:ea typeface="Cambria" pitchFamily="34" charset="-122"/>
-                <a:cs typeface="Cambria" pitchFamily="34" charset="-120"/>
-              </a:rPr>
-              <a:t>uneingeschränkt (absolut)</a:t>
-            </a:r>
-            <a:pPr indent="0" marL="0">
-              <a:buNone/>
-            </a:pPr>
-            <a:r>
-              <a:rPr lang="en-US" sz="2400" dirty="0">
-                <a:solidFill>
-                  <a:srgbClr val="1E2761"/>
-                </a:solidFill>
-                <a:latin typeface="Cambria" pitchFamily="34" charset="0"/>
-                <a:ea typeface="Cambria" pitchFamily="34" charset="-122"/>
-                <a:cs typeface="Cambria" pitchFamily="34" charset="-120"/>
-              </a:rPr>
-              <a:t> herrschte.</a:t>
-            </a:r>
-            <a:endParaRPr lang="en-US" sz="2400" dirty="0"/>
-          </a:p>
-        </p:txBody>
-      </p:sp>
-      <p:sp>
-        <p:nvSpPr>
-          <p:cNvPr id="6" name="Shape 4"/>
-          <p:cNvSpPr/>
-          <p:nvPr/>
-        </p:nvSpPr>
-        <p:spPr>
-          <a:xfrm>
-            <a:off x="548640" y="3401568"/>
-            <a:ext cx="11109960" cy="1143000"/>
-          </a:xfrm>
-          <a:prstGeom prst="roundRect">
-            <a:avLst>
-              <a:gd name="adj" fmla="val 6400"/>
-            </a:avLst>
-          </a:prstGeom>
-          <a:solidFill>
-            <a:srgbClr val="EAF0FA"/>
-          </a:solidFill>
-          <a:ln/>
-        </p:spPr>
-      </p:sp>
-      <p:sp>
-        <p:nvSpPr>
-          <p:cNvPr id="7" name="Text 5"/>
-          <p:cNvSpPr txBox="1"/>
-          <p:nvPr/>
-        </p:nvSpPr>
-        <p:spPr>
-          <a:xfrm>
-            <a:off x="822960" y="3401568"/>
-            <a:ext cx="10607040" cy="1143000"/>
-          </a:xfrm>
-          <a:prstGeom prst="rect">
-            <a:avLst/>
-          </a:prstGeom>
-          <a:noFill/>
-          <a:ln/>
-        </p:spPr>
-        <p:txBody>
-          <a:bodyPr wrap="square" lIns="0" tIns="0" rIns="0" bIns="0" rtlCol="0" anchor="ctr"/>
-          <a:lstStyle/>
-          <a:p>
-            <a:pPr indent="0" marL="0">
-              <a:buNone/>
-            </a:pPr>
-            <a:r>
-              <a:rPr lang="en-US" sz="2400" b="1" dirty="0">
-                <a:solidFill>
-                  <a:srgbClr val="5B6B8C"/>
-                </a:solidFill>
-                <a:latin typeface="Calibri" pitchFamily="34" charset="0"/>
-                <a:ea typeface="Calibri" pitchFamily="34" charset="-122"/>
-                <a:cs typeface="Calibri" pitchFamily="34" charset="-120"/>
-              </a:rPr>
-              <a:t>Beispiel:   </a:t>
-            </a:r>
-            <a:pPr indent="0" marL="0">
-              <a:buNone/>
-            </a:pPr>
-            <a:r>
-              <a:rPr lang="en-US" sz="2400" dirty="0">
-                <a:solidFill>
-                  <a:srgbClr val="1E2761"/>
-                </a:solidFill>
-                <a:latin typeface="Cambria" pitchFamily="34" charset="0"/>
-                <a:ea typeface="Cambria" pitchFamily="34" charset="-122"/>
-                <a:cs typeface="Cambria" pitchFamily="34" charset="-120"/>
-              </a:rPr>
-              <a:t>Ludwig XIV. verkündet 1661: „Ich regiere jetzt selbst.“</a:t>
-            </a:r>
-            <a:endParaRPr lang="en-US" sz="2400" dirty="0"/>
+              <a:t>Ludwig XIV. verzichtete auf Söldner und baute ein stehendes Heer auf.</a:t>
+            </a:r>
+            <a:endParaRPr lang="en-US" sz="3000" dirty="0"/>
           </a:p>
         </p:txBody>
       </p:sp>
       <p:sp>
         <p:nvSpPr>
           <p:cNvPr id="8" name="Shape 6"/>
-          <p:cNvSpPr/>
-          <p:nvPr/>
-        </p:nvSpPr>
-        <p:spPr>
-          <a:xfrm>
-            <a:off x="548640" y="4645152"/>
-            <a:ext cx="11109960" cy="886968"/>
-          </a:xfrm>
-          <a:prstGeom prst="roundRect">
-            <a:avLst>
-              <a:gd name="adj" fmla="val 8247"/>
-            </a:avLst>
-          </a:prstGeom>
-          <a:solidFill>
-            <a:srgbClr val="F4F7FD"/>
-          </a:solidFill>
-          <a:ln/>
-        </p:spPr>
-      </p:sp>
-      <p:sp>
-        <p:nvSpPr>
-          <p:cNvPr id="9" name="Text 7"/>
-          <p:cNvSpPr txBox="1"/>
-          <p:nvPr/>
-        </p:nvSpPr>
-        <p:spPr>
-          <a:xfrm>
-            <a:off x="822960" y="4645152"/>
-            <a:ext cx="10607040" cy="886968"/>
-          </a:xfrm>
-          <a:prstGeom prst="rect">
-            <a:avLst/>
-          </a:prstGeom>
-          <a:noFill/>
-          <a:ln/>
-        </p:spPr>
-        <p:txBody>
-          <a:bodyPr wrap="square" lIns="0" tIns="0" rIns="0" bIns="0" rtlCol="0" anchor="ctr"/>
-          <a:lstStyle/>
-          <a:p>
-            <a:pPr indent="0" marL="0">
-              <a:buNone/>
-            </a:pPr>
-            <a:r>
-              <a:rPr lang="en-US" sz="2400" b="1" dirty="0">
-                <a:solidFill>
-                  <a:srgbClr val="D9534F"/>
-                </a:solidFill>
-                <a:latin typeface="Cambria" pitchFamily="34" charset="0"/>
-                <a:ea typeface="Cambria" pitchFamily="34" charset="-122"/>
-                <a:cs typeface="Cambria" pitchFamily="34" charset="-120"/>
-              </a:rPr>
-              <a:t>Test:   </a:t>
-            </a:r>
-            <a:pPr indent="0" marL="0">
-              <a:buNone/>
-            </a:pPr>
-            <a:r>
-              <a:rPr lang="en-US" sz="2400" dirty="0">
-                <a:solidFill>
-                  <a:srgbClr val="1E2761"/>
-                </a:solidFill>
-                <a:latin typeface="Calibri" pitchFamily="34" charset="0"/>
-                <a:ea typeface="Calibri" pitchFamily="34" charset="-122"/>
-                <a:cs typeface="Calibri" pitchFamily="34" charset="-120"/>
-              </a:rPr>
-              <a:t>Kann jemand den König stoppen (Parlament, Verfassung, Stände)? </a:t>
-            </a:r>
-            <a:pPr indent="0" marL="0">
-              <a:buNone/>
-            </a:pPr>
-            <a:r>
-              <a:rPr lang="en-US" sz="2400" b="1" dirty="0">
-                <a:solidFill>
-                  <a:srgbClr val="1E2761"/>
-                </a:solidFill>
-                <a:latin typeface="Calibri" pitchFamily="34" charset="0"/>
-                <a:ea typeface="Calibri" pitchFamily="34" charset="-122"/>
-                <a:cs typeface="Calibri" pitchFamily="34" charset="-120"/>
-              </a:rPr>
-              <a:t>Nein</a:t>
-            </a:r>
-            <a:pPr indent="0" marL="0">
-              <a:buNone/>
-            </a:pPr>
-            <a:r>
-              <a:rPr lang="en-US" sz="2400" dirty="0">
-                <a:solidFill>
-                  <a:srgbClr val="1E2761"/>
-                </a:solidFill>
-                <a:latin typeface="Calibri" pitchFamily="34" charset="0"/>
-                <a:ea typeface="Calibri" pitchFamily="34" charset="-122"/>
-                <a:cs typeface="Calibri" pitchFamily="34" charset="-120"/>
-              </a:rPr>
-              <a:t> → Absolutismus.</a:t>
-            </a:r>
-            <a:endParaRPr lang="en-US" sz="2400" dirty="0"/>
-          </a:p>
-        </p:txBody>
-      </p:sp>
-      <p:sp>
-        <p:nvSpPr>
-          <p:cNvPr id="10" name="Shape 8"/>
           <p:cNvSpPr/>
           <p:nvPr/>
         </p:nvSpPr>
@@ -5074,7 +5844,7 @@
       </p:sp>
       <p:sp>
         <p:nvSpPr>
-          <p:cNvPr id="11" name="Text 9"/>
+          <p:cNvPr id="9" name="Text 7"/>
           <p:cNvSpPr txBox="1"/>
           <p:nvPr/>
         </p:nvSpPr>
@@ -5119,7 +5889,7 @@
                 <a:ea typeface="Calibri" pitchFamily="34" charset="-122"/>
                 <a:cs typeface="Calibri" pitchFamily="34" charset="-120"/>
               </a:rPr>
-              <a:t>Schreibe den Merksatz mit Beispiel ab und rahme ihn rot ein.      </a:t>
+              <a:t>Entscheide still, melde dich, begründe.      </a:t>
             </a:r>
             <a:pPr indent="0" marL="0">
               <a:buNone/>
@@ -5133,7 +5903,7 @@
                 <a:ea typeface="Calibri" pitchFamily="34" charset="-122"/>
                 <a:cs typeface="Calibri" pitchFamily="34" charset="-120"/>
               </a:rPr>
-              <a:t>Fertig? Stift hinlegen.</a:t>
+              <a:t>Bei „falsch“: Aussage verbessern.</a:t>
             </a:r>
             <a:endParaRPr lang="en-US" sz="2400" dirty="0"/>
           </a:p>
@@ -5141,7 +5911,7 @@
       </p:sp>
       <p:sp>
         <p:nvSpPr>
-          <p:cNvPr id="12" name="Text 10"/>
+          <p:cNvPr id="10" name="Text 8"/>
           <p:cNvSpPr txBox="1"/>
           <p:nvPr/>
         </p:nvSpPr>
@@ -5180,7 +5950,7 @@
       </p:sp>
       <p:sp>
         <p:nvSpPr>
-          <p:cNvPr id="13" name="Text 11"/>
+          <p:cNvPr id="11" name="Text 9"/>
           <p:cNvSpPr txBox="1"/>
           <p:nvPr/>
         </p:nvSpPr>
@@ -5258,7 +6028,7 @@
         <p:spPr>
           <a:xfrm>
             <a:off x="548640" y="320040"/>
-            <a:ext cx="7315200" cy="274320"/>
+            <a:ext cx="9144000" cy="274320"/>
           </a:xfrm>
           <a:prstGeom prst="rect">
             <a:avLst/>
@@ -5282,7 +6052,7 @@
                 <a:ea typeface="Calibri" pitchFamily="34" charset="-122"/>
                 <a:cs typeface="Calibri" pitchFamily="34" charset="-120"/>
               </a:rPr>
-              <a:t>ÜBUNG 2</a:t>
+              <a:t>WAHR ODER FALSCH? · ANTWORT 3 VON 4</a:t>
             </a:r>
             <a:endParaRPr lang="en-US" sz="1300" dirty="0"/>
           </a:p>
@@ -5315,13 +6085,13 @@
             <a:r>
               <a:rPr lang="en-US" sz="3400" b="1" dirty="0">
                 <a:solidFill>
-                  <a:srgbClr val="1E2761"/>
+                  <a:srgbClr val="2E9E6B"/>
                 </a:solidFill>
                 <a:latin typeface="Cambria" pitchFamily="34" charset="0"/>
                 <a:ea typeface="Cambria" pitchFamily="34" charset="-122"/>
                 <a:cs typeface="Cambria" pitchFamily="34" charset="-120"/>
               </a:rPr>
-              <a:t>Absolutismus – ja oder nein?</a:t>
+              <a:t>Wahr</a:t>
             </a:r>
             <a:endParaRPr lang="en-US" sz="3400" dirty="0"/>
           </a:p>
@@ -5335,78 +6105,85 @@
         </p:nvSpPr>
         <p:spPr>
           <a:xfrm>
-            <a:off x="548640" y="1371600"/>
-            <a:ext cx="11109960" cy="2148840"/>
+            <a:off x="548640" y="1600200"/>
+            <a:ext cx="11109960" cy="1371600"/>
           </a:xfrm>
           <a:prstGeom prst="roundRect">
             <a:avLst>
-              <a:gd name="adj" fmla="val 3404"/>
+              <a:gd name="adj" fmla="val 5333"/>
             </a:avLst>
           </a:prstGeom>
           <a:solidFill>
-            <a:srgbClr val="EAF0FA"/>
+            <a:srgbClr val="F4F7FD"/>
           </a:solidFill>
           <a:ln/>
         </p:spPr>
       </p:sp>
       <p:sp>
         <p:nvSpPr>
-          <p:cNvPr id="5" name="Shape 3"/>
+          <p:cNvPr id="5" name="Text 3"/>
+          <p:cNvSpPr txBox="1"/>
+          <p:nvPr/>
+        </p:nvSpPr>
+        <p:spPr>
+          <a:xfrm>
+            <a:off x="914400" y="1600200"/>
+            <a:ext cx="10424160" cy="1371600"/>
+          </a:xfrm>
+          <a:prstGeom prst="rect">
+            <a:avLst/>
+          </a:prstGeom>
+          <a:noFill/>
+          <a:ln/>
+        </p:spPr>
+        <p:txBody>
+          <a:bodyPr wrap="square" lIns="0" tIns="0" rIns="0" bIns="0" rtlCol="0" anchor="ctr"/>
+          <a:lstStyle/>
+          <a:p>
+            <a:pPr indent="0" marL="0">
+              <a:buNone/>
+            </a:pPr>
+            <a:r>
+              <a:rPr lang="en-US" sz="2400" dirty="0">
+                <a:solidFill>
+                  <a:srgbClr val="5B6B8C"/>
+                </a:solidFill>
+                <a:latin typeface="Cambria" pitchFamily="34" charset="0"/>
+                <a:ea typeface="Cambria" pitchFamily="34" charset="-122"/>
+                <a:cs typeface="Cambria" pitchFamily="34" charset="-120"/>
+              </a:rPr>
+              <a:t>Ludwig XIV. verzichtete auf Söldner und baute ein stehendes Heer auf.</a:t>
+            </a:r>
+            <a:endParaRPr lang="en-US" sz="2400" dirty="0"/>
+          </a:p>
+        </p:txBody>
+      </p:sp>
+      <p:sp>
+        <p:nvSpPr>
+          <p:cNvPr id="6" name="Shape 4"/>
           <p:cNvSpPr/>
           <p:nvPr/>
         </p:nvSpPr>
         <p:spPr>
           <a:xfrm>
-            <a:off x="731520" y="1517904"/>
-            <a:ext cx="384048" cy="384048"/>
-          </a:xfrm>
-          <a:prstGeom prst="ellipse">
-            <a:avLst/>
+            <a:off x="548640" y="3154680"/>
+            <a:ext cx="11109960" cy="2377440"/>
+          </a:xfrm>
+          <a:prstGeom prst="roundRect">
+            <a:avLst>
+              <a:gd name="adj" fmla="val 3077"/>
+            </a:avLst>
           </a:prstGeom>
           <a:solidFill>
-            <a:srgbClr val="1E2761"/>
+            <a:srgbClr val="FFFFFF"/>
           </a:solidFill>
-          <a:ln/>
-        </p:spPr>
-      </p:sp>
-      <p:sp>
-        <p:nvSpPr>
-          <p:cNvPr id="6" name="Text 4"/>
-          <p:cNvSpPr txBox="1"/>
-          <p:nvPr/>
-        </p:nvSpPr>
-        <p:spPr>
-          <a:xfrm>
-            <a:off x="731520" y="1517904"/>
-            <a:ext cx="384048" cy="384048"/>
-          </a:xfrm>
-          <a:prstGeom prst="rect">
-            <a:avLst/>
-          </a:prstGeom>
-          <a:noFill/>
-          <a:ln/>
-        </p:spPr>
-        <p:txBody>
-          <a:bodyPr wrap="square" lIns="0" tIns="0" rIns="0" bIns="0" rtlCol="0" anchor="ctr"/>
-          <a:lstStyle/>
-          <a:p>
-            <a:pPr algn="ctr" indent="0" marL="0">
-              <a:buNone/>
-            </a:pPr>
-            <a:r>
-              <a:rPr lang="en-US" sz="1800" b="1" dirty="0">
-                <a:solidFill>
-                  <a:srgbClr val="FFFFFF"/>
-                </a:solidFill>
-                <a:latin typeface="Calibri" pitchFamily="34" charset="0"/>
-                <a:ea typeface="Calibri" pitchFamily="34" charset="-122"/>
-                <a:cs typeface="Calibri" pitchFamily="34" charset="-120"/>
-              </a:rPr>
-              <a:t>1</a:t>
-            </a:r>
-            <a:endParaRPr lang="en-US" sz="1800" dirty="0"/>
-          </a:p>
-        </p:txBody>
+          <a:ln w="38100">
+            <a:solidFill>
+              <a:srgbClr val="2E9E6B"/>
+            </a:solidFill>
+            <a:prstDash val="solid"/>
+          </a:ln>
+        </p:spPr>
       </p:sp>
       <p:sp>
         <p:nvSpPr>
@@ -5416,8 +6193,8 @@
         </p:nvSpPr>
         <p:spPr>
           <a:xfrm>
-            <a:off x="1280160" y="1481328"/>
-            <a:ext cx="10241280" cy="457200"/>
+            <a:off x="914400" y="3291840"/>
+            <a:ext cx="5486400" cy="365760"/>
           </a:xfrm>
           <a:prstGeom prst="rect">
             <a:avLst/>
@@ -5435,217 +6212,60 @@
             <a:r>
               <a:rPr lang="en-US" sz="2400" b="1" dirty="0">
                 <a:solidFill>
+                  <a:srgbClr val="2E9E6B"/>
+                </a:solidFill>
+                <a:latin typeface="Cambria" pitchFamily="34" charset="0"/>
+                <a:ea typeface="Cambria" pitchFamily="34" charset="-122"/>
+                <a:cs typeface="Cambria" pitchFamily="34" charset="-120"/>
+              </a:rPr>
+              <a:t>Begründung</a:t>
+            </a:r>
+            <a:endParaRPr lang="en-US" sz="2400" dirty="0"/>
+          </a:p>
+        </p:txBody>
+      </p:sp>
+      <p:sp>
+        <p:nvSpPr>
+          <p:cNvPr id="8" name="Text 6"/>
+          <p:cNvSpPr txBox="1"/>
+          <p:nvPr/>
+        </p:nvSpPr>
+        <p:spPr>
+          <a:xfrm>
+            <a:off x="914400" y="3749040"/>
+            <a:ext cx="10424160" cy="1737360"/>
+          </a:xfrm>
+          <a:prstGeom prst="rect">
+            <a:avLst/>
+          </a:prstGeom>
+          <a:noFill/>
+          <a:ln/>
+        </p:spPr>
+        <p:txBody>
+          <a:bodyPr wrap="square" lIns="0" tIns="0" rIns="0" bIns="0" rtlCol="0" anchor="t"/>
+          <a:lstStyle/>
+          <a:p>
+            <a:pPr indent="0" marL="0">
+              <a:buNone/>
+            </a:pPr>
+            <a:r>
+              <a:rPr lang="en-US" sz="2600" dirty="0">
+                <a:solidFill>
                   <a:srgbClr val="1E2761"/>
                 </a:solidFill>
-                <a:latin typeface="Calibri" pitchFamily="34" charset="0"/>
-                <a:ea typeface="Calibri" pitchFamily="34" charset="-122"/>
-                <a:cs typeface="Calibri" pitchFamily="34" charset="-120"/>
-              </a:rPr>
-              <a:t>Schreibe Ü2 an den Rand.</a:t>
-            </a:r>
-            <a:endParaRPr lang="en-US" sz="2400" dirty="0"/>
-          </a:p>
-        </p:txBody>
-      </p:sp>
-      <p:sp>
-        <p:nvSpPr>
-          <p:cNvPr id="8" name="Shape 6"/>
-          <p:cNvSpPr/>
-          <p:nvPr/>
-        </p:nvSpPr>
-        <p:spPr>
-          <a:xfrm>
-            <a:off x="731520" y="2048256"/>
-            <a:ext cx="384048" cy="384048"/>
-          </a:xfrm>
-          <a:prstGeom prst="ellipse">
-            <a:avLst/>
-          </a:prstGeom>
-          <a:solidFill>
-            <a:srgbClr val="1E2761"/>
-          </a:solidFill>
-          <a:ln/>
-        </p:spPr>
-      </p:sp>
-      <p:sp>
-        <p:nvSpPr>
-          <p:cNvPr id="9" name="Text 7"/>
-          <p:cNvSpPr txBox="1"/>
-          <p:nvPr/>
-        </p:nvSpPr>
-        <p:spPr>
-          <a:xfrm>
-            <a:off x="731520" y="2048256"/>
-            <a:ext cx="384048" cy="384048"/>
-          </a:xfrm>
-          <a:prstGeom prst="rect">
-            <a:avLst/>
-          </a:prstGeom>
-          <a:noFill/>
-          <a:ln/>
-        </p:spPr>
-        <p:txBody>
-          <a:bodyPr wrap="square" lIns="0" tIns="0" rIns="0" bIns="0" rtlCol="0" anchor="ctr"/>
-          <a:lstStyle/>
-          <a:p>
-            <a:pPr algn="ctr" indent="0" marL="0">
-              <a:buNone/>
-            </a:pPr>
-            <a:r>
-              <a:rPr lang="en-US" sz="1800" b="1" dirty="0">
-                <a:solidFill>
-                  <a:srgbClr val="FFFFFF"/>
-                </a:solidFill>
-                <a:latin typeface="Calibri" pitchFamily="34" charset="0"/>
-                <a:ea typeface="Calibri" pitchFamily="34" charset="-122"/>
-                <a:cs typeface="Calibri" pitchFamily="34" charset="-120"/>
-              </a:rPr>
-              <a:t>2</a:t>
-            </a:r>
-            <a:endParaRPr lang="en-US" sz="1800" dirty="0"/>
-          </a:p>
-        </p:txBody>
-      </p:sp>
-      <p:sp>
-        <p:nvSpPr>
-          <p:cNvPr id="10" name="Text 8"/>
-          <p:cNvSpPr txBox="1"/>
-          <p:nvPr/>
-        </p:nvSpPr>
-        <p:spPr>
-          <a:xfrm>
-            <a:off x="1280160" y="2011680"/>
-            <a:ext cx="10241280" cy="868680"/>
-          </a:xfrm>
-          <a:prstGeom prst="rect">
-            <a:avLst/>
-          </a:prstGeom>
-          <a:noFill/>
-          <a:ln/>
-        </p:spPr>
-        <p:txBody>
-          <a:bodyPr wrap="square" lIns="0" tIns="0" rIns="0" bIns="0" rtlCol="0" anchor="t"/>
-          <a:lstStyle/>
-          <a:p>
-            <a:pPr indent="0" marL="0">
-              <a:buNone/>
-            </a:pPr>
-            <a:r>
-              <a:rPr lang="en-US" sz="2400" b="1" dirty="0">
-                <a:solidFill>
-                  <a:srgbClr val="1E2761"/>
-                </a:solidFill>
-                <a:latin typeface="Calibri" pitchFamily="34" charset="0"/>
-                <a:ea typeface="Calibri" pitchFamily="34" charset="-122"/>
-                <a:cs typeface="Calibri" pitchFamily="34" charset="-120"/>
-              </a:rPr>
-              <a:t>Schreibe Nummer + „Absolutismus“ oder „kein Absolutismus“.</a:t>
-            </a:r>
-            <a:endParaRPr lang="en-US" sz="2400" dirty="0"/>
-          </a:p>
-        </p:txBody>
-      </p:sp>
-      <p:sp>
-        <p:nvSpPr>
-          <p:cNvPr id="11" name="Shape 9"/>
-          <p:cNvSpPr/>
-          <p:nvPr/>
-        </p:nvSpPr>
-        <p:spPr>
-          <a:xfrm>
-            <a:off x="731520" y="2990088"/>
-            <a:ext cx="384048" cy="384048"/>
-          </a:xfrm>
-          <a:prstGeom prst="ellipse">
-            <a:avLst/>
-          </a:prstGeom>
-          <a:solidFill>
-            <a:srgbClr val="1E2761"/>
-          </a:solidFill>
-          <a:ln/>
-        </p:spPr>
-      </p:sp>
-      <p:sp>
-        <p:nvSpPr>
-          <p:cNvPr id="12" name="Text 10"/>
-          <p:cNvSpPr txBox="1"/>
-          <p:nvPr/>
-        </p:nvSpPr>
-        <p:spPr>
-          <a:xfrm>
-            <a:off x="731520" y="2990088"/>
-            <a:ext cx="384048" cy="384048"/>
-          </a:xfrm>
-          <a:prstGeom prst="rect">
-            <a:avLst/>
-          </a:prstGeom>
-          <a:noFill/>
-          <a:ln/>
-        </p:spPr>
-        <p:txBody>
-          <a:bodyPr wrap="square" lIns="0" tIns="0" rIns="0" bIns="0" rtlCol="0" anchor="ctr"/>
-          <a:lstStyle/>
-          <a:p>
-            <a:pPr algn="ctr" indent="0" marL="0">
-              <a:buNone/>
-            </a:pPr>
-            <a:r>
-              <a:rPr lang="en-US" sz="1800" b="1" dirty="0">
-                <a:solidFill>
-                  <a:srgbClr val="FFFFFF"/>
-                </a:solidFill>
-                <a:latin typeface="Calibri" pitchFamily="34" charset="0"/>
-                <a:ea typeface="Calibri" pitchFamily="34" charset="-122"/>
-                <a:cs typeface="Calibri" pitchFamily="34" charset="-120"/>
-              </a:rPr>
-              <a:t>3</a:t>
-            </a:r>
-            <a:endParaRPr lang="en-US" sz="1800" dirty="0"/>
-          </a:p>
-        </p:txBody>
-      </p:sp>
-      <p:sp>
-        <p:nvSpPr>
-          <p:cNvPr id="13" name="Text 11"/>
-          <p:cNvSpPr txBox="1"/>
-          <p:nvPr/>
-        </p:nvSpPr>
-        <p:spPr>
-          <a:xfrm>
-            <a:off x="1280160" y="2953512"/>
-            <a:ext cx="10241280" cy="457200"/>
-          </a:xfrm>
-          <a:prstGeom prst="rect">
-            <a:avLst/>
-          </a:prstGeom>
-          <a:noFill/>
-          <a:ln/>
-        </p:spPr>
-        <p:txBody>
-          <a:bodyPr wrap="square" lIns="0" tIns="0" rIns="0" bIns="0" rtlCol="0" anchor="t"/>
-          <a:lstStyle/>
-          <a:p>
-            <a:pPr indent="0" marL="0">
-              <a:buNone/>
-            </a:pPr>
-            <a:r>
-              <a:rPr lang="en-US" sz="2400" b="1" dirty="0">
-                <a:solidFill>
-                  <a:srgbClr val="1E2761"/>
-                </a:solidFill>
-                <a:latin typeface="Calibri" pitchFamily="34" charset="0"/>
-                <a:ea typeface="Calibri" pitchFamily="34" charset="-122"/>
-                <a:cs typeface="Calibri" pitchFamily="34" charset="-120"/>
-              </a:rPr>
-              <a:t>Begründe mit dem Test: Kann jemand den König stoppen?</a:t>
-            </a:r>
-            <a:endParaRPr lang="en-US" sz="2400" dirty="0"/>
-          </a:p>
-        </p:txBody>
-      </p:sp>
-      <p:sp>
-        <p:nvSpPr>
-          <p:cNvPr id="14" name="Shape 12"/>
+                <a:latin typeface="Cambria" pitchFamily="34" charset="0"/>
+                <a:ea typeface="Cambria" pitchFamily="34" charset="-122"/>
+                <a:cs typeface="Cambria" pitchFamily="34" charset="-120"/>
+              </a:rPr>
+              <a:t>Säule Heer: einheitlich bewaffnet und uniformiert, in Kasernen, direkt dem König unterstellt – bis zu 400 000 Mann.</a:t>
+            </a:r>
+            <a:endParaRPr lang="en-US" sz="2600" dirty="0"/>
+          </a:p>
+        </p:txBody>
+      </p:sp>
+      <p:sp>
+        <p:nvSpPr>
+          <p:cNvPr id="9" name="Shape 7"/>
           <p:cNvSpPr/>
           <p:nvPr/>
         </p:nvSpPr>
@@ -5667,7 +6287,7 @@
       </p:sp>
       <p:sp>
         <p:nvSpPr>
-          <p:cNvPr id="15" name="Text 13"/>
+          <p:cNvPr id="10" name="Text 8"/>
           <p:cNvSpPr txBox="1"/>
           <p:nvPr/>
         </p:nvSpPr>
@@ -5698,7 +6318,7 @@
                 <a:ea typeface="Calibri" pitchFamily="34" charset="-122"/>
                 <a:cs typeface="Calibri" pitchFamily="34" charset="-120"/>
               </a:rPr>
-              <a:t>Zeit: </a:t>
+              <a:t>Vergleiche: </a:t>
             </a:r>
             <a:pPr indent="0" marL="0">
               <a:buNone/>
@@ -5712,21 +6332,7 @@
                 <a:ea typeface="Calibri" pitchFamily="34" charset="-122"/>
                 <a:cs typeface="Calibri" pitchFamily="34" charset="-120"/>
               </a:rPr>
-              <a:t>3 Minuten · allein · leise      </a:t>
-            </a:r>
-            <a:pPr indent="0" marL="0">
-              <a:buNone/>
-            </a:pPr>
-            <a:r>
-              <a:rPr lang="en-US" sz="2400" i="1" dirty="0">
-                <a:solidFill>
-                  <a:srgbClr val="CADCFC"/>
-                </a:solidFill>
-                <a:latin typeface="Calibri" pitchFamily="34" charset="0"/>
-                <a:ea typeface="Calibri" pitchFamily="34" charset="-122"/>
-                <a:cs typeface="Calibri" pitchFamily="34" charset="-120"/>
-              </a:rPr>
-              <a:t>Fertig? Stift hinlegen und noch einmal durchlesen.</a:t>
+              <a:t>Stimmt deine Begründung mit der Folie überein?</a:t>
             </a:r>
             <a:endParaRPr lang="en-US" sz="2400" dirty="0"/>
           </a:p>
@@ -5734,7 +6340,7 @@
       </p:sp>
       <p:sp>
         <p:nvSpPr>
-          <p:cNvPr id="16" name="Text 14"/>
+          <p:cNvPr id="11" name="Text 9"/>
           <p:cNvSpPr txBox="1"/>
           <p:nvPr/>
         </p:nvSpPr>
@@ -5773,7 +6379,7 @@
       </p:sp>
       <p:sp>
         <p:nvSpPr>
-          <p:cNvPr id="17" name="Text 15"/>
+          <p:cNvPr id="12" name="Text 10"/>
           <p:cNvSpPr txBox="1"/>
           <p:nvPr/>
         </p:nvSpPr>
@@ -5807,486 +6413,6 @@
               <a:t>16</a:t>
             </a:r>
             <a:endParaRPr lang="en-US" sz="1000" dirty="0"/>
-          </a:p>
-        </p:txBody>
-      </p:sp>
-      <p:sp>
-        <p:nvSpPr>
-          <p:cNvPr id="19" name="Shape 16"/>
-          <p:cNvSpPr/>
-          <p:nvPr/>
-        </p:nvSpPr>
-        <p:spPr>
-          <a:xfrm>
-            <a:off x="548640" y="3703320"/>
-            <a:ext cx="11109960" cy="395478"/>
-          </a:xfrm>
-          <a:prstGeom prst="roundRect">
-            <a:avLst>
-              <a:gd name="adj" fmla="val 18497"/>
-            </a:avLst>
-          </a:prstGeom>
-          <a:solidFill>
-            <a:srgbClr val="F4F7FD"/>
-          </a:solidFill>
-          <a:ln/>
-        </p:spPr>
-      </p:sp>
-      <p:sp>
-        <p:nvSpPr>
-          <p:cNvPr id="20" name="Shape 17"/>
-          <p:cNvSpPr/>
-          <p:nvPr/>
-        </p:nvSpPr>
-        <p:spPr>
-          <a:xfrm>
-            <a:off x="685800" y="3718179"/>
-            <a:ext cx="365760" cy="365760"/>
-          </a:xfrm>
-          <a:prstGeom prst="ellipse">
-            <a:avLst/>
-          </a:prstGeom>
-          <a:solidFill>
-            <a:srgbClr val="D9534F"/>
-          </a:solidFill>
-          <a:ln/>
-        </p:spPr>
-      </p:sp>
-      <p:sp>
-        <p:nvSpPr>
-          <p:cNvPr id="21" name="Text 18"/>
-          <p:cNvSpPr txBox="1"/>
-          <p:nvPr/>
-        </p:nvSpPr>
-        <p:spPr>
-          <a:xfrm>
-            <a:off x="685800" y="3718179"/>
-            <a:ext cx="365760" cy="365760"/>
-          </a:xfrm>
-          <a:prstGeom prst="rect">
-            <a:avLst/>
-          </a:prstGeom>
-          <a:noFill/>
-          <a:ln/>
-        </p:spPr>
-        <p:txBody>
-          <a:bodyPr wrap="square" lIns="0" tIns="0" rIns="0" bIns="0" rtlCol="0" anchor="ctr"/>
-          <a:lstStyle/>
-          <a:p>
-            <a:pPr algn="ctr" indent="0" marL="0">
-              <a:buNone/>
-            </a:pPr>
-            <a:r>
-              <a:rPr lang="en-US" sz="1800" b="1" dirty="0">
-                <a:solidFill>
-                  <a:srgbClr val="FFFFFF"/>
-                </a:solidFill>
-                <a:latin typeface="Calibri" pitchFamily="34" charset="0"/>
-                <a:ea typeface="Calibri" pitchFamily="34" charset="-122"/>
-                <a:cs typeface="Calibri" pitchFamily="34" charset="-120"/>
-              </a:rPr>
-              <a:t>1</a:t>
-            </a:r>
-            <a:endParaRPr lang="en-US" sz="1800" dirty="0"/>
-          </a:p>
-        </p:txBody>
-      </p:sp>
-      <p:sp>
-        <p:nvSpPr>
-          <p:cNvPr id="22" name="Text 19"/>
-          <p:cNvSpPr txBox="1"/>
-          <p:nvPr/>
-        </p:nvSpPr>
-        <p:spPr>
-          <a:xfrm>
-            <a:off x="1280160" y="3703320"/>
-            <a:ext cx="10241280" cy="395478"/>
-          </a:xfrm>
-          <a:prstGeom prst="rect">
-            <a:avLst/>
-          </a:prstGeom>
-          <a:noFill/>
-          <a:ln/>
-        </p:spPr>
-        <p:txBody>
-          <a:bodyPr wrap="square" lIns="0" tIns="0" rIns="0" bIns="0" rtlCol="0" anchor="ctr"/>
-          <a:lstStyle/>
-          <a:p>
-            <a:pPr indent="0" marL="0">
-              <a:buNone/>
-            </a:pPr>
-            <a:r>
-              <a:rPr lang="en-US" sz="2200" dirty="0">
-                <a:solidFill>
-                  <a:srgbClr val="1E2761"/>
-                </a:solidFill>
-                <a:latin typeface="Cambria" pitchFamily="34" charset="0"/>
-                <a:ea typeface="Cambria" pitchFamily="34" charset="-122"/>
-                <a:cs typeface="Cambria" pitchFamily="34" charset="-120"/>
-              </a:rPr>
-              <a:t>Der König entscheidet allein über Gesetze, Krieg und Steuern.</a:t>
-            </a:r>
-            <a:endParaRPr lang="en-US" sz="2200" dirty="0"/>
-          </a:p>
-        </p:txBody>
-      </p:sp>
-      <p:sp>
-        <p:nvSpPr>
-          <p:cNvPr id="23" name="Shape 20"/>
-          <p:cNvSpPr/>
-          <p:nvPr/>
-        </p:nvSpPr>
-        <p:spPr>
-          <a:xfrm>
-            <a:off x="548640" y="4171950"/>
-            <a:ext cx="11109960" cy="395478"/>
-          </a:xfrm>
-          <a:prstGeom prst="roundRect">
-            <a:avLst>
-              <a:gd name="adj" fmla="val 18497"/>
-            </a:avLst>
-          </a:prstGeom>
-          <a:solidFill>
-            <a:srgbClr val="F4F7FD"/>
-          </a:solidFill>
-          <a:ln/>
-        </p:spPr>
-      </p:sp>
-      <p:sp>
-        <p:nvSpPr>
-          <p:cNvPr id="24" name="Shape 21"/>
-          <p:cNvSpPr/>
-          <p:nvPr/>
-        </p:nvSpPr>
-        <p:spPr>
-          <a:xfrm>
-            <a:off x="685800" y="4186809"/>
-            <a:ext cx="365760" cy="365760"/>
-          </a:xfrm>
-          <a:prstGeom prst="ellipse">
-            <a:avLst/>
-          </a:prstGeom>
-          <a:solidFill>
-            <a:srgbClr val="D9534F"/>
-          </a:solidFill>
-          <a:ln/>
-        </p:spPr>
-      </p:sp>
-      <p:sp>
-        <p:nvSpPr>
-          <p:cNvPr id="25" name="Text 22"/>
-          <p:cNvSpPr txBox="1"/>
-          <p:nvPr/>
-        </p:nvSpPr>
-        <p:spPr>
-          <a:xfrm>
-            <a:off x="685800" y="4186809"/>
-            <a:ext cx="365760" cy="365760"/>
-          </a:xfrm>
-          <a:prstGeom prst="rect">
-            <a:avLst/>
-          </a:prstGeom>
-          <a:noFill/>
-          <a:ln/>
-        </p:spPr>
-        <p:txBody>
-          <a:bodyPr wrap="square" lIns="0" tIns="0" rIns="0" bIns="0" rtlCol="0" anchor="ctr"/>
-          <a:lstStyle/>
-          <a:p>
-            <a:pPr algn="ctr" indent="0" marL="0">
-              <a:buNone/>
-            </a:pPr>
-            <a:r>
-              <a:rPr lang="en-US" sz="1800" b="1" dirty="0">
-                <a:solidFill>
-                  <a:srgbClr val="FFFFFF"/>
-                </a:solidFill>
-                <a:latin typeface="Calibri" pitchFamily="34" charset="0"/>
-                <a:ea typeface="Calibri" pitchFamily="34" charset="-122"/>
-                <a:cs typeface="Calibri" pitchFamily="34" charset="-120"/>
-              </a:rPr>
-              <a:t>2</a:t>
-            </a:r>
-            <a:endParaRPr lang="en-US" sz="1800" dirty="0"/>
-          </a:p>
-        </p:txBody>
-      </p:sp>
-      <p:sp>
-        <p:nvSpPr>
-          <p:cNvPr id="26" name="Text 23"/>
-          <p:cNvSpPr txBox="1"/>
-          <p:nvPr/>
-        </p:nvSpPr>
-        <p:spPr>
-          <a:xfrm>
-            <a:off x="1280160" y="4171950"/>
-            <a:ext cx="10241280" cy="395478"/>
-          </a:xfrm>
-          <a:prstGeom prst="rect">
-            <a:avLst/>
-          </a:prstGeom>
-          <a:noFill/>
-          <a:ln/>
-        </p:spPr>
-        <p:txBody>
-          <a:bodyPr wrap="square" lIns="0" tIns="0" rIns="0" bIns="0" rtlCol="0" anchor="ctr"/>
-          <a:lstStyle/>
-          <a:p>
-            <a:pPr indent="0" marL="0">
-              <a:buNone/>
-            </a:pPr>
-            <a:r>
-              <a:rPr lang="en-US" sz="2200" dirty="0">
-                <a:solidFill>
-                  <a:srgbClr val="1E2761"/>
-                </a:solidFill>
-                <a:latin typeface="Cambria" pitchFamily="34" charset="0"/>
-                <a:ea typeface="Cambria" pitchFamily="34" charset="-122"/>
-                <a:cs typeface="Cambria" pitchFamily="34" charset="-120"/>
-              </a:rPr>
-              <a:t>Ein Parlament kann Steuererhöhungen des Königs verbieten.</a:t>
-            </a:r>
-            <a:endParaRPr lang="en-US" sz="2200" dirty="0"/>
-          </a:p>
-        </p:txBody>
-      </p:sp>
-      <p:sp>
-        <p:nvSpPr>
-          <p:cNvPr id="27" name="Shape 24"/>
-          <p:cNvSpPr/>
-          <p:nvPr/>
-        </p:nvSpPr>
-        <p:spPr>
-          <a:xfrm>
-            <a:off x="548640" y="4640580"/>
-            <a:ext cx="11109960" cy="395478"/>
-          </a:xfrm>
-          <a:prstGeom prst="roundRect">
-            <a:avLst>
-              <a:gd name="adj" fmla="val 18497"/>
-            </a:avLst>
-          </a:prstGeom>
-          <a:solidFill>
-            <a:srgbClr val="F4F7FD"/>
-          </a:solidFill>
-          <a:ln/>
-        </p:spPr>
-      </p:sp>
-      <p:sp>
-        <p:nvSpPr>
-          <p:cNvPr id="28" name="Shape 25"/>
-          <p:cNvSpPr/>
-          <p:nvPr/>
-        </p:nvSpPr>
-        <p:spPr>
-          <a:xfrm>
-            <a:off x="685800" y="4655439"/>
-            <a:ext cx="365760" cy="365760"/>
-          </a:xfrm>
-          <a:prstGeom prst="ellipse">
-            <a:avLst/>
-          </a:prstGeom>
-          <a:solidFill>
-            <a:srgbClr val="D9534F"/>
-          </a:solidFill>
-          <a:ln/>
-        </p:spPr>
-      </p:sp>
-      <p:sp>
-        <p:nvSpPr>
-          <p:cNvPr id="29" name="Text 26"/>
-          <p:cNvSpPr txBox="1"/>
-          <p:nvPr/>
-        </p:nvSpPr>
-        <p:spPr>
-          <a:xfrm>
-            <a:off x="685800" y="4655439"/>
-            <a:ext cx="365760" cy="365760"/>
-          </a:xfrm>
-          <a:prstGeom prst="rect">
-            <a:avLst/>
-          </a:prstGeom>
-          <a:noFill/>
-          <a:ln/>
-        </p:spPr>
-        <p:txBody>
-          <a:bodyPr wrap="square" lIns="0" tIns="0" rIns="0" bIns="0" rtlCol="0" anchor="ctr"/>
-          <a:lstStyle/>
-          <a:p>
-            <a:pPr algn="ctr" indent="0" marL="0">
-              <a:buNone/>
-            </a:pPr>
-            <a:r>
-              <a:rPr lang="en-US" sz="1800" b="1" dirty="0">
-                <a:solidFill>
-                  <a:srgbClr val="FFFFFF"/>
-                </a:solidFill>
-                <a:latin typeface="Calibri" pitchFamily="34" charset="0"/>
-                <a:ea typeface="Calibri" pitchFamily="34" charset="-122"/>
-                <a:cs typeface="Calibri" pitchFamily="34" charset="-120"/>
-              </a:rPr>
-              <a:t>3</a:t>
-            </a:r>
-            <a:endParaRPr lang="en-US" sz="1800" dirty="0"/>
-          </a:p>
-        </p:txBody>
-      </p:sp>
-      <p:sp>
-        <p:nvSpPr>
-          <p:cNvPr id="30" name="Text 27"/>
-          <p:cNvSpPr txBox="1"/>
-          <p:nvPr/>
-        </p:nvSpPr>
-        <p:spPr>
-          <a:xfrm>
-            <a:off x="1280160" y="4640580"/>
-            <a:ext cx="10241280" cy="395478"/>
-          </a:xfrm>
-          <a:prstGeom prst="rect">
-            <a:avLst/>
-          </a:prstGeom>
-          <a:noFill/>
-          <a:ln/>
-        </p:spPr>
-        <p:txBody>
-          <a:bodyPr wrap="square" lIns="0" tIns="0" rIns="0" bIns="0" rtlCol="0" anchor="ctr"/>
-          <a:lstStyle/>
-          <a:p>
-            <a:pPr indent="0" marL="0">
-              <a:buNone/>
-            </a:pPr>
-            <a:r>
-              <a:rPr lang="en-US" sz="2200" dirty="0">
-                <a:solidFill>
-                  <a:srgbClr val="1E2761"/>
-                </a:solidFill>
-                <a:latin typeface="Cambria" pitchFamily="34" charset="0"/>
-                <a:ea typeface="Cambria" pitchFamily="34" charset="-122"/>
-                <a:cs typeface="Cambria" pitchFamily="34" charset="-120"/>
-              </a:rPr>
-              <a:t>Beamte handeln im Namen des Königs und müssen ihm gehorchen.</a:t>
-            </a:r>
-            <a:endParaRPr lang="en-US" sz="2200" dirty="0"/>
-          </a:p>
-        </p:txBody>
-      </p:sp>
-      <p:sp>
-        <p:nvSpPr>
-          <p:cNvPr id="31" name="Shape 28"/>
-          <p:cNvSpPr/>
-          <p:nvPr/>
-        </p:nvSpPr>
-        <p:spPr>
-          <a:xfrm>
-            <a:off x="548640" y="5109210"/>
-            <a:ext cx="11109960" cy="395478"/>
-          </a:xfrm>
-          <a:prstGeom prst="roundRect">
-            <a:avLst>
-              <a:gd name="adj" fmla="val 18497"/>
-            </a:avLst>
-          </a:prstGeom>
-          <a:solidFill>
-            <a:srgbClr val="F4F7FD"/>
-          </a:solidFill>
-          <a:ln/>
-        </p:spPr>
-      </p:sp>
-      <p:sp>
-        <p:nvSpPr>
-          <p:cNvPr id="32" name="Shape 29"/>
-          <p:cNvSpPr/>
-          <p:nvPr/>
-        </p:nvSpPr>
-        <p:spPr>
-          <a:xfrm>
-            <a:off x="685800" y="5124069"/>
-            <a:ext cx="365760" cy="365760"/>
-          </a:xfrm>
-          <a:prstGeom prst="ellipse">
-            <a:avLst/>
-          </a:prstGeom>
-          <a:solidFill>
-            <a:srgbClr val="D9534F"/>
-          </a:solidFill>
-          <a:ln/>
-        </p:spPr>
-      </p:sp>
-      <p:sp>
-        <p:nvSpPr>
-          <p:cNvPr id="33" name="Text 30"/>
-          <p:cNvSpPr txBox="1"/>
-          <p:nvPr/>
-        </p:nvSpPr>
-        <p:spPr>
-          <a:xfrm>
-            <a:off x="685800" y="5124069"/>
-            <a:ext cx="365760" cy="365760"/>
-          </a:xfrm>
-          <a:prstGeom prst="rect">
-            <a:avLst/>
-          </a:prstGeom>
-          <a:noFill/>
-          <a:ln/>
-        </p:spPr>
-        <p:txBody>
-          <a:bodyPr wrap="square" lIns="0" tIns="0" rIns="0" bIns="0" rtlCol="0" anchor="ctr"/>
-          <a:lstStyle/>
-          <a:p>
-            <a:pPr algn="ctr" indent="0" marL="0">
-              <a:buNone/>
-            </a:pPr>
-            <a:r>
-              <a:rPr lang="en-US" sz="1800" b="1" dirty="0">
-                <a:solidFill>
-                  <a:srgbClr val="FFFFFF"/>
-                </a:solidFill>
-                <a:latin typeface="Calibri" pitchFamily="34" charset="0"/>
-                <a:ea typeface="Calibri" pitchFamily="34" charset="-122"/>
-                <a:cs typeface="Calibri" pitchFamily="34" charset="-120"/>
-              </a:rPr>
-              <a:t>4</a:t>
-            </a:r>
-            <a:endParaRPr lang="en-US" sz="1800" dirty="0"/>
-          </a:p>
-        </p:txBody>
-      </p:sp>
-      <p:sp>
-        <p:nvSpPr>
-          <p:cNvPr id="34" name="Text 31"/>
-          <p:cNvSpPr txBox="1"/>
-          <p:nvPr/>
-        </p:nvSpPr>
-        <p:spPr>
-          <a:xfrm>
-            <a:off x="1280160" y="5109210"/>
-            <a:ext cx="10241280" cy="395478"/>
-          </a:xfrm>
-          <a:prstGeom prst="rect">
-            <a:avLst/>
-          </a:prstGeom>
-          <a:noFill/>
-          <a:ln/>
-        </p:spPr>
-        <p:txBody>
-          <a:bodyPr wrap="square" lIns="0" tIns="0" rIns="0" bIns="0" rtlCol="0" anchor="ctr"/>
-          <a:lstStyle/>
-          <a:p>
-            <a:pPr indent="0" marL="0">
-              <a:buNone/>
-            </a:pPr>
-            <a:r>
-              <a:rPr lang="en-US" sz="2200" dirty="0">
-                <a:solidFill>
-                  <a:srgbClr val="1E2761"/>
-                </a:solidFill>
-                <a:latin typeface="Cambria" pitchFamily="34" charset="0"/>
-                <a:ea typeface="Cambria" pitchFamily="34" charset="-122"/>
-                <a:cs typeface="Cambria" pitchFamily="34" charset="-120"/>
-              </a:rPr>
-              <a:t>Die Bürger wählen alle vier Jahre ihre Regierung.</a:t>
-            </a:r>
-            <a:endParaRPr lang="en-US" sz="2200" dirty="0"/>
           </a:p>
         </p:txBody>
       </p:sp>
@@ -6331,7 +6457,7 @@
         <p:spPr>
           <a:xfrm>
             <a:off x="548640" y="320040"/>
-            <a:ext cx="7315200" cy="274320"/>
+            <a:ext cx="9144000" cy="274320"/>
           </a:xfrm>
           <a:prstGeom prst="rect">
             <a:avLst/>
@@ -6355,7 +6481,7 @@
                 <a:ea typeface="Calibri" pitchFamily="34" charset="-122"/>
                 <a:cs typeface="Calibri" pitchFamily="34" charset="-120"/>
               </a:rPr>
-              <a:t>ÜBUNG 3</a:t>
+              <a:t>WAHR ODER FALSCH? · AUSSAGE 4 VON 4 · OHNE HEFT</a:t>
             </a:r>
             <a:endParaRPr lang="en-US" sz="1300" dirty="0"/>
           </a:p>
@@ -6394,7 +6520,7 @@
                 <a:ea typeface="Cambria" pitchFamily="34" charset="-122"/>
                 <a:cs typeface="Cambria" pitchFamily="34" charset="-120"/>
               </a:rPr>
-              <a:t>Im Absolutismus fühle ich mich …</a:t>
+              <a:t>Wahr oder falsch?</a:t>
             </a:r>
             <a:endParaRPr lang="en-US" sz="3400" dirty="0"/>
           </a:p>
@@ -6408,12 +6534,12 @@
         </p:nvSpPr>
         <p:spPr>
           <a:xfrm>
-            <a:off x="548640" y="1371600"/>
-            <a:ext cx="8138160" cy="3383280"/>
+            <a:off x="548640" y="1600200"/>
+            <a:ext cx="11109960" cy="2743200"/>
           </a:xfrm>
           <a:prstGeom prst="roundRect">
             <a:avLst>
-              <a:gd name="adj" fmla="val 2162"/>
+              <a:gd name="adj" fmla="val 2667"/>
             </a:avLst>
           </a:prstGeom>
           <a:solidFill>
@@ -6430,14 +6556,14 @@
         </p:nvSpPr>
         <p:spPr>
           <a:xfrm>
-            <a:off x="731520" y="1517904"/>
-            <a:ext cx="384048" cy="384048"/>
+            <a:off x="868680" y="1920240"/>
+            <a:ext cx="548640" cy="548640"/>
           </a:xfrm>
           <a:prstGeom prst="ellipse">
             <a:avLst/>
           </a:prstGeom>
           <a:solidFill>
-            <a:srgbClr val="1E2761"/>
+            <a:srgbClr val="D9534F"/>
           </a:solidFill>
           <a:ln/>
         </p:spPr>
@@ -6450,8 +6576,8 @@
         </p:nvSpPr>
         <p:spPr>
           <a:xfrm>
-            <a:off x="731520" y="1517904"/>
-            <a:ext cx="384048" cy="384048"/>
+            <a:off x="868680" y="1920240"/>
+            <a:ext cx="548640" cy="548640"/>
           </a:xfrm>
           <a:prstGeom prst="rect">
             <a:avLst/>
@@ -6475,7 +6601,7 @@
                 <a:ea typeface="Calibri" pitchFamily="34" charset="-122"/>
                 <a:cs typeface="Calibri" pitchFamily="34" charset="-120"/>
               </a:rPr>
-              <a:t>1</a:t>
+              <a:t>4</a:t>
             </a:r>
             <a:endParaRPr lang="en-US" sz="1800" dirty="0"/>
           </a:p>
@@ -6489,236 +6615,40 @@
         </p:nvSpPr>
         <p:spPr>
           <a:xfrm>
-            <a:off x="1280160" y="1481328"/>
-            <a:ext cx="7269480" cy="868680"/>
-          </a:xfrm>
-          <a:prstGeom prst="rect">
-            <a:avLst/>
-          </a:prstGeom>
-          <a:noFill/>
-          <a:ln/>
-        </p:spPr>
-        <p:txBody>
-          <a:bodyPr wrap="square" lIns="0" tIns="0" rIns="0" bIns="0" rtlCol="0" anchor="t"/>
-          <a:lstStyle/>
-          <a:p>
-            <a:pPr indent="0" marL="0">
-              <a:buNone/>
-            </a:pPr>
-            <a:r>
-              <a:rPr lang="en-US" sz="2400" b="1" dirty="0">
+            <a:off x="1737360" y="1783080"/>
+            <a:ext cx="9601200" cy="2377440"/>
+          </a:xfrm>
+          <a:prstGeom prst="rect">
+            <a:avLst/>
+          </a:prstGeom>
+          <a:noFill/>
+          <a:ln/>
+        </p:spPr>
+        <p:txBody>
+          <a:bodyPr wrap="square" lIns="0" tIns="0" rIns="0" bIns="0" rtlCol="0" anchor="ctr"/>
+          <a:lstStyle/>
+          <a:p>
+            <a:pPr indent="0" marL="0">
+              <a:buNone/>
+            </a:pPr>
+            <a:r>
+              <a:rPr lang="en-US" sz="3000" dirty="0">
                 <a:solidFill>
                   <a:srgbClr val="1E2761"/>
                 </a:solidFill>
-                <a:latin typeface="Calibri" pitchFamily="34" charset="0"/>
-                <a:ea typeface="Calibri" pitchFamily="34" charset="-122"/>
-                <a:cs typeface="Calibri" pitchFamily="34" charset="-120"/>
-              </a:rPr>
-              <a:t>Schreibe Ü3 an den Rand. Betrachte die Karikatur.</a:t>
-            </a:r>
-            <a:endParaRPr lang="en-US" sz="2400" dirty="0"/>
+                <a:latin typeface="Cambria" pitchFamily="34" charset="0"/>
+                <a:ea typeface="Cambria" pitchFamily="34" charset="-122"/>
+                <a:cs typeface="Cambria" pitchFamily="34" charset="-120"/>
+              </a:rPr>
+              <a:t>Ludwig XIV. erlaubte den Protestanten die freie Religionsausübung.</a:t>
+            </a:r>
+            <a:endParaRPr lang="en-US" sz="3000" dirty="0"/>
           </a:p>
         </p:txBody>
       </p:sp>
       <p:sp>
         <p:nvSpPr>
           <p:cNvPr id="8" name="Shape 6"/>
-          <p:cNvSpPr/>
-          <p:nvPr/>
-        </p:nvSpPr>
-        <p:spPr>
-          <a:xfrm>
-            <a:off x="731520" y="2459736"/>
-            <a:ext cx="384048" cy="384048"/>
-          </a:xfrm>
-          <a:prstGeom prst="ellipse">
-            <a:avLst/>
-          </a:prstGeom>
-          <a:solidFill>
-            <a:srgbClr val="1E2761"/>
-          </a:solidFill>
-          <a:ln/>
-        </p:spPr>
-      </p:sp>
-      <p:sp>
-        <p:nvSpPr>
-          <p:cNvPr id="9" name="Text 7"/>
-          <p:cNvSpPr txBox="1"/>
-          <p:nvPr/>
-        </p:nvSpPr>
-        <p:spPr>
-          <a:xfrm>
-            <a:off x="731520" y="2459736"/>
-            <a:ext cx="384048" cy="384048"/>
-          </a:xfrm>
-          <a:prstGeom prst="rect">
-            <a:avLst/>
-          </a:prstGeom>
-          <a:noFill/>
-          <a:ln/>
-        </p:spPr>
-        <p:txBody>
-          <a:bodyPr wrap="square" lIns="0" tIns="0" rIns="0" bIns="0" rtlCol="0" anchor="ctr"/>
-          <a:lstStyle/>
-          <a:p>
-            <a:pPr algn="ctr" indent="0" marL="0">
-              <a:buNone/>
-            </a:pPr>
-            <a:r>
-              <a:rPr lang="en-US" sz="1800" b="1" dirty="0">
-                <a:solidFill>
-                  <a:srgbClr val="FFFFFF"/>
-                </a:solidFill>
-                <a:latin typeface="Calibri" pitchFamily="34" charset="0"/>
-                <a:ea typeface="Calibri" pitchFamily="34" charset="-122"/>
-                <a:cs typeface="Calibri" pitchFamily="34" charset="-120"/>
-              </a:rPr>
-              <a:t>2</a:t>
-            </a:r>
-            <a:endParaRPr lang="en-US" sz="1800" dirty="0"/>
-          </a:p>
-        </p:txBody>
-      </p:sp>
-      <p:sp>
-        <p:nvSpPr>
-          <p:cNvPr id="10" name="Text 8"/>
-          <p:cNvSpPr txBox="1"/>
-          <p:nvPr/>
-        </p:nvSpPr>
-        <p:spPr>
-          <a:xfrm>
-            <a:off x="1280160" y="2423160"/>
-            <a:ext cx="7269480" cy="1280160"/>
-          </a:xfrm>
-          <a:prstGeom prst="rect">
-            <a:avLst/>
-          </a:prstGeom>
-          <a:noFill/>
-          <a:ln/>
-        </p:spPr>
-        <p:txBody>
-          <a:bodyPr wrap="square" lIns="0" tIns="0" rIns="0" bIns="0" rtlCol="0" anchor="t"/>
-          <a:lstStyle/>
-          <a:p>
-            <a:pPr indent="0" marL="0">
-              <a:buNone/>
-            </a:pPr>
-            <a:r>
-              <a:rPr lang="en-US" sz="2400" b="1" dirty="0">
-                <a:solidFill>
-                  <a:srgbClr val="1E2761"/>
-                </a:solidFill>
-                <a:latin typeface="Calibri" pitchFamily="34" charset="0"/>
-                <a:ea typeface="Calibri" pitchFamily="34" charset="-122"/>
-                <a:cs typeface="Calibri" pitchFamily="34" charset="-120"/>
-              </a:rPr>
-              <a:t>Wähle einen Stand und beende den Satz: „Im Absolutismus fühle ich mich …, weil …“</a:t>
-            </a:r>
-            <a:endParaRPr lang="en-US" sz="2400" dirty="0"/>
-          </a:p>
-        </p:txBody>
-      </p:sp>
-      <p:sp>
-        <p:nvSpPr>
-          <p:cNvPr id="11" name="Shape 9"/>
-          <p:cNvSpPr/>
-          <p:nvPr/>
-        </p:nvSpPr>
-        <p:spPr>
-          <a:xfrm>
-            <a:off x="731520" y="3813048"/>
-            <a:ext cx="384048" cy="384048"/>
-          </a:xfrm>
-          <a:prstGeom prst="ellipse">
-            <a:avLst/>
-          </a:prstGeom>
-          <a:solidFill>
-            <a:srgbClr val="1E2761"/>
-          </a:solidFill>
-          <a:ln/>
-        </p:spPr>
-      </p:sp>
-      <p:sp>
-        <p:nvSpPr>
-          <p:cNvPr id="12" name="Text 10"/>
-          <p:cNvSpPr txBox="1"/>
-          <p:nvPr/>
-        </p:nvSpPr>
-        <p:spPr>
-          <a:xfrm>
-            <a:off x="731520" y="3813048"/>
-            <a:ext cx="384048" cy="384048"/>
-          </a:xfrm>
-          <a:prstGeom prst="rect">
-            <a:avLst/>
-          </a:prstGeom>
-          <a:noFill/>
-          <a:ln/>
-        </p:spPr>
-        <p:txBody>
-          <a:bodyPr wrap="square" lIns="0" tIns="0" rIns="0" bIns="0" rtlCol="0" anchor="ctr"/>
-          <a:lstStyle/>
-          <a:p>
-            <a:pPr algn="ctr" indent="0" marL="0">
-              <a:buNone/>
-            </a:pPr>
-            <a:r>
-              <a:rPr lang="en-US" sz="1800" b="1" dirty="0">
-                <a:solidFill>
-                  <a:srgbClr val="FFFFFF"/>
-                </a:solidFill>
-                <a:latin typeface="Calibri" pitchFamily="34" charset="0"/>
-                <a:ea typeface="Calibri" pitchFamily="34" charset="-122"/>
-                <a:cs typeface="Calibri" pitchFamily="34" charset="-120"/>
-              </a:rPr>
-              <a:t>3</a:t>
-            </a:r>
-            <a:endParaRPr lang="en-US" sz="1800" dirty="0"/>
-          </a:p>
-        </p:txBody>
-      </p:sp>
-      <p:sp>
-        <p:nvSpPr>
-          <p:cNvPr id="13" name="Text 11"/>
-          <p:cNvSpPr txBox="1"/>
-          <p:nvPr/>
-        </p:nvSpPr>
-        <p:spPr>
-          <a:xfrm>
-            <a:off x="1280160" y="3776472"/>
-            <a:ext cx="7269480" cy="868680"/>
-          </a:xfrm>
-          <a:prstGeom prst="rect">
-            <a:avLst/>
-          </a:prstGeom>
-          <a:noFill/>
-          <a:ln/>
-        </p:spPr>
-        <p:txBody>
-          <a:bodyPr wrap="square" lIns="0" tIns="0" rIns="0" bIns="0" rtlCol="0" anchor="t"/>
-          <a:lstStyle/>
-          <a:p>
-            <a:pPr indent="0" marL="0">
-              <a:buNone/>
-            </a:pPr>
-            <a:r>
-              <a:rPr lang="en-US" sz="2400" b="1" dirty="0">
-                <a:solidFill>
-                  <a:srgbClr val="1E2761"/>
-                </a:solidFill>
-                <a:latin typeface="Calibri" pitchFamily="34" charset="0"/>
-                <a:ea typeface="Calibri" pitchFamily="34" charset="-122"/>
-                <a:cs typeface="Calibri" pitchFamily="34" charset="-120"/>
-              </a:rPr>
-              <a:t>Nenne ein Recht und eine Pflicht deines Standes.</a:t>
-            </a:r>
-            <a:endParaRPr lang="en-US" sz="2400" dirty="0"/>
-          </a:p>
-        </p:txBody>
-      </p:sp>
-      <p:sp>
-        <p:nvSpPr>
-          <p:cNvPr id="14" name="Shape 12"/>
           <p:cNvSpPr/>
           <p:nvPr/>
         </p:nvSpPr>
@@ -6740,7 +6670,7 @@
       </p:sp>
       <p:sp>
         <p:nvSpPr>
-          <p:cNvPr id="15" name="Text 13"/>
+          <p:cNvPr id="9" name="Text 7"/>
           <p:cNvSpPr txBox="1"/>
           <p:nvPr/>
         </p:nvSpPr>
@@ -6771,7 +6701,7 @@
                 <a:ea typeface="Calibri" pitchFamily="34" charset="-122"/>
                 <a:cs typeface="Calibri" pitchFamily="34" charset="-120"/>
               </a:rPr>
-              <a:t>Zeit: </a:t>
+              <a:t>Jetzt: </a:t>
             </a:r>
             <a:pPr indent="0" marL="0">
               <a:buNone/>
@@ -6785,7 +6715,7 @@
                 <a:ea typeface="Calibri" pitchFamily="34" charset="-122"/>
                 <a:cs typeface="Calibri" pitchFamily="34" charset="-120"/>
               </a:rPr>
-              <a:t>5 Minuten · allein · leise      </a:t>
+              <a:t>Entscheide still, melde dich, begründe.      </a:t>
             </a:r>
             <a:pPr indent="0" marL="0">
               <a:buNone/>
@@ -6799,7 +6729,7 @@
                 <a:ea typeface="Calibri" pitchFamily="34" charset="-122"/>
                 <a:cs typeface="Calibri" pitchFamily="34" charset="-120"/>
               </a:rPr>
-              <a:t>Fertig? Stift hinlegen.</a:t>
+              <a:t>Bei „falsch“: Aussage verbessern.</a:t>
             </a:r>
             <a:endParaRPr lang="en-US" sz="2400" dirty="0"/>
           </a:p>
@@ -6807,7 +6737,7 @@
       </p:sp>
       <p:sp>
         <p:nvSpPr>
-          <p:cNvPr id="16" name="Text 14"/>
+          <p:cNvPr id="10" name="Text 8"/>
           <p:cNvSpPr txBox="1"/>
           <p:nvPr/>
         </p:nvSpPr>
@@ -6846,7 +6776,7 @@
       </p:sp>
       <p:sp>
         <p:nvSpPr>
-          <p:cNvPr id="17" name="Text 15"/>
+          <p:cNvPr id="11" name="Text 9"/>
           <p:cNvSpPr txBox="1"/>
           <p:nvPr/>
         </p:nvSpPr>
@@ -6880,91 +6810,6 @@
               <a:t>17</a:t>
             </a:r>
             <a:endParaRPr lang="en-US" sz="1000" dirty="0"/>
-          </a:p>
-        </p:txBody>
-      </p:sp>
-      <p:pic>
-        <p:nvPicPr>
-          <p:cNvPr id="19" name="Image 0" descr="../material/karikatur_drei_staende.jpg">    </p:cNvPr>
-          <p:cNvPicPr>
-            <a:picLocks noChangeAspect="1"/>
-          </p:cNvPicPr>
-          <p:nvPr/>
-        </p:nvPicPr>
-        <p:blipFill>
-          <a:blip r:embed="rId1"/>
-          <a:stretch>
-            <a:fillRect/>
-          </a:stretch>
-        </p:blipFill>
-        <p:spPr>
-          <a:xfrm>
-            <a:off x="8869680" y="1371600"/>
-            <a:ext cx="2788920" cy="3456432"/>
-          </a:xfrm>
-          <a:prstGeom prst="rect">
-            <a:avLst/>
-          </a:prstGeom>
-        </p:spPr>
-      </p:pic>
-      <p:sp>
-        <p:nvSpPr>
-          <p:cNvPr id="20" name="Shape 16"/>
-          <p:cNvSpPr/>
-          <p:nvPr/>
-        </p:nvSpPr>
-        <p:spPr>
-          <a:xfrm>
-            <a:off x="548640" y="5029200"/>
-            <a:ext cx="11109960" cy="731520"/>
-          </a:xfrm>
-          <a:prstGeom prst="roundRect">
-            <a:avLst>
-              <a:gd name="adj" fmla="val 10000"/>
-            </a:avLst>
-          </a:prstGeom>
-          <a:solidFill>
-            <a:srgbClr val="F4F7FD"/>
-          </a:solidFill>
-          <a:ln/>
-        </p:spPr>
-      </p:sp>
-      <p:sp>
-        <p:nvSpPr>
-          <p:cNvPr id="21" name="Text 17"/>
-          <p:cNvSpPr txBox="1"/>
-          <p:nvPr/>
-        </p:nvSpPr>
-        <p:spPr>
-          <a:xfrm>
-            <a:off x="822960" y="5029200"/>
-            <a:ext cx="10607040" cy="731520"/>
-          </a:xfrm>
-          <a:prstGeom prst="rect">
-            <a:avLst/>
-          </a:prstGeom>
-          <a:noFill/>
-          <a:ln/>
-        </p:spPr>
-        <p:txBody>
-          <a:bodyPr wrap="square" lIns="0" tIns="0" rIns="0" bIns="0" rtlCol="0" anchor="ctr"/>
-          <a:lstStyle/>
-          <a:p>
-            <a:pPr indent="0" marL="0">
-              <a:buNone/>
-            </a:pPr>
-            <a:r>
-              <a:rPr lang="en-US" sz="2400" dirty="0">
-                <a:solidFill>
-                  <a:srgbClr val="1E2761"/>
-                </a:solidFill>
-                <a:latin typeface="Cambria" pitchFamily="34" charset="0"/>
-                <a:ea typeface="Cambria" pitchFamily="34" charset="-122"/>
-                <a:cs typeface="Cambria" pitchFamily="34" charset="-120"/>
-              </a:rPr>
-              <a:t>Klerus (Geistliche) · Adel · Dritter Stand (Bauern und Bürger)</a:t>
-            </a:r>
-            <a:endParaRPr lang="en-US" sz="2400" dirty="0"/>
           </a:p>
         </p:txBody>
       </p:sp>
@@ -7033,7 +6878,7 @@
                 <a:ea typeface="Calibri" pitchFamily="34" charset="-122"/>
                 <a:cs typeface="Calibri" pitchFamily="34" charset="-120"/>
               </a:rPr>
-              <a:t>ZUM SCHLUSS · STIFTE LIEGEN</a:t>
+              <a:t>WAHR ODER FALSCH? · ANTWORT 4 VON 4</a:t>
             </a:r>
             <a:endParaRPr lang="en-US" sz="1300" dirty="0"/>
           </a:p>
@@ -7066,13 +6911,13 @@
             <a:r>
               <a:rPr lang="en-US" sz="3400" b="1" dirty="0">
                 <a:solidFill>
-                  <a:srgbClr val="1E2761"/>
+                  <a:srgbClr val="D9534F"/>
                 </a:solidFill>
                 <a:latin typeface="Cambria" pitchFamily="34" charset="0"/>
                 <a:ea typeface="Cambria" pitchFamily="34" charset="-122"/>
                 <a:cs typeface="Cambria" pitchFamily="34" charset="-120"/>
               </a:rPr>
-              <a:t>So lernst du bis zum Test</a:t>
+              <a:t>Falsch</a:t>
             </a:r>
             <a:endParaRPr lang="en-US" sz="3400" dirty="0"/>
           </a:p>
@@ -7086,50 +6931,30 @@
         </p:nvSpPr>
         <p:spPr>
           <a:xfrm>
-            <a:off x="548640" y="1554480"/>
-            <a:ext cx="11109960" cy="822960"/>
+            <a:off x="548640" y="1600200"/>
+            <a:ext cx="11109960" cy="1371600"/>
           </a:xfrm>
           <a:prstGeom prst="roundRect">
             <a:avLst>
-              <a:gd name="adj" fmla="val 8889"/>
+              <a:gd name="adj" fmla="val 5333"/>
             </a:avLst>
           </a:prstGeom>
           <a:solidFill>
-            <a:srgbClr val="EAF0FA"/>
+            <a:srgbClr val="F4F7FD"/>
           </a:solidFill>
           <a:ln/>
         </p:spPr>
       </p:sp>
       <p:sp>
         <p:nvSpPr>
-          <p:cNvPr id="5" name="Shape 3"/>
-          <p:cNvSpPr/>
-          <p:nvPr/>
-        </p:nvSpPr>
-        <p:spPr>
-          <a:xfrm>
-            <a:off x="777240" y="1737360"/>
-            <a:ext cx="457200" cy="457200"/>
-          </a:xfrm>
-          <a:prstGeom prst="ellipse">
-            <a:avLst/>
-          </a:prstGeom>
-          <a:solidFill>
-            <a:srgbClr val="D9534F"/>
-          </a:solidFill>
-          <a:ln/>
-        </p:spPr>
-      </p:sp>
-      <p:sp>
-        <p:nvSpPr>
-          <p:cNvPr id="6" name="Text 4"/>
-          <p:cNvSpPr txBox="1"/>
-          <p:nvPr/>
-        </p:nvSpPr>
-        <p:spPr>
-          <a:xfrm>
-            <a:off x="777240" y="1737360"/>
-            <a:ext cx="457200" cy="457200"/>
+          <p:cNvPr id="5" name="Text 3"/>
+          <p:cNvSpPr txBox="1"/>
+          <p:nvPr/>
+        </p:nvSpPr>
+        <p:spPr>
+          <a:xfrm>
+            <a:off x="914400" y="1600200"/>
+            <a:ext cx="10424160" cy="1371600"/>
           </a:xfrm>
           <a:prstGeom prst="rect">
             <a:avLst/>
@@ -7141,58 +6966,19 @@
           <a:bodyPr wrap="square" lIns="0" tIns="0" rIns="0" bIns="0" rtlCol="0" anchor="ctr"/>
           <a:lstStyle/>
           <a:p>
-            <a:pPr algn="ctr" indent="0" marL="0">
-              <a:buNone/>
-            </a:pPr>
-            <a:r>
-              <a:rPr lang="en-US" sz="1800" b="1" dirty="0">
-                <a:solidFill>
-                  <a:srgbClr val="FFFFFF"/>
-                </a:solidFill>
-                <a:latin typeface="Calibri" pitchFamily="34" charset="0"/>
-                <a:ea typeface="Calibri" pitchFamily="34" charset="-122"/>
-                <a:cs typeface="Calibri" pitchFamily="34" charset="-120"/>
-              </a:rPr>
-              <a:t>1</a:t>
-            </a:r>
-            <a:endParaRPr lang="en-US" sz="1800" dirty="0"/>
-          </a:p>
-        </p:txBody>
-      </p:sp>
-      <p:sp>
-        <p:nvSpPr>
-          <p:cNvPr id="7" name="Text 5"/>
-          <p:cNvSpPr txBox="1"/>
-          <p:nvPr/>
-        </p:nvSpPr>
-        <p:spPr>
-          <a:xfrm>
-            <a:off x="1463040" y="1554480"/>
-            <a:ext cx="9966960" cy="822960"/>
-          </a:xfrm>
-          <a:prstGeom prst="rect">
-            <a:avLst/>
-          </a:prstGeom>
-          <a:noFill/>
-          <a:ln/>
-        </p:spPr>
-        <p:txBody>
-          <a:bodyPr wrap="square" lIns="0" tIns="0" rIns="0" bIns="0" rtlCol="0" anchor="ctr"/>
-          <a:lstStyle/>
-          <a:p>
             <a:pPr indent="0" marL="0">
               <a:buNone/>
             </a:pPr>
             <a:r>
               <a:rPr lang="en-US" sz="2400" dirty="0">
                 <a:solidFill>
-                  <a:srgbClr val="1E2761"/>
+                  <a:srgbClr val="5B6B8C"/>
                 </a:solidFill>
                 <a:latin typeface="Cambria" pitchFamily="34" charset="0"/>
                 <a:ea typeface="Cambria" pitchFamily="34" charset="-122"/>
                 <a:cs typeface="Cambria" pitchFamily="34" charset="-120"/>
               </a:rPr>
-              <a:t>Merksatz 2 auswendig: Was bedeutet Absolutismus?</a:t>
+              <a:t>Ludwig XIV. erlaubte den Protestanten die freie Religionsausübung.</a:t>
             </a:r>
             <a:endParaRPr lang="en-US" sz="2400" dirty="0"/>
           </a:p>
@@ -7200,119 +6986,65 @@
       </p:sp>
       <p:sp>
         <p:nvSpPr>
-          <p:cNvPr id="8" name="Shape 6"/>
+          <p:cNvPr id="6" name="Shape 4"/>
           <p:cNvSpPr/>
           <p:nvPr/>
         </p:nvSpPr>
         <p:spPr>
           <a:xfrm>
-            <a:off x="548640" y="2514600"/>
-            <a:ext cx="11109960" cy="822960"/>
+            <a:off x="548640" y="3154680"/>
+            <a:ext cx="11109960" cy="2377440"/>
           </a:xfrm>
           <a:prstGeom prst="roundRect">
             <a:avLst>
-              <a:gd name="adj" fmla="val 8889"/>
+              <a:gd name="adj" fmla="val 3077"/>
             </a:avLst>
           </a:prstGeom>
           <a:solidFill>
-            <a:srgbClr val="F4F7FD"/>
+            <a:srgbClr val="FFFFFF"/>
           </a:solidFill>
-          <a:ln/>
-        </p:spPr>
-      </p:sp>
-      <p:sp>
-        <p:nvSpPr>
-          <p:cNvPr id="9" name="Shape 7"/>
-          <p:cNvSpPr/>
-          <p:nvPr/>
-        </p:nvSpPr>
-        <p:spPr>
-          <a:xfrm>
-            <a:off x="777240" y="2697480"/>
-            <a:ext cx="457200" cy="457200"/>
-          </a:xfrm>
-          <a:prstGeom prst="ellipse">
-            <a:avLst/>
-          </a:prstGeom>
-          <a:solidFill>
-            <a:srgbClr val="D9534F"/>
-          </a:solidFill>
-          <a:ln/>
-        </p:spPr>
-      </p:sp>
-      <p:sp>
-        <p:nvSpPr>
-          <p:cNvPr id="10" name="Text 8"/>
-          <p:cNvSpPr txBox="1"/>
-          <p:nvPr/>
-        </p:nvSpPr>
-        <p:spPr>
-          <a:xfrm>
-            <a:off x="777240" y="2697480"/>
-            <a:ext cx="457200" cy="457200"/>
-          </a:xfrm>
-          <a:prstGeom prst="rect">
-            <a:avLst/>
-          </a:prstGeom>
-          <a:noFill/>
-          <a:ln/>
-        </p:spPr>
-        <p:txBody>
-          <a:bodyPr wrap="square" lIns="0" tIns="0" rIns="0" bIns="0" rtlCol="0" anchor="ctr"/>
-          <a:lstStyle/>
-          <a:p>
-            <a:pPr algn="ctr" indent="0" marL="0">
-              <a:buNone/>
-            </a:pPr>
-            <a:r>
-              <a:rPr lang="en-US" sz="1800" b="1" dirty="0">
-                <a:solidFill>
-                  <a:srgbClr val="FFFFFF"/>
-                </a:solidFill>
-                <a:latin typeface="Calibri" pitchFamily="34" charset="0"/>
-                <a:ea typeface="Calibri" pitchFamily="34" charset="-122"/>
-                <a:cs typeface="Calibri" pitchFamily="34" charset="-120"/>
-              </a:rPr>
-              <a:t>2</a:t>
-            </a:r>
-            <a:endParaRPr lang="en-US" sz="1800" dirty="0"/>
-          </a:p>
-        </p:txBody>
-      </p:sp>
-      <p:sp>
-        <p:nvSpPr>
-          <p:cNvPr id="11" name="Text 9"/>
-          <p:cNvSpPr txBox="1"/>
-          <p:nvPr/>
-        </p:nvSpPr>
-        <p:spPr>
-          <a:xfrm>
-            <a:off x="1463040" y="2514600"/>
-            <a:ext cx="9966960" cy="822960"/>
-          </a:xfrm>
-          <a:prstGeom prst="rect">
-            <a:avLst/>
-          </a:prstGeom>
-          <a:noFill/>
-          <a:ln/>
-        </p:spPr>
-        <p:txBody>
-          <a:bodyPr wrap="square" lIns="0" tIns="0" rIns="0" bIns="0" rtlCol="0" anchor="ctr"/>
-          <a:lstStyle/>
-          <a:p>
-            <a:pPr indent="0" marL="0">
-              <a:buNone/>
-            </a:pPr>
-            <a:r>
-              <a:rPr lang="en-US" sz="2400" dirty="0">
-                <a:solidFill>
-                  <a:srgbClr val="1E2761"/>
+          <a:ln w="38100">
+            <a:solidFill>
+              <a:srgbClr val="D9534F"/>
+            </a:solidFill>
+            <a:prstDash val="solid"/>
+          </a:ln>
+        </p:spPr>
+      </p:sp>
+      <p:sp>
+        <p:nvSpPr>
+          <p:cNvPr id="7" name="Text 5"/>
+          <p:cNvSpPr txBox="1"/>
+          <p:nvPr/>
+        </p:nvSpPr>
+        <p:spPr>
+          <a:xfrm>
+            <a:off x="914400" y="3291840"/>
+            <a:ext cx="5486400" cy="365760"/>
+          </a:xfrm>
+          <a:prstGeom prst="rect">
+            <a:avLst/>
+          </a:prstGeom>
+          <a:noFill/>
+          <a:ln/>
+        </p:spPr>
+        <p:txBody>
+          <a:bodyPr wrap="square" lIns="0" tIns="0" rIns="0" bIns="0" rtlCol="0" anchor="t"/>
+          <a:lstStyle/>
+          <a:p>
+            <a:pPr indent="0" marL="0">
+              <a:buNone/>
+            </a:pPr>
+            <a:r>
+              <a:rPr lang="en-US" sz="2400" b="1" dirty="0">
+                <a:solidFill>
+                  <a:srgbClr val="D9534F"/>
                 </a:solidFill>
                 <a:latin typeface="Cambria" pitchFamily="34" charset="0"/>
                 <a:ea typeface="Cambria" pitchFamily="34" charset="-122"/>
                 <a:cs typeface="Cambria" pitchFamily="34" charset="-120"/>
               </a:rPr>
-              <a:t>Lückentext noch einmal ohne Wortspeicher ausfüllen</a:t>
+              <a:t>Begründung</a:t>
             </a:r>
             <a:endParaRPr lang="en-US" sz="2400" dirty="0"/>
           </a:p>
@@ -7320,111 +7052,30 @@
       </p:sp>
       <p:sp>
         <p:nvSpPr>
-          <p:cNvPr id="12" name="Shape 10"/>
-          <p:cNvSpPr/>
-          <p:nvPr/>
-        </p:nvSpPr>
-        <p:spPr>
-          <a:xfrm>
-            <a:off x="548640" y="3474720"/>
-            <a:ext cx="11109960" cy="822960"/>
-          </a:xfrm>
-          <a:prstGeom prst="roundRect">
-            <a:avLst>
-              <a:gd name="adj" fmla="val 8889"/>
-            </a:avLst>
-          </a:prstGeom>
-          <a:solidFill>
-            <a:srgbClr val="EAF0FA"/>
-          </a:solidFill>
-          <a:ln/>
-        </p:spPr>
-      </p:sp>
-      <p:sp>
-        <p:nvSpPr>
-          <p:cNvPr id="13" name="Shape 11"/>
-          <p:cNvSpPr/>
-          <p:nvPr/>
-        </p:nvSpPr>
-        <p:spPr>
-          <a:xfrm>
-            <a:off x="777240" y="3657600"/>
-            <a:ext cx="457200" cy="457200"/>
-          </a:xfrm>
-          <a:prstGeom prst="ellipse">
-            <a:avLst/>
-          </a:prstGeom>
-          <a:solidFill>
-            <a:srgbClr val="D9534F"/>
-          </a:solidFill>
-          <a:ln/>
-        </p:spPr>
-      </p:sp>
-      <p:sp>
-        <p:nvSpPr>
-          <p:cNvPr id="14" name="Text 12"/>
-          <p:cNvSpPr txBox="1"/>
-          <p:nvPr/>
-        </p:nvSpPr>
-        <p:spPr>
-          <a:xfrm>
-            <a:off x="777240" y="3657600"/>
-            <a:ext cx="457200" cy="457200"/>
-          </a:xfrm>
-          <a:prstGeom prst="rect">
-            <a:avLst/>
-          </a:prstGeom>
-          <a:noFill/>
-          <a:ln/>
-        </p:spPr>
-        <p:txBody>
-          <a:bodyPr wrap="square" lIns="0" tIns="0" rIns="0" bIns="0" rtlCol="0" anchor="ctr"/>
-          <a:lstStyle/>
-          <a:p>
-            <a:pPr algn="ctr" indent="0" marL="0">
-              <a:buNone/>
-            </a:pPr>
-            <a:r>
-              <a:rPr lang="en-US" sz="1800" b="1" dirty="0">
-                <a:solidFill>
-                  <a:srgbClr val="FFFFFF"/>
-                </a:solidFill>
-                <a:latin typeface="Calibri" pitchFamily="34" charset="0"/>
-                <a:ea typeface="Calibri" pitchFamily="34" charset="-122"/>
-                <a:cs typeface="Calibri" pitchFamily="34" charset="-120"/>
-              </a:rPr>
-              <a:t>3</a:t>
-            </a:r>
-            <a:endParaRPr lang="en-US" sz="1800" dirty="0"/>
-          </a:p>
-        </p:txBody>
-      </p:sp>
-      <p:sp>
-        <p:nvSpPr>
-          <p:cNvPr id="15" name="Text 13"/>
-          <p:cNvSpPr txBox="1"/>
-          <p:nvPr/>
-        </p:nvSpPr>
-        <p:spPr>
-          <a:xfrm>
-            <a:off x="1463040" y="3474720"/>
-            <a:ext cx="9966960" cy="822960"/>
-          </a:xfrm>
-          <a:prstGeom prst="rect">
-            <a:avLst/>
-          </a:prstGeom>
-          <a:noFill/>
-          <a:ln/>
-        </p:spPr>
-        <p:txBody>
-          <a:bodyPr wrap="square" lIns="0" tIns="0" rIns="0" bIns="0" rtlCol="0" anchor="ctr"/>
-          <a:lstStyle/>
-          <a:p>
-            <a:pPr indent="0" marL="0">
-              <a:buNone/>
-            </a:pPr>
-            <a:r>
-              <a:rPr lang="en-US" sz="2400" dirty="0">
+          <p:cNvPr id="8" name="Text 6"/>
+          <p:cNvSpPr txBox="1"/>
+          <p:nvPr/>
+        </p:nvSpPr>
+        <p:spPr>
+          <a:xfrm>
+            <a:off x="914400" y="3749040"/>
+            <a:ext cx="10424160" cy="1737360"/>
+          </a:xfrm>
+          <a:prstGeom prst="rect">
+            <a:avLst/>
+          </a:prstGeom>
+          <a:noFill/>
+          <a:ln/>
+        </p:spPr>
+        <p:txBody>
+          <a:bodyPr wrap="square" lIns="0" tIns="0" rIns="0" bIns="0" rtlCol="0" anchor="t"/>
+          <a:lstStyle/>
+          <a:p>
+            <a:pPr indent="0" marL="0">
+              <a:buNone/>
+            </a:pPr>
+            <a:r>
+              <a:rPr lang="en-US" sz="2600" dirty="0">
                 <a:solidFill>
                   <a:srgbClr val="1E2761"/>
                 </a:solidFill>
@@ -7432,135 +7083,15 @@
                 <a:ea typeface="Cambria" pitchFamily="34" charset="-122"/>
                 <a:cs typeface="Cambria" pitchFamily="34" charset="-120"/>
               </a:rPr>
-              <a:t>Tabelle Ständegesellschaft aus dem Kopf aufschreiben</a:t>
-            </a:r>
-            <a:endParaRPr lang="en-US" sz="2400" dirty="0"/>
-          </a:p>
-        </p:txBody>
-      </p:sp>
-      <p:sp>
-        <p:nvSpPr>
-          <p:cNvPr id="16" name="Shape 14"/>
-          <p:cNvSpPr/>
-          <p:nvPr/>
-        </p:nvSpPr>
-        <p:spPr>
-          <a:xfrm>
-            <a:off x="548640" y="4434840"/>
-            <a:ext cx="11109960" cy="822960"/>
-          </a:xfrm>
-          <a:prstGeom prst="roundRect">
-            <a:avLst>
-              <a:gd name="adj" fmla="val 8889"/>
-            </a:avLst>
-          </a:prstGeom>
-          <a:solidFill>
-            <a:srgbClr val="F4F7FD"/>
-          </a:solidFill>
-          <a:ln/>
-        </p:spPr>
-      </p:sp>
-      <p:sp>
-        <p:nvSpPr>
-          <p:cNvPr id="17" name="Shape 15"/>
-          <p:cNvSpPr/>
-          <p:nvPr/>
-        </p:nvSpPr>
-        <p:spPr>
-          <a:xfrm>
-            <a:off x="777240" y="4617720"/>
-            <a:ext cx="457200" cy="457200"/>
-          </a:xfrm>
-          <a:prstGeom prst="ellipse">
-            <a:avLst/>
-          </a:prstGeom>
-          <a:solidFill>
-            <a:srgbClr val="D9534F"/>
-          </a:solidFill>
-          <a:ln/>
-        </p:spPr>
-      </p:sp>
-      <p:sp>
-        <p:nvSpPr>
-          <p:cNvPr id="18" name="Text 16"/>
-          <p:cNvSpPr txBox="1"/>
-          <p:nvPr/>
-        </p:nvSpPr>
-        <p:spPr>
-          <a:xfrm>
-            <a:off x="777240" y="4617720"/>
-            <a:ext cx="457200" cy="457200"/>
-          </a:xfrm>
-          <a:prstGeom prst="rect">
-            <a:avLst/>
-          </a:prstGeom>
-          <a:noFill/>
-          <a:ln/>
-        </p:spPr>
-        <p:txBody>
-          <a:bodyPr wrap="square" lIns="0" tIns="0" rIns="0" bIns="0" rtlCol="0" anchor="ctr"/>
-          <a:lstStyle/>
-          <a:p>
-            <a:pPr algn="ctr" indent="0" marL="0">
-              <a:buNone/>
-            </a:pPr>
-            <a:r>
-              <a:rPr lang="en-US" sz="1800" b="1" dirty="0">
-                <a:solidFill>
-                  <a:srgbClr val="FFFFFF"/>
-                </a:solidFill>
-                <a:latin typeface="Calibri" pitchFamily="34" charset="0"/>
-                <a:ea typeface="Calibri" pitchFamily="34" charset="-122"/>
-                <a:cs typeface="Calibri" pitchFamily="34" charset="-120"/>
-              </a:rPr>
-              <a:t>4</a:t>
-            </a:r>
-            <a:endParaRPr lang="en-US" sz="1800" dirty="0"/>
-          </a:p>
-        </p:txBody>
-      </p:sp>
-      <p:sp>
-        <p:nvSpPr>
-          <p:cNvPr id="19" name="Text 17"/>
-          <p:cNvSpPr txBox="1"/>
-          <p:nvPr/>
-        </p:nvSpPr>
-        <p:spPr>
-          <a:xfrm>
-            <a:off x="1463040" y="4434840"/>
-            <a:ext cx="9966960" cy="822960"/>
-          </a:xfrm>
-          <a:prstGeom prst="rect">
-            <a:avLst/>
-          </a:prstGeom>
-          <a:noFill/>
-          <a:ln/>
-        </p:spPr>
-        <p:txBody>
-          <a:bodyPr wrap="square" lIns="0" tIns="0" rIns="0" bIns="0" rtlCol="0" anchor="ctr"/>
-          <a:lstStyle/>
-          <a:p>
-            <a:pPr indent="0" marL="0">
-              <a:buNone/>
-            </a:pPr>
-            <a:r>
-              <a:rPr lang="en-US" sz="2400" dirty="0">
-                <a:solidFill>
-                  <a:srgbClr val="1E2761"/>
-                </a:solidFill>
-                <a:latin typeface="Cambria" pitchFamily="34" charset="0"/>
-                <a:ea typeface="Cambria" pitchFamily="34" charset="-122"/>
-                <a:cs typeface="Cambria" pitchFamily="34" charset="-120"/>
-              </a:rPr>
-              <a:t>Deinen Ü3-Satz zu einem zweiten Stand noch einmal schreiben</a:t>
-            </a:r>
-            <a:endParaRPr lang="en-US" sz="2400" dirty="0"/>
-          </a:p>
-        </p:txBody>
-      </p:sp>
-      <p:sp>
-        <p:nvSpPr>
-          <p:cNvPr id="20" name="Shape 18"/>
+              <a:t>1685 beendete er die religiöse Toleranz: Wie nur einen König sollte es auch nur einen Glauben geben (Säule Religion, Gottesgnadentum).</a:t>
+            </a:r>
+            <a:endParaRPr lang="en-US" sz="2600" dirty="0"/>
+          </a:p>
+        </p:txBody>
+      </p:sp>
+      <p:sp>
+        <p:nvSpPr>
+          <p:cNvPr id="9" name="Shape 7"/>
           <p:cNvSpPr/>
           <p:nvPr/>
         </p:nvSpPr>
@@ -7582,7 +7113,7 @@
       </p:sp>
       <p:sp>
         <p:nvSpPr>
-          <p:cNvPr id="21" name="Text 19"/>
+          <p:cNvPr id="10" name="Text 8"/>
           <p:cNvSpPr txBox="1"/>
           <p:nvPr/>
         </p:nvSpPr>
@@ -7613,7 +7144,7 @@
                 <a:ea typeface="Calibri" pitchFamily="34" charset="-122"/>
                 <a:cs typeface="Calibri" pitchFamily="34" charset="-120"/>
               </a:rPr>
-              <a:t>Test: </a:t>
+              <a:t>Vergleiche: </a:t>
             </a:r>
             <a:pPr indent="0" marL="0">
               <a:buNone/>
@@ -7627,7 +7158,7 @@
                 <a:ea typeface="Calibri" pitchFamily="34" charset="-122"/>
                 <a:cs typeface="Calibri" pitchFamily="34" charset="-120"/>
               </a:rPr>
-              <a:t>nächste Woche · Ständegesellschaft · Absolutismus · fünf Säulen</a:t>
+              <a:t>Stimmt deine Begründung mit der Folie überein?</a:t>
             </a:r>
             <a:endParaRPr lang="en-US" sz="2400" dirty="0"/>
           </a:p>
@@ -7635,7 +7166,7 @@
       </p:sp>
       <p:sp>
         <p:nvSpPr>
-          <p:cNvPr id="22" name="Text 20"/>
+          <p:cNvPr id="11" name="Text 9"/>
           <p:cNvSpPr txBox="1"/>
           <p:nvPr/>
         </p:nvSpPr>
@@ -7674,7 +7205,7 @@
       </p:sp>
       <p:sp>
         <p:nvSpPr>
-          <p:cNvPr id="23" name="Text 21"/>
+          <p:cNvPr id="12" name="Text 10"/>
           <p:cNvSpPr txBox="1"/>
           <p:nvPr/>
         </p:nvSpPr>
@@ -7706,6 +7237,597 @@
                 <a:cs typeface="Calibri" pitchFamily="34" charset="-120"/>
               </a:rPr>
               <a:t>18</a:t>
+            </a:r>
+            <a:endParaRPr lang="en-US" sz="1000" dirty="0"/>
+          </a:p>
+        </p:txBody>
+      </p:sp>
+    </p:spTree>
+  </p:cSld>
+  <p:clrMapOvr>
+    <a:masterClrMapping/>
+  </p:clrMapOvr>
+</p:sld>
+</file>
+
+<file path=ppt/slides/slide19.xml><?xml version="1.0" encoding="utf-8"?>
+<p:sld xmlns:a="http://schemas.openxmlformats.org/drawingml/2006/main" xmlns:r="http://schemas.openxmlformats.org/officeDocument/2006/relationships" xmlns:p="http://schemas.openxmlformats.org/presentationml/2006/main">
+  <p:cSld name="Slide 19">
+    <p:bg>
+      <p:bgPr>
+        <a:solidFill>
+          <a:srgbClr val="FFFFFF"/>
+        </a:solidFill>
+      </p:bgPr>
+    </p:bg>
+    <p:spTree>
+      <p:nvGrpSpPr>
+        <p:cNvPr id="1" name=""/>
+        <p:cNvGrpSpPr/>
+        <p:nvPr/>
+      </p:nvGrpSpPr>
+      <p:grpSpPr>
+        <a:xfrm>
+          <a:off x="0" y="0"/>
+          <a:ext cx="0" cy="0"/>
+          <a:chOff x="0" y="0"/>
+          <a:chExt cx="0" cy="0"/>
+        </a:xfrm>
+      </p:grpSpPr>
+      <p:sp>
+        <p:nvSpPr>
+          <p:cNvPr id="2" name="Text 0"/>
+          <p:cNvSpPr txBox="1"/>
+          <p:nvPr/>
+        </p:nvSpPr>
+        <p:spPr>
+          <a:xfrm>
+            <a:off x="548640" y="320040"/>
+            <a:ext cx="9144000" cy="274320"/>
+          </a:xfrm>
+          <a:prstGeom prst="rect">
+            <a:avLst/>
+          </a:prstGeom>
+          <a:noFill/>
+          <a:ln/>
+        </p:spPr>
+        <p:txBody>
+          <a:bodyPr wrap="square" lIns="0" tIns="0" rIns="0" bIns="0" rtlCol="0" anchor="t"/>
+          <a:lstStyle/>
+          <a:p>
+            <a:pPr indent="0" marL="0">
+              <a:buNone/>
+            </a:pPr>
+            <a:r>
+              <a:rPr lang="en-US" sz="1300" b="1" spc="200" kern="0" dirty="0">
+                <a:solidFill>
+                  <a:srgbClr val="D9534F"/>
+                </a:solidFill>
+                <a:latin typeface="Calibri" pitchFamily="34" charset="0"/>
+                <a:ea typeface="Calibri" pitchFamily="34" charset="-122"/>
+                <a:cs typeface="Calibri" pitchFamily="34" charset="-120"/>
+              </a:rPr>
+              <a:t>MERKSATZ 2 · ABSCHREIBEN UND ROT UMRAHMEN</a:t>
+            </a:r>
+            <a:endParaRPr lang="en-US" sz="1300" dirty="0"/>
+          </a:p>
+        </p:txBody>
+      </p:sp>
+      <p:sp>
+        <p:nvSpPr>
+          <p:cNvPr id="3" name="Text 1"/>
+          <p:cNvSpPr txBox="1"/>
+          <p:nvPr/>
+        </p:nvSpPr>
+        <p:spPr>
+          <a:xfrm>
+            <a:off x="548640" y="594360"/>
+            <a:ext cx="11064240" cy="685800"/>
+          </a:xfrm>
+          <a:prstGeom prst="rect">
+            <a:avLst/>
+          </a:prstGeom>
+          <a:noFill/>
+          <a:ln/>
+        </p:spPr>
+        <p:txBody>
+          <a:bodyPr wrap="square" lIns="0" tIns="0" rIns="0" bIns="0" rtlCol="0" anchor="t"/>
+          <a:lstStyle/>
+          <a:p>
+            <a:pPr indent="0" marL="0">
+              <a:buNone/>
+            </a:pPr>
+            <a:r>
+              <a:rPr lang="en-US" sz="3400" b="1" dirty="0">
+                <a:solidFill>
+                  <a:srgbClr val="1E2761"/>
+                </a:solidFill>
+                <a:latin typeface="Cambria" pitchFamily="34" charset="0"/>
+                <a:ea typeface="Cambria" pitchFamily="34" charset="-122"/>
+                <a:cs typeface="Cambria" pitchFamily="34" charset="-120"/>
+              </a:rPr>
+              <a:t>Absolutismus</a:t>
+            </a:r>
+            <a:endParaRPr lang="en-US" sz="3400" dirty="0"/>
+          </a:p>
+        </p:txBody>
+      </p:sp>
+      <p:sp>
+        <p:nvSpPr>
+          <p:cNvPr id="4" name="Shape 2"/>
+          <p:cNvSpPr/>
+          <p:nvPr/>
+        </p:nvSpPr>
+        <p:spPr>
+          <a:xfrm>
+            <a:off x="548640" y="1371600"/>
+            <a:ext cx="11109960" cy="1920240"/>
+          </a:xfrm>
+          <a:prstGeom prst="roundRect">
+            <a:avLst>
+              <a:gd name="adj" fmla="val 3810"/>
+            </a:avLst>
+          </a:prstGeom>
+          <a:solidFill>
+            <a:srgbClr val="FFFFFF"/>
+          </a:solidFill>
+          <a:ln w="38100">
+            <a:solidFill>
+              <a:srgbClr val="D9534F"/>
+            </a:solidFill>
+            <a:prstDash val="solid"/>
+          </a:ln>
+        </p:spPr>
+      </p:sp>
+      <p:sp>
+        <p:nvSpPr>
+          <p:cNvPr id="5" name="Text 3"/>
+          <p:cNvSpPr txBox="1"/>
+          <p:nvPr/>
+        </p:nvSpPr>
+        <p:spPr>
+          <a:xfrm>
+            <a:off x="868680" y="1417320"/>
+            <a:ext cx="10469880" cy="1828800"/>
+          </a:xfrm>
+          <a:prstGeom prst="rect">
+            <a:avLst/>
+          </a:prstGeom>
+          <a:noFill/>
+          <a:ln/>
+        </p:spPr>
+        <p:txBody>
+          <a:bodyPr wrap="square" lIns="0" tIns="0" rIns="0" bIns="0" rtlCol="0" anchor="ctr"/>
+          <a:lstStyle/>
+          <a:p>
+            <a:pPr indent="0" marL="0">
+              <a:buNone/>
+            </a:pPr>
+            <a:r>
+              <a:rPr lang="en-US" sz="2400" b="1" dirty="0">
+                <a:solidFill>
+                  <a:srgbClr val="1E2761"/>
+                </a:solidFill>
+                <a:latin typeface="Cambria" pitchFamily="34" charset="0"/>
+                <a:ea typeface="Cambria" pitchFamily="34" charset="-122"/>
+                <a:cs typeface="Cambria" pitchFamily="34" charset="-120"/>
+              </a:rPr>
+              <a:t>Absolutismus</a:t>
+            </a:r>
+            <a:pPr indent="0" marL="0">
+              <a:buNone/>
+            </a:pPr>
+            <a:r>
+              <a:rPr lang="en-US" sz="2400" dirty="0">
+                <a:solidFill>
+                  <a:srgbClr val="1E2761"/>
+                </a:solidFill>
+                <a:latin typeface="Cambria" pitchFamily="34" charset="0"/>
+                <a:ea typeface="Cambria" pitchFamily="34" charset="-122"/>
+                <a:cs typeface="Cambria" pitchFamily="34" charset="-120"/>
+              </a:rPr>
+              <a:t> war eine Herrschaftsform in Europa im </a:t>
+            </a:r>
+            <a:pPr indent="0" marL="0">
+              <a:buNone/>
+            </a:pPr>
+            <a:r>
+              <a:rPr lang="en-US" sz="2400" b="1" dirty="0">
+                <a:solidFill>
+                  <a:srgbClr val="1E2761"/>
+                </a:solidFill>
+                <a:latin typeface="Cambria" pitchFamily="34" charset="0"/>
+                <a:ea typeface="Cambria" pitchFamily="34" charset="-122"/>
+                <a:cs typeface="Cambria" pitchFamily="34" charset="-120"/>
+              </a:rPr>
+              <a:t>17. und 18. Jahrhundert</a:t>
+            </a:r>
+            <a:pPr indent="0" marL="0">
+              <a:buNone/>
+            </a:pPr>
+            <a:r>
+              <a:rPr lang="en-US" sz="2400" dirty="0">
+                <a:solidFill>
+                  <a:srgbClr val="1E2761"/>
+                </a:solidFill>
+                <a:latin typeface="Cambria" pitchFamily="34" charset="0"/>
+                <a:ea typeface="Cambria" pitchFamily="34" charset="-122"/>
+                <a:cs typeface="Cambria" pitchFamily="34" charset="-120"/>
+              </a:rPr>
+              <a:t>, in der ein einzelner Monarch (König oder Fürst) </a:t>
+            </a:r>
+            <a:pPr indent="0" marL="0">
+              <a:buNone/>
+            </a:pPr>
+            <a:r>
+              <a:rPr lang="en-US" sz="2400" b="1" dirty="0">
+                <a:solidFill>
+                  <a:srgbClr val="1E2761"/>
+                </a:solidFill>
+                <a:latin typeface="Cambria" pitchFamily="34" charset="0"/>
+                <a:ea typeface="Cambria" pitchFamily="34" charset="-122"/>
+                <a:cs typeface="Cambria" pitchFamily="34" charset="-120"/>
+              </a:rPr>
+              <a:t>uneingeschränkt (absolut)</a:t>
+            </a:r>
+            <a:pPr indent="0" marL="0">
+              <a:buNone/>
+            </a:pPr>
+            <a:r>
+              <a:rPr lang="en-US" sz="2400" dirty="0">
+                <a:solidFill>
+                  <a:srgbClr val="1E2761"/>
+                </a:solidFill>
+                <a:latin typeface="Cambria" pitchFamily="34" charset="0"/>
+                <a:ea typeface="Cambria" pitchFamily="34" charset="-122"/>
+                <a:cs typeface="Cambria" pitchFamily="34" charset="-120"/>
+              </a:rPr>
+              <a:t> herrschte.</a:t>
+            </a:r>
+            <a:endParaRPr lang="en-US" sz="2400" dirty="0"/>
+          </a:p>
+        </p:txBody>
+      </p:sp>
+      <p:sp>
+        <p:nvSpPr>
+          <p:cNvPr id="6" name="Shape 4"/>
+          <p:cNvSpPr/>
+          <p:nvPr/>
+        </p:nvSpPr>
+        <p:spPr>
+          <a:xfrm>
+            <a:off x="548640" y="3401568"/>
+            <a:ext cx="11109960" cy="1143000"/>
+          </a:xfrm>
+          <a:prstGeom prst="roundRect">
+            <a:avLst>
+              <a:gd name="adj" fmla="val 6400"/>
+            </a:avLst>
+          </a:prstGeom>
+          <a:solidFill>
+            <a:srgbClr val="EAF0FA"/>
+          </a:solidFill>
+          <a:ln/>
+        </p:spPr>
+      </p:sp>
+      <p:sp>
+        <p:nvSpPr>
+          <p:cNvPr id="7" name="Text 5"/>
+          <p:cNvSpPr txBox="1"/>
+          <p:nvPr/>
+        </p:nvSpPr>
+        <p:spPr>
+          <a:xfrm>
+            <a:off x="822960" y="3401568"/>
+            <a:ext cx="10607040" cy="1143000"/>
+          </a:xfrm>
+          <a:prstGeom prst="rect">
+            <a:avLst/>
+          </a:prstGeom>
+          <a:noFill/>
+          <a:ln/>
+        </p:spPr>
+        <p:txBody>
+          <a:bodyPr wrap="square" lIns="0" tIns="0" rIns="0" bIns="0" rtlCol="0" anchor="ctr"/>
+          <a:lstStyle/>
+          <a:p>
+            <a:pPr indent="0" marL="0">
+              <a:buNone/>
+            </a:pPr>
+            <a:r>
+              <a:rPr lang="en-US" sz="2400" b="1" dirty="0">
+                <a:solidFill>
+                  <a:srgbClr val="5B6B8C"/>
+                </a:solidFill>
+                <a:latin typeface="Calibri" pitchFamily="34" charset="0"/>
+                <a:ea typeface="Calibri" pitchFamily="34" charset="-122"/>
+                <a:cs typeface="Calibri" pitchFamily="34" charset="-120"/>
+              </a:rPr>
+              <a:t>Beispiel:   </a:t>
+            </a:r>
+            <a:pPr indent="0" marL="0">
+              <a:buNone/>
+            </a:pPr>
+            <a:r>
+              <a:rPr lang="en-US" sz="2400" dirty="0">
+                <a:solidFill>
+                  <a:srgbClr val="1E2761"/>
+                </a:solidFill>
+                <a:latin typeface="Cambria" pitchFamily="34" charset="0"/>
+                <a:ea typeface="Cambria" pitchFamily="34" charset="-122"/>
+                <a:cs typeface="Cambria" pitchFamily="34" charset="-120"/>
+              </a:rPr>
+              <a:t>Ludwig XIV. verkündet 1661: „Ich regiere jetzt selbst.“</a:t>
+            </a:r>
+            <a:endParaRPr lang="en-US" sz="2400" dirty="0"/>
+          </a:p>
+        </p:txBody>
+      </p:sp>
+      <p:sp>
+        <p:nvSpPr>
+          <p:cNvPr id="8" name="Shape 6"/>
+          <p:cNvSpPr/>
+          <p:nvPr/>
+        </p:nvSpPr>
+        <p:spPr>
+          <a:xfrm>
+            <a:off x="548640" y="4645152"/>
+            <a:ext cx="11109960" cy="886968"/>
+          </a:xfrm>
+          <a:prstGeom prst="roundRect">
+            <a:avLst>
+              <a:gd name="adj" fmla="val 8247"/>
+            </a:avLst>
+          </a:prstGeom>
+          <a:solidFill>
+            <a:srgbClr val="F4F7FD"/>
+          </a:solidFill>
+          <a:ln/>
+        </p:spPr>
+      </p:sp>
+      <p:sp>
+        <p:nvSpPr>
+          <p:cNvPr id="9" name="Text 7"/>
+          <p:cNvSpPr txBox="1"/>
+          <p:nvPr/>
+        </p:nvSpPr>
+        <p:spPr>
+          <a:xfrm>
+            <a:off x="822960" y="4645152"/>
+            <a:ext cx="10607040" cy="886968"/>
+          </a:xfrm>
+          <a:prstGeom prst="rect">
+            <a:avLst/>
+          </a:prstGeom>
+          <a:noFill/>
+          <a:ln/>
+        </p:spPr>
+        <p:txBody>
+          <a:bodyPr wrap="square" lIns="0" tIns="0" rIns="0" bIns="0" rtlCol="0" anchor="ctr"/>
+          <a:lstStyle/>
+          <a:p>
+            <a:pPr indent="0" marL="0">
+              <a:buNone/>
+            </a:pPr>
+            <a:r>
+              <a:rPr lang="en-US" sz="2400" b="1" dirty="0">
+                <a:solidFill>
+                  <a:srgbClr val="D9534F"/>
+                </a:solidFill>
+                <a:latin typeface="Cambria" pitchFamily="34" charset="0"/>
+                <a:ea typeface="Cambria" pitchFamily="34" charset="-122"/>
+                <a:cs typeface="Cambria" pitchFamily="34" charset="-120"/>
+              </a:rPr>
+              <a:t>Test:   </a:t>
+            </a:r>
+            <a:pPr indent="0" marL="0">
+              <a:buNone/>
+            </a:pPr>
+            <a:r>
+              <a:rPr lang="en-US" sz="2400" dirty="0">
+                <a:solidFill>
+                  <a:srgbClr val="1E2761"/>
+                </a:solidFill>
+                <a:latin typeface="Calibri" pitchFamily="34" charset="0"/>
+                <a:ea typeface="Calibri" pitchFamily="34" charset="-122"/>
+                <a:cs typeface="Calibri" pitchFamily="34" charset="-120"/>
+              </a:rPr>
+              <a:t>Kann jemand den König stoppen (Parlament, Verfassung, Stände)? </a:t>
+            </a:r>
+            <a:pPr indent="0" marL="0">
+              <a:buNone/>
+            </a:pPr>
+            <a:r>
+              <a:rPr lang="en-US" sz="2400" b="1" dirty="0">
+                <a:solidFill>
+                  <a:srgbClr val="1E2761"/>
+                </a:solidFill>
+                <a:latin typeface="Calibri" pitchFamily="34" charset="0"/>
+                <a:ea typeface="Calibri" pitchFamily="34" charset="-122"/>
+                <a:cs typeface="Calibri" pitchFamily="34" charset="-120"/>
+              </a:rPr>
+              <a:t>Nein</a:t>
+            </a:r>
+            <a:pPr indent="0" marL="0">
+              <a:buNone/>
+            </a:pPr>
+            <a:r>
+              <a:rPr lang="en-US" sz="2400" dirty="0">
+                <a:solidFill>
+                  <a:srgbClr val="1E2761"/>
+                </a:solidFill>
+                <a:latin typeface="Calibri" pitchFamily="34" charset="0"/>
+                <a:ea typeface="Calibri" pitchFamily="34" charset="-122"/>
+                <a:cs typeface="Calibri" pitchFamily="34" charset="-120"/>
+              </a:rPr>
+              <a:t> → Absolutismus.</a:t>
+            </a:r>
+            <a:endParaRPr lang="en-US" sz="2400" dirty="0"/>
+          </a:p>
+        </p:txBody>
+      </p:sp>
+      <p:sp>
+        <p:nvSpPr>
+          <p:cNvPr id="10" name="Shape 8"/>
+          <p:cNvSpPr/>
+          <p:nvPr/>
+        </p:nvSpPr>
+        <p:spPr>
+          <a:xfrm>
+            <a:off x="548640" y="5669280"/>
+            <a:ext cx="11109960" cy="777240"/>
+          </a:xfrm>
+          <a:prstGeom prst="roundRect">
+            <a:avLst>
+              <a:gd name="adj" fmla="val 9412"/>
+            </a:avLst>
+          </a:prstGeom>
+          <a:solidFill>
+            <a:srgbClr val="1E2761"/>
+          </a:solidFill>
+          <a:ln/>
+        </p:spPr>
+      </p:sp>
+      <p:sp>
+        <p:nvSpPr>
+          <p:cNvPr id="11" name="Text 9"/>
+          <p:cNvSpPr txBox="1"/>
+          <p:nvPr/>
+        </p:nvSpPr>
+        <p:spPr>
+          <a:xfrm>
+            <a:off x="822960" y="5669280"/>
+            <a:ext cx="10607040" cy="777240"/>
+          </a:xfrm>
+          <a:prstGeom prst="rect">
+            <a:avLst/>
+          </a:prstGeom>
+          <a:noFill/>
+          <a:ln/>
+        </p:spPr>
+        <p:txBody>
+          <a:bodyPr wrap="square" lIns="0" tIns="0" rIns="0" bIns="0" rtlCol="0" anchor="ctr"/>
+          <a:lstStyle/>
+          <a:p>
+            <a:pPr indent="0" marL="0">
+              <a:buNone/>
+            </a:pPr>
+            <a:r>
+              <a:rPr lang="en-US" sz="2400" b="1" dirty="0">
+                <a:solidFill>
+                  <a:srgbClr val="FFFFFF"/>
+                </a:solidFill>
+                <a:latin typeface="Calibri" pitchFamily="34" charset="0"/>
+                <a:ea typeface="Calibri" pitchFamily="34" charset="-122"/>
+                <a:cs typeface="Calibri" pitchFamily="34" charset="-120"/>
+              </a:rPr>
+              <a:t>Jetzt: </a:t>
+            </a:r>
+            <a:pPr indent="0" marL="0">
+              <a:buNone/>
+            </a:pPr>
+            <a:r>
+              <a:rPr lang="en-US" sz="2400" dirty="0">
+                <a:solidFill>
+                  <a:srgbClr val="FFFFFF"/>
+                </a:solidFill>
+                <a:latin typeface="Calibri" pitchFamily="34" charset="0"/>
+                <a:ea typeface="Calibri" pitchFamily="34" charset="-122"/>
+                <a:cs typeface="Calibri" pitchFamily="34" charset="-120"/>
+              </a:rPr>
+              <a:t>Schreibe den Merksatz mit Beispiel ab und rahme ihn rot ein.      </a:t>
+            </a:r>
+            <a:pPr indent="0" marL="0">
+              <a:buNone/>
+            </a:pPr>
+            <a:r>
+              <a:rPr lang="en-US" sz="2400" i="1" dirty="0">
+                <a:solidFill>
+                  <a:srgbClr val="CADCFC"/>
+                </a:solidFill>
+                <a:latin typeface="Calibri" pitchFamily="34" charset="0"/>
+                <a:ea typeface="Calibri" pitchFamily="34" charset="-122"/>
+                <a:cs typeface="Calibri" pitchFamily="34" charset="-120"/>
+              </a:rPr>
+              <a:t>Fertig? Stift hinlegen.</a:t>
+            </a:r>
+            <a:endParaRPr lang="en-US" sz="2400" dirty="0"/>
+          </a:p>
+        </p:txBody>
+      </p:sp>
+      <p:sp>
+        <p:nvSpPr>
+          <p:cNvPr id="12" name="Text 10"/>
+          <p:cNvSpPr txBox="1"/>
+          <p:nvPr/>
+        </p:nvSpPr>
+        <p:spPr>
+          <a:xfrm>
+            <a:off x="548640" y="6510528"/>
+            <a:ext cx="5486400" cy="228600"/>
+          </a:xfrm>
+          <a:prstGeom prst="rect">
+            <a:avLst/>
+          </a:prstGeom>
+          <a:noFill/>
+          <a:ln/>
+        </p:spPr>
+        <p:txBody>
+          <a:bodyPr wrap="square" lIns="0" tIns="0" rIns="0" bIns="0" rtlCol="0" anchor="t"/>
+          <a:lstStyle/>
+          <a:p>
+            <a:pPr indent="0" marL="0">
+              <a:buNone/>
+            </a:pPr>
+            <a:r>
+              <a:rPr lang="en-US" sz="1000" dirty="0">
+                <a:solidFill>
+                  <a:srgbClr val="5B6B8C"/>
+                </a:solidFill>
+                <a:latin typeface="Calibri" pitchFamily="34" charset="0"/>
+                <a:ea typeface="Calibri" pitchFamily="34" charset="-122"/>
+                <a:cs typeface="Calibri" pitchFamily="34" charset="-120"/>
+              </a:rPr>
+              <a:t>Absolutismus · Wiederholung · Geschichte 8</a:t>
+            </a:r>
+            <a:endParaRPr lang="en-US" sz="1000" dirty="0"/>
+          </a:p>
+        </p:txBody>
+      </p:sp>
+      <p:sp>
+        <p:nvSpPr>
+          <p:cNvPr id="13" name="Text 11"/>
+          <p:cNvSpPr txBox="1"/>
+          <p:nvPr/>
+        </p:nvSpPr>
+        <p:spPr>
+          <a:xfrm>
+            <a:off x="11155680" y="6510528"/>
+            <a:ext cx="457200" cy="228600"/>
+          </a:xfrm>
+          <a:prstGeom prst="rect">
+            <a:avLst/>
+          </a:prstGeom>
+          <a:noFill/>
+          <a:ln/>
+        </p:spPr>
+        <p:txBody>
+          <a:bodyPr wrap="square" lIns="0" tIns="0" rIns="0" bIns="0" rtlCol="0" anchor="t"/>
+          <a:lstStyle/>
+          <a:p>
+            <a:pPr algn="r" indent="0" marL="0">
+              <a:buNone/>
+            </a:pPr>
+            <a:r>
+              <a:rPr lang="en-US" sz="1000" dirty="0">
+                <a:solidFill>
+                  <a:srgbClr val="5B6B8C"/>
+                </a:solidFill>
+                <a:latin typeface="Calibri" pitchFamily="34" charset="0"/>
+                <a:ea typeface="Calibri" pitchFamily="34" charset="-122"/>
+                <a:cs typeface="Calibri" pitchFamily="34" charset="-120"/>
+              </a:rPr>
+              <a:t>19</a:t>
             </a:r>
             <a:endParaRPr lang="en-US" sz="1000" dirty="0"/>
           </a:p>
@@ -8446,6 +8568,2500 @@
                 <a:cs typeface="Calibri" pitchFamily="34" charset="-120"/>
               </a:rPr>
               <a:t>2</a:t>
+            </a:r>
+            <a:endParaRPr lang="en-US" sz="1000" dirty="0"/>
+          </a:p>
+        </p:txBody>
+      </p:sp>
+    </p:spTree>
+  </p:cSld>
+  <p:clrMapOvr>
+    <a:masterClrMapping/>
+  </p:clrMapOvr>
+</p:sld>
+</file>
+
+<file path=ppt/slides/slide20.xml><?xml version="1.0" encoding="utf-8"?>
+<p:sld xmlns:a="http://schemas.openxmlformats.org/drawingml/2006/main" xmlns:r="http://schemas.openxmlformats.org/officeDocument/2006/relationships" xmlns:p="http://schemas.openxmlformats.org/presentationml/2006/main">
+  <p:cSld name="Slide 20">
+    <p:bg>
+      <p:bgPr>
+        <a:solidFill>
+          <a:srgbClr val="FFFFFF"/>
+        </a:solidFill>
+      </p:bgPr>
+    </p:bg>
+    <p:spTree>
+      <p:nvGrpSpPr>
+        <p:cNvPr id="1" name=""/>
+        <p:cNvGrpSpPr/>
+        <p:nvPr/>
+      </p:nvGrpSpPr>
+      <p:grpSpPr>
+        <a:xfrm>
+          <a:off x="0" y="0"/>
+          <a:ext cx="0" cy="0"/>
+          <a:chOff x="0" y="0"/>
+          <a:chExt cx="0" cy="0"/>
+        </a:xfrm>
+      </p:grpSpPr>
+      <p:sp>
+        <p:nvSpPr>
+          <p:cNvPr id="2" name="Text 0"/>
+          <p:cNvSpPr txBox="1"/>
+          <p:nvPr/>
+        </p:nvSpPr>
+        <p:spPr>
+          <a:xfrm>
+            <a:off x="548640" y="320040"/>
+            <a:ext cx="7315200" cy="274320"/>
+          </a:xfrm>
+          <a:prstGeom prst="rect">
+            <a:avLst/>
+          </a:prstGeom>
+          <a:noFill/>
+          <a:ln/>
+        </p:spPr>
+        <p:txBody>
+          <a:bodyPr wrap="square" lIns="0" tIns="0" rIns="0" bIns="0" rtlCol="0" anchor="t"/>
+          <a:lstStyle/>
+          <a:p>
+            <a:pPr indent="0" marL="0">
+              <a:buNone/>
+            </a:pPr>
+            <a:r>
+              <a:rPr lang="en-US" sz="1300" b="1" spc="200" kern="0" dirty="0">
+                <a:solidFill>
+                  <a:srgbClr val="5B6B8C"/>
+                </a:solidFill>
+                <a:latin typeface="Calibri" pitchFamily="34" charset="0"/>
+                <a:ea typeface="Calibri" pitchFamily="34" charset="-122"/>
+                <a:cs typeface="Calibri" pitchFamily="34" charset="-120"/>
+              </a:rPr>
+              <a:t>ÜBUNG 2</a:t>
+            </a:r>
+            <a:endParaRPr lang="en-US" sz="1300" dirty="0"/>
+          </a:p>
+        </p:txBody>
+      </p:sp>
+      <p:sp>
+        <p:nvSpPr>
+          <p:cNvPr id="3" name="Text 1"/>
+          <p:cNvSpPr txBox="1"/>
+          <p:nvPr/>
+        </p:nvSpPr>
+        <p:spPr>
+          <a:xfrm>
+            <a:off x="548640" y="594360"/>
+            <a:ext cx="11064240" cy="685800"/>
+          </a:xfrm>
+          <a:prstGeom prst="rect">
+            <a:avLst/>
+          </a:prstGeom>
+          <a:noFill/>
+          <a:ln/>
+        </p:spPr>
+        <p:txBody>
+          <a:bodyPr wrap="square" lIns="0" tIns="0" rIns="0" bIns="0" rtlCol="0" anchor="t"/>
+          <a:lstStyle/>
+          <a:p>
+            <a:pPr indent="0" marL="0">
+              <a:buNone/>
+            </a:pPr>
+            <a:r>
+              <a:rPr lang="en-US" sz="3400" b="1" dirty="0">
+                <a:solidFill>
+                  <a:srgbClr val="1E2761"/>
+                </a:solidFill>
+                <a:latin typeface="Cambria" pitchFamily="34" charset="0"/>
+                <a:ea typeface="Cambria" pitchFamily="34" charset="-122"/>
+                <a:cs typeface="Cambria" pitchFamily="34" charset="-120"/>
+              </a:rPr>
+              <a:t>Absolutismus – ja oder nein?</a:t>
+            </a:r>
+            <a:endParaRPr lang="en-US" sz="3400" dirty="0"/>
+          </a:p>
+        </p:txBody>
+      </p:sp>
+      <p:sp>
+        <p:nvSpPr>
+          <p:cNvPr id="4" name="Shape 2"/>
+          <p:cNvSpPr/>
+          <p:nvPr/>
+        </p:nvSpPr>
+        <p:spPr>
+          <a:xfrm>
+            <a:off x="548640" y="1371600"/>
+            <a:ext cx="11109960" cy="2148840"/>
+          </a:xfrm>
+          <a:prstGeom prst="roundRect">
+            <a:avLst>
+              <a:gd name="adj" fmla="val 3404"/>
+            </a:avLst>
+          </a:prstGeom>
+          <a:solidFill>
+            <a:srgbClr val="EAF0FA"/>
+          </a:solidFill>
+          <a:ln/>
+        </p:spPr>
+      </p:sp>
+      <p:sp>
+        <p:nvSpPr>
+          <p:cNvPr id="5" name="Shape 3"/>
+          <p:cNvSpPr/>
+          <p:nvPr/>
+        </p:nvSpPr>
+        <p:spPr>
+          <a:xfrm>
+            <a:off x="731520" y="1517904"/>
+            <a:ext cx="384048" cy="384048"/>
+          </a:xfrm>
+          <a:prstGeom prst="ellipse">
+            <a:avLst/>
+          </a:prstGeom>
+          <a:solidFill>
+            <a:srgbClr val="1E2761"/>
+          </a:solidFill>
+          <a:ln/>
+        </p:spPr>
+      </p:sp>
+      <p:sp>
+        <p:nvSpPr>
+          <p:cNvPr id="6" name="Text 4"/>
+          <p:cNvSpPr txBox="1"/>
+          <p:nvPr/>
+        </p:nvSpPr>
+        <p:spPr>
+          <a:xfrm>
+            <a:off x="731520" y="1517904"/>
+            <a:ext cx="384048" cy="384048"/>
+          </a:xfrm>
+          <a:prstGeom prst="rect">
+            <a:avLst/>
+          </a:prstGeom>
+          <a:noFill/>
+          <a:ln/>
+        </p:spPr>
+        <p:txBody>
+          <a:bodyPr wrap="square" lIns="0" tIns="0" rIns="0" bIns="0" rtlCol="0" anchor="ctr"/>
+          <a:lstStyle/>
+          <a:p>
+            <a:pPr algn="ctr" indent="0" marL="0">
+              <a:buNone/>
+            </a:pPr>
+            <a:r>
+              <a:rPr lang="en-US" sz="1800" b="1" dirty="0">
+                <a:solidFill>
+                  <a:srgbClr val="FFFFFF"/>
+                </a:solidFill>
+                <a:latin typeface="Calibri" pitchFamily="34" charset="0"/>
+                <a:ea typeface="Calibri" pitchFamily="34" charset="-122"/>
+                <a:cs typeface="Calibri" pitchFamily="34" charset="-120"/>
+              </a:rPr>
+              <a:t>1</a:t>
+            </a:r>
+            <a:endParaRPr lang="en-US" sz="1800" dirty="0"/>
+          </a:p>
+        </p:txBody>
+      </p:sp>
+      <p:sp>
+        <p:nvSpPr>
+          <p:cNvPr id="7" name="Text 5"/>
+          <p:cNvSpPr txBox="1"/>
+          <p:nvPr/>
+        </p:nvSpPr>
+        <p:spPr>
+          <a:xfrm>
+            <a:off x="1280160" y="1481328"/>
+            <a:ext cx="10241280" cy="457200"/>
+          </a:xfrm>
+          <a:prstGeom prst="rect">
+            <a:avLst/>
+          </a:prstGeom>
+          <a:noFill/>
+          <a:ln/>
+        </p:spPr>
+        <p:txBody>
+          <a:bodyPr wrap="square" lIns="0" tIns="0" rIns="0" bIns="0" rtlCol="0" anchor="t"/>
+          <a:lstStyle/>
+          <a:p>
+            <a:pPr indent="0" marL="0">
+              <a:buNone/>
+            </a:pPr>
+            <a:r>
+              <a:rPr lang="en-US" sz="2400" b="1" dirty="0">
+                <a:solidFill>
+                  <a:srgbClr val="1E2761"/>
+                </a:solidFill>
+                <a:latin typeface="Calibri" pitchFamily="34" charset="0"/>
+                <a:ea typeface="Calibri" pitchFamily="34" charset="-122"/>
+                <a:cs typeface="Calibri" pitchFamily="34" charset="-120"/>
+              </a:rPr>
+              <a:t>Schreibe Ü2 an den Rand.</a:t>
+            </a:r>
+            <a:endParaRPr lang="en-US" sz="2400" dirty="0"/>
+          </a:p>
+        </p:txBody>
+      </p:sp>
+      <p:sp>
+        <p:nvSpPr>
+          <p:cNvPr id="8" name="Shape 6"/>
+          <p:cNvSpPr/>
+          <p:nvPr/>
+        </p:nvSpPr>
+        <p:spPr>
+          <a:xfrm>
+            <a:off x="731520" y="2048256"/>
+            <a:ext cx="384048" cy="384048"/>
+          </a:xfrm>
+          <a:prstGeom prst="ellipse">
+            <a:avLst/>
+          </a:prstGeom>
+          <a:solidFill>
+            <a:srgbClr val="1E2761"/>
+          </a:solidFill>
+          <a:ln/>
+        </p:spPr>
+      </p:sp>
+      <p:sp>
+        <p:nvSpPr>
+          <p:cNvPr id="9" name="Text 7"/>
+          <p:cNvSpPr txBox="1"/>
+          <p:nvPr/>
+        </p:nvSpPr>
+        <p:spPr>
+          <a:xfrm>
+            <a:off x="731520" y="2048256"/>
+            <a:ext cx="384048" cy="384048"/>
+          </a:xfrm>
+          <a:prstGeom prst="rect">
+            <a:avLst/>
+          </a:prstGeom>
+          <a:noFill/>
+          <a:ln/>
+        </p:spPr>
+        <p:txBody>
+          <a:bodyPr wrap="square" lIns="0" tIns="0" rIns="0" bIns="0" rtlCol="0" anchor="ctr"/>
+          <a:lstStyle/>
+          <a:p>
+            <a:pPr algn="ctr" indent="0" marL="0">
+              <a:buNone/>
+            </a:pPr>
+            <a:r>
+              <a:rPr lang="en-US" sz="1800" b="1" dirty="0">
+                <a:solidFill>
+                  <a:srgbClr val="FFFFFF"/>
+                </a:solidFill>
+                <a:latin typeface="Calibri" pitchFamily="34" charset="0"/>
+                <a:ea typeface="Calibri" pitchFamily="34" charset="-122"/>
+                <a:cs typeface="Calibri" pitchFamily="34" charset="-120"/>
+              </a:rPr>
+              <a:t>2</a:t>
+            </a:r>
+            <a:endParaRPr lang="en-US" sz="1800" dirty="0"/>
+          </a:p>
+        </p:txBody>
+      </p:sp>
+      <p:sp>
+        <p:nvSpPr>
+          <p:cNvPr id="10" name="Text 8"/>
+          <p:cNvSpPr txBox="1"/>
+          <p:nvPr/>
+        </p:nvSpPr>
+        <p:spPr>
+          <a:xfrm>
+            <a:off x="1280160" y="2011680"/>
+            <a:ext cx="10241280" cy="868680"/>
+          </a:xfrm>
+          <a:prstGeom prst="rect">
+            <a:avLst/>
+          </a:prstGeom>
+          <a:noFill/>
+          <a:ln/>
+        </p:spPr>
+        <p:txBody>
+          <a:bodyPr wrap="square" lIns="0" tIns="0" rIns="0" bIns="0" rtlCol="0" anchor="t"/>
+          <a:lstStyle/>
+          <a:p>
+            <a:pPr indent="0" marL="0">
+              <a:buNone/>
+            </a:pPr>
+            <a:r>
+              <a:rPr lang="en-US" sz="2400" b="1" dirty="0">
+                <a:solidFill>
+                  <a:srgbClr val="1E2761"/>
+                </a:solidFill>
+                <a:latin typeface="Calibri" pitchFamily="34" charset="0"/>
+                <a:ea typeface="Calibri" pitchFamily="34" charset="-122"/>
+                <a:cs typeface="Calibri" pitchFamily="34" charset="-120"/>
+              </a:rPr>
+              <a:t>Schreibe Nummer + „Absolutismus“ oder „kein Absolutismus“.</a:t>
+            </a:r>
+            <a:endParaRPr lang="en-US" sz="2400" dirty="0"/>
+          </a:p>
+        </p:txBody>
+      </p:sp>
+      <p:sp>
+        <p:nvSpPr>
+          <p:cNvPr id="11" name="Shape 9"/>
+          <p:cNvSpPr/>
+          <p:nvPr/>
+        </p:nvSpPr>
+        <p:spPr>
+          <a:xfrm>
+            <a:off x="731520" y="2990088"/>
+            <a:ext cx="384048" cy="384048"/>
+          </a:xfrm>
+          <a:prstGeom prst="ellipse">
+            <a:avLst/>
+          </a:prstGeom>
+          <a:solidFill>
+            <a:srgbClr val="1E2761"/>
+          </a:solidFill>
+          <a:ln/>
+        </p:spPr>
+      </p:sp>
+      <p:sp>
+        <p:nvSpPr>
+          <p:cNvPr id="12" name="Text 10"/>
+          <p:cNvSpPr txBox="1"/>
+          <p:nvPr/>
+        </p:nvSpPr>
+        <p:spPr>
+          <a:xfrm>
+            <a:off x="731520" y="2990088"/>
+            <a:ext cx="384048" cy="384048"/>
+          </a:xfrm>
+          <a:prstGeom prst="rect">
+            <a:avLst/>
+          </a:prstGeom>
+          <a:noFill/>
+          <a:ln/>
+        </p:spPr>
+        <p:txBody>
+          <a:bodyPr wrap="square" lIns="0" tIns="0" rIns="0" bIns="0" rtlCol="0" anchor="ctr"/>
+          <a:lstStyle/>
+          <a:p>
+            <a:pPr algn="ctr" indent="0" marL="0">
+              <a:buNone/>
+            </a:pPr>
+            <a:r>
+              <a:rPr lang="en-US" sz="1800" b="1" dirty="0">
+                <a:solidFill>
+                  <a:srgbClr val="FFFFFF"/>
+                </a:solidFill>
+                <a:latin typeface="Calibri" pitchFamily="34" charset="0"/>
+                <a:ea typeface="Calibri" pitchFamily="34" charset="-122"/>
+                <a:cs typeface="Calibri" pitchFamily="34" charset="-120"/>
+              </a:rPr>
+              <a:t>3</a:t>
+            </a:r>
+            <a:endParaRPr lang="en-US" sz="1800" dirty="0"/>
+          </a:p>
+        </p:txBody>
+      </p:sp>
+      <p:sp>
+        <p:nvSpPr>
+          <p:cNvPr id="13" name="Text 11"/>
+          <p:cNvSpPr txBox="1"/>
+          <p:nvPr/>
+        </p:nvSpPr>
+        <p:spPr>
+          <a:xfrm>
+            <a:off x="1280160" y="2953512"/>
+            <a:ext cx="10241280" cy="457200"/>
+          </a:xfrm>
+          <a:prstGeom prst="rect">
+            <a:avLst/>
+          </a:prstGeom>
+          <a:noFill/>
+          <a:ln/>
+        </p:spPr>
+        <p:txBody>
+          <a:bodyPr wrap="square" lIns="0" tIns="0" rIns="0" bIns="0" rtlCol="0" anchor="t"/>
+          <a:lstStyle/>
+          <a:p>
+            <a:pPr indent="0" marL="0">
+              <a:buNone/>
+            </a:pPr>
+            <a:r>
+              <a:rPr lang="en-US" sz="2400" b="1" dirty="0">
+                <a:solidFill>
+                  <a:srgbClr val="1E2761"/>
+                </a:solidFill>
+                <a:latin typeface="Calibri" pitchFamily="34" charset="0"/>
+                <a:ea typeface="Calibri" pitchFamily="34" charset="-122"/>
+                <a:cs typeface="Calibri" pitchFamily="34" charset="-120"/>
+              </a:rPr>
+              <a:t>Begründe mit dem Test: Kann jemand den König stoppen?</a:t>
+            </a:r>
+            <a:endParaRPr lang="en-US" sz="2400" dirty="0"/>
+          </a:p>
+        </p:txBody>
+      </p:sp>
+      <p:sp>
+        <p:nvSpPr>
+          <p:cNvPr id="14" name="Shape 12"/>
+          <p:cNvSpPr/>
+          <p:nvPr/>
+        </p:nvSpPr>
+        <p:spPr>
+          <a:xfrm>
+            <a:off x="548640" y="5669280"/>
+            <a:ext cx="11109960" cy="777240"/>
+          </a:xfrm>
+          <a:prstGeom prst="roundRect">
+            <a:avLst>
+              <a:gd name="adj" fmla="val 9412"/>
+            </a:avLst>
+          </a:prstGeom>
+          <a:solidFill>
+            <a:srgbClr val="1E2761"/>
+          </a:solidFill>
+          <a:ln/>
+        </p:spPr>
+      </p:sp>
+      <p:sp>
+        <p:nvSpPr>
+          <p:cNvPr id="15" name="Text 13"/>
+          <p:cNvSpPr txBox="1"/>
+          <p:nvPr/>
+        </p:nvSpPr>
+        <p:spPr>
+          <a:xfrm>
+            <a:off x="822960" y="5669280"/>
+            <a:ext cx="10607040" cy="777240"/>
+          </a:xfrm>
+          <a:prstGeom prst="rect">
+            <a:avLst/>
+          </a:prstGeom>
+          <a:noFill/>
+          <a:ln/>
+        </p:spPr>
+        <p:txBody>
+          <a:bodyPr wrap="square" lIns="0" tIns="0" rIns="0" bIns="0" rtlCol="0" anchor="ctr"/>
+          <a:lstStyle/>
+          <a:p>
+            <a:pPr indent="0" marL="0">
+              <a:buNone/>
+            </a:pPr>
+            <a:r>
+              <a:rPr lang="en-US" sz="2400" b="1" dirty="0">
+                <a:solidFill>
+                  <a:srgbClr val="FFFFFF"/>
+                </a:solidFill>
+                <a:latin typeface="Calibri" pitchFamily="34" charset="0"/>
+                <a:ea typeface="Calibri" pitchFamily="34" charset="-122"/>
+                <a:cs typeface="Calibri" pitchFamily="34" charset="-120"/>
+              </a:rPr>
+              <a:t>Zeit: </a:t>
+            </a:r>
+            <a:pPr indent="0" marL="0">
+              <a:buNone/>
+            </a:pPr>
+            <a:r>
+              <a:rPr lang="en-US" sz="2400" dirty="0">
+                <a:solidFill>
+                  <a:srgbClr val="FFFFFF"/>
+                </a:solidFill>
+                <a:latin typeface="Calibri" pitchFamily="34" charset="0"/>
+                <a:ea typeface="Calibri" pitchFamily="34" charset="-122"/>
+                <a:cs typeface="Calibri" pitchFamily="34" charset="-120"/>
+              </a:rPr>
+              <a:t>3 Minuten · allein · leise      </a:t>
+            </a:r>
+            <a:pPr indent="0" marL="0">
+              <a:buNone/>
+            </a:pPr>
+            <a:r>
+              <a:rPr lang="en-US" sz="2400" i="1" dirty="0">
+                <a:solidFill>
+                  <a:srgbClr val="CADCFC"/>
+                </a:solidFill>
+                <a:latin typeface="Calibri" pitchFamily="34" charset="0"/>
+                <a:ea typeface="Calibri" pitchFamily="34" charset="-122"/>
+                <a:cs typeface="Calibri" pitchFamily="34" charset="-120"/>
+              </a:rPr>
+              <a:t>Fertig? Stift hinlegen und noch einmal durchlesen.</a:t>
+            </a:r>
+            <a:endParaRPr lang="en-US" sz="2400" dirty="0"/>
+          </a:p>
+        </p:txBody>
+      </p:sp>
+      <p:sp>
+        <p:nvSpPr>
+          <p:cNvPr id="16" name="Text 14"/>
+          <p:cNvSpPr txBox="1"/>
+          <p:nvPr/>
+        </p:nvSpPr>
+        <p:spPr>
+          <a:xfrm>
+            <a:off x="548640" y="6510528"/>
+            <a:ext cx="5486400" cy="228600"/>
+          </a:xfrm>
+          <a:prstGeom prst="rect">
+            <a:avLst/>
+          </a:prstGeom>
+          <a:noFill/>
+          <a:ln/>
+        </p:spPr>
+        <p:txBody>
+          <a:bodyPr wrap="square" lIns="0" tIns="0" rIns="0" bIns="0" rtlCol="0" anchor="t"/>
+          <a:lstStyle/>
+          <a:p>
+            <a:pPr indent="0" marL="0">
+              <a:buNone/>
+            </a:pPr>
+            <a:r>
+              <a:rPr lang="en-US" sz="1000" dirty="0">
+                <a:solidFill>
+                  <a:srgbClr val="5B6B8C"/>
+                </a:solidFill>
+                <a:latin typeface="Calibri" pitchFamily="34" charset="0"/>
+                <a:ea typeface="Calibri" pitchFamily="34" charset="-122"/>
+                <a:cs typeface="Calibri" pitchFamily="34" charset="-120"/>
+              </a:rPr>
+              <a:t>Absolutismus · Wiederholung · Geschichte 8</a:t>
+            </a:r>
+            <a:endParaRPr lang="en-US" sz="1000" dirty="0"/>
+          </a:p>
+        </p:txBody>
+      </p:sp>
+      <p:sp>
+        <p:nvSpPr>
+          <p:cNvPr id="17" name="Text 15"/>
+          <p:cNvSpPr txBox="1"/>
+          <p:nvPr/>
+        </p:nvSpPr>
+        <p:spPr>
+          <a:xfrm>
+            <a:off x="11155680" y="6510528"/>
+            <a:ext cx="457200" cy="228600"/>
+          </a:xfrm>
+          <a:prstGeom prst="rect">
+            <a:avLst/>
+          </a:prstGeom>
+          <a:noFill/>
+          <a:ln/>
+        </p:spPr>
+        <p:txBody>
+          <a:bodyPr wrap="square" lIns="0" tIns="0" rIns="0" bIns="0" rtlCol="0" anchor="t"/>
+          <a:lstStyle/>
+          <a:p>
+            <a:pPr algn="r" indent="0" marL="0">
+              <a:buNone/>
+            </a:pPr>
+            <a:r>
+              <a:rPr lang="en-US" sz="1000" dirty="0">
+                <a:solidFill>
+                  <a:srgbClr val="5B6B8C"/>
+                </a:solidFill>
+                <a:latin typeface="Calibri" pitchFamily="34" charset="0"/>
+                <a:ea typeface="Calibri" pitchFamily="34" charset="-122"/>
+                <a:cs typeface="Calibri" pitchFamily="34" charset="-120"/>
+              </a:rPr>
+              <a:t>20</a:t>
+            </a:r>
+            <a:endParaRPr lang="en-US" sz="1000" dirty="0"/>
+          </a:p>
+        </p:txBody>
+      </p:sp>
+      <p:sp>
+        <p:nvSpPr>
+          <p:cNvPr id="19" name="Shape 16"/>
+          <p:cNvSpPr/>
+          <p:nvPr/>
+        </p:nvSpPr>
+        <p:spPr>
+          <a:xfrm>
+            <a:off x="548640" y="3703320"/>
+            <a:ext cx="11109960" cy="395478"/>
+          </a:xfrm>
+          <a:prstGeom prst="roundRect">
+            <a:avLst>
+              <a:gd name="adj" fmla="val 18497"/>
+            </a:avLst>
+          </a:prstGeom>
+          <a:solidFill>
+            <a:srgbClr val="F4F7FD"/>
+          </a:solidFill>
+          <a:ln/>
+        </p:spPr>
+      </p:sp>
+      <p:sp>
+        <p:nvSpPr>
+          <p:cNvPr id="20" name="Shape 17"/>
+          <p:cNvSpPr/>
+          <p:nvPr/>
+        </p:nvSpPr>
+        <p:spPr>
+          <a:xfrm>
+            <a:off x="685800" y="3718179"/>
+            <a:ext cx="365760" cy="365760"/>
+          </a:xfrm>
+          <a:prstGeom prst="ellipse">
+            <a:avLst/>
+          </a:prstGeom>
+          <a:solidFill>
+            <a:srgbClr val="D9534F"/>
+          </a:solidFill>
+          <a:ln/>
+        </p:spPr>
+      </p:sp>
+      <p:sp>
+        <p:nvSpPr>
+          <p:cNvPr id="21" name="Text 18"/>
+          <p:cNvSpPr txBox="1"/>
+          <p:nvPr/>
+        </p:nvSpPr>
+        <p:spPr>
+          <a:xfrm>
+            <a:off x="685800" y="3718179"/>
+            <a:ext cx="365760" cy="365760"/>
+          </a:xfrm>
+          <a:prstGeom prst="rect">
+            <a:avLst/>
+          </a:prstGeom>
+          <a:noFill/>
+          <a:ln/>
+        </p:spPr>
+        <p:txBody>
+          <a:bodyPr wrap="square" lIns="0" tIns="0" rIns="0" bIns="0" rtlCol="0" anchor="ctr"/>
+          <a:lstStyle/>
+          <a:p>
+            <a:pPr algn="ctr" indent="0" marL="0">
+              <a:buNone/>
+            </a:pPr>
+            <a:r>
+              <a:rPr lang="en-US" sz="1800" b="1" dirty="0">
+                <a:solidFill>
+                  <a:srgbClr val="FFFFFF"/>
+                </a:solidFill>
+                <a:latin typeface="Calibri" pitchFamily="34" charset="0"/>
+                <a:ea typeface="Calibri" pitchFamily="34" charset="-122"/>
+                <a:cs typeface="Calibri" pitchFamily="34" charset="-120"/>
+              </a:rPr>
+              <a:t>1</a:t>
+            </a:r>
+            <a:endParaRPr lang="en-US" sz="1800" dirty="0"/>
+          </a:p>
+        </p:txBody>
+      </p:sp>
+      <p:sp>
+        <p:nvSpPr>
+          <p:cNvPr id="22" name="Text 19"/>
+          <p:cNvSpPr txBox="1"/>
+          <p:nvPr/>
+        </p:nvSpPr>
+        <p:spPr>
+          <a:xfrm>
+            <a:off x="1280160" y="3703320"/>
+            <a:ext cx="10241280" cy="395478"/>
+          </a:xfrm>
+          <a:prstGeom prst="rect">
+            <a:avLst/>
+          </a:prstGeom>
+          <a:noFill/>
+          <a:ln/>
+        </p:spPr>
+        <p:txBody>
+          <a:bodyPr wrap="square" lIns="0" tIns="0" rIns="0" bIns="0" rtlCol="0" anchor="ctr"/>
+          <a:lstStyle/>
+          <a:p>
+            <a:pPr indent="0" marL="0">
+              <a:buNone/>
+            </a:pPr>
+            <a:r>
+              <a:rPr lang="en-US" sz="2200" dirty="0">
+                <a:solidFill>
+                  <a:srgbClr val="1E2761"/>
+                </a:solidFill>
+                <a:latin typeface="Cambria" pitchFamily="34" charset="0"/>
+                <a:ea typeface="Cambria" pitchFamily="34" charset="-122"/>
+                <a:cs typeface="Cambria" pitchFamily="34" charset="-120"/>
+              </a:rPr>
+              <a:t>Der König entscheidet allein über Gesetze, Krieg und Steuern.</a:t>
+            </a:r>
+            <a:endParaRPr lang="en-US" sz="2200" dirty="0"/>
+          </a:p>
+        </p:txBody>
+      </p:sp>
+      <p:sp>
+        <p:nvSpPr>
+          <p:cNvPr id="23" name="Shape 20"/>
+          <p:cNvSpPr/>
+          <p:nvPr/>
+        </p:nvSpPr>
+        <p:spPr>
+          <a:xfrm>
+            <a:off x="548640" y="4171950"/>
+            <a:ext cx="11109960" cy="395478"/>
+          </a:xfrm>
+          <a:prstGeom prst="roundRect">
+            <a:avLst>
+              <a:gd name="adj" fmla="val 18497"/>
+            </a:avLst>
+          </a:prstGeom>
+          <a:solidFill>
+            <a:srgbClr val="F4F7FD"/>
+          </a:solidFill>
+          <a:ln/>
+        </p:spPr>
+      </p:sp>
+      <p:sp>
+        <p:nvSpPr>
+          <p:cNvPr id="24" name="Shape 21"/>
+          <p:cNvSpPr/>
+          <p:nvPr/>
+        </p:nvSpPr>
+        <p:spPr>
+          <a:xfrm>
+            <a:off x="685800" y="4186809"/>
+            <a:ext cx="365760" cy="365760"/>
+          </a:xfrm>
+          <a:prstGeom prst="ellipse">
+            <a:avLst/>
+          </a:prstGeom>
+          <a:solidFill>
+            <a:srgbClr val="D9534F"/>
+          </a:solidFill>
+          <a:ln/>
+        </p:spPr>
+      </p:sp>
+      <p:sp>
+        <p:nvSpPr>
+          <p:cNvPr id="25" name="Text 22"/>
+          <p:cNvSpPr txBox="1"/>
+          <p:nvPr/>
+        </p:nvSpPr>
+        <p:spPr>
+          <a:xfrm>
+            <a:off x="685800" y="4186809"/>
+            <a:ext cx="365760" cy="365760"/>
+          </a:xfrm>
+          <a:prstGeom prst="rect">
+            <a:avLst/>
+          </a:prstGeom>
+          <a:noFill/>
+          <a:ln/>
+        </p:spPr>
+        <p:txBody>
+          <a:bodyPr wrap="square" lIns="0" tIns="0" rIns="0" bIns="0" rtlCol="0" anchor="ctr"/>
+          <a:lstStyle/>
+          <a:p>
+            <a:pPr algn="ctr" indent="0" marL="0">
+              <a:buNone/>
+            </a:pPr>
+            <a:r>
+              <a:rPr lang="en-US" sz="1800" b="1" dirty="0">
+                <a:solidFill>
+                  <a:srgbClr val="FFFFFF"/>
+                </a:solidFill>
+                <a:latin typeface="Calibri" pitchFamily="34" charset="0"/>
+                <a:ea typeface="Calibri" pitchFamily="34" charset="-122"/>
+                <a:cs typeface="Calibri" pitchFamily="34" charset="-120"/>
+              </a:rPr>
+              <a:t>2</a:t>
+            </a:r>
+            <a:endParaRPr lang="en-US" sz="1800" dirty="0"/>
+          </a:p>
+        </p:txBody>
+      </p:sp>
+      <p:sp>
+        <p:nvSpPr>
+          <p:cNvPr id="26" name="Text 23"/>
+          <p:cNvSpPr txBox="1"/>
+          <p:nvPr/>
+        </p:nvSpPr>
+        <p:spPr>
+          <a:xfrm>
+            <a:off x="1280160" y="4171950"/>
+            <a:ext cx="10241280" cy="395478"/>
+          </a:xfrm>
+          <a:prstGeom prst="rect">
+            <a:avLst/>
+          </a:prstGeom>
+          <a:noFill/>
+          <a:ln/>
+        </p:spPr>
+        <p:txBody>
+          <a:bodyPr wrap="square" lIns="0" tIns="0" rIns="0" bIns="0" rtlCol="0" anchor="ctr"/>
+          <a:lstStyle/>
+          <a:p>
+            <a:pPr indent="0" marL="0">
+              <a:buNone/>
+            </a:pPr>
+            <a:r>
+              <a:rPr lang="en-US" sz="2200" dirty="0">
+                <a:solidFill>
+                  <a:srgbClr val="1E2761"/>
+                </a:solidFill>
+                <a:latin typeface="Cambria" pitchFamily="34" charset="0"/>
+                <a:ea typeface="Cambria" pitchFamily="34" charset="-122"/>
+                <a:cs typeface="Cambria" pitchFamily="34" charset="-120"/>
+              </a:rPr>
+              <a:t>Ein Parlament kann Steuererhöhungen des Königs verbieten.</a:t>
+            </a:r>
+            <a:endParaRPr lang="en-US" sz="2200" dirty="0"/>
+          </a:p>
+        </p:txBody>
+      </p:sp>
+      <p:sp>
+        <p:nvSpPr>
+          <p:cNvPr id="27" name="Shape 24"/>
+          <p:cNvSpPr/>
+          <p:nvPr/>
+        </p:nvSpPr>
+        <p:spPr>
+          <a:xfrm>
+            <a:off x="548640" y="4640580"/>
+            <a:ext cx="11109960" cy="395478"/>
+          </a:xfrm>
+          <a:prstGeom prst="roundRect">
+            <a:avLst>
+              <a:gd name="adj" fmla="val 18497"/>
+            </a:avLst>
+          </a:prstGeom>
+          <a:solidFill>
+            <a:srgbClr val="F4F7FD"/>
+          </a:solidFill>
+          <a:ln/>
+        </p:spPr>
+      </p:sp>
+      <p:sp>
+        <p:nvSpPr>
+          <p:cNvPr id="28" name="Shape 25"/>
+          <p:cNvSpPr/>
+          <p:nvPr/>
+        </p:nvSpPr>
+        <p:spPr>
+          <a:xfrm>
+            <a:off x="685800" y="4655439"/>
+            <a:ext cx="365760" cy="365760"/>
+          </a:xfrm>
+          <a:prstGeom prst="ellipse">
+            <a:avLst/>
+          </a:prstGeom>
+          <a:solidFill>
+            <a:srgbClr val="D9534F"/>
+          </a:solidFill>
+          <a:ln/>
+        </p:spPr>
+      </p:sp>
+      <p:sp>
+        <p:nvSpPr>
+          <p:cNvPr id="29" name="Text 26"/>
+          <p:cNvSpPr txBox="1"/>
+          <p:nvPr/>
+        </p:nvSpPr>
+        <p:spPr>
+          <a:xfrm>
+            <a:off x="685800" y="4655439"/>
+            <a:ext cx="365760" cy="365760"/>
+          </a:xfrm>
+          <a:prstGeom prst="rect">
+            <a:avLst/>
+          </a:prstGeom>
+          <a:noFill/>
+          <a:ln/>
+        </p:spPr>
+        <p:txBody>
+          <a:bodyPr wrap="square" lIns="0" tIns="0" rIns="0" bIns="0" rtlCol="0" anchor="ctr"/>
+          <a:lstStyle/>
+          <a:p>
+            <a:pPr algn="ctr" indent="0" marL="0">
+              <a:buNone/>
+            </a:pPr>
+            <a:r>
+              <a:rPr lang="en-US" sz="1800" b="1" dirty="0">
+                <a:solidFill>
+                  <a:srgbClr val="FFFFFF"/>
+                </a:solidFill>
+                <a:latin typeface="Calibri" pitchFamily="34" charset="0"/>
+                <a:ea typeface="Calibri" pitchFamily="34" charset="-122"/>
+                <a:cs typeface="Calibri" pitchFamily="34" charset="-120"/>
+              </a:rPr>
+              <a:t>3</a:t>
+            </a:r>
+            <a:endParaRPr lang="en-US" sz="1800" dirty="0"/>
+          </a:p>
+        </p:txBody>
+      </p:sp>
+      <p:sp>
+        <p:nvSpPr>
+          <p:cNvPr id="30" name="Text 27"/>
+          <p:cNvSpPr txBox="1"/>
+          <p:nvPr/>
+        </p:nvSpPr>
+        <p:spPr>
+          <a:xfrm>
+            <a:off x="1280160" y="4640580"/>
+            <a:ext cx="10241280" cy="395478"/>
+          </a:xfrm>
+          <a:prstGeom prst="rect">
+            <a:avLst/>
+          </a:prstGeom>
+          <a:noFill/>
+          <a:ln/>
+        </p:spPr>
+        <p:txBody>
+          <a:bodyPr wrap="square" lIns="0" tIns="0" rIns="0" bIns="0" rtlCol="0" anchor="ctr"/>
+          <a:lstStyle/>
+          <a:p>
+            <a:pPr indent="0" marL="0">
+              <a:buNone/>
+            </a:pPr>
+            <a:r>
+              <a:rPr lang="en-US" sz="2200" dirty="0">
+                <a:solidFill>
+                  <a:srgbClr val="1E2761"/>
+                </a:solidFill>
+                <a:latin typeface="Cambria" pitchFamily="34" charset="0"/>
+                <a:ea typeface="Cambria" pitchFamily="34" charset="-122"/>
+                <a:cs typeface="Cambria" pitchFamily="34" charset="-120"/>
+              </a:rPr>
+              <a:t>Beamte handeln im Namen des Königs und müssen ihm gehorchen.</a:t>
+            </a:r>
+            <a:endParaRPr lang="en-US" sz="2200" dirty="0"/>
+          </a:p>
+        </p:txBody>
+      </p:sp>
+      <p:sp>
+        <p:nvSpPr>
+          <p:cNvPr id="31" name="Shape 28"/>
+          <p:cNvSpPr/>
+          <p:nvPr/>
+        </p:nvSpPr>
+        <p:spPr>
+          <a:xfrm>
+            <a:off x="548640" y="5109210"/>
+            <a:ext cx="11109960" cy="395478"/>
+          </a:xfrm>
+          <a:prstGeom prst="roundRect">
+            <a:avLst>
+              <a:gd name="adj" fmla="val 18497"/>
+            </a:avLst>
+          </a:prstGeom>
+          <a:solidFill>
+            <a:srgbClr val="F4F7FD"/>
+          </a:solidFill>
+          <a:ln/>
+        </p:spPr>
+      </p:sp>
+      <p:sp>
+        <p:nvSpPr>
+          <p:cNvPr id="32" name="Shape 29"/>
+          <p:cNvSpPr/>
+          <p:nvPr/>
+        </p:nvSpPr>
+        <p:spPr>
+          <a:xfrm>
+            <a:off x="685800" y="5124069"/>
+            <a:ext cx="365760" cy="365760"/>
+          </a:xfrm>
+          <a:prstGeom prst="ellipse">
+            <a:avLst/>
+          </a:prstGeom>
+          <a:solidFill>
+            <a:srgbClr val="D9534F"/>
+          </a:solidFill>
+          <a:ln/>
+        </p:spPr>
+      </p:sp>
+      <p:sp>
+        <p:nvSpPr>
+          <p:cNvPr id="33" name="Text 30"/>
+          <p:cNvSpPr txBox="1"/>
+          <p:nvPr/>
+        </p:nvSpPr>
+        <p:spPr>
+          <a:xfrm>
+            <a:off x="685800" y="5124069"/>
+            <a:ext cx="365760" cy="365760"/>
+          </a:xfrm>
+          <a:prstGeom prst="rect">
+            <a:avLst/>
+          </a:prstGeom>
+          <a:noFill/>
+          <a:ln/>
+        </p:spPr>
+        <p:txBody>
+          <a:bodyPr wrap="square" lIns="0" tIns="0" rIns="0" bIns="0" rtlCol="0" anchor="ctr"/>
+          <a:lstStyle/>
+          <a:p>
+            <a:pPr algn="ctr" indent="0" marL="0">
+              <a:buNone/>
+            </a:pPr>
+            <a:r>
+              <a:rPr lang="en-US" sz="1800" b="1" dirty="0">
+                <a:solidFill>
+                  <a:srgbClr val="FFFFFF"/>
+                </a:solidFill>
+                <a:latin typeface="Calibri" pitchFamily="34" charset="0"/>
+                <a:ea typeface="Calibri" pitchFamily="34" charset="-122"/>
+                <a:cs typeface="Calibri" pitchFamily="34" charset="-120"/>
+              </a:rPr>
+              <a:t>4</a:t>
+            </a:r>
+            <a:endParaRPr lang="en-US" sz="1800" dirty="0"/>
+          </a:p>
+        </p:txBody>
+      </p:sp>
+      <p:sp>
+        <p:nvSpPr>
+          <p:cNvPr id="34" name="Text 31"/>
+          <p:cNvSpPr txBox="1"/>
+          <p:nvPr/>
+        </p:nvSpPr>
+        <p:spPr>
+          <a:xfrm>
+            <a:off x="1280160" y="5109210"/>
+            <a:ext cx="10241280" cy="395478"/>
+          </a:xfrm>
+          <a:prstGeom prst="rect">
+            <a:avLst/>
+          </a:prstGeom>
+          <a:noFill/>
+          <a:ln/>
+        </p:spPr>
+        <p:txBody>
+          <a:bodyPr wrap="square" lIns="0" tIns="0" rIns="0" bIns="0" rtlCol="0" anchor="ctr"/>
+          <a:lstStyle/>
+          <a:p>
+            <a:pPr indent="0" marL="0">
+              <a:buNone/>
+            </a:pPr>
+            <a:r>
+              <a:rPr lang="en-US" sz="2200" dirty="0">
+                <a:solidFill>
+                  <a:srgbClr val="1E2761"/>
+                </a:solidFill>
+                <a:latin typeface="Cambria" pitchFamily="34" charset="0"/>
+                <a:ea typeface="Cambria" pitchFamily="34" charset="-122"/>
+                <a:cs typeface="Cambria" pitchFamily="34" charset="-120"/>
+              </a:rPr>
+              <a:t>Die Bürger wählen alle vier Jahre ihre Regierung.</a:t>
+            </a:r>
+            <a:endParaRPr lang="en-US" sz="2200" dirty="0"/>
+          </a:p>
+        </p:txBody>
+      </p:sp>
+    </p:spTree>
+  </p:cSld>
+  <p:clrMapOvr>
+    <a:masterClrMapping/>
+  </p:clrMapOvr>
+</p:sld>
+</file>
+
+<file path=ppt/slides/slide21.xml><?xml version="1.0" encoding="utf-8"?>
+<p:sld xmlns:a="http://schemas.openxmlformats.org/drawingml/2006/main" xmlns:r="http://schemas.openxmlformats.org/officeDocument/2006/relationships" xmlns:p="http://schemas.openxmlformats.org/presentationml/2006/main">
+  <p:cSld name="Slide 21">
+    <p:bg>
+      <p:bgPr>
+        <a:solidFill>
+          <a:srgbClr val="FFFFFF"/>
+        </a:solidFill>
+      </p:bgPr>
+    </p:bg>
+    <p:spTree>
+      <p:nvGrpSpPr>
+        <p:cNvPr id="1" name=""/>
+        <p:cNvGrpSpPr/>
+        <p:nvPr/>
+      </p:nvGrpSpPr>
+      <p:grpSpPr>
+        <a:xfrm>
+          <a:off x="0" y="0"/>
+          <a:ext cx="0" cy="0"/>
+          <a:chOff x="0" y="0"/>
+          <a:chExt cx="0" cy="0"/>
+        </a:xfrm>
+      </p:grpSpPr>
+      <p:sp>
+        <p:nvSpPr>
+          <p:cNvPr id="2" name="Text 0"/>
+          <p:cNvSpPr txBox="1"/>
+          <p:nvPr/>
+        </p:nvSpPr>
+        <p:spPr>
+          <a:xfrm>
+            <a:off x="548640" y="320040"/>
+            <a:ext cx="7315200" cy="274320"/>
+          </a:xfrm>
+          <a:prstGeom prst="rect">
+            <a:avLst/>
+          </a:prstGeom>
+          <a:noFill/>
+          <a:ln/>
+        </p:spPr>
+        <p:txBody>
+          <a:bodyPr wrap="square" lIns="0" tIns="0" rIns="0" bIns="0" rtlCol="0" anchor="t"/>
+          <a:lstStyle/>
+          <a:p>
+            <a:pPr indent="0" marL="0">
+              <a:buNone/>
+            </a:pPr>
+            <a:r>
+              <a:rPr lang="en-US" sz="1300" b="1" spc="200" kern="0" dirty="0">
+                <a:solidFill>
+                  <a:srgbClr val="5B6B8C"/>
+                </a:solidFill>
+                <a:latin typeface="Calibri" pitchFamily="34" charset="0"/>
+                <a:ea typeface="Calibri" pitchFamily="34" charset="-122"/>
+                <a:cs typeface="Calibri" pitchFamily="34" charset="-120"/>
+              </a:rPr>
+              <a:t>ÜBUNG 3</a:t>
+            </a:r>
+            <a:endParaRPr lang="en-US" sz="1300" dirty="0"/>
+          </a:p>
+        </p:txBody>
+      </p:sp>
+      <p:sp>
+        <p:nvSpPr>
+          <p:cNvPr id="3" name="Text 1"/>
+          <p:cNvSpPr txBox="1"/>
+          <p:nvPr/>
+        </p:nvSpPr>
+        <p:spPr>
+          <a:xfrm>
+            <a:off x="548640" y="594360"/>
+            <a:ext cx="11064240" cy="685800"/>
+          </a:xfrm>
+          <a:prstGeom prst="rect">
+            <a:avLst/>
+          </a:prstGeom>
+          <a:noFill/>
+          <a:ln/>
+        </p:spPr>
+        <p:txBody>
+          <a:bodyPr wrap="square" lIns="0" tIns="0" rIns="0" bIns="0" rtlCol="0" anchor="t"/>
+          <a:lstStyle/>
+          <a:p>
+            <a:pPr indent="0" marL="0">
+              <a:buNone/>
+            </a:pPr>
+            <a:r>
+              <a:rPr lang="en-US" sz="3400" b="1" dirty="0">
+                <a:solidFill>
+                  <a:srgbClr val="1E2761"/>
+                </a:solidFill>
+                <a:latin typeface="Cambria" pitchFamily="34" charset="0"/>
+                <a:ea typeface="Cambria" pitchFamily="34" charset="-122"/>
+                <a:cs typeface="Cambria" pitchFamily="34" charset="-120"/>
+              </a:rPr>
+              <a:t>Im Absolutismus fühle ich mich …</a:t>
+            </a:r>
+            <a:endParaRPr lang="en-US" sz="3400" dirty="0"/>
+          </a:p>
+        </p:txBody>
+      </p:sp>
+      <p:sp>
+        <p:nvSpPr>
+          <p:cNvPr id="4" name="Shape 2"/>
+          <p:cNvSpPr/>
+          <p:nvPr/>
+        </p:nvSpPr>
+        <p:spPr>
+          <a:xfrm>
+            <a:off x="548640" y="1371600"/>
+            <a:ext cx="8138160" cy="3383280"/>
+          </a:xfrm>
+          <a:prstGeom prst="roundRect">
+            <a:avLst>
+              <a:gd name="adj" fmla="val 2162"/>
+            </a:avLst>
+          </a:prstGeom>
+          <a:solidFill>
+            <a:srgbClr val="EAF0FA"/>
+          </a:solidFill>
+          <a:ln/>
+        </p:spPr>
+      </p:sp>
+      <p:sp>
+        <p:nvSpPr>
+          <p:cNvPr id="5" name="Shape 3"/>
+          <p:cNvSpPr/>
+          <p:nvPr/>
+        </p:nvSpPr>
+        <p:spPr>
+          <a:xfrm>
+            <a:off x="731520" y="1517904"/>
+            <a:ext cx="384048" cy="384048"/>
+          </a:xfrm>
+          <a:prstGeom prst="ellipse">
+            <a:avLst/>
+          </a:prstGeom>
+          <a:solidFill>
+            <a:srgbClr val="1E2761"/>
+          </a:solidFill>
+          <a:ln/>
+        </p:spPr>
+      </p:sp>
+      <p:sp>
+        <p:nvSpPr>
+          <p:cNvPr id="6" name="Text 4"/>
+          <p:cNvSpPr txBox="1"/>
+          <p:nvPr/>
+        </p:nvSpPr>
+        <p:spPr>
+          <a:xfrm>
+            <a:off x="731520" y="1517904"/>
+            <a:ext cx="384048" cy="384048"/>
+          </a:xfrm>
+          <a:prstGeom prst="rect">
+            <a:avLst/>
+          </a:prstGeom>
+          <a:noFill/>
+          <a:ln/>
+        </p:spPr>
+        <p:txBody>
+          <a:bodyPr wrap="square" lIns="0" tIns="0" rIns="0" bIns="0" rtlCol="0" anchor="ctr"/>
+          <a:lstStyle/>
+          <a:p>
+            <a:pPr algn="ctr" indent="0" marL="0">
+              <a:buNone/>
+            </a:pPr>
+            <a:r>
+              <a:rPr lang="en-US" sz="1800" b="1" dirty="0">
+                <a:solidFill>
+                  <a:srgbClr val="FFFFFF"/>
+                </a:solidFill>
+                <a:latin typeface="Calibri" pitchFamily="34" charset="0"/>
+                <a:ea typeface="Calibri" pitchFamily="34" charset="-122"/>
+                <a:cs typeface="Calibri" pitchFamily="34" charset="-120"/>
+              </a:rPr>
+              <a:t>1</a:t>
+            </a:r>
+            <a:endParaRPr lang="en-US" sz="1800" dirty="0"/>
+          </a:p>
+        </p:txBody>
+      </p:sp>
+      <p:sp>
+        <p:nvSpPr>
+          <p:cNvPr id="7" name="Text 5"/>
+          <p:cNvSpPr txBox="1"/>
+          <p:nvPr/>
+        </p:nvSpPr>
+        <p:spPr>
+          <a:xfrm>
+            <a:off x="1280160" y="1481328"/>
+            <a:ext cx="7269480" cy="868680"/>
+          </a:xfrm>
+          <a:prstGeom prst="rect">
+            <a:avLst/>
+          </a:prstGeom>
+          <a:noFill/>
+          <a:ln/>
+        </p:spPr>
+        <p:txBody>
+          <a:bodyPr wrap="square" lIns="0" tIns="0" rIns="0" bIns="0" rtlCol="0" anchor="t"/>
+          <a:lstStyle/>
+          <a:p>
+            <a:pPr indent="0" marL="0">
+              <a:buNone/>
+            </a:pPr>
+            <a:r>
+              <a:rPr lang="en-US" sz="2400" b="1" dirty="0">
+                <a:solidFill>
+                  <a:srgbClr val="1E2761"/>
+                </a:solidFill>
+                <a:latin typeface="Calibri" pitchFamily="34" charset="0"/>
+                <a:ea typeface="Calibri" pitchFamily="34" charset="-122"/>
+                <a:cs typeface="Calibri" pitchFamily="34" charset="-120"/>
+              </a:rPr>
+              <a:t>Schreibe Ü3 an den Rand. Betrachte die Karikatur.</a:t>
+            </a:r>
+            <a:endParaRPr lang="en-US" sz="2400" dirty="0"/>
+          </a:p>
+        </p:txBody>
+      </p:sp>
+      <p:sp>
+        <p:nvSpPr>
+          <p:cNvPr id="8" name="Shape 6"/>
+          <p:cNvSpPr/>
+          <p:nvPr/>
+        </p:nvSpPr>
+        <p:spPr>
+          <a:xfrm>
+            <a:off x="731520" y="2459736"/>
+            <a:ext cx="384048" cy="384048"/>
+          </a:xfrm>
+          <a:prstGeom prst="ellipse">
+            <a:avLst/>
+          </a:prstGeom>
+          <a:solidFill>
+            <a:srgbClr val="1E2761"/>
+          </a:solidFill>
+          <a:ln/>
+        </p:spPr>
+      </p:sp>
+      <p:sp>
+        <p:nvSpPr>
+          <p:cNvPr id="9" name="Text 7"/>
+          <p:cNvSpPr txBox="1"/>
+          <p:nvPr/>
+        </p:nvSpPr>
+        <p:spPr>
+          <a:xfrm>
+            <a:off x="731520" y="2459736"/>
+            <a:ext cx="384048" cy="384048"/>
+          </a:xfrm>
+          <a:prstGeom prst="rect">
+            <a:avLst/>
+          </a:prstGeom>
+          <a:noFill/>
+          <a:ln/>
+        </p:spPr>
+        <p:txBody>
+          <a:bodyPr wrap="square" lIns="0" tIns="0" rIns="0" bIns="0" rtlCol="0" anchor="ctr"/>
+          <a:lstStyle/>
+          <a:p>
+            <a:pPr algn="ctr" indent="0" marL="0">
+              <a:buNone/>
+            </a:pPr>
+            <a:r>
+              <a:rPr lang="en-US" sz="1800" b="1" dirty="0">
+                <a:solidFill>
+                  <a:srgbClr val="FFFFFF"/>
+                </a:solidFill>
+                <a:latin typeface="Calibri" pitchFamily="34" charset="0"/>
+                <a:ea typeface="Calibri" pitchFamily="34" charset="-122"/>
+                <a:cs typeface="Calibri" pitchFamily="34" charset="-120"/>
+              </a:rPr>
+              <a:t>2</a:t>
+            </a:r>
+            <a:endParaRPr lang="en-US" sz="1800" dirty="0"/>
+          </a:p>
+        </p:txBody>
+      </p:sp>
+      <p:sp>
+        <p:nvSpPr>
+          <p:cNvPr id="10" name="Text 8"/>
+          <p:cNvSpPr txBox="1"/>
+          <p:nvPr/>
+        </p:nvSpPr>
+        <p:spPr>
+          <a:xfrm>
+            <a:off x="1280160" y="2423160"/>
+            <a:ext cx="7269480" cy="1280160"/>
+          </a:xfrm>
+          <a:prstGeom prst="rect">
+            <a:avLst/>
+          </a:prstGeom>
+          <a:noFill/>
+          <a:ln/>
+        </p:spPr>
+        <p:txBody>
+          <a:bodyPr wrap="square" lIns="0" tIns="0" rIns="0" bIns="0" rtlCol="0" anchor="t"/>
+          <a:lstStyle/>
+          <a:p>
+            <a:pPr indent="0" marL="0">
+              <a:buNone/>
+            </a:pPr>
+            <a:r>
+              <a:rPr lang="en-US" sz="2400" b="1" dirty="0">
+                <a:solidFill>
+                  <a:srgbClr val="1E2761"/>
+                </a:solidFill>
+                <a:latin typeface="Calibri" pitchFamily="34" charset="0"/>
+                <a:ea typeface="Calibri" pitchFamily="34" charset="-122"/>
+                <a:cs typeface="Calibri" pitchFamily="34" charset="-120"/>
+              </a:rPr>
+              <a:t>Wähle einen Stand und beende den Satz: „Im Absolutismus fühle ich mich …, weil …“</a:t>
+            </a:r>
+            <a:endParaRPr lang="en-US" sz="2400" dirty="0"/>
+          </a:p>
+        </p:txBody>
+      </p:sp>
+      <p:sp>
+        <p:nvSpPr>
+          <p:cNvPr id="11" name="Shape 9"/>
+          <p:cNvSpPr/>
+          <p:nvPr/>
+        </p:nvSpPr>
+        <p:spPr>
+          <a:xfrm>
+            <a:off x="731520" y="3813048"/>
+            <a:ext cx="384048" cy="384048"/>
+          </a:xfrm>
+          <a:prstGeom prst="ellipse">
+            <a:avLst/>
+          </a:prstGeom>
+          <a:solidFill>
+            <a:srgbClr val="1E2761"/>
+          </a:solidFill>
+          <a:ln/>
+        </p:spPr>
+      </p:sp>
+      <p:sp>
+        <p:nvSpPr>
+          <p:cNvPr id="12" name="Text 10"/>
+          <p:cNvSpPr txBox="1"/>
+          <p:nvPr/>
+        </p:nvSpPr>
+        <p:spPr>
+          <a:xfrm>
+            <a:off x="731520" y="3813048"/>
+            <a:ext cx="384048" cy="384048"/>
+          </a:xfrm>
+          <a:prstGeom prst="rect">
+            <a:avLst/>
+          </a:prstGeom>
+          <a:noFill/>
+          <a:ln/>
+        </p:spPr>
+        <p:txBody>
+          <a:bodyPr wrap="square" lIns="0" tIns="0" rIns="0" bIns="0" rtlCol="0" anchor="ctr"/>
+          <a:lstStyle/>
+          <a:p>
+            <a:pPr algn="ctr" indent="0" marL="0">
+              <a:buNone/>
+            </a:pPr>
+            <a:r>
+              <a:rPr lang="en-US" sz="1800" b="1" dirty="0">
+                <a:solidFill>
+                  <a:srgbClr val="FFFFFF"/>
+                </a:solidFill>
+                <a:latin typeface="Calibri" pitchFamily="34" charset="0"/>
+                <a:ea typeface="Calibri" pitchFamily="34" charset="-122"/>
+                <a:cs typeface="Calibri" pitchFamily="34" charset="-120"/>
+              </a:rPr>
+              <a:t>3</a:t>
+            </a:r>
+            <a:endParaRPr lang="en-US" sz="1800" dirty="0"/>
+          </a:p>
+        </p:txBody>
+      </p:sp>
+      <p:sp>
+        <p:nvSpPr>
+          <p:cNvPr id="13" name="Text 11"/>
+          <p:cNvSpPr txBox="1"/>
+          <p:nvPr/>
+        </p:nvSpPr>
+        <p:spPr>
+          <a:xfrm>
+            <a:off x="1280160" y="3776472"/>
+            <a:ext cx="7269480" cy="868680"/>
+          </a:xfrm>
+          <a:prstGeom prst="rect">
+            <a:avLst/>
+          </a:prstGeom>
+          <a:noFill/>
+          <a:ln/>
+        </p:spPr>
+        <p:txBody>
+          <a:bodyPr wrap="square" lIns="0" tIns="0" rIns="0" bIns="0" rtlCol="0" anchor="t"/>
+          <a:lstStyle/>
+          <a:p>
+            <a:pPr indent="0" marL="0">
+              <a:buNone/>
+            </a:pPr>
+            <a:r>
+              <a:rPr lang="en-US" sz="2400" b="1" dirty="0">
+                <a:solidFill>
+                  <a:srgbClr val="1E2761"/>
+                </a:solidFill>
+                <a:latin typeface="Calibri" pitchFamily="34" charset="0"/>
+                <a:ea typeface="Calibri" pitchFamily="34" charset="-122"/>
+                <a:cs typeface="Calibri" pitchFamily="34" charset="-120"/>
+              </a:rPr>
+              <a:t>Nenne ein Recht und eine Pflicht deines Standes.</a:t>
+            </a:r>
+            <a:endParaRPr lang="en-US" sz="2400" dirty="0"/>
+          </a:p>
+        </p:txBody>
+      </p:sp>
+      <p:sp>
+        <p:nvSpPr>
+          <p:cNvPr id="14" name="Shape 12"/>
+          <p:cNvSpPr/>
+          <p:nvPr/>
+        </p:nvSpPr>
+        <p:spPr>
+          <a:xfrm>
+            <a:off x="548640" y="5669280"/>
+            <a:ext cx="11109960" cy="777240"/>
+          </a:xfrm>
+          <a:prstGeom prst="roundRect">
+            <a:avLst>
+              <a:gd name="adj" fmla="val 9412"/>
+            </a:avLst>
+          </a:prstGeom>
+          <a:solidFill>
+            <a:srgbClr val="1E2761"/>
+          </a:solidFill>
+          <a:ln/>
+        </p:spPr>
+      </p:sp>
+      <p:sp>
+        <p:nvSpPr>
+          <p:cNvPr id="15" name="Text 13"/>
+          <p:cNvSpPr txBox="1"/>
+          <p:nvPr/>
+        </p:nvSpPr>
+        <p:spPr>
+          <a:xfrm>
+            <a:off x="822960" y="5669280"/>
+            <a:ext cx="10607040" cy="777240"/>
+          </a:xfrm>
+          <a:prstGeom prst="rect">
+            <a:avLst/>
+          </a:prstGeom>
+          <a:noFill/>
+          <a:ln/>
+        </p:spPr>
+        <p:txBody>
+          <a:bodyPr wrap="square" lIns="0" tIns="0" rIns="0" bIns="0" rtlCol="0" anchor="ctr"/>
+          <a:lstStyle/>
+          <a:p>
+            <a:pPr indent="0" marL="0">
+              <a:buNone/>
+            </a:pPr>
+            <a:r>
+              <a:rPr lang="en-US" sz="2400" b="1" dirty="0">
+                <a:solidFill>
+                  <a:srgbClr val="FFFFFF"/>
+                </a:solidFill>
+                <a:latin typeface="Calibri" pitchFamily="34" charset="0"/>
+                <a:ea typeface="Calibri" pitchFamily="34" charset="-122"/>
+                <a:cs typeface="Calibri" pitchFamily="34" charset="-120"/>
+              </a:rPr>
+              <a:t>Zeit: </a:t>
+            </a:r>
+            <a:pPr indent="0" marL="0">
+              <a:buNone/>
+            </a:pPr>
+            <a:r>
+              <a:rPr lang="en-US" sz="2400" dirty="0">
+                <a:solidFill>
+                  <a:srgbClr val="FFFFFF"/>
+                </a:solidFill>
+                <a:latin typeface="Calibri" pitchFamily="34" charset="0"/>
+                <a:ea typeface="Calibri" pitchFamily="34" charset="-122"/>
+                <a:cs typeface="Calibri" pitchFamily="34" charset="-120"/>
+              </a:rPr>
+              <a:t>5 Minuten · allein · leise      </a:t>
+            </a:r>
+            <a:pPr indent="0" marL="0">
+              <a:buNone/>
+            </a:pPr>
+            <a:r>
+              <a:rPr lang="en-US" sz="2400" i="1" dirty="0">
+                <a:solidFill>
+                  <a:srgbClr val="CADCFC"/>
+                </a:solidFill>
+                <a:latin typeface="Calibri" pitchFamily="34" charset="0"/>
+                <a:ea typeface="Calibri" pitchFamily="34" charset="-122"/>
+                <a:cs typeface="Calibri" pitchFamily="34" charset="-120"/>
+              </a:rPr>
+              <a:t>Fertig? Stift hinlegen.</a:t>
+            </a:r>
+            <a:endParaRPr lang="en-US" sz="2400" dirty="0"/>
+          </a:p>
+        </p:txBody>
+      </p:sp>
+      <p:sp>
+        <p:nvSpPr>
+          <p:cNvPr id="16" name="Text 14"/>
+          <p:cNvSpPr txBox="1"/>
+          <p:nvPr/>
+        </p:nvSpPr>
+        <p:spPr>
+          <a:xfrm>
+            <a:off x="548640" y="6510528"/>
+            <a:ext cx="5486400" cy="228600"/>
+          </a:xfrm>
+          <a:prstGeom prst="rect">
+            <a:avLst/>
+          </a:prstGeom>
+          <a:noFill/>
+          <a:ln/>
+        </p:spPr>
+        <p:txBody>
+          <a:bodyPr wrap="square" lIns="0" tIns="0" rIns="0" bIns="0" rtlCol="0" anchor="t"/>
+          <a:lstStyle/>
+          <a:p>
+            <a:pPr indent="0" marL="0">
+              <a:buNone/>
+            </a:pPr>
+            <a:r>
+              <a:rPr lang="en-US" sz="1000" dirty="0">
+                <a:solidFill>
+                  <a:srgbClr val="5B6B8C"/>
+                </a:solidFill>
+                <a:latin typeface="Calibri" pitchFamily="34" charset="0"/>
+                <a:ea typeface="Calibri" pitchFamily="34" charset="-122"/>
+                <a:cs typeface="Calibri" pitchFamily="34" charset="-120"/>
+              </a:rPr>
+              <a:t>Absolutismus · Wiederholung · Geschichte 8</a:t>
+            </a:r>
+            <a:endParaRPr lang="en-US" sz="1000" dirty="0"/>
+          </a:p>
+        </p:txBody>
+      </p:sp>
+      <p:sp>
+        <p:nvSpPr>
+          <p:cNvPr id="17" name="Text 15"/>
+          <p:cNvSpPr txBox="1"/>
+          <p:nvPr/>
+        </p:nvSpPr>
+        <p:spPr>
+          <a:xfrm>
+            <a:off x="11155680" y="6510528"/>
+            <a:ext cx="457200" cy="228600"/>
+          </a:xfrm>
+          <a:prstGeom prst="rect">
+            <a:avLst/>
+          </a:prstGeom>
+          <a:noFill/>
+          <a:ln/>
+        </p:spPr>
+        <p:txBody>
+          <a:bodyPr wrap="square" lIns="0" tIns="0" rIns="0" bIns="0" rtlCol="0" anchor="t"/>
+          <a:lstStyle/>
+          <a:p>
+            <a:pPr algn="r" indent="0" marL="0">
+              <a:buNone/>
+            </a:pPr>
+            <a:r>
+              <a:rPr lang="en-US" sz="1000" dirty="0">
+                <a:solidFill>
+                  <a:srgbClr val="5B6B8C"/>
+                </a:solidFill>
+                <a:latin typeface="Calibri" pitchFamily="34" charset="0"/>
+                <a:ea typeface="Calibri" pitchFamily="34" charset="-122"/>
+                <a:cs typeface="Calibri" pitchFamily="34" charset="-120"/>
+              </a:rPr>
+              <a:t>21</a:t>
+            </a:r>
+            <a:endParaRPr lang="en-US" sz="1000" dirty="0"/>
+          </a:p>
+        </p:txBody>
+      </p:sp>
+      <p:pic>
+        <p:nvPicPr>
+          <p:cNvPr id="19" name="Image 0" descr="../material/karikatur_drei_staende.jpg">    </p:cNvPr>
+          <p:cNvPicPr>
+            <a:picLocks noChangeAspect="1"/>
+          </p:cNvPicPr>
+          <p:nvPr/>
+        </p:nvPicPr>
+        <p:blipFill>
+          <a:blip r:embed="rId1"/>
+          <a:stretch>
+            <a:fillRect/>
+          </a:stretch>
+        </p:blipFill>
+        <p:spPr>
+          <a:xfrm>
+            <a:off x="8869680" y="1371600"/>
+            <a:ext cx="2788920" cy="3456432"/>
+          </a:xfrm>
+          <a:prstGeom prst="rect">
+            <a:avLst/>
+          </a:prstGeom>
+        </p:spPr>
+      </p:pic>
+      <p:sp>
+        <p:nvSpPr>
+          <p:cNvPr id="20" name="Shape 16"/>
+          <p:cNvSpPr/>
+          <p:nvPr/>
+        </p:nvSpPr>
+        <p:spPr>
+          <a:xfrm>
+            <a:off x="548640" y="5029200"/>
+            <a:ext cx="11109960" cy="731520"/>
+          </a:xfrm>
+          <a:prstGeom prst="roundRect">
+            <a:avLst>
+              <a:gd name="adj" fmla="val 10000"/>
+            </a:avLst>
+          </a:prstGeom>
+          <a:solidFill>
+            <a:srgbClr val="F4F7FD"/>
+          </a:solidFill>
+          <a:ln/>
+        </p:spPr>
+      </p:sp>
+      <p:sp>
+        <p:nvSpPr>
+          <p:cNvPr id="21" name="Text 17"/>
+          <p:cNvSpPr txBox="1"/>
+          <p:nvPr/>
+        </p:nvSpPr>
+        <p:spPr>
+          <a:xfrm>
+            <a:off x="822960" y="5029200"/>
+            <a:ext cx="10607040" cy="731520"/>
+          </a:xfrm>
+          <a:prstGeom prst="rect">
+            <a:avLst/>
+          </a:prstGeom>
+          <a:noFill/>
+          <a:ln/>
+        </p:spPr>
+        <p:txBody>
+          <a:bodyPr wrap="square" lIns="0" tIns="0" rIns="0" bIns="0" rtlCol="0" anchor="ctr"/>
+          <a:lstStyle/>
+          <a:p>
+            <a:pPr indent="0" marL="0">
+              <a:buNone/>
+            </a:pPr>
+            <a:r>
+              <a:rPr lang="en-US" sz="2400" dirty="0">
+                <a:solidFill>
+                  <a:srgbClr val="1E2761"/>
+                </a:solidFill>
+                <a:latin typeface="Cambria" pitchFamily="34" charset="0"/>
+                <a:ea typeface="Cambria" pitchFamily="34" charset="-122"/>
+                <a:cs typeface="Cambria" pitchFamily="34" charset="-120"/>
+              </a:rPr>
+              <a:t>Klerus (Geistliche) · Adel · Dritter Stand (Bauern und Bürger)</a:t>
+            </a:r>
+            <a:endParaRPr lang="en-US" sz="2400" dirty="0"/>
+          </a:p>
+        </p:txBody>
+      </p:sp>
+    </p:spTree>
+  </p:cSld>
+  <p:clrMapOvr>
+    <a:masterClrMapping/>
+  </p:clrMapOvr>
+</p:sld>
+</file>
+
+<file path=ppt/slides/slide22.xml><?xml version="1.0" encoding="utf-8"?>
+<p:sld xmlns:a="http://schemas.openxmlformats.org/drawingml/2006/main" xmlns:r="http://schemas.openxmlformats.org/officeDocument/2006/relationships" xmlns:p="http://schemas.openxmlformats.org/presentationml/2006/main">
+  <p:cSld name="Slide 22">
+    <p:bg>
+      <p:bgPr>
+        <a:solidFill>
+          <a:srgbClr val="FFFFFF"/>
+        </a:solidFill>
+      </p:bgPr>
+    </p:bg>
+    <p:spTree>
+      <p:nvGrpSpPr>
+        <p:cNvPr id="1" name=""/>
+        <p:cNvGrpSpPr/>
+        <p:nvPr/>
+      </p:nvGrpSpPr>
+      <p:grpSpPr>
+        <a:xfrm>
+          <a:off x="0" y="0"/>
+          <a:ext cx="0" cy="0"/>
+          <a:chOff x="0" y="0"/>
+          <a:chExt cx="0" cy="0"/>
+        </a:xfrm>
+      </p:grpSpPr>
+      <p:sp>
+        <p:nvSpPr>
+          <p:cNvPr id="2" name="Text 0"/>
+          <p:cNvSpPr txBox="1"/>
+          <p:nvPr/>
+        </p:nvSpPr>
+        <p:spPr>
+          <a:xfrm>
+            <a:off x="548640" y="320040"/>
+            <a:ext cx="9144000" cy="274320"/>
+          </a:xfrm>
+          <a:prstGeom prst="rect">
+            <a:avLst/>
+          </a:prstGeom>
+          <a:noFill/>
+          <a:ln/>
+        </p:spPr>
+        <p:txBody>
+          <a:bodyPr wrap="square" lIns="0" tIns="0" rIns="0" bIns="0" rtlCol="0" anchor="t"/>
+          <a:lstStyle/>
+          <a:p>
+            <a:pPr indent="0" marL="0">
+              <a:buNone/>
+            </a:pPr>
+            <a:r>
+              <a:rPr lang="en-US" sz="1300" b="1" spc="200" kern="0" dirty="0">
+                <a:solidFill>
+                  <a:srgbClr val="5B6B8C"/>
+                </a:solidFill>
+                <a:latin typeface="Calibri" pitchFamily="34" charset="0"/>
+                <a:ea typeface="Calibri" pitchFamily="34" charset="-122"/>
+                <a:cs typeface="Calibri" pitchFamily="34" charset="-120"/>
+              </a:rPr>
+              <a:t>ZUM SCHLUSS · STIFTE LIEGEN</a:t>
+            </a:r>
+            <a:endParaRPr lang="en-US" sz="1300" dirty="0"/>
+          </a:p>
+        </p:txBody>
+      </p:sp>
+      <p:sp>
+        <p:nvSpPr>
+          <p:cNvPr id="3" name="Text 1"/>
+          <p:cNvSpPr txBox="1"/>
+          <p:nvPr/>
+        </p:nvSpPr>
+        <p:spPr>
+          <a:xfrm>
+            <a:off x="548640" y="594360"/>
+            <a:ext cx="11064240" cy="685800"/>
+          </a:xfrm>
+          <a:prstGeom prst="rect">
+            <a:avLst/>
+          </a:prstGeom>
+          <a:noFill/>
+          <a:ln/>
+        </p:spPr>
+        <p:txBody>
+          <a:bodyPr wrap="square" lIns="0" tIns="0" rIns="0" bIns="0" rtlCol="0" anchor="t"/>
+          <a:lstStyle/>
+          <a:p>
+            <a:pPr indent="0" marL="0">
+              <a:buNone/>
+            </a:pPr>
+            <a:r>
+              <a:rPr lang="en-US" sz="3400" b="1" dirty="0">
+                <a:solidFill>
+                  <a:srgbClr val="1E2761"/>
+                </a:solidFill>
+                <a:latin typeface="Cambria" pitchFamily="34" charset="0"/>
+                <a:ea typeface="Cambria" pitchFamily="34" charset="-122"/>
+                <a:cs typeface="Cambria" pitchFamily="34" charset="-120"/>
+              </a:rPr>
+              <a:t>So lernst du bis zum Test</a:t>
+            </a:r>
+            <a:endParaRPr lang="en-US" sz="3400" dirty="0"/>
+          </a:p>
+        </p:txBody>
+      </p:sp>
+      <p:sp>
+        <p:nvSpPr>
+          <p:cNvPr id="4" name="Shape 2"/>
+          <p:cNvSpPr/>
+          <p:nvPr/>
+        </p:nvSpPr>
+        <p:spPr>
+          <a:xfrm>
+            <a:off x="548640" y="1554480"/>
+            <a:ext cx="11109960" cy="822960"/>
+          </a:xfrm>
+          <a:prstGeom prst="roundRect">
+            <a:avLst>
+              <a:gd name="adj" fmla="val 8889"/>
+            </a:avLst>
+          </a:prstGeom>
+          <a:solidFill>
+            <a:srgbClr val="EAF0FA"/>
+          </a:solidFill>
+          <a:ln/>
+        </p:spPr>
+      </p:sp>
+      <p:sp>
+        <p:nvSpPr>
+          <p:cNvPr id="5" name="Shape 3"/>
+          <p:cNvSpPr/>
+          <p:nvPr/>
+        </p:nvSpPr>
+        <p:spPr>
+          <a:xfrm>
+            <a:off x="777240" y="1737360"/>
+            <a:ext cx="457200" cy="457200"/>
+          </a:xfrm>
+          <a:prstGeom prst="ellipse">
+            <a:avLst/>
+          </a:prstGeom>
+          <a:solidFill>
+            <a:srgbClr val="D9534F"/>
+          </a:solidFill>
+          <a:ln/>
+        </p:spPr>
+      </p:sp>
+      <p:sp>
+        <p:nvSpPr>
+          <p:cNvPr id="6" name="Text 4"/>
+          <p:cNvSpPr txBox="1"/>
+          <p:nvPr/>
+        </p:nvSpPr>
+        <p:spPr>
+          <a:xfrm>
+            <a:off x="777240" y="1737360"/>
+            <a:ext cx="457200" cy="457200"/>
+          </a:xfrm>
+          <a:prstGeom prst="rect">
+            <a:avLst/>
+          </a:prstGeom>
+          <a:noFill/>
+          <a:ln/>
+        </p:spPr>
+        <p:txBody>
+          <a:bodyPr wrap="square" lIns="0" tIns="0" rIns="0" bIns="0" rtlCol="0" anchor="ctr"/>
+          <a:lstStyle/>
+          <a:p>
+            <a:pPr algn="ctr" indent="0" marL="0">
+              <a:buNone/>
+            </a:pPr>
+            <a:r>
+              <a:rPr lang="en-US" sz="1800" b="1" dirty="0">
+                <a:solidFill>
+                  <a:srgbClr val="FFFFFF"/>
+                </a:solidFill>
+                <a:latin typeface="Calibri" pitchFamily="34" charset="0"/>
+                <a:ea typeface="Calibri" pitchFamily="34" charset="-122"/>
+                <a:cs typeface="Calibri" pitchFamily="34" charset="-120"/>
+              </a:rPr>
+              <a:t>1</a:t>
+            </a:r>
+            <a:endParaRPr lang="en-US" sz="1800" dirty="0"/>
+          </a:p>
+        </p:txBody>
+      </p:sp>
+      <p:sp>
+        <p:nvSpPr>
+          <p:cNvPr id="7" name="Text 5"/>
+          <p:cNvSpPr txBox="1"/>
+          <p:nvPr/>
+        </p:nvSpPr>
+        <p:spPr>
+          <a:xfrm>
+            <a:off x="1463040" y="1554480"/>
+            <a:ext cx="9966960" cy="822960"/>
+          </a:xfrm>
+          <a:prstGeom prst="rect">
+            <a:avLst/>
+          </a:prstGeom>
+          <a:noFill/>
+          <a:ln/>
+        </p:spPr>
+        <p:txBody>
+          <a:bodyPr wrap="square" lIns="0" tIns="0" rIns="0" bIns="0" rtlCol="0" anchor="ctr"/>
+          <a:lstStyle/>
+          <a:p>
+            <a:pPr indent="0" marL="0">
+              <a:buNone/>
+            </a:pPr>
+            <a:r>
+              <a:rPr lang="en-US" sz="2400" dirty="0">
+                <a:solidFill>
+                  <a:srgbClr val="1E2761"/>
+                </a:solidFill>
+                <a:latin typeface="Cambria" pitchFamily="34" charset="0"/>
+                <a:ea typeface="Cambria" pitchFamily="34" charset="-122"/>
+                <a:cs typeface="Cambria" pitchFamily="34" charset="-120"/>
+              </a:rPr>
+              <a:t>Merksatz 2 auswendig: Was bedeutet Absolutismus?</a:t>
+            </a:r>
+            <a:endParaRPr lang="en-US" sz="2400" dirty="0"/>
+          </a:p>
+        </p:txBody>
+      </p:sp>
+      <p:sp>
+        <p:nvSpPr>
+          <p:cNvPr id="8" name="Shape 6"/>
+          <p:cNvSpPr/>
+          <p:nvPr/>
+        </p:nvSpPr>
+        <p:spPr>
+          <a:xfrm>
+            <a:off x="548640" y="2514600"/>
+            <a:ext cx="11109960" cy="822960"/>
+          </a:xfrm>
+          <a:prstGeom prst="roundRect">
+            <a:avLst>
+              <a:gd name="adj" fmla="val 8889"/>
+            </a:avLst>
+          </a:prstGeom>
+          <a:solidFill>
+            <a:srgbClr val="F4F7FD"/>
+          </a:solidFill>
+          <a:ln/>
+        </p:spPr>
+      </p:sp>
+      <p:sp>
+        <p:nvSpPr>
+          <p:cNvPr id="9" name="Shape 7"/>
+          <p:cNvSpPr/>
+          <p:nvPr/>
+        </p:nvSpPr>
+        <p:spPr>
+          <a:xfrm>
+            <a:off x="777240" y="2697480"/>
+            <a:ext cx="457200" cy="457200"/>
+          </a:xfrm>
+          <a:prstGeom prst="ellipse">
+            <a:avLst/>
+          </a:prstGeom>
+          <a:solidFill>
+            <a:srgbClr val="D9534F"/>
+          </a:solidFill>
+          <a:ln/>
+        </p:spPr>
+      </p:sp>
+      <p:sp>
+        <p:nvSpPr>
+          <p:cNvPr id="10" name="Text 8"/>
+          <p:cNvSpPr txBox="1"/>
+          <p:nvPr/>
+        </p:nvSpPr>
+        <p:spPr>
+          <a:xfrm>
+            <a:off x="777240" y="2697480"/>
+            <a:ext cx="457200" cy="457200"/>
+          </a:xfrm>
+          <a:prstGeom prst="rect">
+            <a:avLst/>
+          </a:prstGeom>
+          <a:noFill/>
+          <a:ln/>
+        </p:spPr>
+        <p:txBody>
+          <a:bodyPr wrap="square" lIns="0" tIns="0" rIns="0" bIns="0" rtlCol="0" anchor="ctr"/>
+          <a:lstStyle/>
+          <a:p>
+            <a:pPr algn="ctr" indent="0" marL="0">
+              <a:buNone/>
+            </a:pPr>
+            <a:r>
+              <a:rPr lang="en-US" sz="1800" b="1" dirty="0">
+                <a:solidFill>
+                  <a:srgbClr val="FFFFFF"/>
+                </a:solidFill>
+                <a:latin typeface="Calibri" pitchFamily="34" charset="0"/>
+                <a:ea typeface="Calibri" pitchFamily="34" charset="-122"/>
+                <a:cs typeface="Calibri" pitchFamily="34" charset="-120"/>
+              </a:rPr>
+              <a:t>2</a:t>
+            </a:r>
+            <a:endParaRPr lang="en-US" sz="1800" dirty="0"/>
+          </a:p>
+        </p:txBody>
+      </p:sp>
+      <p:sp>
+        <p:nvSpPr>
+          <p:cNvPr id="11" name="Text 9"/>
+          <p:cNvSpPr txBox="1"/>
+          <p:nvPr/>
+        </p:nvSpPr>
+        <p:spPr>
+          <a:xfrm>
+            <a:off x="1463040" y="2514600"/>
+            <a:ext cx="9966960" cy="822960"/>
+          </a:xfrm>
+          <a:prstGeom prst="rect">
+            <a:avLst/>
+          </a:prstGeom>
+          <a:noFill/>
+          <a:ln/>
+        </p:spPr>
+        <p:txBody>
+          <a:bodyPr wrap="square" lIns="0" tIns="0" rIns="0" bIns="0" rtlCol="0" anchor="ctr"/>
+          <a:lstStyle/>
+          <a:p>
+            <a:pPr indent="0" marL="0">
+              <a:buNone/>
+            </a:pPr>
+            <a:r>
+              <a:rPr lang="en-US" sz="2400" dirty="0">
+                <a:solidFill>
+                  <a:srgbClr val="1E2761"/>
+                </a:solidFill>
+                <a:latin typeface="Cambria" pitchFamily="34" charset="0"/>
+                <a:ea typeface="Cambria" pitchFamily="34" charset="-122"/>
+                <a:cs typeface="Cambria" pitchFamily="34" charset="-120"/>
+              </a:rPr>
+              <a:t>Lückentext noch einmal ohne Wortspeicher ausfüllen</a:t>
+            </a:r>
+            <a:endParaRPr lang="en-US" sz="2400" dirty="0"/>
+          </a:p>
+        </p:txBody>
+      </p:sp>
+      <p:sp>
+        <p:nvSpPr>
+          <p:cNvPr id="12" name="Shape 10"/>
+          <p:cNvSpPr/>
+          <p:nvPr/>
+        </p:nvSpPr>
+        <p:spPr>
+          <a:xfrm>
+            <a:off x="548640" y="3474720"/>
+            <a:ext cx="11109960" cy="822960"/>
+          </a:xfrm>
+          <a:prstGeom prst="roundRect">
+            <a:avLst>
+              <a:gd name="adj" fmla="val 8889"/>
+            </a:avLst>
+          </a:prstGeom>
+          <a:solidFill>
+            <a:srgbClr val="EAF0FA"/>
+          </a:solidFill>
+          <a:ln/>
+        </p:spPr>
+      </p:sp>
+      <p:sp>
+        <p:nvSpPr>
+          <p:cNvPr id="13" name="Shape 11"/>
+          <p:cNvSpPr/>
+          <p:nvPr/>
+        </p:nvSpPr>
+        <p:spPr>
+          <a:xfrm>
+            <a:off x="777240" y="3657600"/>
+            <a:ext cx="457200" cy="457200"/>
+          </a:xfrm>
+          <a:prstGeom prst="ellipse">
+            <a:avLst/>
+          </a:prstGeom>
+          <a:solidFill>
+            <a:srgbClr val="D9534F"/>
+          </a:solidFill>
+          <a:ln/>
+        </p:spPr>
+      </p:sp>
+      <p:sp>
+        <p:nvSpPr>
+          <p:cNvPr id="14" name="Text 12"/>
+          <p:cNvSpPr txBox="1"/>
+          <p:nvPr/>
+        </p:nvSpPr>
+        <p:spPr>
+          <a:xfrm>
+            <a:off x="777240" y="3657600"/>
+            <a:ext cx="457200" cy="457200"/>
+          </a:xfrm>
+          <a:prstGeom prst="rect">
+            <a:avLst/>
+          </a:prstGeom>
+          <a:noFill/>
+          <a:ln/>
+        </p:spPr>
+        <p:txBody>
+          <a:bodyPr wrap="square" lIns="0" tIns="0" rIns="0" bIns="0" rtlCol="0" anchor="ctr"/>
+          <a:lstStyle/>
+          <a:p>
+            <a:pPr algn="ctr" indent="0" marL="0">
+              <a:buNone/>
+            </a:pPr>
+            <a:r>
+              <a:rPr lang="en-US" sz="1800" b="1" dirty="0">
+                <a:solidFill>
+                  <a:srgbClr val="FFFFFF"/>
+                </a:solidFill>
+                <a:latin typeface="Calibri" pitchFamily="34" charset="0"/>
+                <a:ea typeface="Calibri" pitchFamily="34" charset="-122"/>
+                <a:cs typeface="Calibri" pitchFamily="34" charset="-120"/>
+              </a:rPr>
+              <a:t>3</a:t>
+            </a:r>
+            <a:endParaRPr lang="en-US" sz="1800" dirty="0"/>
+          </a:p>
+        </p:txBody>
+      </p:sp>
+      <p:sp>
+        <p:nvSpPr>
+          <p:cNvPr id="15" name="Text 13"/>
+          <p:cNvSpPr txBox="1"/>
+          <p:nvPr/>
+        </p:nvSpPr>
+        <p:spPr>
+          <a:xfrm>
+            <a:off x="1463040" y="3474720"/>
+            <a:ext cx="9966960" cy="822960"/>
+          </a:xfrm>
+          <a:prstGeom prst="rect">
+            <a:avLst/>
+          </a:prstGeom>
+          <a:noFill/>
+          <a:ln/>
+        </p:spPr>
+        <p:txBody>
+          <a:bodyPr wrap="square" lIns="0" tIns="0" rIns="0" bIns="0" rtlCol="0" anchor="ctr"/>
+          <a:lstStyle/>
+          <a:p>
+            <a:pPr indent="0" marL="0">
+              <a:buNone/>
+            </a:pPr>
+            <a:r>
+              <a:rPr lang="en-US" sz="2400" dirty="0">
+                <a:solidFill>
+                  <a:srgbClr val="1E2761"/>
+                </a:solidFill>
+                <a:latin typeface="Cambria" pitchFamily="34" charset="0"/>
+                <a:ea typeface="Cambria" pitchFamily="34" charset="-122"/>
+                <a:cs typeface="Cambria" pitchFamily="34" charset="-120"/>
+              </a:rPr>
+              <a:t>Tabelle Ständegesellschaft aus dem Kopf aufschreiben</a:t>
+            </a:r>
+            <a:endParaRPr lang="en-US" sz="2400" dirty="0"/>
+          </a:p>
+        </p:txBody>
+      </p:sp>
+      <p:sp>
+        <p:nvSpPr>
+          <p:cNvPr id="16" name="Shape 14"/>
+          <p:cNvSpPr/>
+          <p:nvPr/>
+        </p:nvSpPr>
+        <p:spPr>
+          <a:xfrm>
+            <a:off x="548640" y="4434840"/>
+            <a:ext cx="11109960" cy="822960"/>
+          </a:xfrm>
+          <a:prstGeom prst="roundRect">
+            <a:avLst>
+              <a:gd name="adj" fmla="val 8889"/>
+            </a:avLst>
+          </a:prstGeom>
+          <a:solidFill>
+            <a:srgbClr val="F4F7FD"/>
+          </a:solidFill>
+          <a:ln/>
+        </p:spPr>
+      </p:sp>
+      <p:sp>
+        <p:nvSpPr>
+          <p:cNvPr id="17" name="Shape 15"/>
+          <p:cNvSpPr/>
+          <p:nvPr/>
+        </p:nvSpPr>
+        <p:spPr>
+          <a:xfrm>
+            <a:off x="777240" y="4617720"/>
+            <a:ext cx="457200" cy="457200"/>
+          </a:xfrm>
+          <a:prstGeom prst="ellipse">
+            <a:avLst/>
+          </a:prstGeom>
+          <a:solidFill>
+            <a:srgbClr val="D9534F"/>
+          </a:solidFill>
+          <a:ln/>
+        </p:spPr>
+      </p:sp>
+      <p:sp>
+        <p:nvSpPr>
+          <p:cNvPr id="18" name="Text 16"/>
+          <p:cNvSpPr txBox="1"/>
+          <p:nvPr/>
+        </p:nvSpPr>
+        <p:spPr>
+          <a:xfrm>
+            <a:off x="777240" y="4617720"/>
+            <a:ext cx="457200" cy="457200"/>
+          </a:xfrm>
+          <a:prstGeom prst="rect">
+            <a:avLst/>
+          </a:prstGeom>
+          <a:noFill/>
+          <a:ln/>
+        </p:spPr>
+        <p:txBody>
+          <a:bodyPr wrap="square" lIns="0" tIns="0" rIns="0" bIns="0" rtlCol="0" anchor="ctr"/>
+          <a:lstStyle/>
+          <a:p>
+            <a:pPr algn="ctr" indent="0" marL="0">
+              <a:buNone/>
+            </a:pPr>
+            <a:r>
+              <a:rPr lang="en-US" sz="1800" b="1" dirty="0">
+                <a:solidFill>
+                  <a:srgbClr val="FFFFFF"/>
+                </a:solidFill>
+                <a:latin typeface="Calibri" pitchFamily="34" charset="0"/>
+                <a:ea typeface="Calibri" pitchFamily="34" charset="-122"/>
+                <a:cs typeface="Calibri" pitchFamily="34" charset="-120"/>
+              </a:rPr>
+              <a:t>4</a:t>
+            </a:r>
+            <a:endParaRPr lang="en-US" sz="1800" dirty="0"/>
+          </a:p>
+        </p:txBody>
+      </p:sp>
+      <p:sp>
+        <p:nvSpPr>
+          <p:cNvPr id="19" name="Text 17"/>
+          <p:cNvSpPr txBox="1"/>
+          <p:nvPr/>
+        </p:nvSpPr>
+        <p:spPr>
+          <a:xfrm>
+            <a:off x="1463040" y="4434840"/>
+            <a:ext cx="9966960" cy="822960"/>
+          </a:xfrm>
+          <a:prstGeom prst="rect">
+            <a:avLst/>
+          </a:prstGeom>
+          <a:noFill/>
+          <a:ln/>
+        </p:spPr>
+        <p:txBody>
+          <a:bodyPr wrap="square" lIns="0" tIns="0" rIns="0" bIns="0" rtlCol="0" anchor="ctr"/>
+          <a:lstStyle/>
+          <a:p>
+            <a:pPr indent="0" marL="0">
+              <a:buNone/>
+            </a:pPr>
+            <a:r>
+              <a:rPr lang="en-US" sz="2400" dirty="0">
+                <a:solidFill>
+                  <a:srgbClr val="1E2761"/>
+                </a:solidFill>
+                <a:latin typeface="Cambria" pitchFamily="34" charset="0"/>
+                <a:ea typeface="Cambria" pitchFamily="34" charset="-122"/>
+                <a:cs typeface="Cambria" pitchFamily="34" charset="-120"/>
+              </a:rPr>
+              <a:t>Deinen Ü3-Satz zu einem zweiten Stand noch einmal schreiben</a:t>
+            </a:r>
+            <a:endParaRPr lang="en-US" sz="2400" dirty="0"/>
+          </a:p>
+        </p:txBody>
+      </p:sp>
+      <p:sp>
+        <p:nvSpPr>
+          <p:cNvPr id="20" name="Shape 18"/>
+          <p:cNvSpPr/>
+          <p:nvPr/>
+        </p:nvSpPr>
+        <p:spPr>
+          <a:xfrm>
+            <a:off x="548640" y="5669280"/>
+            <a:ext cx="11109960" cy="777240"/>
+          </a:xfrm>
+          <a:prstGeom prst="roundRect">
+            <a:avLst>
+              <a:gd name="adj" fmla="val 9412"/>
+            </a:avLst>
+          </a:prstGeom>
+          <a:solidFill>
+            <a:srgbClr val="1E2761"/>
+          </a:solidFill>
+          <a:ln/>
+        </p:spPr>
+      </p:sp>
+      <p:sp>
+        <p:nvSpPr>
+          <p:cNvPr id="21" name="Text 19"/>
+          <p:cNvSpPr txBox="1"/>
+          <p:nvPr/>
+        </p:nvSpPr>
+        <p:spPr>
+          <a:xfrm>
+            <a:off x="822960" y="5669280"/>
+            <a:ext cx="10607040" cy="777240"/>
+          </a:xfrm>
+          <a:prstGeom prst="rect">
+            <a:avLst/>
+          </a:prstGeom>
+          <a:noFill/>
+          <a:ln/>
+        </p:spPr>
+        <p:txBody>
+          <a:bodyPr wrap="square" lIns="0" tIns="0" rIns="0" bIns="0" rtlCol="0" anchor="ctr"/>
+          <a:lstStyle/>
+          <a:p>
+            <a:pPr indent="0" marL="0">
+              <a:buNone/>
+            </a:pPr>
+            <a:r>
+              <a:rPr lang="en-US" sz="2400" b="1" dirty="0">
+                <a:solidFill>
+                  <a:srgbClr val="FFFFFF"/>
+                </a:solidFill>
+                <a:latin typeface="Calibri" pitchFamily="34" charset="0"/>
+                <a:ea typeface="Calibri" pitchFamily="34" charset="-122"/>
+                <a:cs typeface="Calibri" pitchFamily="34" charset="-120"/>
+              </a:rPr>
+              <a:t>Test: </a:t>
+            </a:r>
+            <a:pPr indent="0" marL="0">
+              <a:buNone/>
+            </a:pPr>
+            <a:r>
+              <a:rPr lang="en-US" sz="2400" dirty="0">
+                <a:solidFill>
+                  <a:srgbClr val="FFFFFF"/>
+                </a:solidFill>
+                <a:latin typeface="Calibri" pitchFamily="34" charset="0"/>
+                <a:ea typeface="Calibri" pitchFamily="34" charset="-122"/>
+                <a:cs typeface="Calibri" pitchFamily="34" charset="-120"/>
+              </a:rPr>
+              <a:t>nächste Woche · Ständegesellschaft · Absolutismus · fünf Säulen</a:t>
+            </a:r>
+            <a:endParaRPr lang="en-US" sz="2400" dirty="0"/>
+          </a:p>
+        </p:txBody>
+      </p:sp>
+      <p:sp>
+        <p:nvSpPr>
+          <p:cNvPr id="22" name="Text 20"/>
+          <p:cNvSpPr txBox="1"/>
+          <p:nvPr/>
+        </p:nvSpPr>
+        <p:spPr>
+          <a:xfrm>
+            <a:off x="548640" y="6510528"/>
+            <a:ext cx="5486400" cy="228600"/>
+          </a:xfrm>
+          <a:prstGeom prst="rect">
+            <a:avLst/>
+          </a:prstGeom>
+          <a:noFill/>
+          <a:ln/>
+        </p:spPr>
+        <p:txBody>
+          <a:bodyPr wrap="square" lIns="0" tIns="0" rIns="0" bIns="0" rtlCol="0" anchor="t"/>
+          <a:lstStyle/>
+          <a:p>
+            <a:pPr indent="0" marL="0">
+              <a:buNone/>
+            </a:pPr>
+            <a:r>
+              <a:rPr lang="en-US" sz="1000" dirty="0">
+                <a:solidFill>
+                  <a:srgbClr val="5B6B8C"/>
+                </a:solidFill>
+                <a:latin typeface="Calibri" pitchFamily="34" charset="0"/>
+                <a:ea typeface="Calibri" pitchFamily="34" charset="-122"/>
+                <a:cs typeface="Calibri" pitchFamily="34" charset="-120"/>
+              </a:rPr>
+              <a:t>Absolutismus · Wiederholung · Geschichte 8</a:t>
+            </a:r>
+            <a:endParaRPr lang="en-US" sz="1000" dirty="0"/>
+          </a:p>
+        </p:txBody>
+      </p:sp>
+      <p:sp>
+        <p:nvSpPr>
+          <p:cNvPr id="23" name="Text 21"/>
+          <p:cNvSpPr txBox="1"/>
+          <p:nvPr/>
+        </p:nvSpPr>
+        <p:spPr>
+          <a:xfrm>
+            <a:off x="11155680" y="6510528"/>
+            <a:ext cx="457200" cy="228600"/>
+          </a:xfrm>
+          <a:prstGeom prst="rect">
+            <a:avLst/>
+          </a:prstGeom>
+          <a:noFill/>
+          <a:ln/>
+        </p:spPr>
+        <p:txBody>
+          <a:bodyPr wrap="square" lIns="0" tIns="0" rIns="0" bIns="0" rtlCol="0" anchor="t"/>
+          <a:lstStyle/>
+          <a:p>
+            <a:pPr algn="r" indent="0" marL="0">
+              <a:buNone/>
+            </a:pPr>
+            <a:r>
+              <a:rPr lang="en-US" sz="1000" dirty="0">
+                <a:solidFill>
+                  <a:srgbClr val="5B6B8C"/>
+                </a:solidFill>
+                <a:latin typeface="Calibri" pitchFamily="34" charset="0"/>
+                <a:ea typeface="Calibri" pitchFamily="34" charset="-122"/>
+                <a:cs typeface="Calibri" pitchFamily="34" charset="-120"/>
+              </a:rPr>
+              <a:t>22</a:t>
             </a:r>
             <a:endParaRPr lang="en-US" sz="1000" dirty="0"/>
           </a:p>
